--- a/Bases de Datos II/Clases/Clase 15 - Presentacion del proyecto y cierre/Presentacion.pptx
+++ b/Bases de Datos II/Clases/Clase 15 - Presentacion del proyecto y cierre/Presentacion.pptx
@@ -19,6 +19,19 @@
     <p:sldId id="267" r:id="rId18"/>
     <p:sldId id="268" r:id="rId19"/>
     <p:sldId id="269" r:id="rId20"/>
+    <p:sldId id="270" r:id="rId21"/>
+    <p:sldId id="271" r:id="rId22"/>
+    <p:sldId id="272" r:id="rId23"/>
+    <p:sldId id="273" r:id="rId24"/>
+    <p:sldId id="274" r:id="rId25"/>
+    <p:sldId id="275" r:id="rId26"/>
+    <p:sldId id="276" r:id="rId27"/>
+    <p:sldId id="277" r:id="rId28"/>
+    <p:sldId id="278" r:id="rId29"/>
+    <p:sldId id="279" r:id="rId30"/>
+    <p:sldId id="280" r:id="rId31"/>
+    <p:sldId id="281" r:id="rId32"/>
+    <p:sldId id="282" r:id="rId33"/>
   </p:sldIdLst>
   <p:sldSz cx="12191695" cy="6858000" type="screen4x3"/>
   <p:notesSz cx="6858000" cy="9144000"/>
@@ -3619,111 +3632,21 @@
                 </a:solidFill>
                 <a:latin typeface="Calibri"/>
               </a:rPr>
-              <a:t>Sustentacion del PI — pasos guiados</a:t>
-            </a:r>
-          </a:p>
-        </p:txBody>
-      </p:sp>
-      <p:sp>
-        <p:nvSpPr>
-          <p:cNvPr id="5" name="Rounded Rectangle 4"/>
-          <p:cNvSpPr/>
-          <p:nvPr/>
-        </p:nvSpPr>
-        <p:spPr>
-          <a:xfrm>
-            <a:off x="457200" y="1234440"/>
-            <a:ext cx="11277295" cy="950976"/>
-          </a:xfrm>
-          <a:prstGeom prst="roundRect">
-            <a:avLst>
-              <a:gd name="adj" fmla="val 12000"/>
-            </a:avLst>
-          </a:prstGeom>
-          <a:solidFill>
-            <a:srgbClr val="F2F2F2"/>
-          </a:solidFill>
-          <a:ln>
-            <a:noFill/>
-          </a:ln>
-        </p:spPr>
-        <p:style>
-          <a:lnRef idx="1">
-            <a:schemeClr val="accent1"/>
-          </a:lnRef>
-          <a:fillRef idx="3">
-            <a:schemeClr val="accent1"/>
-          </a:fillRef>
-          <a:effectRef idx="2">
-            <a:schemeClr val="accent1"/>
-          </a:effectRef>
-          <a:fontRef idx="minor">
-            <a:schemeClr val="lt1"/>
-          </a:fontRef>
-        </p:style>
-        <p:txBody>
-          <a:bodyPr rtlCol="0" anchor="ctr"/>
-          <a:lstStyle/>
-          <a:p>
-            <a:pPr algn="ctr"/>
-          </a:p>
-        </p:txBody>
-      </p:sp>
-      <p:sp>
-        <p:nvSpPr>
-          <p:cNvPr id="6" name="Rounded Rectangle 5"/>
-          <p:cNvSpPr/>
-          <p:nvPr/>
-        </p:nvSpPr>
-        <p:spPr>
-          <a:xfrm>
-            <a:off x="594360" y="1490472"/>
-            <a:ext cx="438912" cy="438912"/>
-          </a:xfrm>
-          <a:prstGeom prst="roundRect">
-            <a:avLst>
-              <a:gd name="adj" fmla="val 12000"/>
-            </a:avLst>
-          </a:prstGeom>
-          <a:solidFill>
-            <a:srgbClr val="095292"/>
-          </a:solidFill>
-          <a:ln>
-            <a:noFill/>
-          </a:ln>
-        </p:spPr>
-        <p:style>
-          <a:lnRef idx="1">
-            <a:schemeClr val="accent1"/>
-          </a:lnRef>
-          <a:fillRef idx="3">
-            <a:schemeClr val="accent1"/>
-          </a:fillRef>
-          <a:effectRef idx="2">
-            <a:schemeClr val="accent1"/>
-          </a:effectRef>
-          <a:fontRef idx="minor">
-            <a:schemeClr val="lt1"/>
-          </a:fontRef>
-        </p:style>
-        <p:txBody>
-          <a:bodyPr rtlCol="0" anchor="ctr"/>
-          <a:lstStyle/>
-          <a:p>
-            <a:pPr algn="ctr"/>
-          </a:p>
-        </p:txBody>
-      </p:sp>
-      <p:sp>
-        <p:nvSpPr>
-          <p:cNvPr id="7" name="TextBox 6"/>
+              <a:t>Reproducible: un tercero llega a la misma base sin hablar con el autor (2/2)</a:t>
+            </a:r>
+          </a:p>
+        </p:txBody>
+      </p:sp>
+      <p:sp>
+        <p:nvSpPr>
+          <p:cNvPr id="5" name="TextBox 4"/>
           <p:cNvSpPr txBox="1"/>
           <p:nvPr/>
         </p:nvSpPr>
         <p:spPr>
           <a:xfrm>
-            <a:off x="594360" y="1490472"/>
-            <a:ext cx="438912" cy="438912"/>
+            <a:off x="457200" y="1170432"/>
+            <a:ext cx="11277295" cy="5230368"/>
           </a:xfrm>
           <a:prstGeom prst="rect">
             <a:avLst/>
@@ -3731,677 +3654,111 @@
           <a:noFill/>
         </p:spPr>
         <p:txBody>
-          <a:bodyPr wrap="square" anchor="ctr"/>
-          <a:lstStyle/>
-          <a:p>
-            <a:pPr algn="ctr"/>
-            <a:r>
-              <a:rPr sz="1600" b="1" i="0">
-                <a:solidFill>
-                  <a:srgbClr val="FFFFFF"/>
-                </a:solidFill>
-                <a:latin typeface="Calibri"/>
-              </a:rPr>
-              <a:t>1</a:t>
-            </a:r>
-          </a:p>
-        </p:txBody>
-      </p:sp>
-      <p:sp>
-        <p:nvSpPr>
-          <p:cNvPr id="8" name="TextBox 7"/>
-          <p:cNvSpPr txBox="1"/>
-          <p:nvPr/>
-        </p:nvSpPr>
-        <p:spPr>
-          <a:xfrm>
-            <a:off x="1188720" y="1325880"/>
-            <a:ext cx="10271455" cy="786384"/>
-          </a:xfrm>
-          <a:prstGeom prst="rect">
-            <a:avLst/>
-          </a:prstGeom>
-          <a:noFill/>
-        </p:spPr>
-        <p:txBody>
-          <a:bodyPr wrap="square" anchor="ctr"/>
-          <a:lstStyle/>
-          <a:p>
-            <a:r>
-              <a:rPr sz="1500" b="1" i="0">
-                <a:solidFill>
-                  <a:srgbClr val="095292"/>
-                </a:solidFill>
-                <a:latin typeface="Calibri"/>
-              </a:rPr>
-              <a:t>Subir el paquete final a la plataforma del curso (modulo Proyectos) ANTES de su turno.</a:t>
-            </a:r>
-          </a:p>
-        </p:txBody>
-      </p:sp>
-      <p:sp>
-        <p:nvSpPr>
-          <p:cNvPr id="9" name="Rounded Rectangle 8"/>
-          <p:cNvSpPr/>
-          <p:nvPr/>
-        </p:nvSpPr>
-        <p:spPr>
-          <a:xfrm>
-            <a:off x="457200" y="2276856"/>
-            <a:ext cx="11277295" cy="950976"/>
-          </a:xfrm>
-          <a:prstGeom prst="roundRect">
-            <a:avLst>
-              <a:gd name="adj" fmla="val 12000"/>
-            </a:avLst>
-          </a:prstGeom>
-          <a:solidFill>
-            <a:srgbClr val="E8F4FA"/>
-          </a:solidFill>
-          <a:ln>
-            <a:noFill/>
-          </a:ln>
-        </p:spPr>
-        <p:style>
-          <a:lnRef idx="1">
-            <a:schemeClr val="accent1"/>
-          </a:lnRef>
-          <a:fillRef idx="3">
-            <a:schemeClr val="accent1"/>
-          </a:fillRef>
-          <a:effectRef idx="2">
-            <a:schemeClr val="accent1"/>
-          </a:effectRef>
-          <a:fontRef idx="minor">
-            <a:schemeClr val="lt1"/>
-          </a:fontRef>
-        </p:style>
-        <p:txBody>
-          <a:bodyPr rtlCol="0" anchor="ctr"/>
-          <a:lstStyle/>
-          <a:p>
-            <a:pPr algn="ctr"/>
-          </a:p>
-        </p:txBody>
-      </p:sp>
-      <p:sp>
-        <p:nvSpPr>
-          <p:cNvPr id="10" name="Rounded Rectangle 9"/>
-          <p:cNvSpPr/>
-          <p:nvPr/>
-        </p:nvSpPr>
-        <p:spPr>
-          <a:xfrm>
-            <a:off x="594360" y="2532888"/>
-            <a:ext cx="438912" cy="438912"/>
-          </a:xfrm>
-          <a:prstGeom prst="roundRect">
-            <a:avLst>
-              <a:gd name="adj" fmla="val 12000"/>
-            </a:avLst>
-          </a:prstGeom>
-          <a:solidFill>
-            <a:srgbClr val="095292"/>
-          </a:solidFill>
-          <a:ln>
-            <a:noFill/>
-          </a:ln>
-        </p:spPr>
-        <p:style>
-          <a:lnRef idx="1">
-            <a:schemeClr val="accent1"/>
-          </a:lnRef>
-          <a:fillRef idx="3">
-            <a:schemeClr val="accent1"/>
-          </a:fillRef>
-          <a:effectRef idx="2">
-            <a:schemeClr val="accent1"/>
-          </a:effectRef>
-          <a:fontRef idx="minor">
-            <a:schemeClr val="lt1"/>
-          </a:fontRef>
-        </p:style>
-        <p:txBody>
-          <a:bodyPr rtlCol="0" anchor="ctr"/>
-          <a:lstStyle/>
-          <a:p>
-            <a:pPr algn="ctr"/>
-          </a:p>
-        </p:txBody>
-      </p:sp>
-      <p:sp>
-        <p:nvSpPr>
-          <p:cNvPr id="11" name="TextBox 10"/>
-          <p:cNvSpPr txBox="1"/>
-          <p:nvPr/>
-        </p:nvSpPr>
-        <p:spPr>
-          <a:xfrm>
-            <a:off x="594360" y="2532888"/>
-            <a:ext cx="438912" cy="438912"/>
-          </a:xfrm>
-          <a:prstGeom prst="rect">
-            <a:avLst/>
-          </a:prstGeom>
-          <a:noFill/>
-        </p:spPr>
-        <p:txBody>
-          <a:bodyPr wrap="square" anchor="ctr"/>
-          <a:lstStyle/>
-          <a:p>
-            <a:pPr algn="ctr"/>
-            <a:r>
-              <a:rPr sz="1600" b="1" i="0">
-                <a:solidFill>
-                  <a:srgbClr val="FFFFFF"/>
-                </a:solidFill>
-                <a:latin typeface="Calibri"/>
-              </a:rPr>
-              <a:t>2</a:t>
-            </a:r>
-          </a:p>
-        </p:txBody>
-      </p:sp>
-      <p:sp>
-        <p:nvSpPr>
-          <p:cNvPr id="12" name="TextBox 11"/>
-          <p:cNvSpPr txBox="1"/>
-          <p:nvPr/>
-        </p:nvSpPr>
-        <p:spPr>
-          <a:xfrm>
-            <a:off x="1188720" y="2368296"/>
-            <a:ext cx="10271455" cy="786384"/>
-          </a:xfrm>
-          <a:prstGeom prst="rect">
-            <a:avLst/>
-          </a:prstGeom>
-          <a:noFill/>
-        </p:spPr>
-        <p:txBody>
-          <a:bodyPr wrap="square" anchor="ctr"/>
-          <a:lstStyle/>
-          <a:p>
-            <a:r>
-              <a:rPr sz="1500" b="1" i="0">
-                <a:solidFill>
-                  <a:srgbClr val="095292"/>
-                </a:solidFill>
-                <a:latin typeface="Calibri"/>
-              </a:rPr>
-              <a:t>Sustentar en vivo 5-8 min con el ER y una ejecucion real en pantalla.</a:t>
-            </a:r>
-          </a:p>
-        </p:txBody>
-      </p:sp>
-      <p:sp>
-        <p:nvSpPr>
-          <p:cNvPr id="13" name="Rounded Rectangle 12"/>
-          <p:cNvSpPr/>
-          <p:nvPr/>
-        </p:nvSpPr>
-        <p:spPr>
-          <a:xfrm>
-            <a:off x="457200" y="3319272"/>
-            <a:ext cx="11277295" cy="950976"/>
-          </a:xfrm>
-          <a:prstGeom prst="roundRect">
-            <a:avLst>
-              <a:gd name="adj" fmla="val 12000"/>
-            </a:avLst>
-          </a:prstGeom>
-          <a:solidFill>
-            <a:srgbClr val="F2F2F2"/>
-          </a:solidFill>
-          <a:ln>
-            <a:noFill/>
-          </a:ln>
-        </p:spPr>
-        <p:style>
-          <a:lnRef idx="1">
-            <a:schemeClr val="accent1"/>
-          </a:lnRef>
-          <a:fillRef idx="3">
-            <a:schemeClr val="accent1"/>
-          </a:fillRef>
-          <a:effectRef idx="2">
-            <a:schemeClr val="accent1"/>
-          </a:effectRef>
-          <a:fontRef idx="minor">
-            <a:schemeClr val="lt1"/>
-          </a:fontRef>
-        </p:style>
-        <p:txBody>
-          <a:bodyPr rtlCol="0" anchor="ctr"/>
-          <a:lstStyle/>
-          <a:p>
-            <a:pPr algn="ctr"/>
-          </a:p>
-        </p:txBody>
-      </p:sp>
-      <p:sp>
-        <p:nvSpPr>
-          <p:cNvPr id="14" name="Rounded Rectangle 13"/>
-          <p:cNvSpPr/>
-          <p:nvPr/>
-        </p:nvSpPr>
-        <p:spPr>
-          <a:xfrm>
-            <a:off x="594360" y="3575304"/>
-            <a:ext cx="438912" cy="438912"/>
-          </a:xfrm>
-          <a:prstGeom prst="roundRect">
-            <a:avLst>
-              <a:gd name="adj" fmla="val 12000"/>
-            </a:avLst>
-          </a:prstGeom>
-          <a:solidFill>
-            <a:srgbClr val="095292"/>
-          </a:solidFill>
-          <a:ln>
-            <a:noFill/>
-          </a:ln>
-        </p:spPr>
-        <p:style>
-          <a:lnRef idx="1">
-            <a:schemeClr val="accent1"/>
-          </a:lnRef>
-          <a:fillRef idx="3">
-            <a:schemeClr val="accent1"/>
-          </a:fillRef>
-          <a:effectRef idx="2">
-            <a:schemeClr val="accent1"/>
-          </a:effectRef>
-          <a:fontRef idx="minor">
-            <a:schemeClr val="lt1"/>
-          </a:fontRef>
-        </p:style>
-        <p:txBody>
-          <a:bodyPr rtlCol="0" anchor="ctr"/>
-          <a:lstStyle/>
-          <a:p>
-            <a:pPr algn="ctr"/>
-          </a:p>
-        </p:txBody>
-      </p:sp>
-      <p:sp>
-        <p:nvSpPr>
-          <p:cNvPr id="15" name="TextBox 14"/>
-          <p:cNvSpPr txBox="1"/>
-          <p:nvPr/>
-        </p:nvSpPr>
-        <p:spPr>
-          <a:xfrm>
-            <a:off x="594360" y="3575304"/>
-            <a:ext cx="438912" cy="438912"/>
-          </a:xfrm>
-          <a:prstGeom prst="rect">
-            <a:avLst/>
-          </a:prstGeom>
-          <a:noFill/>
-        </p:spPr>
-        <p:txBody>
-          <a:bodyPr wrap="square" anchor="ctr"/>
-          <a:lstStyle/>
-          <a:p>
-            <a:pPr algn="ctr"/>
-            <a:r>
-              <a:rPr sz="1600" b="1" i="0">
-                <a:solidFill>
-                  <a:srgbClr val="FFFFFF"/>
-                </a:solidFill>
-                <a:latin typeface="Calibri"/>
-              </a:rPr>
-              <a:t>3</a:t>
-            </a:r>
-          </a:p>
-        </p:txBody>
-      </p:sp>
-      <p:sp>
-        <p:nvSpPr>
-          <p:cNvPr id="16" name="TextBox 15"/>
-          <p:cNvSpPr txBox="1"/>
-          <p:nvPr/>
-        </p:nvSpPr>
-        <p:spPr>
-          <a:xfrm>
-            <a:off x="1188720" y="3410712"/>
-            <a:ext cx="10271455" cy="786384"/>
-          </a:xfrm>
-          <a:prstGeom prst="rect">
-            <a:avLst/>
-          </a:prstGeom>
-          <a:noFill/>
-        </p:spPr>
-        <p:txBody>
-          <a:bodyPr wrap="square" anchor="ctr"/>
-          <a:lstStyle/>
-          <a:p>
-            <a:r>
-              <a:rPr sz="1500" b="1" i="0">
-                <a:solidFill>
-                  <a:srgbClr val="095292"/>
-                </a:solidFill>
-                <a:latin typeface="Calibri"/>
-              </a:rPr>
-              <a:t>Responder el Q&amp;A en vivo del docente (preguntas al azar sobre su modelo).</a:t>
-            </a:r>
-          </a:p>
-        </p:txBody>
-      </p:sp>
-      <p:sp>
-        <p:nvSpPr>
-          <p:cNvPr id="17" name="Rounded Rectangle 16"/>
-          <p:cNvSpPr/>
-          <p:nvPr/>
-        </p:nvSpPr>
-        <p:spPr>
-          <a:xfrm>
-            <a:off x="457200" y="4361688"/>
-            <a:ext cx="11277295" cy="950976"/>
-          </a:xfrm>
-          <a:prstGeom prst="roundRect">
-            <a:avLst>
-              <a:gd name="adj" fmla="val 12000"/>
-            </a:avLst>
-          </a:prstGeom>
-          <a:solidFill>
-            <a:srgbClr val="E8F4FA"/>
-          </a:solidFill>
-          <a:ln>
-            <a:noFill/>
-          </a:ln>
-        </p:spPr>
-        <p:style>
-          <a:lnRef idx="1">
-            <a:schemeClr val="accent1"/>
-          </a:lnRef>
-          <a:fillRef idx="3">
-            <a:schemeClr val="accent1"/>
-          </a:fillRef>
-          <a:effectRef idx="2">
-            <a:schemeClr val="accent1"/>
-          </a:effectRef>
-          <a:fontRef idx="minor">
-            <a:schemeClr val="lt1"/>
-          </a:fontRef>
-        </p:style>
-        <p:txBody>
-          <a:bodyPr rtlCol="0" anchor="ctr"/>
-          <a:lstStyle/>
-          <a:p>
-            <a:pPr algn="ctr"/>
-          </a:p>
-        </p:txBody>
-      </p:sp>
-      <p:sp>
-        <p:nvSpPr>
-          <p:cNvPr id="18" name="Rounded Rectangle 17"/>
-          <p:cNvSpPr/>
-          <p:nvPr/>
-        </p:nvSpPr>
-        <p:spPr>
-          <a:xfrm>
-            <a:off x="594360" y="4617720"/>
-            <a:ext cx="438912" cy="438912"/>
-          </a:xfrm>
-          <a:prstGeom prst="roundRect">
-            <a:avLst>
-              <a:gd name="adj" fmla="val 12000"/>
-            </a:avLst>
-          </a:prstGeom>
-          <a:solidFill>
-            <a:srgbClr val="095292"/>
-          </a:solidFill>
-          <a:ln>
-            <a:noFill/>
-          </a:ln>
-        </p:spPr>
-        <p:style>
-          <a:lnRef idx="1">
-            <a:schemeClr val="accent1"/>
-          </a:lnRef>
-          <a:fillRef idx="3">
-            <a:schemeClr val="accent1"/>
-          </a:fillRef>
-          <a:effectRef idx="2">
-            <a:schemeClr val="accent1"/>
-          </a:effectRef>
-          <a:fontRef idx="minor">
-            <a:schemeClr val="lt1"/>
-          </a:fontRef>
-        </p:style>
-        <p:txBody>
-          <a:bodyPr rtlCol="0" anchor="ctr"/>
-          <a:lstStyle/>
-          <a:p>
-            <a:pPr algn="ctr"/>
-          </a:p>
-        </p:txBody>
-      </p:sp>
-      <p:sp>
-        <p:nvSpPr>
-          <p:cNvPr id="19" name="TextBox 18"/>
-          <p:cNvSpPr txBox="1"/>
-          <p:nvPr/>
-        </p:nvSpPr>
-        <p:spPr>
-          <a:xfrm>
-            <a:off x="594360" y="4617720"/>
-            <a:ext cx="438912" cy="438912"/>
-          </a:xfrm>
-          <a:prstGeom prst="rect">
-            <a:avLst/>
-          </a:prstGeom>
-          <a:noFill/>
-        </p:spPr>
-        <p:txBody>
-          <a:bodyPr wrap="square" anchor="ctr"/>
-          <a:lstStyle/>
-          <a:p>
-            <a:pPr algn="ctr"/>
-            <a:r>
-              <a:rPr sz="1600" b="1" i="0">
-                <a:solidFill>
-                  <a:srgbClr val="FFFFFF"/>
-                </a:solidFill>
-                <a:latin typeface="Calibri"/>
-              </a:rPr>
-              <a:t>4</a:t>
-            </a:r>
-          </a:p>
-        </p:txBody>
-      </p:sp>
-      <p:sp>
-        <p:nvSpPr>
-          <p:cNvPr id="20" name="TextBox 19"/>
-          <p:cNvSpPr txBox="1"/>
-          <p:nvPr/>
-        </p:nvSpPr>
-        <p:spPr>
-          <a:xfrm>
-            <a:off x="1188720" y="4453128"/>
-            <a:ext cx="10271455" cy="786384"/>
-          </a:xfrm>
-          <a:prstGeom prst="rect">
-            <a:avLst/>
-          </a:prstGeom>
-          <a:noFill/>
-        </p:spPr>
-        <p:txBody>
-          <a:bodyPr wrap="square" anchor="ctr"/>
-          <a:lstStyle/>
-          <a:p>
-            <a:r>
-              <a:rPr sz="1500" b="1" i="0">
-                <a:solidFill>
-                  <a:srgbClr val="095292"/>
-                </a:solidFill>
-                <a:latin typeface="Calibri"/>
-              </a:rPr>
-              <a:t>Autoevaluacion: que harian distinto.</a:t>
-            </a:r>
-          </a:p>
-        </p:txBody>
-      </p:sp>
-      <p:sp>
-        <p:nvSpPr>
-          <p:cNvPr id="21" name="Rounded Rectangle 20"/>
-          <p:cNvSpPr/>
-          <p:nvPr/>
-        </p:nvSpPr>
-        <p:spPr>
-          <a:xfrm>
-            <a:off x="457200" y="5404104"/>
-            <a:ext cx="11277295" cy="950976"/>
-          </a:xfrm>
-          <a:prstGeom prst="roundRect">
-            <a:avLst>
-              <a:gd name="adj" fmla="val 12000"/>
-            </a:avLst>
-          </a:prstGeom>
-          <a:solidFill>
-            <a:srgbClr val="F2F2F2"/>
-          </a:solidFill>
-          <a:ln>
-            <a:noFill/>
-          </a:ln>
-        </p:spPr>
-        <p:style>
-          <a:lnRef idx="1">
-            <a:schemeClr val="accent1"/>
-          </a:lnRef>
-          <a:fillRef idx="3">
-            <a:schemeClr val="accent1"/>
-          </a:fillRef>
-          <a:effectRef idx="2">
-            <a:schemeClr val="accent1"/>
-          </a:effectRef>
-          <a:fontRef idx="minor">
-            <a:schemeClr val="lt1"/>
-          </a:fontRef>
-        </p:style>
-        <p:txBody>
-          <a:bodyPr rtlCol="0" anchor="ctr"/>
-          <a:lstStyle/>
-          <a:p>
-            <a:pPr algn="ctr"/>
-          </a:p>
-        </p:txBody>
-      </p:sp>
-      <p:sp>
-        <p:nvSpPr>
-          <p:cNvPr id="22" name="Rounded Rectangle 21"/>
-          <p:cNvSpPr/>
-          <p:nvPr/>
-        </p:nvSpPr>
-        <p:spPr>
-          <a:xfrm>
-            <a:off x="594360" y="5660136"/>
-            <a:ext cx="438912" cy="438912"/>
-          </a:xfrm>
-          <a:prstGeom prst="roundRect">
-            <a:avLst>
-              <a:gd name="adj" fmla="val 12000"/>
-            </a:avLst>
-          </a:prstGeom>
-          <a:solidFill>
-            <a:srgbClr val="095292"/>
-          </a:solidFill>
-          <a:ln>
-            <a:noFill/>
-          </a:ln>
-        </p:spPr>
-        <p:style>
-          <a:lnRef idx="1">
-            <a:schemeClr val="accent1"/>
-          </a:lnRef>
-          <a:fillRef idx="3">
-            <a:schemeClr val="accent1"/>
-          </a:fillRef>
-          <a:effectRef idx="2">
-            <a:schemeClr val="accent1"/>
-          </a:effectRef>
-          <a:fontRef idx="minor">
-            <a:schemeClr val="lt1"/>
-          </a:fontRef>
-        </p:style>
-        <p:txBody>
-          <a:bodyPr rtlCol="0" anchor="ctr"/>
-          <a:lstStyle/>
-          <a:p>
-            <a:pPr algn="ctr"/>
-          </a:p>
-        </p:txBody>
-      </p:sp>
-      <p:sp>
-        <p:nvSpPr>
-          <p:cNvPr id="23" name="TextBox 22"/>
-          <p:cNvSpPr txBox="1"/>
-          <p:nvPr/>
-        </p:nvSpPr>
-        <p:spPr>
-          <a:xfrm>
-            <a:off x="594360" y="5660136"/>
-            <a:ext cx="438912" cy="438912"/>
-          </a:xfrm>
-          <a:prstGeom prst="rect">
-            <a:avLst/>
-          </a:prstGeom>
-          <a:noFill/>
-        </p:spPr>
-        <p:txBody>
-          <a:bodyPr wrap="square" anchor="ctr"/>
-          <a:lstStyle/>
-          <a:p>
-            <a:pPr algn="ctr"/>
-            <a:r>
-              <a:rPr sz="1600" b="1" i="0">
-                <a:solidFill>
-                  <a:srgbClr val="FFFFFF"/>
-                </a:solidFill>
-                <a:latin typeface="Calibri"/>
-              </a:rPr>
-              <a:t>5</a:t>
-            </a:r>
-          </a:p>
-        </p:txBody>
-      </p:sp>
-      <p:sp>
-        <p:nvSpPr>
-          <p:cNvPr id="24" name="TextBox 23"/>
-          <p:cNvSpPr txBox="1"/>
-          <p:nvPr/>
-        </p:nvSpPr>
-        <p:spPr>
-          <a:xfrm>
-            <a:off x="1188720" y="5495544"/>
-            <a:ext cx="10271455" cy="786384"/>
-          </a:xfrm>
-          <a:prstGeom prst="rect">
-            <a:avLst/>
-          </a:prstGeom>
-          <a:noFill/>
-        </p:spPr>
-        <p:txBody>
-          <a:bodyPr wrap="square" anchor="ctr"/>
-          <a:lstStyle/>
-          <a:p>
-            <a:r>
-              <a:rPr sz="1500" b="1" i="0">
-                <a:solidFill>
-                  <a:srgbClr val="095292"/>
-                </a:solidFill>
-                <a:latin typeface="Calibri"/>
-              </a:rPr>
-              <a:t>Cierre del curso.</a:t>
-            </a:r>
-          </a:p>
-        </p:txBody>
-      </p:sp>
-      <p:sp>
-        <p:nvSpPr>
-          <p:cNvPr id="25" name="TextBox 24"/>
+          <a:bodyPr wrap="square">
+            <a:spAutoFit/>
+          </a:bodyPr>
+          <a:lstStyle/>
+          <a:p>
+            <a:pPr>
+              <a:spcAft>
+                <a:spcPts val="800"/>
+              </a:spcAft>
+            </a:pPr>
+            <a:r>
+              <a:rPr sz="2000" b="0" i="0">
+                <a:solidFill>
+                  <a:srgbClr val="333333"/>
+                </a:solidFill>
+                <a:latin typeface="Calibri"/>
+              </a:rPr>
+              <a:t>–   AUTO_INCREMENT en MySQL e IDENTITY o una secuencia en Oracle y SQL Server, el texto variable es VARCHAR en unos y VARCHAR2 en Oracle</a:t>
+            </a:r>
+          </a:p>
+          <a:p>
+            <a:pPr>
+              <a:spcAft>
+                <a:spcPts val="800"/>
+              </a:spcAft>
+            </a:pPr>
+            <a:r>
+              <a:rPr sz="2000" b="0" i="0">
+                <a:solidFill>
+                  <a:srgbClr val="333333"/>
+                </a:solidFill>
+                <a:latin typeface="Calibri"/>
+              </a:rPr>
+              <a:t>–   Y la fecha actual es NOW() en unos y SYSDATE en Oracle; un script sin la linea «probado en PostgreSQL 15 en DB Fiddle» o «probado en Oracle 19c en Oracle Live SQL» obliga al evaluador a adivinar, y si adivina mal falla en la primera sentencia.</a:t>
+            </a:r>
+          </a:p>
+          <a:p>
+            <a:pPr>
+              <a:spcAft>
+                <a:spcPts val="800"/>
+              </a:spcAft>
+            </a:pPr>
+            <a:r>
+              <a:rPr sz="2000" b="0" i="0">
+                <a:solidFill>
+                  <a:srgbClr val="333333"/>
+                </a:solidFill>
+                <a:latin typeface="Calibri"/>
+              </a:rPr>
+              <a:t>–   Dos, scripts que asumen un estado previo: quien ejecuta debe poder empezar desde una base vacia.</a:t>
+            </a:r>
+          </a:p>
+          <a:p>
+            <a:pPr>
+              <a:spcAft>
+                <a:spcPts val="800"/>
+              </a:spcAft>
+            </a:pPr>
+            <a:r>
+              <a:rPr sz="2000" b="0" i="0">
+                <a:solidFill>
+                  <a:srgbClr val="333333"/>
+                </a:solidFill>
+                <a:latin typeface="Calibri"/>
+              </a:rPr>
+              <a:t>–   Tres, falta de idempotencia: si el script no se puede correr dos veces porque falla al encontrar que la tabla ya existe, se pierde tiempo en cada intento, y anteponer DROP TABLE IF EXISTS en orden inverso al de creacion lo resuelve.</a:t>
+            </a:r>
+          </a:p>
+          <a:p>
+            <a:pPr>
+              <a:spcAft>
+                <a:spcPts val="800"/>
+              </a:spcAft>
+            </a:pPr>
+            <a:r>
+              <a:rPr sz="2000" b="0" i="0">
+                <a:solidFill>
+                  <a:srgbClr val="333333"/>
+                </a:solidFill>
+                <a:latin typeface="Calibri"/>
+              </a:rPr>
+              <a:t>–   Cuatro, el LEEME ausente o inutil; uno que sirve tiene cuatro cosas y cabe en media pagina: motor y version exactos, el orden de ejecucion de los archivos</a:t>
+            </a:r>
+          </a:p>
+          <a:p>
+            <a:pPr>
+              <a:spcAft>
+                <a:spcPts val="800"/>
+              </a:spcAft>
+            </a:pPr>
+            <a:r>
+              <a:rPr sz="2000" b="0" i="0">
+                <a:solidFill>
+                  <a:srgbClr val="333333"/>
+                </a:solidFill>
+                <a:latin typeface="Calibri"/>
+              </a:rPr>
+              <a:t>–   Como verificar que quedo bien (una consulta cuyo resultado se conoce, por ejemplo SELECT COUNT(*) FROM cita devolviendo 10) y las limitaciones conocidas.</a:t>
+            </a:r>
+          </a:p>
+        </p:txBody>
+      </p:sp>
+      <p:sp>
+        <p:nvSpPr>
+          <p:cNvPr id="6" name="TextBox 5"/>
           <p:cNvSpPr txBox="1"/>
           <p:nvPr/>
         </p:nvSpPr>
@@ -4575,154 +3932,21 @@
                 </a:solidFill>
                 <a:latin typeface="Calibri"/>
               </a:rPr>
-              <a:t>Sustentacion del PI — pistas (checklist vacio)</a:t>
-            </a:r>
-          </a:p>
-        </p:txBody>
-      </p:sp>
-      <p:sp>
-        <p:nvSpPr>
-          <p:cNvPr id="5" name="Rounded Rectangle 4"/>
-          <p:cNvSpPr/>
-          <p:nvPr/>
-        </p:nvSpPr>
-        <p:spPr>
-          <a:xfrm>
-            <a:off x="457200" y="1261872"/>
-            <a:ext cx="11277295" cy="566928"/>
-          </a:xfrm>
-          <a:prstGeom prst="roundRect">
-            <a:avLst>
-              <a:gd name="adj" fmla="val 12000"/>
-            </a:avLst>
-          </a:prstGeom>
-          <a:solidFill>
-            <a:srgbClr val="F2F2F2"/>
-          </a:solidFill>
-          <a:ln>
-            <a:noFill/>
-          </a:ln>
-        </p:spPr>
-        <p:style>
-          <a:lnRef idx="1">
-            <a:schemeClr val="accent1"/>
-          </a:lnRef>
-          <a:fillRef idx="3">
-            <a:schemeClr val="accent1"/>
-          </a:fillRef>
-          <a:effectRef idx="2">
-            <a:schemeClr val="accent1"/>
-          </a:effectRef>
-          <a:fontRef idx="minor">
-            <a:schemeClr val="lt1"/>
-          </a:fontRef>
-        </p:style>
-        <p:txBody>
-          <a:bodyPr rtlCol="0" anchor="ctr"/>
-          <a:lstStyle/>
-          <a:p>
-            <a:pPr algn="ctr"/>
-          </a:p>
-        </p:txBody>
-      </p:sp>
-      <p:sp>
-        <p:nvSpPr>
-          <p:cNvPr id="6" name="Rectangle 5"/>
-          <p:cNvSpPr/>
-          <p:nvPr/>
-        </p:nvSpPr>
-        <p:spPr>
-          <a:xfrm>
-            <a:off x="640080" y="1408175"/>
-            <a:ext cx="274320" cy="274320"/>
-          </a:xfrm>
-          <a:prstGeom prst="rect">
-            <a:avLst/>
-          </a:prstGeom>
-          <a:solidFill>
-            <a:srgbClr val="FFFFFF"/>
-          </a:solidFill>
-          <a:ln>
-            <a:solidFill>
-              <a:srgbClr val="333333"/>
-            </a:solidFill>
-          </a:ln>
-        </p:spPr>
-        <p:style>
-          <a:lnRef idx="1">
-            <a:schemeClr val="accent1"/>
-          </a:lnRef>
-          <a:fillRef idx="3">
-            <a:schemeClr val="accent1"/>
-          </a:fillRef>
-          <a:effectRef idx="2">
-            <a:schemeClr val="accent1"/>
-          </a:effectRef>
-          <a:fontRef idx="minor">
-            <a:schemeClr val="lt1"/>
-          </a:fontRef>
-        </p:style>
-        <p:txBody>
-          <a:bodyPr rtlCol="0" anchor="ctr"/>
-          <a:lstStyle/>
-          <a:p>
-            <a:pPr algn="ctr"/>
-          </a:p>
-        </p:txBody>
-      </p:sp>
-      <p:sp>
-        <p:nvSpPr>
-          <p:cNvPr id="7" name="Rectangle 6"/>
-          <p:cNvSpPr/>
-          <p:nvPr/>
-        </p:nvSpPr>
-        <p:spPr>
-          <a:xfrm>
-            <a:off x="640080" y="1408175"/>
-            <a:ext cx="73152" cy="274320"/>
-          </a:xfrm>
-          <a:prstGeom prst="rect">
-            <a:avLst/>
-          </a:prstGeom>
-          <a:solidFill>
-            <a:srgbClr val="269CCB"/>
-          </a:solidFill>
-          <a:ln>
-            <a:noFill/>
-          </a:ln>
-        </p:spPr>
-        <p:style>
-          <a:lnRef idx="1">
-            <a:schemeClr val="accent1"/>
-          </a:lnRef>
-          <a:fillRef idx="3">
-            <a:schemeClr val="accent1"/>
-          </a:fillRef>
-          <a:effectRef idx="2">
-            <a:schemeClr val="accent1"/>
-          </a:effectRef>
-          <a:fontRef idx="minor">
-            <a:schemeClr val="lt1"/>
-          </a:fontRef>
-        </p:style>
-        <p:txBody>
-          <a:bodyPr rtlCol="0" anchor="ctr"/>
-          <a:lstStyle/>
-          <a:p>
-            <a:pPr algn="ctr"/>
-          </a:p>
-        </p:txBody>
-      </p:sp>
-      <p:sp>
-        <p:nvSpPr>
-          <p:cNvPr id="8" name="TextBox 7"/>
+              <a:t>El reparto de los 5 a 8 minutos (1/2)</a:t>
+            </a:r>
+          </a:p>
+        </p:txBody>
+      </p:sp>
+      <p:sp>
+        <p:nvSpPr>
+          <p:cNvPr id="5" name="TextBox 4"/>
           <p:cNvSpPr txBox="1"/>
           <p:nvPr/>
         </p:nvSpPr>
         <p:spPr>
           <a:xfrm>
-            <a:off x="1097280" y="1353312"/>
-            <a:ext cx="10362895" cy="402336"/>
+            <a:off x="457200" y="1170432"/>
+            <a:ext cx="11277295" cy="5230368"/>
           </a:xfrm>
           <a:prstGeom prst="rect">
             <a:avLst/>
@@ -4730,354 +3954,143 @@
           <a:noFill/>
         </p:spPr>
         <p:txBody>
-          <a:bodyPr wrap="square" anchor="ctr"/>
-          <a:lstStyle/>
-          <a:p>
-            <a:r>
-              <a:rPr sz="1500" b="0" i="0">
-                <a:solidFill>
-                  <a:srgbClr val="333333"/>
-                </a:solidFill>
-                <a:latin typeface="Calibri"/>
-              </a:rPr>
-              <a:t>□ Falta evidencia?</a:t>
-            </a:r>
-          </a:p>
-        </p:txBody>
-      </p:sp>
-      <p:sp>
-        <p:nvSpPr>
-          <p:cNvPr id="9" name="Rounded Rectangle 8"/>
-          <p:cNvSpPr/>
-          <p:nvPr/>
-        </p:nvSpPr>
-        <p:spPr>
-          <a:xfrm>
-            <a:off x="457200" y="1938528"/>
-            <a:ext cx="11277295" cy="566928"/>
-          </a:xfrm>
-          <a:prstGeom prst="roundRect">
-            <a:avLst>
-              <a:gd name="adj" fmla="val 12000"/>
-            </a:avLst>
-          </a:prstGeom>
-          <a:solidFill>
-            <a:srgbClr val="F2F2F2"/>
-          </a:solidFill>
-          <a:ln>
-            <a:noFill/>
-          </a:ln>
-        </p:spPr>
-        <p:style>
-          <a:lnRef idx="1">
-            <a:schemeClr val="accent1"/>
-          </a:lnRef>
-          <a:fillRef idx="3">
-            <a:schemeClr val="accent1"/>
-          </a:fillRef>
-          <a:effectRef idx="2">
-            <a:schemeClr val="accent1"/>
-          </a:effectRef>
-          <a:fontRef idx="minor">
-            <a:schemeClr val="lt1"/>
-          </a:fontRef>
-        </p:style>
-        <p:txBody>
-          <a:bodyPr rtlCol="0" anchor="ctr"/>
-          <a:lstStyle/>
-          <a:p>
-            <a:pPr algn="ctr"/>
-          </a:p>
-        </p:txBody>
-      </p:sp>
-      <p:sp>
-        <p:nvSpPr>
-          <p:cNvPr id="10" name="Rectangle 9"/>
-          <p:cNvSpPr/>
-          <p:nvPr/>
-        </p:nvSpPr>
-        <p:spPr>
-          <a:xfrm>
-            <a:off x="640080" y="2084832"/>
-            <a:ext cx="274320" cy="274320"/>
-          </a:xfrm>
-          <a:prstGeom prst="rect">
-            <a:avLst/>
-          </a:prstGeom>
-          <a:solidFill>
-            <a:srgbClr val="FFFFFF"/>
-          </a:solidFill>
-          <a:ln>
-            <a:solidFill>
-              <a:srgbClr val="333333"/>
-            </a:solidFill>
-          </a:ln>
-        </p:spPr>
-        <p:style>
-          <a:lnRef idx="1">
-            <a:schemeClr val="accent1"/>
-          </a:lnRef>
-          <a:fillRef idx="3">
-            <a:schemeClr val="accent1"/>
-          </a:fillRef>
-          <a:effectRef idx="2">
-            <a:schemeClr val="accent1"/>
-          </a:effectRef>
-          <a:fontRef idx="minor">
-            <a:schemeClr val="lt1"/>
-          </a:fontRef>
-        </p:style>
-        <p:txBody>
-          <a:bodyPr rtlCol="0" anchor="ctr"/>
-          <a:lstStyle/>
-          <a:p>
-            <a:pPr algn="ctr"/>
-          </a:p>
-        </p:txBody>
-      </p:sp>
-      <p:sp>
-        <p:nvSpPr>
-          <p:cNvPr id="11" name="Rectangle 10"/>
-          <p:cNvSpPr/>
-          <p:nvPr/>
-        </p:nvSpPr>
-        <p:spPr>
-          <a:xfrm>
-            <a:off x="640080" y="2084832"/>
-            <a:ext cx="73152" cy="274320"/>
-          </a:xfrm>
-          <a:prstGeom prst="rect">
-            <a:avLst/>
-          </a:prstGeom>
-          <a:solidFill>
-            <a:srgbClr val="269CCB"/>
-          </a:solidFill>
-          <a:ln>
-            <a:noFill/>
-          </a:ln>
-        </p:spPr>
-        <p:style>
-          <a:lnRef idx="1">
-            <a:schemeClr val="accent1"/>
-          </a:lnRef>
-          <a:fillRef idx="3">
-            <a:schemeClr val="accent1"/>
-          </a:fillRef>
-          <a:effectRef idx="2">
-            <a:schemeClr val="accent1"/>
-          </a:effectRef>
-          <a:fontRef idx="minor">
-            <a:schemeClr val="lt1"/>
-          </a:fontRef>
-        </p:style>
-        <p:txBody>
-          <a:bodyPr rtlCol="0" anchor="ctr"/>
-          <a:lstStyle/>
-          <a:p>
-            <a:pPr algn="ctr"/>
-          </a:p>
-        </p:txBody>
-      </p:sp>
-      <p:sp>
-        <p:nvSpPr>
-          <p:cNvPr id="12" name="TextBox 11"/>
-          <p:cNvSpPr txBox="1"/>
-          <p:nvPr/>
-        </p:nvSpPr>
-        <p:spPr>
-          <a:xfrm>
-            <a:off x="1097280" y="2029968"/>
-            <a:ext cx="10362895" cy="402336"/>
-          </a:xfrm>
-          <a:prstGeom prst="rect">
-            <a:avLst/>
-          </a:prstGeom>
-          <a:noFill/>
-        </p:spPr>
-        <p:txBody>
-          <a:bodyPr wrap="square" anchor="ctr"/>
-          <a:lstStyle/>
-          <a:p>
-            <a:r>
-              <a:rPr sz="1500" b="0" i="0">
-                <a:solidFill>
-                  <a:srgbClr val="333333"/>
-                </a:solidFill>
-                <a:latin typeface="Calibri"/>
-              </a:rPr>
-              <a:t>□ Cubre todos los bloques (y todos hablan, si hay equipo)?</a:t>
-            </a:r>
-          </a:p>
-        </p:txBody>
-      </p:sp>
-      <p:sp>
-        <p:nvSpPr>
-          <p:cNvPr id="13" name="Rounded Rectangle 12"/>
-          <p:cNvSpPr/>
-          <p:nvPr/>
-        </p:nvSpPr>
-        <p:spPr>
-          <a:xfrm>
-            <a:off x="457200" y="2615184"/>
-            <a:ext cx="11277295" cy="566928"/>
-          </a:xfrm>
-          <a:prstGeom prst="roundRect">
-            <a:avLst>
-              <a:gd name="adj" fmla="val 12000"/>
-            </a:avLst>
-          </a:prstGeom>
-          <a:solidFill>
-            <a:srgbClr val="F2F2F2"/>
-          </a:solidFill>
-          <a:ln>
-            <a:noFill/>
-          </a:ln>
-        </p:spPr>
-        <p:style>
-          <a:lnRef idx="1">
-            <a:schemeClr val="accent1"/>
-          </a:lnRef>
-          <a:fillRef idx="3">
-            <a:schemeClr val="accent1"/>
-          </a:fillRef>
-          <a:effectRef idx="2">
-            <a:schemeClr val="accent1"/>
-          </a:effectRef>
-          <a:fontRef idx="minor">
-            <a:schemeClr val="lt1"/>
-          </a:fontRef>
-        </p:style>
-        <p:txBody>
-          <a:bodyPr rtlCol="0" anchor="ctr"/>
-          <a:lstStyle/>
-          <a:p>
-            <a:pPr algn="ctr"/>
-          </a:p>
-        </p:txBody>
-      </p:sp>
-      <p:sp>
-        <p:nvSpPr>
-          <p:cNvPr id="14" name="Rectangle 13"/>
-          <p:cNvSpPr/>
-          <p:nvPr/>
-        </p:nvSpPr>
-        <p:spPr>
-          <a:xfrm>
-            <a:off x="640080" y="2761488"/>
-            <a:ext cx="274320" cy="274320"/>
-          </a:xfrm>
-          <a:prstGeom prst="rect">
-            <a:avLst/>
-          </a:prstGeom>
-          <a:solidFill>
-            <a:srgbClr val="FFFFFF"/>
-          </a:solidFill>
-          <a:ln>
-            <a:solidFill>
-              <a:srgbClr val="333333"/>
-            </a:solidFill>
-          </a:ln>
-        </p:spPr>
-        <p:style>
-          <a:lnRef idx="1">
-            <a:schemeClr val="accent1"/>
-          </a:lnRef>
-          <a:fillRef idx="3">
-            <a:schemeClr val="accent1"/>
-          </a:fillRef>
-          <a:effectRef idx="2">
-            <a:schemeClr val="accent1"/>
-          </a:effectRef>
-          <a:fontRef idx="minor">
-            <a:schemeClr val="lt1"/>
-          </a:fontRef>
-        </p:style>
-        <p:txBody>
-          <a:bodyPr rtlCol="0" anchor="ctr"/>
-          <a:lstStyle/>
-          <a:p>
-            <a:pPr algn="ctr"/>
-          </a:p>
-        </p:txBody>
-      </p:sp>
-      <p:sp>
-        <p:nvSpPr>
-          <p:cNvPr id="15" name="Rectangle 14"/>
-          <p:cNvSpPr/>
-          <p:nvPr/>
-        </p:nvSpPr>
-        <p:spPr>
-          <a:xfrm>
-            <a:off x="640080" y="2761488"/>
-            <a:ext cx="73152" cy="274320"/>
-          </a:xfrm>
-          <a:prstGeom prst="rect">
-            <a:avLst/>
-          </a:prstGeom>
-          <a:solidFill>
-            <a:srgbClr val="269CCB"/>
-          </a:solidFill>
-          <a:ln>
-            <a:noFill/>
-          </a:ln>
-        </p:spPr>
-        <p:style>
-          <a:lnRef idx="1">
-            <a:schemeClr val="accent1"/>
-          </a:lnRef>
-          <a:fillRef idx="3">
-            <a:schemeClr val="accent1"/>
-          </a:fillRef>
-          <a:effectRef idx="2">
-            <a:schemeClr val="accent1"/>
-          </a:effectRef>
-          <a:fontRef idx="minor">
-            <a:schemeClr val="lt1"/>
-          </a:fontRef>
-        </p:style>
-        <p:txBody>
-          <a:bodyPr rtlCol="0" anchor="ctr"/>
-          <a:lstStyle/>
-          <a:p>
-            <a:pPr algn="ctr"/>
-          </a:p>
-        </p:txBody>
-      </p:sp>
-      <p:sp>
-        <p:nvSpPr>
-          <p:cNvPr id="16" name="TextBox 15"/>
-          <p:cNvSpPr txBox="1"/>
-          <p:nvPr/>
-        </p:nvSpPr>
-        <p:spPr>
-          <a:xfrm>
-            <a:off x="1097280" y="2706624"/>
-            <a:ext cx="10362895" cy="402336"/>
-          </a:xfrm>
-          <a:prstGeom prst="rect">
-            <a:avLst/>
-          </a:prstGeom>
-          <a:noFill/>
-        </p:spPr>
-        <p:txBody>
-          <a:bodyPr wrap="square" anchor="ctr"/>
-          <a:lstStyle/>
-          <a:p>
-            <a:r>
-              <a:rPr sz="1500" b="0" i="0">
-                <a:solidFill>
-                  <a:srgbClr val="333333"/>
-                </a:solidFill>
-                <a:latin typeface="Calibri"/>
-              </a:rPr>
-              <a:t>□ PI != P3?</a:t>
-            </a:r>
-          </a:p>
-        </p:txBody>
-      </p:sp>
-      <p:sp>
-        <p:nvSpPr>
-          <p:cNvPr id="17" name="TextBox 16"/>
+          <a:bodyPr wrap="square">
+            <a:spAutoFit/>
+          </a:bodyPr>
+          <a:lstStyle/>
+          <a:p>
+            <a:pPr>
+              <a:spcAft>
+                <a:spcPts val="800"/>
+              </a:spcAft>
+            </a:pPr>
+            <a:r>
+              <a:rPr sz="1900" b="0" i="0">
+                <a:solidFill>
+                  <a:srgbClr val="333333"/>
+                </a:solidFill>
+                <a:latin typeface="Calibri"/>
+              </a:rPr>
+              <a:t>–   La sustentacion dura de 5 a 8 minutos y ese limite obliga a decidir que se deja fuera.</a:t>
+            </a:r>
+          </a:p>
+          <a:p>
+            <a:pPr>
+              <a:spcAft>
+                <a:spcPts val="800"/>
+              </a:spcAft>
+            </a:pPr>
+            <a:r>
+              <a:rPr sz="1900" b="0" i="0">
+                <a:solidFill>
+                  <a:srgbClr val="333333"/>
+                </a:solidFill>
+                <a:latin typeface="Calibri"/>
+              </a:rPr>
+              <a:t>–   El reparto que funciona, y que es convencion y no regla dura, es: 45 segundos para el problema de la clinica Huellitas en lenguaje de negocio, sin una sola tabla en pantalla</a:t>
+            </a:r>
+          </a:p>
+          <a:p>
+            <a:pPr>
+              <a:spcAft>
+                <a:spcPts val="800"/>
+              </a:spcAft>
+            </a:pPr>
+            <a:r>
+              <a:rPr sz="1900" b="0" i="0">
+                <a:solidFill>
+                  <a:srgbClr val="333333"/>
+                </a:solidFill>
+                <a:latin typeface="Calibri"/>
+              </a:rPr>
+              <a:t>–   90 segundos para el modelo, mostrando el ER y justificando dos decisiones y no las quince</a:t>
+            </a:r>
+          </a:p>
+          <a:p>
+            <a:pPr>
+              <a:spcAft>
+                <a:spcPts val="800"/>
+              </a:spcAft>
+            </a:pPr>
+            <a:r>
+              <a:rPr sz="1900" b="0" i="0">
+                <a:solidFill>
+                  <a:srgbClr val="333333"/>
+                </a:solidFill>
+                <a:latin typeface="Calibri"/>
+              </a:rPr>
+              <a:t>–   60 segundos para seguridad, con la matriz de roles y una frase sobre por que recepcion no ve el historial clinico; 90 segundos para la automatizacion, ejecutando un procedimiento con su caso valido y su caso invalido</a:t>
+            </a:r>
+          </a:p>
+          <a:p>
+            <a:pPr>
+              <a:spcAft>
+                <a:spcPts val="800"/>
+              </a:spcAft>
+            </a:pPr>
+            <a:r>
+              <a:rPr sz="1900" b="0" i="0">
+                <a:solidFill>
+                  <a:srgbClr val="333333"/>
+                </a:solidFill>
+                <a:latin typeface="Calibri"/>
+              </a:rPr>
+              <a:t>–   60 segundos para la optimizacion, con el plan de ejecucion antes y despues; 45 segundos para la integracion y el punto debil declarado; y 30 de cierre.</a:t>
+            </a:r>
+          </a:p>
+          <a:p>
+            <a:pPr>
+              <a:spcAft>
+                <a:spcPts val="800"/>
+              </a:spcAft>
+            </a:pPr>
+            <a:r>
+              <a:rPr sz="1900" b="0" i="0">
+                <a:solidFill>
+                  <a:srgbClr val="333333"/>
+                </a:solidFill>
+                <a:latin typeface="Calibri"/>
+              </a:rPr>
+              <a:t>–   Y conviene ser explicito sobre el formato, porque de eso depende como se prepara el estudiante: la Clase 15 se dicta el 16 de noviembre en la ultima sesion del semestre</a:t>
+            </a:r>
+          </a:p>
+          <a:p>
+            <a:pPr>
+              <a:spcAft>
+                <a:spcPts val="800"/>
+              </a:spcAft>
+            </a:pPr>
+            <a:r>
+              <a:rPr sz="1900" b="0" i="0">
+                <a:solidFill>
+                  <a:srgbClr val="333333"/>
+                </a:solidFill>
+                <a:latin typeface="Calibri"/>
+              </a:rPr>
+              <a:t>–   Dedicada por completo a sustentaciones EN VIVO, con turnos consecutivos y preguntas del docente al cierre de cada uno.</a:t>
+            </a:r>
+          </a:p>
+          <a:p>
+            <a:pPr>
+              <a:spcAft>
+                <a:spcPts val="800"/>
+              </a:spcAft>
+            </a:pPr>
+            <a:r>
+              <a:rPr sz="1900" b="0" i="0">
+                <a:solidFill>
+                  <a:srgbClr val="333333"/>
+                </a:solidFill>
+                <a:latin typeface="Calibri"/>
+              </a:rPr>
+              <a:t>–   No es clase autonoma y la defensa no se reemplaza por un video grabado, porque el Q&amp;A dirigido al azar es lo unico que permite verificar que el modelo y los procedimientos son de quien los presenta.</a:t>
+            </a:r>
+          </a:p>
+        </p:txBody>
+      </p:sp>
+      <p:sp>
+        <p:nvSpPr>
+          <p:cNvPr id="6" name="TextBox 5"/>
           <p:cNvSpPr txBox="1"/>
           <p:nvPr/>
         </p:nvSpPr>
@@ -5251,7 +4264,7 @@
                 </a:solidFill>
                 <a:latin typeface="Calibri"/>
               </a:rPr>
-              <a:t>Criterios de exito / entregable</a:t>
+              <a:t>El reparto de los 5 a 8 minutos (2/2)</a:t>
             </a:r>
           </a:p>
         </p:txBody>
@@ -5290,25 +4303,7 @@
                 </a:solidFill>
                 <a:latin typeface="Calibri"/>
               </a:rPr>
-              <a:t>–   </a:t>
-            </a:r>
-            <a:r>
-              <a:rPr sz="2000" b="1" i="0">
-                <a:solidFill>
-                  <a:srgbClr val="333333"/>
-                </a:solidFill>
-                <a:latin typeface="Calibri"/>
-              </a:rPr>
-              <a:t>Entregable:</a:t>
-            </a:r>
-            <a:r>
-              <a:rPr sz="2000" b="0" i="0">
-                <a:solidFill>
-                  <a:srgbClr val="333333"/>
-                </a:solidFill>
-                <a:latin typeface="Calibri"/>
-              </a:rPr>
-              <a:t> ZIP/PDF final subido antes del turno + sustentacion en vivo 5-8 min + Q&amp;A</a:t>
+              <a:t>–   Lo que si hay que exigir dentro del turno es la ejecucion real: que el estudiante corra el procedimiento en el playground, con su caso valido y su caso invalido, en vez de proyectar capturas fijas</a:t>
             </a:r>
           </a:p>
           <a:p>
@@ -5324,7 +4319,7 @@
                 </a:solidFill>
                 <a:latin typeface="Calibri"/>
               </a:rPr>
-              <a:t>–   Evidencia ejecutable en pantalla durante tu turno (no solo capturas).</a:t>
+              <a:t>–   Porque una consulta ejecutandose delante del evaluador es la evidencia mas dificil de fingir y la mas rapida de calificar.</a:t>
             </a:r>
           </a:p>
           <a:p>
@@ -5340,25 +4335,7 @@
                 </a:solidFill>
                 <a:latin typeface="Calibri"/>
               </a:rPr>
-              <a:t>–   Puedes explicar </a:t>
-            </a:r>
-            <a:r>
-              <a:rPr sz="2000" b="1" i="0">
-                <a:solidFill>
-                  <a:srgbClr val="333333"/>
-                </a:solidFill>
-                <a:latin typeface="Calibri"/>
-              </a:rPr>
-              <a:t>cualquier</a:t>
-            </a:r>
-            <a:r>
-              <a:rPr sz="2000" b="0" i="0">
-                <a:solidFill>
-                  <a:srgbClr val="333333"/>
-                </a:solidFill>
-                <a:latin typeface="Calibri"/>
-              </a:rPr>
-              <a:t> parte de tu modelo en 60 segundos.</a:t>
+              <a:t>–   El paquete, en cambio, se sube al modulo de Proyectos de la plataforma del curso ANTES del turno: quien llega a subir archivos consume su propio tiempo de sustentacion.</a:t>
             </a:r>
           </a:p>
           <a:p>
@@ -5374,17 +4351,15 @@
                 </a:solidFill>
                 <a:latin typeface="Calibri"/>
               </a:rPr>
-              <a:t>–   </a:t>
-            </a:r>
-            <a:r>
-              <a:rPr sz="2000" b="1" i="0">
-                <a:solidFill>
-                  <a:srgbClr val="333333"/>
-                </a:solidFill>
-                <a:latin typeface="Calibri"/>
-              </a:rPr>
-              <a:t>Entrega en la plataforma del curso</a:t>
-            </a:r>
+              <a:t>–   Y el criterio de dominio es el mismo trabajando solo o en equipo autorizado: quien sustenta debe poder explicar cualquier parte en 60 segundos</a:t>
+            </a:r>
+          </a:p>
+          <a:p>
+            <a:pPr>
+              <a:spcAft>
+                <a:spcPts val="800"/>
+              </a:spcAft>
+            </a:pPr>
             <a:r>
               <a:rPr sz="2000" b="0" i="0">
                 <a:solidFill>
@@ -5392,25 +4367,7 @@
                 </a:solidFill>
                 <a:latin typeface="Calibri"/>
               </a:rPr>
-              <a:t> — </a:t>
-            </a:r>
-            <a:r>
-              <a:rPr sz="2000" b="1" i="0">
-                <a:solidFill>
-                  <a:srgbClr val="333333"/>
-                </a:solidFill>
-                <a:latin typeface="Calibri"/>
-              </a:rPr>
-              <a:t>antes</a:t>
-            </a:r>
-            <a:r>
-              <a:rPr sz="2000" b="0" i="0">
-                <a:solidFill>
-                  <a:srgbClr val="333333"/>
-                </a:solidFill>
-                <a:latin typeface="Calibri"/>
-              </a:rPr>
-              <a:t> de tu turno.</a:t>
+              <a:t>–   Y si hubo equipo, cualquier integrante debe poder hacerlo con cualquier parte, no solo con la suya, porque el Q&amp;A se dirige al azar y porque si solo una persona entiende el modelo el evaluador no tiene forma de atribuir el trabajo a los demas.</a:t>
             </a:r>
           </a:p>
         </p:txBody>
@@ -5591,109 +4548,21 @@
                 </a:solidFill>
                 <a:latin typeface="Calibri"/>
               </a:rPr>
-              <a:t>Cierre del PI</a:t>
-            </a:r>
-          </a:p>
-        </p:txBody>
-      </p:sp>
-      <p:sp>
-        <p:nvSpPr>
-          <p:cNvPr id="5" name="Rounded Rectangle 4"/>
-          <p:cNvSpPr/>
-          <p:nvPr/>
-        </p:nvSpPr>
-        <p:spPr>
-          <a:xfrm>
-            <a:off x="457200" y="1261872"/>
-            <a:ext cx="11277295" cy="1051560"/>
-          </a:xfrm>
-          <a:prstGeom prst="roundRect">
-            <a:avLst>
-              <a:gd name="adj" fmla="val 12000"/>
-            </a:avLst>
-          </a:prstGeom>
-          <a:solidFill>
-            <a:srgbClr val="E8F4FA"/>
-          </a:solidFill>
-          <a:ln>
-            <a:noFill/>
-          </a:ln>
-        </p:spPr>
-        <p:style>
-          <a:lnRef idx="1">
-            <a:schemeClr val="accent1"/>
-          </a:lnRef>
-          <a:fillRef idx="3">
-            <a:schemeClr val="accent1"/>
-          </a:fillRef>
-          <a:effectRef idx="2">
-            <a:schemeClr val="accent1"/>
-          </a:effectRef>
-          <a:fontRef idx="minor">
-            <a:schemeClr val="lt1"/>
-          </a:fontRef>
-        </p:style>
-        <p:txBody>
-          <a:bodyPr rtlCol="0" anchor="ctr"/>
-          <a:lstStyle/>
-          <a:p>
-            <a:pPr algn="ctr"/>
-          </a:p>
-        </p:txBody>
-      </p:sp>
-      <p:sp>
-        <p:nvSpPr>
-          <p:cNvPr id="6" name="Rectangle 5"/>
-          <p:cNvSpPr/>
-          <p:nvPr/>
-        </p:nvSpPr>
-        <p:spPr>
-          <a:xfrm>
-            <a:off x="457200" y="1261872"/>
-            <a:ext cx="128016" cy="1051560"/>
-          </a:xfrm>
-          <a:prstGeom prst="rect">
-            <a:avLst/>
-          </a:prstGeom>
-          <a:solidFill>
-            <a:srgbClr val="269CCB"/>
-          </a:solidFill>
-          <a:ln>
-            <a:noFill/>
-          </a:ln>
-        </p:spPr>
-        <p:style>
-          <a:lnRef idx="1">
-            <a:schemeClr val="accent1"/>
-          </a:lnRef>
-          <a:fillRef idx="3">
-            <a:schemeClr val="accent1"/>
-          </a:fillRef>
-          <a:effectRef idx="2">
-            <a:schemeClr val="accent1"/>
-          </a:effectRef>
-          <a:fontRef idx="minor">
-            <a:schemeClr val="lt1"/>
-          </a:fontRef>
-        </p:style>
-        <p:txBody>
-          <a:bodyPr rtlCol="0" anchor="ctr"/>
-          <a:lstStyle/>
-          <a:p>
-            <a:pPr algn="ctr"/>
-          </a:p>
-        </p:txBody>
-      </p:sp>
-      <p:sp>
-        <p:nvSpPr>
-          <p:cNvPr id="7" name="TextBox 6"/>
+              <a:t>El Q&amp;A de modelado, con las respuestas listas</a:t>
+            </a:r>
+          </a:p>
+        </p:txBody>
+      </p:sp>
+      <p:sp>
+        <p:nvSpPr>
+          <p:cNvPr id="5" name="TextBox 4"/>
           <p:cNvSpPr txBox="1"/>
           <p:nvPr/>
         </p:nvSpPr>
         <p:spPr>
           <a:xfrm>
-            <a:off x="777240" y="1399031"/>
-            <a:ext cx="10774375" cy="822959"/>
+            <a:off x="457200" y="1170432"/>
+            <a:ext cx="11277295" cy="5230368"/>
           </a:xfrm>
           <a:prstGeom prst="rect">
             <a:avLst/>
@@ -5706,313 +4575,138 @@
           </a:bodyPr>
           <a:lstStyle/>
           <a:p>
-            <a:r>
-              <a:rPr sz="1200" b="1" i="0">
-                <a:solidFill>
-                  <a:srgbClr val="269CCB"/>
-                </a:solidFill>
-                <a:latin typeface="Calibri"/>
-              </a:rPr>
-              <a:t>Info</a:t>
-            </a:r>
-          </a:p>
-          <a:p>
             <a:pPr>
-              <a:spcBef>
-                <a:spcPts val="400"/>
-              </a:spcBef>
+              <a:spcAft>
+                <a:spcPts val="800"/>
+              </a:spcAft>
             </a:pPr>
             <a:r>
-              <a:rPr sz="1400" b="0" i="0">
-                <a:solidFill>
-                  <a:srgbClr val="333333"/>
-                </a:solidFill>
-                <a:latin typeface="Calibri"/>
-              </a:rPr>
-              <a:t>Hito: Sustentacion en vivo y entrega final del PI (20% Corte 3)</a:t>
-            </a:r>
-          </a:p>
-        </p:txBody>
-      </p:sp>
-      <p:sp>
-        <p:nvSpPr>
-          <p:cNvPr id="8" name="Rounded Rectangle 7"/>
-          <p:cNvSpPr/>
-          <p:nvPr/>
-        </p:nvSpPr>
-        <p:spPr>
-          <a:xfrm>
-            <a:off x="457200" y="2478024"/>
-            <a:ext cx="11277295" cy="1051560"/>
-          </a:xfrm>
-          <a:prstGeom prst="roundRect">
-            <a:avLst>
-              <a:gd name="adj" fmla="val 12000"/>
-            </a:avLst>
-          </a:prstGeom>
-          <a:solidFill>
-            <a:srgbClr val="FFF8E1"/>
-          </a:solidFill>
-          <a:ln>
-            <a:noFill/>
-          </a:ln>
-        </p:spPr>
-        <p:style>
-          <a:lnRef idx="1">
-            <a:schemeClr val="accent1"/>
-          </a:lnRef>
-          <a:fillRef idx="3">
-            <a:schemeClr val="accent1"/>
-          </a:fillRef>
-          <a:effectRef idx="2">
-            <a:schemeClr val="accent1"/>
-          </a:effectRef>
-          <a:fontRef idx="minor">
-            <a:schemeClr val="lt1"/>
-          </a:fontRef>
-        </p:style>
-        <p:txBody>
-          <a:bodyPr rtlCol="0" anchor="ctr"/>
-          <a:lstStyle/>
-          <a:p>
-            <a:pPr algn="ctr"/>
-          </a:p>
-        </p:txBody>
-      </p:sp>
-      <p:sp>
-        <p:nvSpPr>
-          <p:cNvPr id="9" name="Rectangle 8"/>
-          <p:cNvSpPr/>
-          <p:nvPr/>
-        </p:nvSpPr>
-        <p:spPr>
-          <a:xfrm>
-            <a:off x="457200" y="2478024"/>
-            <a:ext cx="128016" cy="1051560"/>
-          </a:xfrm>
-          <a:prstGeom prst="rect">
-            <a:avLst/>
-          </a:prstGeom>
-          <a:solidFill>
-            <a:srgbClr val="FFD000"/>
-          </a:solidFill>
-          <a:ln>
-            <a:noFill/>
-          </a:ln>
-        </p:spPr>
-        <p:style>
-          <a:lnRef idx="1">
-            <a:schemeClr val="accent1"/>
-          </a:lnRef>
-          <a:fillRef idx="3">
-            <a:schemeClr val="accent1"/>
-          </a:fillRef>
-          <a:effectRef idx="2">
-            <a:schemeClr val="accent1"/>
-          </a:effectRef>
-          <a:fontRef idx="minor">
-            <a:schemeClr val="lt1"/>
-          </a:fontRef>
-        </p:style>
-        <p:txBody>
-          <a:bodyPr rtlCol="0" anchor="ctr"/>
-          <a:lstStyle/>
-          <a:p>
-            <a:pPr algn="ctr"/>
-          </a:p>
-        </p:txBody>
-      </p:sp>
-      <p:sp>
-        <p:nvSpPr>
-          <p:cNvPr id="10" name="TextBox 9"/>
-          <p:cNvSpPr txBox="1"/>
-          <p:nvPr/>
-        </p:nvSpPr>
-        <p:spPr>
-          <a:xfrm>
-            <a:off x="777240" y="2615184"/>
-            <a:ext cx="10774375" cy="822959"/>
-          </a:xfrm>
-          <a:prstGeom prst="rect">
-            <a:avLst/>
-          </a:prstGeom>
-          <a:noFill/>
-        </p:spPr>
-        <p:txBody>
-          <a:bodyPr wrap="square">
-            <a:spAutoFit/>
-          </a:bodyPr>
-          <a:lstStyle/>
-          <a:p>
-            <a:r>
-              <a:rPr sz="1200" b="1" i="0">
-                <a:solidFill>
-                  <a:srgbClr val="FFD000"/>
-                </a:solidFill>
-                <a:latin typeface="Calibri"/>
-              </a:rPr>
-              <a:t>Aclaración</a:t>
+              <a:rPr sz="1900" b="0" i="0">
+                <a:solidFill>
+                  <a:srgbClr val="333333"/>
+                </a:solidFill>
+                <a:latin typeface="Calibri"/>
+              </a:rPr>
+              <a:t>–   El Q&amp;A sobre modelado tiene preguntas que se repiten, y conviene que el docente tenga las respuestas listas para poder calificarlas y para poder formularlas.</a:t>
             </a:r>
           </a:p>
           <a:p>
             <a:pPr>
-              <a:spcBef>
-                <a:spcPts val="400"/>
-              </a:spcBef>
+              <a:spcAft>
+                <a:spcPts val="800"/>
+              </a:spcAft>
             </a:pPr>
             <a:r>
-              <a:rPr sz="1400" b="0" i="0">
-                <a:solidFill>
-                  <a:srgbClr val="333333"/>
-                </a:solidFill>
-                <a:latin typeface="Calibri"/>
-              </a:rPr>
-              <a:t>Enunciado completo y rubrica: Clases/Proyecto Integrador/ (VetCare DB).</a:t>
-            </a:r>
-          </a:p>
-        </p:txBody>
-      </p:sp>
-      <p:sp>
-        <p:nvSpPr>
-          <p:cNvPr id="11" name="Rounded Rectangle 10"/>
-          <p:cNvSpPr/>
-          <p:nvPr/>
-        </p:nvSpPr>
-        <p:spPr>
-          <a:xfrm>
-            <a:off x="457200" y="3694176"/>
-            <a:ext cx="11277295" cy="1051560"/>
-          </a:xfrm>
-          <a:prstGeom prst="roundRect">
-            <a:avLst>
-              <a:gd name="adj" fmla="val 12000"/>
-            </a:avLst>
-          </a:prstGeom>
-          <a:solidFill>
-            <a:srgbClr val="FBE4E4"/>
-          </a:solidFill>
-          <a:ln>
-            <a:noFill/>
-          </a:ln>
-        </p:spPr>
-        <p:style>
-          <a:lnRef idx="1">
-            <a:schemeClr val="accent1"/>
-          </a:lnRef>
-          <a:fillRef idx="3">
-            <a:schemeClr val="accent1"/>
-          </a:fillRef>
-          <a:effectRef idx="2">
-            <a:schemeClr val="accent1"/>
-          </a:effectRef>
-          <a:fontRef idx="minor">
-            <a:schemeClr val="lt1"/>
-          </a:fontRef>
-        </p:style>
-        <p:txBody>
-          <a:bodyPr rtlCol="0" anchor="ctr"/>
-          <a:lstStyle/>
-          <a:p>
-            <a:pPr algn="ctr"/>
-          </a:p>
-        </p:txBody>
-      </p:sp>
-      <p:sp>
-        <p:nvSpPr>
-          <p:cNvPr id="12" name="Rectangle 11"/>
-          <p:cNvSpPr/>
-          <p:nvPr/>
-        </p:nvSpPr>
-        <p:spPr>
-          <a:xfrm>
-            <a:off x="457200" y="3694176"/>
-            <a:ext cx="128016" cy="1051560"/>
-          </a:xfrm>
-          <a:prstGeom prst="rect">
-            <a:avLst/>
-          </a:prstGeom>
-          <a:solidFill>
-            <a:srgbClr val="A02030"/>
-          </a:solidFill>
-          <a:ln>
-            <a:noFill/>
-          </a:ln>
-        </p:spPr>
-        <p:style>
-          <a:lnRef idx="1">
-            <a:schemeClr val="accent1"/>
-          </a:lnRef>
-          <a:fillRef idx="3">
-            <a:schemeClr val="accent1"/>
-          </a:fillRef>
-          <a:effectRef idx="2">
-            <a:schemeClr val="accent1"/>
-          </a:effectRef>
-          <a:fontRef idx="minor">
-            <a:schemeClr val="lt1"/>
-          </a:fontRef>
-        </p:style>
-        <p:txBody>
-          <a:bodyPr rtlCol="0" anchor="ctr"/>
-          <a:lstStyle/>
-          <a:p>
-            <a:pPr algn="ctr"/>
-          </a:p>
-        </p:txBody>
-      </p:sp>
-      <p:sp>
-        <p:nvSpPr>
-          <p:cNvPr id="13" name="TextBox 12"/>
-          <p:cNvSpPr txBox="1"/>
-          <p:nvPr/>
-        </p:nvSpPr>
-        <p:spPr>
-          <a:xfrm>
-            <a:off x="777240" y="3831336"/>
-            <a:ext cx="10774375" cy="822959"/>
-          </a:xfrm>
-          <a:prstGeom prst="rect">
-            <a:avLst/>
-          </a:prstGeom>
-          <a:noFill/>
-        </p:spPr>
-        <p:txBody>
-          <a:bodyPr wrap="square">
-            <a:spAutoFit/>
-          </a:bodyPr>
-          <a:lstStyle/>
-          <a:p>
-            <a:r>
-              <a:rPr sz="1200" b="1" i="0">
-                <a:solidFill>
-                  <a:srgbClr val="A02030"/>
-                </a:solidFill>
-                <a:latin typeface="Calibri"/>
-              </a:rPr>
-              <a:t>Atención</a:t>
+              <a:rPr sz="1900" b="0" i="0">
+                <a:solidFill>
+                  <a:srgbClr val="333333"/>
+                </a:solidFill>
+                <a:latin typeface="Calibri"/>
+              </a:rPr>
+              <a:t>–   «Por que nombre y apellido separados y no un solo campo nombre_completo?»: porque se necesita ordenar y buscar por apellido, y separar despues un campo unido es un trabajo sucio y lleno de errores con nombres compuestos.</a:t>
             </a:r>
           </a:p>
           <a:p>
             <a:pPr>
-              <a:spcBef>
-                <a:spcPts val="400"/>
-              </a:spcBef>
+              <a:spcAft>
+                <a:spcPts val="800"/>
+              </a:spcAft>
             </a:pPr>
             <a:r>
-              <a:rPr sz="1400" b="0" i="0">
-                <a:solidFill>
-                  <a:srgbClr val="333333"/>
-                </a:solidFill>
-                <a:latin typeface="Calibri"/>
-              </a:rPr>
-              <a:t>El PI vale 20% del Corte 3 y NO reemplaza el Parcial 3, que ya se aplico en su propia sesion.</a:t>
-            </a:r>
-          </a:p>
-        </p:txBody>
-      </p:sp>
-      <p:sp>
-        <p:nvSpPr>
-          <p:cNvPr id="14" name="TextBox 13"/>
+              <a:rPr sz="1900" b="0" i="0">
+                <a:solidFill>
+                  <a:srgbClr val="333333"/>
+                </a:solidFill>
+                <a:latin typeface="Calibri"/>
+              </a:rPr>
+              <a:t>–   «Que pasa si un dueno tiene dos mascotas llamadas Pelusa?»: nada, porque la identidad la da id_mascota y no el nombre</a:t>
+            </a:r>
+          </a:p>
+          <a:p>
+            <a:pPr>
+              <a:spcAft>
+                <a:spcPts val="800"/>
+              </a:spcAft>
+            </a:pPr>
+            <a:r>
+              <a:rPr sz="1900" b="0" i="0">
+                <a:solidFill>
+                  <a:srgbClr val="333333"/>
+                </a:solidFill>
+                <a:latin typeface="Calibri"/>
+              </a:rPr>
+              <a:t>–   Y si se quisiera prohibirlo habria que declarar UNIQUE (id_dueno, nombre), decision que el estudiante debe poder defender en cualquiera de los dos sentidos.</a:t>
+            </a:r>
+          </a:p>
+          <a:p>
+            <a:pPr>
+              <a:spcAft>
+                <a:spcPts val="800"/>
+              </a:spcAft>
+            </a:pPr>
+            <a:r>
+              <a:rPr sz="1900" b="0" i="0">
+                <a:solidFill>
+                  <a:srgbClr val="333333"/>
+                </a:solidFill>
+                <a:latin typeface="Calibri"/>
+              </a:rPr>
+              <a:t>–   «Por que no borran las citas canceladas?»: porque el historial de cancelaciones es informacion de negocio, ya que permite ver que dueno cancela siempre</a:t>
+            </a:r>
+          </a:p>
+          <a:p>
+            <a:pPr>
+              <a:spcAft>
+                <a:spcPts val="800"/>
+              </a:spcAft>
+            </a:pPr>
+            <a:r>
+              <a:rPr sz="1900" b="0" i="0">
+                <a:solidFill>
+                  <a:srgbClr val="333333"/>
+                </a:solidFill>
+                <a:latin typeface="Calibri"/>
+              </a:rPr>
+              <a:t>–   Y porque borrar filas referenciadas por facturas rompe la integridad referencial; se usa borrado logico con un campo de estado.</a:t>
+            </a:r>
+          </a:p>
+          <a:p>
+            <a:pPr>
+              <a:spcAft>
+                <a:spcPts val="800"/>
+              </a:spcAft>
+            </a:pPr>
+            <a:r>
+              <a:rPr sz="1900" b="0" i="0">
+                <a:solidFill>
+                  <a:srgbClr val="333333"/>
+                </a:solidFill>
+                <a:latin typeface="Calibri"/>
+              </a:rPr>
+              <a:t>–   Y la pregunta que desarma a quien no midio: «cuanto mejoro esa consulta?».</a:t>
+            </a:r>
+          </a:p>
+          <a:p>
+            <a:pPr>
+              <a:spcAft>
+                <a:spcPts val="800"/>
+              </a:spcAft>
+            </a:pPr>
+            <a:r>
+              <a:rPr sz="1900" b="0" i="0">
+                <a:solidFill>
+                  <a:srgbClr val="333333"/>
+                </a:solidFill>
+                <a:latin typeface="Calibri"/>
+              </a:rPr>
+              <a:t>–   Inventar un numero, en cambio, se cae con la siguiente pregunta y cuesta mucho mas que admitir el limite.</a:t>
+            </a:r>
+          </a:p>
+        </p:txBody>
+      </p:sp>
+      <p:sp>
+        <p:nvSpPr>
+          <p:cNvPr id="6" name="TextBox 5"/>
           <p:cNvSpPr txBox="1"/>
           <p:nvPr/>
         </p:nvSpPr>
@@ -6080,13 +4774,13 @@
         <p:spPr>
           <a:xfrm>
             <a:off x="0" y="0"/>
-            <a:ext cx="12191695" cy="164592"/>
+            <a:ext cx="12191695" cy="960120"/>
           </a:xfrm>
           <a:prstGeom prst="rect">
             <a:avLst/>
           </a:prstGeom>
           <a:solidFill>
-            <a:srgbClr val="269CCB"/>
+            <a:srgbClr val="095292"/>
           </a:solidFill>
           <a:ln>
             <a:noFill/>
@@ -6114,9 +4808,1654 @@
           </a:p>
         </p:txBody>
       </p:sp>
+      <p:sp>
+        <p:nvSpPr>
+          <p:cNvPr id="3" name="Rectangle 2"/>
+          <p:cNvSpPr/>
+          <p:nvPr/>
+        </p:nvSpPr>
+        <p:spPr>
+          <a:xfrm>
+            <a:off x="0" y="960120"/>
+            <a:ext cx="12191695" cy="41148"/>
+          </a:xfrm>
+          <a:prstGeom prst="rect">
+            <a:avLst/>
+          </a:prstGeom>
+          <a:solidFill>
+            <a:srgbClr val="FFD000"/>
+          </a:solidFill>
+          <a:ln>
+            <a:noFill/>
+          </a:ln>
+        </p:spPr>
+        <p:style>
+          <a:lnRef idx="1">
+            <a:schemeClr val="accent1"/>
+          </a:lnRef>
+          <a:fillRef idx="3">
+            <a:schemeClr val="accent1"/>
+          </a:fillRef>
+          <a:effectRef idx="2">
+            <a:schemeClr val="accent1"/>
+          </a:effectRef>
+          <a:fontRef idx="minor">
+            <a:schemeClr val="lt1"/>
+          </a:fontRef>
+        </p:style>
+        <p:txBody>
+          <a:bodyPr rtlCol="0" anchor="ctr"/>
+          <a:lstStyle/>
+          <a:p>
+            <a:pPr algn="ctr"/>
+          </a:p>
+        </p:txBody>
+      </p:sp>
+      <p:sp>
+        <p:nvSpPr>
+          <p:cNvPr id="4" name="TextBox 3"/>
+          <p:cNvSpPr txBox="1"/>
+          <p:nvPr/>
+        </p:nvSpPr>
+        <p:spPr>
+          <a:xfrm>
+            <a:off x="457200" y="164592"/>
+            <a:ext cx="11277295" cy="502920"/>
+          </a:xfrm>
+          <a:prstGeom prst="rect">
+            <a:avLst/>
+          </a:prstGeom>
+          <a:noFill/>
+        </p:spPr>
+        <p:txBody>
+          <a:bodyPr wrap="square">
+            <a:spAutoFit/>
+          </a:bodyPr>
+          <a:lstStyle/>
+          <a:p>
+            <a:r>
+              <a:rPr sz="2600" b="1" i="0">
+                <a:solidFill>
+                  <a:srgbClr val="FFFFFF"/>
+                </a:solidFill>
+                <a:latin typeface="Calibri"/>
+              </a:rPr>
+              <a:t>Evaluar con rubrica: puntos a evidencia observable (1/2)</a:t>
+            </a:r>
+          </a:p>
+        </p:txBody>
+      </p:sp>
+      <p:sp>
+        <p:nvSpPr>
+          <p:cNvPr id="5" name="TextBox 4"/>
+          <p:cNvSpPr txBox="1"/>
+          <p:nvPr/>
+        </p:nvSpPr>
+        <p:spPr>
+          <a:xfrm>
+            <a:off x="457200" y="1170432"/>
+            <a:ext cx="11277295" cy="5230368"/>
+          </a:xfrm>
+          <a:prstGeom prst="rect">
+            <a:avLst/>
+          </a:prstGeom>
+          <a:noFill/>
+        </p:spPr>
+        <p:txBody>
+          <a:bodyPr wrap="square">
+            <a:spAutoFit/>
+          </a:bodyPr>
+          <a:lstStyle/>
+          <a:p>
+            <a:pPr>
+              <a:spcAft>
+                <a:spcPts val="800"/>
+              </a:spcAft>
+            </a:pPr>
+            <a:r>
+              <a:rPr sz="2000" b="0" i="0">
+                <a:solidFill>
+                  <a:srgbClr val="333333"/>
+                </a:solidFill>
+                <a:latin typeface="Calibri"/>
+              </a:rPr>
+              <a:t>–   Evaluar con rubrica es asignar puntos a evidencia observable y no a impresion general.</a:t>
+            </a:r>
+          </a:p>
+          <a:p>
+            <a:pPr>
+              <a:spcAft>
+                <a:spcPts val="800"/>
+              </a:spcAft>
+            </a:pPr>
+            <a:r>
+              <a:rPr sz="2000" b="0" i="0">
+                <a:solidFill>
+                  <a:srgbClr val="333333"/>
+                </a:solidFill>
+                <a:latin typeface="Calibri"/>
+              </a:rPr>
+              <a:t>–   Los 100 puntos del PI VetCare DB se reparten en 20 por modelo y DDL coherente, 15 por seguridad y respaldo, 25 por procedimientos, funciones y disparadores con casos de prueba</a:t>
+            </a:r>
+          </a:p>
+          <a:p>
+            <a:pPr>
+              <a:spcAft>
+                <a:spcPts val="800"/>
+              </a:spcAft>
+            </a:pPr>
+            <a:r>
+              <a:rPr sz="2000" b="0" i="0">
+                <a:solidFill>
+                  <a:srgbClr val="333333"/>
+                </a:solidFill>
+                <a:latin typeface="Calibri"/>
+              </a:rPr>
+              <a:t>–   15 por optimizacion con antes y despues, 10 por la integracion aplicacion-base de datos documentada como contrato, y 15 por informe y sustentacion.</a:t>
+            </a:r>
+          </a:p>
+          <a:p>
+            <a:pPr>
+              <a:spcAft>
+                <a:spcPts val="800"/>
+              </a:spcAft>
+            </a:pPr>
+            <a:r>
+              <a:rPr sz="2000" b="0" i="0">
+                <a:solidFill>
+                  <a:srgbClr val="333333"/>
+                </a:solidFill>
+                <a:latin typeface="Calibri"/>
+              </a:rPr>
+              <a:t>–   Leer ese reparto en voz alta al abrir la sesion, antes del primer turno, evita el reclamo mas comun: los 15 puntos de sustentacion son solo la sexta parte del total</a:t>
+            </a:r>
+          </a:p>
+          <a:p>
+            <a:pPr>
+              <a:spcAft>
+                <a:spcPts val="800"/>
+              </a:spcAft>
+            </a:pPr>
+            <a:r>
+              <a:rPr sz="2000" b="0" i="0">
+                <a:solidFill>
+                  <a:srgbClr val="333333"/>
+                </a:solidFill>
+                <a:latin typeface="Calibri"/>
+              </a:rPr>
+              <a:t>–   Pero la sustentacion es el instrumento con el que el evaluador verifica que los otros 85 son de su autor</a:t>
+            </a:r>
+          </a:p>
+        </p:txBody>
+      </p:sp>
+      <p:sp>
+        <p:nvSpPr>
+          <p:cNvPr id="6" name="TextBox 5"/>
+          <p:cNvSpPr txBox="1"/>
+          <p:nvPr/>
+        </p:nvSpPr>
+        <p:spPr>
+          <a:xfrm>
+            <a:off x="11185855" y="6473952"/>
+            <a:ext cx="640080" cy="274320"/>
+          </a:xfrm>
+          <a:prstGeom prst="rect">
+            <a:avLst/>
+          </a:prstGeom>
+          <a:noFill/>
+        </p:spPr>
+        <p:txBody>
+          <a:bodyPr wrap="square">
+            <a:spAutoFit/>
+          </a:bodyPr>
+          <a:lstStyle/>
+          <a:p>
+            <a:pPr algn="r"/>
+            <a:r>
+              <a:rPr sz="1100" b="0" i="0">
+                <a:solidFill>
+                  <a:srgbClr val="666666"/>
+                </a:solidFill>
+                <a:latin typeface="Calibri"/>
+              </a:rPr>
+              <a:t>14</a:t>
+            </a:r>
+          </a:p>
+        </p:txBody>
+      </p:sp>
+    </p:spTree>
+  </p:cSld>
+  <p:clrMapOvr>
+    <a:masterClrMapping/>
+  </p:clrMapOvr>
+</p:sld>
+</file>
+
+<file path=ppt/slides/slide15.xml><?xml version="1.0" encoding="utf-8"?>
+<p:sld xmlns:a="http://schemas.openxmlformats.org/drawingml/2006/main" xmlns:p="http://schemas.openxmlformats.org/presentationml/2006/main" xmlns:r="http://schemas.openxmlformats.org/officeDocument/2006/relationships">
+  <p:cSld>
+    <p:bg>
+      <p:bgPr>
+        <a:solidFill>
+          <a:srgbClr val="FFFFFF"/>
+        </a:solidFill>
+        <a:effectLst/>
+      </p:bgPr>
+    </p:bg>
+    <p:spTree>
+      <p:nvGrpSpPr>
+        <p:cNvPr id="1" name=""/>
+        <p:cNvGrpSpPr/>
+        <p:nvPr/>
+      </p:nvGrpSpPr>
+      <p:grpSpPr/>
+      <p:sp>
+        <p:nvSpPr>
+          <p:cNvPr id="2" name="Rectangle 1"/>
+          <p:cNvSpPr/>
+          <p:nvPr/>
+        </p:nvSpPr>
+        <p:spPr>
+          <a:xfrm>
+            <a:off x="0" y="0"/>
+            <a:ext cx="12191695" cy="960120"/>
+          </a:xfrm>
+          <a:prstGeom prst="rect">
+            <a:avLst/>
+          </a:prstGeom>
+          <a:solidFill>
+            <a:srgbClr val="095292"/>
+          </a:solidFill>
+          <a:ln>
+            <a:noFill/>
+          </a:ln>
+        </p:spPr>
+        <p:style>
+          <a:lnRef idx="1">
+            <a:schemeClr val="accent1"/>
+          </a:lnRef>
+          <a:fillRef idx="3">
+            <a:schemeClr val="accent1"/>
+          </a:fillRef>
+          <a:effectRef idx="2">
+            <a:schemeClr val="accent1"/>
+          </a:effectRef>
+          <a:fontRef idx="minor">
+            <a:schemeClr val="lt1"/>
+          </a:fontRef>
+        </p:style>
+        <p:txBody>
+          <a:bodyPr rtlCol="0" anchor="ctr"/>
+          <a:lstStyle/>
+          <a:p>
+            <a:pPr algn="ctr"/>
+          </a:p>
+        </p:txBody>
+      </p:sp>
+      <p:sp>
+        <p:nvSpPr>
+          <p:cNvPr id="3" name="Rectangle 2"/>
+          <p:cNvSpPr/>
+          <p:nvPr/>
+        </p:nvSpPr>
+        <p:spPr>
+          <a:xfrm>
+            <a:off x="0" y="960120"/>
+            <a:ext cx="12191695" cy="41148"/>
+          </a:xfrm>
+          <a:prstGeom prst="rect">
+            <a:avLst/>
+          </a:prstGeom>
+          <a:solidFill>
+            <a:srgbClr val="FFD000"/>
+          </a:solidFill>
+          <a:ln>
+            <a:noFill/>
+          </a:ln>
+        </p:spPr>
+        <p:style>
+          <a:lnRef idx="1">
+            <a:schemeClr val="accent1"/>
+          </a:lnRef>
+          <a:fillRef idx="3">
+            <a:schemeClr val="accent1"/>
+          </a:fillRef>
+          <a:effectRef idx="2">
+            <a:schemeClr val="accent1"/>
+          </a:effectRef>
+          <a:fontRef idx="minor">
+            <a:schemeClr val="lt1"/>
+          </a:fontRef>
+        </p:style>
+        <p:txBody>
+          <a:bodyPr rtlCol="0" anchor="ctr"/>
+          <a:lstStyle/>
+          <a:p>
+            <a:pPr algn="ctr"/>
+          </a:p>
+        </p:txBody>
+      </p:sp>
+      <p:sp>
+        <p:nvSpPr>
+          <p:cNvPr id="4" name="TextBox 3"/>
+          <p:cNvSpPr txBox="1"/>
+          <p:nvPr/>
+        </p:nvSpPr>
+        <p:spPr>
+          <a:xfrm>
+            <a:off x="457200" y="164592"/>
+            <a:ext cx="11277295" cy="502920"/>
+          </a:xfrm>
+          <a:prstGeom prst="rect">
+            <a:avLst/>
+          </a:prstGeom>
+          <a:noFill/>
+        </p:spPr>
+        <p:txBody>
+          <a:bodyPr wrap="square">
+            <a:spAutoFit/>
+          </a:bodyPr>
+          <a:lstStyle/>
+          <a:p>
+            <a:r>
+              <a:rPr sz="2600" b="1" i="0">
+                <a:solidFill>
+                  <a:srgbClr val="FFFFFF"/>
+                </a:solidFill>
+                <a:latin typeface="Calibri"/>
+              </a:rPr>
+              <a:t>Evaluar con rubrica: puntos a evidencia observable (2/2)</a:t>
+            </a:r>
+          </a:p>
+        </p:txBody>
+      </p:sp>
+      <p:sp>
+        <p:nvSpPr>
+          <p:cNvPr id="5" name="TextBox 4"/>
+          <p:cNvSpPr txBox="1"/>
+          <p:nvPr/>
+        </p:nvSpPr>
+        <p:spPr>
+          <a:xfrm>
+            <a:off x="457200" y="1170432"/>
+            <a:ext cx="11277295" cy="5230368"/>
+          </a:xfrm>
+          <a:prstGeom prst="rect">
+            <a:avLst/>
+          </a:prstGeom>
+          <a:noFill/>
+        </p:spPr>
+        <p:txBody>
+          <a:bodyPr wrap="square">
+            <a:spAutoFit/>
+          </a:bodyPr>
+          <a:lstStyle/>
+          <a:p>
+            <a:pPr>
+              <a:spcAft>
+                <a:spcPts val="800"/>
+              </a:spcAft>
+            </a:pPr>
+            <a:r>
+              <a:rPr sz="2000" b="0" i="0">
+                <a:solidFill>
+                  <a:srgbClr val="333333"/>
+                </a:solidFill>
+                <a:latin typeface="Calibri"/>
+              </a:rPr>
+              <a:t>–   Y un modelo excelente que nadie sabe defender abre una duda de autoria que ningun documento cierra.</a:t>
+            </a:r>
+          </a:p>
+          <a:p>
+            <a:pPr>
+              <a:spcAft>
+                <a:spcPts val="800"/>
+              </a:spcAft>
+            </a:pPr>
+            <a:r>
+              <a:rPr sz="2000" b="0" i="0">
+                <a:solidFill>
+                  <a:srgbClr val="333333"/>
+                </a:solidFill>
+                <a:latin typeface="Calibri"/>
+              </a:rPr>
+              <a:t>–   Y va el recordatorio de pesos: estos 100 puntos valen 20% del Corte 3, el Parcial 3 de la Clase 14 (virtual sincrono por Meet y escrito, el 9 de noviembre) vale 15%, y la asistencia 5%.</a:t>
+            </a:r>
+          </a:p>
+          <a:p>
+            <a:pPr>
+              <a:spcAft>
+                <a:spcPts val="800"/>
+              </a:spcAft>
+            </a:pPr>
+            <a:r>
+              <a:rPr sz="2000" b="0" i="0">
+                <a:solidFill>
+                  <a:srgbClr val="333333"/>
+                </a:solidFill>
+                <a:latin typeface="Calibri"/>
+              </a:rPr>
+              <a:t>–   El proyecto no reemplaza ni compensa el parcial: son dos evaluaciones distintas del mismo corte, y confundirlas produce reclamos que se evitan diciendolo una sola vez, hoy, con los numeros a la vista.</a:t>
+            </a:r>
+          </a:p>
+        </p:txBody>
+      </p:sp>
+      <p:sp>
+        <p:nvSpPr>
+          <p:cNvPr id="6" name="TextBox 5"/>
+          <p:cNvSpPr txBox="1"/>
+          <p:nvPr/>
+        </p:nvSpPr>
+        <p:spPr>
+          <a:xfrm>
+            <a:off x="11185855" y="6473952"/>
+            <a:ext cx="640080" cy="274320"/>
+          </a:xfrm>
+          <a:prstGeom prst="rect">
+            <a:avLst/>
+          </a:prstGeom>
+          <a:noFill/>
+        </p:spPr>
+        <p:txBody>
+          <a:bodyPr wrap="square">
+            <a:spAutoFit/>
+          </a:bodyPr>
+          <a:lstStyle/>
+          <a:p>
+            <a:pPr algn="r"/>
+            <a:r>
+              <a:rPr sz="1100" b="0" i="0">
+                <a:solidFill>
+                  <a:srgbClr val="666666"/>
+                </a:solidFill>
+                <a:latin typeface="Calibri"/>
+              </a:rPr>
+              <a:t>15</a:t>
+            </a:r>
+          </a:p>
+        </p:txBody>
+      </p:sp>
+    </p:spTree>
+  </p:cSld>
+  <p:clrMapOvr>
+    <a:masterClrMapping/>
+  </p:clrMapOvr>
+</p:sld>
+</file>
+
+<file path=ppt/slides/slide16.xml><?xml version="1.0" encoding="utf-8"?>
+<p:sld xmlns:a="http://schemas.openxmlformats.org/drawingml/2006/main" xmlns:p="http://schemas.openxmlformats.org/presentationml/2006/main" xmlns:r="http://schemas.openxmlformats.org/officeDocument/2006/relationships">
+  <p:cSld>
+    <p:bg>
+      <p:bgPr>
+        <a:solidFill>
+          <a:srgbClr val="FFFFFF"/>
+        </a:solidFill>
+        <a:effectLst/>
+      </p:bgPr>
+    </p:bg>
+    <p:spTree>
+      <p:nvGrpSpPr>
+        <p:cNvPr id="1" name=""/>
+        <p:cNvGrpSpPr/>
+        <p:nvPr/>
+      </p:nvGrpSpPr>
+      <p:grpSpPr/>
+      <p:sp>
+        <p:nvSpPr>
+          <p:cNvPr id="2" name="Rectangle 1"/>
+          <p:cNvSpPr/>
+          <p:nvPr/>
+        </p:nvSpPr>
+        <p:spPr>
+          <a:xfrm>
+            <a:off x="0" y="0"/>
+            <a:ext cx="12191695" cy="960120"/>
+          </a:xfrm>
+          <a:prstGeom prst="rect">
+            <a:avLst/>
+          </a:prstGeom>
+          <a:solidFill>
+            <a:srgbClr val="095292"/>
+          </a:solidFill>
+          <a:ln>
+            <a:noFill/>
+          </a:ln>
+        </p:spPr>
+        <p:style>
+          <a:lnRef idx="1">
+            <a:schemeClr val="accent1"/>
+          </a:lnRef>
+          <a:fillRef idx="3">
+            <a:schemeClr val="accent1"/>
+          </a:fillRef>
+          <a:effectRef idx="2">
+            <a:schemeClr val="accent1"/>
+          </a:effectRef>
+          <a:fontRef idx="minor">
+            <a:schemeClr val="lt1"/>
+          </a:fontRef>
+        </p:style>
+        <p:txBody>
+          <a:bodyPr rtlCol="0" anchor="ctr"/>
+          <a:lstStyle/>
+          <a:p>
+            <a:pPr algn="ctr"/>
+          </a:p>
+        </p:txBody>
+      </p:sp>
+      <p:sp>
+        <p:nvSpPr>
+          <p:cNvPr id="3" name="Rectangle 2"/>
+          <p:cNvSpPr/>
+          <p:nvPr/>
+        </p:nvSpPr>
+        <p:spPr>
+          <a:xfrm>
+            <a:off x="0" y="960120"/>
+            <a:ext cx="12191695" cy="41148"/>
+          </a:xfrm>
+          <a:prstGeom prst="rect">
+            <a:avLst/>
+          </a:prstGeom>
+          <a:solidFill>
+            <a:srgbClr val="FFD000"/>
+          </a:solidFill>
+          <a:ln>
+            <a:noFill/>
+          </a:ln>
+        </p:spPr>
+        <p:style>
+          <a:lnRef idx="1">
+            <a:schemeClr val="accent1"/>
+          </a:lnRef>
+          <a:fillRef idx="3">
+            <a:schemeClr val="accent1"/>
+          </a:fillRef>
+          <a:effectRef idx="2">
+            <a:schemeClr val="accent1"/>
+          </a:effectRef>
+          <a:fontRef idx="minor">
+            <a:schemeClr val="lt1"/>
+          </a:fontRef>
+        </p:style>
+        <p:txBody>
+          <a:bodyPr rtlCol="0" anchor="ctr"/>
+          <a:lstStyle/>
+          <a:p>
+            <a:pPr algn="ctr"/>
+          </a:p>
+        </p:txBody>
+      </p:sp>
+      <p:sp>
+        <p:nvSpPr>
+          <p:cNvPr id="4" name="TextBox 3"/>
+          <p:cNvSpPr txBox="1"/>
+          <p:nvPr/>
+        </p:nvSpPr>
+        <p:spPr>
+          <a:xfrm>
+            <a:off x="457200" y="164592"/>
+            <a:ext cx="11277295" cy="502920"/>
+          </a:xfrm>
+          <a:prstGeom prst="rect">
+            <a:avLst/>
+          </a:prstGeom>
+          <a:noFill/>
+        </p:spPr>
+        <p:txBody>
+          <a:bodyPr wrap="square">
+            <a:spAutoFit/>
+          </a:bodyPr>
+          <a:lstStyle/>
+          <a:p>
+            <a:r>
+              <a:rPr sz="2600" b="1" i="0">
+                <a:solidFill>
+                  <a:srgbClr val="FFFFFF"/>
+                </a:solidFill>
+                <a:latin typeface="Calibri"/>
+              </a:rPr>
+              <a:t>El cierre del curso: conectar lo hecho con el trabajo real (1/2)</a:t>
+            </a:r>
+          </a:p>
+        </p:txBody>
+      </p:sp>
+      <p:sp>
+        <p:nvSpPr>
+          <p:cNvPr id="5" name="TextBox 4"/>
+          <p:cNvSpPr txBox="1"/>
+          <p:nvPr/>
+        </p:nvSpPr>
+        <p:spPr>
+          <a:xfrm>
+            <a:off x="457200" y="1170432"/>
+            <a:ext cx="11277295" cy="5230368"/>
+          </a:xfrm>
+          <a:prstGeom prst="rect">
+            <a:avLst/>
+          </a:prstGeom>
+          <a:noFill/>
+        </p:spPr>
+        <p:txBody>
+          <a:bodyPr wrap="square">
+            <a:spAutoFit/>
+          </a:bodyPr>
+          <a:lstStyle/>
+          <a:p>
+            <a:pPr>
+              <a:spcAft>
+                <a:spcPts val="800"/>
+              </a:spcAft>
+            </a:pPr>
+            <a:r>
+              <a:rPr sz="2000" b="0" i="0">
+                <a:solidFill>
+                  <a:srgbClr val="333333"/>
+                </a:solidFill>
+                <a:latin typeface="Calibri"/>
+              </a:rPr>
+              <a:t>–   El cierre del curso debe conectar lo hecho con el trabajo real, porque de eso depende que el estudiante conserve los scripts en vez de borrarlos al terminar el semestre.</a:t>
+            </a:r>
+          </a:p>
+          <a:p>
+            <a:pPr>
+              <a:spcAft>
+                <a:spcPts val="800"/>
+              </a:spcAft>
+            </a:pPr>
+            <a:r>
+              <a:rPr sz="2000" b="0" i="0">
+                <a:solidFill>
+                  <a:srgbClr val="333333"/>
+                </a:solidFill>
+                <a:latin typeface="Calibri"/>
+              </a:rPr>
+              <a:t>–   Lo que el estudiante produjo (un ER justificado, un DDL con restricciones declarativas, una matriz de privilegios, procedimientos con manejo de errores, disparadores de auditoria</a:t>
+            </a:r>
+          </a:p>
+          <a:p>
+            <a:pPr>
+              <a:spcAft>
+                <a:spcPts val="800"/>
+              </a:spcAft>
+            </a:pPr>
+            <a:r>
+              <a:rPr sz="2000" b="0" i="0">
+                <a:solidFill>
+                  <a:srgbClr val="333333"/>
+                </a:solidFill>
+                <a:latin typeface="Calibri"/>
+              </a:rPr>
+              <a:t>–   Un analisis de plan de ejecucion y un contrato de operaciones) es literalmente el contenido de las tareas de un desarrollador de base de datos o de un administrador junior en su primer ano de trabajo.</a:t>
+            </a:r>
+          </a:p>
+          <a:p>
+            <a:pPr>
+              <a:spcAft>
+                <a:spcPts val="800"/>
+              </a:spcAft>
+            </a:pPr>
+            <a:r>
+              <a:rPr sz="2000" b="0" i="0">
+                <a:solidFill>
+                  <a:srgbClr val="333333"/>
+                </a:solidFill>
+                <a:latin typeface="Calibri"/>
+              </a:rPr>
+              <a:t>–   Leer un plan de ejecucion y decidir si un indice sobra es una habilidad que se paga.</a:t>
+            </a:r>
+          </a:p>
+        </p:txBody>
+      </p:sp>
+      <p:sp>
+        <p:nvSpPr>
+          <p:cNvPr id="6" name="TextBox 5"/>
+          <p:cNvSpPr txBox="1"/>
+          <p:nvPr/>
+        </p:nvSpPr>
+        <p:spPr>
+          <a:xfrm>
+            <a:off x="11185855" y="6473952"/>
+            <a:ext cx="640080" cy="274320"/>
+          </a:xfrm>
+          <a:prstGeom prst="rect">
+            <a:avLst/>
+          </a:prstGeom>
+          <a:noFill/>
+        </p:spPr>
+        <p:txBody>
+          <a:bodyPr wrap="square">
+            <a:spAutoFit/>
+          </a:bodyPr>
+          <a:lstStyle/>
+          <a:p>
+            <a:pPr algn="r"/>
+            <a:r>
+              <a:rPr sz="1100" b="0" i="0">
+                <a:solidFill>
+                  <a:srgbClr val="666666"/>
+                </a:solidFill>
+                <a:latin typeface="Calibri"/>
+              </a:rPr>
+              <a:t>16</a:t>
+            </a:r>
+          </a:p>
+        </p:txBody>
+      </p:sp>
+    </p:spTree>
+  </p:cSld>
+  <p:clrMapOvr>
+    <a:masterClrMapping/>
+  </p:clrMapOvr>
+</p:sld>
+</file>
+
+<file path=ppt/slides/slide17.xml><?xml version="1.0" encoding="utf-8"?>
+<p:sld xmlns:a="http://schemas.openxmlformats.org/drawingml/2006/main" xmlns:p="http://schemas.openxmlformats.org/presentationml/2006/main" xmlns:r="http://schemas.openxmlformats.org/officeDocument/2006/relationships">
+  <p:cSld>
+    <p:bg>
+      <p:bgPr>
+        <a:solidFill>
+          <a:srgbClr val="FFFFFF"/>
+        </a:solidFill>
+        <a:effectLst/>
+      </p:bgPr>
+    </p:bg>
+    <p:spTree>
+      <p:nvGrpSpPr>
+        <p:cNvPr id="1" name=""/>
+        <p:cNvGrpSpPr/>
+        <p:nvPr/>
+      </p:nvGrpSpPr>
+      <p:grpSpPr/>
+      <p:sp>
+        <p:nvSpPr>
+          <p:cNvPr id="2" name="Rectangle 1"/>
+          <p:cNvSpPr/>
+          <p:nvPr/>
+        </p:nvSpPr>
+        <p:spPr>
+          <a:xfrm>
+            <a:off x="0" y="0"/>
+            <a:ext cx="12191695" cy="960120"/>
+          </a:xfrm>
+          <a:prstGeom prst="rect">
+            <a:avLst/>
+          </a:prstGeom>
+          <a:solidFill>
+            <a:srgbClr val="095292"/>
+          </a:solidFill>
+          <a:ln>
+            <a:noFill/>
+          </a:ln>
+        </p:spPr>
+        <p:style>
+          <a:lnRef idx="1">
+            <a:schemeClr val="accent1"/>
+          </a:lnRef>
+          <a:fillRef idx="3">
+            <a:schemeClr val="accent1"/>
+          </a:fillRef>
+          <a:effectRef idx="2">
+            <a:schemeClr val="accent1"/>
+          </a:effectRef>
+          <a:fontRef idx="minor">
+            <a:schemeClr val="lt1"/>
+          </a:fontRef>
+        </p:style>
+        <p:txBody>
+          <a:bodyPr rtlCol="0" anchor="ctr"/>
+          <a:lstStyle/>
+          <a:p>
+            <a:pPr algn="ctr"/>
+          </a:p>
+        </p:txBody>
+      </p:sp>
+      <p:sp>
+        <p:nvSpPr>
+          <p:cNvPr id="3" name="Rectangle 2"/>
+          <p:cNvSpPr/>
+          <p:nvPr/>
+        </p:nvSpPr>
+        <p:spPr>
+          <a:xfrm>
+            <a:off x="0" y="960120"/>
+            <a:ext cx="12191695" cy="41148"/>
+          </a:xfrm>
+          <a:prstGeom prst="rect">
+            <a:avLst/>
+          </a:prstGeom>
+          <a:solidFill>
+            <a:srgbClr val="FFD000"/>
+          </a:solidFill>
+          <a:ln>
+            <a:noFill/>
+          </a:ln>
+        </p:spPr>
+        <p:style>
+          <a:lnRef idx="1">
+            <a:schemeClr val="accent1"/>
+          </a:lnRef>
+          <a:fillRef idx="3">
+            <a:schemeClr val="accent1"/>
+          </a:fillRef>
+          <a:effectRef idx="2">
+            <a:schemeClr val="accent1"/>
+          </a:effectRef>
+          <a:fontRef idx="minor">
+            <a:schemeClr val="lt1"/>
+          </a:fontRef>
+        </p:style>
+        <p:txBody>
+          <a:bodyPr rtlCol="0" anchor="ctr"/>
+          <a:lstStyle/>
+          <a:p>
+            <a:pPr algn="ctr"/>
+          </a:p>
+        </p:txBody>
+      </p:sp>
+      <p:sp>
+        <p:nvSpPr>
+          <p:cNvPr id="4" name="TextBox 3"/>
+          <p:cNvSpPr txBox="1"/>
+          <p:nvPr/>
+        </p:nvSpPr>
+        <p:spPr>
+          <a:xfrm>
+            <a:off x="457200" y="164592"/>
+            <a:ext cx="11277295" cy="502920"/>
+          </a:xfrm>
+          <a:prstGeom prst="rect">
+            <a:avLst/>
+          </a:prstGeom>
+          <a:noFill/>
+        </p:spPr>
+        <p:txBody>
+          <a:bodyPr wrap="square">
+            <a:spAutoFit/>
+          </a:bodyPr>
+          <a:lstStyle/>
+          <a:p>
+            <a:r>
+              <a:rPr sz="2600" b="1" i="0">
+                <a:solidFill>
+                  <a:srgbClr val="FFFFFF"/>
+                </a:solidFill>
+                <a:latin typeface="Calibri"/>
+              </a:rPr>
+              <a:t>El cierre del curso: conectar lo hecho con el trabajo real (2/2)</a:t>
+            </a:r>
+          </a:p>
+        </p:txBody>
+      </p:sp>
+      <p:sp>
+        <p:nvSpPr>
+          <p:cNvPr id="5" name="TextBox 4"/>
+          <p:cNvSpPr txBox="1"/>
+          <p:nvPr/>
+        </p:nvSpPr>
+        <p:spPr>
+          <a:xfrm>
+            <a:off x="457200" y="1170432"/>
+            <a:ext cx="11277295" cy="5230368"/>
+          </a:xfrm>
+          <a:prstGeom prst="rect">
+            <a:avLst/>
+          </a:prstGeom>
+          <a:noFill/>
+        </p:spPr>
+        <p:txBody>
+          <a:bodyPr wrap="square">
+            <a:spAutoFit/>
+          </a:bodyPr>
+          <a:lstStyle/>
+          <a:p>
+            <a:pPr>
+              <a:spcAft>
+                <a:spcPts val="800"/>
+              </a:spcAft>
+            </a:pPr>
+            <a:r>
+              <a:rPr sz="2000" b="0" i="0">
+                <a:solidFill>
+                  <a:srgbClr val="333333"/>
+                </a:solidFill>
+                <a:latin typeface="Calibri"/>
+              </a:rPr>
+              <a:t>–   El SQL que se escribio ahi es el mismo que corre en un servidor de produccion; lo que cambia en un entorno profesional es el volumen de datos y las consecuencias de un error, no la sintaxis.</a:t>
+            </a:r>
+          </a:p>
+          <a:p>
+            <a:pPr>
+              <a:spcAft>
+                <a:spcPts val="800"/>
+              </a:spcAft>
+            </a:pPr>
+            <a:r>
+              <a:rPr sz="2000" b="0" i="0">
+                <a:solidFill>
+                  <a:srgbClr val="333333"/>
+                </a:solidFill>
+                <a:latin typeface="Calibri"/>
+              </a:rPr>
+              <a:t>–   Y la autoevaluacion del taller conviene pedirla con una consigna concreta en vez de una reflexion vaga: nombren la decision de modelado que mas les costo revertir y en que clase se dieron cuenta de que estaba mal.</a:t>
+            </a:r>
+          </a:p>
+          <a:p>
+            <a:pPr>
+              <a:spcAft>
+                <a:spcPts val="800"/>
+              </a:spcAft>
+            </a:pPr>
+            <a:r>
+              <a:rPr sz="2000" b="0" i="0">
+                <a:solidFill>
+                  <a:srgbClr val="333333"/>
+                </a:solidFill>
+                <a:latin typeface="Calibri"/>
+              </a:rPr>
+              <a:t>–   Esa respuesta es la que mejor predice si aprendieron, y ademas le da al docente material real para ajustar el curso el proximo semestre.</a:t>
+            </a:r>
+          </a:p>
+        </p:txBody>
+      </p:sp>
+      <p:sp>
+        <p:nvSpPr>
+          <p:cNvPr id="6" name="TextBox 5"/>
+          <p:cNvSpPr txBox="1"/>
+          <p:nvPr/>
+        </p:nvSpPr>
+        <p:spPr>
+          <a:xfrm>
+            <a:off x="11185855" y="6473952"/>
+            <a:ext cx="640080" cy="274320"/>
+          </a:xfrm>
+          <a:prstGeom prst="rect">
+            <a:avLst/>
+          </a:prstGeom>
+          <a:noFill/>
+        </p:spPr>
+        <p:txBody>
+          <a:bodyPr wrap="square">
+            <a:spAutoFit/>
+          </a:bodyPr>
+          <a:lstStyle/>
+          <a:p>
+            <a:pPr algn="r"/>
+            <a:r>
+              <a:rPr sz="1100" b="0" i="0">
+                <a:solidFill>
+                  <a:srgbClr val="666666"/>
+                </a:solidFill>
+                <a:latin typeface="Calibri"/>
+              </a:rPr>
+              <a:t>17</a:t>
+            </a:r>
+          </a:p>
+        </p:txBody>
+      </p:sp>
+    </p:spTree>
+  </p:cSld>
+  <p:clrMapOvr>
+    <a:masterClrMapping/>
+  </p:clrMapOvr>
+</p:sld>
+</file>
+
+<file path=ppt/slides/slide18.xml><?xml version="1.0" encoding="utf-8"?>
+<p:sld xmlns:a="http://schemas.openxmlformats.org/drawingml/2006/main" xmlns:p="http://schemas.openxmlformats.org/presentationml/2006/main" xmlns:r="http://schemas.openxmlformats.org/officeDocument/2006/relationships">
+  <p:cSld>
+    <p:bg>
+      <p:bgPr>
+        <a:solidFill>
+          <a:srgbClr val="FFFFFF"/>
+        </a:solidFill>
+        <a:effectLst/>
+      </p:bgPr>
+    </p:bg>
+    <p:spTree>
+      <p:nvGrpSpPr>
+        <p:cNvPr id="1" name=""/>
+        <p:cNvGrpSpPr/>
+        <p:nvPr/>
+      </p:nvGrpSpPr>
+      <p:grpSpPr/>
+      <p:sp>
+        <p:nvSpPr>
+          <p:cNvPr id="2" name="Rectangle 1"/>
+          <p:cNvSpPr/>
+          <p:nvPr/>
+        </p:nvSpPr>
+        <p:spPr>
+          <a:xfrm>
+            <a:off x="0" y="0"/>
+            <a:ext cx="12191695" cy="960120"/>
+          </a:xfrm>
+          <a:prstGeom prst="rect">
+            <a:avLst/>
+          </a:prstGeom>
+          <a:solidFill>
+            <a:srgbClr val="095292"/>
+          </a:solidFill>
+          <a:ln>
+            <a:noFill/>
+          </a:ln>
+        </p:spPr>
+        <p:style>
+          <a:lnRef idx="1">
+            <a:schemeClr val="accent1"/>
+          </a:lnRef>
+          <a:fillRef idx="3">
+            <a:schemeClr val="accent1"/>
+          </a:fillRef>
+          <a:effectRef idx="2">
+            <a:schemeClr val="accent1"/>
+          </a:effectRef>
+          <a:fontRef idx="minor">
+            <a:schemeClr val="lt1"/>
+          </a:fontRef>
+        </p:style>
+        <p:txBody>
+          <a:bodyPr rtlCol="0" anchor="ctr"/>
+          <a:lstStyle/>
+          <a:p>
+            <a:pPr algn="ctr"/>
+          </a:p>
+        </p:txBody>
+      </p:sp>
+      <p:sp>
+        <p:nvSpPr>
+          <p:cNvPr id="3" name="Rectangle 2"/>
+          <p:cNvSpPr/>
+          <p:nvPr/>
+        </p:nvSpPr>
+        <p:spPr>
+          <a:xfrm>
+            <a:off x="0" y="960120"/>
+            <a:ext cx="12191695" cy="41148"/>
+          </a:xfrm>
+          <a:prstGeom prst="rect">
+            <a:avLst/>
+          </a:prstGeom>
+          <a:solidFill>
+            <a:srgbClr val="FFD000"/>
+          </a:solidFill>
+          <a:ln>
+            <a:noFill/>
+          </a:ln>
+        </p:spPr>
+        <p:style>
+          <a:lnRef idx="1">
+            <a:schemeClr val="accent1"/>
+          </a:lnRef>
+          <a:fillRef idx="3">
+            <a:schemeClr val="accent1"/>
+          </a:fillRef>
+          <a:effectRef idx="2">
+            <a:schemeClr val="accent1"/>
+          </a:effectRef>
+          <a:fontRef idx="minor">
+            <a:schemeClr val="lt1"/>
+          </a:fontRef>
+        </p:style>
+        <p:txBody>
+          <a:bodyPr rtlCol="0" anchor="ctr"/>
+          <a:lstStyle/>
+          <a:p>
+            <a:pPr algn="ctr"/>
+          </a:p>
+        </p:txBody>
+      </p:sp>
+      <p:sp>
+        <p:nvSpPr>
+          <p:cNvPr id="4" name="TextBox 3"/>
+          <p:cNvSpPr txBox="1"/>
+          <p:nvPr/>
+        </p:nvSpPr>
+        <p:spPr>
+          <a:xfrm>
+            <a:off x="457200" y="164592"/>
+            <a:ext cx="11277295" cy="502920"/>
+          </a:xfrm>
+          <a:prstGeom prst="rect">
+            <a:avLst/>
+          </a:prstGeom>
+          <a:noFill/>
+        </p:spPr>
+        <p:txBody>
+          <a:bodyPr wrap="square">
+            <a:spAutoFit/>
+          </a:bodyPr>
+          <a:lstStyle/>
+          <a:p>
+            <a:r>
+              <a:rPr sz="2600" b="1" i="0">
+                <a:solidFill>
+                  <a:srgbClr val="FFFFFF"/>
+                </a:solidFill>
+                <a:latin typeface="Calibri"/>
+              </a:rPr>
+              <a:t>Como se ordena la sesion de hoy</a:t>
+            </a:r>
+          </a:p>
+        </p:txBody>
+      </p:sp>
+      <p:sp>
+        <p:nvSpPr>
+          <p:cNvPr id="5" name="TextBox 4"/>
+          <p:cNvSpPr txBox="1"/>
+          <p:nvPr/>
+        </p:nvSpPr>
+        <p:spPr>
+          <a:xfrm>
+            <a:off x="457200" y="1170432"/>
+            <a:ext cx="11277295" cy="5230368"/>
+          </a:xfrm>
+          <a:prstGeom prst="rect">
+            <a:avLst/>
+          </a:prstGeom>
+          <a:noFill/>
+        </p:spPr>
+        <p:txBody>
+          <a:bodyPr wrap="square">
+            <a:spAutoFit/>
+          </a:bodyPr>
+          <a:lstStyle/>
+          <a:p>
+            <a:pPr>
+              <a:spcAft>
+                <a:spcPts val="800"/>
+              </a:spcAft>
+            </a:pPr>
+            <a:r>
+              <a:rPr sz="2000" b="0" i="0">
+                <a:solidFill>
+                  <a:srgbClr val="333333"/>
+                </a:solidFill>
+                <a:latin typeface="Calibri"/>
+              </a:rPr>
+              <a:t>–   Sustentación </a:t>
+            </a:r>
+            <a:r>
+              <a:rPr sz="2000" b="1" i="0">
+                <a:solidFill>
+                  <a:srgbClr val="333333"/>
+                </a:solidFill>
+                <a:latin typeface="Calibri"/>
+              </a:rPr>
+              <a:t>en vivo</a:t>
+            </a:r>
+            <a:r>
+              <a:rPr sz="2000" b="0" i="0">
+                <a:solidFill>
+                  <a:srgbClr val="333333"/>
+                </a:solidFill>
+                <a:latin typeface="Calibri"/>
+              </a:rPr>
+              <a:t>, en este bloque: no se reemplaza por video grabado.</a:t>
+            </a:r>
+          </a:p>
+          <a:p>
+            <a:pPr>
+              <a:spcAft>
+                <a:spcPts val="800"/>
+              </a:spcAft>
+            </a:pPr>
+            <a:r>
+              <a:rPr sz="2000" b="0" i="0">
+                <a:solidFill>
+                  <a:srgbClr val="333333"/>
+                </a:solidFill>
+                <a:latin typeface="Calibri"/>
+              </a:rPr>
+              <a:t>–   Turnos de </a:t>
+            </a:r>
+            <a:r>
+              <a:rPr sz="2000" b="1" i="0">
+                <a:solidFill>
+                  <a:srgbClr val="333333"/>
+                </a:solidFill>
+                <a:latin typeface="Calibri"/>
+              </a:rPr>
+              <a:t>5–8 min de pitch + Q&amp;A</a:t>
+            </a:r>
+            <a:r>
+              <a:rPr sz="2000" b="0" i="0">
+                <a:solidFill>
+                  <a:srgbClr val="333333"/>
+                </a:solidFill>
+                <a:latin typeface="Calibri"/>
+              </a:rPr>
+              <a:t>; el orden se sortea al empezar.</a:t>
+            </a:r>
+          </a:p>
+          <a:p>
+            <a:pPr>
+              <a:spcAft>
+                <a:spcPts val="800"/>
+              </a:spcAft>
+            </a:pPr>
+            <a:r>
+              <a:rPr sz="2000" b="0" i="0">
+                <a:solidFill>
+                  <a:srgbClr val="333333"/>
+                </a:solidFill>
+                <a:latin typeface="Calibri"/>
+              </a:rPr>
+              <a:t>–   Ten listo: </a:t>
+            </a:r>
+            <a:r>
+              <a:rPr sz="2000" b="1" i="0">
+                <a:solidFill>
+                  <a:srgbClr val="333333"/>
+                </a:solidFill>
+                <a:latin typeface="Calibri"/>
+              </a:rPr>
+              <a:t>ZIP/PDF final subido antes del turno + sustentacion en vivo 5-8 min + Q&amp;A</a:t>
+            </a:r>
+          </a:p>
+          <a:p>
+            <a:pPr>
+              <a:spcAft>
+                <a:spcPts val="800"/>
+              </a:spcAft>
+            </a:pPr>
+            <a:r>
+              <a:rPr sz="2000" b="0" i="0">
+                <a:solidFill>
+                  <a:srgbClr val="333333"/>
+                </a:solidFill>
+                <a:latin typeface="Calibri"/>
+              </a:rPr>
+              <a:t>–   En tu turno muestra una </a:t>
+            </a:r>
+            <a:r>
+              <a:rPr sz="2000" b="1" i="0">
+                <a:solidFill>
+                  <a:srgbClr val="333333"/>
+                </a:solidFill>
+                <a:latin typeface="Calibri"/>
+              </a:rPr>
+              <a:t>ejecución real</a:t>
+            </a:r>
+            <a:r>
+              <a:rPr sz="2000" b="0" i="0">
+                <a:solidFill>
+                  <a:srgbClr val="333333"/>
+                </a:solidFill>
+                <a:latin typeface="Calibri"/>
+              </a:rPr>
+              <a:t> (procedimiento OK + caso rechazado), no solo capturas.</a:t>
+            </a:r>
+          </a:p>
+          <a:p>
+            <a:pPr>
+              <a:spcAft>
+                <a:spcPts val="800"/>
+              </a:spcAft>
+            </a:pPr>
+            <a:r>
+              <a:rPr sz="2000" b="0" i="0">
+                <a:solidFill>
+                  <a:srgbClr val="333333"/>
+                </a:solidFill>
+                <a:latin typeface="Calibri"/>
+              </a:rPr>
+              <a:t>–   Mientras otros presentan, escuchas: el cierre del curso se hace con todo el grupo.</a:t>
+            </a:r>
+          </a:p>
+        </p:txBody>
+      </p:sp>
+      <p:sp>
+        <p:nvSpPr>
+          <p:cNvPr id="6" name="TextBox 5"/>
+          <p:cNvSpPr txBox="1"/>
+          <p:nvPr/>
+        </p:nvSpPr>
+        <p:spPr>
+          <a:xfrm>
+            <a:off x="11185855" y="6473952"/>
+            <a:ext cx="640080" cy="274320"/>
+          </a:xfrm>
+          <a:prstGeom prst="rect">
+            <a:avLst/>
+          </a:prstGeom>
+          <a:noFill/>
+        </p:spPr>
+        <p:txBody>
+          <a:bodyPr wrap="square">
+            <a:spAutoFit/>
+          </a:bodyPr>
+          <a:lstStyle/>
+          <a:p>
+            <a:pPr algn="r"/>
+            <a:r>
+              <a:rPr sz="1100" b="0" i="0">
+                <a:solidFill>
+                  <a:srgbClr val="666666"/>
+                </a:solidFill>
+                <a:latin typeface="Calibri"/>
+              </a:rPr>
+              <a:t>18</a:t>
+            </a:r>
+          </a:p>
+        </p:txBody>
+      </p:sp>
+    </p:spTree>
+  </p:cSld>
+  <p:clrMapOvr>
+    <a:masterClrMapping/>
+  </p:clrMapOvr>
+</p:sld>
+</file>
+
+<file path=ppt/slides/slide19.xml><?xml version="1.0" encoding="utf-8"?>
+<p:sld xmlns:a="http://schemas.openxmlformats.org/drawingml/2006/main" xmlns:p="http://schemas.openxmlformats.org/presentationml/2006/main" xmlns:r="http://schemas.openxmlformats.org/officeDocument/2006/relationships">
+  <p:cSld>
+    <p:bg>
+      <p:bgPr>
+        <a:solidFill>
+          <a:srgbClr val="FFFFFF"/>
+        </a:solidFill>
+        <a:effectLst/>
+      </p:bgPr>
+    </p:bg>
+    <p:spTree>
+      <p:nvGrpSpPr>
+        <p:cNvPr id="1" name=""/>
+        <p:cNvGrpSpPr/>
+        <p:nvPr/>
+      </p:nvGrpSpPr>
+      <p:grpSpPr/>
+      <p:sp>
+        <p:nvSpPr>
+          <p:cNvPr id="2" name="Rectangle 1"/>
+          <p:cNvSpPr/>
+          <p:nvPr/>
+        </p:nvSpPr>
+        <p:spPr>
+          <a:xfrm>
+            <a:off x="0" y="0"/>
+            <a:ext cx="12191695" cy="1170432"/>
+          </a:xfrm>
+          <a:prstGeom prst="rect">
+            <a:avLst/>
+          </a:prstGeom>
+          <a:solidFill>
+            <a:srgbClr val="095292"/>
+          </a:solidFill>
+          <a:ln>
+            <a:noFill/>
+          </a:ln>
+        </p:spPr>
+        <p:style>
+          <a:lnRef idx="1">
+            <a:schemeClr val="accent1"/>
+          </a:lnRef>
+          <a:fillRef idx="3">
+            <a:schemeClr val="accent1"/>
+          </a:fillRef>
+          <a:effectRef idx="2">
+            <a:schemeClr val="accent1"/>
+          </a:effectRef>
+          <a:fontRef idx="minor">
+            <a:schemeClr val="lt1"/>
+          </a:fontRef>
+        </p:style>
+        <p:txBody>
+          <a:bodyPr rtlCol="0" anchor="ctr"/>
+          <a:lstStyle/>
+          <a:p>
+            <a:pPr algn="ctr"/>
+          </a:p>
+        </p:txBody>
+      </p:sp>
+      <p:sp>
+        <p:nvSpPr>
+          <p:cNvPr id="3" name="Rectangle 2"/>
+          <p:cNvSpPr/>
+          <p:nvPr/>
+        </p:nvSpPr>
+        <p:spPr>
+          <a:xfrm>
+            <a:off x="0" y="1170432"/>
+            <a:ext cx="12191695" cy="41148"/>
+          </a:xfrm>
+          <a:prstGeom prst="rect">
+            <a:avLst/>
+          </a:prstGeom>
+          <a:solidFill>
+            <a:srgbClr val="FFD000"/>
+          </a:solidFill>
+          <a:ln>
+            <a:noFill/>
+          </a:ln>
+        </p:spPr>
+        <p:style>
+          <a:lnRef idx="1">
+            <a:schemeClr val="accent1"/>
+          </a:lnRef>
+          <a:fillRef idx="3">
+            <a:schemeClr val="accent1"/>
+          </a:fillRef>
+          <a:effectRef idx="2">
+            <a:schemeClr val="accent1"/>
+          </a:effectRef>
+          <a:fontRef idx="minor">
+            <a:schemeClr val="lt1"/>
+          </a:fontRef>
+        </p:style>
+        <p:txBody>
+          <a:bodyPr rtlCol="0" anchor="ctr"/>
+          <a:lstStyle/>
+          <a:p>
+            <a:pPr algn="ctr"/>
+          </a:p>
+        </p:txBody>
+      </p:sp>
+      <p:sp>
+        <p:nvSpPr>
+          <p:cNvPr id="4" name="TextBox 3"/>
+          <p:cNvSpPr txBox="1"/>
+          <p:nvPr/>
+        </p:nvSpPr>
+        <p:spPr>
+          <a:xfrm>
+            <a:off x="457200" y="164592"/>
+            <a:ext cx="11277295" cy="384048"/>
+          </a:xfrm>
+          <a:prstGeom prst="rect">
+            <a:avLst/>
+          </a:prstGeom>
+          <a:noFill/>
+        </p:spPr>
+        <p:txBody>
+          <a:bodyPr wrap="square">
+            <a:spAutoFit/>
+          </a:bodyPr>
+          <a:lstStyle/>
+          <a:p>
+            <a:r>
+              <a:rPr sz="2600" b="1" i="0">
+                <a:solidFill>
+                  <a:srgbClr val="FFFFFF"/>
+                </a:solidFill>
+                <a:latin typeface="Calibri"/>
+              </a:rPr>
+              <a:t>Herramientas de hoy</a:t>
+            </a:r>
+          </a:p>
+        </p:txBody>
+      </p:sp>
+      <p:sp>
+        <p:nvSpPr>
+          <p:cNvPr id="5" name="TextBox 4"/>
+          <p:cNvSpPr txBox="1"/>
+          <p:nvPr/>
+        </p:nvSpPr>
+        <p:spPr>
+          <a:xfrm>
+            <a:off x="457200" y="566928"/>
+            <a:ext cx="11277295" cy="411480"/>
+          </a:xfrm>
+          <a:prstGeom prst="rect">
+            <a:avLst/>
+          </a:prstGeom>
+          <a:noFill/>
+        </p:spPr>
+        <p:txBody>
+          <a:bodyPr wrap="square">
+            <a:spAutoFit/>
+          </a:bodyPr>
+          <a:lstStyle/>
+          <a:p>
+            <a:r>
+              <a:rPr sz="1400" b="0" i="0">
+                <a:solidFill>
+                  <a:srgbClr val="B8D8EE"/>
+                </a:solidFill>
+                <a:latin typeface="Calibri"/>
+              </a:rPr>
+              <a:t>Gratis · navegador o free tier</a:t>
+            </a:r>
+          </a:p>
+        </p:txBody>
+      </p:sp>
+      <p:sp>
+        <p:nvSpPr>
+          <p:cNvPr id="6" name="Rounded Rectangle 5"/>
+          <p:cNvSpPr/>
+          <p:nvPr/>
+        </p:nvSpPr>
+        <p:spPr>
+          <a:xfrm>
+            <a:off x="457200" y="1591056"/>
+            <a:ext cx="3624986" cy="2331720"/>
+          </a:xfrm>
+          <a:prstGeom prst="roundRect">
+            <a:avLst>
+              <a:gd name="adj" fmla="val 12000"/>
+            </a:avLst>
+          </a:prstGeom>
+          <a:solidFill>
+            <a:srgbClr val="F2F2F2"/>
+          </a:solidFill>
+          <a:ln>
+            <a:noFill/>
+          </a:ln>
+        </p:spPr>
+        <p:style>
+          <a:lnRef idx="1">
+            <a:schemeClr val="accent1"/>
+          </a:lnRef>
+          <a:fillRef idx="3">
+            <a:schemeClr val="accent1"/>
+          </a:fillRef>
+          <a:effectRef idx="2">
+            <a:schemeClr val="accent1"/>
+          </a:effectRef>
+          <a:fontRef idx="minor">
+            <a:schemeClr val="lt1"/>
+          </a:fontRef>
+        </p:style>
+        <p:txBody>
+          <a:bodyPr rtlCol="0" anchor="ctr"/>
+          <a:lstStyle/>
+          <a:p>
+            <a:pPr algn="ctr"/>
+          </a:p>
+        </p:txBody>
+      </p:sp>
+      <p:sp>
+        <p:nvSpPr>
+          <p:cNvPr id="7" name="Rectangle 6"/>
+          <p:cNvSpPr/>
+          <p:nvPr/>
+        </p:nvSpPr>
+        <p:spPr>
+          <a:xfrm>
+            <a:off x="457200" y="1591056"/>
+            <a:ext cx="3624986" cy="64008"/>
+          </a:xfrm>
+          <a:prstGeom prst="rect">
+            <a:avLst/>
+          </a:prstGeom>
+          <a:solidFill>
+            <a:srgbClr val="095292"/>
+          </a:solidFill>
+          <a:ln>
+            <a:noFill/>
+          </a:ln>
+        </p:spPr>
+        <p:style>
+          <a:lnRef idx="1">
+            <a:schemeClr val="accent1"/>
+          </a:lnRef>
+          <a:fillRef idx="3">
+            <a:schemeClr val="accent1"/>
+          </a:fillRef>
+          <a:effectRef idx="2">
+            <a:schemeClr val="accent1"/>
+          </a:effectRef>
+          <a:fontRef idx="minor">
+            <a:schemeClr val="lt1"/>
+          </a:fontRef>
+        </p:style>
+        <p:txBody>
+          <a:bodyPr rtlCol="0" anchor="ctr"/>
+          <a:lstStyle/>
+          <a:p>
+            <a:pPr algn="ctr"/>
+          </a:p>
+        </p:txBody>
+      </p:sp>
+      <p:sp>
+        <p:nvSpPr>
+          <p:cNvPr id="8" name="Rectangle 7"/>
+          <p:cNvSpPr/>
+          <p:nvPr/>
+        </p:nvSpPr>
+        <p:spPr>
+          <a:xfrm>
+            <a:off x="457200" y="1655064"/>
+            <a:ext cx="3624986" cy="27432"/>
+          </a:xfrm>
+          <a:prstGeom prst="rect">
+            <a:avLst/>
+          </a:prstGeom>
+          <a:solidFill>
+            <a:srgbClr val="FFD000"/>
+          </a:solidFill>
+          <a:ln>
+            <a:noFill/>
+          </a:ln>
+        </p:spPr>
+        <p:style>
+          <a:lnRef idx="1">
+            <a:schemeClr val="accent1"/>
+          </a:lnRef>
+          <a:fillRef idx="3">
+            <a:schemeClr val="accent1"/>
+          </a:fillRef>
+          <a:effectRef idx="2">
+            <a:schemeClr val="accent1"/>
+          </a:effectRef>
+          <a:fontRef idx="minor">
+            <a:schemeClr val="lt1"/>
+          </a:fontRef>
+        </p:style>
+        <p:txBody>
+          <a:bodyPr rtlCol="0" anchor="ctr"/>
+          <a:lstStyle/>
+          <a:p>
+            <a:pPr algn="ctr"/>
+          </a:p>
+        </p:txBody>
+      </p:sp>
       <p:pic>
         <p:nvPicPr>
-          <p:cNvPr id="3" name="Picture 2" descr="logo_uniajc_color.png"/>
+          <p:cNvPr id="9" name="Picture 8" descr="google_docs.png"/>
           <p:cNvPicPr>
             <a:picLocks noChangeAspect="1"/>
           </p:cNvPicPr>
@@ -6130,8 +6469,8 @@
         </p:blipFill>
         <p:spPr>
           <a:xfrm>
-            <a:off x="10271455" y="5998464"/>
-            <a:ext cx="1463040" cy="643233"/>
+            <a:off x="1643329" y="1847087"/>
+            <a:ext cx="1252728" cy="1252728"/>
           </a:xfrm>
           <a:prstGeom prst="rect">
             <a:avLst/>
@@ -6140,14 +6479,14 @@
       </p:pic>
       <p:sp>
         <p:nvSpPr>
-          <p:cNvPr id="4" name="TextBox 3"/>
+          <p:cNvPr id="10" name="TextBox 9"/>
           <p:cNvSpPr txBox="1"/>
           <p:nvPr/>
         </p:nvSpPr>
         <p:spPr>
           <a:xfrm>
-            <a:off x="457200" y="1737360"/>
-            <a:ext cx="11277295" cy="1097280"/>
+            <a:off x="530352" y="3191256"/>
+            <a:ext cx="3478682" cy="621792"/>
           </a:xfrm>
           <a:prstGeom prst="rect">
             <a:avLst/>
@@ -6155,32 +6494,456 @@
           <a:noFill/>
         </p:spPr>
         <p:txBody>
-          <a:bodyPr wrap="square" anchor="ctr"/>
+          <a:bodyPr wrap="square" anchor="t"/>
           <a:lstStyle/>
           <a:p>
             <a:pPr algn="ctr"/>
             <a:r>
-              <a:rPr sz="3400" b="1" i="0">
+              <a:rPr sz="1300" b="1" i="0">
                 <a:solidFill>
                   <a:srgbClr val="095292"/>
                 </a:solidFill>
                 <a:latin typeface="Calibri"/>
               </a:rPr>
-              <a:t>Clase 15 · cierre de VetCare DB</a:t>
-            </a:r>
-          </a:p>
-        </p:txBody>
-      </p:sp>
-      <p:sp>
-        <p:nvSpPr>
-          <p:cNvPr id="5" name="TextBox 4"/>
+              <a:t>Google Docs</a:t>
+            </a:r>
+          </a:p>
+          <a:p>
+            <a:pPr algn="ctr">
+              <a:spcBef>
+                <a:spcPts val="200"/>
+              </a:spcBef>
+            </a:pPr>
+            <a:r>
+              <a:rPr sz="1000" b="0" i="0">
+                <a:solidFill>
+                  <a:srgbClr val="666666"/>
+                </a:solidFill>
+                <a:latin typeface="Calibri"/>
+              </a:rPr>
+              <a:t>Informe final</a:t>
+            </a:r>
+          </a:p>
+        </p:txBody>
+      </p:sp>
+      <p:sp>
+        <p:nvSpPr>
+          <p:cNvPr id="11" name="Rounded Rectangle 10"/>
+          <p:cNvSpPr/>
+          <p:nvPr/>
+        </p:nvSpPr>
+        <p:spPr>
+          <a:xfrm>
+            <a:off x="4283354" y="1591056"/>
+            <a:ext cx="3624986" cy="2331720"/>
+          </a:xfrm>
+          <a:prstGeom prst="roundRect">
+            <a:avLst>
+              <a:gd name="adj" fmla="val 12000"/>
+            </a:avLst>
+          </a:prstGeom>
+          <a:solidFill>
+            <a:srgbClr val="F2F2F2"/>
+          </a:solidFill>
+          <a:ln>
+            <a:noFill/>
+          </a:ln>
+        </p:spPr>
+        <p:style>
+          <a:lnRef idx="1">
+            <a:schemeClr val="accent1"/>
+          </a:lnRef>
+          <a:fillRef idx="3">
+            <a:schemeClr val="accent1"/>
+          </a:fillRef>
+          <a:effectRef idx="2">
+            <a:schemeClr val="accent1"/>
+          </a:effectRef>
+          <a:fontRef idx="minor">
+            <a:schemeClr val="lt1"/>
+          </a:fontRef>
+        </p:style>
+        <p:txBody>
+          <a:bodyPr rtlCol="0" anchor="ctr"/>
+          <a:lstStyle/>
+          <a:p>
+            <a:pPr algn="ctr"/>
+          </a:p>
+        </p:txBody>
+      </p:sp>
+      <p:sp>
+        <p:nvSpPr>
+          <p:cNvPr id="12" name="Rectangle 11"/>
+          <p:cNvSpPr/>
+          <p:nvPr/>
+        </p:nvSpPr>
+        <p:spPr>
+          <a:xfrm>
+            <a:off x="4283354" y="1591056"/>
+            <a:ext cx="3624986" cy="64008"/>
+          </a:xfrm>
+          <a:prstGeom prst="rect">
+            <a:avLst/>
+          </a:prstGeom>
+          <a:solidFill>
+            <a:srgbClr val="095292"/>
+          </a:solidFill>
+          <a:ln>
+            <a:noFill/>
+          </a:ln>
+        </p:spPr>
+        <p:style>
+          <a:lnRef idx="1">
+            <a:schemeClr val="accent1"/>
+          </a:lnRef>
+          <a:fillRef idx="3">
+            <a:schemeClr val="accent1"/>
+          </a:fillRef>
+          <a:effectRef idx="2">
+            <a:schemeClr val="accent1"/>
+          </a:effectRef>
+          <a:fontRef idx="minor">
+            <a:schemeClr val="lt1"/>
+          </a:fontRef>
+        </p:style>
+        <p:txBody>
+          <a:bodyPr rtlCol="0" anchor="ctr"/>
+          <a:lstStyle/>
+          <a:p>
+            <a:pPr algn="ctr"/>
+          </a:p>
+        </p:txBody>
+      </p:sp>
+      <p:sp>
+        <p:nvSpPr>
+          <p:cNvPr id="13" name="Rectangle 12"/>
+          <p:cNvSpPr/>
+          <p:nvPr/>
+        </p:nvSpPr>
+        <p:spPr>
+          <a:xfrm>
+            <a:off x="4283354" y="1655064"/>
+            <a:ext cx="3624986" cy="27432"/>
+          </a:xfrm>
+          <a:prstGeom prst="rect">
+            <a:avLst/>
+          </a:prstGeom>
+          <a:solidFill>
+            <a:srgbClr val="FFD000"/>
+          </a:solidFill>
+          <a:ln>
+            <a:noFill/>
+          </a:ln>
+        </p:spPr>
+        <p:style>
+          <a:lnRef idx="1">
+            <a:schemeClr val="accent1"/>
+          </a:lnRef>
+          <a:fillRef idx="3">
+            <a:schemeClr val="accent1"/>
+          </a:fillRef>
+          <a:effectRef idx="2">
+            <a:schemeClr val="accent1"/>
+          </a:effectRef>
+          <a:fontRef idx="minor">
+            <a:schemeClr val="lt1"/>
+          </a:fontRef>
+        </p:style>
+        <p:txBody>
+          <a:bodyPr rtlCol="0" anchor="ctr"/>
+          <a:lstStyle/>
+          <a:p>
+            <a:pPr algn="ctr"/>
+          </a:p>
+        </p:txBody>
+      </p:sp>
+      <p:pic>
+        <p:nvPicPr>
+          <p:cNvPr id="14" name="Picture 13" descr="drawio.png"/>
+          <p:cNvPicPr>
+            <a:picLocks noChangeAspect="1"/>
+          </p:cNvPicPr>
+          <p:nvPr/>
+        </p:nvPicPr>
+        <p:blipFill>
+          <a:blip r:embed="rId3"/>
+          <a:stretch>
+            <a:fillRect/>
+          </a:stretch>
+        </p:blipFill>
+        <p:spPr>
+          <a:xfrm>
+            <a:off x="5469483" y="1847087"/>
+            <a:ext cx="1252728" cy="1252728"/>
+          </a:xfrm>
+          <a:prstGeom prst="rect">
+            <a:avLst/>
+          </a:prstGeom>
+        </p:spPr>
+      </p:pic>
+      <p:sp>
+        <p:nvSpPr>
+          <p:cNvPr id="15" name="TextBox 14"/>
           <p:cNvSpPr txBox="1"/>
           <p:nvPr/>
         </p:nvSpPr>
         <p:spPr>
           <a:xfrm>
-            <a:off x="457200" y="3017520"/>
-            <a:ext cx="11277295" cy="1645920"/>
+            <a:off x="4356506" y="3191256"/>
+            <a:ext cx="3478682" cy="621792"/>
+          </a:xfrm>
+          <a:prstGeom prst="rect">
+            <a:avLst/>
+          </a:prstGeom>
+          <a:noFill/>
+        </p:spPr>
+        <p:txBody>
+          <a:bodyPr wrap="square" anchor="t"/>
+          <a:lstStyle/>
+          <a:p>
+            <a:pPr algn="ctr"/>
+            <a:r>
+              <a:rPr sz="1300" b="1" i="0">
+                <a:solidFill>
+                  <a:srgbClr val="095292"/>
+                </a:solidFill>
+                <a:latin typeface="Calibri"/>
+              </a:rPr>
+              <a:t>draw.io</a:t>
+            </a:r>
+          </a:p>
+          <a:p>
+            <a:pPr algn="ctr">
+              <a:spcBef>
+                <a:spcPts val="200"/>
+              </a:spcBef>
+            </a:pPr>
+            <a:r>
+              <a:rPr sz="1000" b="0" i="0">
+                <a:solidFill>
+                  <a:srgbClr val="666666"/>
+                </a:solidFill>
+                <a:latin typeface="Calibri"/>
+              </a:rPr>
+              <a:t>ER final</a:t>
+            </a:r>
+          </a:p>
+        </p:txBody>
+      </p:sp>
+      <p:sp>
+        <p:nvSpPr>
+          <p:cNvPr id="16" name="Rounded Rectangle 15"/>
+          <p:cNvSpPr/>
+          <p:nvPr/>
+        </p:nvSpPr>
+        <p:spPr>
+          <a:xfrm>
+            <a:off x="8109508" y="1591056"/>
+            <a:ext cx="3624986" cy="2331720"/>
+          </a:xfrm>
+          <a:prstGeom prst="roundRect">
+            <a:avLst>
+              <a:gd name="adj" fmla="val 12000"/>
+            </a:avLst>
+          </a:prstGeom>
+          <a:solidFill>
+            <a:srgbClr val="F2F2F2"/>
+          </a:solidFill>
+          <a:ln>
+            <a:noFill/>
+          </a:ln>
+        </p:spPr>
+        <p:style>
+          <a:lnRef idx="1">
+            <a:schemeClr val="accent1"/>
+          </a:lnRef>
+          <a:fillRef idx="3">
+            <a:schemeClr val="accent1"/>
+          </a:fillRef>
+          <a:effectRef idx="2">
+            <a:schemeClr val="accent1"/>
+          </a:effectRef>
+          <a:fontRef idx="minor">
+            <a:schemeClr val="lt1"/>
+          </a:fontRef>
+        </p:style>
+        <p:txBody>
+          <a:bodyPr rtlCol="0" anchor="ctr"/>
+          <a:lstStyle/>
+          <a:p>
+            <a:pPr algn="ctr"/>
+          </a:p>
+        </p:txBody>
+      </p:sp>
+      <p:sp>
+        <p:nvSpPr>
+          <p:cNvPr id="17" name="Rectangle 16"/>
+          <p:cNvSpPr/>
+          <p:nvPr/>
+        </p:nvSpPr>
+        <p:spPr>
+          <a:xfrm>
+            <a:off x="8109508" y="1591056"/>
+            <a:ext cx="3624986" cy="64008"/>
+          </a:xfrm>
+          <a:prstGeom prst="rect">
+            <a:avLst/>
+          </a:prstGeom>
+          <a:solidFill>
+            <a:srgbClr val="095292"/>
+          </a:solidFill>
+          <a:ln>
+            <a:noFill/>
+          </a:ln>
+        </p:spPr>
+        <p:style>
+          <a:lnRef idx="1">
+            <a:schemeClr val="accent1"/>
+          </a:lnRef>
+          <a:fillRef idx="3">
+            <a:schemeClr val="accent1"/>
+          </a:fillRef>
+          <a:effectRef idx="2">
+            <a:schemeClr val="accent1"/>
+          </a:effectRef>
+          <a:fontRef idx="minor">
+            <a:schemeClr val="lt1"/>
+          </a:fontRef>
+        </p:style>
+        <p:txBody>
+          <a:bodyPr rtlCol="0" anchor="ctr"/>
+          <a:lstStyle/>
+          <a:p>
+            <a:pPr algn="ctr"/>
+          </a:p>
+        </p:txBody>
+      </p:sp>
+      <p:sp>
+        <p:nvSpPr>
+          <p:cNvPr id="18" name="Rectangle 17"/>
+          <p:cNvSpPr/>
+          <p:nvPr/>
+        </p:nvSpPr>
+        <p:spPr>
+          <a:xfrm>
+            <a:off x="8109508" y="1655064"/>
+            <a:ext cx="3624986" cy="27432"/>
+          </a:xfrm>
+          <a:prstGeom prst="rect">
+            <a:avLst/>
+          </a:prstGeom>
+          <a:solidFill>
+            <a:srgbClr val="FFD000"/>
+          </a:solidFill>
+          <a:ln>
+            <a:noFill/>
+          </a:ln>
+        </p:spPr>
+        <p:style>
+          <a:lnRef idx="1">
+            <a:schemeClr val="accent1"/>
+          </a:lnRef>
+          <a:fillRef idx="3">
+            <a:schemeClr val="accent1"/>
+          </a:fillRef>
+          <a:effectRef idx="2">
+            <a:schemeClr val="accent1"/>
+          </a:effectRef>
+          <a:fontRef idx="minor">
+            <a:schemeClr val="lt1"/>
+          </a:fontRef>
+        </p:style>
+        <p:txBody>
+          <a:bodyPr rtlCol="0" anchor="ctr"/>
+          <a:lstStyle/>
+          <a:p>
+            <a:pPr algn="ctr"/>
+          </a:p>
+        </p:txBody>
+      </p:sp>
+      <p:pic>
+        <p:nvPicPr>
+          <p:cNvPr id="19" name="Picture 18" descr="oracle_livesql.png"/>
+          <p:cNvPicPr>
+            <a:picLocks noChangeAspect="1"/>
+          </p:cNvPicPr>
+          <p:nvPr/>
+        </p:nvPicPr>
+        <p:blipFill>
+          <a:blip r:embed="rId4"/>
+          <a:stretch>
+            <a:fillRect/>
+          </a:stretch>
+        </p:blipFill>
+        <p:spPr>
+          <a:xfrm>
+            <a:off x="9295638" y="1847087"/>
+            <a:ext cx="1252728" cy="1252728"/>
+          </a:xfrm>
+          <a:prstGeom prst="rect">
+            <a:avLst/>
+          </a:prstGeom>
+        </p:spPr>
+      </p:pic>
+      <p:sp>
+        <p:nvSpPr>
+          <p:cNvPr id="20" name="TextBox 19"/>
+          <p:cNvSpPr txBox="1"/>
+          <p:nvPr/>
+        </p:nvSpPr>
+        <p:spPr>
+          <a:xfrm>
+            <a:off x="8182660" y="3191256"/>
+            <a:ext cx="3478682" cy="621792"/>
+          </a:xfrm>
+          <a:prstGeom prst="rect">
+            <a:avLst/>
+          </a:prstGeom>
+          <a:noFill/>
+        </p:spPr>
+        <p:txBody>
+          <a:bodyPr wrap="square" anchor="t"/>
+          <a:lstStyle/>
+          <a:p>
+            <a:pPr algn="ctr"/>
+            <a:r>
+              <a:rPr sz="1300" b="1" i="0">
+                <a:solidFill>
+                  <a:srgbClr val="095292"/>
+                </a:solidFill>
+                <a:latin typeface="Calibri"/>
+              </a:rPr>
+              <a:t>Oracle Live SQL</a:t>
+            </a:r>
+          </a:p>
+          <a:p>
+            <a:pPr algn="ctr">
+              <a:spcBef>
+                <a:spcPts val="200"/>
+              </a:spcBef>
+            </a:pPr>
+            <a:r>
+              <a:rPr sz="1000" b="0" i="0">
+                <a:solidFill>
+                  <a:srgbClr val="666666"/>
+                </a:solidFill>
+                <a:latin typeface="Calibri"/>
+              </a:rPr>
+              <a:t>Demo SQL</a:t>
+            </a:r>
+          </a:p>
+        </p:txBody>
+      </p:sp>
+      <p:sp>
+        <p:nvSpPr>
+          <p:cNvPr id="21" name="TextBox 20"/>
+          <p:cNvSpPr txBox="1"/>
+          <p:nvPr/>
+        </p:nvSpPr>
+        <p:spPr>
+          <a:xfrm>
+            <a:off x="11185855" y="6473952"/>
+            <a:ext cx="640080" cy="274320"/>
           </a:xfrm>
           <a:prstGeom prst="rect">
             <a:avLst/>
@@ -6193,86 +6956,15 @@
           </a:bodyPr>
           <a:lstStyle/>
           <a:p>
-            <a:pPr algn="ctr">
-              <a:spcAft>
-                <a:spcPts val="600"/>
-              </a:spcAft>
-            </a:pPr>
-            <a:r>
-              <a:rPr sz="1600" b="0" i="0">
-                <a:solidFill>
-                  <a:srgbClr val="333333"/>
-                </a:solidFill>
-                <a:latin typeface="Calibri"/>
-              </a:rPr>
-              <a:t>Sustentacion en vivo y entrega final del PI (20% Corte 3)</a:t>
-            </a:r>
-          </a:p>
-          <a:p>
-            <a:pPr algn="ctr">
-              <a:spcAft>
-                <a:spcPts val="600"/>
-              </a:spcAft>
-            </a:pPr>
-            <a:r>
-              <a:rPr sz="1600" b="0" i="0">
-                <a:solidFill>
-                  <a:srgbClr val="333333"/>
-                </a:solidFill>
-                <a:latin typeface="Calibri"/>
-              </a:rPr>
-              <a:t>Entregable: ZIP/PDF final subido antes del turno + sustentacion en vivo 5-8 min + Q&amp;A</a:t>
-            </a:r>
-          </a:p>
-          <a:p>
-            <a:pPr algn="ctr">
-              <a:spcAft>
-                <a:spcPts val="600"/>
-              </a:spcAft>
-            </a:pPr>
-            <a:r>
-              <a:rPr sz="1600" b="0" i="0">
-                <a:solidFill>
-                  <a:srgbClr val="333333"/>
-                </a:solidFill>
-                <a:latin typeface="Calibri"/>
-              </a:rPr>
-              <a:t>Conserva el paquete (ER, DDL, roles, procs, triggers, optimizacion) como portafolio</a:t>
-            </a:r>
-          </a:p>
-        </p:txBody>
-      </p:sp>
-      <p:sp>
-        <p:nvSpPr>
-          <p:cNvPr id="6" name="TextBox 5"/>
-          <p:cNvSpPr txBox="1"/>
-          <p:nvPr/>
-        </p:nvSpPr>
-        <p:spPr>
-          <a:xfrm>
-            <a:off x="457200" y="4754880"/>
-            <a:ext cx="11277295" cy="640080"/>
-          </a:xfrm>
-          <a:prstGeom prst="rect">
-            <a:avLst/>
-          </a:prstGeom>
-          <a:noFill/>
-        </p:spPr>
-        <p:txBody>
-          <a:bodyPr wrap="square">
-            <a:spAutoFit/>
-          </a:bodyPr>
-          <a:lstStyle/>
-          <a:p>
-            <a:pPr algn="ctr"/>
-            <a:r>
-              <a:rPr sz="2000" b="1" i="0">
-                <a:solidFill>
-                  <a:srgbClr val="269CCB"/>
-                </a:solidFill>
-                <a:latin typeface="Calibri"/>
-              </a:rPr>
-              <a:t>Sustentar es justificar decisiones, no describir tablas</a:t>
+            <a:pPr algn="r"/>
+            <a:r>
+              <a:rPr sz="1100" b="0" i="0">
+                <a:solidFill>
+                  <a:srgbClr val="666666"/>
+                </a:solidFill>
+                <a:latin typeface="Calibri"/>
+              </a:rPr>
+              <a:t>19</a:t>
             </a:r>
           </a:p>
         </p:txBody>
@@ -6677,6 +7369,3703 @@
 </p:sld>
 </file>
 
+<file path=ppt/slides/slide20.xml><?xml version="1.0" encoding="utf-8"?>
+<p:sld xmlns:a="http://schemas.openxmlformats.org/drawingml/2006/main" xmlns:p="http://schemas.openxmlformats.org/presentationml/2006/main" xmlns:r="http://schemas.openxmlformats.org/officeDocument/2006/relationships">
+  <p:cSld>
+    <p:bg>
+      <p:bgPr>
+        <a:solidFill>
+          <a:srgbClr val="FFFFFF"/>
+        </a:solidFill>
+        <a:effectLst/>
+      </p:bgPr>
+    </p:bg>
+    <p:spTree>
+      <p:nvGrpSpPr>
+        <p:cNvPr id="1" name=""/>
+        <p:cNvGrpSpPr/>
+        <p:nvPr/>
+      </p:nvGrpSpPr>
+      <p:grpSpPr/>
+      <p:sp>
+        <p:nvSpPr>
+          <p:cNvPr id="2" name="Rectangle 1"/>
+          <p:cNvSpPr/>
+          <p:nvPr/>
+        </p:nvSpPr>
+        <p:spPr>
+          <a:xfrm>
+            <a:off x="0" y="0"/>
+            <a:ext cx="12191695" cy="960120"/>
+          </a:xfrm>
+          <a:prstGeom prst="rect">
+            <a:avLst/>
+          </a:prstGeom>
+          <a:solidFill>
+            <a:srgbClr val="095292"/>
+          </a:solidFill>
+          <a:ln>
+            <a:noFill/>
+          </a:ln>
+        </p:spPr>
+        <p:style>
+          <a:lnRef idx="1">
+            <a:schemeClr val="accent1"/>
+          </a:lnRef>
+          <a:fillRef idx="3">
+            <a:schemeClr val="accent1"/>
+          </a:fillRef>
+          <a:effectRef idx="2">
+            <a:schemeClr val="accent1"/>
+          </a:effectRef>
+          <a:fontRef idx="minor">
+            <a:schemeClr val="lt1"/>
+          </a:fontRef>
+        </p:style>
+        <p:txBody>
+          <a:bodyPr rtlCol="0" anchor="ctr"/>
+          <a:lstStyle/>
+          <a:p>
+            <a:pPr algn="ctr"/>
+          </a:p>
+        </p:txBody>
+      </p:sp>
+      <p:sp>
+        <p:nvSpPr>
+          <p:cNvPr id="3" name="Rectangle 2"/>
+          <p:cNvSpPr/>
+          <p:nvPr/>
+        </p:nvSpPr>
+        <p:spPr>
+          <a:xfrm>
+            <a:off x="0" y="960120"/>
+            <a:ext cx="12191695" cy="41148"/>
+          </a:xfrm>
+          <a:prstGeom prst="rect">
+            <a:avLst/>
+          </a:prstGeom>
+          <a:solidFill>
+            <a:srgbClr val="FFD000"/>
+          </a:solidFill>
+          <a:ln>
+            <a:noFill/>
+          </a:ln>
+        </p:spPr>
+        <p:style>
+          <a:lnRef idx="1">
+            <a:schemeClr val="accent1"/>
+          </a:lnRef>
+          <a:fillRef idx="3">
+            <a:schemeClr val="accent1"/>
+          </a:fillRef>
+          <a:effectRef idx="2">
+            <a:schemeClr val="accent1"/>
+          </a:effectRef>
+          <a:fontRef idx="minor">
+            <a:schemeClr val="lt1"/>
+          </a:fontRef>
+        </p:style>
+        <p:txBody>
+          <a:bodyPr rtlCol="0" anchor="ctr"/>
+          <a:lstStyle/>
+          <a:p>
+            <a:pPr algn="ctr"/>
+          </a:p>
+        </p:txBody>
+      </p:sp>
+      <p:sp>
+        <p:nvSpPr>
+          <p:cNvPr id="4" name="TextBox 3"/>
+          <p:cNvSpPr txBox="1"/>
+          <p:nvPr/>
+        </p:nvSpPr>
+        <p:spPr>
+          <a:xfrm>
+            <a:off x="457200" y="164592"/>
+            <a:ext cx="11277295" cy="502920"/>
+          </a:xfrm>
+          <a:prstGeom prst="rect">
+            <a:avLst/>
+          </a:prstGeom>
+          <a:noFill/>
+        </p:spPr>
+        <p:txBody>
+          <a:bodyPr wrap="square">
+            <a:spAutoFit/>
+          </a:bodyPr>
+          <a:lstStyle/>
+          <a:p>
+            <a:r>
+              <a:rPr sz="2600" b="1" i="0">
+                <a:solidFill>
+                  <a:srgbClr val="FFFFFF"/>
+                </a:solidFill>
+                <a:latin typeface="Calibri"/>
+              </a:rPr>
+              <a:t>Sustentacion del PI — contexto / por que importa</a:t>
+            </a:r>
+          </a:p>
+        </p:txBody>
+      </p:sp>
+      <p:sp>
+        <p:nvSpPr>
+          <p:cNvPr id="5" name="TextBox 4"/>
+          <p:cNvSpPr txBox="1"/>
+          <p:nvPr/>
+        </p:nvSpPr>
+        <p:spPr>
+          <a:xfrm>
+            <a:off x="457200" y="1170432"/>
+            <a:ext cx="11277295" cy="5230368"/>
+          </a:xfrm>
+          <a:prstGeom prst="rect">
+            <a:avLst/>
+          </a:prstGeom>
+          <a:noFill/>
+        </p:spPr>
+        <p:txBody>
+          <a:bodyPr wrap="square">
+            <a:spAutoFit/>
+          </a:bodyPr>
+          <a:lstStyle/>
+          <a:p>
+            <a:pPr>
+              <a:spcAft>
+                <a:spcPts val="800"/>
+              </a:spcAft>
+            </a:pPr>
+            <a:r>
+              <a:rPr sz="2000" b="0" i="0">
+                <a:solidFill>
+                  <a:srgbClr val="333333"/>
+                </a:solidFill>
+                <a:latin typeface="Calibri"/>
+              </a:rPr>
+              <a:t>–   </a:t>
+            </a:r>
+            <a:r>
+              <a:rPr sz="2000" b="1" i="0">
+                <a:solidFill>
+                  <a:srgbClr val="333333"/>
+                </a:solidFill>
+                <a:latin typeface="Calibri"/>
+              </a:rPr>
+              <a:t>Por qué importa al PI:</a:t>
+            </a:r>
+            <a:r>
+              <a:rPr sz="2000" b="0" i="0">
+                <a:solidFill>
+                  <a:srgbClr val="333333"/>
+                </a:solidFill>
+                <a:latin typeface="Calibri"/>
+              </a:rPr>
+              <a:t> cierre segun rúbrica 20% Corte 3.</a:t>
+            </a:r>
+          </a:p>
+          <a:p>
+            <a:pPr>
+              <a:spcAft>
+                <a:spcPts val="800"/>
+              </a:spcAft>
+            </a:pPr>
+            <a:r>
+              <a:rPr sz="2000" b="0" i="0">
+                <a:solidFill>
+                  <a:srgbClr val="333333"/>
+                </a:solidFill>
+                <a:latin typeface="Calibri"/>
+              </a:rPr>
+              <a:t>–   No confundir con Parcial 3 (Clase 14).</a:t>
+            </a:r>
+          </a:p>
+        </p:txBody>
+      </p:sp>
+      <p:sp>
+        <p:nvSpPr>
+          <p:cNvPr id="6" name="TextBox 5"/>
+          <p:cNvSpPr txBox="1"/>
+          <p:nvPr/>
+        </p:nvSpPr>
+        <p:spPr>
+          <a:xfrm>
+            <a:off x="11185855" y="6473952"/>
+            <a:ext cx="640080" cy="274320"/>
+          </a:xfrm>
+          <a:prstGeom prst="rect">
+            <a:avLst/>
+          </a:prstGeom>
+          <a:noFill/>
+        </p:spPr>
+        <p:txBody>
+          <a:bodyPr wrap="square">
+            <a:spAutoFit/>
+          </a:bodyPr>
+          <a:lstStyle/>
+          <a:p>
+            <a:pPr algn="r"/>
+            <a:r>
+              <a:rPr sz="1100" b="0" i="0">
+                <a:solidFill>
+                  <a:srgbClr val="666666"/>
+                </a:solidFill>
+                <a:latin typeface="Calibri"/>
+              </a:rPr>
+              <a:t>20</a:t>
+            </a:r>
+          </a:p>
+        </p:txBody>
+      </p:sp>
+    </p:spTree>
+  </p:cSld>
+  <p:clrMapOvr>
+    <a:masterClrMapping/>
+  </p:clrMapOvr>
+</p:sld>
+</file>
+
+<file path=ppt/slides/slide21.xml><?xml version="1.0" encoding="utf-8"?>
+<p:sld xmlns:a="http://schemas.openxmlformats.org/drawingml/2006/main" xmlns:p="http://schemas.openxmlformats.org/presentationml/2006/main" xmlns:r="http://schemas.openxmlformats.org/officeDocument/2006/relationships">
+  <p:cSld>
+    <p:bg>
+      <p:bgPr>
+        <a:solidFill>
+          <a:srgbClr val="FFFFFF"/>
+        </a:solidFill>
+        <a:effectLst/>
+      </p:bgPr>
+    </p:bg>
+    <p:spTree>
+      <p:nvGrpSpPr>
+        <p:cNvPr id="1" name=""/>
+        <p:cNvGrpSpPr/>
+        <p:nvPr/>
+      </p:nvGrpSpPr>
+      <p:grpSpPr/>
+      <p:sp>
+        <p:nvSpPr>
+          <p:cNvPr id="2" name="Rectangle 1"/>
+          <p:cNvSpPr/>
+          <p:nvPr/>
+        </p:nvSpPr>
+        <p:spPr>
+          <a:xfrm>
+            <a:off x="0" y="0"/>
+            <a:ext cx="12191695" cy="960120"/>
+          </a:xfrm>
+          <a:prstGeom prst="rect">
+            <a:avLst/>
+          </a:prstGeom>
+          <a:solidFill>
+            <a:srgbClr val="095292"/>
+          </a:solidFill>
+          <a:ln>
+            <a:noFill/>
+          </a:ln>
+        </p:spPr>
+        <p:style>
+          <a:lnRef idx="1">
+            <a:schemeClr val="accent1"/>
+          </a:lnRef>
+          <a:fillRef idx="3">
+            <a:schemeClr val="accent1"/>
+          </a:fillRef>
+          <a:effectRef idx="2">
+            <a:schemeClr val="accent1"/>
+          </a:effectRef>
+          <a:fontRef idx="minor">
+            <a:schemeClr val="lt1"/>
+          </a:fontRef>
+        </p:style>
+        <p:txBody>
+          <a:bodyPr rtlCol="0" anchor="ctr"/>
+          <a:lstStyle/>
+          <a:p>
+            <a:pPr algn="ctr"/>
+          </a:p>
+        </p:txBody>
+      </p:sp>
+      <p:sp>
+        <p:nvSpPr>
+          <p:cNvPr id="3" name="Rectangle 2"/>
+          <p:cNvSpPr/>
+          <p:nvPr/>
+        </p:nvSpPr>
+        <p:spPr>
+          <a:xfrm>
+            <a:off x="0" y="960120"/>
+            <a:ext cx="12191695" cy="41148"/>
+          </a:xfrm>
+          <a:prstGeom prst="rect">
+            <a:avLst/>
+          </a:prstGeom>
+          <a:solidFill>
+            <a:srgbClr val="FFD000"/>
+          </a:solidFill>
+          <a:ln>
+            <a:noFill/>
+          </a:ln>
+        </p:spPr>
+        <p:style>
+          <a:lnRef idx="1">
+            <a:schemeClr val="accent1"/>
+          </a:lnRef>
+          <a:fillRef idx="3">
+            <a:schemeClr val="accent1"/>
+          </a:fillRef>
+          <a:effectRef idx="2">
+            <a:schemeClr val="accent1"/>
+          </a:effectRef>
+          <a:fontRef idx="minor">
+            <a:schemeClr val="lt1"/>
+          </a:fontRef>
+        </p:style>
+        <p:txBody>
+          <a:bodyPr rtlCol="0" anchor="ctr"/>
+          <a:lstStyle/>
+          <a:p>
+            <a:pPr algn="ctr"/>
+          </a:p>
+        </p:txBody>
+      </p:sp>
+      <p:sp>
+        <p:nvSpPr>
+          <p:cNvPr id="4" name="TextBox 3"/>
+          <p:cNvSpPr txBox="1"/>
+          <p:nvPr/>
+        </p:nvSpPr>
+        <p:spPr>
+          <a:xfrm>
+            <a:off x="457200" y="164592"/>
+            <a:ext cx="11277295" cy="502920"/>
+          </a:xfrm>
+          <a:prstGeom prst="rect">
+            <a:avLst/>
+          </a:prstGeom>
+          <a:noFill/>
+        </p:spPr>
+        <p:txBody>
+          <a:bodyPr wrap="square">
+            <a:spAutoFit/>
+          </a:bodyPr>
+          <a:lstStyle/>
+          <a:p>
+            <a:r>
+              <a:rPr sz="2600" b="1" i="0">
+                <a:solidFill>
+                  <a:srgbClr val="FFFFFF"/>
+                </a:solidFill>
+                <a:latin typeface="Calibri"/>
+              </a:rPr>
+              <a:t>Sustentacion del PI — objetivo y criterios</a:t>
+            </a:r>
+          </a:p>
+        </p:txBody>
+      </p:sp>
+      <p:sp>
+        <p:nvSpPr>
+          <p:cNvPr id="5" name="TextBox 4"/>
+          <p:cNvSpPr txBox="1"/>
+          <p:nvPr/>
+        </p:nvSpPr>
+        <p:spPr>
+          <a:xfrm>
+            <a:off x="457200" y="1170432"/>
+            <a:ext cx="11277295" cy="5230368"/>
+          </a:xfrm>
+          <a:prstGeom prst="rect">
+            <a:avLst/>
+          </a:prstGeom>
+          <a:noFill/>
+        </p:spPr>
+        <p:txBody>
+          <a:bodyPr wrap="square">
+            <a:spAutoFit/>
+          </a:bodyPr>
+          <a:lstStyle/>
+          <a:p>
+            <a:pPr>
+              <a:spcAft>
+                <a:spcPts val="800"/>
+              </a:spcAft>
+            </a:pPr>
+            <a:r>
+              <a:rPr sz="2000" b="0" i="0">
+                <a:solidFill>
+                  <a:srgbClr val="333333"/>
+                </a:solidFill>
+                <a:latin typeface="Calibri"/>
+              </a:rPr>
+              <a:t>–   </a:t>
+            </a:r>
+            <a:r>
+              <a:rPr sz="2000" b="1" i="0">
+                <a:solidFill>
+                  <a:srgbClr val="333333"/>
+                </a:solidFill>
+                <a:latin typeface="Calibri"/>
+              </a:rPr>
+              <a:t>Objetivo:</a:t>
+            </a:r>
+            <a:r>
+              <a:rPr sz="2000" b="0" i="0">
+                <a:solidFill>
+                  <a:srgbClr val="333333"/>
+                </a:solidFill>
+                <a:latin typeface="Calibri"/>
+              </a:rPr>
+              <a:t> Paquete final entregado + sustentacion en vivo de 5-8 min con Q&amp;A.</a:t>
+            </a:r>
+          </a:p>
+          <a:p>
+            <a:pPr>
+              <a:spcAft>
+                <a:spcPts val="800"/>
+              </a:spcAft>
+            </a:pPr>
+            <a:r>
+              <a:rPr sz="2000" b="0" i="0">
+                <a:solidFill>
+                  <a:srgbClr val="333333"/>
+                </a:solidFill>
+                <a:latin typeface="Calibri"/>
+              </a:rPr>
+              <a:t>–   </a:t>
+            </a:r>
+            <a:r>
+              <a:rPr sz="2000" b="1" i="0">
+                <a:solidFill>
+                  <a:srgbClr val="333333"/>
+                </a:solidFill>
+                <a:latin typeface="Calibri"/>
+              </a:rPr>
+              <a:t>Exito:</a:t>
+            </a:r>
+            <a:r>
+              <a:rPr sz="2000" b="0" i="0">
+                <a:solidFill>
+                  <a:srgbClr val="333333"/>
+                </a:solidFill>
+                <a:latin typeface="Calibri"/>
+              </a:rPr>
+              <a:t> ZIP/PDF en la plataforma del curso ANTES del turno.</a:t>
+            </a:r>
+          </a:p>
+          <a:p>
+            <a:pPr>
+              <a:spcAft>
+                <a:spcPts val="800"/>
+              </a:spcAft>
+            </a:pPr>
+            <a:r>
+              <a:rPr sz="2000" b="0" i="0">
+                <a:solidFill>
+                  <a:srgbClr val="333333"/>
+                </a:solidFill>
+                <a:latin typeface="Calibri"/>
+              </a:rPr>
+              <a:t>–   </a:t>
+            </a:r>
+            <a:r>
+              <a:rPr sz="2000" b="1" i="0">
+                <a:solidFill>
+                  <a:srgbClr val="333333"/>
+                </a:solidFill>
+                <a:latin typeface="Calibri"/>
+              </a:rPr>
+              <a:t>Exito:</a:t>
+            </a:r>
+            <a:r>
+              <a:rPr sz="2000" b="0" i="0">
+                <a:solidFill>
+                  <a:srgbClr val="333333"/>
+                </a:solidFill>
+                <a:latin typeface="Calibri"/>
+              </a:rPr>
+              <a:t> Sustentacion en vivo de 5-8 min.</a:t>
+            </a:r>
+          </a:p>
+          <a:p>
+            <a:pPr>
+              <a:spcAft>
+                <a:spcPts val="800"/>
+              </a:spcAft>
+            </a:pPr>
+            <a:r>
+              <a:rPr sz="2000" b="0" i="0">
+                <a:solidFill>
+                  <a:srgbClr val="333333"/>
+                </a:solidFill>
+                <a:latin typeface="Calibri"/>
+              </a:rPr>
+              <a:t>–   </a:t>
+            </a:r>
+            <a:r>
+              <a:rPr sz="2000" b="1" i="0">
+                <a:solidFill>
+                  <a:srgbClr val="333333"/>
+                </a:solidFill>
+                <a:latin typeface="Calibri"/>
+              </a:rPr>
+              <a:t>Exito:</a:t>
+            </a:r>
+            <a:r>
+              <a:rPr sz="2000" b="0" i="0">
+                <a:solidFill>
+                  <a:srgbClr val="333333"/>
+                </a:solidFill>
+                <a:latin typeface="Calibri"/>
+              </a:rPr>
+              <a:t> Q&amp;A respondido en vivo (preguntas al azar).</a:t>
+            </a:r>
+          </a:p>
+          <a:p>
+            <a:pPr>
+              <a:spcAft>
+                <a:spcPts val="800"/>
+              </a:spcAft>
+            </a:pPr>
+            <a:r>
+              <a:rPr sz="2000" b="0" i="0">
+                <a:solidFill>
+                  <a:srgbClr val="333333"/>
+                </a:solidFill>
+                <a:latin typeface="Calibri"/>
+              </a:rPr>
+              <a:t>–   </a:t>
+            </a:r>
+            <a:r>
+              <a:rPr sz="2000" b="1" i="0">
+                <a:solidFill>
+                  <a:srgbClr val="333333"/>
+                </a:solidFill>
+                <a:latin typeface="Calibri"/>
+              </a:rPr>
+              <a:t>Exito:</a:t>
+            </a:r>
+            <a:r>
+              <a:rPr sz="2000" b="0" i="0">
+                <a:solidFill>
+                  <a:srgbClr val="333333"/>
+                </a:solidFill>
+                <a:latin typeface="Calibri"/>
+              </a:rPr>
+              <a:t> Autoevaluacion.</a:t>
+            </a:r>
+          </a:p>
+          <a:p>
+            <a:pPr>
+              <a:spcAft>
+                <a:spcPts val="800"/>
+              </a:spcAft>
+            </a:pPr>
+            <a:r>
+              <a:rPr sz="2000" b="0" i="0">
+                <a:solidFill>
+                  <a:srgbClr val="333333"/>
+                </a:solidFill>
+                <a:latin typeface="Calibri"/>
+              </a:rPr>
+              <a:t>–   </a:t>
+            </a:r>
+            <a:r>
+              <a:rPr sz="2000" b="1" i="0">
+                <a:solidFill>
+                  <a:srgbClr val="333333"/>
+                </a:solidFill>
+                <a:latin typeface="Calibri"/>
+              </a:rPr>
+              <a:t>Exito:</a:t>
+            </a:r>
+            <a:r>
+              <a:rPr sz="2000" b="0" i="0">
+                <a:solidFill>
+                  <a:srgbClr val="333333"/>
+                </a:solidFill>
+                <a:latin typeface="Calibri"/>
+              </a:rPr>
+              <a:t> Cierre.</a:t>
+            </a:r>
+          </a:p>
+        </p:txBody>
+      </p:sp>
+      <p:sp>
+        <p:nvSpPr>
+          <p:cNvPr id="6" name="TextBox 5"/>
+          <p:cNvSpPr txBox="1"/>
+          <p:nvPr/>
+        </p:nvSpPr>
+        <p:spPr>
+          <a:xfrm>
+            <a:off x="11185855" y="6473952"/>
+            <a:ext cx="640080" cy="274320"/>
+          </a:xfrm>
+          <a:prstGeom prst="rect">
+            <a:avLst/>
+          </a:prstGeom>
+          <a:noFill/>
+        </p:spPr>
+        <p:txBody>
+          <a:bodyPr wrap="square">
+            <a:spAutoFit/>
+          </a:bodyPr>
+          <a:lstStyle/>
+          <a:p>
+            <a:pPr algn="r"/>
+            <a:r>
+              <a:rPr sz="1100" b="0" i="0">
+                <a:solidFill>
+                  <a:srgbClr val="666666"/>
+                </a:solidFill>
+                <a:latin typeface="Calibri"/>
+              </a:rPr>
+              <a:t>21</a:t>
+            </a:r>
+          </a:p>
+        </p:txBody>
+      </p:sp>
+    </p:spTree>
+  </p:cSld>
+  <p:clrMapOvr>
+    <a:masterClrMapping/>
+  </p:clrMapOvr>
+</p:sld>
+</file>
+
+<file path=ppt/slides/slide22.xml><?xml version="1.0" encoding="utf-8"?>
+<p:sld xmlns:a="http://schemas.openxmlformats.org/drawingml/2006/main" xmlns:p="http://schemas.openxmlformats.org/presentationml/2006/main" xmlns:r="http://schemas.openxmlformats.org/officeDocument/2006/relationships">
+  <p:cSld>
+    <p:bg>
+      <p:bgPr>
+        <a:solidFill>
+          <a:srgbClr val="FFFFFF"/>
+        </a:solidFill>
+        <a:effectLst/>
+      </p:bgPr>
+    </p:bg>
+    <p:spTree>
+      <p:nvGrpSpPr>
+        <p:cNvPr id="1" name=""/>
+        <p:cNvGrpSpPr/>
+        <p:nvPr/>
+      </p:nvGrpSpPr>
+      <p:grpSpPr/>
+      <p:sp>
+        <p:nvSpPr>
+          <p:cNvPr id="2" name="Rectangle 1"/>
+          <p:cNvSpPr/>
+          <p:nvPr/>
+        </p:nvSpPr>
+        <p:spPr>
+          <a:xfrm>
+            <a:off x="0" y="0"/>
+            <a:ext cx="12191695" cy="960120"/>
+          </a:xfrm>
+          <a:prstGeom prst="rect">
+            <a:avLst/>
+          </a:prstGeom>
+          <a:solidFill>
+            <a:srgbClr val="095292"/>
+          </a:solidFill>
+          <a:ln>
+            <a:noFill/>
+          </a:ln>
+        </p:spPr>
+        <p:style>
+          <a:lnRef idx="1">
+            <a:schemeClr val="accent1"/>
+          </a:lnRef>
+          <a:fillRef idx="3">
+            <a:schemeClr val="accent1"/>
+          </a:fillRef>
+          <a:effectRef idx="2">
+            <a:schemeClr val="accent1"/>
+          </a:effectRef>
+          <a:fontRef idx="minor">
+            <a:schemeClr val="lt1"/>
+          </a:fontRef>
+        </p:style>
+        <p:txBody>
+          <a:bodyPr rtlCol="0" anchor="ctr"/>
+          <a:lstStyle/>
+          <a:p>
+            <a:pPr algn="ctr"/>
+          </a:p>
+        </p:txBody>
+      </p:sp>
+      <p:sp>
+        <p:nvSpPr>
+          <p:cNvPr id="3" name="Rectangle 2"/>
+          <p:cNvSpPr/>
+          <p:nvPr/>
+        </p:nvSpPr>
+        <p:spPr>
+          <a:xfrm>
+            <a:off x="0" y="960120"/>
+            <a:ext cx="12191695" cy="41148"/>
+          </a:xfrm>
+          <a:prstGeom prst="rect">
+            <a:avLst/>
+          </a:prstGeom>
+          <a:solidFill>
+            <a:srgbClr val="FFD000"/>
+          </a:solidFill>
+          <a:ln>
+            <a:noFill/>
+          </a:ln>
+        </p:spPr>
+        <p:style>
+          <a:lnRef idx="1">
+            <a:schemeClr val="accent1"/>
+          </a:lnRef>
+          <a:fillRef idx="3">
+            <a:schemeClr val="accent1"/>
+          </a:fillRef>
+          <a:effectRef idx="2">
+            <a:schemeClr val="accent1"/>
+          </a:effectRef>
+          <a:fontRef idx="minor">
+            <a:schemeClr val="lt1"/>
+          </a:fontRef>
+        </p:style>
+        <p:txBody>
+          <a:bodyPr rtlCol="0" anchor="ctr"/>
+          <a:lstStyle/>
+          <a:p>
+            <a:pPr algn="ctr"/>
+          </a:p>
+        </p:txBody>
+      </p:sp>
+      <p:sp>
+        <p:nvSpPr>
+          <p:cNvPr id="4" name="TextBox 3"/>
+          <p:cNvSpPr txBox="1"/>
+          <p:nvPr/>
+        </p:nvSpPr>
+        <p:spPr>
+          <a:xfrm>
+            <a:off x="457200" y="164592"/>
+            <a:ext cx="11277295" cy="502920"/>
+          </a:xfrm>
+          <a:prstGeom prst="rect">
+            <a:avLst/>
+          </a:prstGeom>
+          <a:noFill/>
+        </p:spPr>
+        <p:txBody>
+          <a:bodyPr wrap="square">
+            <a:spAutoFit/>
+          </a:bodyPr>
+          <a:lstStyle/>
+          <a:p>
+            <a:r>
+              <a:rPr sz="2600" b="1" i="0">
+                <a:solidFill>
+                  <a:srgbClr val="FFFFFF"/>
+                </a:solidFill>
+                <a:latin typeface="Calibri"/>
+              </a:rPr>
+              <a:t>Sustentacion del PI — escenario / datos de partida</a:t>
+            </a:r>
+          </a:p>
+        </p:txBody>
+      </p:sp>
+      <p:sp>
+        <p:nvSpPr>
+          <p:cNvPr id="5" name="TextBox 4"/>
+          <p:cNvSpPr txBox="1"/>
+          <p:nvPr/>
+        </p:nvSpPr>
+        <p:spPr>
+          <a:xfrm>
+            <a:off x="457200" y="1170432"/>
+            <a:ext cx="11277295" cy="5230368"/>
+          </a:xfrm>
+          <a:prstGeom prst="rect">
+            <a:avLst/>
+          </a:prstGeom>
+          <a:noFill/>
+        </p:spPr>
+        <p:txBody>
+          <a:bodyPr wrap="square">
+            <a:spAutoFit/>
+          </a:bodyPr>
+          <a:lstStyle/>
+          <a:p>
+            <a:pPr>
+              <a:spcAft>
+                <a:spcPts val="800"/>
+              </a:spcAft>
+            </a:pPr>
+            <a:r>
+              <a:rPr sz="2000" b="0" i="0">
+                <a:solidFill>
+                  <a:srgbClr val="333333"/>
+                </a:solidFill>
+                <a:latin typeface="Calibri"/>
+              </a:rPr>
+              <a:t>–   Checklist empaquetado del enunciado PI.</a:t>
+            </a:r>
+          </a:p>
+          <a:p>
+            <a:pPr>
+              <a:spcAft>
+                <a:spcPts val="800"/>
+              </a:spcAft>
+            </a:pPr>
+            <a:r>
+              <a:rPr sz="2000" b="0" i="0">
+                <a:solidFill>
+                  <a:srgbClr val="333333"/>
+                </a:solidFill>
+                <a:latin typeface="Calibri"/>
+              </a:rPr>
+              <a:t>–   Turnos consecutivos en el bloque; el orden se sortea al abrir la sesion.</a:t>
+            </a:r>
+          </a:p>
+        </p:txBody>
+      </p:sp>
+      <p:sp>
+        <p:nvSpPr>
+          <p:cNvPr id="6" name="TextBox 5"/>
+          <p:cNvSpPr txBox="1"/>
+          <p:nvPr/>
+        </p:nvSpPr>
+        <p:spPr>
+          <a:xfrm>
+            <a:off x="11185855" y="6473952"/>
+            <a:ext cx="640080" cy="274320"/>
+          </a:xfrm>
+          <a:prstGeom prst="rect">
+            <a:avLst/>
+          </a:prstGeom>
+          <a:noFill/>
+        </p:spPr>
+        <p:txBody>
+          <a:bodyPr wrap="square">
+            <a:spAutoFit/>
+          </a:bodyPr>
+          <a:lstStyle/>
+          <a:p>
+            <a:pPr algn="r"/>
+            <a:r>
+              <a:rPr sz="1100" b="0" i="0">
+                <a:solidFill>
+                  <a:srgbClr val="666666"/>
+                </a:solidFill>
+                <a:latin typeface="Calibri"/>
+              </a:rPr>
+              <a:t>22</a:t>
+            </a:r>
+          </a:p>
+        </p:txBody>
+      </p:sp>
+    </p:spTree>
+  </p:cSld>
+  <p:clrMapOvr>
+    <a:masterClrMapping/>
+  </p:clrMapOvr>
+</p:sld>
+</file>
+
+<file path=ppt/slides/slide23.xml><?xml version="1.0" encoding="utf-8"?>
+<p:sld xmlns:a="http://schemas.openxmlformats.org/drawingml/2006/main" xmlns:p="http://schemas.openxmlformats.org/presentationml/2006/main" xmlns:r="http://schemas.openxmlformats.org/officeDocument/2006/relationships">
+  <p:cSld>
+    <p:bg>
+      <p:bgPr>
+        <a:solidFill>
+          <a:srgbClr val="FFFFFF"/>
+        </a:solidFill>
+        <a:effectLst/>
+      </p:bgPr>
+    </p:bg>
+    <p:spTree>
+      <p:nvGrpSpPr>
+        <p:cNvPr id="1" name=""/>
+        <p:cNvGrpSpPr/>
+        <p:nvPr/>
+      </p:nvGrpSpPr>
+      <p:grpSpPr/>
+      <p:sp>
+        <p:nvSpPr>
+          <p:cNvPr id="2" name="Rectangle 1"/>
+          <p:cNvSpPr/>
+          <p:nvPr/>
+        </p:nvSpPr>
+        <p:spPr>
+          <a:xfrm>
+            <a:off x="0" y="0"/>
+            <a:ext cx="12191695" cy="960120"/>
+          </a:xfrm>
+          <a:prstGeom prst="rect">
+            <a:avLst/>
+          </a:prstGeom>
+          <a:solidFill>
+            <a:srgbClr val="095292"/>
+          </a:solidFill>
+          <a:ln>
+            <a:noFill/>
+          </a:ln>
+        </p:spPr>
+        <p:style>
+          <a:lnRef idx="1">
+            <a:schemeClr val="accent1"/>
+          </a:lnRef>
+          <a:fillRef idx="3">
+            <a:schemeClr val="accent1"/>
+          </a:fillRef>
+          <a:effectRef idx="2">
+            <a:schemeClr val="accent1"/>
+          </a:effectRef>
+          <a:fontRef idx="minor">
+            <a:schemeClr val="lt1"/>
+          </a:fontRef>
+        </p:style>
+        <p:txBody>
+          <a:bodyPr rtlCol="0" anchor="ctr"/>
+          <a:lstStyle/>
+          <a:p>
+            <a:pPr algn="ctr"/>
+          </a:p>
+        </p:txBody>
+      </p:sp>
+      <p:sp>
+        <p:nvSpPr>
+          <p:cNvPr id="3" name="Rectangle 2"/>
+          <p:cNvSpPr/>
+          <p:nvPr/>
+        </p:nvSpPr>
+        <p:spPr>
+          <a:xfrm>
+            <a:off x="0" y="960120"/>
+            <a:ext cx="12191695" cy="41148"/>
+          </a:xfrm>
+          <a:prstGeom prst="rect">
+            <a:avLst/>
+          </a:prstGeom>
+          <a:solidFill>
+            <a:srgbClr val="FFD000"/>
+          </a:solidFill>
+          <a:ln>
+            <a:noFill/>
+          </a:ln>
+        </p:spPr>
+        <p:style>
+          <a:lnRef idx="1">
+            <a:schemeClr val="accent1"/>
+          </a:lnRef>
+          <a:fillRef idx="3">
+            <a:schemeClr val="accent1"/>
+          </a:fillRef>
+          <a:effectRef idx="2">
+            <a:schemeClr val="accent1"/>
+          </a:effectRef>
+          <a:fontRef idx="minor">
+            <a:schemeClr val="lt1"/>
+          </a:fontRef>
+        </p:style>
+        <p:txBody>
+          <a:bodyPr rtlCol="0" anchor="ctr"/>
+          <a:lstStyle/>
+          <a:p>
+            <a:pPr algn="ctr"/>
+          </a:p>
+        </p:txBody>
+      </p:sp>
+      <p:sp>
+        <p:nvSpPr>
+          <p:cNvPr id="4" name="TextBox 3"/>
+          <p:cNvSpPr txBox="1"/>
+          <p:nvPr/>
+        </p:nvSpPr>
+        <p:spPr>
+          <a:xfrm>
+            <a:off x="457200" y="164592"/>
+            <a:ext cx="11277295" cy="502920"/>
+          </a:xfrm>
+          <a:prstGeom prst="rect">
+            <a:avLst/>
+          </a:prstGeom>
+          <a:noFill/>
+        </p:spPr>
+        <p:txBody>
+          <a:bodyPr wrap="square">
+            <a:spAutoFit/>
+          </a:bodyPr>
+          <a:lstStyle/>
+          <a:p>
+            <a:r>
+              <a:rPr sz="2600" b="1" i="0">
+                <a:solidFill>
+                  <a:srgbClr val="FFFFFF"/>
+                </a:solidFill>
+                <a:latin typeface="Calibri"/>
+              </a:rPr>
+              <a:t>Sustentacion del PI — pasos guiados</a:t>
+            </a:r>
+          </a:p>
+        </p:txBody>
+      </p:sp>
+      <p:sp>
+        <p:nvSpPr>
+          <p:cNvPr id="5" name="Rounded Rectangle 4"/>
+          <p:cNvSpPr/>
+          <p:nvPr/>
+        </p:nvSpPr>
+        <p:spPr>
+          <a:xfrm>
+            <a:off x="457200" y="1234440"/>
+            <a:ext cx="11277295" cy="950976"/>
+          </a:xfrm>
+          <a:prstGeom prst="roundRect">
+            <a:avLst>
+              <a:gd name="adj" fmla="val 12000"/>
+            </a:avLst>
+          </a:prstGeom>
+          <a:solidFill>
+            <a:srgbClr val="F2F2F2"/>
+          </a:solidFill>
+          <a:ln>
+            <a:noFill/>
+          </a:ln>
+        </p:spPr>
+        <p:style>
+          <a:lnRef idx="1">
+            <a:schemeClr val="accent1"/>
+          </a:lnRef>
+          <a:fillRef idx="3">
+            <a:schemeClr val="accent1"/>
+          </a:fillRef>
+          <a:effectRef idx="2">
+            <a:schemeClr val="accent1"/>
+          </a:effectRef>
+          <a:fontRef idx="minor">
+            <a:schemeClr val="lt1"/>
+          </a:fontRef>
+        </p:style>
+        <p:txBody>
+          <a:bodyPr rtlCol="0" anchor="ctr"/>
+          <a:lstStyle/>
+          <a:p>
+            <a:pPr algn="ctr"/>
+          </a:p>
+        </p:txBody>
+      </p:sp>
+      <p:sp>
+        <p:nvSpPr>
+          <p:cNvPr id="6" name="Rounded Rectangle 5"/>
+          <p:cNvSpPr/>
+          <p:nvPr/>
+        </p:nvSpPr>
+        <p:spPr>
+          <a:xfrm>
+            <a:off x="594360" y="1490472"/>
+            <a:ext cx="438912" cy="438912"/>
+          </a:xfrm>
+          <a:prstGeom prst="roundRect">
+            <a:avLst>
+              <a:gd name="adj" fmla="val 12000"/>
+            </a:avLst>
+          </a:prstGeom>
+          <a:solidFill>
+            <a:srgbClr val="095292"/>
+          </a:solidFill>
+          <a:ln>
+            <a:noFill/>
+          </a:ln>
+        </p:spPr>
+        <p:style>
+          <a:lnRef idx="1">
+            <a:schemeClr val="accent1"/>
+          </a:lnRef>
+          <a:fillRef idx="3">
+            <a:schemeClr val="accent1"/>
+          </a:fillRef>
+          <a:effectRef idx="2">
+            <a:schemeClr val="accent1"/>
+          </a:effectRef>
+          <a:fontRef idx="minor">
+            <a:schemeClr val="lt1"/>
+          </a:fontRef>
+        </p:style>
+        <p:txBody>
+          <a:bodyPr rtlCol="0" anchor="ctr"/>
+          <a:lstStyle/>
+          <a:p>
+            <a:pPr algn="ctr"/>
+          </a:p>
+        </p:txBody>
+      </p:sp>
+      <p:sp>
+        <p:nvSpPr>
+          <p:cNvPr id="7" name="TextBox 6"/>
+          <p:cNvSpPr txBox="1"/>
+          <p:nvPr/>
+        </p:nvSpPr>
+        <p:spPr>
+          <a:xfrm>
+            <a:off x="594360" y="1490472"/>
+            <a:ext cx="438912" cy="438912"/>
+          </a:xfrm>
+          <a:prstGeom prst="rect">
+            <a:avLst/>
+          </a:prstGeom>
+          <a:noFill/>
+        </p:spPr>
+        <p:txBody>
+          <a:bodyPr wrap="square" anchor="ctr"/>
+          <a:lstStyle/>
+          <a:p>
+            <a:pPr algn="ctr"/>
+            <a:r>
+              <a:rPr sz="1600" b="1" i="0">
+                <a:solidFill>
+                  <a:srgbClr val="FFFFFF"/>
+                </a:solidFill>
+                <a:latin typeface="Calibri"/>
+              </a:rPr>
+              <a:t>1</a:t>
+            </a:r>
+          </a:p>
+        </p:txBody>
+      </p:sp>
+      <p:sp>
+        <p:nvSpPr>
+          <p:cNvPr id="8" name="TextBox 7"/>
+          <p:cNvSpPr txBox="1"/>
+          <p:nvPr/>
+        </p:nvSpPr>
+        <p:spPr>
+          <a:xfrm>
+            <a:off x="1188720" y="1325880"/>
+            <a:ext cx="10271455" cy="786384"/>
+          </a:xfrm>
+          <a:prstGeom prst="rect">
+            <a:avLst/>
+          </a:prstGeom>
+          <a:noFill/>
+        </p:spPr>
+        <p:txBody>
+          <a:bodyPr wrap="square" anchor="ctr"/>
+          <a:lstStyle/>
+          <a:p>
+            <a:r>
+              <a:rPr sz="1500" b="1" i="0">
+                <a:solidFill>
+                  <a:srgbClr val="095292"/>
+                </a:solidFill>
+                <a:latin typeface="Calibri"/>
+              </a:rPr>
+              <a:t>Subir el paquete final a la plataforma del curso (modulo Proyectos) ANTES de su turno.</a:t>
+            </a:r>
+          </a:p>
+        </p:txBody>
+      </p:sp>
+      <p:sp>
+        <p:nvSpPr>
+          <p:cNvPr id="9" name="Rounded Rectangle 8"/>
+          <p:cNvSpPr/>
+          <p:nvPr/>
+        </p:nvSpPr>
+        <p:spPr>
+          <a:xfrm>
+            <a:off x="457200" y="2276856"/>
+            <a:ext cx="11277295" cy="950976"/>
+          </a:xfrm>
+          <a:prstGeom prst="roundRect">
+            <a:avLst>
+              <a:gd name="adj" fmla="val 12000"/>
+            </a:avLst>
+          </a:prstGeom>
+          <a:solidFill>
+            <a:srgbClr val="E8F4FA"/>
+          </a:solidFill>
+          <a:ln>
+            <a:noFill/>
+          </a:ln>
+        </p:spPr>
+        <p:style>
+          <a:lnRef idx="1">
+            <a:schemeClr val="accent1"/>
+          </a:lnRef>
+          <a:fillRef idx="3">
+            <a:schemeClr val="accent1"/>
+          </a:fillRef>
+          <a:effectRef idx="2">
+            <a:schemeClr val="accent1"/>
+          </a:effectRef>
+          <a:fontRef idx="minor">
+            <a:schemeClr val="lt1"/>
+          </a:fontRef>
+        </p:style>
+        <p:txBody>
+          <a:bodyPr rtlCol="0" anchor="ctr"/>
+          <a:lstStyle/>
+          <a:p>
+            <a:pPr algn="ctr"/>
+          </a:p>
+        </p:txBody>
+      </p:sp>
+      <p:sp>
+        <p:nvSpPr>
+          <p:cNvPr id="10" name="Rounded Rectangle 9"/>
+          <p:cNvSpPr/>
+          <p:nvPr/>
+        </p:nvSpPr>
+        <p:spPr>
+          <a:xfrm>
+            <a:off x="594360" y="2532888"/>
+            <a:ext cx="438912" cy="438912"/>
+          </a:xfrm>
+          <a:prstGeom prst="roundRect">
+            <a:avLst>
+              <a:gd name="adj" fmla="val 12000"/>
+            </a:avLst>
+          </a:prstGeom>
+          <a:solidFill>
+            <a:srgbClr val="095292"/>
+          </a:solidFill>
+          <a:ln>
+            <a:noFill/>
+          </a:ln>
+        </p:spPr>
+        <p:style>
+          <a:lnRef idx="1">
+            <a:schemeClr val="accent1"/>
+          </a:lnRef>
+          <a:fillRef idx="3">
+            <a:schemeClr val="accent1"/>
+          </a:fillRef>
+          <a:effectRef idx="2">
+            <a:schemeClr val="accent1"/>
+          </a:effectRef>
+          <a:fontRef idx="minor">
+            <a:schemeClr val="lt1"/>
+          </a:fontRef>
+        </p:style>
+        <p:txBody>
+          <a:bodyPr rtlCol="0" anchor="ctr"/>
+          <a:lstStyle/>
+          <a:p>
+            <a:pPr algn="ctr"/>
+          </a:p>
+        </p:txBody>
+      </p:sp>
+      <p:sp>
+        <p:nvSpPr>
+          <p:cNvPr id="11" name="TextBox 10"/>
+          <p:cNvSpPr txBox="1"/>
+          <p:nvPr/>
+        </p:nvSpPr>
+        <p:spPr>
+          <a:xfrm>
+            <a:off x="594360" y="2532888"/>
+            <a:ext cx="438912" cy="438912"/>
+          </a:xfrm>
+          <a:prstGeom prst="rect">
+            <a:avLst/>
+          </a:prstGeom>
+          <a:noFill/>
+        </p:spPr>
+        <p:txBody>
+          <a:bodyPr wrap="square" anchor="ctr"/>
+          <a:lstStyle/>
+          <a:p>
+            <a:pPr algn="ctr"/>
+            <a:r>
+              <a:rPr sz="1600" b="1" i="0">
+                <a:solidFill>
+                  <a:srgbClr val="FFFFFF"/>
+                </a:solidFill>
+                <a:latin typeface="Calibri"/>
+              </a:rPr>
+              <a:t>2</a:t>
+            </a:r>
+          </a:p>
+        </p:txBody>
+      </p:sp>
+      <p:sp>
+        <p:nvSpPr>
+          <p:cNvPr id="12" name="TextBox 11"/>
+          <p:cNvSpPr txBox="1"/>
+          <p:nvPr/>
+        </p:nvSpPr>
+        <p:spPr>
+          <a:xfrm>
+            <a:off x="1188720" y="2368296"/>
+            <a:ext cx="10271455" cy="786384"/>
+          </a:xfrm>
+          <a:prstGeom prst="rect">
+            <a:avLst/>
+          </a:prstGeom>
+          <a:noFill/>
+        </p:spPr>
+        <p:txBody>
+          <a:bodyPr wrap="square" anchor="ctr"/>
+          <a:lstStyle/>
+          <a:p>
+            <a:r>
+              <a:rPr sz="1500" b="1" i="0">
+                <a:solidFill>
+                  <a:srgbClr val="095292"/>
+                </a:solidFill>
+                <a:latin typeface="Calibri"/>
+              </a:rPr>
+              <a:t>Sustentar en vivo 5-8 min con el ER y una ejecucion real en pantalla.</a:t>
+            </a:r>
+          </a:p>
+        </p:txBody>
+      </p:sp>
+      <p:sp>
+        <p:nvSpPr>
+          <p:cNvPr id="13" name="Rounded Rectangle 12"/>
+          <p:cNvSpPr/>
+          <p:nvPr/>
+        </p:nvSpPr>
+        <p:spPr>
+          <a:xfrm>
+            <a:off x="457200" y="3319272"/>
+            <a:ext cx="11277295" cy="950976"/>
+          </a:xfrm>
+          <a:prstGeom prst="roundRect">
+            <a:avLst>
+              <a:gd name="adj" fmla="val 12000"/>
+            </a:avLst>
+          </a:prstGeom>
+          <a:solidFill>
+            <a:srgbClr val="F2F2F2"/>
+          </a:solidFill>
+          <a:ln>
+            <a:noFill/>
+          </a:ln>
+        </p:spPr>
+        <p:style>
+          <a:lnRef idx="1">
+            <a:schemeClr val="accent1"/>
+          </a:lnRef>
+          <a:fillRef idx="3">
+            <a:schemeClr val="accent1"/>
+          </a:fillRef>
+          <a:effectRef idx="2">
+            <a:schemeClr val="accent1"/>
+          </a:effectRef>
+          <a:fontRef idx="minor">
+            <a:schemeClr val="lt1"/>
+          </a:fontRef>
+        </p:style>
+        <p:txBody>
+          <a:bodyPr rtlCol="0" anchor="ctr"/>
+          <a:lstStyle/>
+          <a:p>
+            <a:pPr algn="ctr"/>
+          </a:p>
+        </p:txBody>
+      </p:sp>
+      <p:sp>
+        <p:nvSpPr>
+          <p:cNvPr id="14" name="Rounded Rectangle 13"/>
+          <p:cNvSpPr/>
+          <p:nvPr/>
+        </p:nvSpPr>
+        <p:spPr>
+          <a:xfrm>
+            <a:off x="594360" y="3575304"/>
+            <a:ext cx="438912" cy="438912"/>
+          </a:xfrm>
+          <a:prstGeom prst="roundRect">
+            <a:avLst>
+              <a:gd name="adj" fmla="val 12000"/>
+            </a:avLst>
+          </a:prstGeom>
+          <a:solidFill>
+            <a:srgbClr val="095292"/>
+          </a:solidFill>
+          <a:ln>
+            <a:noFill/>
+          </a:ln>
+        </p:spPr>
+        <p:style>
+          <a:lnRef idx="1">
+            <a:schemeClr val="accent1"/>
+          </a:lnRef>
+          <a:fillRef idx="3">
+            <a:schemeClr val="accent1"/>
+          </a:fillRef>
+          <a:effectRef idx="2">
+            <a:schemeClr val="accent1"/>
+          </a:effectRef>
+          <a:fontRef idx="minor">
+            <a:schemeClr val="lt1"/>
+          </a:fontRef>
+        </p:style>
+        <p:txBody>
+          <a:bodyPr rtlCol="0" anchor="ctr"/>
+          <a:lstStyle/>
+          <a:p>
+            <a:pPr algn="ctr"/>
+          </a:p>
+        </p:txBody>
+      </p:sp>
+      <p:sp>
+        <p:nvSpPr>
+          <p:cNvPr id="15" name="TextBox 14"/>
+          <p:cNvSpPr txBox="1"/>
+          <p:nvPr/>
+        </p:nvSpPr>
+        <p:spPr>
+          <a:xfrm>
+            <a:off x="594360" y="3575304"/>
+            <a:ext cx="438912" cy="438912"/>
+          </a:xfrm>
+          <a:prstGeom prst="rect">
+            <a:avLst/>
+          </a:prstGeom>
+          <a:noFill/>
+        </p:spPr>
+        <p:txBody>
+          <a:bodyPr wrap="square" anchor="ctr"/>
+          <a:lstStyle/>
+          <a:p>
+            <a:pPr algn="ctr"/>
+            <a:r>
+              <a:rPr sz="1600" b="1" i="0">
+                <a:solidFill>
+                  <a:srgbClr val="FFFFFF"/>
+                </a:solidFill>
+                <a:latin typeface="Calibri"/>
+              </a:rPr>
+              <a:t>3</a:t>
+            </a:r>
+          </a:p>
+        </p:txBody>
+      </p:sp>
+      <p:sp>
+        <p:nvSpPr>
+          <p:cNvPr id="16" name="TextBox 15"/>
+          <p:cNvSpPr txBox="1"/>
+          <p:nvPr/>
+        </p:nvSpPr>
+        <p:spPr>
+          <a:xfrm>
+            <a:off x="1188720" y="3410712"/>
+            <a:ext cx="10271455" cy="786384"/>
+          </a:xfrm>
+          <a:prstGeom prst="rect">
+            <a:avLst/>
+          </a:prstGeom>
+          <a:noFill/>
+        </p:spPr>
+        <p:txBody>
+          <a:bodyPr wrap="square" anchor="ctr"/>
+          <a:lstStyle/>
+          <a:p>
+            <a:r>
+              <a:rPr sz="1500" b="1" i="0">
+                <a:solidFill>
+                  <a:srgbClr val="095292"/>
+                </a:solidFill>
+                <a:latin typeface="Calibri"/>
+              </a:rPr>
+              <a:t>Responder el Q&amp;A en vivo del docente (preguntas al azar sobre su modelo).</a:t>
+            </a:r>
+          </a:p>
+        </p:txBody>
+      </p:sp>
+      <p:sp>
+        <p:nvSpPr>
+          <p:cNvPr id="17" name="Rounded Rectangle 16"/>
+          <p:cNvSpPr/>
+          <p:nvPr/>
+        </p:nvSpPr>
+        <p:spPr>
+          <a:xfrm>
+            <a:off x="457200" y="4361688"/>
+            <a:ext cx="11277295" cy="950976"/>
+          </a:xfrm>
+          <a:prstGeom prst="roundRect">
+            <a:avLst>
+              <a:gd name="adj" fmla="val 12000"/>
+            </a:avLst>
+          </a:prstGeom>
+          <a:solidFill>
+            <a:srgbClr val="E8F4FA"/>
+          </a:solidFill>
+          <a:ln>
+            <a:noFill/>
+          </a:ln>
+        </p:spPr>
+        <p:style>
+          <a:lnRef idx="1">
+            <a:schemeClr val="accent1"/>
+          </a:lnRef>
+          <a:fillRef idx="3">
+            <a:schemeClr val="accent1"/>
+          </a:fillRef>
+          <a:effectRef idx="2">
+            <a:schemeClr val="accent1"/>
+          </a:effectRef>
+          <a:fontRef idx="minor">
+            <a:schemeClr val="lt1"/>
+          </a:fontRef>
+        </p:style>
+        <p:txBody>
+          <a:bodyPr rtlCol="0" anchor="ctr"/>
+          <a:lstStyle/>
+          <a:p>
+            <a:pPr algn="ctr"/>
+          </a:p>
+        </p:txBody>
+      </p:sp>
+      <p:sp>
+        <p:nvSpPr>
+          <p:cNvPr id="18" name="Rounded Rectangle 17"/>
+          <p:cNvSpPr/>
+          <p:nvPr/>
+        </p:nvSpPr>
+        <p:spPr>
+          <a:xfrm>
+            <a:off x="594360" y="4617720"/>
+            <a:ext cx="438912" cy="438912"/>
+          </a:xfrm>
+          <a:prstGeom prst="roundRect">
+            <a:avLst>
+              <a:gd name="adj" fmla="val 12000"/>
+            </a:avLst>
+          </a:prstGeom>
+          <a:solidFill>
+            <a:srgbClr val="095292"/>
+          </a:solidFill>
+          <a:ln>
+            <a:noFill/>
+          </a:ln>
+        </p:spPr>
+        <p:style>
+          <a:lnRef idx="1">
+            <a:schemeClr val="accent1"/>
+          </a:lnRef>
+          <a:fillRef idx="3">
+            <a:schemeClr val="accent1"/>
+          </a:fillRef>
+          <a:effectRef idx="2">
+            <a:schemeClr val="accent1"/>
+          </a:effectRef>
+          <a:fontRef idx="minor">
+            <a:schemeClr val="lt1"/>
+          </a:fontRef>
+        </p:style>
+        <p:txBody>
+          <a:bodyPr rtlCol="0" anchor="ctr"/>
+          <a:lstStyle/>
+          <a:p>
+            <a:pPr algn="ctr"/>
+          </a:p>
+        </p:txBody>
+      </p:sp>
+      <p:sp>
+        <p:nvSpPr>
+          <p:cNvPr id="19" name="TextBox 18"/>
+          <p:cNvSpPr txBox="1"/>
+          <p:nvPr/>
+        </p:nvSpPr>
+        <p:spPr>
+          <a:xfrm>
+            <a:off x="594360" y="4617720"/>
+            <a:ext cx="438912" cy="438912"/>
+          </a:xfrm>
+          <a:prstGeom prst="rect">
+            <a:avLst/>
+          </a:prstGeom>
+          <a:noFill/>
+        </p:spPr>
+        <p:txBody>
+          <a:bodyPr wrap="square" anchor="ctr"/>
+          <a:lstStyle/>
+          <a:p>
+            <a:pPr algn="ctr"/>
+            <a:r>
+              <a:rPr sz="1600" b="1" i="0">
+                <a:solidFill>
+                  <a:srgbClr val="FFFFFF"/>
+                </a:solidFill>
+                <a:latin typeface="Calibri"/>
+              </a:rPr>
+              <a:t>4</a:t>
+            </a:r>
+          </a:p>
+        </p:txBody>
+      </p:sp>
+      <p:sp>
+        <p:nvSpPr>
+          <p:cNvPr id="20" name="TextBox 19"/>
+          <p:cNvSpPr txBox="1"/>
+          <p:nvPr/>
+        </p:nvSpPr>
+        <p:spPr>
+          <a:xfrm>
+            <a:off x="1188720" y="4453128"/>
+            <a:ext cx="10271455" cy="786384"/>
+          </a:xfrm>
+          <a:prstGeom prst="rect">
+            <a:avLst/>
+          </a:prstGeom>
+          <a:noFill/>
+        </p:spPr>
+        <p:txBody>
+          <a:bodyPr wrap="square" anchor="ctr"/>
+          <a:lstStyle/>
+          <a:p>
+            <a:r>
+              <a:rPr sz="1500" b="1" i="0">
+                <a:solidFill>
+                  <a:srgbClr val="095292"/>
+                </a:solidFill>
+                <a:latin typeface="Calibri"/>
+              </a:rPr>
+              <a:t>Autoevaluacion: que harian distinto.</a:t>
+            </a:r>
+          </a:p>
+        </p:txBody>
+      </p:sp>
+      <p:sp>
+        <p:nvSpPr>
+          <p:cNvPr id="21" name="Rounded Rectangle 20"/>
+          <p:cNvSpPr/>
+          <p:nvPr/>
+        </p:nvSpPr>
+        <p:spPr>
+          <a:xfrm>
+            <a:off x="457200" y="5404104"/>
+            <a:ext cx="11277295" cy="950976"/>
+          </a:xfrm>
+          <a:prstGeom prst="roundRect">
+            <a:avLst>
+              <a:gd name="adj" fmla="val 12000"/>
+            </a:avLst>
+          </a:prstGeom>
+          <a:solidFill>
+            <a:srgbClr val="F2F2F2"/>
+          </a:solidFill>
+          <a:ln>
+            <a:noFill/>
+          </a:ln>
+        </p:spPr>
+        <p:style>
+          <a:lnRef idx="1">
+            <a:schemeClr val="accent1"/>
+          </a:lnRef>
+          <a:fillRef idx="3">
+            <a:schemeClr val="accent1"/>
+          </a:fillRef>
+          <a:effectRef idx="2">
+            <a:schemeClr val="accent1"/>
+          </a:effectRef>
+          <a:fontRef idx="minor">
+            <a:schemeClr val="lt1"/>
+          </a:fontRef>
+        </p:style>
+        <p:txBody>
+          <a:bodyPr rtlCol="0" anchor="ctr"/>
+          <a:lstStyle/>
+          <a:p>
+            <a:pPr algn="ctr"/>
+          </a:p>
+        </p:txBody>
+      </p:sp>
+      <p:sp>
+        <p:nvSpPr>
+          <p:cNvPr id="22" name="Rounded Rectangle 21"/>
+          <p:cNvSpPr/>
+          <p:nvPr/>
+        </p:nvSpPr>
+        <p:spPr>
+          <a:xfrm>
+            <a:off x="594360" y="5660136"/>
+            <a:ext cx="438912" cy="438912"/>
+          </a:xfrm>
+          <a:prstGeom prst="roundRect">
+            <a:avLst>
+              <a:gd name="adj" fmla="val 12000"/>
+            </a:avLst>
+          </a:prstGeom>
+          <a:solidFill>
+            <a:srgbClr val="095292"/>
+          </a:solidFill>
+          <a:ln>
+            <a:noFill/>
+          </a:ln>
+        </p:spPr>
+        <p:style>
+          <a:lnRef idx="1">
+            <a:schemeClr val="accent1"/>
+          </a:lnRef>
+          <a:fillRef idx="3">
+            <a:schemeClr val="accent1"/>
+          </a:fillRef>
+          <a:effectRef idx="2">
+            <a:schemeClr val="accent1"/>
+          </a:effectRef>
+          <a:fontRef idx="minor">
+            <a:schemeClr val="lt1"/>
+          </a:fontRef>
+        </p:style>
+        <p:txBody>
+          <a:bodyPr rtlCol="0" anchor="ctr"/>
+          <a:lstStyle/>
+          <a:p>
+            <a:pPr algn="ctr"/>
+          </a:p>
+        </p:txBody>
+      </p:sp>
+      <p:sp>
+        <p:nvSpPr>
+          <p:cNvPr id="23" name="TextBox 22"/>
+          <p:cNvSpPr txBox="1"/>
+          <p:nvPr/>
+        </p:nvSpPr>
+        <p:spPr>
+          <a:xfrm>
+            <a:off x="594360" y="5660136"/>
+            <a:ext cx="438912" cy="438912"/>
+          </a:xfrm>
+          <a:prstGeom prst="rect">
+            <a:avLst/>
+          </a:prstGeom>
+          <a:noFill/>
+        </p:spPr>
+        <p:txBody>
+          <a:bodyPr wrap="square" anchor="ctr"/>
+          <a:lstStyle/>
+          <a:p>
+            <a:pPr algn="ctr"/>
+            <a:r>
+              <a:rPr sz="1600" b="1" i="0">
+                <a:solidFill>
+                  <a:srgbClr val="FFFFFF"/>
+                </a:solidFill>
+                <a:latin typeface="Calibri"/>
+              </a:rPr>
+              <a:t>5</a:t>
+            </a:r>
+          </a:p>
+        </p:txBody>
+      </p:sp>
+      <p:sp>
+        <p:nvSpPr>
+          <p:cNvPr id="24" name="TextBox 23"/>
+          <p:cNvSpPr txBox="1"/>
+          <p:nvPr/>
+        </p:nvSpPr>
+        <p:spPr>
+          <a:xfrm>
+            <a:off x="1188720" y="5495544"/>
+            <a:ext cx="10271455" cy="786384"/>
+          </a:xfrm>
+          <a:prstGeom prst="rect">
+            <a:avLst/>
+          </a:prstGeom>
+          <a:noFill/>
+        </p:spPr>
+        <p:txBody>
+          <a:bodyPr wrap="square" anchor="ctr"/>
+          <a:lstStyle/>
+          <a:p>
+            <a:r>
+              <a:rPr sz="1500" b="1" i="0">
+                <a:solidFill>
+                  <a:srgbClr val="095292"/>
+                </a:solidFill>
+                <a:latin typeface="Calibri"/>
+              </a:rPr>
+              <a:t>Cierre del curso.</a:t>
+            </a:r>
+          </a:p>
+        </p:txBody>
+      </p:sp>
+      <p:sp>
+        <p:nvSpPr>
+          <p:cNvPr id="25" name="TextBox 24"/>
+          <p:cNvSpPr txBox="1"/>
+          <p:nvPr/>
+        </p:nvSpPr>
+        <p:spPr>
+          <a:xfrm>
+            <a:off x="11185855" y="6473952"/>
+            <a:ext cx="640080" cy="274320"/>
+          </a:xfrm>
+          <a:prstGeom prst="rect">
+            <a:avLst/>
+          </a:prstGeom>
+          <a:noFill/>
+        </p:spPr>
+        <p:txBody>
+          <a:bodyPr wrap="square">
+            <a:spAutoFit/>
+          </a:bodyPr>
+          <a:lstStyle/>
+          <a:p>
+            <a:pPr algn="r"/>
+            <a:r>
+              <a:rPr sz="1100" b="0" i="0">
+                <a:solidFill>
+                  <a:srgbClr val="666666"/>
+                </a:solidFill>
+                <a:latin typeface="Calibri"/>
+              </a:rPr>
+              <a:t>23</a:t>
+            </a:r>
+          </a:p>
+        </p:txBody>
+      </p:sp>
+    </p:spTree>
+  </p:cSld>
+  <p:clrMapOvr>
+    <a:masterClrMapping/>
+  </p:clrMapOvr>
+</p:sld>
+</file>
+
+<file path=ppt/slides/slide24.xml><?xml version="1.0" encoding="utf-8"?>
+<p:sld xmlns:a="http://schemas.openxmlformats.org/drawingml/2006/main" xmlns:p="http://schemas.openxmlformats.org/presentationml/2006/main" xmlns:r="http://schemas.openxmlformats.org/officeDocument/2006/relationships">
+  <p:cSld>
+    <p:bg>
+      <p:bgPr>
+        <a:solidFill>
+          <a:srgbClr val="FFFFFF"/>
+        </a:solidFill>
+        <a:effectLst/>
+      </p:bgPr>
+    </p:bg>
+    <p:spTree>
+      <p:nvGrpSpPr>
+        <p:cNvPr id="1" name=""/>
+        <p:cNvGrpSpPr/>
+        <p:nvPr/>
+      </p:nvGrpSpPr>
+      <p:grpSpPr/>
+      <p:sp>
+        <p:nvSpPr>
+          <p:cNvPr id="2" name="Rectangle 1"/>
+          <p:cNvSpPr/>
+          <p:nvPr/>
+        </p:nvSpPr>
+        <p:spPr>
+          <a:xfrm>
+            <a:off x="0" y="0"/>
+            <a:ext cx="12191695" cy="960120"/>
+          </a:xfrm>
+          <a:prstGeom prst="rect">
+            <a:avLst/>
+          </a:prstGeom>
+          <a:solidFill>
+            <a:srgbClr val="095292"/>
+          </a:solidFill>
+          <a:ln>
+            <a:noFill/>
+          </a:ln>
+        </p:spPr>
+        <p:style>
+          <a:lnRef idx="1">
+            <a:schemeClr val="accent1"/>
+          </a:lnRef>
+          <a:fillRef idx="3">
+            <a:schemeClr val="accent1"/>
+          </a:fillRef>
+          <a:effectRef idx="2">
+            <a:schemeClr val="accent1"/>
+          </a:effectRef>
+          <a:fontRef idx="minor">
+            <a:schemeClr val="lt1"/>
+          </a:fontRef>
+        </p:style>
+        <p:txBody>
+          <a:bodyPr rtlCol="0" anchor="ctr"/>
+          <a:lstStyle/>
+          <a:p>
+            <a:pPr algn="ctr"/>
+          </a:p>
+        </p:txBody>
+      </p:sp>
+      <p:sp>
+        <p:nvSpPr>
+          <p:cNvPr id="3" name="Rectangle 2"/>
+          <p:cNvSpPr/>
+          <p:nvPr/>
+        </p:nvSpPr>
+        <p:spPr>
+          <a:xfrm>
+            <a:off x="0" y="960120"/>
+            <a:ext cx="12191695" cy="41148"/>
+          </a:xfrm>
+          <a:prstGeom prst="rect">
+            <a:avLst/>
+          </a:prstGeom>
+          <a:solidFill>
+            <a:srgbClr val="FFD000"/>
+          </a:solidFill>
+          <a:ln>
+            <a:noFill/>
+          </a:ln>
+        </p:spPr>
+        <p:style>
+          <a:lnRef idx="1">
+            <a:schemeClr val="accent1"/>
+          </a:lnRef>
+          <a:fillRef idx="3">
+            <a:schemeClr val="accent1"/>
+          </a:fillRef>
+          <a:effectRef idx="2">
+            <a:schemeClr val="accent1"/>
+          </a:effectRef>
+          <a:fontRef idx="minor">
+            <a:schemeClr val="lt1"/>
+          </a:fontRef>
+        </p:style>
+        <p:txBody>
+          <a:bodyPr rtlCol="0" anchor="ctr"/>
+          <a:lstStyle/>
+          <a:p>
+            <a:pPr algn="ctr"/>
+          </a:p>
+        </p:txBody>
+      </p:sp>
+      <p:sp>
+        <p:nvSpPr>
+          <p:cNvPr id="4" name="TextBox 3"/>
+          <p:cNvSpPr txBox="1"/>
+          <p:nvPr/>
+        </p:nvSpPr>
+        <p:spPr>
+          <a:xfrm>
+            <a:off x="457200" y="164592"/>
+            <a:ext cx="11277295" cy="502920"/>
+          </a:xfrm>
+          <a:prstGeom prst="rect">
+            <a:avLst/>
+          </a:prstGeom>
+          <a:noFill/>
+        </p:spPr>
+        <p:txBody>
+          <a:bodyPr wrap="square">
+            <a:spAutoFit/>
+          </a:bodyPr>
+          <a:lstStyle/>
+          <a:p>
+            <a:r>
+              <a:rPr sz="2600" b="1" i="0">
+                <a:solidFill>
+                  <a:srgbClr val="FFFFFF"/>
+                </a:solidFill>
+                <a:latin typeface="Calibri"/>
+              </a:rPr>
+              <a:t>Sustentacion del PI — pistas (checklist vacio)</a:t>
+            </a:r>
+          </a:p>
+        </p:txBody>
+      </p:sp>
+      <p:sp>
+        <p:nvSpPr>
+          <p:cNvPr id="5" name="Rounded Rectangle 4"/>
+          <p:cNvSpPr/>
+          <p:nvPr/>
+        </p:nvSpPr>
+        <p:spPr>
+          <a:xfrm>
+            <a:off x="457200" y="1261872"/>
+            <a:ext cx="11277295" cy="566928"/>
+          </a:xfrm>
+          <a:prstGeom prst="roundRect">
+            <a:avLst>
+              <a:gd name="adj" fmla="val 12000"/>
+            </a:avLst>
+          </a:prstGeom>
+          <a:solidFill>
+            <a:srgbClr val="F2F2F2"/>
+          </a:solidFill>
+          <a:ln>
+            <a:noFill/>
+          </a:ln>
+        </p:spPr>
+        <p:style>
+          <a:lnRef idx="1">
+            <a:schemeClr val="accent1"/>
+          </a:lnRef>
+          <a:fillRef idx="3">
+            <a:schemeClr val="accent1"/>
+          </a:fillRef>
+          <a:effectRef idx="2">
+            <a:schemeClr val="accent1"/>
+          </a:effectRef>
+          <a:fontRef idx="minor">
+            <a:schemeClr val="lt1"/>
+          </a:fontRef>
+        </p:style>
+        <p:txBody>
+          <a:bodyPr rtlCol="0" anchor="ctr"/>
+          <a:lstStyle/>
+          <a:p>
+            <a:pPr algn="ctr"/>
+          </a:p>
+        </p:txBody>
+      </p:sp>
+      <p:sp>
+        <p:nvSpPr>
+          <p:cNvPr id="6" name="Rectangle 5"/>
+          <p:cNvSpPr/>
+          <p:nvPr/>
+        </p:nvSpPr>
+        <p:spPr>
+          <a:xfrm>
+            <a:off x="640080" y="1408175"/>
+            <a:ext cx="274320" cy="274320"/>
+          </a:xfrm>
+          <a:prstGeom prst="rect">
+            <a:avLst/>
+          </a:prstGeom>
+          <a:solidFill>
+            <a:srgbClr val="FFFFFF"/>
+          </a:solidFill>
+          <a:ln>
+            <a:solidFill>
+              <a:srgbClr val="333333"/>
+            </a:solidFill>
+          </a:ln>
+        </p:spPr>
+        <p:style>
+          <a:lnRef idx="1">
+            <a:schemeClr val="accent1"/>
+          </a:lnRef>
+          <a:fillRef idx="3">
+            <a:schemeClr val="accent1"/>
+          </a:fillRef>
+          <a:effectRef idx="2">
+            <a:schemeClr val="accent1"/>
+          </a:effectRef>
+          <a:fontRef idx="minor">
+            <a:schemeClr val="lt1"/>
+          </a:fontRef>
+        </p:style>
+        <p:txBody>
+          <a:bodyPr rtlCol="0" anchor="ctr"/>
+          <a:lstStyle/>
+          <a:p>
+            <a:pPr algn="ctr"/>
+          </a:p>
+        </p:txBody>
+      </p:sp>
+      <p:sp>
+        <p:nvSpPr>
+          <p:cNvPr id="7" name="Rectangle 6"/>
+          <p:cNvSpPr/>
+          <p:nvPr/>
+        </p:nvSpPr>
+        <p:spPr>
+          <a:xfrm>
+            <a:off x="640080" y="1408175"/>
+            <a:ext cx="73152" cy="274320"/>
+          </a:xfrm>
+          <a:prstGeom prst="rect">
+            <a:avLst/>
+          </a:prstGeom>
+          <a:solidFill>
+            <a:srgbClr val="269CCB"/>
+          </a:solidFill>
+          <a:ln>
+            <a:noFill/>
+          </a:ln>
+        </p:spPr>
+        <p:style>
+          <a:lnRef idx="1">
+            <a:schemeClr val="accent1"/>
+          </a:lnRef>
+          <a:fillRef idx="3">
+            <a:schemeClr val="accent1"/>
+          </a:fillRef>
+          <a:effectRef idx="2">
+            <a:schemeClr val="accent1"/>
+          </a:effectRef>
+          <a:fontRef idx="minor">
+            <a:schemeClr val="lt1"/>
+          </a:fontRef>
+        </p:style>
+        <p:txBody>
+          <a:bodyPr rtlCol="0" anchor="ctr"/>
+          <a:lstStyle/>
+          <a:p>
+            <a:pPr algn="ctr"/>
+          </a:p>
+        </p:txBody>
+      </p:sp>
+      <p:sp>
+        <p:nvSpPr>
+          <p:cNvPr id="8" name="TextBox 7"/>
+          <p:cNvSpPr txBox="1"/>
+          <p:nvPr/>
+        </p:nvSpPr>
+        <p:spPr>
+          <a:xfrm>
+            <a:off x="1097280" y="1353312"/>
+            <a:ext cx="10362895" cy="402336"/>
+          </a:xfrm>
+          <a:prstGeom prst="rect">
+            <a:avLst/>
+          </a:prstGeom>
+          <a:noFill/>
+        </p:spPr>
+        <p:txBody>
+          <a:bodyPr wrap="square" anchor="ctr"/>
+          <a:lstStyle/>
+          <a:p>
+            <a:r>
+              <a:rPr sz="1500" b="0" i="0">
+                <a:solidFill>
+                  <a:srgbClr val="333333"/>
+                </a:solidFill>
+                <a:latin typeface="Calibri"/>
+              </a:rPr>
+              <a:t>□ Falta evidencia?</a:t>
+            </a:r>
+          </a:p>
+        </p:txBody>
+      </p:sp>
+      <p:sp>
+        <p:nvSpPr>
+          <p:cNvPr id="9" name="Rounded Rectangle 8"/>
+          <p:cNvSpPr/>
+          <p:nvPr/>
+        </p:nvSpPr>
+        <p:spPr>
+          <a:xfrm>
+            <a:off x="457200" y="1938528"/>
+            <a:ext cx="11277295" cy="566928"/>
+          </a:xfrm>
+          <a:prstGeom prst="roundRect">
+            <a:avLst>
+              <a:gd name="adj" fmla="val 12000"/>
+            </a:avLst>
+          </a:prstGeom>
+          <a:solidFill>
+            <a:srgbClr val="F2F2F2"/>
+          </a:solidFill>
+          <a:ln>
+            <a:noFill/>
+          </a:ln>
+        </p:spPr>
+        <p:style>
+          <a:lnRef idx="1">
+            <a:schemeClr val="accent1"/>
+          </a:lnRef>
+          <a:fillRef idx="3">
+            <a:schemeClr val="accent1"/>
+          </a:fillRef>
+          <a:effectRef idx="2">
+            <a:schemeClr val="accent1"/>
+          </a:effectRef>
+          <a:fontRef idx="minor">
+            <a:schemeClr val="lt1"/>
+          </a:fontRef>
+        </p:style>
+        <p:txBody>
+          <a:bodyPr rtlCol="0" anchor="ctr"/>
+          <a:lstStyle/>
+          <a:p>
+            <a:pPr algn="ctr"/>
+          </a:p>
+        </p:txBody>
+      </p:sp>
+      <p:sp>
+        <p:nvSpPr>
+          <p:cNvPr id="10" name="Rectangle 9"/>
+          <p:cNvSpPr/>
+          <p:nvPr/>
+        </p:nvSpPr>
+        <p:spPr>
+          <a:xfrm>
+            <a:off x="640080" y="2084832"/>
+            <a:ext cx="274320" cy="274320"/>
+          </a:xfrm>
+          <a:prstGeom prst="rect">
+            <a:avLst/>
+          </a:prstGeom>
+          <a:solidFill>
+            <a:srgbClr val="FFFFFF"/>
+          </a:solidFill>
+          <a:ln>
+            <a:solidFill>
+              <a:srgbClr val="333333"/>
+            </a:solidFill>
+          </a:ln>
+        </p:spPr>
+        <p:style>
+          <a:lnRef idx="1">
+            <a:schemeClr val="accent1"/>
+          </a:lnRef>
+          <a:fillRef idx="3">
+            <a:schemeClr val="accent1"/>
+          </a:fillRef>
+          <a:effectRef idx="2">
+            <a:schemeClr val="accent1"/>
+          </a:effectRef>
+          <a:fontRef idx="minor">
+            <a:schemeClr val="lt1"/>
+          </a:fontRef>
+        </p:style>
+        <p:txBody>
+          <a:bodyPr rtlCol="0" anchor="ctr"/>
+          <a:lstStyle/>
+          <a:p>
+            <a:pPr algn="ctr"/>
+          </a:p>
+        </p:txBody>
+      </p:sp>
+      <p:sp>
+        <p:nvSpPr>
+          <p:cNvPr id="11" name="Rectangle 10"/>
+          <p:cNvSpPr/>
+          <p:nvPr/>
+        </p:nvSpPr>
+        <p:spPr>
+          <a:xfrm>
+            <a:off x="640080" y="2084832"/>
+            <a:ext cx="73152" cy="274320"/>
+          </a:xfrm>
+          <a:prstGeom prst="rect">
+            <a:avLst/>
+          </a:prstGeom>
+          <a:solidFill>
+            <a:srgbClr val="269CCB"/>
+          </a:solidFill>
+          <a:ln>
+            <a:noFill/>
+          </a:ln>
+        </p:spPr>
+        <p:style>
+          <a:lnRef idx="1">
+            <a:schemeClr val="accent1"/>
+          </a:lnRef>
+          <a:fillRef idx="3">
+            <a:schemeClr val="accent1"/>
+          </a:fillRef>
+          <a:effectRef idx="2">
+            <a:schemeClr val="accent1"/>
+          </a:effectRef>
+          <a:fontRef idx="minor">
+            <a:schemeClr val="lt1"/>
+          </a:fontRef>
+        </p:style>
+        <p:txBody>
+          <a:bodyPr rtlCol="0" anchor="ctr"/>
+          <a:lstStyle/>
+          <a:p>
+            <a:pPr algn="ctr"/>
+          </a:p>
+        </p:txBody>
+      </p:sp>
+      <p:sp>
+        <p:nvSpPr>
+          <p:cNvPr id="12" name="TextBox 11"/>
+          <p:cNvSpPr txBox="1"/>
+          <p:nvPr/>
+        </p:nvSpPr>
+        <p:spPr>
+          <a:xfrm>
+            <a:off x="1097280" y="2029968"/>
+            <a:ext cx="10362895" cy="402336"/>
+          </a:xfrm>
+          <a:prstGeom prst="rect">
+            <a:avLst/>
+          </a:prstGeom>
+          <a:noFill/>
+        </p:spPr>
+        <p:txBody>
+          <a:bodyPr wrap="square" anchor="ctr"/>
+          <a:lstStyle/>
+          <a:p>
+            <a:r>
+              <a:rPr sz="1500" b="0" i="0">
+                <a:solidFill>
+                  <a:srgbClr val="333333"/>
+                </a:solidFill>
+                <a:latin typeface="Calibri"/>
+              </a:rPr>
+              <a:t>□ Cubre todos los bloques (y todos hablan, si hay equipo)?</a:t>
+            </a:r>
+          </a:p>
+        </p:txBody>
+      </p:sp>
+      <p:sp>
+        <p:nvSpPr>
+          <p:cNvPr id="13" name="Rounded Rectangle 12"/>
+          <p:cNvSpPr/>
+          <p:nvPr/>
+        </p:nvSpPr>
+        <p:spPr>
+          <a:xfrm>
+            <a:off x="457200" y="2615184"/>
+            <a:ext cx="11277295" cy="566928"/>
+          </a:xfrm>
+          <a:prstGeom prst="roundRect">
+            <a:avLst>
+              <a:gd name="adj" fmla="val 12000"/>
+            </a:avLst>
+          </a:prstGeom>
+          <a:solidFill>
+            <a:srgbClr val="F2F2F2"/>
+          </a:solidFill>
+          <a:ln>
+            <a:noFill/>
+          </a:ln>
+        </p:spPr>
+        <p:style>
+          <a:lnRef idx="1">
+            <a:schemeClr val="accent1"/>
+          </a:lnRef>
+          <a:fillRef idx="3">
+            <a:schemeClr val="accent1"/>
+          </a:fillRef>
+          <a:effectRef idx="2">
+            <a:schemeClr val="accent1"/>
+          </a:effectRef>
+          <a:fontRef idx="minor">
+            <a:schemeClr val="lt1"/>
+          </a:fontRef>
+        </p:style>
+        <p:txBody>
+          <a:bodyPr rtlCol="0" anchor="ctr"/>
+          <a:lstStyle/>
+          <a:p>
+            <a:pPr algn="ctr"/>
+          </a:p>
+        </p:txBody>
+      </p:sp>
+      <p:sp>
+        <p:nvSpPr>
+          <p:cNvPr id="14" name="Rectangle 13"/>
+          <p:cNvSpPr/>
+          <p:nvPr/>
+        </p:nvSpPr>
+        <p:spPr>
+          <a:xfrm>
+            <a:off x="640080" y="2761488"/>
+            <a:ext cx="274320" cy="274320"/>
+          </a:xfrm>
+          <a:prstGeom prst="rect">
+            <a:avLst/>
+          </a:prstGeom>
+          <a:solidFill>
+            <a:srgbClr val="FFFFFF"/>
+          </a:solidFill>
+          <a:ln>
+            <a:solidFill>
+              <a:srgbClr val="333333"/>
+            </a:solidFill>
+          </a:ln>
+        </p:spPr>
+        <p:style>
+          <a:lnRef idx="1">
+            <a:schemeClr val="accent1"/>
+          </a:lnRef>
+          <a:fillRef idx="3">
+            <a:schemeClr val="accent1"/>
+          </a:fillRef>
+          <a:effectRef idx="2">
+            <a:schemeClr val="accent1"/>
+          </a:effectRef>
+          <a:fontRef idx="minor">
+            <a:schemeClr val="lt1"/>
+          </a:fontRef>
+        </p:style>
+        <p:txBody>
+          <a:bodyPr rtlCol="0" anchor="ctr"/>
+          <a:lstStyle/>
+          <a:p>
+            <a:pPr algn="ctr"/>
+          </a:p>
+        </p:txBody>
+      </p:sp>
+      <p:sp>
+        <p:nvSpPr>
+          <p:cNvPr id="15" name="Rectangle 14"/>
+          <p:cNvSpPr/>
+          <p:nvPr/>
+        </p:nvSpPr>
+        <p:spPr>
+          <a:xfrm>
+            <a:off x="640080" y="2761488"/>
+            <a:ext cx="73152" cy="274320"/>
+          </a:xfrm>
+          <a:prstGeom prst="rect">
+            <a:avLst/>
+          </a:prstGeom>
+          <a:solidFill>
+            <a:srgbClr val="269CCB"/>
+          </a:solidFill>
+          <a:ln>
+            <a:noFill/>
+          </a:ln>
+        </p:spPr>
+        <p:style>
+          <a:lnRef idx="1">
+            <a:schemeClr val="accent1"/>
+          </a:lnRef>
+          <a:fillRef idx="3">
+            <a:schemeClr val="accent1"/>
+          </a:fillRef>
+          <a:effectRef idx="2">
+            <a:schemeClr val="accent1"/>
+          </a:effectRef>
+          <a:fontRef idx="minor">
+            <a:schemeClr val="lt1"/>
+          </a:fontRef>
+        </p:style>
+        <p:txBody>
+          <a:bodyPr rtlCol="0" anchor="ctr"/>
+          <a:lstStyle/>
+          <a:p>
+            <a:pPr algn="ctr"/>
+          </a:p>
+        </p:txBody>
+      </p:sp>
+      <p:sp>
+        <p:nvSpPr>
+          <p:cNvPr id="16" name="TextBox 15"/>
+          <p:cNvSpPr txBox="1"/>
+          <p:nvPr/>
+        </p:nvSpPr>
+        <p:spPr>
+          <a:xfrm>
+            <a:off x="1097280" y="2706624"/>
+            <a:ext cx="10362895" cy="402336"/>
+          </a:xfrm>
+          <a:prstGeom prst="rect">
+            <a:avLst/>
+          </a:prstGeom>
+          <a:noFill/>
+        </p:spPr>
+        <p:txBody>
+          <a:bodyPr wrap="square" anchor="ctr"/>
+          <a:lstStyle/>
+          <a:p>
+            <a:r>
+              <a:rPr sz="1500" b="0" i="0">
+                <a:solidFill>
+                  <a:srgbClr val="333333"/>
+                </a:solidFill>
+                <a:latin typeface="Calibri"/>
+              </a:rPr>
+              <a:t>□ PI != P3?</a:t>
+            </a:r>
+          </a:p>
+        </p:txBody>
+      </p:sp>
+      <p:sp>
+        <p:nvSpPr>
+          <p:cNvPr id="17" name="TextBox 16"/>
+          <p:cNvSpPr txBox="1"/>
+          <p:nvPr/>
+        </p:nvSpPr>
+        <p:spPr>
+          <a:xfrm>
+            <a:off x="11185855" y="6473952"/>
+            <a:ext cx="640080" cy="274320"/>
+          </a:xfrm>
+          <a:prstGeom prst="rect">
+            <a:avLst/>
+          </a:prstGeom>
+          <a:noFill/>
+        </p:spPr>
+        <p:txBody>
+          <a:bodyPr wrap="square">
+            <a:spAutoFit/>
+          </a:bodyPr>
+          <a:lstStyle/>
+          <a:p>
+            <a:pPr algn="r"/>
+            <a:r>
+              <a:rPr sz="1100" b="0" i="0">
+                <a:solidFill>
+                  <a:srgbClr val="666666"/>
+                </a:solidFill>
+                <a:latin typeface="Calibri"/>
+              </a:rPr>
+              <a:t>24</a:t>
+            </a:r>
+          </a:p>
+        </p:txBody>
+      </p:sp>
+    </p:spTree>
+  </p:cSld>
+  <p:clrMapOvr>
+    <a:masterClrMapping/>
+  </p:clrMapOvr>
+</p:sld>
+</file>
+
+<file path=ppt/slides/slide25.xml><?xml version="1.0" encoding="utf-8"?>
+<p:sld xmlns:a="http://schemas.openxmlformats.org/drawingml/2006/main" xmlns:p="http://schemas.openxmlformats.org/presentationml/2006/main" xmlns:r="http://schemas.openxmlformats.org/officeDocument/2006/relationships">
+  <p:cSld>
+    <p:bg>
+      <p:bgPr>
+        <a:solidFill>
+          <a:srgbClr val="FFFFFF"/>
+        </a:solidFill>
+        <a:effectLst/>
+      </p:bgPr>
+    </p:bg>
+    <p:spTree>
+      <p:nvGrpSpPr>
+        <p:cNvPr id="1" name=""/>
+        <p:cNvGrpSpPr/>
+        <p:nvPr/>
+      </p:nvGrpSpPr>
+      <p:grpSpPr/>
+      <p:sp>
+        <p:nvSpPr>
+          <p:cNvPr id="2" name="Rectangle 1"/>
+          <p:cNvSpPr/>
+          <p:nvPr/>
+        </p:nvSpPr>
+        <p:spPr>
+          <a:xfrm>
+            <a:off x="0" y="0"/>
+            <a:ext cx="12191695" cy="960120"/>
+          </a:xfrm>
+          <a:prstGeom prst="rect">
+            <a:avLst/>
+          </a:prstGeom>
+          <a:solidFill>
+            <a:srgbClr val="095292"/>
+          </a:solidFill>
+          <a:ln>
+            <a:noFill/>
+          </a:ln>
+        </p:spPr>
+        <p:style>
+          <a:lnRef idx="1">
+            <a:schemeClr val="accent1"/>
+          </a:lnRef>
+          <a:fillRef idx="3">
+            <a:schemeClr val="accent1"/>
+          </a:fillRef>
+          <a:effectRef idx="2">
+            <a:schemeClr val="accent1"/>
+          </a:effectRef>
+          <a:fontRef idx="minor">
+            <a:schemeClr val="lt1"/>
+          </a:fontRef>
+        </p:style>
+        <p:txBody>
+          <a:bodyPr rtlCol="0" anchor="ctr"/>
+          <a:lstStyle/>
+          <a:p>
+            <a:pPr algn="ctr"/>
+          </a:p>
+        </p:txBody>
+      </p:sp>
+      <p:sp>
+        <p:nvSpPr>
+          <p:cNvPr id="3" name="Rectangle 2"/>
+          <p:cNvSpPr/>
+          <p:nvPr/>
+        </p:nvSpPr>
+        <p:spPr>
+          <a:xfrm>
+            <a:off x="0" y="960120"/>
+            <a:ext cx="12191695" cy="41148"/>
+          </a:xfrm>
+          <a:prstGeom prst="rect">
+            <a:avLst/>
+          </a:prstGeom>
+          <a:solidFill>
+            <a:srgbClr val="FFD000"/>
+          </a:solidFill>
+          <a:ln>
+            <a:noFill/>
+          </a:ln>
+        </p:spPr>
+        <p:style>
+          <a:lnRef idx="1">
+            <a:schemeClr val="accent1"/>
+          </a:lnRef>
+          <a:fillRef idx="3">
+            <a:schemeClr val="accent1"/>
+          </a:fillRef>
+          <a:effectRef idx="2">
+            <a:schemeClr val="accent1"/>
+          </a:effectRef>
+          <a:fontRef idx="minor">
+            <a:schemeClr val="lt1"/>
+          </a:fontRef>
+        </p:style>
+        <p:txBody>
+          <a:bodyPr rtlCol="0" anchor="ctr"/>
+          <a:lstStyle/>
+          <a:p>
+            <a:pPr algn="ctr"/>
+          </a:p>
+        </p:txBody>
+      </p:sp>
+      <p:sp>
+        <p:nvSpPr>
+          <p:cNvPr id="4" name="TextBox 3"/>
+          <p:cNvSpPr txBox="1"/>
+          <p:nvPr/>
+        </p:nvSpPr>
+        <p:spPr>
+          <a:xfrm>
+            <a:off x="457200" y="164592"/>
+            <a:ext cx="11277295" cy="502920"/>
+          </a:xfrm>
+          <a:prstGeom prst="rect">
+            <a:avLst/>
+          </a:prstGeom>
+          <a:noFill/>
+        </p:spPr>
+        <p:txBody>
+          <a:bodyPr wrap="square">
+            <a:spAutoFit/>
+          </a:bodyPr>
+          <a:lstStyle/>
+          <a:p>
+            <a:r>
+              <a:rPr sz="2600" b="1" i="0">
+                <a:solidFill>
+                  <a:srgbClr val="FFFFFF"/>
+                </a:solidFill>
+                <a:latin typeface="Calibri"/>
+              </a:rPr>
+              <a:t>Criterios de exito / entregable</a:t>
+            </a:r>
+          </a:p>
+        </p:txBody>
+      </p:sp>
+      <p:sp>
+        <p:nvSpPr>
+          <p:cNvPr id="5" name="TextBox 4"/>
+          <p:cNvSpPr txBox="1"/>
+          <p:nvPr/>
+        </p:nvSpPr>
+        <p:spPr>
+          <a:xfrm>
+            <a:off x="457200" y="1170432"/>
+            <a:ext cx="11277295" cy="5230368"/>
+          </a:xfrm>
+          <a:prstGeom prst="rect">
+            <a:avLst/>
+          </a:prstGeom>
+          <a:noFill/>
+        </p:spPr>
+        <p:txBody>
+          <a:bodyPr wrap="square">
+            <a:spAutoFit/>
+          </a:bodyPr>
+          <a:lstStyle/>
+          <a:p>
+            <a:pPr>
+              <a:spcAft>
+                <a:spcPts val="800"/>
+              </a:spcAft>
+            </a:pPr>
+            <a:r>
+              <a:rPr sz="2000" b="0" i="0">
+                <a:solidFill>
+                  <a:srgbClr val="333333"/>
+                </a:solidFill>
+                <a:latin typeface="Calibri"/>
+              </a:rPr>
+              <a:t>–   </a:t>
+            </a:r>
+            <a:r>
+              <a:rPr sz="2000" b="1" i="0">
+                <a:solidFill>
+                  <a:srgbClr val="333333"/>
+                </a:solidFill>
+                <a:latin typeface="Calibri"/>
+              </a:rPr>
+              <a:t>Entregable:</a:t>
+            </a:r>
+            <a:r>
+              <a:rPr sz="2000" b="0" i="0">
+                <a:solidFill>
+                  <a:srgbClr val="333333"/>
+                </a:solidFill>
+                <a:latin typeface="Calibri"/>
+              </a:rPr>
+              <a:t> ZIP/PDF final subido antes del turno + sustentacion en vivo 5-8 min + Q&amp;A</a:t>
+            </a:r>
+          </a:p>
+          <a:p>
+            <a:pPr>
+              <a:spcAft>
+                <a:spcPts val="800"/>
+              </a:spcAft>
+            </a:pPr>
+            <a:r>
+              <a:rPr sz="2000" b="0" i="0">
+                <a:solidFill>
+                  <a:srgbClr val="333333"/>
+                </a:solidFill>
+                <a:latin typeface="Calibri"/>
+              </a:rPr>
+              <a:t>–   Evidencia ejecutable en pantalla durante tu turno (no solo capturas).</a:t>
+            </a:r>
+          </a:p>
+          <a:p>
+            <a:pPr>
+              <a:spcAft>
+                <a:spcPts val="800"/>
+              </a:spcAft>
+            </a:pPr>
+            <a:r>
+              <a:rPr sz="2000" b="0" i="0">
+                <a:solidFill>
+                  <a:srgbClr val="333333"/>
+                </a:solidFill>
+                <a:latin typeface="Calibri"/>
+              </a:rPr>
+              <a:t>–   Puedes explicar </a:t>
+            </a:r>
+            <a:r>
+              <a:rPr sz="2000" b="1" i="0">
+                <a:solidFill>
+                  <a:srgbClr val="333333"/>
+                </a:solidFill>
+                <a:latin typeface="Calibri"/>
+              </a:rPr>
+              <a:t>cualquier</a:t>
+            </a:r>
+            <a:r>
+              <a:rPr sz="2000" b="0" i="0">
+                <a:solidFill>
+                  <a:srgbClr val="333333"/>
+                </a:solidFill>
+                <a:latin typeface="Calibri"/>
+              </a:rPr>
+              <a:t> parte de tu modelo en 60 segundos.</a:t>
+            </a:r>
+          </a:p>
+          <a:p>
+            <a:pPr>
+              <a:spcAft>
+                <a:spcPts val="800"/>
+              </a:spcAft>
+            </a:pPr>
+            <a:r>
+              <a:rPr sz="2000" b="0" i="0">
+                <a:solidFill>
+                  <a:srgbClr val="333333"/>
+                </a:solidFill>
+                <a:latin typeface="Calibri"/>
+              </a:rPr>
+              <a:t>–   </a:t>
+            </a:r>
+            <a:r>
+              <a:rPr sz="2000" b="1" i="0">
+                <a:solidFill>
+                  <a:srgbClr val="333333"/>
+                </a:solidFill>
+                <a:latin typeface="Calibri"/>
+              </a:rPr>
+              <a:t>Entrega en la plataforma del curso</a:t>
+            </a:r>
+            <a:r>
+              <a:rPr sz="2000" b="0" i="0">
+                <a:solidFill>
+                  <a:srgbClr val="333333"/>
+                </a:solidFill>
+                <a:latin typeface="Calibri"/>
+              </a:rPr>
+              <a:t> — </a:t>
+            </a:r>
+            <a:r>
+              <a:rPr sz="2000" b="1" i="0">
+                <a:solidFill>
+                  <a:srgbClr val="333333"/>
+                </a:solidFill>
+                <a:latin typeface="Calibri"/>
+              </a:rPr>
+              <a:t>antes</a:t>
+            </a:r>
+            <a:r>
+              <a:rPr sz="2000" b="0" i="0">
+                <a:solidFill>
+                  <a:srgbClr val="333333"/>
+                </a:solidFill>
+                <a:latin typeface="Calibri"/>
+              </a:rPr>
+              <a:t> de tu turno.</a:t>
+            </a:r>
+          </a:p>
+        </p:txBody>
+      </p:sp>
+      <p:sp>
+        <p:nvSpPr>
+          <p:cNvPr id="6" name="TextBox 5"/>
+          <p:cNvSpPr txBox="1"/>
+          <p:nvPr/>
+        </p:nvSpPr>
+        <p:spPr>
+          <a:xfrm>
+            <a:off x="11185855" y="6473952"/>
+            <a:ext cx="640080" cy="274320"/>
+          </a:xfrm>
+          <a:prstGeom prst="rect">
+            <a:avLst/>
+          </a:prstGeom>
+          <a:noFill/>
+        </p:spPr>
+        <p:txBody>
+          <a:bodyPr wrap="square">
+            <a:spAutoFit/>
+          </a:bodyPr>
+          <a:lstStyle/>
+          <a:p>
+            <a:pPr algn="r"/>
+            <a:r>
+              <a:rPr sz="1100" b="0" i="0">
+                <a:solidFill>
+                  <a:srgbClr val="666666"/>
+                </a:solidFill>
+                <a:latin typeface="Calibri"/>
+              </a:rPr>
+              <a:t>25</a:t>
+            </a:r>
+          </a:p>
+        </p:txBody>
+      </p:sp>
+    </p:spTree>
+  </p:cSld>
+  <p:clrMapOvr>
+    <a:masterClrMapping/>
+  </p:clrMapOvr>
+</p:sld>
+</file>
+
+<file path=ppt/slides/slide26.xml><?xml version="1.0" encoding="utf-8"?>
+<p:sld xmlns:a="http://schemas.openxmlformats.org/drawingml/2006/main" xmlns:p="http://schemas.openxmlformats.org/presentationml/2006/main" xmlns:r="http://schemas.openxmlformats.org/officeDocument/2006/relationships">
+  <p:cSld>
+    <p:bg>
+      <p:bgPr>
+        <a:solidFill>
+          <a:srgbClr val="FFFFFF"/>
+        </a:solidFill>
+        <a:effectLst/>
+      </p:bgPr>
+    </p:bg>
+    <p:spTree>
+      <p:nvGrpSpPr>
+        <p:cNvPr id="1" name=""/>
+        <p:cNvGrpSpPr/>
+        <p:nvPr/>
+      </p:nvGrpSpPr>
+      <p:grpSpPr/>
+      <p:sp>
+        <p:nvSpPr>
+          <p:cNvPr id="2" name="Rectangle 1"/>
+          <p:cNvSpPr/>
+          <p:nvPr/>
+        </p:nvSpPr>
+        <p:spPr>
+          <a:xfrm>
+            <a:off x="0" y="0"/>
+            <a:ext cx="12191695" cy="960120"/>
+          </a:xfrm>
+          <a:prstGeom prst="rect">
+            <a:avLst/>
+          </a:prstGeom>
+          <a:solidFill>
+            <a:srgbClr val="095292"/>
+          </a:solidFill>
+          <a:ln>
+            <a:noFill/>
+          </a:ln>
+        </p:spPr>
+        <p:style>
+          <a:lnRef idx="1">
+            <a:schemeClr val="accent1"/>
+          </a:lnRef>
+          <a:fillRef idx="3">
+            <a:schemeClr val="accent1"/>
+          </a:fillRef>
+          <a:effectRef idx="2">
+            <a:schemeClr val="accent1"/>
+          </a:effectRef>
+          <a:fontRef idx="minor">
+            <a:schemeClr val="lt1"/>
+          </a:fontRef>
+        </p:style>
+        <p:txBody>
+          <a:bodyPr rtlCol="0" anchor="ctr"/>
+          <a:lstStyle/>
+          <a:p>
+            <a:pPr algn="ctr"/>
+          </a:p>
+        </p:txBody>
+      </p:sp>
+      <p:sp>
+        <p:nvSpPr>
+          <p:cNvPr id="3" name="Rectangle 2"/>
+          <p:cNvSpPr/>
+          <p:nvPr/>
+        </p:nvSpPr>
+        <p:spPr>
+          <a:xfrm>
+            <a:off x="0" y="960120"/>
+            <a:ext cx="12191695" cy="41148"/>
+          </a:xfrm>
+          <a:prstGeom prst="rect">
+            <a:avLst/>
+          </a:prstGeom>
+          <a:solidFill>
+            <a:srgbClr val="FFD000"/>
+          </a:solidFill>
+          <a:ln>
+            <a:noFill/>
+          </a:ln>
+        </p:spPr>
+        <p:style>
+          <a:lnRef idx="1">
+            <a:schemeClr val="accent1"/>
+          </a:lnRef>
+          <a:fillRef idx="3">
+            <a:schemeClr val="accent1"/>
+          </a:fillRef>
+          <a:effectRef idx="2">
+            <a:schemeClr val="accent1"/>
+          </a:effectRef>
+          <a:fontRef idx="minor">
+            <a:schemeClr val="lt1"/>
+          </a:fontRef>
+        </p:style>
+        <p:txBody>
+          <a:bodyPr rtlCol="0" anchor="ctr"/>
+          <a:lstStyle/>
+          <a:p>
+            <a:pPr algn="ctr"/>
+          </a:p>
+        </p:txBody>
+      </p:sp>
+      <p:sp>
+        <p:nvSpPr>
+          <p:cNvPr id="4" name="TextBox 3"/>
+          <p:cNvSpPr txBox="1"/>
+          <p:nvPr/>
+        </p:nvSpPr>
+        <p:spPr>
+          <a:xfrm>
+            <a:off x="457200" y="164592"/>
+            <a:ext cx="11277295" cy="502920"/>
+          </a:xfrm>
+          <a:prstGeom prst="rect">
+            <a:avLst/>
+          </a:prstGeom>
+          <a:noFill/>
+        </p:spPr>
+        <p:txBody>
+          <a:bodyPr wrap="square">
+            <a:spAutoFit/>
+          </a:bodyPr>
+          <a:lstStyle/>
+          <a:p>
+            <a:r>
+              <a:rPr sz="2600" b="1" i="0">
+                <a:solidFill>
+                  <a:srgbClr val="FFFFFF"/>
+                </a:solidFill>
+                <a:latin typeface="Calibri"/>
+              </a:rPr>
+              <a:t>Cierre del PI</a:t>
+            </a:r>
+          </a:p>
+        </p:txBody>
+      </p:sp>
+      <p:sp>
+        <p:nvSpPr>
+          <p:cNvPr id="5" name="Rounded Rectangle 4"/>
+          <p:cNvSpPr/>
+          <p:nvPr/>
+        </p:nvSpPr>
+        <p:spPr>
+          <a:xfrm>
+            <a:off x="457200" y="1261872"/>
+            <a:ext cx="11277295" cy="1051560"/>
+          </a:xfrm>
+          <a:prstGeom prst="roundRect">
+            <a:avLst>
+              <a:gd name="adj" fmla="val 12000"/>
+            </a:avLst>
+          </a:prstGeom>
+          <a:solidFill>
+            <a:srgbClr val="E8F4FA"/>
+          </a:solidFill>
+          <a:ln>
+            <a:noFill/>
+          </a:ln>
+        </p:spPr>
+        <p:style>
+          <a:lnRef idx="1">
+            <a:schemeClr val="accent1"/>
+          </a:lnRef>
+          <a:fillRef idx="3">
+            <a:schemeClr val="accent1"/>
+          </a:fillRef>
+          <a:effectRef idx="2">
+            <a:schemeClr val="accent1"/>
+          </a:effectRef>
+          <a:fontRef idx="minor">
+            <a:schemeClr val="lt1"/>
+          </a:fontRef>
+        </p:style>
+        <p:txBody>
+          <a:bodyPr rtlCol="0" anchor="ctr"/>
+          <a:lstStyle/>
+          <a:p>
+            <a:pPr algn="ctr"/>
+          </a:p>
+        </p:txBody>
+      </p:sp>
+      <p:sp>
+        <p:nvSpPr>
+          <p:cNvPr id="6" name="Rectangle 5"/>
+          <p:cNvSpPr/>
+          <p:nvPr/>
+        </p:nvSpPr>
+        <p:spPr>
+          <a:xfrm>
+            <a:off x="457200" y="1261872"/>
+            <a:ext cx="128016" cy="1051560"/>
+          </a:xfrm>
+          <a:prstGeom prst="rect">
+            <a:avLst/>
+          </a:prstGeom>
+          <a:solidFill>
+            <a:srgbClr val="269CCB"/>
+          </a:solidFill>
+          <a:ln>
+            <a:noFill/>
+          </a:ln>
+        </p:spPr>
+        <p:style>
+          <a:lnRef idx="1">
+            <a:schemeClr val="accent1"/>
+          </a:lnRef>
+          <a:fillRef idx="3">
+            <a:schemeClr val="accent1"/>
+          </a:fillRef>
+          <a:effectRef idx="2">
+            <a:schemeClr val="accent1"/>
+          </a:effectRef>
+          <a:fontRef idx="minor">
+            <a:schemeClr val="lt1"/>
+          </a:fontRef>
+        </p:style>
+        <p:txBody>
+          <a:bodyPr rtlCol="0" anchor="ctr"/>
+          <a:lstStyle/>
+          <a:p>
+            <a:pPr algn="ctr"/>
+          </a:p>
+        </p:txBody>
+      </p:sp>
+      <p:sp>
+        <p:nvSpPr>
+          <p:cNvPr id="7" name="TextBox 6"/>
+          <p:cNvSpPr txBox="1"/>
+          <p:nvPr/>
+        </p:nvSpPr>
+        <p:spPr>
+          <a:xfrm>
+            <a:off x="777240" y="1399031"/>
+            <a:ext cx="10774375" cy="822959"/>
+          </a:xfrm>
+          <a:prstGeom prst="rect">
+            <a:avLst/>
+          </a:prstGeom>
+          <a:noFill/>
+        </p:spPr>
+        <p:txBody>
+          <a:bodyPr wrap="square">
+            <a:spAutoFit/>
+          </a:bodyPr>
+          <a:lstStyle/>
+          <a:p>
+            <a:r>
+              <a:rPr sz="1200" b="1" i="0">
+                <a:solidFill>
+                  <a:srgbClr val="269CCB"/>
+                </a:solidFill>
+                <a:latin typeface="Calibri"/>
+              </a:rPr>
+              <a:t>Info</a:t>
+            </a:r>
+          </a:p>
+          <a:p>
+            <a:pPr>
+              <a:spcBef>
+                <a:spcPts val="400"/>
+              </a:spcBef>
+            </a:pPr>
+            <a:r>
+              <a:rPr sz="1400" b="0" i="0">
+                <a:solidFill>
+                  <a:srgbClr val="333333"/>
+                </a:solidFill>
+                <a:latin typeface="Calibri"/>
+              </a:rPr>
+              <a:t>Hito: Sustentacion en vivo y entrega final del PI (20% Corte 3)</a:t>
+            </a:r>
+          </a:p>
+        </p:txBody>
+      </p:sp>
+      <p:sp>
+        <p:nvSpPr>
+          <p:cNvPr id="8" name="Rounded Rectangle 7"/>
+          <p:cNvSpPr/>
+          <p:nvPr/>
+        </p:nvSpPr>
+        <p:spPr>
+          <a:xfrm>
+            <a:off x="457200" y="2478024"/>
+            <a:ext cx="11277295" cy="1051560"/>
+          </a:xfrm>
+          <a:prstGeom prst="roundRect">
+            <a:avLst>
+              <a:gd name="adj" fmla="val 12000"/>
+            </a:avLst>
+          </a:prstGeom>
+          <a:solidFill>
+            <a:srgbClr val="FFF8E1"/>
+          </a:solidFill>
+          <a:ln>
+            <a:noFill/>
+          </a:ln>
+        </p:spPr>
+        <p:style>
+          <a:lnRef idx="1">
+            <a:schemeClr val="accent1"/>
+          </a:lnRef>
+          <a:fillRef idx="3">
+            <a:schemeClr val="accent1"/>
+          </a:fillRef>
+          <a:effectRef idx="2">
+            <a:schemeClr val="accent1"/>
+          </a:effectRef>
+          <a:fontRef idx="minor">
+            <a:schemeClr val="lt1"/>
+          </a:fontRef>
+        </p:style>
+        <p:txBody>
+          <a:bodyPr rtlCol="0" anchor="ctr"/>
+          <a:lstStyle/>
+          <a:p>
+            <a:pPr algn="ctr"/>
+          </a:p>
+        </p:txBody>
+      </p:sp>
+      <p:sp>
+        <p:nvSpPr>
+          <p:cNvPr id="9" name="Rectangle 8"/>
+          <p:cNvSpPr/>
+          <p:nvPr/>
+        </p:nvSpPr>
+        <p:spPr>
+          <a:xfrm>
+            <a:off x="457200" y="2478024"/>
+            <a:ext cx="128016" cy="1051560"/>
+          </a:xfrm>
+          <a:prstGeom prst="rect">
+            <a:avLst/>
+          </a:prstGeom>
+          <a:solidFill>
+            <a:srgbClr val="FFD000"/>
+          </a:solidFill>
+          <a:ln>
+            <a:noFill/>
+          </a:ln>
+        </p:spPr>
+        <p:style>
+          <a:lnRef idx="1">
+            <a:schemeClr val="accent1"/>
+          </a:lnRef>
+          <a:fillRef idx="3">
+            <a:schemeClr val="accent1"/>
+          </a:fillRef>
+          <a:effectRef idx="2">
+            <a:schemeClr val="accent1"/>
+          </a:effectRef>
+          <a:fontRef idx="minor">
+            <a:schemeClr val="lt1"/>
+          </a:fontRef>
+        </p:style>
+        <p:txBody>
+          <a:bodyPr rtlCol="0" anchor="ctr"/>
+          <a:lstStyle/>
+          <a:p>
+            <a:pPr algn="ctr"/>
+          </a:p>
+        </p:txBody>
+      </p:sp>
+      <p:sp>
+        <p:nvSpPr>
+          <p:cNvPr id="10" name="TextBox 9"/>
+          <p:cNvSpPr txBox="1"/>
+          <p:nvPr/>
+        </p:nvSpPr>
+        <p:spPr>
+          <a:xfrm>
+            <a:off x="777240" y="2615184"/>
+            <a:ext cx="10774375" cy="822959"/>
+          </a:xfrm>
+          <a:prstGeom prst="rect">
+            <a:avLst/>
+          </a:prstGeom>
+          <a:noFill/>
+        </p:spPr>
+        <p:txBody>
+          <a:bodyPr wrap="square">
+            <a:spAutoFit/>
+          </a:bodyPr>
+          <a:lstStyle/>
+          <a:p>
+            <a:r>
+              <a:rPr sz="1200" b="1" i="0">
+                <a:solidFill>
+                  <a:srgbClr val="FFD000"/>
+                </a:solidFill>
+                <a:latin typeface="Calibri"/>
+              </a:rPr>
+              <a:t>Aclaración</a:t>
+            </a:r>
+          </a:p>
+          <a:p>
+            <a:pPr>
+              <a:spcBef>
+                <a:spcPts val="400"/>
+              </a:spcBef>
+            </a:pPr>
+            <a:r>
+              <a:rPr sz="1400" b="0" i="0">
+                <a:solidFill>
+                  <a:srgbClr val="333333"/>
+                </a:solidFill>
+                <a:latin typeface="Calibri"/>
+              </a:rPr>
+              <a:t>Enunciado completo y rubrica: Clases/Proyecto Integrador/ (VetCare DB).</a:t>
+            </a:r>
+          </a:p>
+        </p:txBody>
+      </p:sp>
+      <p:sp>
+        <p:nvSpPr>
+          <p:cNvPr id="11" name="Rounded Rectangle 10"/>
+          <p:cNvSpPr/>
+          <p:nvPr/>
+        </p:nvSpPr>
+        <p:spPr>
+          <a:xfrm>
+            <a:off x="457200" y="3694176"/>
+            <a:ext cx="11277295" cy="1051560"/>
+          </a:xfrm>
+          <a:prstGeom prst="roundRect">
+            <a:avLst>
+              <a:gd name="adj" fmla="val 12000"/>
+            </a:avLst>
+          </a:prstGeom>
+          <a:solidFill>
+            <a:srgbClr val="FBE4E4"/>
+          </a:solidFill>
+          <a:ln>
+            <a:noFill/>
+          </a:ln>
+        </p:spPr>
+        <p:style>
+          <a:lnRef idx="1">
+            <a:schemeClr val="accent1"/>
+          </a:lnRef>
+          <a:fillRef idx="3">
+            <a:schemeClr val="accent1"/>
+          </a:fillRef>
+          <a:effectRef idx="2">
+            <a:schemeClr val="accent1"/>
+          </a:effectRef>
+          <a:fontRef idx="minor">
+            <a:schemeClr val="lt1"/>
+          </a:fontRef>
+        </p:style>
+        <p:txBody>
+          <a:bodyPr rtlCol="0" anchor="ctr"/>
+          <a:lstStyle/>
+          <a:p>
+            <a:pPr algn="ctr"/>
+          </a:p>
+        </p:txBody>
+      </p:sp>
+      <p:sp>
+        <p:nvSpPr>
+          <p:cNvPr id="12" name="Rectangle 11"/>
+          <p:cNvSpPr/>
+          <p:nvPr/>
+        </p:nvSpPr>
+        <p:spPr>
+          <a:xfrm>
+            <a:off x="457200" y="3694176"/>
+            <a:ext cx="128016" cy="1051560"/>
+          </a:xfrm>
+          <a:prstGeom prst="rect">
+            <a:avLst/>
+          </a:prstGeom>
+          <a:solidFill>
+            <a:srgbClr val="A02030"/>
+          </a:solidFill>
+          <a:ln>
+            <a:noFill/>
+          </a:ln>
+        </p:spPr>
+        <p:style>
+          <a:lnRef idx="1">
+            <a:schemeClr val="accent1"/>
+          </a:lnRef>
+          <a:fillRef idx="3">
+            <a:schemeClr val="accent1"/>
+          </a:fillRef>
+          <a:effectRef idx="2">
+            <a:schemeClr val="accent1"/>
+          </a:effectRef>
+          <a:fontRef idx="minor">
+            <a:schemeClr val="lt1"/>
+          </a:fontRef>
+        </p:style>
+        <p:txBody>
+          <a:bodyPr rtlCol="0" anchor="ctr"/>
+          <a:lstStyle/>
+          <a:p>
+            <a:pPr algn="ctr"/>
+          </a:p>
+        </p:txBody>
+      </p:sp>
+      <p:sp>
+        <p:nvSpPr>
+          <p:cNvPr id="13" name="TextBox 12"/>
+          <p:cNvSpPr txBox="1"/>
+          <p:nvPr/>
+        </p:nvSpPr>
+        <p:spPr>
+          <a:xfrm>
+            <a:off x="777240" y="3831336"/>
+            <a:ext cx="10774375" cy="822959"/>
+          </a:xfrm>
+          <a:prstGeom prst="rect">
+            <a:avLst/>
+          </a:prstGeom>
+          <a:noFill/>
+        </p:spPr>
+        <p:txBody>
+          <a:bodyPr wrap="square">
+            <a:spAutoFit/>
+          </a:bodyPr>
+          <a:lstStyle/>
+          <a:p>
+            <a:r>
+              <a:rPr sz="1200" b="1" i="0">
+                <a:solidFill>
+                  <a:srgbClr val="A02030"/>
+                </a:solidFill>
+                <a:latin typeface="Calibri"/>
+              </a:rPr>
+              <a:t>Atención</a:t>
+            </a:r>
+          </a:p>
+          <a:p>
+            <a:pPr>
+              <a:spcBef>
+                <a:spcPts val="400"/>
+              </a:spcBef>
+            </a:pPr>
+            <a:r>
+              <a:rPr sz="1400" b="0" i="0">
+                <a:solidFill>
+                  <a:srgbClr val="333333"/>
+                </a:solidFill>
+                <a:latin typeface="Calibri"/>
+              </a:rPr>
+              <a:t>El PI vale 20% del Corte 3 y NO reemplaza el Parcial 3, que ya se aplico en su propia sesion.</a:t>
+            </a:r>
+          </a:p>
+        </p:txBody>
+      </p:sp>
+      <p:sp>
+        <p:nvSpPr>
+          <p:cNvPr id="14" name="TextBox 13"/>
+          <p:cNvSpPr txBox="1"/>
+          <p:nvPr/>
+        </p:nvSpPr>
+        <p:spPr>
+          <a:xfrm>
+            <a:off x="11185855" y="6473952"/>
+            <a:ext cx="640080" cy="274320"/>
+          </a:xfrm>
+          <a:prstGeom prst="rect">
+            <a:avLst/>
+          </a:prstGeom>
+          <a:noFill/>
+        </p:spPr>
+        <p:txBody>
+          <a:bodyPr wrap="square">
+            <a:spAutoFit/>
+          </a:bodyPr>
+          <a:lstStyle/>
+          <a:p>
+            <a:pPr algn="r"/>
+            <a:r>
+              <a:rPr sz="1100" b="0" i="0">
+                <a:solidFill>
+                  <a:srgbClr val="666666"/>
+                </a:solidFill>
+                <a:latin typeface="Calibri"/>
+              </a:rPr>
+              <a:t>26</a:t>
+            </a:r>
+          </a:p>
+        </p:txBody>
+      </p:sp>
+    </p:spTree>
+  </p:cSld>
+  <p:clrMapOvr>
+    <a:masterClrMapping/>
+  </p:clrMapOvr>
+</p:sld>
+</file>
+
+<file path=ppt/slides/slide27.xml><?xml version="1.0" encoding="utf-8"?>
+<p:sld xmlns:a="http://schemas.openxmlformats.org/drawingml/2006/main" xmlns:p="http://schemas.openxmlformats.org/presentationml/2006/main" xmlns:r="http://schemas.openxmlformats.org/officeDocument/2006/relationships">
+  <p:cSld>
+    <p:bg>
+      <p:bgPr>
+        <a:solidFill>
+          <a:srgbClr val="FFFFFF"/>
+        </a:solidFill>
+        <a:effectLst/>
+      </p:bgPr>
+    </p:bg>
+    <p:spTree>
+      <p:nvGrpSpPr>
+        <p:cNvPr id="1" name=""/>
+        <p:cNvGrpSpPr/>
+        <p:nvPr/>
+      </p:nvGrpSpPr>
+      <p:grpSpPr/>
+      <p:sp>
+        <p:nvSpPr>
+          <p:cNvPr id="2" name="Rectangle 1"/>
+          <p:cNvSpPr/>
+          <p:nvPr/>
+        </p:nvSpPr>
+        <p:spPr>
+          <a:xfrm>
+            <a:off x="0" y="0"/>
+            <a:ext cx="12191695" cy="164592"/>
+          </a:xfrm>
+          <a:prstGeom prst="rect">
+            <a:avLst/>
+          </a:prstGeom>
+          <a:solidFill>
+            <a:srgbClr val="269CCB"/>
+          </a:solidFill>
+          <a:ln>
+            <a:noFill/>
+          </a:ln>
+        </p:spPr>
+        <p:style>
+          <a:lnRef idx="1">
+            <a:schemeClr val="accent1"/>
+          </a:lnRef>
+          <a:fillRef idx="3">
+            <a:schemeClr val="accent1"/>
+          </a:fillRef>
+          <a:effectRef idx="2">
+            <a:schemeClr val="accent1"/>
+          </a:effectRef>
+          <a:fontRef idx="minor">
+            <a:schemeClr val="lt1"/>
+          </a:fontRef>
+        </p:style>
+        <p:txBody>
+          <a:bodyPr rtlCol="0" anchor="ctr"/>
+          <a:lstStyle/>
+          <a:p>
+            <a:pPr algn="ctr"/>
+          </a:p>
+        </p:txBody>
+      </p:sp>
+      <p:pic>
+        <p:nvPicPr>
+          <p:cNvPr id="3" name="Picture 2" descr="logo_uniajc_color.png"/>
+          <p:cNvPicPr>
+            <a:picLocks noChangeAspect="1"/>
+          </p:cNvPicPr>
+          <p:nvPr/>
+        </p:nvPicPr>
+        <p:blipFill>
+          <a:blip r:embed="rId2"/>
+          <a:stretch>
+            <a:fillRect/>
+          </a:stretch>
+        </p:blipFill>
+        <p:spPr>
+          <a:xfrm>
+            <a:off x="10271455" y="5998464"/>
+            <a:ext cx="1463040" cy="643233"/>
+          </a:xfrm>
+          <a:prstGeom prst="rect">
+            <a:avLst/>
+          </a:prstGeom>
+        </p:spPr>
+      </p:pic>
+      <p:sp>
+        <p:nvSpPr>
+          <p:cNvPr id="4" name="TextBox 3"/>
+          <p:cNvSpPr txBox="1"/>
+          <p:nvPr/>
+        </p:nvSpPr>
+        <p:spPr>
+          <a:xfrm>
+            <a:off x="457200" y="1737360"/>
+            <a:ext cx="11277295" cy="1097280"/>
+          </a:xfrm>
+          <a:prstGeom prst="rect">
+            <a:avLst/>
+          </a:prstGeom>
+          <a:noFill/>
+        </p:spPr>
+        <p:txBody>
+          <a:bodyPr wrap="square" anchor="ctr"/>
+          <a:lstStyle/>
+          <a:p>
+            <a:pPr algn="ctr"/>
+            <a:r>
+              <a:rPr sz="3400" b="1" i="0">
+                <a:solidFill>
+                  <a:srgbClr val="095292"/>
+                </a:solidFill>
+                <a:latin typeface="Calibri"/>
+              </a:rPr>
+              <a:t>Clase 15 · cierre de VetCare DB</a:t>
+            </a:r>
+          </a:p>
+        </p:txBody>
+      </p:sp>
+      <p:sp>
+        <p:nvSpPr>
+          <p:cNvPr id="5" name="TextBox 4"/>
+          <p:cNvSpPr txBox="1"/>
+          <p:nvPr/>
+        </p:nvSpPr>
+        <p:spPr>
+          <a:xfrm>
+            <a:off x="457200" y="3017520"/>
+            <a:ext cx="11277295" cy="1645920"/>
+          </a:xfrm>
+          <a:prstGeom prst="rect">
+            <a:avLst/>
+          </a:prstGeom>
+          <a:noFill/>
+        </p:spPr>
+        <p:txBody>
+          <a:bodyPr wrap="square">
+            <a:spAutoFit/>
+          </a:bodyPr>
+          <a:lstStyle/>
+          <a:p>
+            <a:pPr algn="ctr">
+              <a:spcAft>
+                <a:spcPts val="600"/>
+              </a:spcAft>
+            </a:pPr>
+            <a:r>
+              <a:rPr sz="1600" b="0" i="0">
+                <a:solidFill>
+                  <a:srgbClr val="333333"/>
+                </a:solidFill>
+                <a:latin typeface="Calibri"/>
+              </a:rPr>
+              <a:t>Sustentacion en vivo y entrega final del PI (20% Corte 3)</a:t>
+            </a:r>
+          </a:p>
+          <a:p>
+            <a:pPr algn="ctr">
+              <a:spcAft>
+                <a:spcPts val="600"/>
+              </a:spcAft>
+            </a:pPr>
+            <a:r>
+              <a:rPr sz="1600" b="0" i="0">
+                <a:solidFill>
+                  <a:srgbClr val="333333"/>
+                </a:solidFill>
+                <a:latin typeface="Calibri"/>
+              </a:rPr>
+              <a:t>Entregable: ZIP/PDF final subido antes del turno + sustentacion en vivo 5-8 min + Q&amp;A</a:t>
+            </a:r>
+          </a:p>
+          <a:p>
+            <a:pPr algn="ctr">
+              <a:spcAft>
+                <a:spcPts val="600"/>
+              </a:spcAft>
+            </a:pPr>
+            <a:r>
+              <a:rPr sz="1600" b="0" i="0">
+                <a:solidFill>
+                  <a:srgbClr val="333333"/>
+                </a:solidFill>
+                <a:latin typeface="Calibri"/>
+              </a:rPr>
+              <a:t>Conserva el paquete (ER, DDL, roles, procs, triggers, optimizacion) como portafolio</a:t>
+            </a:r>
+          </a:p>
+        </p:txBody>
+      </p:sp>
+      <p:sp>
+        <p:nvSpPr>
+          <p:cNvPr id="6" name="TextBox 5"/>
+          <p:cNvSpPr txBox="1"/>
+          <p:nvPr/>
+        </p:nvSpPr>
+        <p:spPr>
+          <a:xfrm>
+            <a:off x="457200" y="4754880"/>
+            <a:ext cx="11277295" cy="640080"/>
+          </a:xfrm>
+          <a:prstGeom prst="rect">
+            <a:avLst/>
+          </a:prstGeom>
+          <a:noFill/>
+        </p:spPr>
+        <p:txBody>
+          <a:bodyPr wrap="square">
+            <a:spAutoFit/>
+          </a:bodyPr>
+          <a:lstStyle/>
+          <a:p>
+            <a:pPr algn="ctr"/>
+            <a:r>
+              <a:rPr sz="2000" b="1" i="0">
+                <a:solidFill>
+                  <a:srgbClr val="269CCB"/>
+                </a:solidFill>
+                <a:latin typeface="Calibri"/>
+              </a:rPr>
+              <a:t>Sustentar es justificar decisiones, no describir tablas</a:t>
+            </a:r>
+          </a:p>
+        </p:txBody>
+      </p:sp>
+    </p:spTree>
+  </p:cSld>
+  <p:clrMapOvr>
+    <a:masterClrMapping/>
+  </p:clrMapOvr>
+</p:sld>
+</file>
+
 <file path=ppt/slides/slide3.xml><?xml version="1.0" encoding="utf-8"?>
 <p:sld xmlns:a="http://schemas.openxmlformats.org/drawingml/2006/main" xmlns:p="http://schemas.openxmlformats.org/presentationml/2006/main" xmlns:r="http://schemas.openxmlformats.org/officeDocument/2006/relationships">
   <p:cSld>
@@ -7432,7 +11821,7 @@
                 </a:solidFill>
                 <a:latin typeface="Calibri"/>
               </a:rPr>
-              <a:t>Teoria Core (breve)</a:t>
+              <a:t>Sustentar no es describir: el eje de toda la clase</a:t>
             </a:r>
           </a:p>
         </p:txBody>
@@ -7471,7 +11860,7 @@
                 </a:solidFill>
                 <a:latin typeface="Calibri"/>
               </a:rPr>
-              <a:t>–   Cierre: evidencias completas segun rubrica (100 pts -&gt; 20%).</a:t>
+              <a:t>–   Sustentar una base de datos no es recorrer el diagrama entidad-relacion nombrando tablas.</a:t>
             </a:r>
           </a:p>
           <a:p>
@@ -7487,7 +11876,7 @@
                 </a:solidFill>
                 <a:latin typeface="Calibri"/>
               </a:rPr>
-              <a:t>–   Sustentacion breve alineada a criterios del enunciado.</a:t>
+              <a:t>–   Describir es decir que hay: «tenemos Dueno, Mascota, Cita, Veterinario, Insumo y Factura».</a:t>
             </a:r>
           </a:p>
           <a:p>
@@ -7503,7 +11892,87 @@
                 </a:solidFill>
                 <a:latin typeface="Calibri"/>
               </a:rPr>
-              <a:t>–   Autoevaluacion del propio proceso de trabajo.</a:t>
+              <a:t>–   Sustentar es responder por que quedo asi y que alternativa se descarto.</a:t>
+            </a:r>
+          </a:p>
+          <a:p>
+            <a:pPr>
+              <a:spcAft>
+                <a:spcPts val="800"/>
+              </a:spcAft>
+            </a:pPr>
+            <a:r>
+              <a:rPr sz="2000" b="0" i="0">
+                <a:solidFill>
+                  <a:srgbClr val="333333"/>
+                </a:solidFill>
+                <a:latin typeface="Calibri"/>
+              </a:rPr>
+              <a:t>–   La razon por la que esto importa mas en bases de datos que en casi cualquier otra parte del software es el costo de revertir: cambiar el texto de un boton cuesta minutos</a:t>
+            </a:r>
+          </a:p>
+          <a:p>
+            <a:pPr>
+              <a:spcAft>
+                <a:spcPts val="800"/>
+              </a:spcAft>
+            </a:pPr>
+            <a:r>
+              <a:rPr sz="2000" b="0" i="0">
+                <a:solidFill>
+                  <a:srgbClr val="333333"/>
+                </a:solidFill>
+                <a:latin typeface="Calibri"/>
+              </a:rPr>
+              <a:t>–   Mientras que partir en dos una tabla que ya tiene cien mil filas y seis procedimientos apuntando a ella cuesta una migracion, una ventana de mantenimiento y el riesgo real de perder datos.</a:t>
+            </a:r>
+          </a:p>
+          <a:p>
+            <a:pPr>
+              <a:spcAft>
+                <a:spcPts val="800"/>
+              </a:spcAft>
+            </a:pPr>
+            <a:r>
+              <a:rPr sz="2000" b="0" i="0">
+                <a:solidFill>
+                  <a:srgbClr val="333333"/>
+                </a:solidFill>
+                <a:latin typeface="Calibri"/>
+              </a:rPr>
+              <a:t>–   Una decision de modelado es, por definicion, una decision costosa de deshacer.</a:t>
+            </a:r>
+          </a:p>
+          <a:p>
+            <a:pPr>
+              <a:spcAft>
+                <a:spcPts val="800"/>
+              </a:spcAft>
+            </a:pPr>
+            <a:r>
+              <a:rPr sz="2000" b="0" i="0">
+                <a:solidFill>
+                  <a:srgbClr val="333333"/>
+                </a:solidFill>
+                <a:latin typeface="Calibri"/>
+              </a:rPr>
+              <a:t>–   Eso convierte cada eleccion del ER en algo que se debe poder defender, y es exactamente lo que un evaluador (o un lider tecnico en una entrevista) va a probar con dos o tres preguntas bien elegidas.</a:t>
+            </a:r>
+          </a:p>
+          <a:p>
+            <a:pPr>
+              <a:spcAft>
+                <a:spcPts val="800"/>
+              </a:spcAft>
+            </a:pPr>
+            <a:r>
+              <a:rPr sz="2000" b="0" i="0">
+                <a:solidFill>
+                  <a:srgbClr val="333333"/>
+                </a:solidFill>
+                <a:latin typeface="Calibri"/>
+              </a:rPr>
+              <a:t>–   La clase de hoy no trae tema nuevo: trae la teoria de como se comunica y se empaqueta un trabajo tecnico para que un tercero pueda evaluarlo, reproducirlo y usarlo sin hablar con quien lo hizo.</a:t>
             </a:r>
           </a:p>
         </p:txBody>
@@ -7684,7 +12153,7 @@
                 </a:solidFill>
                 <a:latin typeface="Calibri"/>
               </a:rPr>
-              <a:t>Como se ordena la sesion de hoy</a:t>
+              <a:t>Las cuatro preguntas de por que que se hacen casi siempre (1/2)</a:t>
             </a:r>
           </a:p>
         </p:txBody>
@@ -7723,25 +12192,7 @@
                 </a:solidFill>
                 <a:latin typeface="Calibri"/>
               </a:rPr>
-              <a:t>–   Sustentación </a:t>
-            </a:r>
-            <a:r>
-              <a:rPr sz="2000" b="1" i="0">
-                <a:solidFill>
-                  <a:srgbClr val="333333"/>
-                </a:solidFill>
-                <a:latin typeface="Calibri"/>
-              </a:rPr>
-              <a:t>en vivo</a:t>
-            </a:r>
-            <a:r>
-              <a:rPr sz="2000" b="0" i="0">
-                <a:solidFill>
-                  <a:srgbClr val="333333"/>
-                </a:solidFill>
-                <a:latin typeface="Calibri"/>
-              </a:rPr>
-              <a:t>, en este bloque: no se reemplaza por video grabado.</a:t>
+              <a:t>–   Hay cuatro preguntas de por que que se hacen casi siempre, y el estudiante debe llegar con las cuatro respondidas.</a:t>
             </a:r>
           </a:p>
           <a:p>
@@ -7757,25 +12208,7 @@
                 </a:solidFill>
                 <a:latin typeface="Calibri"/>
               </a:rPr>
-              <a:t>–   Turnos de </a:t>
-            </a:r>
-            <a:r>
-              <a:rPr sz="2000" b="1" i="0">
-                <a:solidFill>
-                  <a:srgbClr val="333333"/>
-                </a:solidFill>
-                <a:latin typeface="Calibri"/>
-              </a:rPr>
-              <a:t>5–8 min de pitch + Q&amp;A</a:t>
-            </a:r>
-            <a:r>
-              <a:rPr sz="2000" b="0" i="0">
-                <a:solidFill>
-                  <a:srgbClr val="333333"/>
-                </a:solidFill>
-                <a:latin typeface="Calibri"/>
-              </a:rPr>
-              <a:t>; el orden se sortea al empezar.</a:t>
+              <a:t>–   Por que esa normalizacion: la respuesta esperada es que el modelo esta en tercera forma normal, es decir que cada atributo depende de la clave completa y de nada mas, y por eso el telefono del dueno vive en la tabla Dueno y no repetido en cada fila de Mascota.</a:t>
             </a:r>
           </a:p>
           <a:p>
@@ -7791,16 +12224,7 @@
                 </a:solidFill>
                 <a:latin typeface="Calibri"/>
               </a:rPr>
-              <a:t>–   Ten listo: </a:t>
-            </a:r>
-            <a:r>
-              <a:rPr sz="2000" b="1" i="0">
-                <a:solidFill>
-                  <a:srgbClr val="333333"/>
-                </a:solidFill>
-                <a:latin typeface="Calibri"/>
-              </a:rPr>
-              <a:t>ZIP/PDF final subido antes del turno + sustentacion en vivo 5-8 min + Q&amp;A</a:t>
+              <a:t>–   Y a continuacion se declara la desnormalizacion deliberada si existe: «guardamos el total en Factura aunque se pueda calcular sumando el detalle, porque el total es un valor historico que no debe cambiar si manana sube el precio del insumo».</a:t>
             </a:r>
           </a:p>
           <a:p>
@@ -7816,41 +12240,7 @@
                 </a:solidFill>
                 <a:latin typeface="Calibri"/>
               </a:rPr>
-              <a:t>–   En tu turno muestra una </a:t>
-            </a:r>
-            <a:r>
-              <a:rPr sz="2000" b="1" i="0">
-                <a:solidFill>
-                  <a:srgbClr val="333333"/>
-                </a:solidFill>
-                <a:latin typeface="Calibri"/>
-              </a:rPr>
-              <a:t>ejecución real</a:t>
-            </a:r>
-            <a:r>
-              <a:rPr sz="2000" b="0" i="0">
-                <a:solidFill>
-                  <a:srgbClr val="333333"/>
-                </a:solidFill>
-                <a:latin typeface="Calibri"/>
-              </a:rPr>
-              <a:t> (procedimiento OK + caso rechazado), no solo capturas.</a:t>
-            </a:r>
-          </a:p>
-          <a:p>
-            <a:pPr>
-              <a:spcAft>
-                <a:spcPts val="800"/>
-              </a:spcAft>
-            </a:pPr>
-            <a:r>
-              <a:rPr sz="2000" b="0" i="0">
-                <a:solidFill>
-                  <a:srgbClr val="333333"/>
-                </a:solidFill>
-                <a:latin typeface="Calibri"/>
-              </a:rPr>
-              <a:t>–   Mientras otros presentan, escuchas: el cierre del curso se hace con todo el grupo.</a:t>
+              <a:t>–   Esa segunda mitad es la que distingue al estudiante que entendio, porque normalizar no es un dogma sino un punto de partida del que se sale con razones escritas.</a:t>
             </a:r>
           </a:p>
         </p:txBody>
@@ -7925,7 +12315,7 @@
         <p:spPr>
           <a:xfrm>
             <a:off x="0" y="0"/>
-            <a:ext cx="12191695" cy="1170432"/>
+            <a:ext cx="12191695" cy="960120"/>
           </a:xfrm>
           <a:prstGeom prst="rect">
             <a:avLst/>
@@ -7967,7 +12357,7 @@
         </p:nvSpPr>
         <p:spPr>
           <a:xfrm>
-            <a:off x="0" y="1170432"/>
+            <a:off x="0" y="960120"/>
             <a:ext cx="12191695" cy="41148"/>
           </a:xfrm>
           <a:prstGeom prst="rect">
@@ -8011,7 +12401,7 @@
         <p:spPr>
           <a:xfrm>
             <a:off x="457200" y="164592"/>
-            <a:ext cx="11277295" cy="384048"/>
+            <a:ext cx="11277295" cy="502920"/>
           </a:xfrm>
           <a:prstGeom prst="rect">
             <a:avLst/>
@@ -8031,7 +12421,7 @@
                 </a:solidFill>
                 <a:latin typeface="Calibri"/>
               </a:rPr>
-              <a:t>Herramientas de hoy</a:t>
+              <a:t>Las cuatro preguntas de por que que se hacen casi siempre (2/2)</a:t>
             </a:r>
           </a:p>
         </p:txBody>
@@ -8044,8 +12434,8 @@
         </p:nvSpPr>
         <p:spPr>
           <a:xfrm>
-            <a:off x="457200" y="566928"/>
-            <a:ext cx="11277295" cy="411480"/>
+            <a:off x="457200" y="1170432"/>
+            <a:ext cx="11277295" cy="5230368"/>
           </a:xfrm>
           <a:prstGeom prst="rect">
             <a:avLst/>
@@ -8058,633 +12448,58 @@
           </a:bodyPr>
           <a:lstStyle/>
           <a:p>
-            <a:r>
-              <a:rPr sz="1400" b="0" i="0">
-                <a:solidFill>
-                  <a:srgbClr val="B8D8EE"/>
-                </a:solidFill>
-                <a:latin typeface="Calibri"/>
-              </a:rPr>
-              <a:t>Gratis · navegador o free tier</a:t>
-            </a:r>
-          </a:p>
-        </p:txBody>
-      </p:sp>
-      <p:sp>
-        <p:nvSpPr>
-          <p:cNvPr id="6" name="Rounded Rectangle 5"/>
-          <p:cNvSpPr/>
-          <p:nvPr/>
-        </p:nvSpPr>
-        <p:spPr>
-          <a:xfrm>
-            <a:off x="457200" y="1591056"/>
-            <a:ext cx="3624986" cy="2331720"/>
-          </a:xfrm>
-          <a:prstGeom prst="roundRect">
-            <a:avLst>
-              <a:gd name="adj" fmla="val 12000"/>
-            </a:avLst>
-          </a:prstGeom>
-          <a:solidFill>
-            <a:srgbClr val="F2F2F2"/>
-          </a:solidFill>
-          <a:ln>
-            <a:noFill/>
-          </a:ln>
-        </p:spPr>
-        <p:style>
-          <a:lnRef idx="1">
-            <a:schemeClr val="accent1"/>
-          </a:lnRef>
-          <a:fillRef idx="3">
-            <a:schemeClr val="accent1"/>
-          </a:fillRef>
-          <a:effectRef idx="2">
-            <a:schemeClr val="accent1"/>
-          </a:effectRef>
-          <a:fontRef idx="minor">
-            <a:schemeClr val="lt1"/>
-          </a:fontRef>
-        </p:style>
-        <p:txBody>
-          <a:bodyPr rtlCol="0" anchor="ctr"/>
-          <a:lstStyle/>
-          <a:p>
-            <a:pPr algn="ctr"/>
-          </a:p>
-        </p:txBody>
-      </p:sp>
-      <p:sp>
-        <p:nvSpPr>
-          <p:cNvPr id="7" name="Rectangle 6"/>
-          <p:cNvSpPr/>
-          <p:nvPr/>
-        </p:nvSpPr>
-        <p:spPr>
-          <a:xfrm>
-            <a:off x="457200" y="1591056"/>
-            <a:ext cx="3624986" cy="64008"/>
-          </a:xfrm>
-          <a:prstGeom prst="rect">
-            <a:avLst/>
-          </a:prstGeom>
-          <a:solidFill>
-            <a:srgbClr val="095292"/>
-          </a:solidFill>
-          <a:ln>
-            <a:noFill/>
-          </a:ln>
-        </p:spPr>
-        <p:style>
-          <a:lnRef idx="1">
-            <a:schemeClr val="accent1"/>
-          </a:lnRef>
-          <a:fillRef idx="3">
-            <a:schemeClr val="accent1"/>
-          </a:fillRef>
-          <a:effectRef idx="2">
-            <a:schemeClr val="accent1"/>
-          </a:effectRef>
-          <a:fontRef idx="minor">
-            <a:schemeClr val="lt1"/>
-          </a:fontRef>
-        </p:style>
-        <p:txBody>
-          <a:bodyPr rtlCol="0" anchor="ctr"/>
-          <a:lstStyle/>
-          <a:p>
-            <a:pPr algn="ctr"/>
-          </a:p>
-        </p:txBody>
-      </p:sp>
-      <p:sp>
-        <p:nvSpPr>
-          <p:cNvPr id="8" name="Rectangle 7"/>
-          <p:cNvSpPr/>
-          <p:nvPr/>
-        </p:nvSpPr>
-        <p:spPr>
-          <a:xfrm>
-            <a:off x="457200" y="1655064"/>
-            <a:ext cx="3624986" cy="27432"/>
-          </a:xfrm>
-          <a:prstGeom prst="rect">
-            <a:avLst/>
-          </a:prstGeom>
-          <a:solidFill>
-            <a:srgbClr val="FFD000"/>
-          </a:solidFill>
-          <a:ln>
-            <a:noFill/>
-          </a:ln>
-        </p:spPr>
-        <p:style>
-          <a:lnRef idx="1">
-            <a:schemeClr val="accent1"/>
-          </a:lnRef>
-          <a:fillRef idx="3">
-            <a:schemeClr val="accent1"/>
-          </a:fillRef>
-          <a:effectRef idx="2">
-            <a:schemeClr val="accent1"/>
-          </a:effectRef>
-          <a:fontRef idx="minor">
-            <a:schemeClr val="lt1"/>
-          </a:fontRef>
-        </p:style>
-        <p:txBody>
-          <a:bodyPr rtlCol="0" anchor="ctr"/>
-          <a:lstStyle/>
-          <a:p>
-            <a:pPr algn="ctr"/>
-          </a:p>
-        </p:txBody>
-      </p:sp>
-      <p:pic>
-        <p:nvPicPr>
-          <p:cNvPr id="9" name="Picture 8" descr="google_docs.png"/>
-          <p:cNvPicPr>
-            <a:picLocks noChangeAspect="1"/>
-          </p:cNvPicPr>
-          <p:nvPr/>
-        </p:nvPicPr>
-        <p:blipFill>
-          <a:blip r:embed="rId2"/>
-          <a:stretch>
-            <a:fillRect/>
-          </a:stretch>
-        </p:blipFill>
-        <p:spPr>
-          <a:xfrm>
-            <a:off x="1643329" y="1847087"/>
-            <a:ext cx="1252728" cy="1252728"/>
-          </a:xfrm>
-          <a:prstGeom prst="rect">
-            <a:avLst/>
-          </a:prstGeom>
-        </p:spPr>
-      </p:pic>
-      <p:sp>
-        <p:nvSpPr>
-          <p:cNvPr id="10" name="TextBox 9"/>
-          <p:cNvSpPr txBox="1"/>
-          <p:nvPr/>
-        </p:nvSpPr>
-        <p:spPr>
-          <a:xfrm>
-            <a:off x="530352" y="3191256"/>
-            <a:ext cx="3478682" cy="621792"/>
-          </a:xfrm>
-          <a:prstGeom prst="rect">
-            <a:avLst/>
-          </a:prstGeom>
-          <a:noFill/>
-        </p:spPr>
-        <p:txBody>
-          <a:bodyPr wrap="square" anchor="t"/>
-          <a:lstStyle/>
-          <a:p>
-            <a:pPr algn="ctr"/>
-            <a:r>
-              <a:rPr sz="1300" b="1" i="0">
-                <a:solidFill>
-                  <a:srgbClr val="095292"/>
-                </a:solidFill>
-                <a:latin typeface="Calibri"/>
-              </a:rPr>
-              <a:t>Google Docs</a:t>
-            </a:r>
-          </a:p>
-          <a:p>
-            <a:pPr algn="ctr">
-              <a:spcBef>
-                <a:spcPts val="200"/>
-              </a:spcBef>
+            <a:pPr>
+              <a:spcAft>
+                <a:spcPts val="800"/>
+              </a:spcAft>
             </a:pPr>
             <a:r>
-              <a:rPr sz="1000" b="0" i="0">
-                <a:solidFill>
-                  <a:srgbClr val="666666"/>
-                </a:solidFill>
-                <a:latin typeface="Calibri"/>
-              </a:rPr>
-              <a:t>Informe final</a:t>
-            </a:r>
-          </a:p>
-        </p:txBody>
-      </p:sp>
-      <p:sp>
-        <p:nvSpPr>
-          <p:cNvPr id="11" name="Rounded Rectangle 10"/>
-          <p:cNvSpPr/>
-          <p:nvPr/>
-        </p:nvSpPr>
-        <p:spPr>
-          <a:xfrm>
-            <a:off x="4283354" y="1591056"/>
-            <a:ext cx="3624986" cy="2331720"/>
-          </a:xfrm>
-          <a:prstGeom prst="roundRect">
-            <a:avLst>
-              <a:gd name="adj" fmla="val 12000"/>
-            </a:avLst>
-          </a:prstGeom>
-          <a:solidFill>
-            <a:srgbClr val="F2F2F2"/>
-          </a:solidFill>
-          <a:ln>
-            <a:noFill/>
-          </a:ln>
-        </p:spPr>
-        <p:style>
-          <a:lnRef idx="1">
-            <a:schemeClr val="accent1"/>
-          </a:lnRef>
-          <a:fillRef idx="3">
-            <a:schemeClr val="accent1"/>
-          </a:fillRef>
-          <a:effectRef idx="2">
-            <a:schemeClr val="accent1"/>
-          </a:effectRef>
-          <a:fontRef idx="minor">
-            <a:schemeClr val="lt1"/>
-          </a:fontRef>
-        </p:style>
-        <p:txBody>
-          <a:bodyPr rtlCol="0" anchor="ctr"/>
-          <a:lstStyle/>
-          <a:p>
-            <a:pPr algn="ctr"/>
-          </a:p>
-        </p:txBody>
-      </p:sp>
-      <p:sp>
-        <p:nvSpPr>
-          <p:cNvPr id="12" name="Rectangle 11"/>
-          <p:cNvSpPr/>
-          <p:nvPr/>
-        </p:nvSpPr>
-        <p:spPr>
-          <a:xfrm>
-            <a:off x="4283354" y="1591056"/>
-            <a:ext cx="3624986" cy="64008"/>
-          </a:xfrm>
-          <a:prstGeom prst="rect">
-            <a:avLst/>
-          </a:prstGeom>
-          <a:solidFill>
-            <a:srgbClr val="095292"/>
-          </a:solidFill>
-          <a:ln>
-            <a:noFill/>
-          </a:ln>
-        </p:spPr>
-        <p:style>
-          <a:lnRef idx="1">
-            <a:schemeClr val="accent1"/>
-          </a:lnRef>
-          <a:fillRef idx="3">
-            <a:schemeClr val="accent1"/>
-          </a:fillRef>
-          <a:effectRef idx="2">
-            <a:schemeClr val="accent1"/>
-          </a:effectRef>
-          <a:fontRef idx="minor">
-            <a:schemeClr val="lt1"/>
-          </a:fontRef>
-        </p:style>
-        <p:txBody>
-          <a:bodyPr rtlCol="0" anchor="ctr"/>
-          <a:lstStyle/>
-          <a:p>
-            <a:pPr algn="ctr"/>
-          </a:p>
-        </p:txBody>
-      </p:sp>
-      <p:sp>
-        <p:nvSpPr>
-          <p:cNvPr id="13" name="Rectangle 12"/>
-          <p:cNvSpPr/>
-          <p:nvPr/>
-        </p:nvSpPr>
-        <p:spPr>
-          <a:xfrm>
-            <a:off x="4283354" y="1655064"/>
-            <a:ext cx="3624986" cy="27432"/>
-          </a:xfrm>
-          <a:prstGeom prst="rect">
-            <a:avLst/>
-          </a:prstGeom>
-          <a:solidFill>
-            <a:srgbClr val="FFD000"/>
-          </a:solidFill>
-          <a:ln>
-            <a:noFill/>
-          </a:ln>
-        </p:spPr>
-        <p:style>
-          <a:lnRef idx="1">
-            <a:schemeClr val="accent1"/>
-          </a:lnRef>
-          <a:fillRef idx="3">
-            <a:schemeClr val="accent1"/>
-          </a:fillRef>
-          <a:effectRef idx="2">
-            <a:schemeClr val="accent1"/>
-          </a:effectRef>
-          <a:fontRef idx="minor">
-            <a:schemeClr val="lt1"/>
-          </a:fontRef>
-        </p:style>
-        <p:txBody>
-          <a:bodyPr rtlCol="0" anchor="ctr"/>
-          <a:lstStyle/>
-          <a:p>
-            <a:pPr algn="ctr"/>
-          </a:p>
-        </p:txBody>
-      </p:sp>
-      <p:pic>
-        <p:nvPicPr>
-          <p:cNvPr id="14" name="Picture 13" descr="drawio.png"/>
-          <p:cNvPicPr>
-            <a:picLocks noChangeAspect="1"/>
-          </p:cNvPicPr>
-          <p:nvPr/>
-        </p:nvPicPr>
-        <p:blipFill>
-          <a:blip r:embed="rId3"/>
-          <a:stretch>
-            <a:fillRect/>
-          </a:stretch>
-        </p:blipFill>
-        <p:spPr>
-          <a:xfrm>
-            <a:off x="5469483" y="1847087"/>
-            <a:ext cx="1252728" cy="1252728"/>
-          </a:xfrm>
-          <a:prstGeom prst="rect">
-            <a:avLst/>
-          </a:prstGeom>
-        </p:spPr>
-      </p:pic>
-      <p:sp>
-        <p:nvSpPr>
-          <p:cNvPr id="15" name="TextBox 14"/>
-          <p:cNvSpPr txBox="1"/>
-          <p:nvPr/>
-        </p:nvSpPr>
-        <p:spPr>
-          <a:xfrm>
-            <a:off x="4356506" y="3191256"/>
-            <a:ext cx="3478682" cy="621792"/>
-          </a:xfrm>
-          <a:prstGeom prst="rect">
-            <a:avLst/>
-          </a:prstGeom>
-          <a:noFill/>
-        </p:spPr>
-        <p:txBody>
-          <a:bodyPr wrap="square" anchor="t"/>
-          <a:lstStyle/>
-          <a:p>
-            <a:pPr algn="ctr"/>
-            <a:r>
-              <a:rPr sz="1300" b="1" i="0">
-                <a:solidFill>
-                  <a:srgbClr val="095292"/>
-                </a:solidFill>
-                <a:latin typeface="Calibri"/>
-              </a:rPr>
-              <a:t>draw.io</a:t>
-            </a:r>
-          </a:p>
-          <a:p>
-            <a:pPr algn="ctr">
-              <a:spcBef>
-                <a:spcPts val="200"/>
-              </a:spcBef>
+              <a:rPr sz="2000" b="0" i="0">
+                <a:solidFill>
+                  <a:srgbClr val="333333"/>
+                </a:solidFill>
+                <a:latin typeface="Calibri"/>
+              </a:rPr>
+              <a:t>–   Por que ese indice: la respuesta debe nombrar la consulta concreta que lo aprovecha, por ejemplo un indice sobre (id_veterinario</a:t>
+            </a:r>
+          </a:p>
+          <a:p>
+            <a:pPr>
+              <a:spcAft>
+                <a:spcPts val="800"/>
+              </a:spcAft>
             </a:pPr>
             <a:r>
-              <a:rPr sz="1000" b="0" i="0">
-                <a:solidFill>
-                  <a:srgbClr val="666666"/>
-                </a:solidFill>
-                <a:latin typeface="Calibri"/>
-              </a:rPr>
-              <a:t>ER final</a:t>
-            </a:r>
-          </a:p>
-        </p:txBody>
-      </p:sp>
-      <p:sp>
-        <p:nvSpPr>
-          <p:cNvPr id="16" name="Rounded Rectangle 15"/>
-          <p:cNvSpPr/>
-          <p:nvPr/>
-        </p:nvSpPr>
-        <p:spPr>
-          <a:xfrm>
-            <a:off x="8109508" y="1591056"/>
-            <a:ext cx="3624986" cy="2331720"/>
-          </a:xfrm>
-          <a:prstGeom prst="roundRect">
-            <a:avLst>
-              <a:gd name="adj" fmla="val 12000"/>
-            </a:avLst>
-          </a:prstGeom>
-          <a:solidFill>
-            <a:srgbClr val="F2F2F2"/>
-          </a:solidFill>
-          <a:ln>
-            <a:noFill/>
-          </a:ln>
-        </p:spPr>
-        <p:style>
-          <a:lnRef idx="1">
-            <a:schemeClr val="accent1"/>
-          </a:lnRef>
-          <a:fillRef idx="3">
-            <a:schemeClr val="accent1"/>
-          </a:fillRef>
-          <a:effectRef idx="2">
-            <a:schemeClr val="accent1"/>
-          </a:effectRef>
-          <a:fontRef idx="minor">
-            <a:schemeClr val="lt1"/>
-          </a:fontRef>
-        </p:style>
-        <p:txBody>
-          <a:bodyPr rtlCol="0" anchor="ctr"/>
-          <a:lstStyle/>
-          <a:p>
-            <a:pPr algn="ctr"/>
-          </a:p>
-        </p:txBody>
-      </p:sp>
-      <p:sp>
-        <p:nvSpPr>
-          <p:cNvPr id="17" name="Rectangle 16"/>
-          <p:cNvSpPr/>
-          <p:nvPr/>
-        </p:nvSpPr>
-        <p:spPr>
-          <a:xfrm>
-            <a:off x="8109508" y="1591056"/>
-            <a:ext cx="3624986" cy="64008"/>
-          </a:xfrm>
-          <a:prstGeom prst="rect">
-            <a:avLst/>
-          </a:prstGeom>
-          <a:solidFill>
-            <a:srgbClr val="095292"/>
-          </a:solidFill>
-          <a:ln>
-            <a:noFill/>
-          </a:ln>
-        </p:spPr>
-        <p:style>
-          <a:lnRef idx="1">
-            <a:schemeClr val="accent1"/>
-          </a:lnRef>
-          <a:fillRef idx="3">
-            <a:schemeClr val="accent1"/>
-          </a:fillRef>
-          <a:effectRef idx="2">
-            <a:schemeClr val="accent1"/>
-          </a:effectRef>
-          <a:fontRef idx="minor">
-            <a:schemeClr val="lt1"/>
-          </a:fontRef>
-        </p:style>
-        <p:txBody>
-          <a:bodyPr rtlCol="0" anchor="ctr"/>
-          <a:lstStyle/>
-          <a:p>
-            <a:pPr algn="ctr"/>
-          </a:p>
-        </p:txBody>
-      </p:sp>
-      <p:sp>
-        <p:nvSpPr>
-          <p:cNvPr id="18" name="Rectangle 17"/>
-          <p:cNvSpPr/>
-          <p:nvPr/>
-        </p:nvSpPr>
-        <p:spPr>
-          <a:xfrm>
-            <a:off x="8109508" y="1655064"/>
-            <a:ext cx="3624986" cy="27432"/>
-          </a:xfrm>
-          <a:prstGeom prst="rect">
-            <a:avLst/>
-          </a:prstGeom>
-          <a:solidFill>
-            <a:srgbClr val="FFD000"/>
-          </a:solidFill>
-          <a:ln>
-            <a:noFill/>
-          </a:ln>
-        </p:spPr>
-        <p:style>
-          <a:lnRef idx="1">
-            <a:schemeClr val="accent1"/>
-          </a:lnRef>
-          <a:fillRef idx="3">
-            <a:schemeClr val="accent1"/>
-          </a:fillRef>
-          <a:effectRef idx="2">
-            <a:schemeClr val="accent1"/>
-          </a:effectRef>
-          <a:fontRef idx="minor">
-            <a:schemeClr val="lt1"/>
-          </a:fontRef>
-        </p:style>
-        <p:txBody>
-          <a:bodyPr rtlCol="0" anchor="ctr"/>
-          <a:lstStyle/>
-          <a:p>
-            <a:pPr algn="ctr"/>
-          </a:p>
-        </p:txBody>
-      </p:sp>
-      <p:pic>
-        <p:nvPicPr>
-          <p:cNvPr id="19" name="Picture 18" descr="oracle_livesql.png"/>
-          <p:cNvPicPr>
-            <a:picLocks noChangeAspect="1"/>
-          </p:cNvPicPr>
-          <p:nvPr/>
-        </p:nvPicPr>
-        <p:blipFill>
-          <a:blip r:embed="rId4"/>
-          <a:stretch>
-            <a:fillRect/>
-          </a:stretch>
-        </p:blipFill>
-        <p:spPr>
-          <a:xfrm>
-            <a:off x="9295638" y="1847087"/>
-            <a:ext cx="1252728" cy="1252728"/>
-          </a:xfrm>
-          <a:prstGeom prst="rect">
-            <a:avLst/>
-          </a:prstGeom>
-        </p:spPr>
-      </p:pic>
-      <p:sp>
-        <p:nvSpPr>
-          <p:cNvPr id="20" name="TextBox 19"/>
-          <p:cNvSpPr txBox="1"/>
-          <p:nvPr/>
-        </p:nvSpPr>
-        <p:spPr>
-          <a:xfrm>
-            <a:off x="8182660" y="3191256"/>
-            <a:ext cx="3478682" cy="621792"/>
-          </a:xfrm>
-          <a:prstGeom prst="rect">
-            <a:avLst/>
-          </a:prstGeom>
-          <a:noFill/>
-        </p:spPr>
-        <p:txBody>
-          <a:bodyPr wrap="square" anchor="t"/>
-          <a:lstStyle/>
-          <a:p>
-            <a:pPr algn="ctr"/>
-            <a:r>
-              <a:rPr sz="1300" b="1" i="0">
-                <a:solidFill>
-                  <a:srgbClr val="095292"/>
-                </a:solidFill>
-                <a:latin typeface="Calibri"/>
-              </a:rPr>
-              <a:t>Oracle Live SQL</a:t>
-            </a:r>
-          </a:p>
-          <a:p>
-            <a:pPr algn="ctr">
-              <a:spcBef>
-                <a:spcPts val="200"/>
-              </a:spcBef>
+              <a:rPr sz="2000" b="0" i="0">
+                <a:solidFill>
+                  <a:srgbClr val="333333"/>
+                </a:solidFill>
+                <a:latin typeface="Calibri"/>
+              </a:rPr>
+              <a:t>–   Fecha_hora) porque la busqueda de agenda filtra por veterinario y ordena por hora, y debe venir con la medicion de antes y despues.</a:t>
+            </a:r>
+          </a:p>
+          <a:p>
+            <a:pPr>
+              <a:spcAft>
+                <a:spcPts val="800"/>
+              </a:spcAft>
             </a:pPr>
             <a:r>
-              <a:rPr sz="1000" b="0" i="0">
-                <a:solidFill>
-                  <a:srgbClr val="666666"/>
-                </a:solidFill>
-                <a:latin typeface="Calibri"/>
-              </a:rPr>
-              <a:t>Demo SQL</a:t>
-            </a:r>
-          </a:p>
-        </p:txBody>
-      </p:sp>
-      <p:sp>
-        <p:nvSpPr>
-          <p:cNvPr id="21" name="TextBox 20"/>
+              <a:rPr sz="2000" b="0" i="0">
+                <a:solidFill>
+                  <a:srgbClr val="333333"/>
+                </a:solidFill>
+                <a:latin typeface="Calibri"/>
+              </a:rPr>
+              <a:t>–   Por que ese tipo de dato: por que la fecha de la cita es DATE o TIMESTAMP y no VARCHAR, y por que el telefono es VARCHAR y no numerico, porque con telefonos no se hace aritmetica y porque un tipo numerico pierde los ceros iniciales.</a:t>
+            </a:r>
+          </a:p>
+        </p:txBody>
+      </p:sp>
+      <p:sp>
+        <p:nvSpPr>
+          <p:cNvPr id="6" name="TextBox 5"/>
           <p:cNvSpPr txBox="1"/>
           <p:nvPr/>
         </p:nvSpPr>
@@ -8858,7 +12673,7 @@
                 </a:solidFill>
                 <a:latin typeface="Calibri"/>
               </a:rPr>
-              <a:t>Sustentacion del PI — contexto / por que importa</a:t>
+              <a:t>La cuarta pregunta, la que mas se falla (1/2)</a:t>
             </a:r>
           </a:p>
         </p:txBody>
@@ -8897,25 +12712,7 @@
                 </a:solidFill>
                 <a:latin typeface="Calibri"/>
               </a:rPr>
-              <a:t>–   </a:t>
-            </a:r>
-            <a:r>
-              <a:rPr sz="2000" b="1" i="0">
-                <a:solidFill>
-                  <a:srgbClr val="333333"/>
-                </a:solidFill>
-                <a:latin typeface="Calibri"/>
-              </a:rPr>
-              <a:t>Por qué importa al PI:</a:t>
-            </a:r>
-            <a:r>
-              <a:rPr sz="2000" b="0" i="0">
-                <a:solidFill>
-                  <a:srgbClr val="333333"/>
-                </a:solidFill>
-                <a:latin typeface="Calibri"/>
-              </a:rPr>
-              <a:t> cierre segun rúbrica 20% Corte 3.</a:t>
+              <a:t>–   La cuarta pregunta merece parrafo propio porque es la que mas se falla: por que esa regla esta en un disparador y no en la aplicacion.</a:t>
             </a:r>
           </a:p>
           <a:p>
@@ -8931,7 +12728,55 @@
                 </a:solidFill>
                 <a:latin typeface="Calibri"/>
               </a:rPr>
-              <a:t>–   No confundir con Parcial 3 (Clase 14).</a:t>
+              <a:t>–   Un disparador, o trigger, es un bloque de codigo que el motor ejecuta automaticamente cuando ocurre un evento sobre una tabla, sin que nadie lo invoque.</a:t>
+            </a:r>
+          </a:p>
+          <a:p>
+            <a:pPr>
+              <a:spcAft>
+                <a:spcPts val="800"/>
+              </a:spcAft>
+            </a:pPr>
+            <a:r>
+              <a:rPr sz="2000" b="0" i="0">
+                <a:solidFill>
+                  <a:srgbClr val="333333"/>
+                </a:solidFill>
+                <a:latin typeface="Calibri"/>
+              </a:rPr>
+              <a:t>–   El argumento a favor, y el unico que vale en una sustentacion, es la cobertura: el disparador se ejecuta no importa quien escriba.</a:t>
+            </a:r>
+          </a:p>
+          <a:p>
+            <a:pPr>
+              <a:spcAft>
+                <a:spcPts val="800"/>
+              </a:spcAft>
+            </a:pPr>
+            <a:r>
+              <a:rPr sz="2000" b="0" i="0">
+                <a:solidFill>
+                  <a:srgbClr val="333333"/>
+                </a:solidFill>
+                <a:latin typeface="Calibri"/>
+              </a:rPr>
+              <a:t>–   Si la regla «el stock de un insumo nunca queda negativo» vive en el disparador, se cumple cuando escribe la aplicacion, cuando escribe un script de carga masiva y cuando alguien se conecta con un cliente SQL a corregir un dato a mano.</a:t>
+            </a:r>
+          </a:p>
+          <a:p>
+            <a:pPr>
+              <a:spcAft>
+                <a:spcPts val="800"/>
+              </a:spcAft>
+            </a:pPr>
+            <a:r>
+              <a:rPr sz="2000" b="0" i="0">
+                <a:solidFill>
+                  <a:srgbClr val="333333"/>
+                </a:solidFill>
+                <a:latin typeface="Calibri"/>
+              </a:rPr>
+              <a:t>–   Si vive en la aplicacion, los dos ultimos caminos la evaden sin esfuerzo.</a:t>
             </a:r>
           </a:p>
         </p:txBody>
@@ -9112,7 +12957,7 @@
                 </a:solidFill>
                 <a:latin typeface="Calibri"/>
               </a:rPr>
-              <a:t>Sustentacion del PI — objetivo y criterios</a:t>
+              <a:t>La cuarta pregunta, la que mas se falla (2/2)</a:t>
             </a:r>
           </a:p>
         </p:txBody>
@@ -9151,25 +12996,7 @@
                 </a:solidFill>
                 <a:latin typeface="Calibri"/>
               </a:rPr>
-              <a:t>–   </a:t>
-            </a:r>
-            <a:r>
-              <a:rPr sz="2000" b="1" i="0">
-                <a:solidFill>
-                  <a:srgbClr val="333333"/>
-                </a:solidFill>
-                <a:latin typeface="Calibri"/>
-              </a:rPr>
-              <a:t>Objetivo:</a:t>
-            </a:r>
-            <a:r>
-              <a:rPr sz="2000" b="0" i="0">
-                <a:solidFill>
-                  <a:srgbClr val="333333"/>
-                </a:solidFill>
-                <a:latin typeface="Calibri"/>
-              </a:rPr>
-              <a:t> Paquete final entregado + sustentacion en vivo de 5-8 min con Q&amp;A.</a:t>
+              <a:t>–   Lo mismo aplica al disparador de auditoria de precios: si se quiere saber quien cambio el precio de una vacuna, ese registro tiene que escribirse dentro de la base, porque quien edita a mano no lo va a escribir por cortesia.</a:t>
             </a:r>
           </a:p>
           <a:p>
@@ -9185,25 +13012,7 @@
                 </a:solidFill>
                 <a:latin typeface="Calibri"/>
               </a:rPr>
-              <a:t>–   </a:t>
-            </a:r>
-            <a:r>
-              <a:rPr sz="2000" b="1" i="0">
-                <a:solidFill>
-                  <a:srgbClr val="333333"/>
-                </a:solidFill>
-                <a:latin typeface="Calibri"/>
-              </a:rPr>
-              <a:t>Exito:</a:t>
-            </a:r>
-            <a:r>
-              <a:rPr sz="2000" b="0" i="0">
-                <a:solidFill>
-                  <a:srgbClr val="333333"/>
-                </a:solidFill>
-                <a:latin typeface="Calibri"/>
-              </a:rPr>
-              <a:t> ZIP/PDF en la plataforma del curso ANTES del turno.</a:t>
+              <a:t>–   Y hay que dar tambien el contra-argumento, porque un evaluador atento lo va a pedir: los disparadores son logica invisible, no aparecen en el codigo de la aplicacion, sorprenden a quien depura</a:t>
             </a:r>
           </a:p>
           <a:p>
@@ -9219,25 +13028,7 @@
                 </a:solidFill>
                 <a:latin typeface="Calibri"/>
               </a:rPr>
-              <a:t>–   </a:t>
-            </a:r>
-            <a:r>
-              <a:rPr sz="2000" b="1" i="0">
-                <a:solidFill>
-                  <a:srgbClr val="333333"/>
-                </a:solidFill>
-                <a:latin typeface="Calibri"/>
-              </a:rPr>
-              <a:t>Exito:</a:t>
-            </a:r>
-            <a:r>
-              <a:rPr sz="2000" b="0" i="0">
-                <a:solidFill>
-                  <a:srgbClr val="333333"/>
-                </a:solidFill>
-                <a:latin typeface="Calibri"/>
-              </a:rPr>
-              <a:t> Sustentacion en vivo de 5-8 min.</a:t>
+              <a:t>–   Y se disparan en cascada si uno modifica una tabla que a su vez tiene otro disparador.</a:t>
             </a:r>
           </a:p>
           <a:p>
@@ -9253,93 +13044,7 @@
                 </a:solidFill>
                 <a:latin typeface="Calibri"/>
               </a:rPr>
-              <a:t>–   </a:t>
-            </a:r>
-            <a:r>
-              <a:rPr sz="2000" b="1" i="0">
-                <a:solidFill>
-                  <a:srgbClr val="333333"/>
-                </a:solidFill>
-                <a:latin typeface="Calibri"/>
-              </a:rPr>
-              <a:t>Exito:</a:t>
-            </a:r>
-            <a:r>
-              <a:rPr sz="2000" b="0" i="0">
-                <a:solidFill>
-                  <a:srgbClr val="333333"/>
-                </a:solidFill>
-                <a:latin typeface="Calibri"/>
-              </a:rPr>
-              <a:t> Q&amp;A respondido en vivo (preguntas al azar).</a:t>
-            </a:r>
-          </a:p>
-          <a:p>
-            <a:pPr>
-              <a:spcAft>
-                <a:spcPts val="800"/>
-              </a:spcAft>
-            </a:pPr>
-            <a:r>
-              <a:rPr sz="2000" b="0" i="0">
-                <a:solidFill>
-                  <a:srgbClr val="333333"/>
-                </a:solidFill>
-                <a:latin typeface="Calibri"/>
-              </a:rPr>
-              <a:t>–   </a:t>
-            </a:r>
-            <a:r>
-              <a:rPr sz="2000" b="1" i="0">
-                <a:solidFill>
-                  <a:srgbClr val="333333"/>
-                </a:solidFill>
-                <a:latin typeface="Calibri"/>
-              </a:rPr>
-              <a:t>Exito:</a:t>
-            </a:r>
-            <a:r>
-              <a:rPr sz="2000" b="0" i="0">
-                <a:solidFill>
-                  <a:srgbClr val="333333"/>
-                </a:solidFill>
-                <a:latin typeface="Calibri"/>
-              </a:rPr>
-              <a:t> Autoevaluacion.</a:t>
-            </a:r>
-          </a:p>
-          <a:p>
-            <a:pPr>
-              <a:spcAft>
-                <a:spcPts val="800"/>
-              </a:spcAft>
-            </a:pPr>
-            <a:r>
-              <a:rPr sz="2000" b="0" i="0">
-                <a:solidFill>
-                  <a:srgbClr val="333333"/>
-                </a:solidFill>
-                <a:latin typeface="Calibri"/>
-              </a:rPr>
-              <a:t>–   </a:t>
-            </a:r>
-            <a:r>
-              <a:rPr sz="2000" b="1" i="0">
-                <a:solidFill>
-                  <a:srgbClr val="333333"/>
-                </a:solidFill>
-                <a:latin typeface="Calibri"/>
-              </a:rPr>
-              <a:t>Exito:</a:t>
-            </a:r>
-            <a:r>
-              <a:rPr sz="2000" b="0" i="0">
-                <a:solidFill>
-                  <a:srgbClr val="333333"/>
-                </a:solidFill>
-                <a:latin typeface="Calibri"/>
-              </a:rPr>
-              <a:t> Cierre.</a:t>
+              <a:t>–   Por eso la convencion sana, que el estudiante puede citar como criterio propio, es reservarlos para invariantes de integridad y auditoria, y dejar el flujo de negocio en procedimientos que se invocan explicitamente.</a:t>
             </a:r>
           </a:p>
         </p:txBody>
@@ -9520,7 +13225,7 @@
                 </a:solidFill>
                 <a:latin typeface="Calibri"/>
               </a:rPr>
-              <a:t>Sustentacion del PI — escenario / datos de partida</a:t>
+              <a:t>Reproducible: un tercero llega a la misma base sin hablar con el autor (1/2)</a:t>
             </a:r>
           </a:p>
         </p:txBody>
@@ -9553,13 +13258,13 @@
               </a:spcAft>
             </a:pPr>
             <a:r>
-              <a:rPr sz="2000" b="0" i="0">
-                <a:solidFill>
-                  <a:srgbClr val="333333"/>
-                </a:solidFill>
-                <a:latin typeface="Calibri"/>
-              </a:rPr>
-              <a:t>–   Checklist empaquetado del enunciado PI.</a:t>
+              <a:rPr sz="1800" b="0" i="0">
+                <a:solidFill>
+                  <a:srgbClr val="333333"/>
+                </a:solidFill>
+                <a:latin typeface="Calibri"/>
+              </a:rPr>
+              <a:t>–   Un entregable de base de datos es reproducible si un tercero, con solo el archivo comprimido y sin hablar con el autor, obtiene la misma base funcionando.</a:t>
             </a:r>
           </a:p>
           <a:p>
@@ -9569,13 +13274,93 @@
               </a:spcAft>
             </a:pPr>
             <a:r>
-              <a:rPr sz="2000" b="0" i="0">
-                <a:solidFill>
-                  <a:srgbClr val="333333"/>
-                </a:solidFill>
-                <a:latin typeface="Calibri"/>
-              </a:rPr>
-              <a:t>–   Turnos consecutivos en el bloque; el orden se sortea al abrir la sesion.</a:t>
+              <a:rPr sz="1800" b="0" i="0">
+                <a:solidFill>
+                  <a:srgbClr val="333333"/>
+                </a:solidFill>
+                <a:latin typeface="Calibri"/>
+              </a:rPr>
+              <a:t>–   La estructura que la garantiza es una carpeta con archivos numerados en el orden exacto de ejecucion: 00_LEEME.txt, 01_ddl.sql, 02_datos_prueba.sql, 03_roles.sql, 04_procedimientos.sql, 05_funciones.sql, 06_triggers.sql, 07_optimizacion.sql y 08_pruebas.sql.</a:t>
+            </a:r>
+          </a:p>
+          <a:p>
+            <a:pPr>
+              <a:spcAft>
+                <a:spcPts val="800"/>
+              </a:spcAft>
+            </a:pPr>
+            <a:r>
+              <a:rPr sz="1800" b="0" i="0">
+                <a:solidFill>
+                  <a:srgbClr val="333333"/>
+                </a:solidFill>
+                <a:latin typeface="Calibri"/>
+              </a:rPr>
+              <a:t>–   El orden no es estetico, es una dependencia real: una tabla con clave foranea no se puede crear antes que la tabla a la que apunta, y un disparador no compila si su tabla todavia no existe.</a:t>
+            </a:r>
+          </a:p>
+          <a:p>
+            <a:pPr>
+              <a:spcAft>
+                <a:spcPts val="800"/>
+              </a:spcAft>
+            </a:pPr>
+            <a:r>
+              <a:rPr sz="1800" b="0" i="0">
+                <a:solidFill>
+                  <a:srgbClr val="333333"/>
+                </a:solidFill>
+                <a:latin typeface="Calibri"/>
+              </a:rPr>
+              <a:t>–   Los datos de prueba tampoco son triviales, porque con dos filas por tabla no se demuestra nada: el minimo razonable para VetCare es tres duenos</a:t>
+            </a:r>
+          </a:p>
+          <a:p>
+            <a:pPr>
+              <a:spcAft>
+                <a:spcPts val="800"/>
+              </a:spcAft>
+            </a:pPr>
+            <a:r>
+              <a:rPr sz="1800" b="0" i="0">
+                <a:solidFill>
+                  <a:srgbClr val="333333"/>
+                </a:solidFill>
+                <a:latin typeface="Calibri"/>
+              </a:rPr>
+              <a:t>–   Cinco mascotas, dos veterinarios, diez citas repartidas en varios dias, cinco insumos con stock y tres facturas con su detalle</a:t>
+            </a:r>
+          </a:p>
+          <a:p>
+            <a:pPr>
+              <a:spcAft>
+                <a:spcPts val="800"/>
+              </a:spcAft>
+            </a:pPr>
+            <a:r>
+              <a:rPr sz="1800" b="0" i="0">
+                <a:solidFill>
+                  <a:srgbClr val="333333"/>
+                </a:solidFill>
+                <a:latin typeface="Calibri"/>
+              </a:rPr>
+              <a:t>–   Incluyendo deliberadamente los casos borde que los procedimientos deben rechazar, es decir una mascota marcada como inactiva y un insumo con stock en uno, porque sin esas dos filas el estudiante no puede demostrar su manejo de errores.</a:t>
+            </a:r>
+          </a:p>
+          <a:p>
+            <a:pPr>
+              <a:spcAft>
+                <a:spcPts val="800"/>
+              </a:spcAft>
+            </a:pPr>
+            <a:r>
+              <a:rPr sz="1800" b="0" i="0">
+                <a:solidFill>
+                  <a:srgbClr val="333333"/>
+                </a:solidFill>
+                <a:latin typeface="Calibri"/>
+              </a:rPr>
+              <a:t>–   Uno, no declarar motor y version: el SQL no es un solo idioma, porque una columna autoincremental se escribe SERIAL en PostgreSQL</a:t>
             </a:r>
           </a:p>
         </p:txBody>

--- a/Bases de Datos II/Clases/Clase 15 - Presentacion del proyecto y cierre/Presentacion.pptx
+++ b/Bases de Datos II/Clases/Clase 15 - Presentacion del proyecto y cierre/Presentacion.pptx
@@ -32,6 +32,9 @@
     <p:sldId id="280" r:id="rId31"/>
     <p:sldId id="281" r:id="rId32"/>
     <p:sldId id="282" r:id="rId33"/>
+    <p:sldId id="283" r:id="rId34"/>
+    <p:sldId id="284" r:id="rId35"/>
+    <p:sldId id="285" r:id="rId36"/>
   </p:sldIdLst>
   <p:sldSz cx="12191695" cy="6858000" type="screen4x3"/>
   <p:notesSz cx="6858000" cy="9144000"/>
@@ -3632,7 +3635,7 @@
                 </a:solidFill>
                 <a:latin typeface="Calibri"/>
               </a:rPr>
-              <a:t>Reproducible: un tercero llega a la misma base sin hablar con el autor (2/2)</a:t>
+              <a:t>Reproducible: un tercero llega a la misma base sin hablar con el autor (1/3)</a:t>
             </a:r>
           </a:p>
         </p:txBody>
@@ -3671,7 +3674,7 @@
                 </a:solidFill>
                 <a:latin typeface="Calibri"/>
               </a:rPr>
-              <a:t>–   AUTO_INCREMENT en MySQL e IDENTITY o una secuencia en Oracle y SQL Server, el texto variable es VARCHAR en unos y VARCHAR2 en Oracle</a:t>
+              <a:t>–   Un entregable de base de datos es reproducible si un tercero, con solo el archivo comprimido y sin hablar con el autor, obtiene la misma base funcionando.</a:t>
             </a:r>
           </a:p>
           <a:p>
@@ -3687,7 +3690,7 @@
                 </a:solidFill>
                 <a:latin typeface="Calibri"/>
               </a:rPr>
-              <a:t>–   Y la fecha actual es NOW() en unos y SYSDATE en Oracle; un script sin la linea «probado en PostgreSQL 15 en DB Fiddle» o «probado en Oracle 19c en Oracle Live SQL» obliga al evaluador a adivinar, y si adivina mal falla en la primera sentencia.</a:t>
+              <a:t>–   La estructura que la garantiza es una carpeta con archivos numerados en el orden exacto de ejecucion: 00_LEEME.txt, 01_ddl.sql, 02_datos_prueba.sql, 03_roles.sql, 04_procedimientos.sql, 05_funciones.sql, 06_triggers.sql, 07_optimizacion.sql y 08_pruebas.sql.</a:t>
             </a:r>
           </a:p>
           <a:p>
@@ -3703,7 +3706,7 @@
                 </a:solidFill>
                 <a:latin typeface="Calibri"/>
               </a:rPr>
-              <a:t>–   Dos, scripts que asumen un estado previo: quien ejecuta debe poder empezar desde una base vacia.</a:t>
+              <a:t>–   El orden no es estetico, es una dependencia real: una tabla con clave foranea no se puede crear antes que la tabla a la que apunta, y un disparador no compila si su tabla todavia no existe.</a:t>
             </a:r>
           </a:p>
           <a:p>
@@ -3719,7 +3722,7 @@
                 </a:solidFill>
                 <a:latin typeface="Calibri"/>
               </a:rPr>
-              <a:t>–   Tres, falta de idempotencia: si el script no se puede correr dos veces porque falla al encontrar que la tabla ya existe, se pierde tiempo en cada intento, y anteponer DROP TABLE IF EXISTS en orden inverso al de creacion lo resuelve.</a:t>
+              <a:t>–   Los datos de prueba tampoco son triviales, porque con dos filas por tabla no se demuestra nada: el minimo razonable para VetCare es tres duenos</a:t>
             </a:r>
           </a:p>
           <a:p>
@@ -3735,23 +3738,7 @@
                 </a:solidFill>
                 <a:latin typeface="Calibri"/>
               </a:rPr>
-              <a:t>–   Cuatro, el LEEME ausente o inutil; uno que sirve tiene cuatro cosas y cabe en media pagina: motor y version exactos, el orden de ejecucion de los archivos</a:t>
-            </a:r>
-          </a:p>
-          <a:p>
-            <a:pPr>
-              <a:spcAft>
-                <a:spcPts val="800"/>
-              </a:spcAft>
-            </a:pPr>
-            <a:r>
-              <a:rPr sz="2000" b="0" i="0">
-                <a:solidFill>
-                  <a:srgbClr val="333333"/>
-                </a:solidFill>
-                <a:latin typeface="Calibri"/>
-              </a:rPr>
-              <a:t>–   Como verificar que quedo bien (una consulta cuyo resultado se conoce, por ejemplo SELECT COUNT(*) FROM cita devolviendo 10) y las limitaciones conocidas.</a:t>
+              <a:t>–   Cinco mascotas, dos veterinarios, diez citas repartidas en varios dias, cinco insumos con stock y tres facturas con su detalle</a:t>
             </a:r>
           </a:p>
         </p:txBody>
@@ -3932,7 +3919,7 @@
                 </a:solidFill>
                 <a:latin typeface="Calibri"/>
               </a:rPr>
-              <a:t>El reparto de los 5 a 8 minutos (1/2)</a:t>
+              <a:t>Reproducible: un tercero llega a la misma base sin hablar con el autor (2/3)</a:t>
             </a:r>
           </a:p>
         </p:txBody>
@@ -3965,13 +3952,13 @@
               </a:spcAft>
             </a:pPr>
             <a:r>
-              <a:rPr sz="1900" b="0" i="0">
+              <a:rPr sz="2000" b="0" i="0">
                 <a:solidFill>
                   <a:srgbClr val="333333"/>
                 </a:solidFill>
                 <a:latin typeface="Calibri"/>
               </a:rPr>
-              <a:t>–   La sustentacion dura de 5 a 8 minutos y ese limite obliga a decidir que se deja fuera.</a:t>
+              <a:t>–   Incluyendo deliberadamente los casos borde que los procedimientos deben rechazar, es decir una mascota marcada como inactiva y un insumo con stock en uno, porque sin esas dos filas el estudiante no puede demostrar su manejo de errores.</a:t>
             </a:r>
           </a:p>
           <a:p>
@@ -3981,13 +3968,13 @@
               </a:spcAft>
             </a:pPr>
             <a:r>
-              <a:rPr sz="1900" b="0" i="0">
+              <a:rPr sz="2000" b="0" i="0">
                 <a:solidFill>
                   <a:srgbClr val="333333"/>
                 </a:solidFill>
                 <a:latin typeface="Calibri"/>
               </a:rPr>
-              <a:t>–   El reparto que funciona, y que es convencion y no regla dura, es: 45 segundos para el problema de la clinica Huellitas en lenguaje de negocio, sin una sola tabla en pantalla</a:t>
+              <a:t>–   Uno, no declarar motor y version: el SQL no es un solo idioma, porque una columna autoincremental se escribe SERIAL en PostgreSQL</a:t>
             </a:r>
           </a:p>
           <a:p>
@@ -3997,13 +3984,13 @@
               </a:spcAft>
             </a:pPr>
             <a:r>
-              <a:rPr sz="1900" b="0" i="0">
+              <a:rPr sz="2000" b="0" i="0">
                 <a:solidFill>
                   <a:srgbClr val="333333"/>
                 </a:solidFill>
                 <a:latin typeface="Calibri"/>
               </a:rPr>
-              <a:t>–   90 segundos para el modelo, mostrando el ER y justificando dos decisiones y no las quince</a:t>
+              <a:t>–   AUTO_INCREMENT en MySQL e IDENTITY o una secuencia en Oracle y SQL Server, el texto variable es VARCHAR en unos y VARCHAR2 en Oracle</a:t>
             </a:r>
           </a:p>
           <a:p>
@@ -4013,13 +4000,13 @@
               </a:spcAft>
             </a:pPr>
             <a:r>
-              <a:rPr sz="1900" b="0" i="0">
+              <a:rPr sz="2000" b="0" i="0">
                 <a:solidFill>
                   <a:srgbClr val="333333"/>
                 </a:solidFill>
                 <a:latin typeface="Calibri"/>
               </a:rPr>
-              <a:t>–   60 segundos para seguridad, con la matriz de roles y una frase sobre por que recepcion no ve el historial clinico; 90 segundos para la automatizacion, ejecutando un procedimiento con su caso valido y su caso invalido</a:t>
+              <a:t>–   Y la fecha actual es NOW() en unos y SYSDATE en Oracle; un script sin la linea «probado en PostgreSQL 15 en DB Fiddle» o «probado en Oracle 19c en Oracle Live SQL» obliga al evaluador a adivinar, y si adivina mal falla en la primera sentencia.</a:t>
             </a:r>
           </a:p>
           <a:p>
@@ -4029,61 +4016,13 @@
               </a:spcAft>
             </a:pPr>
             <a:r>
-              <a:rPr sz="1900" b="0" i="0">
+              <a:rPr sz="2000" b="0" i="0">
                 <a:solidFill>
                   <a:srgbClr val="333333"/>
                 </a:solidFill>
                 <a:latin typeface="Calibri"/>
               </a:rPr>
-              <a:t>–   60 segundos para la optimizacion, con el plan de ejecucion antes y despues; 45 segundos para la integracion y el punto debil declarado; y 30 de cierre.</a:t>
-            </a:r>
-          </a:p>
-          <a:p>
-            <a:pPr>
-              <a:spcAft>
-                <a:spcPts val="800"/>
-              </a:spcAft>
-            </a:pPr>
-            <a:r>
-              <a:rPr sz="1900" b="0" i="0">
-                <a:solidFill>
-                  <a:srgbClr val="333333"/>
-                </a:solidFill>
-                <a:latin typeface="Calibri"/>
-              </a:rPr>
-              <a:t>–   Y conviene ser explicito sobre el formato, porque de eso depende como se prepara el estudiante: la Clase 15 se dicta el 16 de noviembre en la ultima sesion del semestre</a:t>
-            </a:r>
-          </a:p>
-          <a:p>
-            <a:pPr>
-              <a:spcAft>
-                <a:spcPts val="800"/>
-              </a:spcAft>
-            </a:pPr>
-            <a:r>
-              <a:rPr sz="1900" b="0" i="0">
-                <a:solidFill>
-                  <a:srgbClr val="333333"/>
-                </a:solidFill>
-                <a:latin typeface="Calibri"/>
-              </a:rPr>
-              <a:t>–   Dedicada por completo a sustentaciones EN VIVO, con turnos consecutivos y preguntas del docente al cierre de cada uno.</a:t>
-            </a:r>
-          </a:p>
-          <a:p>
-            <a:pPr>
-              <a:spcAft>
-                <a:spcPts val="800"/>
-              </a:spcAft>
-            </a:pPr>
-            <a:r>
-              <a:rPr sz="1900" b="0" i="0">
-                <a:solidFill>
-                  <a:srgbClr val="333333"/>
-                </a:solidFill>
-                <a:latin typeface="Calibri"/>
-              </a:rPr>
-              <a:t>–   No es clase autonoma y la defensa no se reemplaza por un video grabado, porque el Q&amp;A dirigido al azar es lo unico que permite verificar que el modelo y los procedimientos son de quien los presenta.</a:t>
+              <a:t>–   Dos, scripts que asumen un estado previo: quien ejecuta debe poder empezar desde una base vacia.</a:t>
             </a:r>
           </a:p>
         </p:txBody>
@@ -4264,7 +4203,7 @@
                 </a:solidFill>
                 <a:latin typeface="Calibri"/>
               </a:rPr>
-              <a:t>El reparto de los 5 a 8 minutos (2/2)</a:t>
+              <a:t>Reproducible: un tercero llega a la misma base sin hablar con el autor (3/3)</a:t>
             </a:r>
           </a:p>
         </p:txBody>
@@ -4303,7 +4242,7 @@
                 </a:solidFill>
                 <a:latin typeface="Calibri"/>
               </a:rPr>
-              <a:t>–   Lo que si hay que exigir dentro del turno es la ejecucion real: que el estudiante corra el procedimiento en el playground, con su caso valido y su caso invalido, en vez de proyectar capturas fijas</a:t>
+              <a:t>–   Tres, falta de idempotencia: si el script no se puede correr dos veces porque falla al encontrar que la tabla ya existe, se pierde tiempo en cada intento, y anteponer DROP TABLE IF EXISTS en orden inverso al de creacion lo resuelve.</a:t>
             </a:r>
           </a:p>
           <a:p>
@@ -4319,7 +4258,7 @@
                 </a:solidFill>
                 <a:latin typeface="Calibri"/>
               </a:rPr>
-              <a:t>–   Porque una consulta ejecutandose delante del evaluador es la evidencia mas dificil de fingir y la mas rapida de calificar.</a:t>
+              <a:t>–   Cuatro, el LEEME ausente o inutil; uno que sirve tiene cuatro cosas y cabe en media pagina: motor y version exactos, el orden de ejecucion de los archivos</a:t>
             </a:r>
           </a:p>
           <a:p>
@@ -4335,39 +4274,7 @@
                 </a:solidFill>
                 <a:latin typeface="Calibri"/>
               </a:rPr>
-              <a:t>–   El paquete, en cambio, se sube al modulo de Proyectos de la plataforma del curso ANTES del turno: quien llega a subir archivos consume su propio tiempo de sustentacion.</a:t>
-            </a:r>
-          </a:p>
-          <a:p>
-            <a:pPr>
-              <a:spcAft>
-                <a:spcPts val="800"/>
-              </a:spcAft>
-            </a:pPr>
-            <a:r>
-              <a:rPr sz="2000" b="0" i="0">
-                <a:solidFill>
-                  <a:srgbClr val="333333"/>
-                </a:solidFill>
-                <a:latin typeface="Calibri"/>
-              </a:rPr>
-              <a:t>–   Y el criterio de dominio es el mismo trabajando solo o en equipo autorizado: quien sustenta debe poder explicar cualquier parte en 60 segundos</a:t>
-            </a:r>
-          </a:p>
-          <a:p>
-            <a:pPr>
-              <a:spcAft>
-                <a:spcPts val="800"/>
-              </a:spcAft>
-            </a:pPr>
-            <a:r>
-              <a:rPr sz="2000" b="0" i="0">
-                <a:solidFill>
-                  <a:srgbClr val="333333"/>
-                </a:solidFill>
-                <a:latin typeface="Calibri"/>
-              </a:rPr>
-              <a:t>–   Y si hubo equipo, cualquier integrante debe poder hacerlo con cualquier parte, no solo con la suya, porque el Q&amp;A se dirige al azar y porque si solo una persona entiende el modelo el evaluador no tiene forma de atribuir el trabajo a los demas.</a:t>
+              <a:t>–   Como verificar que quedo bien (una consulta cuyo resultado se conoce, por ejemplo SELECT COUNT(*) FROM cita devolviendo 10) y las limitaciones conocidas.</a:t>
             </a:r>
           </a:p>
         </p:txBody>
@@ -4548,7 +4455,7 @@
                 </a:solidFill>
                 <a:latin typeface="Calibri"/>
               </a:rPr>
-              <a:t>El Q&amp;A de modelado, con las respuestas listas</a:t>
+              <a:t>El reparto de los 5 a 8 minutos (1/3)</a:t>
             </a:r>
           </a:p>
         </p:txBody>
@@ -4581,13 +4488,13 @@
               </a:spcAft>
             </a:pPr>
             <a:r>
-              <a:rPr sz="1900" b="0" i="0">
+              <a:rPr sz="2000" b="0" i="0">
                 <a:solidFill>
                   <a:srgbClr val="333333"/>
                 </a:solidFill>
                 <a:latin typeface="Calibri"/>
               </a:rPr>
-              <a:t>–   El Q&amp;A sobre modelado tiene preguntas que se repiten, y conviene que el docente tenga las respuestas listas para poder calificarlas y para poder formularlas.</a:t>
+              <a:t>–   La sustentacion dura de 5 a 8 minutos y ese limite obliga a decidir que se deja fuera.</a:t>
             </a:r>
           </a:p>
           <a:p>
@@ -4597,13 +4504,13 @@
               </a:spcAft>
             </a:pPr>
             <a:r>
-              <a:rPr sz="1900" b="0" i="0">
+              <a:rPr sz="2000" b="0" i="0">
                 <a:solidFill>
                   <a:srgbClr val="333333"/>
                 </a:solidFill>
                 <a:latin typeface="Calibri"/>
               </a:rPr>
-              <a:t>–   «Por que nombre y apellido separados y no un solo campo nombre_completo?»: porque se necesita ordenar y buscar por apellido, y separar despues un campo unido es un trabajo sucio y lleno de errores con nombres compuestos.</a:t>
+              <a:t>–   El reparto que funciona, y que es convencion y no regla dura, es: 45 segundos para el problema de la clinica Huellitas en lenguaje de negocio, sin una sola tabla en pantalla</a:t>
             </a:r>
           </a:p>
           <a:p>
@@ -4613,13 +4520,13 @@
               </a:spcAft>
             </a:pPr>
             <a:r>
-              <a:rPr sz="1900" b="0" i="0">
+              <a:rPr sz="2000" b="0" i="0">
                 <a:solidFill>
                   <a:srgbClr val="333333"/>
                 </a:solidFill>
                 <a:latin typeface="Calibri"/>
               </a:rPr>
-              <a:t>–   «Que pasa si un dueno tiene dos mascotas llamadas Pelusa?»: nada, porque la identidad la da id_mascota y no el nombre</a:t>
+              <a:t>–   90 segundos para el modelo, mostrando el ER y justificando dos decisiones y no las quince</a:t>
             </a:r>
           </a:p>
           <a:p>
@@ -4629,13 +4536,13 @@
               </a:spcAft>
             </a:pPr>
             <a:r>
-              <a:rPr sz="1900" b="0" i="0">
+              <a:rPr sz="2000" b="0" i="0">
                 <a:solidFill>
                   <a:srgbClr val="333333"/>
                 </a:solidFill>
                 <a:latin typeface="Calibri"/>
               </a:rPr>
-              <a:t>–   Y si se quisiera prohibirlo habria que declarar UNIQUE (id_dueno, nombre), decision que el estudiante debe poder defender en cualquiera de los dos sentidos.</a:t>
+              <a:t>–   60 segundos para seguridad, con la matriz de roles y una frase sobre por que recepcion no ve el historial clinico; 90 segundos para la automatizacion, ejecutando un procedimiento con su caso valido y su caso invalido</a:t>
             </a:r>
           </a:p>
           <a:p>
@@ -4645,61 +4552,13 @@
               </a:spcAft>
             </a:pPr>
             <a:r>
-              <a:rPr sz="1900" b="0" i="0">
+              <a:rPr sz="2000" b="0" i="0">
                 <a:solidFill>
                   <a:srgbClr val="333333"/>
                 </a:solidFill>
                 <a:latin typeface="Calibri"/>
               </a:rPr>
-              <a:t>–   «Por que no borran las citas canceladas?»: porque el historial de cancelaciones es informacion de negocio, ya que permite ver que dueno cancela siempre</a:t>
-            </a:r>
-          </a:p>
-          <a:p>
-            <a:pPr>
-              <a:spcAft>
-                <a:spcPts val="800"/>
-              </a:spcAft>
-            </a:pPr>
-            <a:r>
-              <a:rPr sz="1900" b="0" i="0">
-                <a:solidFill>
-                  <a:srgbClr val="333333"/>
-                </a:solidFill>
-                <a:latin typeface="Calibri"/>
-              </a:rPr>
-              <a:t>–   Y porque borrar filas referenciadas por facturas rompe la integridad referencial; se usa borrado logico con un campo de estado.</a:t>
-            </a:r>
-          </a:p>
-          <a:p>
-            <a:pPr>
-              <a:spcAft>
-                <a:spcPts val="800"/>
-              </a:spcAft>
-            </a:pPr>
-            <a:r>
-              <a:rPr sz="1900" b="0" i="0">
-                <a:solidFill>
-                  <a:srgbClr val="333333"/>
-                </a:solidFill>
-                <a:latin typeface="Calibri"/>
-              </a:rPr>
-              <a:t>–   Y la pregunta que desarma a quien no midio: «cuanto mejoro esa consulta?».</a:t>
-            </a:r>
-          </a:p>
-          <a:p>
-            <a:pPr>
-              <a:spcAft>
-                <a:spcPts val="800"/>
-              </a:spcAft>
-            </a:pPr>
-            <a:r>
-              <a:rPr sz="1900" b="0" i="0">
-                <a:solidFill>
-                  <a:srgbClr val="333333"/>
-                </a:solidFill>
-                <a:latin typeface="Calibri"/>
-              </a:rPr>
-              <a:t>–   Inventar un numero, en cambio, se cae con la siguiente pregunta y cuesta mucho mas que admitir el limite.</a:t>
+              <a:t>–   60 segundos para la optimizacion, con el plan de ejecucion antes y despues; 45 segundos para la integracion y el punto debil declarado; y 30 de cierre.</a:t>
             </a:r>
           </a:p>
         </p:txBody>
@@ -4880,7 +4739,7 @@
                 </a:solidFill>
                 <a:latin typeface="Calibri"/>
               </a:rPr>
-              <a:t>Evaluar con rubrica: puntos a evidencia observable (1/2)</a:t>
+              <a:t>El reparto de los 5 a 8 minutos (2/3)</a:t>
             </a:r>
           </a:p>
         </p:txBody>
@@ -4919,7 +4778,7 @@
                 </a:solidFill>
                 <a:latin typeface="Calibri"/>
               </a:rPr>
-              <a:t>–   Evaluar con rubrica es asignar puntos a evidencia observable y no a impresion general.</a:t>
+              <a:t>–   Y conviene ser explicito sobre el formato, porque de eso depende como se prepara el estudiante: la Clase 15 se dicta el 16 de noviembre en la ultima sesion del semestre</a:t>
             </a:r>
           </a:p>
           <a:p>
@@ -4935,7 +4794,7 @@
                 </a:solidFill>
                 <a:latin typeface="Calibri"/>
               </a:rPr>
-              <a:t>–   Los 100 puntos del PI VetCare DB se reparten en 20 por modelo y DDL coherente, 15 por seguridad y respaldo, 25 por procedimientos, funciones y disparadores con casos de prueba</a:t>
+              <a:t>–   Dedicada por completo a sustentaciones EN VIVO, con turnos consecutivos y preguntas del docente al cierre de cada uno.</a:t>
             </a:r>
           </a:p>
           <a:p>
@@ -4951,7 +4810,7 @@
                 </a:solidFill>
                 <a:latin typeface="Calibri"/>
               </a:rPr>
-              <a:t>–   15 por optimizacion con antes y despues, 10 por la integracion aplicacion-base de datos documentada como contrato, y 15 por informe y sustentacion.</a:t>
+              <a:t>–   No es clase autonoma y la defensa no se reemplaza por un video grabado, porque el Q&amp;A dirigido al azar es lo unico que permite verificar que el modelo y los procedimientos son de quien los presenta.</a:t>
             </a:r>
           </a:p>
           <a:p>
@@ -4967,23 +4826,7 @@
                 </a:solidFill>
                 <a:latin typeface="Calibri"/>
               </a:rPr>
-              <a:t>–   Leer ese reparto en voz alta al abrir la sesion, antes del primer turno, evita el reclamo mas comun: los 15 puntos de sustentacion son solo la sexta parte del total</a:t>
-            </a:r>
-          </a:p>
-          <a:p>
-            <a:pPr>
-              <a:spcAft>
-                <a:spcPts val="800"/>
-              </a:spcAft>
-            </a:pPr>
-            <a:r>
-              <a:rPr sz="2000" b="0" i="0">
-                <a:solidFill>
-                  <a:srgbClr val="333333"/>
-                </a:solidFill>
-                <a:latin typeface="Calibri"/>
-              </a:rPr>
-              <a:t>–   Pero la sustentacion es el instrumento con el que el evaluador verifica que los otros 85 son de su autor</a:t>
+              <a:t>–   El paquete, en cambio, se sube al modulo de Proyectos de la plataforma del curso ANTES del turno: quien llega a subir archivos consume su propio tiempo de sustentacion.</a:t>
             </a:r>
           </a:p>
         </p:txBody>
@@ -5164,7 +5007,7 @@
                 </a:solidFill>
                 <a:latin typeface="Calibri"/>
               </a:rPr>
-              <a:t>Evaluar con rubrica: puntos a evidencia observable (2/2)</a:t>
+              <a:t>El reparto de los 5 a 8 minutos (3/3)</a:t>
             </a:r>
           </a:p>
         </p:txBody>
@@ -5203,7 +5046,7 @@
                 </a:solidFill>
                 <a:latin typeface="Calibri"/>
               </a:rPr>
-              <a:t>–   Y un modelo excelente que nadie sabe defender abre una duda de autoria que ningun documento cierra.</a:t>
+              <a:t>–   Y el criterio de dominio es el mismo trabajando solo o en equipo autorizado: quien sustenta debe poder explicar cualquier parte en 60 segundos</a:t>
             </a:r>
           </a:p>
           <a:p>
@@ -5219,23 +5062,7 @@
                 </a:solidFill>
                 <a:latin typeface="Calibri"/>
               </a:rPr>
-              <a:t>–   Y va el recordatorio de pesos: estos 100 puntos valen 20% del Corte 3, el Parcial 3 de la Clase 14 (virtual sincrono por Meet y escrito, el 9 de noviembre) vale 15%, y la asistencia 5%.</a:t>
-            </a:r>
-          </a:p>
-          <a:p>
-            <a:pPr>
-              <a:spcAft>
-                <a:spcPts val="800"/>
-              </a:spcAft>
-            </a:pPr>
-            <a:r>
-              <a:rPr sz="2000" b="0" i="0">
-                <a:solidFill>
-                  <a:srgbClr val="333333"/>
-                </a:solidFill>
-                <a:latin typeface="Calibri"/>
-              </a:rPr>
-              <a:t>–   El proyecto no reemplaza ni compensa el parcial: son dos evaluaciones distintas del mismo corte, y confundirlas produce reclamos que se evitan diciendolo una sola vez, hoy, con los numeros a la vista.</a:t>
+              <a:t>–   Y si hubo equipo, cualquier integrante debe poder hacerlo con cualquier parte, no solo con la suya, porque el Q&amp;A se dirige al azar y porque si solo una persona entiende el modelo el evaluador no tiene forma de atribuir el trabajo a los demas.</a:t>
             </a:r>
           </a:p>
         </p:txBody>
@@ -5416,7 +5243,7 @@
                 </a:solidFill>
                 <a:latin typeface="Calibri"/>
               </a:rPr>
-              <a:t>El cierre del curso: conectar lo hecho con el trabajo real (1/2)</a:t>
+              <a:t>El Q&amp;A de modelado, con las respuestas listas (1/2)</a:t>
             </a:r>
           </a:p>
         </p:txBody>
@@ -5455,7 +5282,7 @@
                 </a:solidFill>
                 <a:latin typeface="Calibri"/>
               </a:rPr>
-              <a:t>–   El cierre del curso debe conectar lo hecho con el trabajo real, porque de eso depende que el estudiante conserve los scripts en vez de borrarlos al terminar el semestre.</a:t>
+              <a:t>–   «Por que nombre y apellido separados y no un solo campo nombre_completo?»: porque se necesita ordenar y buscar por apellido, y separar despues un campo unido es un trabajo sucio y lleno de errores con nombres compuestos.</a:t>
             </a:r>
           </a:p>
           <a:p>
@@ -5471,7 +5298,7 @@
                 </a:solidFill>
                 <a:latin typeface="Calibri"/>
               </a:rPr>
-              <a:t>–   Lo que el estudiante produjo (un ER justificado, un DDL con restricciones declarativas, una matriz de privilegios, procedimientos con manejo de errores, disparadores de auditoria</a:t>
+              <a:t>–   «Que pasa si un dueno tiene dos mascotas llamadas Pelusa?»: nada, porque la identidad la da id_mascota y no el nombre</a:t>
             </a:r>
           </a:p>
           <a:p>
@@ -5487,23 +5314,7 @@
                 </a:solidFill>
                 <a:latin typeface="Calibri"/>
               </a:rPr>
-              <a:t>–   Un analisis de plan de ejecucion y un contrato de operaciones) es literalmente el contenido de las tareas de un desarrollador de base de datos o de un administrador junior en su primer ano de trabajo.</a:t>
-            </a:r>
-          </a:p>
-          <a:p>
-            <a:pPr>
-              <a:spcAft>
-                <a:spcPts val="800"/>
-              </a:spcAft>
-            </a:pPr>
-            <a:r>
-              <a:rPr sz="2000" b="0" i="0">
-                <a:solidFill>
-                  <a:srgbClr val="333333"/>
-                </a:solidFill>
-                <a:latin typeface="Calibri"/>
-              </a:rPr>
-              <a:t>–   Leer un plan de ejecucion y decidir si un indice sobra es una habilidad que se paga.</a:t>
+              <a:t>–   Y si se quisiera prohibirlo habria que declarar UNIQUE (id_dueno, nombre), decision que el estudiante debe poder defender en cualquiera de los dos sentidos.</a:t>
             </a:r>
           </a:p>
         </p:txBody>
@@ -5684,7 +5495,7 @@
                 </a:solidFill>
                 <a:latin typeface="Calibri"/>
               </a:rPr>
-              <a:t>El cierre del curso: conectar lo hecho con el trabajo real (2/2)</a:t>
+              <a:t>El Q&amp;A de modelado, con las respuestas listas (2/2)</a:t>
             </a:r>
           </a:p>
         </p:txBody>
@@ -5723,7 +5534,7 @@
                 </a:solidFill>
                 <a:latin typeface="Calibri"/>
               </a:rPr>
-              <a:t>–   El SQL que se escribio ahi es el mismo que corre en un servidor de produccion; lo que cambia en un entorno profesional es el volumen de datos y las consecuencias de un error, no la sintaxis.</a:t>
+              <a:t>–   «Por que no borran las citas canceladas?»: porque el historial de cancelaciones es informacion de negocio, ya que permite ver que dueno cancela siempre</a:t>
             </a:r>
           </a:p>
           <a:p>
@@ -5739,7 +5550,7 @@
                 </a:solidFill>
                 <a:latin typeface="Calibri"/>
               </a:rPr>
-              <a:t>–   Y la autoevaluacion del taller conviene pedirla con una consigna concreta en vez de una reflexion vaga: nombren la decision de modelado que mas les costo revertir y en que clase se dieron cuenta de que estaba mal.</a:t>
+              <a:t>–   Y porque borrar filas referenciadas por facturas rompe la integridad referencial; se usa borrado logico con un campo de estado.</a:t>
             </a:r>
           </a:p>
           <a:p>
@@ -5755,7 +5566,7 @@
                 </a:solidFill>
                 <a:latin typeface="Calibri"/>
               </a:rPr>
-              <a:t>–   Esa respuesta es la que mejor predice si aprendieron, y ademas le da al docente material real para ajustar el curso el proximo semestre.</a:t>
+              <a:t>–   Y la pregunta que desarma a quien no midio: «cuanto mejoro esa consulta?».</a:t>
             </a:r>
           </a:p>
         </p:txBody>
@@ -5936,7 +5747,7 @@
                 </a:solidFill>
                 <a:latin typeface="Calibri"/>
               </a:rPr>
-              <a:t>Como se ordena la sesion de hoy</a:t>
+              <a:t>Evaluar con rubrica: puntos a evidencia observable (1/2)</a:t>
             </a:r>
           </a:p>
         </p:txBody>
@@ -5975,25 +5786,7 @@
                 </a:solidFill>
                 <a:latin typeface="Calibri"/>
               </a:rPr>
-              <a:t>–   Sustentación </a:t>
-            </a:r>
-            <a:r>
-              <a:rPr sz="2000" b="1" i="0">
-                <a:solidFill>
-                  <a:srgbClr val="333333"/>
-                </a:solidFill>
-                <a:latin typeface="Calibri"/>
-              </a:rPr>
-              <a:t>en vivo</a:t>
-            </a:r>
-            <a:r>
-              <a:rPr sz="2000" b="0" i="0">
-                <a:solidFill>
-                  <a:srgbClr val="333333"/>
-                </a:solidFill>
-                <a:latin typeface="Calibri"/>
-              </a:rPr>
-              <a:t>, en este bloque: no se reemplaza por video grabado.</a:t>
+              <a:t>–   Evaluar con rubrica es asignar puntos a evidencia observable y no a impresion general.</a:t>
             </a:r>
           </a:p>
           <a:p>
@@ -6009,25 +5802,7 @@
                 </a:solidFill>
                 <a:latin typeface="Calibri"/>
               </a:rPr>
-              <a:t>–   Turnos de </a:t>
-            </a:r>
-            <a:r>
-              <a:rPr sz="2000" b="1" i="0">
-                <a:solidFill>
-                  <a:srgbClr val="333333"/>
-                </a:solidFill>
-                <a:latin typeface="Calibri"/>
-              </a:rPr>
-              <a:t>5–8 min de pitch + Q&amp;A</a:t>
-            </a:r>
-            <a:r>
-              <a:rPr sz="2000" b="0" i="0">
-                <a:solidFill>
-                  <a:srgbClr val="333333"/>
-                </a:solidFill>
-                <a:latin typeface="Calibri"/>
-              </a:rPr>
-              <a:t>; el orden se sortea al empezar.</a:t>
+              <a:t>–   Los 100 puntos del PI VetCare DB se reparten en 20 por modelo y DDL coherente, 15 por seguridad y respaldo, 25 por procedimientos, funciones y disparadores con casos de prueba</a:t>
             </a:r>
           </a:p>
           <a:p>
@@ -6043,16 +5818,7 @@
                 </a:solidFill>
                 <a:latin typeface="Calibri"/>
               </a:rPr>
-              <a:t>–   Ten listo: </a:t>
-            </a:r>
-            <a:r>
-              <a:rPr sz="2000" b="1" i="0">
-                <a:solidFill>
-                  <a:srgbClr val="333333"/>
-                </a:solidFill>
-                <a:latin typeface="Calibri"/>
-              </a:rPr>
-              <a:t>ZIP/PDF final subido antes del turno + sustentacion en vivo 5-8 min + Q&amp;A</a:t>
+              <a:t>–   15 por optimizacion con antes y despues, 10 por la integracion aplicacion-base de datos documentada como contrato, y 15 por informe y sustentacion.</a:t>
             </a:r>
           </a:p>
           <a:p>
@@ -6068,25 +5834,7 @@
                 </a:solidFill>
                 <a:latin typeface="Calibri"/>
               </a:rPr>
-              <a:t>–   En tu turno muestra una </a:t>
-            </a:r>
-            <a:r>
-              <a:rPr sz="2000" b="1" i="0">
-                <a:solidFill>
-                  <a:srgbClr val="333333"/>
-                </a:solidFill>
-                <a:latin typeface="Calibri"/>
-              </a:rPr>
-              <a:t>ejecución real</a:t>
-            </a:r>
-            <a:r>
-              <a:rPr sz="2000" b="0" i="0">
-                <a:solidFill>
-                  <a:srgbClr val="333333"/>
-                </a:solidFill>
-                <a:latin typeface="Calibri"/>
-              </a:rPr>
-              <a:t> (procedimiento OK + caso rechazado), no solo capturas.</a:t>
+              <a:t>–   Leer ese reparto en voz alta al abrir la sesion, antes del primer turno, evita el reclamo mas comun: los 15 puntos de sustentacion son solo la sexta parte del total</a:t>
             </a:r>
           </a:p>
           <a:p>
@@ -6102,7 +5850,7 @@
                 </a:solidFill>
                 <a:latin typeface="Calibri"/>
               </a:rPr>
-              <a:t>–   Mientras otros presentan, escuchas: el cierre del curso se hace con todo el grupo.</a:t>
+              <a:t>–   Pero la sustentacion es el instrumento con el que el evaluador verifica que los otros 85 son de su autor</a:t>
             </a:r>
           </a:p>
         </p:txBody>
@@ -6177,7 +5925,7 @@
         <p:spPr>
           <a:xfrm>
             <a:off x="0" y="0"/>
-            <a:ext cx="12191695" cy="1170432"/>
+            <a:ext cx="12191695" cy="960120"/>
           </a:xfrm>
           <a:prstGeom prst="rect">
             <a:avLst/>
@@ -6219,7 +5967,7 @@
         </p:nvSpPr>
         <p:spPr>
           <a:xfrm>
-            <a:off x="0" y="1170432"/>
+            <a:off x="0" y="960120"/>
             <a:ext cx="12191695" cy="41148"/>
           </a:xfrm>
           <a:prstGeom prst="rect">
@@ -6263,7 +6011,7 @@
         <p:spPr>
           <a:xfrm>
             <a:off x="457200" y="164592"/>
-            <a:ext cx="11277295" cy="384048"/>
+            <a:ext cx="11277295" cy="502920"/>
           </a:xfrm>
           <a:prstGeom prst="rect">
             <a:avLst/>
@@ -6283,7 +6031,7 @@
                 </a:solidFill>
                 <a:latin typeface="Calibri"/>
               </a:rPr>
-              <a:t>Herramientas de hoy</a:t>
+              <a:t>Evaluar con rubrica: puntos a evidencia observable (2/2)</a:t>
             </a:r>
           </a:p>
         </p:txBody>
@@ -6296,8 +6044,8 @@
         </p:nvSpPr>
         <p:spPr>
           <a:xfrm>
-            <a:off x="457200" y="566928"/>
-            <a:ext cx="11277295" cy="411480"/>
+            <a:off x="457200" y="1170432"/>
+            <a:ext cx="11277295" cy="5230368"/>
           </a:xfrm>
           <a:prstGeom prst="rect">
             <a:avLst/>
@@ -6310,633 +6058,58 @@
           </a:bodyPr>
           <a:lstStyle/>
           <a:p>
-            <a:r>
-              <a:rPr sz="1400" b="0" i="0">
-                <a:solidFill>
-                  <a:srgbClr val="B8D8EE"/>
-                </a:solidFill>
-                <a:latin typeface="Calibri"/>
-              </a:rPr>
-              <a:t>Gratis · navegador o free tier</a:t>
-            </a:r>
-          </a:p>
-        </p:txBody>
-      </p:sp>
-      <p:sp>
-        <p:nvSpPr>
-          <p:cNvPr id="6" name="Rounded Rectangle 5"/>
-          <p:cNvSpPr/>
-          <p:nvPr/>
-        </p:nvSpPr>
-        <p:spPr>
-          <a:xfrm>
-            <a:off x="457200" y="1591056"/>
-            <a:ext cx="3624986" cy="2331720"/>
-          </a:xfrm>
-          <a:prstGeom prst="roundRect">
-            <a:avLst>
-              <a:gd name="adj" fmla="val 12000"/>
-            </a:avLst>
-          </a:prstGeom>
-          <a:solidFill>
-            <a:srgbClr val="F2F2F2"/>
-          </a:solidFill>
-          <a:ln>
-            <a:noFill/>
-          </a:ln>
-        </p:spPr>
-        <p:style>
-          <a:lnRef idx="1">
-            <a:schemeClr val="accent1"/>
-          </a:lnRef>
-          <a:fillRef idx="3">
-            <a:schemeClr val="accent1"/>
-          </a:fillRef>
-          <a:effectRef idx="2">
-            <a:schemeClr val="accent1"/>
-          </a:effectRef>
-          <a:fontRef idx="minor">
-            <a:schemeClr val="lt1"/>
-          </a:fontRef>
-        </p:style>
-        <p:txBody>
-          <a:bodyPr rtlCol="0" anchor="ctr"/>
-          <a:lstStyle/>
-          <a:p>
-            <a:pPr algn="ctr"/>
-          </a:p>
-        </p:txBody>
-      </p:sp>
-      <p:sp>
-        <p:nvSpPr>
-          <p:cNvPr id="7" name="Rectangle 6"/>
-          <p:cNvSpPr/>
-          <p:nvPr/>
-        </p:nvSpPr>
-        <p:spPr>
-          <a:xfrm>
-            <a:off x="457200" y="1591056"/>
-            <a:ext cx="3624986" cy="64008"/>
-          </a:xfrm>
-          <a:prstGeom prst="rect">
-            <a:avLst/>
-          </a:prstGeom>
-          <a:solidFill>
-            <a:srgbClr val="095292"/>
-          </a:solidFill>
-          <a:ln>
-            <a:noFill/>
-          </a:ln>
-        </p:spPr>
-        <p:style>
-          <a:lnRef idx="1">
-            <a:schemeClr val="accent1"/>
-          </a:lnRef>
-          <a:fillRef idx="3">
-            <a:schemeClr val="accent1"/>
-          </a:fillRef>
-          <a:effectRef idx="2">
-            <a:schemeClr val="accent1"/>
-          </a:effectRef>
-          <a:fontRef idx="minor">
-            <a:schemeClr val="lt1"/>
-          </a:fontRef>
-        </p:style>
-        <p:txBody>
-          <a:bodyPr rtlCol="0" anchor="ctr"/>
-          <a:lstStyle/>
-          <a:p>
-            <a:pPr algn="ctr"/>
-          </a:p>
-        </p:txBody>
-      </p:sp>
-      <p:sp>
-        <p:nvSpPr>
-          <p:cNvPr id="8" name="Rectangle 7"/>
-          <p:cNvSpPr/>
-          <p:nvPr/>
-        </p:nvSpPr>
-        <p:spPr>
-          <a:xfrm>
-            <a:off x="457200" y="1655064"/>
-            <a:ext cx="3624986" cy="27432"/>
-          </a:xfrm>
-          <a:prstGeom prst="rect">
-            <a:avLst/>
-          </a:prstGeom>
-          <a:solidFill>
-            <a:srgbClr val="FFD000"/>
-          </a:solidFill>
-          <a:ln>
-            <a:noFill/>
-          </a:ln>
-        </p:spPr>
-        <p:style>
-          <a:lnRef idx="1">
-            <a:schemeClr val="accent1"/>
-          </a:lnRef>
-          <a:fillRef idx="3">
-            <a:schemeClr val="accent1"/>
-          </a:fillRef>
-          <a:effectRef idx="2">
-            <a:schemeClr val="accent1"/>
-          </a:effectRef>
-          <a:fontRef idx="minor">
-            <a:schemeClr val="lt1"/>
-          </a:fontRef>
-        </p:style>
-        <p:txBody>
-          <a:bodyPr rtlCol="0" anchor="ctr"/>
-          <a:lstStyle/>
-          <a:p>
-            <a:pPr algn="ctr"/>
-          </a:p>
-        </p:txBody>
-      </p:sp>
-      <p:pic>
-        <p:nvPicPr>
-          <p:cNvPr id="9" name="Picture 8" descr="google_docs.png"/>
-          <p:cNvPicPr>
-            <a:picLocks noChangeAspect="1"/>
-          </p:cNvPicPr>
-          <p:nvPr/>
-        </p:nvPicPr>
-        <p:blipFill>
-          <a:blip r:embed="rId2"/>
-          <a:stretch>
-            <a:fillRect/>
-          </a:stretch>
-        </p:blipFill>
-        <p:spPr>
-          <a:xfrm>
-            <a:off x="1643329" y="1847087"/>
-            <a:ext cx="1252728" cy="1252728"/>
-          </a:xfrm>
-          <a:prstGeom prst="rect">
-            <a:avLst/>
-          </a:prstGeom>
-        </p:spPr>
-      </p:pic>
-      <p:sp>
-        <p:nvSpPr>
-          <p:cNvPr id="10" name="TextBox 9"/>
-          <p:cNvSpPr txBox="1"/>
-          <p:nvPr/>
-        </p:nvSpPr>
-        <p:spPr>
-          <a:xfrm>
-            <a:off x="530352" y="3191256"/>
-            <a:ext cx="3478682" cy="621792"/>
-          </a:xfrm>
-          <a:prstGeom prst="rect">
-            <a:avLst/>
-          </a:prstGeom>
-          <a:noFill/>
-        </p:spPr>
-        <p:txBody>
-          <a:bodyPr wrap="square" anchor="t"/>
-          <a:lstStyle/>
-          <a:p>
-            <a:pPr algn="ctr"/>
-            <a:r>
-              <a:rPr sz="1300" b="1" i="0">
-                <a:solidFill>
-                  <a:srgbClr val="095292"/>
-                </a:solidFill>
-                <a:latin typeface="Calibri"/>
-              </a:rPr>
-              <a:t>Google Docs</a:t>
-            </a:r>
-          </a:p>
-          <a:p>
-            <a:pPr algn="ctr">
-              <a:spcBef>
-                <a:spcPts val="200"/>
-              </a:spcBef>
+            <a:pPr>
+              <a:spcAft>
+                <a:spcPts val="800"/>
+              </a:spcAft>
             </a:pPr>
             <a:r>
-              <a:rPr sz="1000" b="0" i="0">
-                <a:solidFill>
-                  <a:srgbClr val="666666"/>
-                </a:solidFill>
-                <a:latin typeface="Calibri"/>
-              </a:rPr>
-              <a:t>Informe final</a:t>
-            </a:r>
-          </a:p>
-        </p:txBody>
-      </p:sp>
-      <p:sp>
-        <p:nvSpPr>
-          <p:cNvPr id="11" name="Rounded Rectangle 10"/>
-          <p:cNvSpPr/>
-          <p:nvPr/>
-        </p:nvSpPr>
-        <p:spPr>
-          <a:xfrm>
-            <a:off x="4283354" y="1591056"/>
-            <a:ext cx="3624986" cy="2331720"/>
-          </a:xfrm>
-          <a:prstGeom prst="roundRect">
-            <a:avLst>
-              <a:gd name="adj" fmla="val 12000"/>
-            </a:avLst>
-          </a:prstGeom>
-          <a:solidFill>
-            <a:srgbClr val="F2F2F2"/>
-          </a:solidFill>
-          <a:ln>
-            <a:noFill/>
-          </a:ln>
-        </p:spPr>
-        <p:style>
-          <a:lnRef idx="1">
-            <a:schemeClr val="accent1"/>
-          </a:lnRef>
-          <a:fillRef idx="3">
-            <a:schemeClr val="accent1"/>
-          </a:fillRef>
-          <a:effectRef idx="2">
-            <a:schemeClr val="accent1"/>
-          </a:effectRef>
-          <a:fontRef idx="minor">
-            <a:schemeClr val="lt1"/>
-          </a:fontRef>
-        </p:style>
-        <p:txBody>
-          <a:bodyPr rtlCol="0" anchor="ctr"/>
-          <a:lstStyle/>
-          <a:p>
-            <a:pPr algn="ctr"/>
-          </a:p>
-        </p:txBody>
-      </p:sp>
-      <p:sp>
-        <p:nvSpPr>
-          <p:cNvPr id="12" name="Rectangle 11"/>
-          <p:cNvSpPr/>
-          <p:nvPr/>
-        </p:nvSpPr>
-        <p:spPr>
-          <a:xfrm>
-            <a:off x="4283354" y="1591056"/>
-            <a:ext cx="3624986" cy="64008"/>
-          </a:xfrm>
-          <a:prstGeom prst="rect">
-            <a:avLst/>
-          </a:prstGeom>
-          <a:solidFill>
-            <a:srgbClr val="095292"/>
-          </a:solidFill>
-          <a:ln>
-            <a:noFill/>
-          </a:ln>
-        </p:spPr>
-        <p:style>
-          <a:lnRef idx="1">
-            <a:schemeClr val="accent1"/>
-          </a:lnRef>
-          <a:fillRef idx="3">
-            <a:schemeClr val="accent1"/>
-          </a:fillRef>
-          <a:effectRef idx="2">
-            <a:schemeClr val="accent1"/>
-          </a:effectRef>
-          <a:fontRef idx="minor">
-            <a:schemeClr val="lt1"/>
-          </a:fontRef>
-        </p:style>
-        <p:txBody>
-          <a:bodyPr rtlCol="0" anchor="ctr"/>
-          <a:lstStyle/>
-          <a:p>
-            <a:pPr algn="ctr"/>
-          </a:p>
-        </p:txBody>
-      </p:sp>
-      <p:sp>
-        <p:nvSpPr>
-          <p:cNvPr id="13" name="Rectangle 12"/>
-          <p:cNvSpPr/>
-          <p:nvPr/>
-        </p:nvSpPr>
-        <p:spPr>
-          <a:xfrm>
-            <a:off x="4283354" y="1655064"/>
-            <a:ext cx="3624986" cy="27432"/>
-          </a:xfrm>
-          <a:prstGeom prst="rect">
-            <a:avLst/>
-          </a:prstGeom>
-          <a:solidFill>
-            <a:srgbClr val="FFD000"/>
-          </a:solidFill>
-          <a:ln>
-            <a:noFill/>
-          </a:ln>
-        </p:spPr>
-        <p:style>
-          <a:lnRef idx="1">
-            <a:schemeClr val="accent1"/>
-          </a:lnRef>
-          <a:fillRef idx="3">
-            <a:schemeClr val="accent1"/>
-          </a:fillRef>
-          <a:effectRef idx="2">
-            <a:schemeClr val="accent1"/>
-          </a:effectRef>
-          <a:fontRef idx="minor">
-            <a:schemeClr val="lt1"/>
-          </a:fontRef>
-        </p:style>
-        <p:txBody>
-          <a:bodyPr rtlCol="0" anchor="ctr"/>
-          <a:lstStyle/>
-          <a:p>
-            <a:pPr algn="ctr"/>
-          </a:p>
-        </p:txBody>
-      </p:sp>
-      <p:pic>
-        <p:nvPicPr>
-          <p:cNvPr id="14" name="Picture 13" descr="drawio.png"/>
-          <p:cNvPicPr>
-            <a:picLocks noChangeAspect="1"/>
-          </p:cNvPicPr>
-          <p:nvPr/>
-        </p:nvPicPr>
-        <p:blipFill>
-          <a:blip r:embed="rId3"/>
-          <a:stretch>
-            <a:fillRect/>
-          </a:stretch>
-        </p:blipFill>
-        <p:spPr>
-          <a:xfrm>
-            <a:off x="5469483" y="1847087"/>
-            <a:ext cx="1252728" cy="1252728"/>
-          </a:xfrm>
-          <a:prstGeom prst="rect">
-            <a:avLst/>
-          </a:prstGeom>
-        </p:spPr>
-      </p:pic>
-      <p:sp>
-        <p:nvSpPr>
-          <p:cNvPr id="15" name="TextBox 14"/>
-          <p:cNvSpPr txBox="1"/>
-          <p:nvPr/>
-        </p:nvSpPr>
-        <p:spPr>
-          <a:xfrm>
-            <a:off x="4356506" y="3191256"/>
-            <a:ext cx="3478682" cy="621792"/>
-          </a:xfrm>
-          <a:prstGeom prst="rect">
-            <a:avLst/>
-          </a:prstGeom>
-          <a:noFill/>
-        </p:spPr>
-        <p:txBody>
-          <a:bodyPr wrap="square" anchor="t"/>
-          <a:lstStyle/>
-          <a:p>
-            <a:pPr algn="ctr"/>
-            <a:r>
-              <a:rPr sz="1300" b="1" i="0">
-                <a:solidFill>
-                  <a:srgbClr val="095292"/>
-                </a:solidFill>
-                <a:latin typeface="Calibri"/>
-              </a:rPr>
-              <a:t>draw.io</a:t>
-            </a:r>
-          </a:p>
-          <a:p>
-            <a:pPr algn="ctr">
-              <a:spcBef>
-                <a:spcPts val="200"/>
-              </a:spcBef>
+              <a:rPr sz="2000" b="0" i="0">
+                <a:solidFill>
+                  <a:srgbClr val="333333"/>
+                </a:solidFill>
+                <a:latin typeface="Calibri"/>
+              </a:rPr>
+              <a:t>–   Y un modelo excelente que nadie sabe defender abre una duda de autoria que ningun documento cierra.</a:t>
+            </a:r>
+          </a:p>
+          <a:p>
+            <a:pPr>
+              <a:spcAft>
+                <a:spcPts val="800"/>
+              </a:spcAft>
             </a:pPr>
             <a:r>
-              <a:rPr sz="1000" b="0" i="0">
-                <a:solidFill>
-                  <a:srgbClr val="666666"/>
-                </a:solidFill>
-                <a:latin typeface="Calibri"/>
-              </a:rPr>
-              <a:t>ER final</a:t>
-            </a:r>
-          </a:p>
-        </p:txBody>
-      </p:sp>
-      <p:sp>
-        <p:nvSpPr>
-          <p:cNvPr id="16" name="Rounded Rectangle 15"/>
-          <p:cNvSpPr/>
-          <p:nvPr/>
-        </p:nvSpPr>
-        <p:spPr>
-          <a:xfrm>
-            <a:off x="8109508" y="1591056"/>
-            <a:ext cx="3624986" cy="2331720"/>
-          </a:xfrm>
-          <a:prstGeom prst="roundRect">
-            <a:avLst>
-              <a:gd name="adj" fmla="val 12000"/>
-            </a:avLst>
-          </a:prstGeom>
-          <a:solidFill>
-            <a:srgbClr val="F2F2F2"/>
-          </a:solidFill>
-          <a:ln>
-            <a:noFill/>
-          </a:ln>
-        </p:spPr>
-        <p:style>
-          <a:lnRef idx="1">
-            <a:schemeClr val="accent1"/>
-          </a:lnRef>
-          <a:fillRef idx="3">
-            <a:schemeClr val="accent1"/>
-          </a:fillRef>
-          <a:effectRef idx="2">
-            <a:schemeClr val="accent1"/>
-          </a:effectRef>
-          <a:fontRef idx="minor">
-            <a:schemeClr val="lt1"/>
-          </a:fontRef>
-        </p:style>
-        <p:txBody>
-          <a:bodyPr rtlCol="0" anchor="ctr"/>
-          <a:lstStyle/>
-          <a:p>
-            <a:pPr algn="ctr"/>
-          </a:p>
-        </p:txBody>
-      </p:sp>
-      <p:sp>
-        <p:nvSpPr>
-          <p:cNvPr id="17" name="Rectangle 16"/>
-          <p:cNvSpPr/>
-          <p:nvPr/>
-        </p:nvSpPr>
-        <p:spPr>
-          <a:xfrm>
-            <a:off x="8109508" y="1591056"/>
-            <a:ext cx="3624986" cy="64008"/>
-          </a:xfrm>
-          <a:prstGeom prst="rect">
-            <a:avLst/>
-          </a:prstGeom>
-          <a:solidFill>
-            <a:srgbClr val="095292"/>
-          </a:solidFill>
-          <a:ln>
-            <a:noFill/>
-          </a:ln>
-        </p:spPr>
-        <p:style>
-          <a:lnRef idx="1">
-            <a:schemeClr val="accent1"/>
-          </a:lnRef>
-          <a:fillRef idx="3">
-            <a:schemeClr val="accent1"/>
-          </a:fillRef>
-          <a:effectRef idx="2">
-            <a:schemeClr val="accent1"/>
-          </a:effectRef>
-          <a:fontRef idx="minor">
-            <a:schemeClr val="lt1"/>
-          </a:fontRef>
-        </p:style>
-        <p:txBody>
-          <a:bodyPr rtlCol="0" anchor="ctr"/>
-          <a:lstStyle/>
-          <a:p>
-            <a:pPr algn="ctr"/>
-          </a:p>
-        </p:txBody>
-      </p:sp>
-      <p:sp>
-        <p:nvSpPr>
-          <p:cNvPr id="18" name="Rectangle 17"/>
-          <p:cNvSpPr/>
-          <p:nvPr/>
-        </p:nvSpPr>
-        <p:spPr>
-          <a:xfrm>
-            <a:off x="8109508" y="1655064"/>
-            <a:ext cx="3624986" cy="27432"/>
-          </a:xfrm>
-          <a:prstGeom prst="rect">
-            <a:avLst/>
-          </a:prstGeom>
-          <a:solidFill>
-            <a:srgbClr val="FFD000"/>
-          </a:solidFill>
-          <a:ln>
-            <a:noFill/>
-          </a:ln>
-        </p:spPr>
-        <p:style>
-          <a:lnRef idx="1">
-            <a:schemeClr val="accent1"/>
-          </a:lnRef>
-          <a:fillRef idx="3">
-            <a:schemeClr val="accent1"/>
-          </a:fillRef>
-          <a:effectRef idx="2">
-            <a:schemeClr val="accent1"/>
-          </a:effectRef>
-          <a:fontRef idx="minor">
-            <a:schemeClr val="lt1"/>
-          </a:fontRef>
-        </p:style>
-        <p:txBody>
-          <a:bodyPr rtlCol="0" anchor="ctr"/>
-          <a:lstStyle/>
-          <a:p>
-            <a:pPr algn="ctr"/>
-          </a:p>
-        </p:txBody>
-      </p:sp>
-      <p:pic>
-        <p:nvPicPr>
-          <p:cNvPr id="19" name="Picture 18" descr="oracle_livesql.png"/>
-          <p:cNvPicPr>
-            <a:picLocks noChangeAspect="1"/>
-          </p:cNvPicPr>
-          <p:nvPr/>
-        </p:nvPicPr>
-        <p:blipFill>
-          <a:blip r:embed="rId4"/>
-          <a:stretch>
-            <a:fillRect/>
-          </a:stretch>
-        </p:blipFill>
-        <p:spPr>
-          <a:xfrm>
-            <a:off x="9295638" y="1847087"/>
-            <a:ext cx="1252728" cy="1252728"/>
-          </a:xfrm>
-          <a:prstGeom prst="rect">
-            <a:avLst/>
-          </a:prstGeom>
-        </p:spPr>
-      </p:pic>
-      <p:sp>
-        <p:nvSpPr>
-          <p:cNvPr id="20" name="TextBox 19"/>
-          <p:cNvSpPr txBox="1"/>
-          <p:nvPr/>
-        </p:nvSpPr>
-        <p:spPr>
-          <a:xfrm>
-            <a:off x="8182660" y="3191256"/>
-            <a:ext cx="3478682" cy="621792"/>
-          </a:xfrm>
-          <a:prstGeom prst="rect">
-            <a:avLst/>
-          </a:prstGeom>
-          <a:noFill/>
-        </p:spPr>
-        <p:txBody>
-          <a:bodyPr wrap="square" anchor="t"/>
-          <a:lstStyle/>
-          <a:p>
-            <a:pPr algn="ctr"/>
-            <a:r>
-              <a:rPr sz="1300" b="1" i="0">
-                <a:solidFill>
-                  <a:srgbClr val="095292"/>
-                </a:solidFill>
-                <a:latin typeface="Calibri"/>
-              </a:rPr>
-              <a:t>Oracle Live SQL</a:t>
-            </a:r>
-          </a:p>
-          <a:p>
-            <a:pPr algn="ctr">
-              <a:spcBef>
-                <a:spcPts val="200"/>
-              </a:spcBef>
+              <a:rPr sz="2000" b="0" i="0">
+                <a:solidFill>
+                  <a:srgbClr val="333333"/>
+                </a:solidFill>
+                <a:latin typeface="Calibri"/>
+              </a:rPr>
+              <a:t>–   Y va el recordatorio de pesos: estos 100 puntos valen 20% del Corte 3, el Parcial 3 de la Clase 14 (virtual sincrono por Meet y escrito, el 9 de noviembre) vale 15%, y la asistencia 5%.</a:t>
+            </a:r>
+          </a:p>
+          <a:p>
+            <a:pPr>
+              <a:spcAft>
+                <a:spcPts val="800"/>
+              </a:spcAft>
             </a:pPr>
             <a:r>
-              <a:rPr sz="1000" b="0" i="0">
-                <a:solidFill>
-                  <a:srgbClr val="666666"/>
-                </a:solidFill>
-                <a:latin typeface="Calibri"/>
-              </a:rPr>
-              <a:t>Demo SQL</a:t>
-            </a:r>
-          </a:p>
-        </p:txBody>
-      </p:sp>
-      <p:sp>
-        <p:nvSpPr>
-          <p:cNvPr id="21" name="TextBox 20"/>
+              <a:rPr sz="2000" b="0" i="0">
+                <a:solidFill>
+                  <a:srgbClr val="333333"/>
+                </a:solidFill>
+                <a:latin typeface="Calibri"/>
+              </a:rPr>
+              <a:t>–   El proyecto no reemplaza ni compensa el parcial: son dos evaluaciones distintas del mismo corte, y confundirlas produce reclamos que se evitan diciendolo una sola vez, hoy, con los numeros a la vista.</a:t>
+            </a:r>
+          </a:p>
+        </p:txBody>
+      </p:sp>
+      <p:sp>
+        <p:nvSpPr>
+          <p:cNvPr id="6" name="TextBox 5"/>
           <p:cNvSpPr txBox="1"/>
           <p:nvPr/>
         </p:nvSpPr>
@@ -7502,7 +6675,7 @@
                 </a:solidFill>
                 <a:latin typeface="Calibri"/>
               </a:rPr>
-              <a:t>Sustentacion del PI — contexto / por que importa</a:t>
+              <a:t>El cierre del curso: conectar lo hecho con el trabajo real</a:t>
             </a:r>
           </a:p>
         </p:txBody>
@@ -7541,25 +6714,7 @@
                 </a:solidFill>
                 <a:latin typeface="Calibri"/>
               </a:rPr>
-              <a:t>–   </a:t>
-            </a:r>
-            <a:r>
-              <a:rPr sz="2000" b="1" i="0">
-                <a:solidFill>
-                  <a:srgbClr val="333333"/>
-                </a:solidFill>
-                <a:latin typeface="Calibri"/>
-              </a:rPr>
-              <a:t>Por qué importa al PI:</a:t>
-            </a:r>
-            <a:r>
-              <a:rPr sz="2000" b="0" i="0">
-                <a:solidFill>
-                  <a:srgbClr val="333333"/>
-                </a:solidFill>
-                <a:latin typeface="Calibri"/>
-              </a:rPr>
-              <a:t> cierre segun rúbrica 20% Corte 3.</a:t>
+              <a:t>–   El cierre del curso debe conectar lo hecho con el trabajo real, porque de eso depende que el estudiante conserve los scripts en vez de borrarlos al terminar el semestre.</a:t>
             </a:r>
           </a:p>
           <a:p>
@@ -7575,7 +6730,39 @@
                 </a:solidFill>
                 <a:latin typeface="Calibri"/>
               </a:rPr>
-              <a:t>–   No confundir con Parcial 3 (Clase 14).</a:t>
+              <a:t>–   Leer un plan de ejecucion y decidir si un indice sobra es una habilidad que se paga.</a:t>
+            </a:r>
+          </a:p>
+          <a:p>
+            <a:pPr>
+              <a:spcAft>
+                <a:spcPts val="800"/>
+              </a:spcAft>
+            </a:pPr>
+            <a:r>
+              <a:rPr sz="2000" b="0" i="0">
+                <a:solidFill>
+                  <a:srgbClr val="333333"/>
+                </a:solidFill>
+                <a:latin typeface="Calibri"/>
+              </a:rPr>
+              <a:t>–   El SQL que se escribio ahi es el mismo que corre en un servidor de produccion; lo que cambia en un entorno profesional es el volumen de datos y las consecuencias de un error, no la sintaxis.</a:t>
+            </a:r>
+          </a:p>
+          <a:p>
+            <a:pPr>
+              <a:spcAft>
+                <a:spcPts val="800"/>
+              </a:spcAft>
+            </a:pPr>
+            <a:r>
+              <a:rPr sz="2000" b="0" i="0">
+                <a:solidFill>
+                  <a:srgbClr val="333333"/>
+                </a:solidFill>
+                <a:latin typeface="Calibri"/>
+              </a:rPr>
+              <a:t>–   Y la autoevaluacion del taller conviene pedirla con una consigna concreta en vez de una reflexion vaga: nombren la decision de modelado que mas les costo revertir y en que clase se dieron cuenta de que estaba mal.</a:t>
             </a:r>
           </a:p>
         </p:txBody>
@@ -7756,7 +6943,7 @@
                 </a:solidFill>
                 <a:latin typeface="Calibri"/>
               </a:rPr>
-              <a:t>Sustentacion del PI — objetivo y criterios</a:t>
+              <a:t>Como se ordena la sesion de hoy</a:t>
             </a:r>
           </a:p>
         </p:txBody>
@@ -7795,7 +6982,7 @@
                 </a:solidFill>
                 <a:latin typeface="Calibri"/>
               </a:rPr>
-              <a:t>–   </a:t>
+              <a:t>–   Sustentación </a:t>
             </a:r>
             <a:r>
               <a:rPr sz="2000" b="1" i="0">
@@ -7804,7 +6991,7 @@
                 </a:solidFill>
                 <a:latin typeface="Calibri"/>
               </a:rPr>
-              <a:t>Objetivo:</a:t>
+              <a:t>en vivo</a:t>
             </a:r>
             <a:r>
               <a:rPr sz="2000" b="0" i="0">
@@ -7813,7 +7000,7 @@
                 </a:solidFill>
                 <a:latin typeface="Calibri"/>
               </a:rPr>
-              <a:t> Paquete final entregado + sustentacion en vivo de 5-8 min con Q&amp;A.</a:t>
+              <a:t>, en este bloque: no se reemplaza por video grabado.</a:t>
             </a:r>
           </a:p>
           <a:p>
@@ -7829,7 +7016,7 @@
                 </a:solidFill>
                 <a:latin typeface="Calibri"/>
               </a:rPr>
-              <a:t>–   </a:t>
+              <a:t>–   Turnos de </a:t>
             </a:r>
             <a:r>
               <a:rPr sz="2000" b="1" i="0">
@@ -7838,7 +7025,7 @@
                 </a:solidFill>
                 <a:latin typeface="Calibri"/>
               </a:rPr>
-              <a:t>Exito:</a:t>
+              <a:t>5–8 min de pitch + Q&amp;A</a:t>
             </a:r>
             <a:r>
               <a:rPr sz="2000" b="0" i="0">
@@ -7847,7 +7034,7 @@
                 </a:solidFill>
                 <a:latin typeface="Calibri"/>
               </a:rPr>
-              <a:t> ZIP/PDF en la plataforma del curso ANTES del turno.</a:t>
+              <a:t>; el orden se sortea al empezar.</a:t>
             </a:r>
           </a:p>
           <a:p>
@@ -7863,7 +7050,7 @@
                 </a:solidFill>
                 <a:latin typeface="Calibri"/>
               </a:rPr>
-              <a:t>–   </a:t>
+              <a:t>–   Ten listo: </a:t>
             </a:r>
             <a:r>
               <a:rPr sz="2000" b="1" i="0">
@@ -7872,16 +7059,7 @@
                 </a:solidFill>
                 <a:latin typeface="Calibri"/>
               </a:rPr>
-              <a:t>Exito:</a:t>
-            </a:r>
-            <a:r>
-              <a:rPr sz="2000" b="0" i="0">
-                <a:solidFill>
-                  <a:srgbClr val="333333"/>
-                </a:solidFill>
-                <a:latin typeface="Calibri"/>
-              </a:rPr>
-              <a:t> Sustentacion en vivo de 5-8 min.</a:t>
+              <a:t>ZIP/PDF final subido antes del turno + sustentacion en vivo 5-8 min + Q&amp;A</a:t>
             </a:r>
           </a:p>
           <a:p>
@@ -7897,7 +7075,7 @@
                 </a:solidFill>
                 <a:latin typeface="Calibri"/>
               </a:rPr>
-              <a:t>–   </a:t>
+              <a:t>–   En tu turno muestra una </a:t>
             </a:r>
             <a:r>
               <a:rPr sz="2000" b="1" i="0">
@@ -7906,7 +7084,7 @@
                 </a:solidFill>
                 <a:latin typeface="Calibri"/>
               </a:rPr>
-              <a:t>Exito:</a:t>
+              <a:t>ejecución real</a:t>
             </a:r>
             <a:r>
               <a:rPr sz="2000" b="0" i="0">
@@ -7915,7 +7093,7 @@
                 </a:solidFill>
                 <a:latin typeface="Calibri"/>
               </a:rPr>
-              <a:t> Q&amp;A respondido en vivo (preguntas al azar).</a:t>
+              <a:t> (procedimiento OK + caso rechazado), no solo capturas.</a:t>
             </a:r>
           </a:p>
           <a:p>
@@ -7931,59 +7109,7 @@
                 </a:solidFill>
                 <a:latin typeface="Calibri"/>
               </a:rPr>
-              <a:t>–   </a:t>
-            </a:r>
-            <a:r>
-              <a:rPr sz="2000" b="1" i="0">
-                <a:solidFill>
-                  <a:srgbClr val="333333"/>
-                </a:solidFill>
-                <a:latin typeface="Calibri"/>
-              </a:rPr>
-              <a:t>Exito:</a:t>
-            </a:r>
-            <a:r>
-              <a:rPr sz="2000" b="0" i="0">
-                <a:solidFill>
-                  <a:srgbClr val="333333"/>
-                </a:solidFill>
-                <a:latin typeface="Calibri"/>
-              </a:rPr>
-              <a:t> Autoevaluacion.</a:t>
-            </a:r>
-          </a:p>
-          <a:p>
-            <a:pPr>
-              <a:spcAft>
-                <a:spcPts val="800"/>
-              </a:spcAft>
-            </a:pPr>
-            <a:r>
-              <a:rPr sz="2000" b="0" i="0">
-                <a:solidFill>
-                  <a:srgbClr val="333333"/>
-                </a:solidFill>
-                <a:latin typeface="Calibri"/>
-              </a:rPr>
-              <a:t>–   </a:t>
-            </a:r>
-            <a:r>
-              <a:rPr sz="2000" b="1" i="0">
-                <a:solidFill>
-                  <a:srgbClr val="333333"/>
-                </a:solidFill>
-                <a:latin typeface="Calibri"/>
-              </a:rPr>
-              <a:t>Exito:</a:t>
-            </a:r>
-            <a:r>
-              <a:rPr sz="2000" b="0" i="0">
-                <a:solidFill>
-                  <a:srgbClr val="333333"/>
-                </a:solidFill>
-                <a:latin typeface="Calibri"/>
-              </a:rPr>
-              <a:t> Cierre.</a:t>
+              <a:t>–   Mientras otros presentan, escuchas: el cierre del curso se hace con todo el grupo.</a:t>
             </a:r>
           </a:p>
         </p:txBody>
@@ -8058,7 +7184,7 @@
         <p:spPr>
           <a:xfrm>
             <a:off x="0" y="0"/>
-            <a:ext cx="12191695" cy="960120"/>
+            <a:ext cx="12191695" cy="1170432"/>
           </a:xfrm>
           <a:prstGeom prst="rect">
             <a:avLst/>
@@ -8100,7 +7226,7 @@
         </p:nvSpPr>
         <p:spPr>
           <a:xfrm>
-            <a:off x="0" y="960120"/>
+            <a:off x="0" y="1170432"/>
             <a:ext cx="12191695" cy="41148"/>
           </a:xfrm>
           <a:prstGeom prst="rect">
@@ -8144,7 +7270,7 @@
         <p:spPr>
           <a:xfrm>
             <a:off x="457200" y="164592"/>
-            <a:ext cx="11277295" cy="502920"/>
+            <a:ext cx="11277295" cy="384048"/>
           </a:xfrm>
           <a:prstGeom prst="rect">
             <a:avLst/>
@@ -8164,7 +7290,7 @@
                 </a:solidFill>
                 <a:latin typeface="Calibri"/>
               </a:rPr>
-              <a:t>Sustentacion del PI — escenario / datos de partida</a:t>
+              <a:t>Herramientas de hoy</a:t>
             </a:r>
           </a:p>
         </p:txBody>
@@ -8177,8 +7303,8 @@
         </p:nvSpPr>
         <p:spPr>
           <a:xfrm>
-            <a:off x="457200" y="1170432"/>
-            <a:ext cx="11277295" cy="5230368"/>
+            <a:off x="457200" y="566928"/>
+            <a:ext cx="11277295" cy="411480"/>
           </a:xfrm>
           <a:prstGeom prst="rect">
             <a:avLst/>
@@ -8191,42 +7317,633 @@
           </a:bodyPr>
           <a:lstStyle/>
           <a:p>
-            <a:pPr>
-              <a:spcAft>
-                <a:spcPts val="800"/>
-              </a:spcAft>
+            <a:r>
+              <a:rPr sz="1400" b="0" i="0">
+                <a:solidFill>
+                  <a:srgbClr val="B8D8EE"/>
+                </a:solidFill>
+                <a:latin typeface="Calibri"/>
+              </a:rPr>
+              <a:t>Gratis · navegador o free tier</a:t>
+            </a:r>
+          </a:p>
+        </p:txBody>
+      </p:sp>
+      <p:sp>
+        <p:nvSpPr>
+          <p:cNvPr id="6" name="Rounded Rectangle 5"/>
+          <p:cNvSpPr/>
+          <p:nvPr/>
+        </p:nvSpPr>
+        <p:spPr>
+          <a:xfrm>
+            <a:off x="457200" y="1591056"/>
+            <a:ext cx="3624986" cy="2331720"/>
+          </a:xfrm>
+          <a:prstGeom prst="roundRect">
+            <a:avLst>
+              <a:gd name="adj" fmla="val 12000"/>
+            </a:avLst>
+          </a:prstGeom>
+          <a:solidFill>
+            <a:srgbClr val="F2F2F2"/>
+          </a:solidFill>
+          <a:ln>
+            <a:noFill/>
+          </a:ln>
+        </p:spPr>
+        <p:style>
+          <a:lnRef idx="1">
+            <a:schemeClr val="accent1"/>
+          </a:lnRef>
+          <a:fillRef idx="3">
+            <a:schemeClr val="accent1"/>
+          </a:fillRef>
+          <a:effectRef idx="2">
+            <a:schemeClr val="accent1"/>
+          </a:effectRef>
+          <a:fontRef idx="minor">
+            <a:schemeClr val="lt1"/>
+          </a:fontRef>
+        </p:style>
+        <p:txBody>
+          <a:bodyPr rtlCol="0" anchor="ctr"/>
+          <a:lstStyle/>
+          <a:p>
+            <a:pPr algn="ctr"/>
+          </a:p>
+        </p:txBody>
+      </p:sp>
+      <p:sp>
+        <p:nvSpPr>
+          <p:cNvPr id="7" name="Rectangle 6"/>
+          <p:cNvSpPr/>
+          <p:nvPr/>
+        </p:nvSpPr>
+        <p:spPr>
+          <a:xfrm>
+            <a:off x="457200" y="1591056"/>
+            <a:ext cx="3624986" cy="64008"/>
+          </a:xfrm>
+          <a:prstGeom prst="rect">
+            <a:avLst/>
+          </a:prstGeom>
+          <a:solidFill>
+            <a:srgbClr val="095292"/>
+          </a:solidFill>
+          <a:ln>
+            <a:noFill/>
+          </a:ln>
+        </p:spPr>
+        <p:style>
+          <a:lnRef idx="1">
+            <a:schemeClr val="accent1"/>
+          </a:lnRef>
+          <a:fillRef idx="3">
+            <a:schemeClr val="accent1"/>
+          </a:fillRef>
+          <a:effectRef idx="2">
+            <a:schemeClr val="accent1"/>
+          </a:effectRef>
+          <a:fontRef idx="minor">
+            <a:schemeClr val="lt1"/>
+          </a:fontRef>
+        </p:style>
+        <p:txBody>
+          <a:bodyPr rtlCol="0" anchor="ctr"/>
+          <a:lstStyle/>
+          <a:p>
+            <a:pPr algn="ctr"/>
+          </a:p>
+        </p:txBody>
+      </p:sp>
+      <p:sp>
+        <p:nvSpPr>
+          <p:cNvPr id="8" name="Rectangle 7"/>
+          <p:cNvSpPr/>
+          <p:nvPr/>
+        </p:nvSpPr>
+        <p:spPr>
+          <a:xfrm>
+            <a:off x="457200" y="1655064"/>
+            <a:ext cx="3624986" cy="27432"/>
+          </a:xfrm>
+          <a:prstGeom prst="rect">
+            <a:avLst/>
+          </a:prstGeom>
+          <a:solidFill>
+            <a:srgbClr val="FFD000"/>
+          </a:solidFill>
+          <a:ln>
+            <a:noFill/>
+          </a:ln>
+        </p:spPr>
+        <p:style>
+          <a:lnRef idx="1">
+            <a:schemeClr val="accent1"/>
+          </a:lnRef>
+          <a:fillRef idx="3">
+            <a:schemeClr val="accent1"/>
+          </a:fillRef>
+          <a:effectRef idx="2">
+            <a:schemeClr val="accent1"/>
+          </a:effectRef>
+          <a:fontRef idx="minor">
+            <a:schemeClr val="lt1"/>
+          </a:fontRef>
+        </p:style>
+        <p:txBody>
+          <a:bodyPr rtlCol="0" anchor="ctr"/>
+          <a:lstStyle/>
+          <a:p>
+            <a:pPr algn="ctr"/>
+          </a:p>
+        </p:txBody>
+      </p:sp>
+      <p:pic>
+        <p:nvPicPr>
+          <p:cNvPr id="9" name="Picture 8" descr="google_docs.png"/>
+          <p:cNvPicPr>
+            <a:picLocks noChangeAspect="1"/>
+          </p:cNvPicPr>
+          <p:nvPr/>
+        </p:nvPicPr>
+        <p:blipFill>
+          <a:blip r:embed="rId2"/>
+          <a:stretch>
+            <a:fillRect/>
+          </a:stretch>
+        </p:blipFill>
+        <p:spPr>
+          <a:xfrm>
+            <a:off x="1643329" y="1847087"/>
+            <a:ext cx="1252728" cy="1252728"/>
+          </a:xfrm>
+          <a:prstGeom prst="rect">
+            <a:avLst/>
+          </a:prstGeom>
+        </p:spPr>
+      </p:pic>
+      <p:sp>
+        <p:nvSpPr>
+          <p:cNvPr id="10" name="TextBox 9"/>
+          <p:cNvSpPr txBox="1"/>
+          <p:nvPr/>
+        </p:nvSpPr>
+        <p:spPr>
+          <a:xfrm>
+            <a:off x="530352" y="3191256"/>
+            <a:ext cx="3478682" cy="621792"/>
+          </a:xfrm>
+          <a:prstGeom prst="rect">
+            <a:avLst/>
+          </a:prstGeom>
+          <a:noFill/>
+        </p:spPr>
+        <p:txBody>
+          <a:bodyPr wrap="square" anchor="t"/>
+          <a:lstStyle/>
+          <a:p>
+            <a:pPr algn="ctr"/>
+            <a:r>
+              <a:rPr sz="1300" b="1" i="0">
+                <a:solidFill>
+                  <a:srgbClr val="095292"/>
+                </a:solidFill>
+                <a:latin typeface="Calibri"/>
+              </a:rPr>
+              <a:t>Google Docs</a:t>
+            </a:r>
+          </a:p>
+          <a:p>
+            <a:pPr algn="ctr">
+              <a:spcBef>
+                <a:spcPts val="200"/>
+              </a:spcBef>
             </a:pPr>
             <a:r>
-              <a:rPr sz="2000" b="0" i="0">
-                <a:solidFill>
-                  <a:srgbClr val="333333"/>
-                </a:solidFill>
-                <a:latin typeface="Calibri"/>
-              </a:rPr>
-              <a:t>–   Checklist empaquetado del enunciado PI.</a:t>
-            </a:r>
-          </a:p>
-          <a:p>
-            <a:pPr>
-              <a:spcAft>
-                <a:spcPts val="800"/>
-              </a:spcAft>
+              <a:rPr sz="1000" b="0" i="0">
+                <a:solidFill>
+                  <a:srgbClr val="666666"/>
+                </a:solidFill>
+                <a:latin typeface="Calibri"/>
+              </a:rPr>
+              <a:t>Informe final</a:t>
+            </a:r>
+          </a:p>
+        </p:txBody>
+      </p:sp>
+      <p:sp>
+        <p:nvSpPr>
+          <p:cNvPr id="11" name="Rounded Rectangle 10"/>
+          <p:cNvSpPr/>
+          <p:nvPr/>
+        </p:nvSpPr>
+        <p:spPr>
+          <a:xfrm>
+            <a:off x="4283354" y="1591056"/>
+            <a:ext cx="3624986" cy="2331720"/>
+          </a:xfrm>
+          <a:prstGeom prst="roundRect">
+            <a:avLst>
+              <a:gd name="adj" fmla="val 12000"/>
+            </a:avLst>
+          </a:prstGeom>
+          <a:solidFill>
+            <a:srgbClr val="F2F2F2"/>
+          </a:solidFill>
+          <a:ln>
+            <a:noFill/>
+          </a:ln>
+        </p:spPr>
+        <p:style>
+          <a:lnRef idx="1">
+            <a:schemeClr val="accent1"/>
+          </a:lnRef>
+          <a:fillRef idx="3">
+            <a:schemeClr val="accent1"/>
+          </a:fillRef>
+          <a:effectRef idx="2">
+            <a:schemeClr val="accent1"/>
+          </a:effectRef>
+          <a:fontRef idx="minor">
+            <a:schemeClr val="lt1"/>
+          </a:fontRef>
+        </p:style>
+        <p:txBody>
+          <a:bodyPr rtlCol="0" anchor="ctr"/>
+          <a:lstStyle/>
+          <a:p>
+            <a:pPr algn="ctr"/>
+          </a:p>
+        </p:txBody>
+      </p:sp>
+      <p:sp>
+        <p:nvSpPr>
+          <p:cNvPr id="12" name="Rectangle 11"/>
+          <p:cNvSpPr/>
+          <p:nvPr/>
+        </p:nvSpPr>
+        <p:spPr>
+          <a:xfrm>
+            <a:off x="4283354" y="1591056"/>
+            <a:ext cx="3624986" cy="64008"/>
+          </a:xfrm>
+          <a:prstGeom prst="rect">
+            <a:avLst/>
+          </a:prstGeom>
+          <a:solidFill>
+            <a:srgbClr val="095292"/>
+          </a:solidFill>
+          <a:ln>
+            <a:noFill/>
+          </a:ln>
+        </p:spPr>
+        <p:style>
+          <a:lnRef idx="1">
+            <a:schemeClr val="accent1"/>
+          </a:lnRef>
+          <a:fillRef idx="3">
+            <a:schemeClr val="accent1"/>
+          </a:fillRef>
+          <a:effectRef idx="2">
+            <a:schemeClr val="accent1"/>
+          </a:effectRef>
+          <a:fontRef idx="minor">
+            <a:schemeClr val="lt1"/>
+          </a:fontRef>
+        </p:style>
+        <p:txBody>
+          <a:bodyPr rtlCol="0" anchor="ctr"/>
+          <a:lstStyle/>
+          <a:p>
+            <a:pPr algn="ctr"/>
+          </a:p>
+        </p:txBody>
+      </p:sp>
+      <p:sp>
+        <p:nvSpPr>
+          <p:cNvPr id="13" name="Rectangle 12"/>
+          <p:cNvSpPr/>
+          <p:nvPr/>
+        </p:nvSpPr>
+        <p:spPr>
+          <a:xfrm>
+            <a:off x="4283354" y="1655064"/>
+            <a:ext cx="3624986" cy="27432"/>
+          </a:xfrm>
+          <a:prstGeom prst="rect">
+            <a:avLst/>
+          </a:prstGeom>
+          <a:solidFill>
+            <a:srgbClr val="FFD000"/>
+          </a:solidFill>
+          <a:ln>
+            <a:noFill/>
+          </a:ln>
+        </p:spPr>
+        <p:style>
+          <a:lnRef idx="1">
+            <a:schemeClr val="accent1"/>
+          </a:lnRef>
+          <a:fillRef idx="3">
+            <a:schemeClr val="accent1"/>
+          </a:fillRef>
+          <a:effectRef idx="2">
+            <a:schemeClr val="accent1"/>
+          </a:effectRef>
+          <a:fontRef idx="minor">
+            <a:schemeClr val="lt1"/>
+          </a:fontRef>
+        </p:style>
+        <p:txBody>
+          <a:bodyPr rtlCol="0" anchor="ctr"/>
+          <a:lstStyle/>
+          <a:p>
+            <a:pPr algn="ctr"/>
+          </a:p>
+        </p:txBody>
+      </p:sp>
+      <p:pic>
+        <p:nvPicPr>
+          <p:cNvPr id="14" name="Picture 13" descr="drawio.png"/>
+          <p:cNvPicPr>
+            <a:picLocks noChangeAspect="1"/>
+          </p:cNvPicPr>
+          <p:nvPr/>
+        </p:nvPicPr>
+        <p:blipFill>
+          <a:blip r:embed="rId3"/>
+          <a:stretch>
+            <a:fillRect/>
+          </a:stretch>
+        </p:blipFill>
+        <p:spPr>
+          <a:xfrm>
+            <a:off x="5469483" y="1847087"/>
+            <a:ext cx="1252728" cy="1252728"/>
+          </a:xfrm>
+          <a:prstGeom prst="rect">
+            <a:avLst/>
+          </a:prstGeom>
+        </p:spPr>
+      </p:pic>
+      <p:sp>
+        <p:nvSpPr>
+          <p:cNvPr id="15" name="TextBox 14"/>
+          <p:cNvSpPr txBox="1"/>
+          <p:nvPr/>
+        </p:nvSpPr>
+        <p:spPr>
+          <a:xfrm>
+            <a:off x="4356506" y="3191256"/>
+            <a:ext cx="3478682" cy="621792"/>
+          </a:xfrm>
+          <a:prstGeom prst="rect">
+            <a:avLst/>
+          </a:prstGeom>
+          <a:noFill/>
+        </p:spPr>
+        <p:txBody>
+          <a:bodyPr wrap="square" anchor="t"/>
+          <a:lstStyle/>
+          <a:p>
+            <a:pPr algn="ctr"/>
+            <a:r>
+              <a:rPr sz="1300" b="1" i="0">
+                <a:solidFill>
+                  <a:srgbClr val="095292"/>
+                </a:solidFill>
+                <a:latin typeface="Calibri"/>
+              </a:rPr>
+              <a:t>draw.io</a:t>
+            </a:r>
+          </a:p>
+          <a:p>
+            <a:pPr algn="ctr">
+              <a:spcBef>
+                <a:spcPts val="200"/>
+              </a:spcBef>
             </a:pPr>
             <a:r>
-              <a:rPr sz="2000" b="0" i="0">
-                <a:solidFill>
-                  <a:srgbClr val="333333"/>
-                </a:solidFill>
-                <a:latin typeface="Calibri"/>
-              </a:rPr>
-              <a:t>–   Turnos consecutivos en el bloque; el orden se sortea al abrir la sesion.</a:t>
-            </a:r>
-          </a:p>
-        </p:txBody>
-      </p:sp>
-      <p:sp>
-        <p:nvSpPr>
-          <p:cNvPr id="6" name="TextBox 5"/>
+              <a:rPr sz="1000" b="0" i="0">
+                <a:solidFill>
+                  <a:srgbClr val="666666"/>
+                </a:solidFill>
+                <a:latin typeface="Calibri"/>
+              </a:rPr>
+              <a:t>ER final</a:t>
+            </a:r>
+          </a:p>
+        </p:txBody>
+      </p:sp>
+      <p:sp>
+        <p:nvSpPr>
+          <p:cNvPr id="16" name="Rounded Rectangle 15"/>
+          <p:cNvSpPr/>
+          <p:nvPr/>
+        </p:nvSpPr>
+        <p:spPr>
+          <a:xfrm>
+            <a:off x="8109508" y="1591056"/>
+            <a:ext cx="3624986" cy="2331720"/>
+          </a:xfrm>
+          <a:prstGeom prst="roundRect">
+            <a:avLst>
+              <a:gd name="adj" fmla="val 12000"/>
+            </a:avLst>
+          </a:prstGeom>
+          <a:solidFill>
+            <a:srgbClr val="F2F2F2"/>
+          </a:solidFill>
+          <a:ln>
+            <a:noFill/>
+          </a:ln>
+        </p:spPr>
+        <p:style>
+          <a:lnRef idx="1">
+            <a:schemeClr val="accent1"/>
+          </a:lnRef>
+          <a:fillRef idx="3">
+            <a:schemeClr val="accent1"/>
+          </a:fillRef>
+          <a:effectRef idx="2">
+            <a:schemeClr val="accent1"/>
+          </a:effectRef>
+          <a:fontRef idx="minor">
+            <a:schemeClr val="lt1"/>
+          </a:fontRef>
+        </p:style>
+        <p:txBody>
+          <a:bodyPr rtlCol="0" anchor="ctr"/>
+          <a:lstStyle/>
+          <a:p>
+            <a:pPr algn="ctr"/>
+          </a:p>
+        </p:txBody>
+      </p:sp>
+      <p:sp>
+        <p:nvSpPr>
+          <p:cNvPr id="17" name="Rectangle 16"/>
+          <p:cNvSpPr/>
+          <p:nvPr/>
+        </p:nvSpPr>
+        <p:spPr>
+          <a:xfrm>
+            <a:off x="8109508" y="1591056"/>
+            <a:ext cx="3624986" cy="64008"/>
+          </a:xfrm>
+          <a:prstGeom prst="rect">
+            <a:avLst/>
+          </a:prstGeom>
+          <a:solidFill>
+            <a:srgbClr val="095292"/>
+          </a:solidFill>
+          <a:ln>
+            <a:noFill/>
+          </a:ln>
+        </p:spPr>
+        <p:style>
+          <a:lnRef idx="1">
+            <a:schemeClr val="accent1"/>
+          </a:lnRef>
+          <a:fillRef idx="3">
+            <a:schemeClr val="accent1"/>
+          </a:fillRef>
+          <a:effectRef idx="2">
+            <a:schemeClr val="accent1"/>
+          </a:effectRef>
+          <a:fontRef idx="minor">
+            <a:schemeClr val="lt1"/>
+          </a:fontRef>
+        </p:style>
+        <p:txBody>
+          <a:bodyPr rtlCol="0" anchor="ctr"/>
+          <a:lstStyle/>
+          <a:p>
+            <a:pPr algn="ctr"/>
+          </a:p>
+        </p:txBody>
+      </p:sp>
+      <p:sp>
+        <p:nvSpPr>
+          <p:cNvPr id="18" name="Rectangle 17"/>
+          <p:cNvSpPr/>
+          <p:nvPr/>
+        </p:nvSpPr>
+        <p:spPr>
+          <a:xfrm>
+            <a:off x="8109508" y="1655064"/>
+            <a:ext cx="3624986" cy="27432"/>
+          </a:xfrm>
+          <a:prstGeom prst="rect">
+            <a:avLst/>
+          </a:prstGeom>
+          <a:solidFill>
+            <a:srgbClr val="FFD000"/>
+          </a:solidFill>
+          <a:ln>
+            <a:noFill/>
+          </a:ln>
+        </p:spPr>
+        <p:style>
+          <a:lnRef idx="1">
+            <a:schemeClr val="accent1"/>
+          </a:lnRef>
+          <a:fillRef idx="3">
+            <a:schemeClr val="accent1"/>
+          </a:fillRef>
+          <a:effectRef idx="2">
+            <a:schemeClr val="accent1"/>
+          </a:effectRef>
+          <a:fontRef idx="minor">
+            <a:schemeClr val="lt1"/>
+          </a:fontRef>
+        </p:style>
+        <p:txBody>
+          <a:bodyPr rtlCol="0" anchor="ctr"/>
+          <a:lstStyle/>
+          <a:p>
+            <a:pPr algn="ctr"/>
+          </a:p>
+        </p:txBody>
+      </p:sp>
+      <p:pic>
+        <p:nvPicPr>
+          <p:cNvPr id="19" name="Picture 18" descr="oracle_livesql.png"/>
+          <p:cNvPicPr>
+            <a:picLocks noChangeAspect="1"/>
+          </p:cNvPicPr>
+          <p:nvPr/>
+        </p:nvPicPr>
+        <p:blipFill>
+          <a:blip r:embed="rId4"/>
+          <a:stretch>
+            <a:fillRect/>
+          </a:stretch>
+        </p:blipFill>
+        <p:spPr>
+          <a:xfrm>
+            <a:off x="9295638" y="1847087"/>
+            <a:ext cx="1252728" cy="1252728"/>
+          </a:xfrm>
+          <a:prstGeom prst="rect">
+            <a:avLst/>
+          </a:prstGeom>
+        </p:spPr>
+      </p:pic>
+      <p:sp>
+        <p:nvSpPr>
+          <p:cNvPr id="20" name="TextBox 19"/>
+          <p:cNvSpPr txBox="1"/>
+          <p:nvPr/>
+        </p:nvSpPr>
+        <p:spPr>
+          <a:xfrm>
+            <a:off x="8182660" y="3191256"/>
+            <a:ext cx="3478682" cy="621792"/>
+          </a:xfrm>
+          <a:prstGeom prst="rect">
+            <a:avLst/>
+          </a:prstGeom>
+          <a:noFill/>
+        </p:spPr>
+        <p:txBody>
+          <a:bodyPr wrap="square" anchor="t"/>
+          <a:lstStyle/>
+          <a:p>
+            <a:pPr algn="ctr"/>
+            <a:r>
+              <a:rPr sz="1300" b="1" i="0">
+                <a:solidFill>
+                  <a:srgbClr val="095292"/>
+                </a:solidFill>
+                <a:latin typeface="Calibri"/>
+              </a:rPr>
+              <a:t>Oracle Live SQL</a:t>
+            </a:r>
+          </a:p>
+          <a:p>
+            <a:pPr algn="ctr">
+              <a:spcBef>
+                <a:spcPts val="200"/>
+              </a:spcBef>
+            </a:pPr>
+            <a:r>
+              <a:rPr sz="1000" b="0" i="0">
+                <a:solidFill>
+                  <a:srgbClr val="666666"/>
+                </a:solidFill>
+                <a:latin typeface="Calibri"/>
+              </a:rPr>
+              <a:t>Demo SQL</a:t>
+            </a:r>
+          </a:p>
+        </p:txBody>
+      </p:sp>
+      <p:sp>
+        <p:nvSpPr>
+          <p:cNvPr id="21" name="TextBox 20"/>
           <p:cNvSpPr txBox="1"/>
           <p:nvPr/>
         </p:nvSpPr>
@@ -8400,111 +8117,21 @@
                 </a:solidFill>
                 <a:latin typeface="Calibri"/>
               </a:rPr>
-              <a:t>Sustentacion del PI — pasos guiados</a:t>
-            </a:r>
-          </a:p>
-        </p:txBody>
-      </p:sp>
-      <p:sp>
-        <p:nvSpPr>
-          <p:cNvPr id="5" name="Rounded Rectangle 4"/>
-          <p:cNvSpPr/>
-          <p:nvPr/>
-        </p:nvSpPr>
-        <p:spPr>
-          <a:xfrm>
-            <a:off x="457200" y="1234440"/>
-            <a:ext cx="11277295" cy="950976"/>
-          </a:xfrm>
-          <a:prstGeom prst="roundRect">
-            <a:avLst>
-              <a:gd name="adj" fmla="val 12000"/>
-            </a:avLst>
-          </a:prstGeom>
-          <a:solidFill>
-            <a:srgbClr val="F2F2F2"/>
-          </a:solidFill>
-          <a:ln>
-            <a:noFill/>
-          </a:ln>
-        </p:spPr>
-        <p:style>
-          <a:lnRef idx="1">
-            <a:schemeClr val="accent1"/>
-          </a:lnRef>
-          <a:fillRef idx="3">
-            <a:schemeClr val="accent1"/>
-          </a:fillRef>
-          <a:effectRef idx="2">
-            <a:schemeClr val="accent1"/>
-          </a:effectRef>
-          <a:fontRef idx="minor">
-            <a:schemeClr val="lt1"/>
-          </a:fontRef>
-        </p:style>
-        <p:txBody>
-          <a:bodyPr rtlCol="0" anchor="ctr"/>
-          <a:lstStyle/>
-          <a:p>
-            <a:pPr algn="ctr"/>
-          </a:p>
-        </p:txBody>
-      </p:sp>
-      <p:sp>
-        <p:nvSpPr>
-          <p:cNvPr id="6" name="Rounded Rectangle 5"/>
-          <p:cNvSpPr/>
-          <p:nvPr/>
-        </p:nvSpPr>
-        <p:spPr>
-          <a:xfrm>
-            <a:off x="594360" y="1490472"/>
-            <a:ext cx="438912" cy="438912"/>
-          </a:xfrm>
-          <a:prstGeom prst="roundRect">
-            <a:avLst>
-              <a:gd name="adj" fmla="val 12000"/>
-            </a:avLst>
-          </a:prstGeom>
-          <a:solidFill>
-            <a:srgbClr val="095292"/>
-          </a:solidFill>
-          <a:ln>
-            <a:noFill/>
-          </a:ln>
-        </p:spPr>
-        <p:style>
-          <a:lnRef idx="1">
-            <a:schemeClr val="accent1"/>
-          </a:lnRef>
-          <a:fillRef idx="3">
-            <a:schemeClr val="accent1"/>
-          </a:fillRef>
-          <a:effectRef idx="2">
-            <a:schemeClr val="accent1"/>
-          </a:effectRef>
-          <a:fontRef idx="minor">
-            <a:schemeClr val="lt1"/>
-          </a:fontRef>
-        </p:style>
-        <p:txBody>
-          <a:bodyPr rtlCol="0" anchor="ctr"/>
-          <a:lstStyle/>
-          <a:p>
-            <a:pPr algn="ctr"/>
-          </a:p>
-        </p:txBody>
-      </p:sp>
-      <p:sp>
-        <p:nvSpPr>
-          <p:cNvPr id="7" name="TextBox 6"/>
+              <a:t>Sustentacion del PI — contexto / por que importa</a:t>
+            </a:r>
+          </a:p>
+        </p:txBody>
+      </p:sp>
+      <p:sp>
+        <p:nvSpPr>
+          <p:cNvPr id="5" name="TextBox 4"/>
           <p:cNvSpPr txBox="1"/>
           <p:nvPr/>
         </p:nvSpPr>
         <p:spPr>
           <a:xfrm>
-            <a:off x="594360" y="1490472"/>
-            <a:ext cx="438912" cy="438912"/>
+            <a:off x="457200" y="1170432"/>
+            <a:ext cx="11277295" cy="5230368"/>
           </a:xfrm>
           <a:prstGeom prst="rect">
             <a:avLst/>
@@ -8512,677 +8139,65 @@
           <a:noFill/>
         </p:spPr>
         <p:txBody>
-          <a:bodyPr wrap="square" anchor="ctr"/>
-          <a:lstStyle/>
-          <a:p>
-            <a:pPr algn="ctr"/>
-            <a:r>
-              <a:rPr sz="1600" b="1" i="0">
-                <a:solidFill>
-                  <a:srgbClr val="FFFFFF"/>
-                </a:solidFill>
-                <a:latin typeface="Calibri"/>
-              </a:rPr>
-              <a:t>1</a:t>
-            </a:r>
-          </a:p>
-        </p:txBody>
-      </p:sp>
-      <p:sp>
-        <p:nvSpPr>
-          <p:cNvPr id="8" name="TextBox 7"/>
-          <p:cNvSpPr txBox="1"/>
-          <p:nvPr/>
-        </p:nvSpPr>
-        <p:spPr>
-          <a:xfrm>
-            <a:off x="1188720" y="1325880"/>
-            <a:ext cx="10271455" cy="786384"/>
-          </a:xfrm>
-          <a:prstGeom prst="rect">
-            <a:avLst/>
-          </a:prstGeom>
-          <a:noFill/>
-        </p:spPr>
-        <p:txBody>
-          <a:bodyPr wrap="square" anchor="ctr"/>
-          <a:lstStyle/>
-          <a:p>
-            <a:r>
-              <a:rPr sz="1500" b="1" i="0">
-                <a:solidFill>
-                  <a:srgbClr val="095292"/>
-                </a:solidFill>
-                <a:latin typeface="Calibri"/>
-              </a:rPr>
-              <a:t>Subir el paquete final a la plataforma del curso (modulo Proyectos) ANTES de su turno.</a:t>
-            </a:r>
-          </a:p>
-        </p:txBody>
-      </p:sp>
-      <p:sp>
-        <p:nvSpPr>
-          <p:cNvPr id="9" name="Rounded Rectangle 8"/>
-          <p:cNvSpPr/>
-          <p:nvPr/>
-        </p:nvSpPr>
-        <p:spPr>
-          <a:xfrm>
-            <a:off x="457200" y="2276856"/>
-            <a:ext cx="11277295" cy="950976"/>
-          </a:xfrm>
-          <a:prstGeom prst="roundRect">
-            <a:avLst>
-              <a:gd name="adj" fmla="val 12000"/>
-            </a:avLst>
-          </a:prstGeom>
-          <a:solidFill>
-            <a:srgbClr val="E8F4FA"/>
-          </a:solidFill>
-          <a:ln>
-            <a:noFill/>
-          </a:ln>
-        </p:spPr>
-        <p:style>
-          <a:lnRef idx="1">
-            <a:schemeClr val="accent1"/>
-          </a:lnRef>
-          <a:fillRef idx="3">
-            <a:schemeClr val="accent1"/>
-          </a:fillRef>
-          <a:effectRef idx="2">
-            <a:schemeClr val="accent1"/>
-          </a:effectRef>
-          <a:fontRef idx="minor">
-            <a:schemeClr val="lt1"/>
-          </a:fontRef>
-        </p:style>
-        <p:txBody>
-          <a:bodyPr rtlCol="0" anchor="ctr"/>
-          <a:lstStyle/>
-          <a:p>
-            <a:pPr algn="ctr"/>
-          </a:p>
-        </p:txBody>
-      </p:sp>
-      <p:sp>
-        <p:nvSpPr>
-          <p:cNvPr id="10" name="Rounded Rectangle 9"/>
-          <p:cNvSpPr/>
-          <p:nvPr/>
-        </p:nvSpPr>
-        <p:spPr>
-          <a:xfrm>
-            <a:off x="594360" y="2532888"/>
-            <a:ext cx="438912" cy="438912"/>
-          </a:xfrm>
-          <a:prstGeom prst="roundRect">
-            <a:avLst>
-              <a:gd name="adj" fmla="val 12000"/>
-            </a:avLst>
-          </a:prstGeom>
-          <a:solidFill>
-            <a:srgbClr val="095292"/>
-          </a:solidFill>
-          <a:ln>
-            <a:noFill/>
-          </a:ln>
-        </p:spPr>
-        <p:style>
-          <a:lnRef idx="1">
-            <a:schemeClr val="accent1"/>
-          </a:lnRef>
-          <a:fillRef idx="3">
-            <a:schemeClr val="accent1"/>
-          </a:fillRef>
-          <a:effectRef idx="2">
-            <a:schemeClr val="accent1"/>
-          </a:effectRef>
-          <a:fontRef idx="minor">
-            <a:schemeClr val="lt1"/>
-          </a:fontRef>
-        </p:style>
-        <p:txBody>
-          <a:bodyPr rtlCol="0" anchor="ctr"/>
-          <a:lstStyle/>
-          <a:p>
-            <a:pPr algn="ctr"/>
-          </a:p>
-        </p:txBody>
-      </p:sp>
-      <p:sp>
-        <p:nvSpPr>
-          <p:cNvPr id="11" name="TextBox 10"/>
-          <p:cNvSpPr txBox="1"/>
-          <p:nvPr/>
-        </p:nvSpPr>
-        <p:spPr>
-          <a:xfrm>
-            <a:off x="594360" y="2532888"/>
-            <a:ext cx="438912" cy="438912"/>
-          </a:xfrm>
-          <a:prstGeom prst="rect">
-            <a:avLst/>
-          </a:prstGeom>
-          <a:noFill/>
-        </p:spPr>
-        <p:txBody>
-          <a:bodyPr wrap="square" anchor="ctr"/>
-          <a:lstStyle/>
-          <a:p>
-            <a:pPr algn="ctr"/>
-            <a:r>
-              <a:rPr sz="1600" b="1" i="0">
-                <a:solidFill>
-                  <a:srgbClr val="FFFFFF"/>
-                </a:solidFill>
-                <a:latin typeface="Calibri"/>
-              </a:rPr>
-              <a:t>2</a:t>
-            </a:r>
-          </a:p>
-        </p:txBody>
-      </p:sp>
-      <p:sp>
-        <p:nvSpPr>
-          <p:cNvPr id="12" name="TextBox 11"/>
-          <p:cNvSpPr txBox="1"/>
-          <p:nvPr/>
-        </p:nvSpPr>
-        <p:spPr>
-          <a:xfrm>
-            <a:off x="1188720" y="2368296"/>
-            <a:ext cx="10271455" cy="786384"/>
-          </a:xfrm>
-          <a:prstGeom prst="rect">
-            <a:avLst/>
-          </a:prstGeom>
-          <a:noFill/>
-        </p:spPr>
-        <p:txBody>
-          <a:bodyPr wrap="square" anchor="ctr"/>
-          <a:lstStyle/>
-          <a:p>
-            <a:r>
-              <a:rPr sz="1500" b="1" i="0">
-                <a:solidFill>
-                  <a:srgbClr val="095292"/>
-                </a:solidFill>
-                <a:latin typeface="Calibri"/>
-              </a:rPr>
-              <a:t>Sustentar en vivo 5-8 min con el ER y una ejecucion real en pantalla.</a:t>
-            </a:r>
-          </a:p>
-        </p:txBody>
-      </p:sp>
-      <p:sp>
-        <p:nvSpPr>
-          <p:cNvPr id="13" name="Rounded Rectangle 12"/>
-          <p:cNvSpPr/>
-          <p:nvPr/>
-        </p:nvSpPr>
-        <p:spPr>
-          <a:xfrm>
-            <a:off x="457200" y="3319272"/>
-            <a:ext cx="11277295" cy="950976"/>
-          </a:xfrm>
-          <a:prstGeom prst="roundRect">
-            <a:avLst>
-              <a:gd name="adj" fmla="val 12000"/>
-            </a:avLst>
-          </a:prstGeom>
-          <a:solidFill>
-            <a:srgbClr val="F2F2F2"/>
-          </a:solidFill>
-          <a:ln>
-            <a:noFill/>
-          </a:ln>
-        </p:spPr>
-        <p:style>
-          <a:lnRef idx="1">
-            <a:schemeClr val="accent1"/>
-          </a:lnRef>
-          <a:fillRef idx="3">
-            <a:schemeClr val="accent1"/>
-          </a:fillRef>
-          <a:effectRef idx="2">
-            <a:schemeClr val="accent1"/>
-          </a:effectRef>
-          <a:fontRef idx="minor">
-            <a:schemeClr val="lt1"/>
-          </a:fontRef>
-        </p:style>
-        <p:txBody>
-          <a:bodyPr rtlCol="0" anchor="ctr"/>
-          <a:lstStyle/>
-          <a:p>
-            <a:pPr algn="ctr"/>
-          </a:p>
-        </p:txBody>
-      </p:sp>
-      <p:sp>
-        <p:nvSpPr>
-          <p:cNvPr id="14" name="Rounded Rectangle 13"/>
-          <p:cNvSpPr/>
-          <p:nvPr/>
-        </p:nvSpPr>
-        <p:spPr>
-          <a:xfrm>
-            <a:off x="594360" y="3575304"/>
-            <a:ext cx="438912" cy="438912"/>
-          </a:xfrm>
-          <a:prstGeom prst="roundRect">
-            <a:avLst>
-              <a:gd name="adj" fmla="val 12000"/>
-            </a:avLst>
-          </a:prstGeom>
-          <a:solidFill>
-            <a:srgbClr val="095292"/>
-          </a:solidFill>
-          <a:ln>
-            <a:noFill/>
-          </a:ln>
-        </p:spPr>
-        <p:style>
-          <a:lnRef idx="1">
-            <a:schemeClr val="accent1"/>
-          </a:lnRef>
-          <a:fillRef idx="3">
-            <a:schemeClr val="accent1"/>
-          </a:fillRef>
-          <a:effectRef idx="2">
-            <a:schemeClr val="accent1"/>
-          </a:effectRef>
-          <a:fontRef idx="minor">
-            <a:schemeClr val="lt1"/>
-          </a:fontRef>
-        </p:style>
-        <p:txBody>
-          <a:bodyPr rtlCol="0" anchor="ctr"/>
-          <a:lstStyle/>
-          <a:p>
-            <a:pPr algn="ctr"/>
-          </a:p>
-        </p:txBody>
-      </p:sp>
-      <p:sp>
-        <p:nvSpPr>
-          <p:cNvPr id="15" name="TextBox 14"/>
-          <p:cNvSpPr txBox="1"/>
-          <p:nvPr/>
-        </p:nvSpPr>
-        <p:spPr>
-          <a:xfrm>
-            <a:off x="594360" y="3575304"/>
-            <a:ext cx="438912" cy="438912"/>
-          </a:xfrm>
-          <a:prstGeom prst="rect">
-            <a:avLst/>
-          </a:prstGeom>
-          <a:noFill/>
-        </p:spPr>
-        <p:txBody>
-          <a:bodyPr wrap="square" anchor="ctr"/>
-          <a:lstStyle/>
-          <a:p>
-            <a:pPr algn="ctr"/>
-            <a:r>
-              <a:rPr sz="1600" b="1" i="0">
-                <a:solidFill>
-                  <a:srgbClr val="FFFFFF"/>
-                </a:solidFill>
-                <a:latin typeface="Calibri"/>
-              </a:rPr>
-              <a:t>3</a:t>
-            </a:r>
-          </a:p>
-        </p:txBody>
-      </p:sp>
-      <p:sp>
-        <p:nvSpPr>
-          <p:cNvPr id="16" name="TextBox 15"/>
-          <p:cNvSpPr txBox="1"/>
-          <p:nvPr/>
-        </p:nvSpPr>
-        <p:spPr>
-          <a:xfrm>
-            <a:off x="1188720" y="3410712"/>
-            <a:ext cx="10271455" cy="786384"/>
-          </a:xfrm>
-          <a:prstGeom prst="rect">
-            <a:avLst/>
-          </a:prstGeom>
-          <a:noFill/>
-        </p:spPr>
-        <p:txBody>
-          <a:bodyPr wrap="square" anchor="ctr"/>
-          <a:lstStyle/>
-          <a:p>
-            <a:r>
-              <a:rPr sz="1500" b="1" i="0">
-                <a:solidFill>
-                  <a:srgbClr val="095292"/>
-                </a:solidFill>
-                <a:latin typeface="Calibri"/>
-              </a:rPr>
-              <a:t>Responder el Q&amp;A en vivo del docente (preguntas al azar sobre su modelo).</a:t>
-            </a:r>
-          </a:p>
-        </p:txBody>
-      </p:sp>
-      <p:sp>
-        <p:nvSpPr>
-          <p:cNvPr id="17" name="Rounded Rectangle 16"/>
-          <p:cNvSpPr/>
-          <p:nvPr/>
-        </p:nvSpPr>
-        <p:spPr>
-          <a:xfrm>
-            <a:off x="457200" y="4361688"/>
-            <a:ext cx="11277295" cy="950976"/>
-          </a:xfrm>
-          <a:prstGeom prst="roundRect">
-            <a:avLst>
-              <a:gd name="adj" fmla="val 12000"/>
-            </a:avLst>
-          </a:prstGeom>
-          <a:solidFill>
-            <a:srgbClr val="E8F4FA"/>
-          </a:solidFill>
-          <a:ln>
-            <a:noFill/>
-          </a:ln>
-        </p:spPr>
-        <p:style>
-          <a:lnRef idx="1">
-            <a:schemeClr val="accent1"/>
-          </a:lnRef>
-          <a:fillRef idx="3">
-            <a:schemeClr val="accent1"/>
-          </a:fillRef>
-          <a:effectRef idx="2">
-            <a:schemeClr val="accent1"/>
-          </a:effectRef>
-          <a:fontRef idx="minor">
-            <a:schemeClr val="lt1"/>
-          </a:fontRef>
-        </p:style>
-        <p:txBody>
-          <a:bodyPr rtlCol="0" anchor="ctr"/>
-          <a:lstStyle/>
-          <a:p>
-            <a:pPr algn="ctr"/>
-          </a:p>
-        </p:txBody>
-      </p:sp>
-      <p:sp>
-        <p:nvSpPr>
-          <p:cNvPr id="18" name="Rounded Rectangle 17"/>
-          <p:cNvSpPr/>
-          <p:nvPr/>
-        </p:nvSpPr>
-        <p:spPr>
-          <a:xfrm>
-            <a:off x="594360" y="4617720"/>
-            <a:ext cx="438912" cy="438912"/>
-          </a:xfrm>
-          <a:prstGeom prst="roundRect">
-            <a:avLst>
-              <a:gd name="adj" fmla="val 12000"/>
-            </a:avLst>
-          </a:prstGeom>
-          <a:solidFill>
-            <a:srgbClr val="095292"/>
-          </a:solidFill>
-          <a:ln>
-            <a:noFill/>
-          </a:ln>
-        </p:spPr>
-        <p:style>
-          <a:lnRef idx="1">
-            <a:schemeClr val="accent1"/>
-          </a:lnRef>
-          <a:fillRef idx="3">
-            <a:schemeClr val="accent1"/>
-          </a:fillRef>
-          <a:effectRef idx="2">
-            <a:schemeClr val="accent1"/>
-          </a:effectRef>
-          <a:fontRef idx="minor">
-            <a:schemeClr val="lt1"/>
-          </a:fontRef>
-        </p:style>
-        <p:txBody>
-          <a:bodyPr rtlCol="0" anchor="ctr"/>
-          <a:lstStyle/>
-          <a:p>
-            <a:pPr algn="ctr"/>
-          </a:p>
-        </p:txBody>
-      </p:sp>
-      <p:sp>
-        <p:nvSpPr>
-          <p:cNvPr id="19" name="TextBox 18"/>
-          <p:cNvSpPr txBox="1"/>
-          <p:nvPr/>
-        </p:nvSpPr>
-        <p:spPr>
-          <a:xfrm>
-            <a:off x="594360" y="4617720"/>
-            <a:ext cx="438912" cy="438912"/>
-          </a:xfrm>
-          <a:prstGeom prst="rect">
-            <a:avLst/>
-          </a:prstGeom>
-          <a:noFill/>
-        </p:spPr>
-        <p:txBody>
-          <a:bodyPr wrap="square" anchor="ctr"/>
-          <a:lstStyle/>
-          <a:p>
-            <a:pPr algn="ctr"/>
-            <a:r>
-              <a:rPr sz="1600" b="1" i="0">
-                <a:solidFill>
-                  <a:srgbClr val="FFFFFF"/>
-                </a:solidFill>
-                <a:latin typeface="Calibri"/>
-              </a:rPr>
-              <a:t>4</a:t>
-            </a:r>
-          </a:p>
-        </p:txBody>
-      </p:sp>
-      <p:sp>
-        <p:nvSpPr>
-          <p:cNvPr id="20" name="TextBox 19"/>
-          <p:cNvSpPr txBox="1"/>
-          <p:nvPr/>
-        </p:nvSpPr>
-        <p:spPr>
-          <a:xfrm>
-            <a:off x="1188720" y="4453128"/>
-            <a:ext cx="10271455" cy="786384"/>
-          </a:xfrm>
-          <a:prstGeom prst="rect">
-            <a:avLst/>
-          </a:prstGeom>
-          <a:noFill/>
-        </p:spPr>
-        <p:txBody>
-          <a:bodyPr wrap="square" anchor="ctr"/>
-          <a:lstStyle/>
-          <a:p>
-            <a:r>
-              <a:rPr sz="1500" b="1" i="0">
-                <a:solidFill>
-                  <a:srgbClr val="095292"/>
-                </a:solidFill>
-                <a:latin typeface="Calibri"/>
-              </a:rPr>
-              <a:t>Autoevaluacion: que harian distinto.</a:t>
-            </a:r>
-          </a:p>
-        </p:txBody>
-      </p:sp>
-      <p:sp>
-        <p:nvSpPr>
-          <p:cNvPr id="21" name="Rounded Rectangle 20"/>
-          <p:cNvSpPr/>
-          <p:nvPr/>
-        </p:nvSpPr>
-        <p:spPr>
-          <a:xfrm>
-            <a:off x="457200" y="5404104"/>
-            <a:ext cx="11277295" cy="950976"/>
-          </a:xfrm>
-          <a:prstGeom prst="roundRect">
-            <a:avLst>
-              <a:gd name="adj" fmla="val 12000"/>
-            </a:avLst>
-          </a:prstGeom>
-          <a:solidFill>
-            <a:srgbClr val="F2F2F2"/>
-          </a:solidFill>
-          <a:ln>
-            <a:noFill/>
-          </a:ln>
-        </p:spPr>
-        <p:style>
-          <a:lnRef idx="1">
-            <a:schemeClr val="accent1"/>
-          </a:lnRef>
-          <a:fillRef idx="3">
-            <a:schemeClr val="accent1"/>
-          </a:fillRef>
-          <a:effectRef idx="2">
-            <a:schemeClr val="accent1"/>
-          </a:effectRef>
-          <a:fontRef idx="minor">
-            <a:schemeClr val="lt1"/>
-          </a:fontRef>
-        </p:style>
-        <p:txBody>
-          <a:bodyPr rtlCol="0" anchor="ctr"/>
-          <a:lstStyle/>
-          <a:p>
-            <a:pPr algn="ctr"/>
-          </a:p>
-        </p:txBody>
-      </p:sp>
-      <p:sp>
-        <p:nvSpPr>
-          <p:cNvPr id="22" name="Rounded Rectangle 21"/>
-          <p:cNvSpPr/>
-          <p:nvPr/>
-        </p:nvSpPr>
-        <p:spPr>
-          <a:xfrm>
-            <a:off x="594360" y="5660136"/>
-            <a:ext cx="438912" cy="438912"/>
-          </a:xfrm>
-          <a:prstGeom prst="roundRect">
-            <a:avLst>
-              <a:gd name="adj" fmla="val 12000"/>
-            </a:avLst>
-          </a:prstGeom>
-          <a:solidFill>
-            <a:srgbClr val="095292"/>
-          </a:solidFill>
-          <a:ln>
-            <a:noFill/>
-          </a:ln>
-        </p:spPr>
-        <p:style>
-          <a:lnRef idx="1">
-            <a:schemeClr val="accent1"/>
-          </a:lnRef>
-          <a:fillRef idx="3">
-            <a:schemeClr val="accent1"/>
-          </a:fillRef>
-          <a:effectRef idx="2">
-            <a:schemeClr val="accent1"/>
-          </a:effectRef>
-          <a:fontRef idx="minor">
-            <a:schemeClr val="lt1"/>
-          </a:fontRef>
-        </p:style>
-        <p:txBody>
-          <a:bodyPr rtlCol="0" anchor="ctr"/>
-          <a:lstStyle/>
-          <a:p>
-            <a:pPr algn="ctr"/>
-          </a:p>
-        </p:txBody>
-      </p:sp>
-      <p:sp>
-        <p:nvSpPr>
-          <p:cNvPr id="23" name="TextBox 22"/>
-          <p:cNvSpPr txBox="1"/>
-          <p:nvPr/>
-        </p:nvSpPr>
-        <p:spPr>
-          <a:xfrm>
-            <a:off x="594360" y="5660136"/>
-            <a:ext cx="438912" cy="438912"/>
-          </a:xfrm>
-          <a:prstGeom prst="rect">
-            <a:avLst/>
-          </a:prstGeom>
-          <a:noFill/>
-        </p:spPr>
-        <p:txBody>
-          <a:bodyPr wrap="square" anchor="ctr"/>
-          <a:lstStyle/>
-          <a:p>
-            <a:pPr algn="ctr"/>
-            <a:r>
-              <a:rPr sz="1600" b="1" i="0">
-                <a:solidFill>
-                  <a:srgbClr val="FFFFFF"/>
-                </a:solidFill>
-                <a:latin typeface="Calibri"/>
-              </a:rPr>
-              <a:t>5</a:t>
-            </a:r>
-          </a:p>
-        </p:txBody>
-      </p:sp>
-      <p:sp>
-        <p:nvSpPr>
-          <p:cNvPr id="24" name="TextBox 23"/>
-          <p:cNvSpPr txBox="1"/>
-          <p:nvPr/>
-        </p:nvSpPr>
-        <p:spPr>
-          <a:xfrm>
-            <a:off x="1188720" y="5495544"/>
-            <a:ext cx="10271455" cy="786384"/>
-          </a:xfrm>
-          <a:prstGeom prst="rect">
-            <a:avLst/>
-          </a:prstGeom>
-          <a:noFill/>
-        </p:spPr>
-        <p:txBody>
-          <a:bodyPr wrap="square" anchor="ctr"/>
-          <a:lstStyle/>
-          <a:p>
-            <a:r>
-              <a:rPr sz="1500" b="1" i="0">
-                <a:solidFill>
-                  <a:srgbClr val="095292"/>
-                </a:solidFill>
-                <a:latin typeface="Calibri"/>
-              </a:rPr>
-              <a:t>Cierre del curso.</a:t>
-            </a:r>
-          </a:p>
-        </p:txBody>
-      </p:sp>
-      <p:sp>
-        <p:nvSpPr>
-          <p:cNvPr id="25" name="TextBox 24"/>
+          <a:bodyPr wrap="square">
+            <a:spAutoFit/>
+          </a:bodyPr>
+          <a:lstStyle/>
+          <a:p>
+            <a:pPr>
+              <a:spcAft>
+                <a:spcPts val="800"/>
+              </a:spcAft>
+            </a:pPr>
+            <a:r>
+              <a:rPr sz="2000" b="0" i="0">
+                <a:solidFill>
+                  <a:srgbClr val="333333"/>
+                </a:solidFill>
+                <a:latin typeface="Calibri"/>
+              </a:rPr>
+              <a:t>–   </a:t>
+            </a:r>
+            <a:r>
+              <a:rPr sz="2000" b="1" i="0">
+                <a:solidFill>
+                  <a:srgbClr val="333333"/>
+                </a:solidFill>
+                <a:latin typeface="Calibri"/>
+              </a:rPr>
+              <a:t>Por qué importa al PI:</a:t>
+            </a:r>
+            <a:r>
+              <a:rPr sz="2000" b="0" i="0">
+                <a:solidFill>
+                  <a:srgbClr val="333333"/>
+                </a:solidFill>
+                <a:latin typeface="Calibri"/>
+              </a:rPr>
+              <a:t> cierre segun rúbrica 20% Corte 3.</a:t>
+            </a:r>
+          </a:p>
+          <a:p>
+            <a:pPr>
+              <a:spcAft>
+                <a:spcPts val="800"/>
+              </a:spcAft>
+            </a:pPr>
+            <a:r>
+              <a:rPr sz="2000" b="0" i="0">
+                <a:solidFill>
+                  <a:srgbClr val="333333"/>
+                </a:solidFill>
+                <a:latin typeface="Calibri"/>
+              </a:rPr>
+              <a:t>–   No confundir con Parcial 3 (Clase 14).</a:t>
+            </a:r>
+          </a:p>
+        </p:txBody>
+      </p:sp>
+      <p:sp>
+        <p:nvSpPr>
+          <p:cNvPr id="6" name="TextBox 5"/>
           <p:cNvSpPr txBox="1"/>
           <p:nvPr/>
         </p:nvSpPr>
@@ -9356,154 +8371,21 @@
                 </a:solidFill>
                 <a:latin typeface="Calibri"/>
               </a:rPr>
-              <a:t>Sustentacion del PI — pistas (checklist vacio)</a:t>
-            </a:r>
-          </a:p>
-        </p:txBody>
-      </p:sp>
-      <p:sp>
-        <p:nvSpPr>
-          <p:cNvPr id="5" name="Rounded Rectangle 4"/>
-          <p:cNvSpPr/>
-          <p:nvPr/>
-        </p:nvSpPr>
-        <p:spPr>
-          <a:xfrm>
-            <a:off x="457200" y="1261872"/>
-            <a:ext cx="11277295" cy="566928"/>
-          </a:xfrm>
-          <a:prstGeom prst="roundRect">
-            <a:avLst>
-              <a:gd name="adj" fmla="val 12000"/>
-            </a:avLst>
-          </a:prstGeom>
-          <a:solidFill>
-            <a:srgbClr val="F2F2F2"/>
-          </a:solidFill>
-          <a:ln>
-            <a:noFill/>
-          </a:ln>
-        </p:spPr>
-        <p:style>
-          <a:lnRef idx="1">
-            <a:schemeClr val="accent1"/>
-          </a:lnRef>
-          <a:fillRef idx="3">
-            <a:schemeClr val="accent1"/>
-          </a:fillRef>
-          <a:effectRef idx="2">
-            <a:schemeClr val="accent1"/>
-          </a:effectRef>
-          <a:fontRef idx="minor">
-            <a:schemeClr val="lt1"/>
-          </a:fontRef>
-        </p:style>
-        <p:txBody>
-          <a:bodyPr rtlCol="0" anchor="ctr"/>
-          <a:lstStyle/>
-          <a:p>
-            <a:pPr algn="ctr"/>
-          </a:p>
-        </p:txBody>
-      </p:sp>
-      <p:sp>
-        <p:nvSpPr>
-          <p:cNvPr id="6" name="Rectangle 5"/>
-          <p:cNvSpPr/>
-          <p:nvPr/>
-        </p:nvSpPr>
-        <p:spPr>
-          <a:xfrm>
-            <a:off x="640080" y="1408175"/>
-            <a:ext cx="274320" cy="274320"/>
-          </a:xfrm>
-          <a:prstGeom prst="rect">
-            <a:avLst/>
-          </a:prstGeom>
-          <a:solidFill>
-            <a:srgbClr val="FFFFFF"/>
-          </a:solidFill>
-          <a:ln>
-            <a:solidFill>
-              <a:srgbClr val="333333"/>
-            </a:solidFill>
-          </a:ln>
-        </p:spPr>
-        <p:style>
-          <a:lnRef idx="1">
-            <a:schemeClr val="accent1"/>
-          </a:lnRef>
-          <a:fillRef idx="3">
-            <a:schemeClr val="accent1"/>
-          </a:fillRef>
-          <a:effectRef idx="2">
-            <a:schemeClr val="accent1"/>
-          </a:effectRef>
-          <a:fontRef idx="minor">
-            <a:schemeClr val="lt1"/>
-          </a:fontRef>
-        </p:style>
-        <p:txBody>
-          <a:bodyPr rtlCol="0" anchor="ctr"/>
-          <a:lstStyle/>
-          <a:p>
-            <a:pPr algn="ctr"/>
-          </a:p>
-        </p:txBody>
-      </p:sp>
-      <p:sp>
-        <p:nvSpPr>
-          <p:cNvPr id="7" name="Rectangle 6"/>
-          <p:cNvSpPr/>
-          <p:nvPr/>
-        </p:nvSpPr>
-        <p:spPr>
-          <a:xfrm>
-            <a:off x="640080" y="1408175"/>
-            <a:ext cx="73152" cy="274320"/>
-          </a:xfrm>
-          <a:prstGeom prst="rect">
-            <a:avLst/>
-          </a:prstGeom>
-          <a:solidFill>
-            <a:srgbClr val="269CCB"/>
-          </a:solidFill>
-          <a:ln>
-            <a:noFill/>
-          </a:ln>
-        </p:spPr>
-        <p:style>
-          <a:lnRef idx="1">
-            <a:schemeClr val="accent1"/>
-          </a:lnRef>
-          <a:fillRef idx="3">
-            <a:schemeClr val="accent1"/>
-          </a:fillRef>
-          <a:effectRef idx="2">
-            <a:schemeClr val="accent1"/>
-          </a:effectRef>
-          <a:fontRef idx="minor">
-            <a:schemeClr val="lt1"/>
-          </a:fontRef>
-        </p:style>
-        <p:txBody>
-          <a:bodyPr rtlCol="0" anchor="ctr"/>
-          <a:lstStyle/>
-          <a:p>
-            <a:pPr algn="ctr"/>
-          </a:p>
-        </p:txBody>
-      </p:sp>
-      <p:sp>
-        <p:nvSpPr>
-          <p:cNvPr id="8" name="TextBox 7"/>
+              <a:t>Sustentacion del PI — objetivo y criterios</a:t>
+            </a:r>
+          </a:p>
+        </p:txBody>
+      </p:sp>
+      <p:sp>
+        <p:nvSpPr>
+          <p:cNvPr id="5" name="TextBox 4"/>
           <p:cNvSpPr txBox="1"/>
           <p:nvPr/>
         </p:nvSpPr>
         <p:spPr>
           <a:xfrm>
-            <a:off x="1097280" y="1353312"/>
-            <a:ext cx="10362895" cy="402336"/>
+            <a:off x="457200" y="1170432"/>
+            <a:ext cx="11277295" cy="5230368"/>
           </a:xfrm>
           <a:prstGeom prst="rect">
             <a:avLst/>
@@ -9511,354 +8393,219 @@
           <a:noFill/>
         </p:spPr>
         <p:txBody>
-          <a:bodyPr wrap="square" anchor="ctr"/>
-          <a:lstStyle/>
-          <a:p>
-            <a:r>
-              <a:rPr sz="1500" b="0" i="0">
+          <a:bodyPr wrap="square">
+            <a:spAutoFit/>
+          </a:bodyPr>
+          <a:lstStyle/>
+          <a:p>
+            <a:pPr>
+              <a:spcAft>
+                <a:spcPts val="800"/>
+              </a:spcAft>
+            </a:pPr>
+            <a:r>
+              <a:rPr sz="2000" b="0" i="0">
                 <a:solidFill>
                   <a:srgbClr val="333333"/>
                 </a:solidFill>
                 <a:latin typeface="Calibri"/>
               </a:rPr>
-              <a:t>□ Falta evidencia?</a:t>
-            </a:r>
-          </a:p>
-        </p:txBody>
-      </p:sp>
-      <p:sp>
-        <p:nvSpPr>
-          <p:cNvPr id="9" name="Rounded Rectangle 8"/>
-          <p:cNvSpPr/>
-          <p:nvPr/>
-        </p:nvSpPr>
-        <p:spPr>
-          <a:xfrm>
-            <a:off x="457200" y="1938528"/>
-            <a:ext cx="11277295" cy="566928"/>
-          </a:xfrm>
-          <a:prstGeom prst="roundRect">
-            <a:avLst>
-              <a:gd name="adj" fmla="val 12000"/>
-            </a:avLst>
-          </a:prstGeom>
-          <a:solidFill>
-            <a:srgbClr val="F2F2F2"/>
-          </a:solidFill>
-          <a:ln>
-            <a:noFill/>
-          </a:ln>
-        </p:spPr>
-        <p:style>
-          <a:lnRef idx="1">
-            <a:schemeClr val="accent1"/>
-          </a:lnRef>
-          <a:fillRef idx="3">
-            <a:schemeClr val="accent1"/>
-          </a:fillRef>
-          <a:effectRef idx="2">
-            <a:schemeClr val="accent1"/>
-          </a:effectRef>
-          <a:fontRef idx="minor">
-            <a:schemeClr val="lt1"/>
-          </a:fontRef>
-        </p:style>
-        <p:txBody>
-          <a:bodyPr rtlCol="0" anchor="ctr"/>
-          <a:lstStyle/>
-          <a:p>
-            <a:pPr algn="ctr"/>
-          </a:p>
-        </p:txBody>
-      </p:sp>
-      <p:sp>
-        <p:nvSpPr>
-          <p:cNvPr id="10" name="Rectangle 9"/>
-          <p:cNvSpPr/>
-          <p:nvPr/>
-        </p:nvSpPr>
-        <p:spPr>
-          <a:xfrm>
-            <a:off x="640080" y="2084832"/>
-            <a:ext cx="274320" cy="274320"/>
-          </a:xfrm>
-          <a:prstGeom prst="rect">
-            <a:avLst/>
-          </a:prstGeom>
-          <a:solidFill>
-            <a:srgbClr val="FFFFFF"/>
-          </a:solidFill>
-          <a:ln>
-            <a:solidFill>
-              <a:srgbClr val="333333"/>
-            </a:solidFill>
-          </a:ln>
-        </p:spPr>
-        <p:style>
-          <a:lnRef idx="1">
-            <a:schemeClr val="accent1"/>
-          </a:lnRef>
-          <a:fillRef idx="3">
-            <a:schemeClr val="accent1"/>
-          </a:fillRef>
-          <a:effectRef idx="2">
-            <a:schemeClr val="accent1"/>
-          </a:effectRef>
-          <a:fontRef idx="minor">
-            <a:schemeClr val="lt1"/>
-          </a:fontRef>
-        </p:style>
-        <p:txBody>
-          <a:bodyPr rtlCol="0" anchor="ctr"/>
-          <a:lstStyle/>
-          <a:p>
-            <a:pPr algn="ctr"/>
-          </a:p>
-        </p:txBody>
-      </p:sp>
-      <p:sp>
-        <p:nvSpPr>
-          <p:cNvPr id="11" name="Rectangle 10"/>
-          <p:cNvSpPr/>
-          <p:nvPr/>
-        </p:nvSpPr>
-        <p:spPr>
-          <a:xfrm>
-            <a:off x="640080" y="2084832"/>
-            <a:ext cx="73152" cy="274320"/>
-          </a:xfrm>
-          <a:prstGeom prst="rect">
-            <a:avLst/>
-          </a:prstGeom>
-          <a:solidFill>
-            <a:srgbClr val="269CCB"/>
-          </a:solidFill>
-          <a:ln>
-            <a:noFill/>
-          </a:ln>
-        </p:spPr>
-        <p:style>
-          <a:lnRef idx="1">
-            <a:schemeClr val="accent1"/>
-          </a:lnRef>
-          <a:fillRef idx="3">
-            <a:schemeClr val="accent1"/>
-          </a:fillRef>
-          <a:effectRef idx="2">
-            <a:schemeClr val="accent1"/>
-          </a:effectRef>
-          <a:fontRef idx="minor">
-            <a:schemeClr val="lt1"/>
-          </a:fontRef>
-        </p:style>
-        <p:txBody>
-          <a:bodyPr rtlCol="0" anchor="ctr"/>
-          <a:lstStyle/>
-          <a:p>
-            <a:pPr algn="ctr"/>
-          </a:p>
-        </p:txBody>
-      </p:sp>
-      <p:sp>
-        <p:nvSpPr>
-          <p:cNvPr id="12" name="TextBox 11"/>
-          <p:cNvSpPr txBox="1"/>
-          <p:nvPr/>
-        </p:nvSpPr>
-        <p:spPr>
-          <a:xfrm>
-            <a:off x="1097280" y="2029968"/>
-            <a:ext cx="10362895" cy="402336"/>
-          </a:xfrm>
-          <a:prstGeom prst="rect">
-            <a:avLst/>
-          </a:prstGeom>
-          <a:noFill/>
-        </p:spPr>
-        <p:txBody>
-          <a:bodyPr wrap="square" anchor="ctr"/>
-          <a:lstStyle/>
-          <a:p>
-            <a:r>
-              <a:rPr sz="1500" b="0" i="0">
+              <a:t>–   </a:t>
+            </a:r>
+            <a:r>
+              <a:rPr sz="2000" b="1" i="0">
                 <a:solidFill>
                   <a:srgbClr val="333333"/>
                 </a:solidFill>
                 <a:latin typeface="Calibri"/>
               </a:rPr>
-              <a:t>□ Cubre todos los bloques (y todos hablan, si hay equipo)?</a:t>
-            </a:r>
-          </a:p>
-        </p:txBody>
-      </p:sp>
-      <p:sp>
-        <p:nvSpPr>
-          <p:cNvPr id="13" name="Rounded Rectangle 12"/>
-          <p:cNvSpPr/>
-          <p:nvPr/>
-        </p:nvSpPr>
-        <p:spPr>
-          <a:xfrm>
-            <a:off x="457200" y="2615184"/>
-            <a:ext cx="11277295" cy="566928"/>
-          </a:xfrm>
-          <a:prstGeom prst="roundRect">
-            <a:avLst>
-              <a:gd name="adj" fmla="val 12000"/>
-            </a:avLst>
-          </a:prstGeom>
-          <a:solidFill>
-            <a:srgbClr val="F2F2F2"/>
-          </a:solidFill>
-          <a:ln>
-            <a:noFill/>
-          </a:ln>
-        </p:spPr>
-        <p:style>
-          <a:lnRef idx="1">
-            <a:schemeClr val="accent1"/>
-          </a:lnRef>
-          <a:fillRef idx="3">
-            <a:schemeClr val="accent1"/>
-          </a:fillRef>
-          <a:effectRef idx="2">
-            <a:schemeClr val="accent1"/>
-          </a:effectRef>
-          <a:fontRef idx="minor">
-            <a:schemeClr val="lt1"/>
-          </a:fontRef>
-        </p:style>
-        <p:txBody>
-          <a:bodyPr rtlCol="0" anchor="ctr"/>
-          <a:lstStyle/>
-          <a:p>
-            <a:pPr algn="ctr"/>
-          </a:p>
-        </p:txBody>
-      </p:sp>
-      <p:sp>
-        <p:nvSpPr>
-          <p:cNvPr id="14" name="Rectangle 13"/>
-          <p:cNvSpPr/>
-          <p:nvPr/>
-        </p:nvSpPr>
-        <p:spPr>
-          <a:xfrm>
-            <a:off x="640080" y="2761488"/>
-            <a:ext cx="274320" cy="274320"/>
-          </a:xfrm>
-          <a:prstGeom prst="rect">
-            <a:avLst/>
-          </a:prstGeom>
-          <a:solidFill>
-            <a:srgbClr val="FFFFFF"/>
-          </a:solidFill>
-          <a:ln>
-            <a:solidFill>
-              <a:srgbClr val="333333"/>
-            </a:solidFill>
-          </a:ln>
-        </p:spPr>
-        <p:style>
-          <a:lnRef idx="1">
-            <a:schemeClr val="accent1"/>
-          </a:lnRef>
-          <a:fillRef idx="3">
-            <a:schemeClr val="accent1"/>
-          </a:fillRef>
-          <a:effectRef idx="2">
-            <a:schemeClr val="accent1"/>
-          </a:effectRef>
-          <a:fontRef idx="minor">
-            <a:schemeClr val="lt1"/>
-          </a:fontRef>
-        </p:style>
-        <p:txBody>
-          <a:bodyPr rtlCol="0" anchor="ctr"/>
-          <a:lstStyle/>
-          <a:p>
-            <a:pPr algn="ctr"/>
-          </a:p>
-        </p:txBody>
-      </p:sp>
-      <p:sp>
-        <p:nvSpPr>
-          <p:cNvPr id="15" name="Rectangle 14"/>
-          <p:cNvSpPr/>
-          <p:nvPr/>
-        </p:nvSpPr>
-        <p:spPr>
-          <a:xfrm>
-            <a:off x="640080" y="2761488"/>
-            <a:ext cx="73152" cy="274320"/>
-          </a:xfrm>
-          <a:prstGeom prst="rect">
-            <a:avLst/>
-          </a:prstGeom>
-          <a:solidFill>
-            <a:srgbClr val="269CCB"/>
-          </a:solidFill>
-          <a:ln>
-            <a:noFill/>
-          </a:ln>
-        </p:spPr>
-        <p:style>
-          <a:lnRef idx="1">
-            <a:schemeClr val="accent1"/>
-          </a:lnRef>
-          <a:fillRef idx="3">
-            <a:schemeClr val="accent1"/>
-          </a:fillRef>
-          <a:effectRef idx="2">
-            <a:schemeClr val="accent1"/>
-          </a:effectRef>
-          <a:fontRef idx="minor">
-            <a:schemeClr val="lt1"/>
-          </a:fontRef>
-        </p:style>
-        <p:txBody>
-          <a:bodyPr rtlCol="0" anchor="ctr"/>
-          <a:lstStyle/>
-          <a:p>
-            <a:pPr algn="ctr"/>
-          </a:p>
-        </p:txBody>
-      </p:sp>
-      <p:sp>
-        <p:nvSpPr>
-          <p:cNvPr id="16" name="TextBox 15"/>
-          <p:cNvSpPr txBox="1"/>
-          <p:nvPr/>
-        </p:nvSpPr>
-        <p:spPr>
-          <a:xfrm>
-            <a:off x="1097280" y="2706624"/>
-            <a:ext cx="10362895" cy="402336"/>
-          </a:xfrm>
-          <a:prstGeom prst="rect">
-            <a:avLst/>
-          </a:prstGeom>
-          <a:noFill/>
-        </p:spPr>
-        <p:txBody>
-          <a:bodyPr wrap="square" anchor="ctr"/>
-          <a:lstStyle/>
-          <a:p>
-            <a:r>
-              <a:rPr sz="1500" b="0" i="0">
+              <a:t>Objetivo:</a:t>
+            </a:r>
+            <a:r>
+              <a:rPr sz="2000" b="0" i="0">
                 <a:solidFill>
                   <a:srgbClr val="333333"/>
                 </a:solidFill>
                 <a:latin typeface="Calibri"/>
               </a:rPr>
-              <a:t>□ PI != P3?</a:t>
-            </a:r>
-          </a:p>
-        </p:txBody>
-      </p:sp>
-      <p:sp>
-        <p:nvSpPr>
-          <p:cNvPr id="17" name="TextBox 16"/>
+              <a:t> Paquete final entregado + sustentacion en vivo de 5-8 min con Q&amp;A.</a:t>
+            </a:r>
+          </a:p>
+          <a:p>
+            <a:pPr>
+              <a:spcAft>
+                <a:spcPts val="800"/>
+              </a:spcAft>
+            </a:pPr>
+            <a:r>
+              <a:rPr sz="2000" b="0" i="0">
+                <a:solidFill>
+                  <a:srgbClr val="333333"/>
+                </a:solidFill>
+                <a:latin typeface="Calibri"/>
+              </a:rPr>
+              <a:t>–   </a:t>
+            </a:r>
+            <a:r>
+              <a:rPr sz="2000" b="1" i="0">
+                <a:solidFill>
+                  <a:srgbClr val="333333"/>
+                </a:solidFill>
+                <a:latin typeface="Calibri"/>
+              </a:rPr>
+              <a:t>Exito:</a:t>
+            </a:r>
+            <a:r>
+              <a:rPr sz="2000" b="0" i="0">
+                <a:solidFill>
+                  <a:srgbClr val="333333"/>
+                </a:solidFill>
+                <a:latin typeface="Calibri"/>
+              </a:rPr>
+              <a:t> ZIP/PDF en la plataforma del curso ANTES del turno.</a:t>
+            </a:r>
+          </a:p>
+          <a:p>
+            <a:pPr>
+              <a:spcAft>
+                <a:spcPts val="800"/>
+              </a:spcAft>
+            </a:pPr>
+            <a:r>
+              <a:rPr sz="2000" b="0" i="0">
+                <a:solidFill>
+                  <a:srgbClr val="333333"/>
+                </a:solidFill>
+                <a:latin typeface="Calibri"/>
+              </a:rPr>
+              <a:t>–   </a:t>
+            </a:r>
+            <a:r>
+              <a:rPr sz="2000" b="1" i="0">
+                <a:solidFill>
+                  <a:srgbClr val="333333"/>
+                </a:solidFill>
+                <a:latin typeface="Calibri"/>
+              </a:rPr>
+              <a:t>Exito:</a:t>
+            </a:r>
+            <a:r>
+              <a:rPr sz="2000" b="0" i="0">
+                <a:solidFill>
+                  <a:srgbClr val="333333"/>
+                </a:solidFill>
+                <a:latin typeface="Calibri"/>
+              </a:rPr>
+              <a:t> Sustentacion en vivo de 5-8 min.</a:t>
+            </a:r>
+          </a:p>
+          <a:p>
+            <a:pPr>
+              <a:spcAft>
+                <a:spcPts val="800"/>
+              </a:spcAft>
+            </a:pPr>
+            <a:r>
+              <a:rPr sz="2000" b="0" i="0">
+                <a:solidFill>
+                  <a:srgbClr val="333333"/>
+                </a:solidFill>
+                <a:latin typeface="Calibri"/>
+              </a:rPr>
+              <a:t>–   </a:t>
+            </a:r>
+            <a:r>
+              <a:rPr sz="2000" b="1" i="0">
+                <a:solidFill>
+                  <a:srgbClr val="333333"/>
+                </a:solidFill>
+                <a:latin typeface="Calibri"/>
+              </a:rPr>
+              <a:t>Exito:</a:t>
+            </a:r>
+            <a:r>
+              <a:rPr sz="2000" b="0" i="0">
+                <a:solidFill>
+                  <a:srgbClr val="333333"/>
+                </a:solidFill>
+                <a:latin typeface="Calibri"/>
+              </a:rPr>
+              <a:t> Q&amp;A respondido en vivo (preguntas al azar).</a:t>
+            </a:r>
+          </a:p>
+          <a:p>
+            <a:pPr>
+              <a:spcAft>
+                <a:spcPts val="800"/>
+              </a:spcAft>
+            </a:pPr>
+            <a:r>
+              <a:rPr sz="2000" b="0" i="0">
+                <a:solidFill>
+                  <a:srgbClr val="333333"/>
+                </a:solidFill>
+                <a:latin typeface="Calibri"/>
+              </a:rPr>
+              <a:t>–   </a:t>
+            </a:r>
+            <a:r>
+              <a:rPr sz="2000" b="1" i="0">
+                <a:solidFill>
+                  <a:srgbClr val="333333"/>
+                </a:solidFill>
+                <a:latin typeface="Calibri"/>
+              </a:rPr>
+              <a:t>Exito:</a:t>
+            </a:r>
+            <a:r>
+              <a:rPr sz="2000" b="0" i="0">
+                <a:solidFill>
+                  <a:srgbClr val="333333"/>
+                </a:solidFill>
+                <a:latin typeface="Calibri"/>
+              </a:rPr>
+              <a:t> Autoevaluacion.</a:t>
+            </a:r>
+          </a:p>
+          <a:p>
+            <a:pPr>
+              <a:spcAft>
+                <a:spcPts val="800"/>
+              </a:spcAft>
+            </a:pPr>
+            <a:r>
+              <a:rPr sz="2000" b="0" i="0">
+                <a:solidFill>
+                  <a:srgbClr val="333333"/>
+                </a:solidFill>
+                <a:latin typeface="Calibri"/>
+              </a:rPr>
+              <a:t>–   </a:t>
+            </a:r>
+            <a:r>
+              <a:rPr sz="2000" b="1" i="0">
+                <a:solidFill>
+                  <a:srgbClr val="333333"/>
+                </a:solidFill>
+                <a:latin typeface="Calibri"/>
+              </a:rPr>
+              <a:t>Exito:</a:t>
+            </a:r>
+            <a:r>
+              <a:rPr sz="2000" b="0" i="0">
+                <a:solidFill>
+                  <a:srgbClr val="333333"/>
+                </a:solidFill>
+                <a:latin typeface="Calibri"/>
+              </a:rPr>
+              <a:t> Cierre.</a:t>
+            </a:r>
+          </a:p>
+        </p:txBody>
+      </p:sp>
+      <p:sp>
+        <p:nvSpPr>
+          <p:cNvPr id="6" name="TextBox 5"/>
           <p:cNvSpPr txBox="1"/>
           <p:nvPr/>
         </p:nvSpPr>
@@ -10032,7 +8779,7 @@
                 </a:solidFill>
                 <a:latin typeface="Calibri"/>
               </a:rPr>
-              <a:t>Criterios de exito / entregable</a:t>
+              <a:t>Sustentacion del PI — escenario / datos de partida</a:t>
             </a:r>
           </a:p>
         </p:txBody>
@@ -10071,25 +8818,7 @@
                 </a:solidFill>
                 <a:latin typeface="Calibri"/>
               </a:rPr>
-              <a:t>–   </a:t>
-            </a:r>
-            <a:r>
-              <a:rPr sz="2000" b="1" i="0">
-                <a:solidFill>
-                  <a:srgbClr val="333333"/>
-                </a:solidFill>
-                <a:latin typeface="Calibri"/>
-              </a:rPr>
-              <a:t>Entregable:</a:t>
-            </a:r>
-            <a:r>
-              <a:rPr sz="2000" b="0" i="0">
-                <a:solidFill>
-                  <a:srgbClr val="333333"/>
-                </a:solidFill>
-                <a:latin typeface="Calibri"/>
-              </a:rPr>
-              <a:t> ZIP/PDF final subido antes del turno + sustentacion en vivo 5-8 min + Q&amp;A</a:t>
+              <a:t>–   Checklist empaquetado del enunciado PI.</a:t>
             </a:r>
           </a:p>
           <a:p>
@@ -10105,93 +8834,7 @@
                 </a:solidFill>
                 <a:latin typeface="Calibri"/>
               </a:rPr>
-              <a:t>–   Evidencia ejecutable en pantalla durante tu turno (no solo capturas).</a:t>
-            </a:r>
-          </a:p>
-          <a:p>
-            <a:pPr>
-              <a:spcAft>
-                <a:spcPts val="800"/>
-              </a:spcAft>
-            </a:pPr>
-            <a:r>
-              <a:rPr sz="2000" b="0" i="0">
-                <a:solidFill>
-                  <a:srgbClr val="333333"/>
-                </a:solidFill>
-                <a:latin typeface="Calibri"/>
-              </a:rPr>
-              <a:t>–   Puedes explicar </a:t>
-            </a:r>
-            <a:r>
-              <a:rPr sz="2000" b="1" i="0">
-                <a:solidFill>
-                  <a:srgbClr val="333333"/>
-                </a:solidFill>
-                <a:latin typeface="Calibri"/>
-              </a:rPr>
-              <a:t>cualquier</a:t>
-            </a:r>
-            <a:r>
-              <a:rPr sz="2000" b="0" i="0">
-                <a:solidFill>
-                  <a:srgbClr val="333333"/>
-                </a:solidFill>
-                <a:latin typeface="Calibri"/>
-              </a:rPr>
-              <a:t> parte de tu modelo en 60 segundos.</a:t>
-            </a:r>
-          </a:p>
-          <a:p>
-            <a:pPr>
-              <a:spcAft>
-                <a:spcPts val="800"/>
-              </a:spcAft>
-            </a:pPr>
-            <a:r>
-              <a:rPr sz="2000" b="0" i="0">
-                <a:solidFill>
-                  <a:srgbClr val="333333"/>
-                </a:solidFill>
-                <a:latin typeface="Calibri"/>
-              </a:rPr>
-              <a:t>–   </a:t>
-            </a:r>
-            <a:r>
-              <a:rPr sz="2000" b="1" i="0">
-                <a:solidFill>
-                  <a:srgbClr val="333333"/>
-                </a:solidFill>
-                <a:latin typeface="Calibri"/>
-              </a:rPr>
-              <a:t>Entrega en la plataforma del curso</a:t>
-            </a:r>
-            <a:r>
-              <a:rPr sz="2000" b="0" i="0">
-                <a:solidFill>
-                  <a:srgbClr val="333333"/>
-                </a:solidFill>
-                <a:latin typeface="Calibri"/>
-              </a:rPr>
-              <a:t> — </a:t>
-            </a:r>
-            <a:r>
-              <a:rPr sz="2000" b="1" i="0">
-                <a:solidFill>
-                  <a:srgbClr val="333333"/>
-                </a:solidFill>
-                <a:latin typeface="Calibri"/>
-              </a:rPr>
-              <a:t>antes</a:t>
-            </a:r>
-            <a:r>
-              <a:rPr sz="2000" b="0" i="0">
-                <a:solidFill>
-                  <a:srgbClr val="333333"/>
-                </a:solidFill>
-                <a:latin typeface="Calibri"/>
-              </a:rPr>
-              <a:t> de tu turno.</a:t>
+              <a:t>–   Turnos consecutivos en el bloque; el orden se sortea al abrir la sesion.</a:t>
             </a:r>
           </a:p>
         </p:txBody>
@@ -10372,7 +9015,7 @@
                 </a:solidFill>
                 <a:latin typeface="Calibri"/>
               </a:rPr>
-              <a:t>Cierre del PI</a:t>
+              <a:t>Sustentacion del PI — pasos guiados</a:t>
             </a:r>
           </a:p>
         </p:txBody>
@@ -10385,8 +9028,163 @@
         </p:nvSpPr>
         <p:spPr>
           <a:xfrm>
-            <a:off x="457200" y="1261872"/>
-            <a:ext cx="11277295" cy="1051560"/>
+            <a:off x="457200" y="1234440"/>
+            <a:ext cx="11277295" cy="950976"/>
+          </a:xfrm>
+          <a:prstGeom prst="roundRect">
+            <a:avLst>
+              <a:gd name="adj" fmla="val 12000"/>
+            </a:avLst>
+          </a:prstGeom>
+          <a:solidFill>
+            <a:srgbClr val="F2F2F2"/>
+          </a:solidFill>
+          <a:ln>
+            <a:noFill/>
+          </a:ln>
+        </p:spPr>
+        <p:style>
+          <a:lnRef idx="1">
+            <a:schemeClr val="accent1"/>
+          </a:lnRef>
+          <a:fillRef idx="3">
+            <a:schemeClr val="accent1"/>
+          </a:fillRef>
+          <a:effectRef idx="2">
+            <a:schemeClr val="accent1"/>
+          </a:effectRef>
+          <a:fontRef idx="minor">
+            <a:schemeClr val="lt1"/>
+          </a:fontRef>
+        </p:style>
+        <p:txBody>
+          <a:bodyPr rtlCol="0" anchor="ctr"/>
+          <a:lstStyle/>
+          <a:p>
+            <a:pPr algn="ctr"/>
+          </a:p>
+        </p:txBody>
+      </p:sp>
+      <p:sp>
+        <p:nvSpPr>
+          <p:cNvPr id="6" name="Rounded Rectangle 5"/>
+          <p:cNvSpPr/>
+          <p:nvPr/>
+        </p:nvSpPr>
+        <p:spPr>
+          <a:xfrm>
+            <a:off x="594360" y="1490472"/>
+            <a:ext cx="438912" cy="438912"/>
+          </a:xfrm>
+          <a:prstGeom prst="roundRect">
+            <a:avLst>
+              <a:gd name="adj" fmla="val 12000"/>
+            </a:avLst>
+          </a:prstGeom>
+          <a:solidFill>
+            <a:srgbClr val="095292"/>
+          </a:solidFill>
+          <a:ln>
+            <a:noFill/>
+          </a:ln>
+        </p:spPr>
+        <p:style>
+          <a:lnRef idx="1">
+            <a:schemeClr val="accent1"/>
+          </a:lnRef>
+          <a:fillRef idx="3">
+            <a:schemeClr val="accent1"/>
+          </a:fillRef>
+          <a:effectRef idx="2">
+            <a:schemeClr val="accent1"/>
+          </a:effectRef>
+          <a:fontRef idx="minor">
+            <a:schemeClr val="lt1"/>
+          </a:fontRef>
+        </p:style>
+        <p:txBody>
+          <a:bodyPr rtlCol="0" anchor="ctr"/>
+          <a:lstStyle/>
+          <a:p>
+            <a:pPr algn="ctr"/>
+          </a:p>
+        </p:txBody>
+      </p:sp>
+      <p:sp>
+        <p:nvSpPr>
+          <p:cNvPr id="7" name="TextBox 6"/>
+          <p:cNvSpPr txBox="1"/>
+          <p:nvPr/>
+        </p:nvSpPr>
+        <p:spPr>
+          <a:xfrm>
+            <a:off x="594360" y="1490472"/>
+            <a:ext cx="438912" cy="438912"/>
+          </a:xfrm>
+          <a:prstGeom prst="rect">
+            <a:avLst/>
+          </a:prstGeom>
+          <a:noFill/>
+        </p:spPr>
+        <p:txBody>
+          <a:bodyPr wrap="square" anchor="ctr"/>
+          <a:lstStyle/>
+          <a:p>
+            <a:pPr algn="ctr"/>
+            <a:r>
+              <a:rPr sz="1600" b="1" i="0">
+                <a:solidFill>
+                  <a:srgbClr val="FFFFFF"/>
+                </a:solidFill>
+                <a:latin typeface="Calibri"/>
+              </a:rPr>
+              <a:t>1</a:t>
+            </a:r>
+          </a:p>
+        </p:txBody>
+      </p:sp>
+      <p:sp>
+        <p:nvSpPr>
+          <p:cNvPr id="8" name="TextBox 7"/>
+          <p:cNvSpPr txBox="1"/>
+          <p:nvPr/>
+        </p:nvSpPr>
+        <p:spPr>
+          <a:xfrm>
+            <a:off x="1188720" y="1325880"/>
+            <a:ext cx="10271455" cy="786384"/>
+          </a:xfrm>
+          <a:prstGeom prst="rect">
+            <a:avLst/>
+          </a:prstGeom>
+          <a:noFill/>
+        </p:spPr>
+        <p:txBody>
+          <a:bodyPr wrap="square" anchor="ctr"/>
+          <a:lstStyle/>
+          <a:p>
+            <a:r>
+              <a:rPr sz="1500" b="1" i="0">
+                <a:solidFill>
+                  <a:srgbClr val="095292"/>
+                </a:solidFill>
+                <a:latin typeface="Calibri"/>
+              </a:rPr>
+              <a:t>Subir el paquete final a la plataforma del curso (modulo Proyectos) ANTES de su turno.</a:t>
+            </a:r>
+          </a:p>
+        </p:txBody>
+      </p:sp>
+      <p:sp>
+        <p:nvSpPr>
+          <p:cNvPr id="9" name="Rounded Rectangle 8"/>
+          <p:cNvSpPr/>
+          <p:nvPr/>
+        </p:nvSpPr>
+        <p:spPr>
+          <a:xfrm>
+            <a:off x="457200" y="2276856"/>
+            <a:ext cx="11277295" cy="950976"/>
           </a:xfrm>
           <a:prstGeom prst="roundRect">
             <a:avLst>
@@ -10424,20 +9222,22 @@
       </p:sp>
       <p:sp>
         <p:nvSpPr>
-          <p:cNvPr id="6" name="Rectangle 5"/>
+          <p:cNvPr id="10" name="Rounded Rectangle 9"/>
           <p:cNvSpPr/>
           <p:nvPr/>
         </p:nvSpPr>
         <p:spPr>
           <a:xfrm>
-            <a:off x="457200" y="1261872"/>
-            <a:ext cx="128016" cy="1051560"/>
-          </a:xfrm>
-          <a:prstGeom prst="rect">
-            <a:avLst/>
+            <a:off x="594360" y="2532888"/>
+            <a:ext cx="438912" cy="438912"/>
+          </a:xfrm>
+          <a:prstGeom prst="roundRect">
+            <a:avLst>
+              <a:gd name="adj" fmla="val 12000"/>
+            </a:avLst>
           </a:prstGeom>
           <a:solidFill>
-            <a:srgbClr val="269CCB"/>
+            <a:srgbClr val="095292"/>
           </a:solidFill>
           <a:ln>
             <a:noFill/>
@@ -10467,14 +9267,14 @@
       </p:sp>
       <p:sp>
         <p:nvSpPr>
-          <p:cNvPr id="7" name="TextBox 6"/>
+          <p:cNvPr id="11" name="TextBox 10"/>
           <p:cNvSpPr txBox="1"/>
           <p:nvPr/>
         </p:nvSpPr>
         <p:spPr>
           <a:xfrm>
-            <a:off x="777240" y="1399031"/>
-            <a:ext cx="10774375" cy="822959"/>
+            <a:off x="594360" y="2532888"/>
+            <a:ext cx="438912" cy="438912"/>
           </a:xfrm>
           <a:prstGeom prst="rect">
             <a:avLst/>
@@ -10482,49 +9282,64 @@
           <a:noFill/>
         </p:spPr>
         <p:txBody>
-          <a:bodyPr wrap="square">
-            <a:spAutoFit/>
-          </a:bodyPr>
-          <a:lstStyle/>
-          <a:p>
-            <a:r>
-              <a:rPr sz="1200" b="1" i="0">
-                <a:solidFill>
-                  <a:srgbClr val="269CCB"/>
-                </a:solidFill>
-                <a:latin typeface="Calibri"/>
-              </a:rPr>
-              <a:t>Info</a:t>
-            </a:r>
-          </a:p>
-          <a:p>
-            <a:pPr>
-              <a:spcBef>
-                <a:spcPts val="400"/>
-              </a:spcBef>
-            </a:pPr>
-            <a:r>
-              <a:rPr sz="1400" b="0" i="0">
-                <a:solidFill>
-                  <a:srgbClr val="333333"/>
-                </a:solidFill>
-                <a:latin typeface="Calibri"/>
-              </a:rPr>
-              <a:t>Hito: Sustentacion en vivo y entrega final del PI (20% Corte 3)</a:t>
-            </a:r>
-          </a:p>
-        </p:txBody>
-      </p:sp>
-      <p:sp>
-        <p:nvSpPr>
-          <p:cNvPr id="8" name="Rounded Rectangle 7"/>
+          <a:bodyPr wrap="square" anchor="ctr"/>
+          <a:lstStyle/>
+          <a:p>
+            <a:pPr algn="ctr"/>
+            <a:r>
+              <a:rPr sz="1600" b="1" i="0">
+                <a:solidFill>
+                  <a:srgbClr val="FFFFFF"/>
+                </a:solidFill>
+                <a:latin typeface="Calibri"/>
+              </a:rPr>
+              <a:t>2</a:t>
+            </a:r>
+          </a:p>
+        </p:txBody>
+      </p:sp>
+      <p:sp>
+        <p:nvSpPr>
+          <p:cNvPr id="12" name="TextBox 11"/>
+          <p:cNvSpPr txBox="1"/>
+          <p:nvPr/>
+        </p:nvSpPr>
+        <p:spPr>
+          <a:xfrm>
+            <a:off x="1188720" y="2368296"/>
+            <a:ext cx="10271455" cy="786384"/>
+          </a:xfrm>
+          <a:prstGeom prst="rect">
+            <a:avLst/>
+          </a:prstGeom>
+          <a:noFill/>
+        </p:spPr>
+        <p:txBody>
+          <a:bodyPr wrap="square" anchor="ctr"/>
+          <a:lstStyle/>
+          <a:p>
+            <a:r>
+              <a:rPr sz="1500" b="1" i="0">
+                <a:solidFill>
+                  <a:srgbClr val="095292"/>
+                </a:solidFill>
+                <a:latin typeface="Calibri"/>
+              </a:rPr>
+              <a:t>Sustentar en vivo 5-8 min con el ER y una ejecucion real en pantalla.</a:t>
+            </a:r>
+          </a:p>
+        </p:txBody>
+      </p:sp>
+      <p:sp>
+        <p:nvSpPr>
+          <p:cNvPr id="13" name="Rounded Rectangle 12"/>
           <p:cNvSpPr/>
           <p:nvPr/>
         </p:nvSpPr>
         <p:spPr>
           <a:xfrm>
-            <a:off x="457200" y="2478024"/>
-            <a:ext cx="11277295" cy="1051560"/>
+            <a:off x="457200" y="3319272"/>
+            <a:ext cx="11277295" cy="950976"/>
           </a:xfrm>
           <a:prstGeom prst="roundRect">
             <a:avLst>
@@ -10532,7 +9347,7 @@
             </a:avLst>
           </a:prstGeom>
           <a:solidFill>
-            <a:srgbClr val="FFF8E1"/>
+            <a:srgbClr val="F2F2F2"/>
           </a:solidFill>
           <a:ln>
             <a:noFill/>
@@ -10562,20 +9377,22 @@
       </p:sp>
       <p:sp>
         <p:nvSpPr>
-          <p:cNvPr id="9" name="Rectangle 8"/>
+          <p:cNvPr id="14" name="Rounded Rectangle 13"/>
           <p:cNvSpPr/>
           <p:nvPr/>
         </p:nvSpPr>
         <p:spPr>
           <a:xfrm>
-            <a:off x="457200" y="2478024"/>
-            <a:ext cx="128016" cy="1051560"/>
-          </a:xfrm>
-          <a:prstGeom prst="rect">
-            <a:avLst/>
+            <a:off x="594360" y="3575304"/>
+            <a:ext cx="438912" cy="438912"/>
+          </a:xfrm>
+          <a:prstGeom prst="roundRect">
+            <a:avLst>
+              <a:gd name="adj" fmla="val 12000"/>
+            </a:avLst>
           </a:prstGeom>
           <a:solidFill>
-            <a:srgbClr val="FFD000"/>
+            <a:srgbClr val="095292"/>
           </a:solidFill>
           <a:ln>
             <a:noFill/>
@@ -10605,14 +9422,14 @@
       </p:sp>
       <p:sp>
         <p:nvSpPr>
-          <p:cNvPr id="10" name="TextBox 9"/>
+          <p:cNvPr id="15" name="TextBox 14"/>
           <p:cNvSpPr txBox="1"/>
           <p:nvPr/>
         </p:nvSpPr>
         <p:spPr>
           <a:xfrm>
-            <a:off x="777240" y="2615184"/>
-            <a:ext cx="10774375" cy="822959"/>
+            <a:off x="594360" y="3575304"/>
+            <a:ext cx="438912" cy="438912"/>
           </a:xfrm>
           <a:prstGeom prst="rect">
             <a:avLst/>
@@ -10620,49 +9437,64 @@
           <a:noFill/>
         </p:spPr>
         <p:txBody>
-          <a:bodyPr wrap="square">
-            <a:spAutoFit/>
-          </a:bodyPr>
-          <a:lstStyle/>
-          <a:p>
-            <a:r>
-              <a:rPr sz="1200" b="1" i="0">
-                <a:solidFill>
-                  <a:srgbClr val="FFD000"/>
-                </a:solidFill>
-                <a:latin typeface="Calibri"/>
-              </a:rPr>
-              <a:t>Aclaración</a:t>
-            </a:r>
-          </a:p>
-          <a:p>
-            <a:pPr>
-              <a:spcBef>
-                <a:spcPts val="400"/>
-              </a:spcBef>
-            </a:pPr>
-            <a:r>
-              <a:rPr sz="1400" b="0" i="0">
-                <a:solidFill>
-                  <a:srgbClr val="333333"/>
-                </a:solidFill>
-                <a:latin typeface="Calibri"/>
-              </a:rPr>
-              <a:t>Enunciado completo y rubrica: Clases/Proyecto Integrador/ (VetCare DB).</a:t>
-            </a:r>
-          </a:p>
-        </p:txBody>
-      </p:sp>
-      <p:sp>
-        <p:nvSpPr>
-          <p:cNvPr id="11" name="Rounded Rectangle 10"/>
+          <a:bodyPr wrap="square" anchor="ctr"/>
+          <a:lstStyle/>
+          <a:p>
+            <a:pPr algn="ctr"/>
+            <a:r>
+              <a:rPr sz="1600" b="1" i="0">
+                <a:solidFill>
+                  <a:srgbClr val="FFFFFF"/>
+                </a:solidFill>
+                <a:latin typeface="Calibri"/>
+              </a:rPr>
+              <a:t>3</a:t>
+            </a:r>
+          </a:p>
+        </p:txBody>
+      </p:sp>
+      <p:sp>
+        <p:nvSpPr>
+          <p:cNvPr id="16" name="TextBox 15"/>
+          <p:cNvSpPr txBox="1"/>
+          <p:nvPr/>
+        </p:nvSpPr>
+        <p:spPr>
+          <a:xfrm>
+            <a:off x="1188720" y="3410712"/>
+            <a:ext cx="10271455" cy="786384"/>
+          </a:xfrm>
+          <a:prstGeom prst="rect">
+            <a:avLst/>
+          </a:prstGeom>
+          <a:noFill/>
+        </p:spPr>
+        <p:txBody>
+          <a:bodyPr wrap="square" anchor="ctr"/>
+          <a:lstStyle/>
+          <a:p>
+            <a:r>
+              <a:rPr sz="1500" b="1" i="0">
+                <a:solidFill>
+                  <a:srgbClr val="095292"/>
+                </a:solidFill>
+                <a:latin typeface="Calibri"/>
+              </a:rPr>
+              <a:t>Responder el Q&amp;A en vivo del docente (preguntas al azar sobre su modelo).</a:t>
+            </a:r>
+          </a:p>
+        </p:txBody>
+      </p:sp>
+      <p:sp>
+        <p:nvSpPr>
+          <p:cNvPr id="17" name="Rounded Rectangle 16"/>
           <p:cNvSpPr/>
           <p:nvPr/>
         </p:nvSpPr>
         <p:spPr>
           <a:xfrm>
-            <a:off x="457200" y="3694176"/>
-            <a:ext cx="11277295" cy="1051560"/>
+            <a:off x="457200" y="4361688"/>
+            <a:ext cx="11277295" cy="950976"/>
           </a:xfrm>
           <a:prstGeom prst="roundRect">
             <a:avLst>
@@ -10670,7 +9502,7 @@
             </a:avLst>
           </a:prstGeom>
           <a:solidFill>
-            <a:srgbClr val="FBE4E4"/>
+            <a:srgbClr val="E8F4FA"/>
           </a:solidFill>
           <a:ln>
             <a:noFill/>
@@ -10700,20 +9532,22 @@
       </p:sp>
       <p:sp>
         <p:nvSpPr>
-          <p:cNvPr id="12" name="Rectangle 11"/>
+          <p:cNvPr id="18" name="Rounded Rectangle 17"/>
           <p:cNvSpPr/>
           <p:nvPr/>
         </p:nvSpPr>
         <p:spPr>
           <a:xfrm>
-            <a:off x="457200" y="3694176"/>
-            <a:ext cx="128016" cy="1051560"/>
-          </a:xfrm>
-          <a:prstGeom prst="rect">
-            <a:avLst/>
+            <a:off x="594360" y="4617720"/>
+            <a:ext cx="438912" cy="438912"/>
+          </a:xfrm>
+          <a:prstGeom prst="roundRect">
+            <a:avLst>
+              <a:gd name="adj" fmla="val 12000"/>
+            </a:avLst>
           </a:prstGeom>
           <a:solidFill>
-            <a:srgbClr val="A02030"/>
+            <a:srgbClr val="095292"/>
           </a:solidFill>
           <a:ln>
             <a:noFill/>
@@ -10743,14 +9577,14 @@
       </p:sp>
       <p:sp>
         <p:nvSpPr>
-          <p:cNvPr id="13" name="TextBox 12"/>
+          <p:cNvPr id="19" name="TextBox 18"/>
           <p:cNvSpPr txBox="1"/>
           <p:nvPr/>
         </p:nvSpPr>
         <p:spPr>
           <a:xfrm>
-            <a:off x="777240" y="3831336"/>
-            <a:ext cx="10774375" cy="822959"/>
+            <a:off x="594360" y="4617720"/>
+            <a:ext cx="438912" cy="438912"/>
           </a:xfrm>
           <a:prstGeom prst="rect">
             <a:avLst/>
@@ -10758,42 +9592,212 @@
           <a:noFill/>
         </p:spPr>
         <p:txBody>
-          <a:bodyPr wrap="square">
-            <a:spAutoFit/>
-          </a:bodyPr>
-          <a:lstStyle/>
-          <a:p>
-            <a:r>
-              <a:rPr sz="1200" b="1" i="0">
-                <a:solidFill>
-                  <a:srgbClr val="A02030"/>
-                </a:solidFill>
-                <a:latin typeface="Calibri"/>
-              </a:rPr>
-              <a:t>Atención</a:t>
-            </a:r>
-          </a:p>
-          <a:p>
-            <a:pPr>
-              <a:spcBef>
-                <a:spcPts val="400"/>
-              </a:spcBef>
-            </a:pPr>
-            <a:r>
-              <a:rPr sz="1400" b="0" i="0">
-                <a:solidFill>
-                  <a:srgbClr val="333333"/>
-                </a:solidFill>
-                <a:latin typeface="Calibri"/>
-              </a:rPr>
-              <a:t>El PI vale 20% del Corte 3 y NO reemplaza el Parcial 3, que ya se aplico en su propia sesion.</a:t>
-            </a:r>
-          </a:p>
-        </p:txBody>
-      </p:sp>
-      <p:sp>
-        <p:nvSpPr>
-          <p:cNvPr id="14" name="TextBox 13"/>
+          <a:bodyPr wrap="square" anchor="ctr"/>
+          <a:lstStyle/>
+          <a:p>
+            <a:pPr algn="ctr"/>
+            <a:r>
+              <a:rPr sz="1600" b="1" i="0">
+                <a:solidFill>
+                  <a:srgbClr val="FFFFFF"/>
+                </a:solidFill>
+                <a:latin typeface="Calibri"/>
+              </a:rPr>
+              <a:t>4</a:t>
+            </a:r>
+          </a:p>
+        </p:txBody>
+      </p:sp>
+      <p:sp>
+        <p:nvSpPr>
+          <p:cNvPr id="20" name="TextBox 19"/>
+          <p:cNvSpPr txBox="1"/>
+          <p:nvPr/>
+        </p:nvSpPr>
+        <p:spPr>
+          <a:xfrm>
+            <a:off x="1188720" y="4453128"/>
+            <a:ext cx="10271455" cy="786384"/>
+          </a:xfrm>
+          <a:prstGeom prst="rect">
+            <a:avLst/>
+          </a:prstGeom>
+          <a:noFill/>
+        </p:spPr>
+        <p:txBody>
+          <a:bodyPr wrap="square" anchor="ctr"/>
+          <a:lstStyle/>
+          <a:p>
+            <a:r>
+              <a:rPr sz="1500" b="1" i="0">
+                <a:solidFill>
+                  <a:srgbClr val="095292"/>
+                </a:solidFill>
+                <a:latin typeface="Calibri"/>
+              </a:rPr>
+              <a:t>Autoevaluacion: que harian distinto.</a:t>
+            </a:r>
+          </a:p>
+        </p:txBody>
+      </p:sp>
+      <p:sp>
+        <p:nvSpPr>
+          <p:cNvPr id="21" name="Rounded Rectangle 20"/>
+          <p:cNvSpPr/>
+          <p:nvPr/>
+        </p:nvSpPr>
+        <p:spPr>
+          <a:xfrm>
+            <a:off x="457200" y="5404104"/>
+            <a:ext cx="11277295" cy="950976"/>
+          </a:xfrm>
+          <a:prstGeom prst="roundRect">
+            <a:avLst>
+              <a:gd name="adj" fmla="val 12000"/>
+            </a:avLst>
+          </a:prstGeom>
+          <a:solidFill>
+            <a:srgbClr val="F2F2F2"/>
+          </a:solidFill>
+          <a:ln>
+            <a:noFill/>
+          </a:ln>
+        </p:spPr>
+        <p:style>
+          <a:lnRef idx="1">
+            <a:schemeClr val="accent1"/>
+          </a:lnRef>
+          <a:fillRef idx="3">
+            <a:schemeClr val="accent1"/>
+          </a:fillRef>
+          <a:effectRef idx="2">
+            <a:schemeClr val="accent1"/>
+          </a:effectRef>
+          <a:fontRef idx="minor">
+            <a:schemeClr val="lt1"/>
+          </a:fontRef>
+        </p:style>
+        <p:txBody>
+          <a:bodyPr rtlCol="0" anchor="ctr"/>
+          <a:lstStyle/>
+          <a:p>
+            <a:pPr algn="ctr"/>
+          </a:p>
+        </p:txBody>
+      </p:sp>
+      <p:sp>
+        <p:nvSpPr>
+          <p:cNvPr id="22" name="Rounded Rectangle 21"/>
+          <p:cNvSpPr/>
+          <p:nvPr/>
+        </p:nvSpPr>
+        <p:spPr>
+          <a:xfrm>
+            <a:off x="594360" y="5660136"/>
+            <a:ext cx="438912" cy="438912"/>
+          </a:xfrm>
+          <a:prstGeom prst="roundRect">
+            <a:avLst>
+              <a:gd name="adj" fmla="val 12000"/>
+            </a:avLst>
+          </a:prstGeom>
+          <a:solidFill>
+            <a:srgbClr val="095292"/>
+          </a:solidFill>
+          <a:ln>
+            <a:noFill/>
+          </a:ln>
+        </p:spPr>
+        <p:style>
+          <a:lnRef idx="1">
+            <a:schemeClr val="accent1"/>
+          </a:lnRef>
+          <a:fillRef idx="3">
+            <a:schemeClr val="accent1"/>
+          </a:fillRef>
+          <a:effectRef idx="2">
+            <a:schemeClr val="accent1"/>
+          </a:effectRef>
+          <a:fontRef idx="minor">
+            <a:schemeClr val="lt1"/>
+          </a:fontRef>
+        </p:style>
+        <p:txBody>
+          <a:bodyPr rtlCol="0" anchor="ctr"/>
+          <a:lstStyle/>
+          <a:p>
+            <a:pPr algn="ctr"/>
+          </a:p>
+        </p:txBody>
+      </p:sp>
+      <p:sp>
+        <p:nvSpPr>
+          <p:cNvPr id="23" name="TextBox 22"/>
+          <p:cNvSpPr txBox="1"/>
+          <p:nvPr/>
+        </p:nvSpPr>
+        <p:spPr>
+          <a:xfrm>
+            <a:off x="594360" y="5660136"/>
+            <a:ext cx="438912" cy="438912"/>
+          </a:xfrm>
+          <a:prstGeom prst="rect">
+            <a:avLst/>
+          </a:prstGeom>
+          <a:noFill/>
+        </p:spPr>
+        <p:txBody>
+          <a:bodyPr wrap="square" anchor="ctr"/>
+          <a:lstStyle/>
+          <a:p>
+            <a:pPr algn="ctr"/>
+            <a:r>
+              <a:rPr sz="1600" b="1" i="0">
+                <a:solidFill>
+                  <a:srgbClr val="FFFFFF"/>
+                </a:solidFill>
+                <a:latin typeface="Calibri"/>
+              </a:rPr>
+              <a:t>5</a:t>
+            </a:r>
+          </a:p>
+        </p:txBody>
+      </p:sp>
+      <p:sp>
+        <p:nvSpPr>
+          <p:cNvPr id="24" name="TextBox 23"/>
+          <p:cNvSpPr txBox="1"/>
+          <p:nvPr/>
+        </p:nvSpPr>
+        <p:spPr>
+          <a:xfrm>
+            <a:off x="1188720" y="5495544"/>
+            <a:ext cx="10271455" cy="786384"/>
+          </a:xfrm>
+          <a:prstGeom prst="rect">
+            <a:avLst/>
+          </a:prstGeom>
+          <a:noFill/>
+        </p:spPr>
+        <p:txBody>
+          <a:bodyPr wrap="square" anchor="ctr"/>
+          <a:lstStyle/>
+          <a:p>
+            <a:r>
+              <a:rPr sz="1500" b="1" i="0">
+                <a:solidFill>
+                  <a:srgbClr val="095292"/>
+                </a:solidFill>
+                <a:latin typeface="Calibri"/>
+              </a:rPr>
+              <a:t>Cierre del curso.</a:t>
+            </a:r>
+          </a:p>
+        </p:txBody>
+      </p:sp>
+      <p:sp>
+        <p:nvSpPr>
+          <p:cNvPr id="25" name="TextBox 24"/>
           <p:cNvSpPr txBox="1"/>
           <p:nvPr/>
         </p:nvSpPr>
@@ -10861,7 +9865,217 @@
         <p:spPr>
           <a:xfrm>
             <a:off x="0" y="0"/>
-            <a:ext cx="12191695" cy="164592"/>
+            <a:ext cx="12191695" cy="960120"/>
+          </a:xfrm>
+          <a:prstGeom prst="rect">
+            <a:avLst/>
+          </a:prstGeom>
+          <a:solidFill>
+            <a:srgbClr val="095292"/>
+          </a:solidFill>
+          <a:ln>
+            <a:noFill/>
+          </a:ln>
+        </p:spPr>
+        <p:style>
+          <a:lnRef idx="1">
+            <a:schemeClr val="accent1"/>
+          </a:lnRef>
+          <a:fillRef idx="3">
+            <a:schemeClr val="accent1"/>
+          </a:fillRef>
+          <a:effectRef idx="2">
+            <a:schemeClr val="accent1"/>
+          </a:effectRef>
+          <a:fontRef idx="minor">
+            <a:schemeClr val="lt1"/>
+          </a:fontRef>
+        </p:style>
+        <p:txBody>
+          <a:bodyPr rtlCol="0" anchor="ctr"/>
+          <a:lstStyle/>
+          <a:p>
+            <a:pPr algn="ctr"/>
+          </a:p>
+        </p:txBody>
+      </p:sp>
+      <p:sp>
+        <p:nvSpPr>
+          <p:cNvPr id="3" name="Rectangle 2"/>
+          <p:cNvSpPr/>
+          <p:nvPr/>
+        </p:nvSpPr>
+        <p:spPr>
+          <a:xfrm>
+            <a:off x="0" y="960120"/>
+            <a:ext cx="12191695" cy="41148"/>
+          </a:xfrm>
+          <a:prstGeom prst="rect">
+            <a:avLst/>
+          </a:prstGeom>
+          <a:solidFill>
+            <a:srgbClr val="FFD000"/>
+          </a:solidFill>
+          <a:ln>
+            <a:noFill/>
+          </a:ln>
+        </p:spPr>
+        <p:style>
+          <a:lnRef idx="1">
+            <a:schemeClr val="accent1"/>
+          </a:lnRef>
+          <a:fillRef idx="3">
+            <a:schemeClr val="accent1"/>
+          </a:fillRef>
+          <a:effectRef idx="2">
+            <a:schemeClr val="accent1"/>
+          </a:effectRef>
+          <a:fontRef idx="minor">
+            <a:schemeClr val="lt1"/>
+          </a:fontRef>
+        </p:style>
+        <p:txBody>
+          <a:bodyPr rtlCol="0" anchor="ctr"/>
+          <a:lstStyle/>
+          <a:p>
+            <a:pPr algn="ctr"/>
+          </a:p>
+        </p:txBody>
+      </p:sp>
+      <p:sp>
+        <p:nvSpPr>
+          <p:cNvPr id="4" name="TextBox 3"/>
+          <p:cNvSpPr txBox="1"/>
+          <p:nvPr/>
+        </p:nvSpPr>
+        <p:spPr>
+          <a:xfrm>
+            <a:off x="457200" y="164592"/>
+            <a:ext cx="11277295" cy="502920"/>
+          </a:xfrm>
+          <a:prstGeom prst="rect">
+            <a:avLst/>
+          </a:prstGeom>
+          <a:noFill/>
+        </p:spPr>
+        <p:txBody>
+          <a:bodyPr wrap="square">
+            <a:spAutoFit/>
+          </a:bodyPr>
+          <a:lstStyle/>
+          <a:p>
+            <a:r>
+              <a:rPr sz="2600" b="1" i="0">
+                <a:solidFill>
+                  <a:srgbClr val="FFFFFF"/>
+                </a:solidFill>
+                <a:latin typeface="Calibri"/>
+              </a:rPr>
+              <a:t>Sustentacion del PI — pistas (checklist vacio)</a:t>
+            </a:r>
+          </a:p>
+        </p:txBody>
+      </p:sp>
+      <p:sp>
+        <p:nvSpPr>
+          <p:cNvPr id="5" name="Rounded Rectangle 4"/>
+          <p:cNvSpPr/>
+          <p:nvPr/>
+        </p:nvSpPr>
+        <p:spPr>
+          <a:xfrm>
+            <a:off x="457200" y="1261872"/>
+            <a:ext cx="11277295" cy="566928"/>
+          </a:xfrm>
+          <a:prstGeom prst="roundRect">
+            <a:avLst>
+              <a:gd name="adj" fmla="val 12000"/>
+            </a:avLst>
+          </a:prstGeom>
+          <a:solidFill>
+            <a:srgbClr val="F2F2F2"/>
+          </a:solidFill>
+          <a:ln>
+            <a:noFill/>
+          </a:ln>
+        </p:spPr>
+        <p:style>
+          <a:lnRef idx="1">
+            <a:schemeClr val="accent1"/>
+          </a:lnRef>
+          <a:fillRef idx="3">
+            <a:schemeClr val="accent1"/>
+          </a:fillRef>
+          <a:effectRef idx="2">
+            <a:schemeClr val="accent1"/>
+          </a:effectRef>
+          <a:fontRef idx="minor">
+            <a:schemeClr val="lt1"/>
+          </a:fontRef>
+        </p:style>
+        <p:txBody>
+          <a:bodyPr rtlCol="0" anchor="ctr"/>
+          <a:lstStyle/>
+          <a:p>
+            <a:pPr algn="ctr"/>
+          </a:p>
+        </p:txBody>
+      </p:sp>
+      <p:sp>
+        <p:nvSpPr>
+          <p:cNvPr id="6" name="Rectangle 5"/>
+          <p:cNvSpPr/>
+          <p:nvPr/>
+        </p:nvSpPr>
+        <p:spPr>
+          <a:xfrm>
+            <a:off x="640080" y="1408175"/>
+            <a:ext cx="274320" cy="274320"/>
+          </a:xfrm>
+          <a:prstGeom prst="rect">
+            <a:avLst/>
+          </a:prstGeom>
+          <a:solidFill>
+            <a:srgbClr val="FFFFFF"/>
+          </a:solidFill>
+          <a:ln>
+            <a:solidFill>
+              <a:srgbClr val="333333"/>
+            </a:solidFill>
+          </a:ln>
+        </p:spPr>
+        <p:style>
+          <a:lnRef idx="1">
+            <a:schemeClr val="accent1"/>
+          </a:lnRef>
+          <a:fillRef idx="3">
+            <a:schemeClr val="accent1"/>
+          </a:fillRef>
+          <a:effectRef idx="2">
+            <a:schemeClr val="accent1"/>
+          </a:effectRef>
+          <a:fontRef idx="minor">
+            <a:schemeClr val="lt1"/>
+          </a:fontRef>
+        </p:style>
+        <p:txBody>
+          <a:bodyPr rtlCol="0" anchor="ctr"/>
+          <a:lstStyle/>
+          <a:p>
+            <a:pPr algn="ctr"/>
+          </a:p>
+        </p:txBody>
+      </p:sp>
+      <p:sp>
+        <p:nvSpPr>
+          <p:cNvPr id="7" name="Rectangle 6"/>
+          <p:cNvSpPr/>
+          <p:nvPr/>
+        </p:nvSpPr>
+        <p:spPr>
+          <a:xfrm>
+            <a:off x="640080" y="1408175"/>
+            <a:ext cx="73152" cy="274320"/>
           </a:xfrm>
           <a:prstGeom prst="rect">
             <a:avLst/>
@@ -10895,40 +10109,16 @@
           </a:p>
         </p:txBody>
       </p:sp>
-      <p:pic>
-        <p:nvPicPr>
-          <p:cNvPr id="3" name="Picture 2" descr="logo_uniajc_color.png"/>
-          <p:cNvPicPr>
-            <a:picLocks noChangeAspect="1"/>
-          </p:cNvPicPr>
-          <p:nvPr/>
-        </p:nvPicPr>
-        <p:blipFill>
-          <a:blip r:embed="rId2"/>
-          <a:stretch>
-            <a:fillRect/>
-          </a:stretch>
-        </p:blipFill>
-        <p:spPr>
-          <a:xfrm>
-            <a:off x="10271455" y="5998464"/>
-            <a:ext cx="1463040" cy="643233"/>
-          </a:xfrm>
-          <a:prstGeom prst="rect">
-            <a:avLst/>
-          </a:prstGeom>
-        </p:spPr>
-      </p:pic>
-      <p:sp>
-        <p:nvSpPr>
-          <p:cNvPr id="4" name="TextBox 3"/>
+      <p:sp>
+        <p:nvSpPr>
+          <p:cNvPr id="8" name="TextBox 7"/>
           <p:cNvSpPr txBox="1"/>
           <p:nvPr/>
         </p:nvSpPr>
         <p:spPr>
           <a:xfrm>
-            <a:off x="457200" y="1737360"/>
-            <a:ext cx="11277295" cy="1097280"/>
+            <a:off x="1097280" y="1353312"/>
+            <a:ext cx="10362895" cy="402336"/>
           </a:xfrm>
           <a:prstGeom prst="rect">
             <a:avLst/>
@@ -10939,29 +10129,358 @@
           <a:bodyPr wrap="square" anchor="ctr"/>
           <a:lstStyle/>
           <a:p>
+            <a:r>
+              <a:rPr sz="1500" b="0" i="0">
+                <a:solidFill>
+                  <a:srgbClr val="333333"/>
+                </a:solidFill>
+                <a:latin typeface="Calibri"/>
+              </a:rPr>
+              <a:t>□ Falta evidencia?</a:t>
+            </a:r>
+          </a:p>
+        </p:txBody>
+      </p:sp>
+      <p:sp>
+        <p:nvSpPr>
+          <p:cNvPr id="9" name="Rounded Rectangle 8"/>
+          <p:cNvSpPr/>
+          <p:nvPr/>
+        </p:nvSpPr>
+        <p:spPr>
+          <a:xfrm>
+            <a:off x="457200" y="1938528"/>
+            <a:ext cx="11277295" cy="566928"/>
+          </a:xfrm>
+          <a:prstGeom prst="roundRect">
+            <a:avLst>
+              <a:gd name="adj" fmla="val 12000"/>
+            </a:avLst>
+          </a:prstGeom>
+          <a:solidFill>
+            <a:srgbClr val="F2F2F2"/>
+          </a:solidFill>
+          <a:ln>
+            <a:noFill/>
+          </a:ln>
+        </p:spPr>
+        <p:style>
+          <a:lnRef idx="1">
+            <a:schemeClr val="accent1"/>
+          </a:lnRef>
+          <a:fillRef idx="3">
+            <a:schemeClr val="accent1"/>
+          </a:fillRef>
+          <a:effectRef idx="2">
+            <a:schemeClr val="accent1"/>
+          </a:effectRef>
+          <a:fontRef idx="minor">
+            <a:schemeClr val="lt1"/>
+          </a:fontRef>
+        </p:style>
+        <p:txBody>
+          <a:bodyPr rtlCol="0" anchor="ctr"/>
+          <a:lstStyle/>
+          <a:p>
             <a:pPr algn="ctr"/>
-            <a:r>
-              <a:rPr sz="3400" b="1" i="0">
-                <a:solidFill>
-                  <a:srgbClr val="095292"/>
-                </a:solidFill>
-                <a:latin typeface="Calibri"/>
-              </a:rPr>
-              <a:t>Clase 15 · cierre de VetCare DB</a:t>
-            </a:r>
-          </a:p>
-        </p:txBody>
-      </p:sp>
-      <p:sp>
-        <p:nvSpPr>
-          <p:cNvPr id="5" name="TextBox 4"/>
+          </a:p>
+        </p:txBody>
+      </p:sp>
+      <p:sp>
+        <p:nvSpPr>
+          <p:cNvPr id="10" name="Rectangle 9"/>
+          <p:cNvSpPr/>
+          <p:nvPr/>
+        </p:nvSpPr>
+        <p:spPr>
+          <a:xfrm>
+            <a:off x="640080" y="2084832"/>
+            <a:ext cx="274320" cy="274320"/>
+          </a:xfrm>
+          <a:prstGeom prst="rect">
+            <a:avLst/>
+          </a:prstGeom>
+          <a:solidFill>
+            <a:srgbClr val="FFFFFF"/>
+          </a:solidFill>
+          <a:ln>
+            <a:solidFill>
+              <a:srgbClr val="333333"/>
+            </a:solidFill>
+          </a:ln>
+        </p:spPr>
+        <p:style>
+          <a:lnRef idx="1">
+            <a:schemeClr val="accent1"/>
+          </a:lnRef>
+          <a:fillRef idx="3">
+            <a:schemeClr val="accent1"/>
+          </a:fillRef>
+          <a:effectRef idx="2">
+            <a:schemeClr val="accent1"/>
+          </a:effectRef>
+          <a:fontRef idx="minor">
+            <a:schemeClr val="lt1"/>
+          </a:fontRef>
+        </p:style>
+        <p:txBody>
+          <a:bodyPr rtlCol="0" anchor="ctr"/>
+          <a:lstStyle/>
+          <a:p>
+            <a:pPr algn="ctr"/>
+          </a:p>
+        </p:txBody>
+      </p:sp>
+      <p:sp>
+        <p:nvSpPr>
+          <p:cNvPr id="11" name="Rectangle 10"/>
+          <p:cNvSpPr/>
+          <p:nvPr/>
+        </p:nvSpPr>
+        <p:spPr>
+          <a:xfrm>
+            <a:off x="640080" y="2084832"/>
+            <a:ext cx="73152" cy="274320"/>
+          </a:xfrm>
+          <a:prstGeom prst="rect">
+            <a:avLst/>
+          </a:prstGeom>
+          <a:solidFill>
+            <a:srgbClr val="269CCB"/>
+          </a:solidFill>
+          <a:ln>
+            <a:noFill/>
+          </a:ln>
+        </p:spPr>
+        <p:style>
+          <a:lnRef idx="1">
+            <a:schemeClr val="accent1"/>
+          </a:lnRef>
+          <a:fillRef idx="3">
+            <a:schemeClr val="accent1"/>
+          </a:fillRef>
+          <a:effectRef idx="2">
+            <a:schemeClr val="accent1"/>
+          </a:effectRef>
+          <a:fontRef idx="minor">
+            <a:schemeClr val="lt1"/>
+          </a:fontRef>
+        </p:style>
+        <p:txBody>
+          <a:bodyPr rtlCol="0" anchor="ctr"/>
+          <a:lstStyle/>
+          <a:p>
+            <a:pPr algn="ctr"/>
+          </a:p>
+        </p:txBody>
+      </p:sp>
+      <p:sp>
+        <p:nvSpPr>
+          <p:cNvPr id="12" name="TextBox 11"/>
           <p:cNvSpPr txBox="1"/>
           <p:nvPr/>
         </p:nvSpPr>
         <p:spPr>
           <a:xfrm>
-            <a:off x="457200" y="3017520"/>
-            <a:ext cx="11277295" cy="1645920"/>
+            <a:off x="1097280" y="2029968"/>
+            <a:ext cx="10362895" cy="402336"/>
+          </a:xfrm>
+          <a:prstGeom prst="rect">
+            <a:avLst/>
+          </a:prstGeom>
+          <a:noFill/>
+        </p:spPr>
+        <p:txBody>
+          <a:bodyPr wrap="square" anchor="ctr"/>
+          <a:lstStyle/>
+          <a:p>
+            <a:r>
+              <a:rPr sz="1500" b="0" i="0">
+                <a:solidFill>
+                  <a:srgbClr val="333333"/>
+                </a:solidFill>
+                <a:latin typeface="Calibri"/>
+              </a:rPr>
+              <a:t>□ Cubre todos los bloques (y todos hablan, si hay equipo)?</a:t>
+            </a:r>
+          </a:p>
+        </p:txBody>
+      </p:sp>
+      <p:sp>
+        <p:nvSpPr>
+          <p:cNvPr id="13" name="Rounded Rectangle 12"/>
+          <p:cNvSpPr/>
+          <p:nvPr/>
+        </p:nvSpPr>
+        <p:spPr>
+          <a:xfrm>
+            <a:off x="457200" y="2615184"/>
+            <a:ext cx="11277295" cy="566928"/>
+          </a:xfrm>
+          <a:prstGeom prst="roundRect">
+            <a:avLst>
+              <a:gd name="adj" fmla="val 12000"/>
+            </a:avLst>
+          </a:prstGeom>
+          <a:solidFill>
+            <a:srgbClr val="F2F2F2"/>
+          </a:solidFill>
+          <a:ln>
+            <a:noFill/>
+          </a:ln>
+        </p:spPr>
+        <p:style>
+          <a:lnRef idx="1">
+            <a:schemeClr val="accent1"/>
+          </a:lnRef>
+          <a:fillRef idx="3">
+            <a:schemeClr val="accent1"/>
+          </a:fillRef>
+          <a:effectRef idx="2">
+            <a:schemeClr val="accent1"/>
+          </a:effectRef>
+          <a:fontRef idx="minor">
+            <a:schemeClr val="lt1"/>
+          </a:fontRef>
+        </p:style>
+        <p:txBody>
+          <a:bodyPr rtlCol="0" anchor="ctr"/>
+          <a:lstStyle/>
+          <a:p>
+            <a:pPr algn="ctr"/>
+          </a:p>
+        </p:txBody>
+      </p:sp>
+      <p:sp>
+        <p:nvSpPr>
+          <p:cNvPr id="14" name="Rectangle 13"/>
+          <p:cNvSpPr/>
+          <p:nvPr/>
+        </p:nvSpPr>
+        <p:spPr>
+          <a:xfrm>
+            <a:off x="640080" y="2761488"/>
+            <a:ext cx="274320" cy="274320"/>
+          </a:xfrm>
+          <a:prstGeom prst="rect">
+            <a:avLst/>
+          </a:prstGeom>
+          <a:solidFill>
+            <a:srgbClr val="FFFFFF"/>
+          </a:solidFill>
+          <a:ln>
+            <a:solidFill>
+              <a:srgbClr val="333333"/>
+            </a:solidFill>
+          </a:ln>
+        </p:spPr>
+        <p:style>
+          <a:lnRef idx="1">
+            <a:schemeClr val="accent1"/>
+          </a:lnRef>
+          <a:fillRef idx="3">
+            <a:schemeClr val="accent1"/>
+          </a:fillRef>
+          <a:effectRef idx="2">
+            <a:schemeClr val="accent1"/>
+          </a:effectRef>
+          <a:fontRef idx="minor">
+            <a:schemeClr val="lt1"/>
+          </a:fontRef>
+        </p:style>
+        <p:txBody>
+          <a:bodyPr rtlCol="0" anchor="ctr"/>
+          <a:lstStyle/>
+          <a:p>
+            <a:pPr algn="ctr"/>
+          </a:p>
+        </p:txBody>
+      </p:sp>
+      <p:sp>
+        <p:nvSpPr>
+          <p:cNvPr id="15" name="Rectangle 14"/>
+          <p:cNvSpPr/>
+          <p:nvPr/>
+        </p:nvSpPr>
+        <p:spPr>
+          <a:xfrm>
+            <a:off x="640080" y="2761488"/>
+            <a:ext cx="73152" cy="274320"/>
+          </a:xfrm>
+          <a:prstGeom prst="rect">
+            <a:avLst/>
+          </a:prstGeom>
+          <a:solidFill>
+            <a:srgbClr val="269CCB"/>
+          </a:solidFill>
+          <a:ln>
+            <a:noFill/>
+          </a:ln>
+        </p:spPr>
+        <p:style>
+          <a:lnRef idx="1">
+            <a:schemeClr val="accent1"/>
+          </a:lnRef>
+          <a:fillRef idx="3">
+            <a:schemeClr val="accent1"/>
+          </a:fillRef>
+          <a:effectRef idx="2">
+            <a:schemeClr val="accent1"/>
+          </a:effectRef>
+          <a:fontRef idx="minor">
+            <a:schemeClr val="lt1"/>
+          </a:fontRef>
+        </p:style>
+        <p:txBody>
+          <a:bodyPr rtlCol="0" anchor="ctr"/>
+          <a:lstStyle/>
+          <a:p>
+            <a:pPr algn="ctr"/>
+          </a:p>
+        </p:txBody>
+      </p:sp>
+      <p:sp>
+        <p:nvSpPr>
+          <p:cNvPr id="16" name="TextBox 15"/>
+          <p:cNvSpPr txBox="1"/>
+          <p:nvPr/>
+        </p:nvSpPr>
+        <p:spPr>
+          <a:xfrm>
+            <a:off x="1097280" y="2706624"/>
+            <a:ext cx="10362895" cy="402336"/>
+          </a:xfrm>
+          <a:prstGeom prst="rect">
+            <a:avLst/>
+          </a:prstGeom>
+          <a:noFill/>
+        </p:spPr>
+        <p:txBody>
+          <a:bodyPr wrap="square" anchor="ctr"/>
+          <a:lstStyle/>
+          <a:p>
+            <a:r>
+              <a:rPr sz="1500" b="0" i="0">
+                <a:solidFill>
+                  <a:srgbClr val="333333"/>
+                </a:solidFill>
+                <a:latin typeface="Calibri"/>
+              </a:rPr>
+              <a:t>□ PI != P3?</a:t>
+            </a:r>
+          </a:p>
+        </p:txBody>
+      </p:sp>
+      <p:sp>
+        <p:nvSpPr>
+          <p:cNvPr id="17" name="TextBox 16"/>
+          <p:cNvSpPr txBox="1"/>
+          <p:nvPr/>
+        </p:nvSpPr>
+        <p:spPr>
+          <a:xfrm>
+            <a:off x="11185855" y="6473952"/>
+            <a:ext cx="640080" cy="274320"/>
           </a:xfrm>
           <a:prstGeom prst="rect">
             <a:avLst/>
@@ -10974,65 +10493,141 @@
           </a:bodyPr>
           <a:lstStyle/>
           <a:p>
-            <a:pPr algn="ctr">
-              <a:spcAft>
-                <a:spcPts val="600"/>
-              </a:spcAft>
-            </a:pPr>
-            <a:r>
-              <a:rPr sz="1600" b="0" i="0">
-                <a:solidFill>
-                  <a:srgbClr val="333333"/>
-                </a:solidFill>
-                <a:latin typeface="Calibri"/>
-              </a:rPr>
-              <a:t>Sustentacion en vivo y entrega final del PI (20% Corte 3)</a:t>
-            </a:r>
-          </a:p>
-          <a:p>
-            <a:pPr algn="ctr">
-              <a:spcAft>
-                <a:spcPts val="600"/>
-              </a:spcAft>
-            </a:pPr>
-            <a:r>
-              <a:rPr sz="1600" b="0" i="0">
-                <a:solidFill>
-                  <a:srgbClr val="333333"/>
-                </a:solidFill>
-                <a:latin typeface="Calibri"/>
-              </a:rPr>
-              <a:t>Entregable: ZIP/PDF final subido antes del turno + sustentacion en vivo 5-8 min + Q&amp;A</a:t>
-            </a:r>
-          </a:p>
-          <a:p>
-            <a:pPr algn="ctr">
-              <a:spcAft>
-                <a:spcPts val="600"/>
-              </a:spcAft>
-            </a:pPr>
-            <a:r>
-              <a:rPr sz="1600" b="0" i="0">
-                <a:solidFill>
-                  <a:srgbClr val="333333"/>
-                </a:solidFill>
-                <a:latin typeface="Calibri"/>
-              </a:rPr>
-              <a:t>Conserva el paquete (ER, DDL, roles, procs, triggers, optimizacion) como portafolio</a:t>
-            </a:r>
-          </a:p>
-        </p:txBody>
-      </p:sp>
-      <p:sp>
-        <p:nvSpPr>
-          <p:cNvPr id="6" name="TextBox 5"/>
+            <a:pPr algn="r"/>
+            <a:r>
+              <a:rPr sz="1100" b="0" i="0">
+                <a:solidFill>
+                  <a:srgbClr val="666666"/>
+                </a:solidFill>
+                <a:latin typeface="Calibri"/>
+              </a:rPr>
+              <a:t>27</a:t>
+            </a:r>
+          </a:p>
+        </p:txBody>
+      </p:sp>
+    </p:spTree>
+  </p:cSld>
+  <p:clrMapOvr>
+    <a:masterClrMapping/>
+  </p:clrMapOvr>
+</p:sld>
+</file>
+
+<file path=ppt/slides/slide28.xml><?xml version="1.0" encoding="utf-8"?>
+<p:sld xmlns:a="http://schemas.openxmlformats.org/drawingml/2006/main" xmlns:p="http://schemas.openxmlformats.org/presentationml/2006/main" xmlns:r="http://schemas.openxmlformats.org/officeDocument/2006/relationships">
+  <p:cSld>
+    <p:bg>
+      <p:bgPr>
+        <a:solidFill>
+          <a:srgbClr val="FFFFFF"/>
+        </a:solidFill>
+        <a:effectLst/>
+      </p:bgPr>
+    </p:bg>
+    <p:spTree>
+      <p:nvGrpSpPr>
+        <p:cNvPr id="1" name=""/>
+        <p:cNvGrpSpPr/>
+        <p:nvPr/>
+      </p:nvGrpSpPr>
+      <p:grpSpPr/>
+      <p:sp>
+        <p:nvSpPr>
+          <p:cNvPr id="2" name="Rectangle 1"/>
+          <p:cNvSpPr/>
+          <p:nvPr/>
+        </p:nvSpPr>
+        <p:spPr>
+          <a:xfrm>
+            <a:off x="0" y="0"/>
+            <a:ext cx="12191695" cy="960120"/>
+          </a:xfrm>
+          <a:prstGeom prst="rect">
+            <a:avLst/>
+          </a:prstGeom>
+          <a:solidFill>
+            <a:srgbClr val="095292"/>
+          </a:solidFill>
+          <a:ln>
+            <a:noFill/>
+          </a:ln>
+        </p:spPr>
+        <p:style>
+          <a:lnRef idx="1">
+            <a:schemeClr val="accent1"/>
+          </a:lnRef>
+          <a:fillRef idx="3">
+            <a:schemeClr val="accent1"/>
+          </a:fillRef>
+          <a:effectRef idx="2">
+            <a:schemeClr val="accent1"/>
+          </a:effectRef>
+          <a:fontRef idx="minor">
+            <a:schemeClr val="lt1"/>
+          </a:fontRef>
+        </p:style>
+        <p:txBody>
+          <a:bodyPr rtlCol="0" anchor="ctr"/>
+          <a:lstStyle/>
+          <a:p>
+            <a:pPr algn="ctr"/>
+          </a:p>
+        </p:txBody>
+      </p:sp>
+      <p:sp>
+        <p:nvSpPr>
+          <p:cNvPr id="3" name="Rectangle 2"/>
+          <p:cNvSpPr/>
+          <p:nvPr/>
+        </p:nvSpPr>
+        <p:spPr>
+          <a:xfrm>
+            <a:off x="0" y="960120"/>
+            <a:ext cx="12191695" cy="41148"/>
+          </a:xfrm>
+          <a:prstGeom prst="rect">
+            <a:avLst/>
+          </a:prstGeom>
+          <a:solidFill>
+            <a:srgbClr val="FFD000"/>
+          </a:solidFill>
+          <a:ln>
+            <a:noFill/>
+          </a:ln>
+        </p:spPr>
+        <p:style>
+          <a:lnRef idx="1">
+            <a:schemeClr val="accent1"/>
+          </a:lnRef>
+          <a:fillRef idx="3">
+            <a:schemeClr val="accent1"/>
+          </a:fillRef>
+          <a:effectRef idx="2">
+            <a:schemeClr val="accent1"/>
+          </a:effectRef>
+          <a:fontRef idx="minor">
+            <a:schemeClr val="lt1"/>
+          </a:fontRef>
+        </p:style>
+        <p:txBody>
+          <a:bodyPr rtlCol="0" anchor="ctr"/>
+          <a:lstStyle/>
+          <a:p>
+            <a:pPr algn="ctr"/>
+          </a:p>
+        </p:txBody>
+      </p:sp>
+      <p:sp>
+        <p:nvSpPr>
+          <p:cNvPr id="4" name="TextBox 3"/>
           <p:cNvSpPr txBox="1"/>
           <p:nvPr/>
         </p:nvSpPr>
         <p:spPr>
           <a:xfrm>
-            <a:off x="457200" y="4754880"/>
-            <a:ext cx="11277295" cy="640080"/>
+            <a:off x="457200" y="164592"/>
+            <a:ext cx="11277295" cy="502920"/>
           </a:xfrm>
           <a:prstGeom prst="rect">
             <a:avLst/>
@@ -11045,15 +10640,803 @@
           </a:bodyPr>
           <a:lstStyle/>
           <a:p>
+            <a:r>
+              <a:rPr sz="2600" b="1" i="0">
+                <a:solidFill>
+                  <a:srgbClr val="FFFFFF"/>
+                </a:solidFill>
+                <a:latin typeface="Calibri"/>
+              </a:rPr>
+              <a:t>Criterios de exito / entregable</a:t>
+            </a:r>
+          </a:p>
+        </p:txBody>
+      </p:sp>
+      <p:sp>
+        <p:nvSpPr>
+          <p:cNvPr id="5" name="TextBox 4"/>
+          <p:cNvSpPr txBox="1"/>
+          <p:nvPr/>
+        </p:nvSpPr>
+        <p:spPr>
+          <a:xfrm>
+            <a:off x="457200" y="1170432"/>
+            <a:ext cx="11277295" cy="5230368"/>
+          </a:xfrm>
+          <a:prstGeom prst="rect">
+            <a:avLst/>
+          </a:prstGeom>
+          <a:noFill/>
+        </p:spPr>
+        <p:txBody>
+          <a:bodyPr wrap="square">
+            <a:spAutoFit/>
+          </a:bodyPr>
+          <a:lstStyle/>
+          <a:p>
+            <a:pPr>
+              <a:spcAft>
+                <a:spcPts val="800"/>
+              </a:spcAft>
+            </a:pPr>
+            <a:r>
+              <a:rPr sz="2000" b="0" i="0">
+                <a:solidFill>
+                  <a:srgbClr val="333333"/>
+                </a:solidFill>
+                <a:latin typeface="Calibri"/>
+              </a:rPr>
+              <a:t>–   </a:t>
+            </a:r>
+            <a:r>
+              <a:rPr sz="2000" b="1" i="0">
+                <a:solidFill>
+                  <a:srgbClr val="333333"/>
+                </a:solidFill>
+                <a:latin typeface="Calibri"/>
+              </a:rPr>
+              <a:t>Entregable:</a:t>
+            </a:r>
+            <a:r>
+              <a:rPr sz="2000" b="0" i="0">
+                <a:solidFill>
+                  <a:srgbClr val="333333"/>
+                </a:solidFill>
+                <a:latin typeface="Calibri"/>
+              </a:rPr>
+              <a:t> ZIP/PDF final subido antes del turno + sustentacion en vivo 5-8 min + Q&amp;A</a:t>
+            </a:r>
+          </a:p>
+          <a:p>
+            <a:pPr>
+              <a:spcAft>
+                <a:spcPts val="800"/>
+              </a:spcAft>
+            </a:pPr>
+            <a:r>
+              <a:rPr sz="2000" b="0" i="0">
+                <a:solidFill>
+                  <a:srgbClr val="333333"/>
+                </a:solidFill>
+                <a:latin typeface="Calibri"/>
+              </a:rPr>
+              <a:t>–   Evidencia ejecutable en pantalla durante tu turno (no solo capturas).</a:t>
+            </a:r>
+          </a:p>
+          <a:p>
+            <a:pPr>
+              <a:spcAft>
+                <a:spcPts val="800"/>
+              </a:spcAft>
+            </a:pPr>
+            <a:r>
+              <a:rPr sz="2000" b="0" i="0">
+                <a:solidFill>
+                  <a:srgbClr val="333333"/>
+                </a:solidFill>
+                <a:latin typeface="Calibri"/>
+              </a:rPr>
+              <a:t>–   Puedes explicar </a:t>
+            </a:r>
+            <a:r>
+              <a:rPr sz="2000" b="1" i="0">
+                <a:solidFill>
+                  <a:srgbClr val="333333"/>
+                </a:solidFill>
+                <a:latin typeface="Calibri"/>
+              </a:rPr>
+              <a:t>cualquier</a:t>
+            </a:r>
+            <a:r>
+              <a:rPr sz="2000" b="0" i="0">
+                <a:solidFill>
+                  <a:srgbClr val="333333"/>
+                </a:solidFill>
+                <a:latin typeface="Calibri"/>
+              </a:rPr>
+              <a:t> parte de tu modelo en 60 segundos.</a:t>
+            </a:r>
+          </a:p>
+          <a:p>
+            <a:pPr>
+              <a:spcAft>
+                <a:spcPts val="800"/>
+              </a:spcAft>
+            </a:pPr>
+            <a:r>
+              <a:rPr sz="2000" b="0" i="0">
+                <a:solidFill>
+                  <a:srgbClr val="333333"/>
+                </a:solidFill>
+                <a:latin typeface="Calibri"/>
+              </a:rPr>
+              <a:t>–   </a:t>
+            </a:r>
+            <a:r>
+              <a:rPr sz="2000" b="1" i="0">
+                <a:solidFill>
+                  <a:srgbClr val="333333"/>
+                </a:solidFill>
+                <a:latin typeface="Calibri"/>
+              </a:rPr>
+              <a:t>Entrega en la plataforma del curso</a:t>
+            </a:r>
+            <a:r>
+              <a:rPr sz="2000" b="0" i="0">
+                <a:solidFill>
+                  <a:srgbClr val="333333"/>
+                </a:solidFill>
+                <a:latin typeface="Calibri"/>
+              </a:rPr>
+              <a:t> — </a:t>
+            </a:r>
+            <a:r>
+              <a:rPr sz="2000" b="1" i="0">
+                <a:solidFill>
+                  <a:srgbClr val="333333"/>
+                </a:solidFill>
+                <a:latin typeface="Calibri"/>
+              </a:rPr>
+              <a:t>antes</a:t>
+            </a:r>
+            <a:r>
+              <a:rPr sz="2000" b="0" i="0">
+                <a:solidFill>
+                  <a:srgbClr val="333333"/>
+                </a:solidFill>
+                <a:latin typeface="Calibri"/>
+              </a:rPr>
+              <a:t> de tu turno.</a:t>
+            </a:r>
+          </a:p>
+        </p:txBody>
+      </p:sp>
+      <p:sp>
+        <p:nvSpPr>
+          <p:cNvPr id="6" name="TextBox 5"/>
+          <p:cNvSpPr txBox="1"/>
+          <p:nvPr/>
+        </p:nvSpPr>
+        <p:spPr>
+          <a:xfrm>
+            <a:off x="11185855" y="6473952"/>
+            <a:ext cx="640080" cy="274320"/>
+          </a:xfrm>
+          <a:prstGeom prst="rect">
+            <a:avLst/>
+          </a:prstGeom>
+          <a:noFill/>
+        </p:spPr>
+        <p:txBody>
+          <a:bodyPr wrap="square">
+            <a:spAutoFit/>
+          </a:bodyPr>
+          <a:lstStyle/>
+          <a:p>
+            <a:pPr algn="r"/>
+            <a:r>
+              <a:rPr sz="1100" b="0" i="0">
+                <a:solidFill>
+                  <a:srgbClr val="666666"/>
+                </a:solidFill>
+                <a:latin typeface="Calibri"/>
+              </a:rPr>
+              <a:t>28</a:t>
+            </a:r>
+          </a:p>
+        </p:txBody>
+      </p:sp>
+    </p:spTree>
+  </p:cSld>
+  <p:clrMapOvr>
+    <a:masterClrMapping/>
+  </p:clrMapOvr>
+</p:sld>
+</file>
+
+<file path=ppt/slides/slide29.xml><?xml version="1.0" encoding="utf-8"?>
+<p:sld xmlns:a="http://schemas.openxmlformats.org/drawingml/2006/main" xmlns:p="http://schemas.openxmlformats.org/presentationml/2006/main" xmlns:r="http://schemas.openxmlformats.org/officeDocument/2006/relationships">
+  <p:cSld>
+    <p:bg>
+      <p:bgPr>
+        <a:solidFill>
+          <a:srgbClr val="FFFFFF"/>
+        </a:solidFill>
+        <a:effectLst/>
+      </p:bgPr>
+    </p:bg>
+    <p:spTree>
+      <p:nvGrpSpPr>
+        <p:cNvPr id="1" name=""/>
+        <p:cNvGrpSpPr/>
+        <p:nvPr/>
+      </p:nvGrpSpPr>
+      <p:grpSpPr/>
+      <p:sp>
+        <p:nvSpPr>
+          <p:cNvPr id="2" name="Rectangle 1"/>
+          <p:cNvSpPr/>
+          <p:nvPr/>
+        </p:nvSpPr>
+        <p:spPr>
+          <a:xfrm>
+            <a:off x="0" y="0"/>
+            <a:ext cx="12191695" cy="960120"/>
+          </a:xfrm>
+          <a:prstGeom prst="rect">
+            <a:avLst/>
+          </a:prstGeom>
+          <a:solidFill>
+            <a:srgbClr val="095292"/>
+          </a:solidFill>
+          <a:ln>
+            <a:noFill/>
+          </a:ln>
+        </p:spPr>
+        <p:style>
+          <a:lnRef idx="1">
+            <a:schemeClr val="accent1"/>
+          </a:lnRef>
+          <a:fillRef idx="3">
+            <a:schemeClr val="accent1"/>
+          </a:fillRef>
+          <a:effectRef idx="2">
+            <a:schemeClr val="accent1"/>
+          </a:effectRef>
+          <a:fontRef idx="minor">
+            <a:schemeClr val="lt1"/>
+          </a:fontRef>
+        </p:style>
+        <p:txBody>
+          <a:bodyPr rtlCol="0" anchor="ctr"/>
+          <a:lstStyle/>
+          <a:p>
             <a:pPr algn="ctr"/>
-            <a:r>
-              <a:rPr sz="2000" b="1" i="0">
+          </a:p>
+        </p:txBody>
+      </p:sp>
+      <p:sp>
+        <p:nvSpPr>
+          <p:cNvPr id="3" name="Rectangle 2"/>
+          <p:cNvSpPr/>
+          <p:nvPr/>
+        </p:nvSpPr>
+        <p:spPr>
+          <a:xfrm>
+            <a:off x="0" y="960120"/>
+            <a:ext cx="12191695" cy="41148"/>
+          </a:xfrm>
+          <a:prstGeom prst="rect">
+            <a:avLst/>
+          </a:prstGeom>
+          <a:solidFill>
+            <a:srgbClr val="FFD000"/>
+          </a:solidFill>
+          <a:ln>
+            <a:noFill/>
+          </a:ln>
+        </p:spPr>
+        <p:style>
+          <a:lnRef idx="1">
+            <a:schemeClr val="accent1"/>
+          </a:lnRef>
+          <a:fillRef idx="3">
+            <a:schemeClr val="accent1"/>
+          </a:fillRef>
+          <a:effectRef idx="2">
+            <a:schemeClr val="accent1"/>
+          </a:effectRef>
+          <a:fontRef idx="minor">
+            <a:schemeClr val="lt1"/>
+          </a:fontRef>
+        </p:style>
+        <p:txBody>
+          <a:bodyPr rtlCol="0" anchor="ctr"/>
+          <a:lstStyle/>
+          <a:p>
+            <a:pPr algn="ctr"/>
+          </a:p>
+        </p:txBody>
+      </p:sp>
+      <p:sp>
+        <p:nvSpPr>
+          <p:cNvPr id="4" name="TextBox 3"/>
+          <p:cNvSpPr txBox="1"/>
+          <p:nvPr/>
+        </p:nvSpPr>
+        <p:spPr>
+          <a:xfrm>
+            <a:off x="457200" y="164592"/>
+            <a:ext cx="11277295" cy="502920"/>
+          </a:xfrm>
+          <a:prstGeom prst="rect">
+            <a:avLst/>
+          </a:prstGeom>
+          <a:noFill/>
+        </p:spPr>
+        <p:txBody>
+          <a:bodyPr wrap="square">
+            <a:spAutoFit/>
+          </a:bodyPr>
+          <a:lstStyle/>
+          <a:p>
+            <a:r>
+              <a:rPr sz="2600" b="1" i="0">
+                <a:solidFill>
+                  <a:srgbClr val="FFFFFF"/>
+                </a:solidFill>
+                <a:latin typeface="Calibri"/>
+              </a:rPr>
+              <a:t>Cierre del PI</a:t>
+            </a:r>
+          </a:p>
+        </p:txBody>
+      </p:sp>
+      <p:sp>
+        <p:nvSpPr>
+          <p:cNvPr id="5" name="Rounded Rectangle 4"/>
+          <p:cNvSpPr/>
+          <p:nvPr/>
+        </p:nvSpPr>
+        <p:spPr>
+          <a:xfrm>
+            <a:off x="457200" y="1261872"/>
+            <a:ext cx="11277295" cy="1051560"/>
+          </a:xfrm>
+          <a:prstGeom prst="roundRect">
+            <a:avLst>
+              <a:gd name="adj" fmla="val 12000"/>
+            </a:avLst>
+          </a:prstGeom>
+          <a:solidFill>
+            <a:srgbClr val="E8F4FA"/>
+          </a:solidFill>
+          <a:ln>
+            <a:noFill/>
+          </a:ln>
+        </p:spPr>
+        <p:style>
+          <a:lnRef idx="1">
+            <a:schemeClr val="accent1"/>
+          </a:lnRef>
+          <a:fillRef idx="3">
+            <a:schemeClr val="accent1"/>
+          </a:fillRef>
+          <a:effectRef idx="2">
+            <a:schemeClr val="accent1"/>
+          </a:effectRef>
+          <a:fontRef idx="minor">
+            <a:schemeClr val="lt1"/>
+          </a:fontRef>
+        </p:style>
+        <p:txBody>
+          <a:bodyPr rtlCol="0" anchor="ctr"/>
+          <a:lstStyle/>
+          <a:p>
+            <a:pPr algn="ctr"/>
+          </a:p>
+        </p:txBody>
+      </p:sp>
+      <p:sp>
+        <p:nvSpPr>
+          <p:cNvPr id="6" name="Rectangle 5"/>
+          <p:cNvSpPr/>
+          <p:nvPr/>
+        </p:nvSpPr>
+        <p:spPr>
+          <a:xfrm>
+            <a:off x="457200" y="1261872"/>
+            <a:ext cx="128016" cy="1051560"/>
+          </a:xfrm>
+          <a:prstGeom prst="rect">
+            <a:avLst/>
+          </a:prstGeom>
+          <a:solidFill>
+            <a:srgbClr val="269CCB"/>
+          </a:solidFill>
+          <a:ln>
+            <a:noFill/>
+          </a:ln>
+        </p:spPr>
+        <p:style>
+          <a:lnRef idx="1">
+            <a:schemeClr val="accent1"/>
+          </a:lnRef>
+          <a:fillRef idx="3">
+            <a:schemeClr val="accent1"/>
+          </a:fillRef>
+          <a:effectRef idx="2">
+            <a:schemeClr val="accent1"/>
+          </a:effectRef>
+          <a:fontRef idx="minor">
+            <a:schemeClr val="lt1"/>
+          </a:fontRef>
+        </p:style>
+        <p:txBody>
+          <a:bodyPr rtlCol="0" anchor="ctr"/>
+          <a:lstStyle/>
+          <a:p>
+            <a:pPr algn="ctr"/>
+          </a:p>
+        </p:txBody>
+      </p:sp>
+      <p:sp>
+        <p:nvSpPr>
+          <p:cNvPr id="7" name="TextBox 6"/>
+          <p:cNvSpPr txBox="1"/>
+          <p:nvPr/>
+        </p:nvSpPr>
+        <p:spPr>
+          <a:xfrm>
+            <a:off x="777240" y="1399031"/>
+            <a:ext cx="10774375" cy="822959"/>
+          </a:xfrm>
+          <a:prstGeom prst="rect">
+            <a:avLst/>
+          </a:prstGeom>
+          <a:noFill/>
+        </p:spPr>
+        <p:txBody>
+          <a:bodyPr wrap="square">
+            <a:spAutoFit/>
+          </a:bodyPr>
+          <a:lstStyle/>
+          <a:p>
+            <a:r>
+              <a:rPr sz="1200" b="1" i="0">
                 <a:solidFill>
                   <a:srgbClr val="269CCB"/>
                 </a:solidFill>
                 <a:latin typeface="Calibri"/>
               </a:rPr>
-              <a:t>Sustentar es justificar decisiones, no describir tablas</a:t>
+              <a:t>Info</a:t>
+            </a:r>
+          </a:p>
+          <a:p>
+            <a:pPr>
+              <a:spcBef>
+                <a:spcPts val="400"/>
+              </a:spcBef>
+            </a:pPr>
+            <a:r>
+              <a:rPr sz="1400" b="0" i="0">
+                <a:solidFill>
+                  <a:srgbClr val="333333"/>
+                </a:solidFill>
+                <a:latin typeface="Calibri"/>
+              </a:rPr>
+              <a:t>Hito: Sustentacion en vivo y entrega final del PI (20% Corte 3)</a:t>
+            </a:r>
+          </a:p>
+        </p:txBody>
+      </p:sp>
+      <p:sp>
+        <p:nvSpPr>
+          <p:cNvPr id="8" name="Rounded Rectangle 7"/>
+          <p:cNvSpPr/>
+          <p:nvPr/>
+        </p:nvSpPr>
+        <p:spPr>
+          <a:xfrm>
+            <a:off x="457200" y="2478024"/>
+            <a:ext cx="11277295" cy="1051560"/>
+          </a:xfrm>
+          <a:prstGeom prst="roundRect">
+            <a:avLst>
+              <a:gd name="adj" fmla="val 12000"/>
+            </a:avLst>
+          </a:prstGeom>
+          <a:solidFill>
+            <a:srgbClr val="FFF8E1"/>
+          </a:solidFill>
+          <a:ln>
+            <a:noFill/>
+          </a:ln>
+        </p:spPr>
+        <p:style>
+          <a:lnRef idx="1">
+            <a:schemeClr val="accent1"/>
+          </a:lnRef>
+          <a:fillRef idx="3">
+            <a:schemeClr val="accent1"/>
+          </a:fillRef>
+          <a:effectRef idx="2">
+            <a:schemeClr val="accent1"/>
+          </a:effectRef>
+          <a:fontRef idx="minor">
+            <a:schemeClr val="lt1"/>
+          </a:fontRef>
+        </p:style>
+        <p:txBody>
+          <a:bodyPr rtlCol="0" anchor="ctr"/>
+          <a:lstStyle/>
+          <a:p>
+            <a:pPr algn="ctr"/>
+          </a:p>
+        </p:txBody>
+      </p:sp>
+      <p:sp>
+        <p:nvSpPr>
+          <p:cNvPr id="9" name="Rectangle 8"/>
+          <p:cNvSpPr/>
+          <p:nvPr/>
+        </p:nvSpPr>
+        <p:spPr>
+          <a:xfrm>
+            <a:off x="457200" y="2478024"/>
+            <a:ext cx="128016" cy="1051560"/>
+          </a:xfrm>
+          <a:prstGeom prst="rect">
+            <a:avLst/>
+          </a:prstGeom>
+          <a:solidFill>
+            <a:srgbClr val="FFD000"/>
+          </a:solidFill>
+          <a:ln>
+            <a:noFill/>
+          </a:ln>
+        </p:spPr>
+        <p:style>
+          <a:lnRef idx="1">
+            <a:schemeClr val="accent1"/>
+          </a:lnRef>
+          <a:fillRef idx="3">
+            <a:schemeClr val="accent1"/>
+          </a:fillRef>
+          <a:effectRef idx="2">
+            <a:schemeClr val="accent1"/>
+          </a:effectRef>
+          <a:fontRef idx="minor">
+            <a:schemeClr val="lt1"/>
+          </a:fontRef>
+        </p:style>
+        <p:txBody>
+          <a:bodyPr rtlCol="0" anchor="ctr"/>
+          <a:lstStyle/>
+          <a:p>
+            <a:pPr algn="ctr"/>
+          </a:p>
+        </p:txBody>
+      </p:sp>
+      <p:sp>
+        <p:nvSpPr>
+          <p:cNvPr id="10" name="TextBox 9"/>
+          <p:cNvSpPr txBox="1"/>
+          <p:nvPr/>
+        </p:nvSpPr>
+        <p:spPr>
+          <a:xfrm>
+            <a:off x="777240" y="2615184"/>
+            <a:ext cx="10774375" cy="822959"/>
+          </a:xfrm>
+          <a:prstGeom prst="rect">
+            <a:avLst/>
+          </a:prstGeom>
+          <a:noFill/>
+        </p:spPr>
+        <p:txBody>
+          <a:bodyPr wrap="square">
+            <a:spAutoFit/>
+          </a:bodyPr>
+          <a:lstStyle/>
+          <a:p>
+            <a:r>
+              <a:rPr sz="1200" b="1" i="0">
+                <a:solidFill>
+                  <a:srgbClr val="FFD000"/>
+                </a:solidFill>
+                <a:latin typeface="Calibri"/>
+              </a:rPr>
+              <a:t>Aclaración</a:t>
+            </a:r>
+          </a:p>
+          <a:p>
+            <a:pPr>
+              <a:spcBef>
+                <a:spcPts val="400"/>
+              </a:spcBef>
+            </a:pPr>
+            <a:r>
+              <a:rPr sz="1400" b="0" i="0">
+                <a:solidFill>
+                  <a:srgbClr val="333333"/>
+                </a:solidFill>
+                <a:latin typeface="Calibri"/>
+              </a:rPr>
+              <a:t>Enunciado completo y rubrica: Clases/Proyecto Integrador/ (VetCare DB).</a:t>
+            </a:r>
+          </a:p>
+        </p:txBody>
+      </p:sp>
+      <p:sp>
+        <p:nvSpPr>
+          <p:cNvPr id="11" name="Rounded Rectangle 10"/>
+          <p:cNvSpPr/>
+          <p:nvPr/>
+        </p:nvSpPr>
+        <p:spPr>
+          <a:xfrm>
+            <a:off x="457200" y="3694176"/>
+            <a:ext cx="11277295" cy="1051560"/>
+          </a:xfrm>
+          <a:prstGeom prst="roundRect">
+            <a:avLst>
+              <a:gd name="adj" fmla="val 12000"/>
+            </a:avLst>
+          </a:prstGeom>
+          <a:solidFill>
+            <a:srgbClr val="FBE4E4"/>
+          </a:solidFill>
+          <a:ln>
+            <a:noFill/>
+          </a:ln>
+        </p:spPr>
+        <p:style>
+          <a:lnRef idx="1">
+            <a:schemeClr val="accent1"/>
+          </a:lnRef>
+          <a:fillRef idx="3">
+            <a:schemeClr val="accent1"/>
+          </a:fillRef>
+          <a:effectRef idx="2">
+            <a:schemeClr val="accent1"/>
+          </a:effectRef>
+          <a:fontRef idx="minor">
+            <a:schemeClr val="lt1"/>
+          </a:fontRef>
+        </p:style>
+        <p:txBody>
+          <a:bodyPr rtlCol="0" anchor="ctr"/>
+          <a:lstStyle/>
+          <a:p>
+            <a:pPr algn="ctr"/>
+          </a:p>
+        </p:txBody>
+      </p:sp>
+      <p:sp>
+        <p:nvSpPr>
+          <p:cNvPr id="12" name="Rectangle 11"/>
+          <p:cNvSpPr/>
+          <p:nvPr/>
+        </p:nvSpPr>
+        <p:spPr>
+          <a:xfrm>
+            <a:off x="457200" y="3694176"/>
+            <a:ext cx="128016" cy="1051560"/>
+          </a:xfrm>
+          <a:prstGeom prst="rect">
+            <a:avLst/>
+          </a:prstGeom>
+          <a:solidFill>
+            <a:srgbClr val="A02030"/>
+          </a:solidFill>
+          <a:ln>
+            <a:noFill/>
+          </a:ln>
+        </p:spPr>
+        <p:style>
+          <a:lnRef idx="1">
+            <a:schemeClr val="accent1"/>
+          </a:lnRef>
+          <a:fillRef idx="3">
+            <a:schemeClr val="accent1"/>
+          </a:fillRef>
+          <a:effectRef idx="2">
+            <a:schemeClr val="accent1"/>
+          </a:effectRef>
+          <a:fontRef idx="minor">
+            <a:schemeClr val="lt1"/>
+          </a:fontRef>
+        </p:style>
+        <p:txBody>
+          <a:bodyPr rtlCol="0" anchor="ctr"/>
+          <a:lstStyle/>
+          <a:p>
+            <a:pPr algn="ctr"/>
+          </a:p>
+        </p:txBody>
+      </p:sp>
+      <p:sp>
+        <p:nvSpPr>
+          <p:cNvPr id="13" name="TextBox 12"/>
+          <p:cNvSpPr txBox="1"/>
+          <p:nvPr/>
+        </p:nvSpPr>
+        <p:spPr>
+          <a:xfrm>
+            <a:off x="777240" y="3831336"/>
+            <a:ext cx="10774375" cy="822959"/>
+          </a:xfrm>
+          <a:prstGeom prst="rect">
+            <a:avLst/>
+          </a:prstGeom>
+          <a:noFill/>
+        </p:spPr>
+        <p:txBody>
+          <a:bodyPr wrap="square">
+            <a:spAutoFit/>
+          </a:bodyPr>
+          <a:lstStyle/>
+          <a:p>
+            <a:r>
+              <a:rPr sz="1200" b="1" i="0">
+                <a:solidFill>
+                  <a:srgbClr val="A02030"/>
+                </a:solidFill>
+                <a:latin typeface="Calibri"/>
+              </a:rPr>
+              <a:t>Atención</a:t>
+            </a:r>
+          </a:p>
+          <a:p>
+            <a:pPr>
+              <a:spcBef>
+                <a:spcPts val="400"/>
+              </a:spcBef>
+            </a:pPr>
+            <a:r>
+              <a:rPr sz="1400" b="0" i="0">
+                <a:solidFill>
+                  <a:srgbClr val="333333"/>
+                </a:solidFill>
+                <a:latin typeface="Calibri"/>
+              </a:rPr>
+              <a:t>El PI vale 20% del Corte 3 y NO reemplaza el Parcial 3, que ya se aplico en su propia sesion.</a:t>
+            </a:r>
+          </a:p>
+        </p:txBody>
+      </p:sp>
+      <p:sp>
+        <p:nvSpPr>
+          <p:cNvPr id="14" name="TextBox 13"/>
+          <p:cNvSpPr txBox="1"/>
+          <p:nvPr/>
+        </p:nvSpPr>
+        <p:spPr>
+          <a:xfrm>
+            <a:off x="11185855" y="6473952"/>
+            <a:ext cx="640080" cy="274320"/>
+          </a:xfrm>
+          <a:prstGeom prst="rect">
+            <a:avLst/>
+          </a:prstGeom>
+          <a:noFill/>
+        </p:spPr>
+        <p:txBody>
+          <a:bodyPr wrap="square">
+            <a:spAutoFit/>
+          </a:bodyPr>
+          <a:lstStyle/>
+          <a:p>
+            <a:pPr algn="r"/>
+            <a:r>
+              <a:rPr sz="1100" b="0" i="0">
+                <a:solidFill>
+                  <a:srgbClr val="666666"/>
+                </a:solidFill>
+                <a:latin typeface="Calibri"/>
+              </a:rPr>
+              <a:t>29</a:t>
             </a:r>
           </a:p>
         </p:txBody>
@@ -11688,6 +12071,238 @@
 </p:sld>
 </file>
 
+<file path=ppt/slides/slide30.xml><?xml version="1.0" encoding="utf-8"?>
+<p:sld xmlns:a="http://schemas.openxmlformats.org/drawingml/2006/main" xmlns:p="http://schemas.openxmlformats.org/presentationml/2006/main" xmlns:r="http://schemas.openxmlformats.org/officeDocument/2006/relationships">
+  <p:cSld>
+    <p:bg>
+      <p:bgPr>
+        <a:solidFill>
+          <a:srgbClr val="FFFFFF"/>
+        </a:solidFill>
+        <a:effectLst/>
+      </p:bgPr>
+    </p:bg>
+    <p:spTree>
+      <p:nvGrpSpPr>
+        <p:cNvPr id="1" name=""/>
+        <p:cNvGrpSpPr/>
+        <p:nvPr/>
+      </p:nvGrpSpPr>
+      <p:grpSpPr/>
+      <p:sp>
+        <p:nvSpPr>
+          <p:cNvPr id="2" name="Rectangle 1"/>
+          <p:cNvSpPr/>
+          <p:nvPr/>
+        </p:nvSpPr>
+        <p:spPr>
+          <a:xfrm>
+            <a:off x="0" y="0"/>
+            <a:ext cx="12191695" cy="164592"/>
+          </a:xfrm>
+          <a:prstGeom prst="rect">
+            <a:avLst/>
+          </a:prstGeom>
+          <a:solidFill>
+            <a:srgbClr val="269CCB"/>
+          </a:solidFill>
+          <a:ln>
+            <a:noFill/>
+          </a:ln>
+        </p:spPr>
+        <p:style>
+          <a:lnRef idx="1">
+            <a:schemeClr val="accent1"/>
+          </a:lnRef>
+          <a:fillRef idx="3">
+            <a:schemeClr val="accent1"/>
+          </a:fillRef>
+          <a:effectRef idx="2">
+            <a:schemeClr val="accent1"/>
+          </a:effectRef>
+          <a:fontRef idx="minor">
+            <a:schemeClr val="lt1"/>
+          </a:fontRef>
+        </p:style>
+        <p:txBody>
+          <a:bodyPr rtlCol="0" anchor="ctr"/>
+          <a:lstStyle/>
+          <a:p>
+            <a:pPr algn="ctr"/>
+          </a:p>
+        </p:txBody>
+      </p:sp>
+      <p:pic>
+        <p:nvPicPr>
+          <p:cNvPr id="3" name="Picture 2" descr="logo_uniajc_color.png"/>
+          <p:cNvPicPr>
+            <a:picLocks noChangeAspect="1"/>
+          </p:cNvPicPr>
+          <p:nvPr/>
+        </p:nvPicPr>
+        <p:blipFill>
+          <a:blip r:embed="rId2"/>
+          <a:stretch>
+            <a:fillRect/>
+          </a:stretch>
+        </p:blipFill>
+        <p:spPr>
+          <a:xfrm>
+            <a:off x="10271455" y="5998464"/>
+            <a:ext cx="1463040" cy="643233"/>
+          </a:xfrm>
+          <a:prstGeom prst="rect">
+            <a:avLst/>
+          </a:prstGeom>
+        </p:spPr>
+      </p:pic>
+      <p:sp>
+        <p:nvSpPr>
+          <p:cNvPr id="4" name="TextBox 3"/>
+          <p:cNvSpPr txBox="1"/>
+          <p:nvPr/>
+        </p:nvSpPr>
+        <p:spPr>
+          <a:xfrm>
+            <a:off x="457200" y="1737360"/>
+            <a:ext cx="11277295" cy="1097280"/>
+          </a:xfrm>
+          <a:prstGeom prst="rect">
+            <a:avLst/>
+          </a:prstGeom>
+          <a:noFill/>
+        </p:spPr>
+        <p:txBody>
+          <a:bodyPr wrap="square" anchor="ctr"/>
+          <a:lstStyle/>
+          <a:p>
+            <a:pPr algn="ctr"/>
+            <a:r>
+              <a:rPr sz="3400" b="1" i="0">
+                <a:solidFill>
+                  <a:srgbClr val="095292"/>
+                </a:solidFill>
+                <a:latin typeface="Calibri"/>
+              </a:rPr>
+              <a:t>Clase 15 · cierre de VetCare DB</a:t>
+            </a:r>
+          </a:p>
+        </p:txBody>
+      </p:sp>
+      <p:sp>
+        <p:nvSpPr>
+          <p:cNvPr id="5" name="TextBox 4"/>
+          <p:cNvSpPr txBox="1"/>
+          <p:nvPr/>
+        </p:nvSpPr>
+        <p:spPr>
+          <a:xfrm>
+            <a:off x="457200" y="3017520"/>
+            <a:ext cx="11277295" cy="1645920"/>
+          </a:xfrm>
+          <a:prstGeom prst="rect">
+            <a:avLst/>
+          </a:prstGeom>
+          <a:noFill/>
+        </p:spPr>
+        <p:txBody>
+          <a:bodyPr wrap="square">
+            <a:spAutoFit/>
+          </a:bodyPr>
+          <a:lstStyle/>
+          <a:p>
+            <a:pPr algn="ctr">
+              <a:spcAft>
+                <a:spcPts val="600"/>
+              </a:spcAft>
+            </a:pPr>
+            <a:r>
+              <a:rPr sz="1600" b="0" i="0">
+                <a:solidFill>
+                  <a:srgbClr val="333333"/>
+                </a:solidFill>
+                <a:latin typeface="Calibri"/>
+              </a:rPr>
+              <a:t>Sustentacion en vivo y entrega final del PI (20% Corte 3)</a:t>
+            </a:r>
+          </a:p>
+          <a:p>
+            <a:pPr algn="ctr">
+              <a:spcAft>
+                <a:spcPts val="600"/>
+              </a:spcAft>
+            </a:pPr>
+            <a:r>
+              <a:rPr sz="1600" b="0" i="0">
+                <a:solidFill>
+                  <a:srgbClr val="333333"/>
+                </a:solidFill>
+                <a:latin typeface="Calibri"/>
+              </a:rPr>
+              <a:t>Entregable: ZIP/PDF final subido antes del turno + sustentacion en vivo 5-8 min + Q&amp;A</a:t>
+            </a:r>
+          </a:p>
+          <a:p>
+            <a:pPr algn="ctr">
+              <a:spcAft>
+                <a:spcPts val="600"/>
+              </a:spcAft>
+            </a:pPr>
+            <a:r>
+              <a:rPr sz="1600" b="0" i="0">
+                <a:solidFill>
+                  <a:srgbClr val="333333"/>
+                </a:solidFill>
+                <a:latin typeface="Calibri"/>
+              </a:rPr>
+              <a:t>Conserva el paquete (ER, DDL, roles, procs, triggers, optimizacion) como portafolio</a:t>
+            </a:r>
+          </a:p>
+        </p:txBody>
+      </p:sp>
+      <p:sp>
+        <p:nvSpPr>
+          <p:cNvPr id="6" name="TextBox 5"/>
+          <p:cNvSpPr txBox="1"/>
+          <p:nvPr/>
+        </p:nvSpPr>
+        <p:spPr>
+          <a:xfrm>
+            <a:off x="457200" y="4754880"/>
+            <a:ext cx="11277295" cy="640080"/>
+          </a:xfrm>
+          <a:prstGeom prst="rect">
+            <a:avLst/>
+          </a:prstGeom>
+          <a:noFill/>
+        </p:spPr>
+        <p:txBody>
+          <a:bodyPr wrap="square">
+            <a:spAutoFit/>
+          </a:bodyPr>
+          <a:lstStyle/>
+          <a:p>
+            <a:pPr algn="ctr"/>
+            <a:r>
+              <a:rPr sz="2000" b="1" i="0">
+                <a:solidFill>
+                  <a:srgbClr val="269CCB"/>
+                </a:solidFill>
+                <a:latin typeface="Calibri"/>
+              </a:rPr>
+              <a:t>Sustentar es justificar decisiones, no describir tablas</a:t>
+            </a:r>
+          </a:p>
+        </p:txBody>
+      </p:sp>
+    </p:spTree>
+  </p:cSld>
+  <p:clrMapOvr>
+    <a:masterClrMapping/>
+  </p:clrMapOvr>
+</p:sld>
+</file>
+
 <file path=ppt/slides/slide4.xml><?xml version="1.0" encoding="utf-8"?>
 <p:sld xmlns:a="http://schemas.openxmlformats.org/drawingml/2006/main" xmlns:p="http://schemas.openxmlformats.org/presentationml/2006/main" xmlns:r="http://schemas.openxmlformats.org/officeDocument/2006/relationships">
   <p:cSld>
@@ -11821,7 +12436,7 @@
                 </a:solidFill>
                 <a:latin typeface="Calibri"/>
               </a:rPr>
-              <a:t>Sustentar no es describir: el eje de toda la clase</a:t>
+              <a:t>Sustentar no es describir: el eje de toda la clase (1/2)</a:t>
             </a:r>
           </a:p>
         </p:txBody>
@@ -11925,54 +12540,6 @@
                 <a:latin typeface="Calibri"/>
               </a:rPr>
               <a:t>–   Mientras que partir en dos una tabla que ya tiene cien mil filas y seis procedimientos apuntando a ella cuesta una migracion, una ventana de mantenimiento y el riesgo real de perder datos.</a:t>
-            </a:r>
-          </a:p>
-          <a:p>
-            <a:pPr>
-              <a:spcAft>
-                <a:spcPts val="800"/>
-              </a:spcAft>
-            </a:pPr>
-            <a:r>
-              <a:rPr sz="2000" b="0" i="0">
-                <a:solidFill>
-                  <a:srgbClr val="333333"/>
-                </a:solidFill>
-                <a:latin typeface="Calibri"/>
-              </a:rPr>
-              <a:t>–   Una decision de modelado es, por definicion, una decision costosa de deshacer.</a:t>
-            </a:r>
-          </a:p>
-          <a:p>
-            <a:pPr>
-              <a:spcAft>
-                <a:spcPts val="800"/>
-              </a:spcAft>
-            </a:pPr>
-            <a:r>
-              <a:rPr sz="2000" b="0" i="0">
-                <a:solidFill>
-                  <a:srgbClr val="333333"/>
-                </a:solidFill>
-                <a:latin typeface="Calibri"/>
-              </a:rPr>
-              <a:t>–   Eso convierte cada eleccion del ER en algo que se debe poder defender, y es exactamente lo que un evaluador (o un lider tecnico en una entrevista) va a probar con dos o tres preguntas bien elegidas.</a:t>
-            </a:r>
-          </a:p>
-          <a:p>
-            <a:pPr>
-              <a:spcAft>
-                <a:spcPts val="800"/>
-              </a:spcAft>
-            </a:pPr>
-            <a:r>
-              <a:rPr sz="2000" b="0" i="0">
-                <a:solidFill>
-                  <a:srgbClr val="333333"/>
-                </a:solidFill>
-                <a:latin typeface="Calibri"/>
-              </a:rPr>
-              <a:t>–   La clase de hoy no trae tema nuevo: trae la teoria de como se comunica y se empaqueta un trabajo tecnico para que un tercero pueda evaluarlo, reproducirlo y usarlo sin hablar con quien lo hizo.</a:t>
             </a:r>
           </a:p>
         </p:txBody>
@@ -12153,7 +12720,7 @@
                 </a:solidFill>
                 <a:latin typeface="Calibri"/>
               </a:rPr>
-              <a:t>Las cuatro preguntas de por que que se hacen casi siempre (1/2)</a:t>
+              <a:t>Sustentar no es describir: el eje de toda la clase (2/2)</a:t>
             </a:r>
           </a:p>
         </p:txBody>
@@ -12192,7 +12759,7 @@
                 </a:solidFill>
                 <a:latin typeface="Calibri"/>
               </a:rPr>
-              <a:t>–   Hay cuatro preguntas de por que que se hacen casi siempre, y el estudiante debe llegar con las cuatro respondidas.</a:t>
+              <a:t>–   Una decision de modelado es, por definicion, una decision costosa de deshacer.</a:t>
             </a:r>
           </a:p>
           <a:p>
@@ -12208,39 +12775,7 @@
                 </a:solidFill>
                 <a:latin typeface="Calibri"/>
               </a:rPr>
-              <a:t>–   Por que esa normalizacion: la respuesta esperada es que el modelo esta en tercera forma normal, es decir que cada atributo depende de la clave completa y de nada mas, y por eso el telefono del dueno vive en la tabla Dueno y no repetido en cada fila de Mascota.</a:t>
-            </a:r>
-          </a:p>
-          <a:p>
-            <a:pPr>
-              <a:spcAft>
-                <a:spcPts val="800"/>
-              </a:spcAft>
-            </a:pPr>
-            <a:r>
-              <a:rPr sz="2000" b="0" i="0">
-                <a:solidFill>
-                  <a:srgbClr val="333333"/>
-                </a:solidFill>
-                <a:latin typeface="Calibri"/>
-              </a:rPr>
-              <a:t>–   Y a continuacion se declara la desnormalizacion deliberada si existe: «guardamos el total en Factura aunque se pueda calcular sumando el detalle, porque el total es un valor historico que no debe cambiar si manana sube el precio del insumo».</a:t>
-            </a:r>
-          </a:p>
-          <a:p>
-            <a:pPr>
-              <a:spcAft>
-                <a:spcPts val="800"/>
-              </a:spcAft>
-            </a:pPr>
-            <a:r>
-              <a:rPr sz="2000" b="0" i="0">
-                <a:solidFill>
-                  <a:srgbClr val="333333"/>
-                </a:solidFill>
-                <a:latin typeface="Calibri"/>
-              </a:rPr>
-              <a:t>–   Esa segunda mitad es la que distingue al estudiante que entendio, porque normalizar no es un dogma sino un punto de partida del que se sale con razones escritas.</a:t>
+              <a:t>–   La clase de hoy no trae tema nuevo: trae la teoria de como se comunica y se empaqueta un trabajo tecnico para que un tercero pueda evaluarlo, reproducirlo y usarlo sin hablar con quien lo hizo.</a:t>
             </a:r>
           </a:p>
         </p:txBody>
@@ -12421,7 +12956,7 @@
                 </a:solidFill>
                 <a:latin typeface="Calibri"/>
               </a:rPr>
-              <a:t>Las cuatro preguntas de por que que se hacen casi siempre (2/2)</a:t>
+              <a:t>Las cuatro preguntas de por que que se hacen casi siempre (1/2)</a:t>
             </a:r>
           </a:p>
         </p:txBody>
@@ -12460,7 +12995,7 @@
                 </a:solidFill>
                 <a:latin typeface="Calibri"/>
               </a:rPr>
-              <a:t>–   Por que ese indice: la respuesta debe nombrar la consulta concreta que lo aprovecha, por ejemplo un indice sobre (id_veterinario</a:t>
+              <a:t>–   Hay cuatro preguntas de por que que se hacen casi siempre, y el estudiante debe llegar con las cuatro respondidas.</a:t>
             </a:r>
           </a:p>
           <a:p>
@@ -12476,7 +13011,7 @@
                 </a:solidFill>
                 <a:latin typeface="Calibri"/>
               </a:rPr>
-              <a:t>–   Fecha_hora) porque la busqueda de agenda filtra por veterinario y ordena por hora, y debe venir con la medicion de antes y despues.</a:t>
+              <a:t>–   Por que esa normalizacion: la respuesta esperada es que el modelo esta en tercera forma normal, es decir que cada atributo depende de la clave completa y de nada mas, y por eso el telefono del dueno vive en la tabla Dueno y no repetido en cada fila de Mascota.</a:t>
             </a:r>
           </a:p>
           <a:p>
@@ -12492,7 +13027,7 @@
                 </a:solidFill>
                 <a:latin typeface="Calibri"/>
               </a:rPr>
-              <a:t>–   Por que ese tipo de dato: por que la fecha de la cita es DATE o TIMESTAMP y no VARCHAR, y por que el telefono es VARCHAR y no numerico, porque con telefonos no se hace aritmetica y porque un tipo numerico pierde los ceros iniciales.</a:t>
+              <a:t>–   Y a continuacion se declara la desnormalizacion deliberada si existe: «guardamos el total en Factura aunque se pueda calcular sumando el detalle, porque el total es un valor historico que no debe cambiar si manana sube el precio del insumo».</a:t>
             </a:r>
           </a:p>
         </p:txBody>
@@ -12673,7 +13208,7 @@
                 </a:solidFill>
                 <a:latin typeface="Calibri"/>
               </a:rPr>
-              <a:t>La cuarta pregunta, la que mas se falla (1/2)</a:t>
+              <a:t>Las cuatro preguntas de por que que se hacen casi siempre (2/2)</a:t>
             </a:r>
           </a:p>
         </p:txBody>
@@ -12712,7 +13247,7 @@
                 </a:solidFill>
                 <a:latin typeface="Calibri"/>
               </a:rPr>
-              <a:t>–   La cuarta pregunta merece parrafo propio porque es la que mas se falla: por que esa regla esta en un disparador y no en la aplicacion.</a:t>
+              <a:t>–   Por que ese indice: la respuesta debe nombrar la consulta concreta que lo aprovecha, por ejemplo un indice sobre (id_veterinario</a:t>
             </a:r>
           </a:p>
           <a:p>
@@ -12728,7 +13263,7 @@
                 </a:solidFill>
                 <a:latin typeface="Calibri"/>
               </a:rPr>
-              <a:t>–   Un disparador, o trigger, es un bloque de codigo que el motor ejecuta automaticamente cuando ocurre un evento sobre una tabla, sin que nadie lo invoque.</a:t>
+              <a:t>–   Fecha_hora) porque la busqueda de agenda filtra por veterinario y ordena por hora, y debe venir con la medicion de antes y despues.</a:t>
             </a:r>
           </a:p>
           <a:p>
@@ -12744,39 +13279,7 @@
                 </a:solidFill>
                 <a:latin typeface="Calibri"/>
               </a:rPr>
-              <a:t>–   El argumento a favor, y el unico que vale en una sustentacion, es la cobertura: el disparador se ejecuta no importa quien escriba.</a:t>
-            </a:r>
-          </a:p>
-          <a:p>
-            <a:pPr>
-              <a:spcAft>
-                <a:spcPts val="800"/>
-              </a:spcAft>
-            </a:pPr>
-            <a:r>
-              <a:rPr sz="2000" b="0" i="0">
-                <a:solidFill>
-                  <a:srgbClr val="333333"/>
-                </a:solidFill>
-                <a:latin typeface="Calibri"/>
-              </a:rPr>
-              <a:t>–   Si la regla «el stock de un insumo nunca queda negativo» vive en el disparador, se cumple cuando escribe la aplicacion, cuando escribe un script de carga masiva y cuando alguien se conecta con un cliente SQL a corregir un dato a mano.</a:t>
-            </a:r>
-          </a:p>
-          <a:p>
-            <a:pPr>
-              <a:spcAft>
-                <a:spcPts val="800"/>
-              </a:spcAft>
-            </a:pPr>
-            <a:r>
-              <a:rPr sz="2000" b="0" i="0">
-                <a:solidFill>
-                  <a:srgbClr val="333333"/>
-                </a:solidFill>
-                <a:latin typeface="Calibri"/>
-              </a:rPr>
-              <a:t>–   Si vive en la aplicacion, los dos ultimos caminos la evaden sin esfuerzo.</a:t>
+              <a:t>–   Por que ese tipo de dato: por que la fecha de la cita es DATE o TIMESTAMP y no VARCHAR, y por que el telefono es VARCHAR y no numerico, porque con telefonos no se hace aritmetica y porque un tipo numerico pierde los ceros iniciales.</a:t>
             </a:r>
           </a:p>
         </p:txBody>
@@ -12957,7 +13460,7 @@
                 </a:solidFill>
                 <a:latin typeface="Calibri"/>
               </a:rPr>
-              <a:t>La cuarta pregunta, la que mas se falla (2/2)</a:t>
+              <a:t>La cuarta pregunta, la que mas se falla (1/2)</a:t>
             </a:r>
           </a:p>
         </p:txBody>
@@ -12996,7 +13499,7 @@
                 </a:solidFill>
                 <a:latin typeface="Calibri"/>
               </a:rPr>
-              <a:t>–   Lo mismo aplica al disparador de auditoria de precios: si se quiere saber quien cambio el precio de una vacuna, ese registro tiene que escribirse dentro de la base, porque quien edita a mano no lo va a escribir por cortesia.</a:t>
+              <a:t>–   Un disparador, o trigger, es un bloque de codigo que el motor ejecuta automaticamente cuando ocurre un evento sobre una tabla, sin que nadie lo invoque.</a:t>
             </a:r>
           </a:p>
           <a:p>
@@ -13012,7 +13515,7 @@
                 </a:solidFill>
                 <a:latin typeface="Calibri"/>
               </a:rPr>
-              <a:t>–   Y hay que dar tambien el contra-argumento, porque un evaluador atento lo va a pedir: los disparadores son logica invisible, no aparecen en el codigo de la aplicacion, sorprenden a quien depura</a:t>
+              <a:t>–   El argumento a favor, y el unico que vale en una sustentacion, es la cobertura: el disparador se ejecuta no importa quien escriba.</a:t>
             </a:r>
           </a:p>
           <a:p>
@@ -13028,23 +13531,7 @@
                 </a:solidFill>
                 <a:latin typeface="Calibri"/>
               </a:rPr>
-              <a:t>–   Y se disparan en cascada si uno modifica una tabla que a su vez tiene otro disparador.</a:t>
-            </a:r>
-          </a:p>
-          <a:p>
-            <a:pPr>
-              <a:spcAft>
-                <a:spcPts val="800"/>
-              </a:spcAft>
-            </a:pPr>
-            <a:r>
-              <a:rPr sz="2000" b="0" i="0">
-                <a:solidFill>
-                  <a:srgbClr val="333333"/>
-                </a:solidFill>
-                <a:latin typeface="Calibri"/>
-              </a:rPr>
-              <a:t>–   Por eso la convencion sana, que el estudiante puede citar como criterio propio, es reservarlos para invariantes de integridad y auditoria, y dejar el flujo de negocio en procedimientos que se invocan explicitamente.</a:t>
+              <a:t>–   Si la regla «el stock de un insumo nunca queda negativo» vive en el disparador, se cumple cuando escribe la aplicacion, cuando escribe un script de carga masiva y cuando alguien se conecta con un cliente SQL a corregir un dato a mano.</a:t>
             </a:r>
           </a:p>
         </p:txBody>
@@ -13225,7 +13712,7 @@
                 </a:solidFill>
                 <a:latin typeface="Calibri"/>
               </a:rPr>
-              <a:t>Reproducible: un tercero llega a la misma base sin hablar con el autor (1/2)</a:t>
+              <a:t>La cuarta pregunta, la que mas se falla (2/2)</a:t>
             </a:r>
           </a:p>
         </p:txBody>
@@ -13258,13 +13745,13 @@
               </a:spcAft>
             </a:pPr>
             <a:r>
-              <a:rPr sz="1800" b="0" i="0">
+              <a:rPr sz="2000" b="0" i="0">
                 <a:solidFill>
                   <a:srgbClr val="333333"/>
                 </a:solidFill>
                 <a:latin typeface="Calibri"/>
               </a:rPr>
-              <a:t>–   Un entregable de base de datos es reproducible si un tercero, con solo el archivo comprimido y sin hablar con el autor, obtiene la misma base funcionando.</a:t>
+              <a:t>–   Lo mismo aplica al disparador de auditoria de precios: si se quiere saber quien cambio el precio de una vacuna, ese registro tiene que escribirse dentro de la base, porque quien edita a mano no lo va a escribir por cortesia.</a:t>
             </a:r>
           </a:p>
           <a:p>
@@ -13274,13 +13761,13 @@
               </a:spcAft>
             </a:pPr>
             <a:r>
-              <a:rPr sz="1800" b="0" i="0">
+              <a:rPr sz="2000" b="0" i="0">
                 <a:solidFill>
                   <a:srgbClr val="333333"/>
                 </a:solidFill>
                 <a:latin typeface="Calibri"/>
               </a:rPr>
-              <a:t>–   La estructura que la garantiza es una carpeta con archivos numerados en el orden exacto de ejecucion: 00_LEEME.txt, 01_ddl.sql, 02_datos_prueba.sql, 03_roles.sql, 04_procedimientos.sql, 05_funciones.sql, 06_triggers.sql, 07_optimizacion.sql y 08_pruebas.sql.</a:t>
+              <a:t>–   Y hay que dar tambien el contra-argumento, porque un evaluador atento lo va a pedir: los disparadores son logica invisible, no aparecen en el codigo de la aplicacion, sorprenden a quien depura</a:t>
             </a:r>
           </a:p>
           <a:p>
@@ -13290,77 +13777,13 @@
               </a:spcAft>
             </a:pPr>
             <a:r>
-              <a:rPr sz="1800" b="0" i="0">
+              <a:rPr sz="2000" b="0" i="0">
                 <a:solidFill>
                   <a:srgbClr val="333333"/>
                 </a:solidFill>
                 <a:latin typeface="Calibri"/>
               </a:rPr>
-              <a:t>–   El orden no es estetico, es una dependencia real: una tabla con clave foranea no se puede crear antes que la tabla a la que apunta, y un disparador no compila si su tabla todavia no existe.</a:t>
-            </a:r>
-          </a:p>
-          <a:p>
-            <a:pPr>
-              <a:spcAft>
-                <a:spcPts val="800"/>
-              </a:spcAft>
-            </a:pPr>
-            <a:r>
-              <a:rPr sz="1800" b="0" i="0">
-                <a:solidFill>
-                  <a:srgbClr val="333333"/>
-                </a:solidFill>
-                <a:latin typeface="Calibri"/>
-              </a:rPr>
-              <a:t>–   Los datos de prueba tampoco son triviales, porque con dos filas por tabla no se demuestra nada: el minimo razonable para VetCare es tres duenos</a:t>
-            </a:r>
-          </a:p>
-          <a:p>
-            <a:pPr>
-              <a:spcAft>
-                <a:spcPts val="800"/>
-              </a:spcAft>
-            </a:pPr>
-            <a:r>
-              <a:rPr sz="1800" b="0" i="0">
-                <a:solidFill>
-                  <a:srgbClr val="333333"/>
-                </a:solidFill>
-                <a:latin typeface="Calibri"/>
-              </a:rPr>
-              <a:t>–   Cinco mascotas, dos veterinarios, diez citas repartidas en varios dias, cinco insumos con stock y tres facturas con su detalle</a:t>
-            </a:r>
-          </a:p>
-          <a:p>
-            <a:pPr>
-              <a:spcAft>
-                <a:spcPts val="800"/>
-              </a:spcAft>
-            </a:pPr>
-            <a:r>
-              <a:rPr sz="1800" b="0" i="0">
-                <a:solidFill>
-                  <a:srgbClr val="333333"/>
-                </a:solidFill>
-                <a:latin typeface="Calibri"/>
-              </a:rPr>
-              <a:t>–   Incluyendo deliberadamente los casos borde que los procedimientos deben rechazar, es decir una mascota marcada como inactiva y un insumo con stock en uno, porque sin esas dos filas el estudiante no puede demostrar su manejo de errores.</a:t>
-            </a:r>
-          </a:p>
-          <a:p>
-            <a:pPr>
-              <a:spcAft>
-                <a:spcPts val="800"/>
-              </a:spcAft>
-            </a:pPr>
-            <a:r>
-              <a:rPr sz="1800" b="0" i="0">
-                <a:solidFill>
-                  <a:srgbClr val="333333"/>
-                </a:solidFill>
-                <a:latin typeface="Calibri"/>
-              </a:rPr>
-              <a:t>–   Uno, no declarar motor y version: el SQL no es un solo idioma, porque una columna autoincremental se escribe SERIAL en PostgreSQL</a:t>
+              <a:t>–   Y se disparan en cascada si uno modifica una tabla que a su vez tiene otro disparador.</a:t>
             </a:r>
           </a:p>
         </p:txBody>

--- a/Bases de Datos II/Clases/Clase 15 - Presentacion del proyecto y cierre/Presentacion.pptx
+++ b/Bases de Datos II/Clases/Clase 15 - Presentacion del proyecto y cierre/Presentacion.pptx
@@ -9,32 +9,24 @@
     <p:sldId id="257" r:id="rId8"/>
     <p:sldId id="258" r:id="rId9"/>
     <p:sldId id="259" r:id="rId10"/>
-    <p:sldId id="260" r:id="rId11"/>
-    <p:sldId id="261" r:id="rId12"/>
-    <p:sldId id="262" r:id="rId13"/>
-    <p:sldId id="263" r:id="rId14"/>
-    <p:sldId id="264" r:id="rId15"/>
-    <p:sldId id="265" r:id="rId16"/>
-    <p:sldId id="266" r:id="rId17"/>
-    <p:sldId id="267" r:id="rId18"/>
-    <p:sldId id="268" r:id="rId19"/>
-    <p:sldId id="269" r:id="rId20"/>
-    <p:sldId id="270" r:id="rId21"/>
-    <p:sldId id="271" r:id="rId22"/>
-    <p:sldId id="272" r:id="rId23"/>
-    <p:sldId id="273" r:id="rId24"/>
-    <p:sldId id="274" r:id="rId25"/>
-    <p:sldId id="275" r:id="rId26"/>
-    <p:sldId id="276" r:id="rId27"/>
-    <p:sldId id="277" r:id="rId28"/>
-    <p:sldId id="278" r:id="rId29"/>
-    <p:sldId id="279" r:id="rId30"/>
-    <p:sldId id="280" r:id="rId31"/>
-    <p:sldId id="281" r:id="rId32"/>
-    <p:sldId id="282" r:id="rId33"/>
-    <p:sldId id="283" r:id="rId34"/>
-    <p:sldId id="284" r:id="rId35"/>
-    <p:sldId id="285" r:id="rId36"/>
+    <p:sldId id="260" r:id="rId12"/>
+    <p:sldId id="261" r:id="rId13"/>
+    <p:sldId id="262" r:id="rId14"/>
+    <p:sldId id="263" r:id="rId15"/>
+    <p:sldId id="264" r:id="rId16"/>
+    <p:sldId id="265" r:id="rId17"/>
+    <p:sldId id="266" r:id="rId18"/>
+    <p:sldId id="267" r:id="rId19"/>
+    <p:sldId id="268" r:id="rId20"/>
+    <p:sldId id="269" r:id="rId21"/>
+    <p:sldId id="270" r:id="rId22"/>
+    <p:sldId id="271" r:id="rId23"/>
+    <p:sldId id="272" r:id="rId24"/>
+    <p:sldId id="273" r:id="rId25"/>
+    <p:sldId id="274" r:id="rId26"/>
+    <p:sldId id="275" r:id="rId27"/>
+    <p:sldId id="276" r:id="rId28"/>
+    <p:sldId id="277" r:id="rId29"/>
   </p:sldIdLst>
   <p:sldSz cx="12191695" cy="6858000" type="screen4x3"/>
   <p:notesSz cx="6858000" cy="9144000"/>
@@ -134,6 +126,881 @@
     </a:lvl9pPr>
   </p:defaultTextStyle>
 </p:presentation>
+</file>
+
+<file path=ppt/notesMasters/notesMaster1.xml><?xml version="1.0" encoding="utf-8"?>
+<p:notesMaster xmlns:a="http://schemas.openxmlformats.org/drawingml/2006/main" xmlns:p="http://schemas.openxmlformats.org/presentationml/2006/main" xmlns:r="http://schemas.openxmlformats.org/officeDocument/2006/relationships">
+  <p:cSld>
+    <p:bg>
+      <p:bgRef idx="1001">
+        <a:schemeClr val="bg1"/>
+      </p:bgRef>
+    </p:bg>
+    <p:spTree>
+      <p:nvGrpSpPr>
+        <p:cNvPr id="1" name=""/>
+        <p:cNvGrpSpPr/>
+        <p:nvPr/>
+      </p:nvGrpSpPr>
+      <p:grpSpPr>
+        <a:xfrm>
+          <a:off x="0" y="0"/>
+          <a:ext cx="0" cy="0"/>
+          <a:chOff x="0" y="0"/>
+          <a:chExt cx="0" cy="0"/>
+        </a:xfrm>
+      </p:grpSpPr>
+      <p:sp>
+        <p:nvSpPr>
+          <p:cNvPr id="2" name="Header Placeholder 1"/>
+          <p:cNvSpPr>
+            <a:spLocks noGrp="1"/>
+          </p:cNvSpPr>
+          <p:nvPr>
+            <p:ph type="hdr" sz="quarter"/>
+          </p:nvPr>
+        </p:nvSpPr>
+        <p:spPr>
+          <a:xfrm>
+            <a:off x="0" y="0"/>
+            <a:ext cx="2971800" cy="457200"/>
+          </a:xfrm>
+          <a:prstGeom prst="rect">
+            <a:avLst/>
+          </a:prstGeom>
+        </p:spPr>
+        <p:txBody>
+          <a:bodyPr vert="horz" lIns="91440" tIns="45720" rIns="91440" bIns="45720" rtlCol="0"/>
+          <a:lstStyle>
+            <a:lvl1pPr algn="l">
+              <a:defRPr sz="1200"/>
+            </a:lvl1pPr>
+          </a:lstStyle>
+          <a:p>
+            <a:endParaRPr lang="en-US"/>
+          </a:p>
+        </p:txBody>
+      </p:sp>
+      <p:sp>
+        <p:nvSpPr>
+          <p:cNvPr id="3" name="Date Placeholder 2"/>
+          <p:cNvSpPr>
+            <a:spLocks noGrp="1"/>
+          </p:cNvSpPr>
+          <p:nvPr>
+            <p:ph type="dt" idx="1"/>
+          </p:nvPr>
+        </p:nvSpPr>
+        <p:spPr>
+          <a:xfrm>
+            <a:off x="3884613" y="0"/>
+            <a:ext cx="2971800" cy="457200"/>
+          </a:xfrm>
+          <a:prstGeom prst="rect">
+            <a:avLst/>
+          </a:prstGeom>
+        </p:spPr>
+        <p:txBody>
+          <a:bodyPr vert="horz" lIns="91440" tIns="45720" rIns="91440" bIns="45720" rtlCol="0"/>
+          <a:lstStyle>
+            <a:lvl1pPr algn="r">
+              <a:defRPr sz="1200"/>
+            </a:lvl1pPr>
+          </a:lstStyle>
+          <a:p>
+            <a:fld id="{0F89C1C7-3DCD-1040-A9CF-14679D8B5DDD}" type="datetimeFigureOut">
+              <a:rPr lang="en-US" smtClean="0"/>
+              <a:t>10/17/16</a:t>
+            </a:fld>
+            <a:endParaRPr lang="en-US"/>
+          </a:p>
+        </p:txBody>
+      </p:sp>
+      <p:sp>
+        <p:nvSpPr>
+          <p:cNvPr id="4" name="Slide Image Placeholder 3"/>
+          <p:cNvSpPr>
+            <a:spLocks noGrp="1" noRot="1" noChangeAspect="1"/>
+          </p:cNvSpPr>
+          <p:nvPr>
+            <p:ph type="sldImg" idx="2"/>
+          </p:nvPr>
+        </p:nvSpPr>
+        <p:spPr>
+          <a:xfrm>
+            <a:off x="1143000" y="685800"/>
+            <a:ext cx="4572000" cy="3429000"/>
+          </a:xfrm>
+          <a:prstGeom prst="rect">
+            <a:avLst/>
+          </a:prstGeom>
+          <a:noFill/>
+          <a:ln w="12700">
+            <a:solidFill>
+              <a:prstClr val="black"/>
+            </a:solidFill>
+          </a:ln>
+        </p:spPr>
+        <p:txBody>
+          <a:bodyPr vert="horz" lIns="91440" tIns="45720" rIns="91440" bIns="45720" rtlCol="0" anchor="ctr"/>
+          <a:lstStyle/>
+          <a:p>
+            <a:endParaRPr lang="en-US"/>
+          </a:p>
+        </p:txBody>
+      </p:sp>
+      <p:sp>
+        <p:nvSpPr>
+          <p:cNvPr id="5" name="Notes Placeholder 4"/>
+          <p:cNvSpPr>
+            <a:spLocks noGrp="1"/>
+          </p:cNvSpPr>
+          <p:nvPr>
+            <p:ph type="body" sz="quarter" idx="3"/>
+          </p:nvPr>
+        </p:nvSpPr>
+        <p:spPr>
+          <a:xfrm>
+            <a:off x="685800" y="4343400"/>
+            <a:ext cx="5486400" cy="4114800"/>
+          </a:xfrm>
+          <a:prstGeom prst="rect">
+            <a:avLst/>
+          </a:prstGeom>
+        </p:spPr>
+        <p:txBody>
+          <a:bodyPr vert="horz" lIns="91440" tIns="45720" rIns="91440" bIns="45720" rtlCol="0"/>
+          <a:lstStyle/>
+          <a:p>
+            <a:pPr lvl="0"/>
+            <a:r>
+              <a:rPr lang="en-US" smtClean="0"/>
+              <a:t>Click to edit Master text styles</a:t>
+            </a:r>
+          </a:p>
+          <a:p>
+            <a:pPr lvl="1"/>
+            <a:r>
+              <a:rPr lang="en-US" smtClean="0"/>
+              <a:t>Second level</a:t>
+            </a:r>
+          </a:p>
+          <a:p>
+            <a:pPr lvl="2"/>
+            <a:r>
+              <a:rPr lang="en-US" smtClean="0"/>
+              <a:t>Third level</a:t>
+            </a:r>
+          </a:p>
+          <a:p>
+            <a:pPr lvl="3"/>
+            <a:r>
+              <a:rPr lang="en-US" smtClean="0"/>
+              <a:t>Fourth level</a:t>
+            </a:r>
+          </a:p>
+          <a:p>
+            <a:pPr lvl="4"/>
+            <a:r>
+              <a:rPr lang="en-US" smtClean="0"/>
+              <a:t>Fifth level</a:t>
+            </a:r>
+            <a:endParaRPr lang="en-US"/>
+          </a:p>
+        </p:txBody>
+      </p:sp>
+      <p:sp>
+        <p:nvSpPr>
+          <p:cNvPr id="6" name="Footer Placeholder 5"/>
+          <p:cNvSpPr>
+            <a:spLocks noGrp="1"/>
+          </p:cNvSpPr>
+          <p:nvPr>
+            <p:ph type="ftr" sz="quarter" idx="4"/>
+          </p:nvPr>
+        </p:nvSpPr>
+        <p:spPr>
+          <a:xfrm>
+            <a:off x="0" y="8685213"/>
+            <a:ext cx="2971800" cy="457200"/>
+          </a:xfrm>
+          <a:prstGeom prst="rect">
+            <a:avLst/>
+          </a:prstGeom>
+        </p:spPr>
+        <p:txBody>
+          <a:bodyPr vert="horz" lIns="91440" tIns="45720" rIns="91440" bIns="45720" rtlCol="0" anchor="b"/>
+          <a:lstStyle>
+            <a:lvl1pPr algn="l">
+              <a:defRPr sz="1200"/>
+            </a:lvl1pPr>
+          </a:lstStyle>
+          <a:p>
+            <a:endParaRPr lang="en-US"/>
+          </a:p>
+        </p:txBody>
+      </p:sp>
+      <p:sp>
+        <p:nvSpPr>
+          <p:cNvPr id="7" name="Slide Number Placeholder 6"/>
+          <p:cNvSpPr>
+            <a:spLocks noGrp="1"/>
+          </p:cNvSpPr>
+          <p:nvPr>
+            <p:ph type="sldNum" sz="quarter" idx="5"/>
+          </p:nvPr>
+        </p:nvSpPr>
+        <p:spPr>
+          <a:xfrm>
+            <a:off x="3884613" y="8685213"/>
+            <a:ext cx="2971800" cy="457200"/>
+          </a:xfrm>
+          <a:prstGeom prst="rect">
+            <a:avLst/>
+          </a:prstGeom>
+        </p:spPr>
+        <p:txBody>
+          <a:bodyPr vert="horz" lIns="91440" tIns="45720" rIns="91440" bIns="45720" rtlCol="0" anchor="b"/>
+          <a:lstStyle>
+            <a:lvl1pPr algn="r">
+              <a:defRPr sz="1200"/>
+            </a:lvl1pPr>
+          </a:lstStyle>
+          <a:p>
+            <a:fld id="{BB5E49A5-4136-284D-997B-48E1D791AD67}" type="slidenum">
+              <a:rPr lang="en-US" smtClean="0"/>
+              <a:t>‹#›</a:t>
+            </a:fld>
+            <a:endParaRPr lang="en-US"/>
+          </a:p>
+        </p:txBody>
+      </p:sp>
+    </p:spTree>
+    <p:extLst>
+      <p:ext uri="{BB962C8B-B14F-4D97-AF65-F5344CB8AC3E}">
+        <p14:creationId xmlns:p14="http://schemas.microsoft.com/office/powerpoint/2010/main" val="2623252185"/>
+      </p:ext>
+    </p:extLst>
+  </p:cSld>
+  <p:clrMap bg1="lt1" tx1="dk1" bg2="lt2" tx2="dk2" accent1="accent1" accent2="accent2" accent3="accent3" accent4="accent4" accent5="accent5" accent6="accent6" hlink="hlink" folHlink="folHlink"/>
+  <p:notesStyle>
+    <a:lvl1pPr marL="0" algn="l" defTabSz="457200" rtl="0" eaLnBrk="1" latinLnBrk="0" hangingPunct="1">
+      <a:defRPr sz="1200" kern="1200">
+        <a:solidFill>
+          <a:schemeClr val="tx1"/>
+        </a:solidFill>
+        <a:latin typeface="+mn-lt"/>
+        <a:ea typeface="+mn-ea"/>
+        <a:cs typeface="+mn-cs"/>
+      </a:defRPr>
+    </a:lvl1pPr>
+    <a:lvl2pPr marL="457200" algn="l" defTabSz="457200" rtl="0" eaLnBrk="1" latinLnBrk="0" hangingPunct="1">
+      <a:defRPr sz="1200" kern="1200">
+        <a:solidFill>
+          <a:schemeClr val="tx1"/>
+        </a:solidFill>
+        <a:latin typeface="+mn-lt"/>
+        <a:ea typeface="+mn-ea"/>
+        <a:cs typeface="+mn-cs"/>
+      </a:defRPr>
+    </a:lvl2pPr>
+    <a:lvl3pPr marL="914400" algn="l" defTabSz="457200" rtl="0" eaLnBrk="1" latinLnBrk="0" hangingPunct="1">
+      <a:defRPr sz="1200" kern="1200">
+        <a:solidFill>
+          <a:schemeClr val="tx1"/>
+        </a:solidFill>
+        <a:latin typeface="+mn-lt"/>
+        <a:ea typeface="+mn-ea"/>
+        <a:cs typeface="+mn-cs"/>
+      </a:defRPr>
+    </a:lvl3pPr>
+    <a:lvl4pPr marL="1371600" algn="l" defTabSz="457200" rtl="0" eaLnBrk="1" latinLnBrk="0" hangingPunct="1">
+      <a:defRPr sz="1200" kern="1200">
+        <a:solidFill>
+          <a:schemeClr val="tx1"/>
+        </a:solidFill>
+        <a:latin typeface="+mn-lt"/>
+        <a:ea typeface="+mn-ea"/>
+        <a:cs typeface="+mn-cs"/>
+      </a:defRPr>
+    </a:lvl4pPr>
+    <a:lvl5pPr marL="1828800" algn="l" defTabSz="457200" rtl="0" eaLnBrk="1" latinLnBrk="0" hangingPunct="1">
+      <a:defRPr sz="1200" kern="1200">
+        <a:solidFill>
+          <a:schemeClr val="tx1"/>
+        </a:solidFill>
+        <a:latin typeface="+mn-lt"/>
+        <a:ea typeface="+mn-ea"/>
+        <a:cs typeface="+mn-cs"/>
+      </a:defRPr>
+    </a:lvl5pPr>
+    <a:lvl6pPr marL="2286000" algn="l" defTabSz="457200" rtl="0" eaLnBrk="1" latinLnBrk="0" hangingPunct="1">
+      <a:defRPr sz="1200" kern="1200">
+        <a:solidFill>
+          <a:schemeClr val="tx1"/>
+        </a:solidFill>
+        <a:latin typeface="+mn-lt"/>
+        <a:ea typeface="+mn-ea"/>
+        <a:cs typeface="+mn-cs"/>
+      </a:defRPr>
+    </a:lvl6pPr>
+    <a:lvl7pPr marL="2743200" algn="l" defTabSz="457200" rtl="0" eaLnBrk="1" latinLnBrk="0" hangingPunct="1">
+      <a:defRPr sz="1200" kern="1200">
+        <a:solidFill>
+          <a:schemeClr val="tx1"/>
+        </a:solidFill>
+        <a:latin typeface="+mn-lt"/>
+        <a:ea typeface="+mn-ea"/>
+        <a:cs typeface="+mn-cs"/>
+      </a:defRPr>
+    </a:lvl7pPr>
+    <a:lvl8pPr marL="3200400" algn="l" defTabSz="457200" rtl="0" eaLnBrk="1" latinLnBrk="0" hangingPunct="1">
+      <a:defRPr sz="1200" kern="1200">
+        <a:solidFill>
+          <a:schemeClr val="tx1"/>
+        </a:solidFill>
+        <a:latin typeface="+mn-lt"/>
+        <a:ea typeface="+mn-ea"/>
+        <a:cs typeface="+mn-cs"/>
+      </a:defRPr>
+    </a:lvl8pPr>
+    <a:lvl9pPr marL="3657600" algn="l" defTabSz="457200" rtl="0" eaLnBrk="1" latinLnBrk="0" hangingPunct="1">
+      <a:defRPr sz="1200" kern="1200">
+        <a:solidFill>
+          <a:schemeClr val="tx1"/>
+        </a:solidFill>
+        <a:latin typeface="+mn-lt"/>
+        <a:ea typeface="+mn-ea"/>
+        <a:cs typeface="+mn-cs"/>
+      </a:defRPr>
+    </a:lvl9pPr>
+  </p:notesStyle>
+</p:notesMaster>
+</file>
+
+<file path=ppt/notesSlides/notesSlide1.xml><?xml version="1.0" encoding="utf-8"?>
+<p:notes xmlns:a="http://schemas.openxmlformats.org/drawingml/2006/main" xmlns:p="http://schemas.openxmlformats.org/presentationml/2006/main" xmlns:r="http://schemas.openxmlformats.org/officeDocument/2006/relationships">
+  <p:cSld>
+    <p:spTree>
+      <p:nvGrpSpPr>
+        <p:cNvPr id="1" name=""/>
+        <p:cNvGrpSpPr/>
+        <p:nvPr/>
+      </p:nvGrpSpPr>
+      <p:grpSpPr>
+        <a:xfrm>
+          <a:off x="0" y="0"/>
+          <a:ext cx="0" cy="0"/>
+          <a:chOff x="0" y="0"/>
+          <a:chExt cx="0" cy="0"/>
+        </a:xfrm>
+      </p:grpSpPr>
+      <p:sp>
+        <p:nvSpPr>
+          <p:cNvPr id="2" name="Slide Image Placeholder 1"/>
+          <p:cNvSpPr>
+            <a:spLocks noGrp="1"/>
+          </p:cNvSpPr>
+          <p:nvPr>
+            <p:ph type="sldImg" idx="2"/>
+          </p:nvPr>
+        </p:nvSpPr>
+        <p:spPr/>
+      </p:sp>
+      <p:sp>
+        <p:nvSpPr>
+          <p:cNvPr id="3" name="Notes Placeholder 2"/>
+          <p:cNvSpPr>
+            <a:spLocks noGrp="1"/>
+          </p:cNvSpPr>
+          <p:nvPr>
+            <p:ph type="body" idx="3" sz="quarter"/>
+          </p:nvPr>
+        </p:nvSpPr>
+        <p:spPr/>
+        <p:txBody>
+          <a:bodyPr/>
+          <a:lstStyle/>
+          <a:p>
+            <a:r>
+              <a:t>Eso convierte cada eleccion del ER en algo que se debe poder defender, y es exactamente lo que un evaluador (o un lider tecnico en una entrevista) va a probar con dos o tres preguntas bien elegidas.</a:t>
+            </a:r>
+          </a:p>
+        </p:txBody>
+      </p:sp>
+      <p:sp>
+        <p:nvSpPr>
+          <p:cNvPr id="4" name="Slide Number Placeholder 3"/>
+          <p:cNvSpPr>
+            <a:spLocks noGrp="1"/>
+          </p:cNvSpPr>
+          <p:nvPr>
+            <p:ph type="sldNum" idx="5" sz="quarter"/>
+          </p:nvPr>
+        </p:nvSpPr>
+        <p:spPr/>
+      </p:sp>
+    </p:spTree>
+  </p:cSld>
+  <p:clrMapOvr>
+    <a:masterClrMapping/>
+  </p:clrMapOvr>
+</p:notes>
+</file>
+
+<file path=ppt/notesSlides/notesSlide2.xml><?xml version="1.0" encoding="utf-8"?>
+<p:notes xmlns:a="http://schemas.openxmlformats.org/drawingml/2006/main" xmlns:p="http://schemas.openxmlformats.org/presentationml/2006/main" xmlns:r="http://schemas.openxmlformats.org/officeDocument/2006/relationships">
+  <p:cSld>
+    <p:spTree>
+      <p:nvGrpSpPr>
+        <p:cNvPr id="1" name=""/>
+        <p:cNvGrpSpPr/>
+        <p:nvPr/>
+      </p:nvGrpSpPr>
+      <p:grpSpPr>
+        <a:xfrm>
+          <a:off x="0" y="0"/>
+          <a:ext cx="0" cy="0"/>
+          <a:chOff x="0" y="0"/>
+          <a:chExt cx="0" cy="0"/>
+        </a:xfrm>
+      </p:grpSpPr>
+      <p:sp>
+        <p:nvSpPr>
+          <p:cNvPr id="2" name="Slide Image Placeholder 1"/>
+          <p:cNvSpPr>
+            <a:spLocks noGrp="1"/>
+          </p:cNvSpPr>
+          <p:nvPr>
+            <p:ph type="sldImg" idx="2"/>
+          </p:nvPr>
+        </p:nvSpPr>
+        <p:spPr/>
+      </p:sp>
+      <p:sp>
+        <p:nvSpPr>
+          <p:cNvPr id="3" name="Notes Placeholder 2"/>
+          <p:cNvSpPr>
+            <a:spLocks noGrp="1"/>
+          </p:cNvSpPr>
+          <p:nvPr>
+            <p:ph type="body" idx="3" sz="quarter"/>
+          </p:nvPr>
+        </p:nvSpPr>
+        <p:spPr/>
+        <p:txBody>
+          <a:bodyPr/>
+          <a:lstStyle/>
+          <a:p>
+            <a:r>
+              <a:t>Esa segunda mitad es la que distingue al estudiante que entendio, porque normalizar no es un dogma sino un punto de partida del que se sale con razones escritas.</a:t>
+            </a:r>
+          </a:p>
+        </p:txBody>
+      </p:sp>
+      <p:sp>
+        <p:nvSpPr>
+          <p:cNvPr id="4" name="Slide Number Placeholder 3"/>
+          <p:cNvSpPr>
+            <a:spLocks noGrp="1"/>
+          </p:cNvSpPr>
+          <p:nvPr>
+            <p:ph type="sldNum" idx="5" sz="quarter"/>
+          </p:nvPr>
+        </p:nvSpPr>
+        <p:spPr/>
+      </p:sp>
+    </p:spTree>
+  </p:cSld>
+  <p:clrMapOvr>
+    <a:masterClrMapping/>
+  </p:clrMapOvr>
+</p:notes>
+</file>
+
+<file path=ppt/notesSlides/notesSlide3.xml><?xml version="1.0" encoding="utf-8"?>
+<p:notes xmlns:a="http://schemas.openxmlformats.org/drawingml/2006/main" xmlns:p="http://schemas.openxmlformats.org/presentationml/2006/main" xmlns:r="http://schemas.openxmlformats.org/officeDocument/2006/relationships">
+  <p:cSld>
+    <p:spTree>
+      <p:nvGrpSpPr>
+        <p:cNvPr id="1" name=""/>
+        <p:cNvGrpSpPr/>
+        <p:nvPr/>
+      </p:nvGrpSpPr>
+      <p:grpSpPr>
+        <a:xfrm>
+          <a:off x="0" y="0"/>
+          <a:ext cx="0" cy="0"/>
+          <a:chOff x="0" y="0"/>
+          <a:chExt cx="0" cy="0"/>
+        </a:xfrm>
+      </p:grpSpPr>
+      <p:sp>
+        <p:nvSpPr>
+          <p:cNvPr id="2" name="Slide Image Placeholder 1"/>
+          <p:cNvSpPr>
+            <a:spLocks noGrp="1"/>
+          </p:cNvSpPr>
+          <p:nvPr>
+            <p:ph type="sldImg" idx="2"/>
+          </p:nvPr>
+        </p:nvSpPr>
+        <p:spPr/>
+      </p:sp>
+      <p:sp>
+        <p:nvSpPr>
+          <p:cNvPr id="3" name="Notes Placeholder 2"/>
+          <p:cNvSpPr>
+            <a:spLocks noGrp="1"/>
+          </p:cNvSpPr>
+          <p:nvPr>
+            <p:ph type="body" idx="3" sz="quarter"/>
+          </p:nvPr>
+        </p:nvSpPr>
+        <p:spPr/>
+        <p:txBody>
+          <a:bodyPr/>
+          <a:lstStyle/>
+          <a:p>
+            <a:r>
+              <a:t>La cuarta pregunta merece parrafo propio porque es la que mas se falla: por que esa regla esta en un disparador y no en la aplicacion.</a:t>
+            </a:r>
+          </a:p>
+          <a:p>
+            <a:r>
+              <a:t>Si vive en la aplicacion, los dos ultimos caminos la evaden sin esfuerzo.</a:t>
+            </a:r>
+          </a:p>
+          <a:p>
+            <a:r>
+              <a:t>Por eso la convencion sana, que el estudiante puede citar como criterio propio, es reservarlos para invariantes de integridad y auditoria, y dejar el flujo de negocio en procedimientos que se invocan explicitamente.</a:t>
+            </a:r>
+          </a:p>
+        </p:txBody>
+      </p:sp>
+      <p:sp>
+        <p:nvSpPr>
+          <p:cNvPr id="4" name="Slide Number Placeholder 3"/>
+          <p:cNvSpPr>
+            <a:spLocks noGrp="1"/>
+          </p:cNvSpPr>
+          <p:nvPr>
+            <p:ph type="sldNum" idx="5" sz="quarter"/>
+          </p:nvPr>
+        </p:nvSpPr>
+        <p:spPr/>
+      </p:sp>
+    </p:spTree>
+  </p:cSld>
+  <p:clrMapOvr>
+    <a:masterClrMapping/>
+  </p:clrMapOvr>
+</p:notes>
+</file>
+
+<file path=ppt/notesSlides/notesSlide4.xml><?xml version="1.0" encoding="utf-8"?>
+<p:notes xmlns:a="http://schemas.openxmlformats.org/drawingml/2006/main" xmlns:p="http://schemas.openxmlformats.org/presentationml/2006/main" xmlns:r="http://schemas.openxmlformats.org/officeDocument/2006/relationships">
+  <p:cSld>
+    <p:spTree>
+      <p:nvGrpSpPr>
+        <p:cNvPr id="1" name=""/>
+        <p:cNvGrpSpPr/>
+        <p:nvPr/>
+      </p:nvGrpSpPr>
+      <p:grpSpPr>
+        <a:xfrm>
+          <a:off x="0" y="0"/>
+          <a:ext cx="0" cy="0"/>
+          <a:chOff x="0" y="0"/>
+          <a:chExt cx="0" cy="0"/>
+        </a:xfrm>
+      </p:grpSpPr>
+      <p:sp>
+        <p:nvSpPr>
+          <p:cNvPr id="2" name="Slide Image Placeholder 1"/>
+          <p:cNvSpPr>
+            <a:spLocks noGrp="1"/>
+          </p:cNvSpPr>
+          <p:nvPr>
+            <p:ph type="sldImg" idx="2"/>
+          </p:nvPr>
+        </p:nvSpPr>
+        <p:spPr/>
+      </p:sp>
+      <p:sp>
+        <p:nvSpPr>
+          <p:cNvPr id="3" name="Notes Placeholder 2"/>
+          <p:cNvSpPr>
+            <a:spLocks noGrp="1"/>
+          </p:cNvSpPr>
+          <p:nvPr>
+            <p:ph type="body" idx="3" sz="quarter"/>
+          </p:nvPr>
+        </p:nvSpPr>
+        <p:spPr/>
+        <p:txBody>
+          <a:bodyPr/>
+          <a:lstStyle/>
+          <a:p>
+            <a:r>
+              <a:t>Esa es la definicion operativa y es la unica prueba que importa; el docente puede aplicarla literalmente abriendo el ZIP en un playground limpio y ejecutando.</a:t>
+            </a:r>
+          </a:p>
+          <a:p>
+            <a:r>
+              <a:t>Sobre esa base, cuatro detalles rompen la reproducibilidad y son los que el docente debe buscar primero al abrir el paquete.</a:t>
+            </a:r>
+          </a:p>
+        </p:txBody>
+      </p:sp>
+      <p:sp>
+        <p:nvSpPr>
+          <p:cNvPr id="4" name="Slide Number Placeholder 3"/>
+          <p:cNvSpPr>
+            <a:spLocks noGrp="1"/>
+          </p:cNvSpPr>
+          <p:nvPr>
+            <p:ph type="sldNum" idx="5" sz="quarter"/>
+          </p:nvPr>
+        </p:nvSpPr>
+        <p:spPr/>
+      </p:sp>
+    </p:spTree>
+  </p:cSld>
+  <p:clrMapOvr>
+    <a:masterClrMapping/>
+  </p:clrMapOvr>
+</p:notes>
+</file>
+
+<file path=ppt/notesSlides/notesSlide5.xml><?xml version="1.0" encoding="utf-8"?>
+<p:notes xmlns:a="http://schemas.openxmlformats.org/drawingml/2006/main" xmlns:p="http://schemas.openxmlformats.org/presentationml/2006/main" xmlns:r="http://schemas.openxmlformats.org/officeDocument/2006/relationships">
+  <p:cSld>
+    <p:spTree>
+      <p:nvGrpSpPr>
+        <p:cNvPr id="1" name=""/>
+        <p:cNvGrpSpPr/>
+        <p:nvPr/>
+      </p:nvGrpSpPr>
+      <p:grpSpPr>
+        <a:xfrm>
+          <a:off x="0" y="0"/>
+          <a:ext cx="0" cy="0"/>
+          <a:chOff x="0" y="0"/>
+          <a:chExt cx="0" cy="0"/>
+        </a:xfrm>
+      </p:grpSpPr>
+      <p:sp>
+        <p:nvSpPr>
+          <p:cNvPr id="2" name="Slide Image Placeholder 1"/>
+          <p:cNvSpPr>
+            <a:spLocks noGrp="1"/>
+          </p:cNvSpPr>
+          <p:nvPr>
+            <p:ph type="sldImg" idx="2"/>
+          </p:nvPr>
+        </p:nvSpPr>
+        <p:spPr/>
+      </p:sp>
+      <p:sp>
+        <p:nvSpPr>
+          <p:cNvPr id="3" name="Notes Placeholder 2"/>
+          <p:cNvSpPr>
+            <a:spLocks noGrp="1"/>
+          </p:cNvSpPr>
+          <p:nvPr>
+            <p:ph type="body" idx="3" sz="quarter"/>
+          </p:nvPr>
+        </p:nvSpPr>
+        <p:spPr/>
+        <p:txBody>
+          <a:bodyPr/>
+          <a:lstStyle/>
+          <a:p>
+            <a:r>
+              <a:t>Lo que si hay que exigir dentro del turno es la ejecucion real: que el estudiante corra el procedimiento en el playground, con su caso valido y su caso invalido, en vez de proyectar capturas fijas, porque una consulta ejecutandose delante del evaluador es la evidencia mas dificil de fingir y la mas rapida de calificar.</a:t>
+            </a:r>
+          </a:p>
+        </p:txBody>
+      </p:sp>
+      <p:sp>
+        <p:nvSpPr>
+          <p:cNvPr id="4" name="Slide Number Placeholder 3"/>
+          <p:cNvSpPr>
+            <a:spLocks noGrp="1"/>
+          </p:cNvSpPr>
+          <p:nvPr>
+            <p:ph type="sldNum" idx="5" sz="quarter"/>
+          </p:nvPr>
+        </p:nvSpPr>
+        <p:spPr/>
+      </p:sp>
+    </p:spTree>
+  </p:cSld>
+  <p:clrMapOvr>
+    <a:masterClrMapping/>
+  </p:clrMapOvr>
+</p:notes>
+</file>
+
+<file path=ppt/notesSlides/notesSlide6.xml><?xml version="1.0" encoding="utf-8"?>
+<p:notes xmlns:a="http://schemas.openxmlformats.org/drawingml/2006/main" xmlns:p="http://schemas.openxmlformats.org/presentationml/2006/main" xmlns:r="http://schemas.openxmlformats.org/officeDocument/2006/relationships">
+  <p:cSld>
+    <p:spTree>
+      <p:nvGrpSpPr>
+        <p:cNvPr id="1" name=""/>
+        <p:cNvGrpSpPr/>
+        <p:nvPr/>
+      </p:nvGrpSpPr>
+      <p:grpSpPr>
+        <a:xfrm>
+          <a:off x="0" y="0"/>
+          <a:ext cx="0" cy="0"/>
+          <a:chOff x="0" y="0"/>
+          <a:chExt cx="0" cy="0"/>
+        </a:xfrm>
+      </p:grpSpPr>
+      <p:sp>
+        <p:nvSpPr>
+          <p:cNvPr id="2" name="Slide Image Placeholder 1"/>
+          <p:cNvSpPr>
+            <a:spLocks noGrp="1"/>
+          </p:cNvSpPr>
+          <p:nvPr>
+            <p:ph type="sldImg" idx="2"/>
+          </p:nvPr>
+        </p:nvSpPr>
+        <p:spPr/>
+      </p:sp>
+      <p:sp>
+        <p:nvSpPr>
+          <p:cNvPr id="3" name="Notes Placeholder 2"/>
+          <p:cNvSpPr>
+            <a:spLocks noGrp="1"/>
+          </p:cNvSpPr>
+          <p:nvPr>
+            <p:ph type="body" idx="3" sz="quarter"/>
+          </p:nvPr>
+        </p:nvSpPr>
+        <p:spPr/>
+        <p:txBody>
+          <a:bodyPr/>
+          <a:lstStyle/>
+          <a:p>
+            <a:r>
+              <a:t>El Q&amp;A sobre modelado tiene preguntas que se repiten, y conviene que el docente tenga las respuestas listas para poder calificarlas y para poder formularlas.</a:t>
+            </a:r>
+          </a:p>
+          <a:p>
+            <a:r>
+              <a:t>Aqui vale la regla general del Q&amp;A tecnico, que el docente debe anunciar antes de empezar: decir «no lo medimos» no penaliza si viene acompanado de como se mediria, por ejemplo «no medimos con volumen real porque el playground se reinicia, pero el plan de ejecucion pasa de recorrido completo a busqueda por indice, y la prueba seria cargar cincuenta mil citas y comparar los tiempos».</a:t>
+            </a:r>
+          </a:p>
+          <a:p>
+            <a:r>
+              <a:t>Inventar un numero, en cambio, se cae con la siguiente pregunta y cuesta mucho mas que admitir el limite.</a:t>
+            </a:r>
+          </a:p>
+        </p:txBody>
+      </p:sp>
+      <p:sp>
+        <p:nvSpPr>
+          <p:cNvPr id="4" name="Slide Number Placeholder 3"/>
+          <p:cNvSpPr>
+            <a:spLocks noGrp="1"/>
+          </p:cNvSpPr>
+          <p:nvPr>
+            <p:ph type="sldNum" idx="5" sz="quarter"/>
+          </p:nvPr>
+        </p:nvSpPr>
+        <p:spPr/>
+      </p:sp>
+    </p:spTree>
+  </p:cSld>
+  <p:clrMapOvr>
+    <a:masterClrMapping/>
+  </p:clrMapOvr>
+</p:notes>
+</file>
+
+<file path=ppt/notesSlides/notesSlide7.xml><?xml version="1.0" encoding="utf-8"?>
+<p:notes xmlns:a="http://schemas.openxmlformats.org/drawingml/2006/main" xmlns:p="http://schemas.openxmlformats.org/presentationml/2006/main" xmlns:r="http://schemas.openxmlformats.org/officeDocument/2006/relationships">
+  <p:cSld>
+    <p:spTree>
+      <p:nvGrpSpPr>
+        <p:cNvPr id="1" name=""/>
+        <p:cNvGrpSpPr/>
+        <p:nvPr/>
+      </p:nvGrpSpPr>
+      <p:grpSpPr>
+        <a:xfrm>
+          <a:off x="0" y="0"/>
+          <a:ext cx="0" cy="0"/>
+          <a:chOff x="0" y="0"/>
+          <a:chExt cx="0" cy="0"/>
+        </a:xfrm>
+      </p:grpSpPr>
+      <p:sp>
+        <p:nvSpPr>
+          <p:cNvPr id="2" name="Slide Image Placeholder 1"/>
+          <p:cNvSpPr>
+            <a:spLocks noGrp="1"/>
+          </p:cNvSpPr>
+          <p:nvPr>
+            <p:ph type="sldImg" idx="2"/>
+          </p:nvPr>
+        </p:nvSpPr>
+        <p:spPr/>
+      </p:sp>
+      <p:sp>
+        <p:nvSpPr>
+          <p:cNvPr id="3" name="Notes Placeholder 2"/>
+          <p:cNvSpPr>
+            <a:spLocks noGrp="1"/>
+          </p:cNvSpPr>
+          <p:nvPr>
+            <p:ph type="body" idx="3" sz="quarter"/>
+          </p:nvPr>
+        </p:nvSpPr>
+        <p:spPr/>
+        <p:txBody>
+          <a:bodyPr/>
+          <a:lstStyle/>
+          <a:p>
+            <a:r>
+              <a:t>Lo que el estudiante produjo (un ER justificado, un DDL con restricciones declarativas, una matriz de privilegios, procedimientos con manejo de errores, disparadores de auditoria, un analisis de plan de ejecucion y un contrato de operaciones) es literalmente el contenido de las tareas de un desarrollador de base de datos o de un administrador junior en su primer ano de trabajo.</a:t>
+            </a:r>
+          </a:p>
+          <a:p>
+            <a:r>
+              <a:t>Conviene tambien cerrar la duda sobre las herramientas, porque alguien la trae: Oracle Live SQL, DB Fiddle y draw.io se usaron por equidad y porque funcionan en cualquier navegador, no porque sean juguetes.</a:t>
+            </a:r>
+          </a:p>
+          <a:p>
+            <a:r>
+              <a:t>Esa respuesta es la que mejor predice si aprendieron, y ademas le da al docente material real para ajustar el curso el proximo semestre.</a:t>
+            </a:r>
+          </a:p>
+        </p:txBody>
+      </p:sp>
+      <p:sp>
+        <p:nvSpPr>
+          <p:cNvPr id="4" name="Slide Number Placeholder 3"/>
+          <p:cNvSpPr>
+            <a:spLocks noGrp="1"/>
+          </p:cNvSpPr>
+          <p:nvPr>
+            <p:ph type="sldNum" idx="5" sz="quarter"/>
+          </p:nvPr>
+        </p:nvSpPr>
+        <p:spPr/>
+      </p:sp>
+    </p:spTree>
+  </p:cSld>
+  <p:clrMapOvr>
+    <a:masterClrMapping/>
+  </p:clrMapOvr>
+</p:notes>
 </file>
 
 <file path=ppt/slideLayouts/slideLayout1.xml><?xml version="1.0" encoding="utf-8"?>
@@ -6408,40 +7275,6 @@
                 </a:solidFill>
                 <a:latin typeface="Calibri"/>
               </a:rPr>
-              <a:t>–   </a:t>
-            </a:r>
-            <a:r>
-              <a:rPr sz="2000" b="1" i="0">
-                <a:solidFill>
-                  <a:srgbClr val="333333"/>
-                </a:solidFill>
-                <a:latin typeface="Calibri"/>
-              </a:rPr>
-              <a:t>Entregable de hoy:</a:t>
-            </a:r>
-            <a:r>
-              <a:rPr sz="2000" b="0" i="0">
-                <a:solidFill>
-                  <a:srgbClr val="333333"/>
-                </a:solidFill>
-                <a:latin typeface="Calibri"/>
-              </a:rPr>
-              <a:t> ZIP/PDF final subido antes del turno + sustentacion en vivo 5-8 min + Q&amp;A</a:t>
-            </a:r>
-          </a:p>
-          <a:p>
-            <a:pPr>
-              <a:spcAft>
-                <a:spcPts val="800"/>
-              </a:spcAft>
-            </a:pPr>
-            <a:r>
-              <a:rPr sz="2000" b="0" i="0">
-                <a:solidFill>
-                  <a:srgbClr val="333333"/>
-                </a:solidFill>
-                <a:latin typeface="Calibri"/>
-              </a:rPr>
               <a:t>–   Sube el paquete a la plataforma del curso </a:t>
             </a:r>
             <a:r>
@@ -7050,31 +7883,6 @@
                 </a:solidFill>
                 <a:latin typeface="Calibri"/>
               </a:rPr>
-              <a:t>–   Ten listo: </a:t>
-            </a:r>
-            <a:r>
-              <a:rPr sz="2000" b="1" i="0">
-                <a:solidFill>
-                  <a:srgbClr val="333333"/>
-                </a:solidFill>
-                <a:latin typeface="Calibri"/>
-              </a:rPr>
-              <a:t>ZIP/PDF final subido antes del turno + sustentacion en vivo 5-8 min + Q&amp;A</a:t>
-            </a:r>
-          </a:p>
-          <a:p>
-            <a:pPr>
-              <a:spcAft>
-                <a:spcPts val="800"/>
-              </a:spcAft>
-            </a:pPr>
-            <a:r>
-              <a:rPr sz="2000" b="0" i="0">
-                <a:solidFill>
-                  <a:srgbClr val="333333"/>
-                </a:solidFill>
-                <a:latin typeface="Calibri"/>
-              </a:rPr>
               <a:t>–   En tu turno muestra una </a:t>
             </a:r>
             <a:r>
@@ -7184,13 +7992,13 @@
         <p:spPr>
           <a:xfrm>
             <a:off x="0" y="0"/>
-            <a:ext cx="12191695" cy="1170432"/>
+            <a:ext cx="12191695" cy="164592"/>
           </a:xfrm>
           <a:prstGeom prst="rect">
             <a:avLst/>
           </a:prstGeom>
           <a:solidFill>
-            <a:srgbClr val="095292"/>
+            <a:srgbClr val="269CCB"/>
           </a:solidFill>
           <a:ln>
             <a:noFill/>
@@ -7218,251 +8026,9 @@
           </a:p>
         </p:txBody>
       </p:sp>
-      <p:sp>
-        <p:nvSpPr>
-          <p:cNvPr id="3" name="Rectangle 2"/>
-          <p:cNvSpPr/>
-          <p:nvPr/>
-        </p:nvSpPr>
-        <p:spPr>
-          <a:xfrm>
-            <a:off x="0" y="1170432"/>
-            <a:ext cx="12191695" cy="41148"/>
-          </a:xfrm>
-          <a:prstGeom prst="rect">
-            <a:avLst/>
-          </a:prstGeom>
-          <a:solidFill>
-            <a:srgbClr val="FFD000"/>
-          </a:solidFill>
-          <a:ln>
-            <a:noFill/>
-          </a:ln>
-        </p:spPr>
-        <p:style>
-          <a:lnRef idx="1">
-            <a:schemeClr val="accent1"/>
-          </a:lnRef>
-          <a:fillRef idx="3">
-            <a:schemeClr val="accent1"/>
-          </a:fillRef>
-          <a:effectRef idx="2">
-            <a:schemeClr val="accent1"/>
-          </a:effectRef>
-          <a:fontRef idx="minor">
-            <a:schemeClr val="lt1"/>
-          </a:fontRef>
-        </p:style>
-        <p:txBody>
-          <a:bodyPr rtlCol="0" anchor="ctr"/>
-          <a:lstStyle/>
-          <a:p>
-            <a:pPr algn="ctr"/>
-          </a:p>
-        </p:txBody>
-      </p:sp>
-      <p:sp>
-        <p:nvSpPr>
-          <p:cNvPr id="4" name="TextBox 3"/>
-          <p:cNvSpPr txBox="1"/>
-          <p:nvPr/>
-        </p:nvSpPr>
-        <p:spPr>
-          <a:xfrm>
-            <a:off x="457200" y="164592"/>
-            <a:ext cx="11277295" cy="384048"/>
-          </a:xfrm>
-          <a:prstGeom prst="rect">
-            <a:avLst/>
-          </a:prstGeom>
-          <a:noFill/>
-        </p:spPr>
-        <p:txBody>
-          <a:bodyPr wrap="square">
-            <a:spAutoFit/>
-          </a:bodyPr>
-          <a:lstStyle/>
-          <a:p>
-            <a:r>
-              <a:rPr sz="2600" b="1" i="0">
-                <a:solidFill>
-                  <a:srgbClr val="FFFFFF"/>
-                </a:solidFill>
-                <a:latin typeface="Calibri"/>
-              </a:rPr>
-              <a:t>Herramientas de hoy</a:t>
-            </a:r>
-          </a:p>
-        </p:txBody>
-      </p:sp>
-      <p:sp>
-        <p:nvSpPr>
-          <p:cNvPr id="5" name="TextBox 4"/>
-          <p:cNvSpPr txBox="1"/>
-          <p:nvPr/>
-        </p:nvSpPr>
-        <p:spPr>
-          <a:xfrm>
-            <a:off x="457200" y="566928"/>
-            <a:ext cx="11277295" cy="411480"/>
-          </a:xfrm>
-          <a:prstGeom prst="rect">
-            <a:avLst/>
-          </a:prstGeom>
-          <a:noFill/>
-        </p:spPr>
-        <p:txBody>
-          <a:bodyPr wrap="square">
-            <a:spAutoFit/>
-          </a:bodyPr>
-          <a:lstStyle/>
-          <a:p>
-            <a:r>
-              <a:rPr sz="1400" b="0" i="0">
-                <a:solidFill>
-                  <a:srgbClr val="B8D8EE"/>
-                </a:solidFill>
-                <a:latin typeface="Calibri"/>
-              </a:rPr>
-              <a:t>Gratis · navegador o free tier</a:t>
-            </a:r>
-          </a:p>
-        </p:txBody>
-      </p:sp>
-      <p:sp>
-        <p:nvSpPr>
-          <p:cNvPr id="6" name="Rounded Rectangle 5"/>
-          <p:cNvSpPr/>
-          <p:nvPr/>
-        </p:nvSpPr>
-        <p:spPr>
-          <a:xfrm>
-            <a:off x="457200" y="1591056"/>
-            <a:ext cx="3624986" cy="2331720"/>
-          </a:xfrm>
-          <a:prstGeom prst="roundRect">
-            <a:avLst>
-              <a:gd name="adj" fmla="val 12000"/>
-            </a:avLst>
-          </a:prstGeom>
-          <a:solidFill>
-            <a:srgbClr val="F2F2F2"/>
-          </a:solidFill>
-          <a:ln>
-            <a:noFill/>
-          </a:ln>
-        </p:spPr>
-        <p:style>
-          <a:lnRef idx="1">
-            <a:schemeClr val="accent1"/>
-          </a:lnRef>
-          <a:fillRef idx="3">
-            <a:schemeClr val="accent1"/>
-          </a:fillRef>
-          <a:effectRef idx="2">
-            <a:schemeClr val="accent1"/>
-          </a:effectRef>
-          <a:fontRef idx="minor">
-            <a:schemeClr val="lt1"/>
-          </a:fontRef>
-        </p:style>
-        <p:txBody>
-          <a:bodyPr rtlCol="0" anchor="ctr"/>
-          <a:lstStyle/>
-          <a:p>
-            <a:pPr algn="ctr"/>
-          </a:p>
-        </p:txBody>
-      </p:sp>
-      <p:sp>
-        <p:nvSpPr>
-          <p:cNvPr id="7" name="Rectangle 6"/>
-          <p:cNvSpPr/>
-          <p:nvPr/>
-        </p:nvSpPr>
-        <p:spPr>
-          <a:xfrm>
-            <a:off x="457200" y="1591056"/>
-            <a:ext cx="3624986" cy="64008"/>
-          </a:xfrm>
-          <a:prstGeom prst="rect">
-            <a:avLst/>
-          </a:prstGeom>
-          <a:solidFill>
-            <a:srgbClr val="095292"/>
-          </a:solidFill>
-          <a:ln>
-            <a:noFill/>
-          </a:ln>
-        </p:spPr>
-        <p:style>
-          <a:lnRef idx="1">
-            <a:schemeClr val="accent1"/>
-          </a:lnRef>
-          <a:fillRef idx="3">
-            <a:schemeClr val="accent1"/>
-          </a:fillRef>
-          <a:effectRef idx="2">
-            <a:schemeClr val="accent1"/>
-          </a:effectRef>
-          <a:fontRef idx="minor">
-            <a:schemeClr val="lt1"/>
-          </a:fontRef>
-        </p:style>
-        <p:txBody>
-          <a:bodyPr rtlCol="0" anchor="ctr"/>
-          <a:lstStyle/>
-          <a:p>
-            <a:pPr algn="ctr"/>
-          </a:p>
-        </p:txBody>
-      </p:sp>
-      <p:sp>
-        <p:nvSpPr>
-          <p:cNvPr id="8" name="Rectangle 7"/>
-          <p:cNvSpPr/>
-          <p:nvPr/>
-        </p:nvSpPr>
-        <p:spPr>
-          <a:xfrm>
-            <a:off x="457200" y="1655064"/>
-            <a:ext cx="3624986" cy="27432"/>
-          </a:xfrm>
-          <a:prstGeom prst="rect">
-            <a:avLst/>
-          </a:prstGeom>
-          <a:solidFill>
-            <a:srgbClr val="FFD000"/>
-          </a:solidFill>
-          <a:ln>
-            <a:noFill/>
-          </a:ln>
-        </p:spPr>
-        <p:style>
-          <a:lnRef idx="1">
-            <a:schemeClr val="accent1"/>
-          </a:lnRef>
-          <a:fillRef idx="3">
-            <a:schemeClr val="accent1"/>
-          </a:fillRef>
-          <a:effectRef idx="2">
-            <a:schemeClr val="accent1"/>
-          </a:effectRef>
-          <a:fontRef idx="minor">
-            <a:schemeClr val="lt1"/>
-          </a:fontRef>
-        </p:style>
-        <p:txBody>
-          <a:bodyPr rtlCol="0" anchor="ctr"/>
-          <a:lstStyle/>
-          <a:p>
-            <a:pPr algn="ctr"/>
-          </a:p>
-        </p:txBody>
-      </p:sp>
       <p:pic>
         <p:nvPicPr>
-          <p:cNvPr id="9" name="Picture 8" descr="google_docs.png"/>
+          <p:cNvPr id="3" name="Picture 2" descr="logo_uniajc_color.png"/>
           <p:cNvPicPr>
             <a:picLocks noChangeAspect="1"/>
           </p:cNvPicPr>
@@ -7476,8 +8042,8 @@
         </p:blipFill>
         <p:spPr>
           <a:xfrm>
-            <a:off x="1643329" y="1847087"/>
-            <a:ext cx="1252728" cy="1252728"/>
+            <a:off x="10271455" y="5998464"/>
+            <a:ext cx="1463040" cy="643233"/>
           </a:xfrm>
           <a:prstGeom prst="rect">
             <a:avLst/>
@@ -7486,14 +8052,14 @@
       </p:pic>
       <p:sp>
         <p:nvSpPr>
-          <p:cNvPr id="10" name="TextBox 9"/>
+          <p:cNvPr id="4" name="TextBox 3"/>
           <p:cNvSpPr txBox="1"/>
           <p:nvPr/>
         </p:nvSpPr>
         <p:spPr>
           <a:xfrm>
-            <a:off x="530352" y="3191256"/>
-            <a:ext cx="3478682" cy="621792"/>
+            <a:off x="457200" y="1737360"/>
+            <a:ext cx="11277295" cy="1097280"/>
           </a:xfrm>
           <a:prstGeom prst="rect">
             <a:avLst/>
@@ -7501,456 +8067,32 @@
           <a:noFill/>
         </p:spPr>
         <p:txBody>
-          <a:bodyPr wrap="square" anchor="t"/>
+          <a:bodyPr wrap="square" anchor="ctr"/>
           <a:lstStyle/>
           <a:p>
             <a:pPr algn="ctr"/>
             <a:r>
-              <a:rPr sz="1300" b="1" i="0">
+              <a:rPr sz="3400" b="1" i="0">
                 <a:solidFill>
                   <a:srgbClr val="095292"/>
                 </a:solidFill>
                 <a:latin typeface="Calibri"/>
               </a:rPr>
-              <a:t>Google Docs</a:t>
-            </a:r>
-          </a:p>
-          <a:p>
-            <a:pPr algn="ctr">
-              <a:spcBef>
-                <a:spcPts val="200"/>
-              </a:spcBef>
-            </a:pPr>
-            <a:r>
-              <a:rPr sz="1000" b="0" i="0">
-                <a:solidFill>
-                  <a:srgbClr val="666666"/>
-                </a:solidFill>
-                <a:latin typeface="Calibri"/>
-              </a:rPr>
-              <a:t>Informe final</a:t>
-            </a:r>
-          </a:p>
-        </p:txBody>
-      </p:sp>
-      <p:sp>
-        <p:nvSpPr>
-          <p:cNvPr id="11" name="Rounded Rectangle 10"/>
-          <p:cNvSpPr/>
-          <p:nvPr/>
-        </p:nvSpPr>
-        <p:spPr>
-          <a:xfrm>
-            <a:off x="4283354" y="1591056"/>
-            <a:ext cx="3624986" cy="2331720"/>
-          </a:xfrm>
-          <a:prstGeom prst="roundRect">
-            <a:avLst>
-              <a:gd name="adj" fmla="val 12000"/>
-            </a:avLst>
-          </a:prstGeom>
-          <a:solidFill>
-            <a:srgbClr val="F2F2F2"/>
-          </a:solidFill>
-          <a:ln>
-            <a:noFill/>
-          </a:ln>
-        </p:spPr>
-        <p:style>
-          <a:lnRef idx="1">
-            <a:schemeClr val="accent1"/>
-          </a:lnRef>
-          <a:fillRef idx="3">
-            <a:schemeClr val="accent1"/>
-          </a:fillRef>
-          <a:effectRef idx="2">
-            <a:schemeClr val="accent1"/>
-          </a:effectRef>
-          <a:fontRef idx="minor">
-            <a:schemeClr val="lt1"/>
-          </a:fontRef>
-        </p:style>
-        <p:txBody>
-          <a:bodyPr rtlCol="0" anchor="ctr"/>
-          <a:lstStyle/>
-          <a:p>
-            <a:pPr algn="ctr"/>
-          </a:p>
-        </p:txBody>
-      </p:sp>
-      <p:sp>
-        <p:nvSpPr>
-          <p:cNvPr id="12" name="Rectangle 11"/>
-          <p:cNvSpPr/>
-          <p:nvPr/>
-        </p:nvSpPr>
-        <p:spPr>
-          <a:xfrm>
-            <a:off x="4283354" y="1591056"/>
-            <a:ext cx="3624986" cy="64008"/>
-          </a:xfrm>
-          <a:prstGeom prst="rect">
-            <a:avLst/>
-          </a:prstGeom>
-          <a:solidFill>
-            <a:srgbClr val="095292"/>
-          </a:solidFill>
-          <a:ln>
-            <a:noFill/>
-          </a:ln>
-        </p:spPr>
-        <p:style>
-          <a:lnRef idx="1">
-            <a:schemeClr val="accent1"/>
-          </a:lnRef>
-          <a:fillRef idx="3">
-            <a:schemeClr val="accent1"/>
-          </a:fillRef>
-          <a:effectRef idx="2">
-            <a:schemeClr val="accent1"/>
-          </a:effectRef>
-          <a:fontRef idx="minor">
-            <a:schemeClr val="lt1"/>
-          </a:fontRef>
-        </p:style>
-        <p:txBody>
-          <a:bodyPr rtlCol="0" anchor="ctr"/>
-          <a:lstStyle/>
-          <a:p>
-            <a:pPr algn="ctr"/>
-          </a:p>
-        </p:txBody>
-      </p:sp>
-      <p:sp>
-        <p:nvSpPr>
-          <p:cNvPr id="13" name="Rectangle 12"/>
-          <p:cNvSpPr/>
-          <p:nvPr/>
-        </p:nvSpPr>
-        <p:spPr>
-          <a:xfrm>
-            <a:off x="4283354" y="1655064"/>
-            <a:ext cx="3624986" cy="27432"/>
-          </a:xfrm>
-          <a:prstGeom prst="rect">
-            <a:avLst/>
-          </a:prstGeom>
-          <a:solidFill>
-            <a:srgbClr val="FFD000"/>
-          </a:solidFill>
-          <a:ln>
-            <a:noFill/>
-          </a:ln>
-        </p:spPr>
-        <p:style>
-          <a:lnRef idx="1">
-            <a:schemeClr val="accent1"/>
-          </a:lnRef>
-          <a:fillRef idx="3">
-            <a:schemeClr val="accent1"/>
-          </a:fillRef>
-          <a:effectRef idx="2">
-            <a:schemeClr val="accent1"/>
-          </a:effectRef>
-          <a:fontRef idx="minor">
-            <a:schemeClr val="lt1"/>
-          </a:fontRef>
-        </p:style>
-        <p:txBody>
-          <a:bodyPr rtlCol="0" anchor="ctr"/>
-          <a:lstStyle/>
-          <a:p>
-            <a:pPr algn="ctr"/>
-          </a:p>
-        </p:txBody>
-      </p:sp>
-      <p:pic>
-        <p:nvPicPr>
-          <p:cNvPr id="14" name="Picture 13" descr="drawio.png"/>
-          <p:cNvPicPr>
-            <a:picLocks noChangeAspect="1"/>
-          </p:cNvPicPr>
-          <p:nvPr/>
-        </p:nvPicPr>
-        <p:blipFill>
-          <a:blip r:embed="rId3"/>
-          <a:stretch>
-            <a:fillRect/>
-          </a:stretch>
-        </p:blipFill>
-        <p:spPr>
-          <a:xfrm>
-            <a:off x="5469483" y="1847087"/>
-            <a:ext cx="1252728" cy="1252728"/>
-          </a:xfrm>
-          <a:prstGeom prst="rect">
-            <a:avLst/>
-          </a:prstGeom>
-        </p:spPr>
-      </p:pic>
-      <p:sp>
-        <p:nvSpPr>
-          <p:cNvPr id="15" name="TextBox 14"/>
+              <a:t>Clase 15 · cierre de VetCare DB</a:t>
+            </a:r>
+          </a:p>
+        </p:txBody>
+      </p:sp>
+      <p:sp>
+        <p:nvSpPr>
+          <p:cNvPr id="5" name="TextBox 4"/>
           <p:cNvSpPr txBox="1"/>
           <p:nvPr/>
         </p:nvSpPr>
         <p:spPr>
           <a:xfrm>
-            <a:off x="4356506" y="3191256"/>
-            <a:ext cx="3478682" cy="621792"/>
-          </a:xfrm>
-          <a:prstGeom prst="rect">
-            <a:avLst/>
-          </a:prstGeom>
-          <a:noFill/>
-        </p:spPr>
-        <p:txBody>
-          <a:bodyPr wrap="square" anchor="t"/>
-          <a:lstStyle/>
-          <a:p>
-            <a:pPr algn="ctr"/>
-            <a:r>
-              <a:rPr sz="1300" b="1" i="0">
-                <a:solidFill>
-                  <a:srgbClr val="095292"/>
-                </a:solidFill>
-                <a:latin typeface="Calibri"/>
-              </a:rPr>
-              <a:t>draw.io</a:t>
-            </a:r>
-          </a:p>
-          <a:p>
-            <a:pPr algn="ctr">
-              <a:spcBef>
-                <a:spcPts val="200"/>
-              </a:spcBef>
-            </a:pPr>
-            <a:r>
-              <a:rPr sz="1000" b="0" i="0">
-                <a:solidFill>
-                  <a:srgbClr val="666666"/>
-                </a:solidFill>
-                <a:latin typeface="Calibri"/>
-              </a:rPr>
-              <a:t>ER final</a:t>
-            </a:r>
-          </a:p>
-        </p:txBody>
-      </p:sp>
-      <p:sp>
-        <p:nvSpPr>
-          <p:cNvPr id="16" name="Rounded Rectangle 15"/>
-          <p:cNvSpPr/>
-          <p:nvPr/>
-        </p:nvSpPr>
-        <p:spPr>
-          <a:xfrm>
-            <a:off x="8109508" y="1591056"/>
-            <a:ext cx="3624986" cy="2331720"/>
-          </a:xfrm>
-          <a:prstGeom prst="roundRect">
-            <a:avLst>
-              <a:gd name="adj" fmla="val 12000"/>
-            </a:avLst>
-          </a:prstGeom>
-          <a:solidFill>
-            <a:srgbClr val="F2F2F2"/>
-          </a:solidFill>
-          <a:ln>
-            <a:noFill/>
-          </a:ln>
-        </p:spPr>
-        <p:style>
-          <a:lnRef idx="1">
-            <a:schemeClr val="accent1"/>
-          </a:lnRef>
-          <a:fillRef idx="3">
-            <a:schemeClr val="accent1"/>
-          </a:fillRef>
-          <a:effectRef idx="2">
-            <a:schemeClr val="accent1"/>
-          </a:effectRef>
-          <a:fontRef idx="minor">
-            <a:schemeClr val="lt1"/>
-          </a:fontRef>
-        </p:style>
-        <p:txBody>
-          <a:bodyPr rtlCol="0" anchor="ctr"/>
-          <a:lstStyle/>
-          <a:p>
-            <a:pPr algn="ctr"/>
-          </a:p>
-        </p:txBody>
-      </p:sp>
-      <p:sp>
-        <p:nvSpPr>
-          <p:cNvPr id="17" name="Rectangle 16"/>
-          <p:cNvSpPr/>
-          <p:nvPr/>
-        </p:nvSpPr>
-        <p:spPr>
-          <a:xfrm>
-            <a:off x="8109508" y="1591056"/>
-            <a:ext cx="3624986" cy="64008"/>
-          </a:xfrm>
-          <a:prstGeom prst="rect">
-            <a:avLst/>
-          </a:prstGeom>
-          <a:solidFill>
-            <a:srgbClr val="095292"/>
-          </a:solidFill>
-          <a:ln>
-            <a:noFill/>
-          </a:ln>
-        </p:spPr>
-        <p:style>
-          <a:lnRef idx="1">
-            <a:schemeClr val="accent1"/>
-          </a:lnRef>
-          <a:fillRef idx="3">
-            <a:schemeClr val="accent1"/>
-          </a:fillRef>
-          <a:effectRef idx="2">
-            <a:schemeClr val="accent1"/>
-          </a:effectRef>
-          <a:fontRef idx="minor">
-            <a:schemeClr val="lt1"/>
-          </a:fontRef>
-        </p:style>
-        <p:txBody>
-          <a:bodyPr rtlCol="0" anchor="ctr"/>
-          <a:lstStyle/>
-          <a:p>
-            <a:pPr algn="ctr"/>
-          </a:p>
-        </p:txBody>
-      </p:sp>
-      <p:sp>
-        <p:nvSpPr>
-          <p:cNvPr id="18" name="Rectangle 17"/>
-          <p:cNvSpPr/>
-          <p:nvPr/>
-        </p:nvSpPr>
-        <p:spPr>
-          <a:xfrm>
-            <a:off x="8109508" y="1655064"/>
-            <a:ext cx="3624986" cy="27432"/>
-          </a:xfrm>
-          <a:prstGeom prst="rect">
-            <a:avLst/>
-          </a:prstGeom>
-          <a:solidFill>
-            <a:srgbClr val="FFD000"/>
-          </a:solidFill>
-          <a:ln>
-            <a:noFill/>
-          </a:ln>
-        </p:spPr>
-        <p:style>
-          <a:lnRef idx="1">
-            <a:schemeClr val="accent1"/>
-          </a:lnRef>
-          <a:fillRef idx="3">
-            <a:schemeClr val="accent1"/>
-          </a:fillRef>
-          <a:effectRef idx="2">
-            <a:schemeClr val="accent1"/>
-          </a:effectRef>
-          <a:fontRef idx="minor">
-            <a:schemeClr val="lt1"/>
-          </a:fontRef>
-        </p:style>
-        <p:txBody>
-          <a:bodyPr rtlCol="0" anchor="ctr"/>
-          <a:lstStyle/>
-          <a:p>
-            <a:pPr algn="ctr"/>
-          </a:p>
-        </p:txBody>
-      </p:sp>
-      <p:pic>
-        <p:nvPicPr>
-          <p:cNvPr id="19" name="Picture 18" descr="oracle_livesql.png"/>
-          <p:cNvPicPr>
-            <a:picLocks noChangeAspect="1"/>
-          </p:cNvPicPr>
-          <p:nvPr/>
-        </p:nvPicPr>
-        <p:blipFill>
-          <a:blip r:embed="rId4"/>
-          <a:stretch>
-            <a:fillRect/>
-          </a:stretch>
-        </p:blipFill>
-        <p:spPr>
-          <a:xfrm>
-            <a:off x="9295638" y="1847087"/>
-            <a:ext cx="1252728" cy="1252728"/>
-          </a:xfrm>
-          <a:prstGeom prst="rect">
-            <a:avLst/>
-          </a:prstGeom>
-        </p:spPr>
-      </p:pic>
-      <p:sp>
-        <p:nvSpPr>
-          <p:cNvPr id="20" name="TextBox 19"/>
-          <p:cNvSpPr txBox="1"/>
-          <p:nvPr/>
-        </p:nvSpPr>
-        <p:spPr>
-          <a:xfrm>
-            <a:off x="8182660" y="3191256"/>
-            <a:ext cx="3478682" cy="621792"/>
-          </a:xfrm>
-          <a:prstGeom prst="rect">
-            <a:avLst/>
-          </a:prstGeom>
-          <a:noFill/>
-        </p:spPr>
-        <p:txBody>
-          <a:bodyPr wrap="square" anchor="t"/>
-          <a:lstStyle/>
-          <a:p>
-            <a:pPr algn="ctr"/>
-            <a:r>
-              <a:rPr sz="1300" b="1" i="0">
-                <a:solidFill>
-                  <a:srgbClr val="095292"/>
-                </a:solidFill>
-                <a:latin typeface="Calibri"/>
-              </a:rPr>
-              <a:t>Oracle Live SQL</a:t>
-            </a:r>
-          </a:p>
-          <a:p>
-            <a:pPr algn="ctr">
-              <a:spcBef>
-                <a:spcPts val="200"/>
-              </a:spcBef>
-            </a:pPr>
-            <a:r>
-              <a:rPr sz="1000" b="0" i="0">
-                <a:solidFill>
-                  <a:srgbClr val="666666"/>
-                </a:solidFill>
-                <a:latin typeface="Calibri"/>
-              </a:rPr>
-              <a:t>Demo SQL</a:t>
-            </a:r>
-          </a:p>
-        </p:txBody>
-      </p:sp>
-      <p:sp>
-        <p:nvSpPr>
-          <p:cNvPr id="21" name="TextBox 20"/>
-          <p:cNvSpPr txBox="1"/>
-          <p:nvPr/>
-        </p:nvSpPr>
-        <p:spPr>
-          <a:xfrm>
-            <a:off x="11185855" y="6473952"/>
-            <a:ext cx="640080" cy="274320"/>
+            <a:off x="457200" y="3017520"/>
+            <a:ext cx="11277295" cy="1645920"/>
           </a:xfrm>
           <a:prstGeom prst="rect">
             <a:avLst/>
@@ -7963,141 +8105,49 @@
           </a:bodyPr>
           <a:lstStyle/>
           <a:p>
-            <a:pPr algn="r"/>
-            <a:r>
-              <a:rPr sz="1100" b="0" i="0">
-                <a:solidFill>
-                  <a:srgbClr val="666666"/>
-                </a:solidFill>
-                <a:latin typeface="Calibri"/>
-              </a:rPr>
-              <a:t>22</a:t>
-            </a:r>
-          </a:p>
-        </p:txBody>
-      </p:sp>
-    </p:spTree>
-  </p:cSld>
-  <p:clrMapOvr>
-    <a:masterClrMapping/>
-  </p:clrMapOvr>
-</p:sld>
-</file>
-
-<file path=ppt/slides/slide23.xml><?xml version="1.0" encoding="utf-8"?>
-<p:sld xmlns:a="http://schemas.openxmlformats.org/drawingml/2006/main" xmlns:p="http://schemas.openxmlformats.org/presentationml/2006/main" xmlns:r="http://schemas.openxmlformats.org/officeDocument/2006/relationships">
-  <p:cSld>
-    <p:bg>
-      <p:bgPr>
-        <a:solidFill>
-          <a:srgbClr val="FFFFFF"/>
-        </a:solidFill>
-        <a:effectLst/>
-      </p:bgPr>
-    </p:bg>
-    <p:spTree>
-      <p:nvGrpSpPr>
-        <p:cNvPr id="1" name=""/>
-        <p:cNvGrpSpPr/>
-        <p:nvPr/>
-      </p:nvGrpSpPr>
-      <p:grpSpPr/>
-      <p:sp>
-        <p:nvSpPr>
-          <p:cNvPr id="2" name="Rectangle 1"/>
-          <p:cNvSpPr/>
-          <p:nvPr/>
-        </p:nvSpPr>
-        <p:spPr>
-          <a:xfrm>
-            <a:off x="0" y="0"/>
-            <a:ext cx="12191695" cy="960120"/>
-          </a:xfrm>
-          <a:prstGeom prst="rect">
-            <a:avLst/>
-          </a:prstGeom>
-          <a:solidFill>
-            <a:srgbClr val="095292"/>
-          </a:solidFill>
-          <a:ln>
-            <a:noFill/>
-          </a:ln>
-        </p:spPr>
-        <p:style>
-          <a:lnRef idx="1">
-            <a:schemeClr val="accent1"/>
-          </a:lnRef>
-          <a:fillRef idx="3">
-            <a:schemeClr val="accent1"/>
-          </a:fillRef>
-          <a:effectRef idx="2">
-            <a:schemeClr val="accent1"/>
-          </a:effectRef>
-          <a:fontRef idx="minor">
-            <a:schemeClr val="lt1"/>
-          </a:fontRef>
-        </p:style>
-        <p:txBody>
-          <a:bodyPr rtlCol="0" anchor="ctr"/>
-          <a:lstStyle/>
-          <a:p>
-            <a:pPr algn="ctr"/>
-          </a:p>
-        </p:txBody>
-      </p:sp>
-      <p:sp>
-        <p:nvSpPr>
-          <p:cNvPr id="3" name="Rectangle 2"/>
-          <p:cNvSpPr/>
-          <p:nvPr/>
-        </p:nvSpPr>
-        <p:spPr>
-          <a:xfrm>
-            <a:off x="0" y="960120"/>
-            <a:ext cx="12191695" cy="41148"/>
-          </a:xfrm>
-          <a:prstGeom prst="rect">
-            <a:avLst/>
-          </a:prstGeom>
-          <a:solidFill>
-            <a:srgbClr val="FFD000"/>
-          </a:solidFill>
-          <a:ln>
-            <a:noFill/>
-          </a:ln>
-        </p:spPr>
-        <p:style>
-          <a:lnRef idx="1">
-            <a:schemeClr val="accent1"/>
-          </a:lnRef>
-          <a:fillRef idx="3">
-            <a:schemeClr val="accent1"/>
-          </a:fillRef>
-          <a:effectRef idx="2">
-            <a:schemeClr val="accent1"/>
-          </a:effectRef>
-          <a:fontRef idx="minor">
-            <a:schemeClr val="lt1"/>
-          </a:fontRef>
-        </p:style>
-        <p:txBody>
-          <a:bodyPr rtlCol="0" anchor="ctr"/>
-          <a:lstStyle/>
-          <a:p>
-            <a:pPr algn="ctr"/>
-          </a:p>
-        </p:txBody>
-      </p:sp>
-      <p:sp>
-        <p:nvSpPr>
-          <p:cNvPr id="4" name="TextBox 3"/>
+            <a:pPr algn="ctr">
+              <a:spcAft>
+                <a:spcPts val="600"/>
+              </a:spcAft>
+            </a:pPr>
+            <a:r>
+              <a:rPr sz="1600" b="0" i="0">
+                <a:solidFill>
+                  <a:srgbClr val="333333"/>
+                </a:solidFill>
+                <a:latin typeface="Calibri"/>
+              </a:rPr>
+              <a:t>Sustentacion en vivo y entrega final del PI (20% Corte 3)</a:t>
+            </a:r>
+          </a:p>
+          <a:p>
+            <a:pPr algn="ctr">
+              <a:spcAft>
+                <a:spcPts val="600"/>
+              </a:spcAft>
+            </a:pPr>
+            <a:r>
+              <a:rPr sz="1600" b="0" i="0">
+                <a:solidFill>
+                  <a:srgbClr val="333333"/>
+                </a:solidFill>
+                <a:latin typeface="Calibri"/>
+              </a:rPr>
+              <a:t>Conserva el paquete (ER, DDL, roles, procs, triggers, optimizacion) como portafolio</a:t>
+            </a:r>
+          </a:p>
+        </p:txBody>
+      </p:sp>
+      <p:sp>
+        <p:nvSpPr>
+          <p:cNvPr id="6" name="TextBox 5"/>
           <p:cNvSpPr txBox="1"/>
           <p:nvPr/>
         </p:nvSpPr>
         <p:spPr>
           <a:xfrm>
-            <a:off x="457200" y="164592"/>
-            <a:ext cx="11277295" cy="502920"/>
+            <a:off x="457200" y="4754880"/>
+            <a:ext cx="11277295" cy="640080"/>
           </a:xfrm>
           <a:prstGeom prst="rect">
             <a:avLst/>
@@ -8110,3333 +8160,15 @@
           </a:bodyPr>
           <a:lstStyle/>
           <a:p>
-            <a:r>
-              <a:rPr sz="2600" b="1" i="0">
-                <a:solidFill>
-                  <a:srgbClr val="FFFFFF"/>
-                </a:solidFill>
-                <a:latin typeface="Calibri"/>
-              </a:rPr>
-              <a:t>Sustentacion del PI — contexto / por que importa</a:t>
-            </a:r>
-          </a:p>
-        </p:txBody>
-      </p:sp>
-      <p:sp>
-        <p:nvSpPr>
-          <p:cNvPr id="5" name="TextBox 4"/>
-          <p:cNvSpPr txBox="1"/>
-          <p:nvPr/>
-        </p:nvSpPr>
-        <p:spPr>
-          <a:xfrm>
-            <a:off x="457200" y="1170432"/>
-            <a:ext cx="11277295" cy="5230368"/>
-          </a:xfrm>
-          <a:prstGeom prst="rect">
-            <a:avLst/>
-          </a:prstGeom>
-          <a:noFill/>
-        </p:spPr>
-        <p:txBody>
-          <a:bodyPr wrap="square">
-            <a:spAutoFit/>
-          </a:bodyPr>
-          <a:lstStyle/>
-          <a:p>
-            <a:pPr>
-              <a:spcAft>
-                <a:spcPts val="800"/>
-              </a:spcAft>
-            </a:pPr>
-            <a:r>
-              <a:rPr sz="2000" b="0" i="0">
-                <a:solidFill>
-                  <a:srgbClr val="333333"/>
-                </a:solidFill>
-                <a:latin typeface="Calibri"/>
-              </a:rPr>
-              <a:t>–   </a:t>
-            </a:r>
+            <a:pPr algn="ctr"/>
             <a:r>
               <a:rPr sz="2000" b="1" i="0">
                 <a:solidFill>
-                  <a:srgbClr val="333333"/>
-                </a:solidFill>
-                <a:latin typeface="Calibri"/>
-              </a:rPr>
-              <a:t>Por qué importa al PI:</a:t>
-            </a:r>
-            <a:r>
-              <a:rPr sz="2000" b="0" i="0">
-                <a:solidFill>
-                  <a:srgbClr val="333333"/>
-                </a:solidFill>
-                <a:latin typeface="Calibri"/>
-              </a:rPr>
-              <a:t> cierre segun rúbrica 20% Corte 3.</a:t>
-            </a:r>
-          </a:p>
-          <a:p>
-            <a:pPr>
-              <a:spcAft>
-                <a:spcPts val="800"/>
-              </a:spcAft>
-            </a:pPr>
-            <a:r>
-              <a:rPr sz="2000" b="0" i="0">
-                <a:solidFill>
-                  <a:srgbClr val="333333"/>
-                </a:solidFill>
-                <a:latin typeface="Calibri"/>
-              </a:rPr>
-              <a:t>–   No confundir con Parcial 3 (Clase 14).</a:t>
-            </a:r>
-          </a:p>
-        </p:txBody>
-      </p:sp>
-      <p:sp>
-        <p:nvSpPr>
-          <p:cNvPr id="6" name="TextBox 5"/>
-          <p:cNvSpPr txBox="1"/>
-          <p:nvPr/>
-        </p:nvSpPr>
-        <p:spPr>
-          <a:xfrm>
-            <a:off x="11185855" y="6473952"/>
-            <a:ext cx="640080" cy="274320"/>
-          </a:xfrm>
-          <a:prstGeom prst="rect">
-            <a:avLst/>
-          </a:prstGeom>
-          <a:noFill/>
-        </p:spPr>
-        <p:txBody>
-          <a:bodyPr wrap="square">
-            <a:spAutoFit/>
-          </a:bodyPr>
-          <a:lstStyle/>
-          <a:p>
-            <a:pPr algn="r"/>
-            <a:r>
-              <a:rPr sz="1100" b="0" i="0">
-                <a:solidFill>
-                  <a:srgbClr val="666666"/>
-                </a:solidFill>
-                <a:latin typeface="Calibri"/>
-              </a:rPr>
-              <a:t>23</a:t>
-            </a:r>
-          </a:p>
-        </p:txBody>
-      </p:sp>
-    </p:spTree>
-  </p:cSld>
-  <p:clrMapOvr>
-    <a:masterClrMapping/>
-  </p:clrMapOvr>
-</p:sld>
-</file>
-
-<file path=ppt/slides/slide24.xml><?xml version="1.0" encoding="utf-8"?>
-<p:sld xmlns:a="http://schemas.openxmlformats.org/drawingml/2006/main" xmlns:p="http://schemas.openxmlformats.org/presentationml/2006/main" xmlns:r="http://schemas.openxmlformats.org/officeDocument/2006/relationships">
-  <p:cSld>
-    <p:bg>
-      <p:bgPr>
-        <a:solidFill>
-          <a:srgbClr val="FFFFFF"/>
-        </a:solidFill>
-        <a:effectLst/>
-      </p:bgPr>
-    </p:bg>
-    <p:spTree>
-      <p:nvGrpSpPr>
-        <p:cNvPr id="1" name=""/>
-        <p:cNvGrpSpPr/>
-        <p:nvPr/>
-      </p:nvGrpSpPr>
-      <p:grpSpPr/>
-      <p:sp>
-        <p:nvSpPr>
-          <p:cNvPr id="2" name="Rectangle 1"/>
-          <p:cNvSpPr/>
-          <p:nvPr/>
-        </p:nvSpPr>
-        <p:spPr>
-          <a:xfrm>
-            <a:off x="0" y="0"/>
-            <a:ext cx="12191695" cy="960120"/>
-          </a:xfrm>
-          <a:prstGeom prst="rect">
-            <a:avLst/>
-          </a:prstGeom>
-          <a:solidFill>
-            <a:srgbClr val="095292"/>
-          </a:solidFill>
-          <a:ln>
-            <a:noFill/>
-          </a:ln>
-        </p:spPr>
-        <p:style>
-          <a:lnRef idx="1">
-            <a:schemeClr val="accent1"/>
-          </a:lnRef>
-          <a:fillRef idx="3">
-            <a:schemeClr val="accent1"/>
-          </a:fillRef>
-          <a:effectRef idx="2">
-            <a:schemeClr val="accent1"/>
-          </a:effectRef>
-          <a:fontRef idx="minor">
-            <a:schemeClr val="lt1"/>
-          </a:fontRef>
-        </p:style>
-        <p:txBody>
-          <a:bodyPr rtlCol="0" anchor="ctr"/>
-          <a:lstStyle/>
-          <a:p>
-            <a:pPr algn="ctr"/>
-          </a:p>
-        </p:txBody>
-      </p:sp>
-      <p:sp>
-        <p:nvSpPr>
-          <p:cNvPr id="3" name="Rectangle 2"/>
-          <p:cNvSpPr/>
-          <p:nvPr/>
-        </p:nvSpPr>
-        <p:spPr>
-          <a:xfrm>
-            <a:off x="0" y="960120"/>
-            <a:ext cx="12191695" cy="41148"/>
-          </a:xfrm>
-          <a:prstGeom prst="rect">
-            <a:avLst/>
-          </a:prstGeom>
-          <a:solidFill>
-            <a:srgbClr val="FFD000"/>
-          </a:solidFill>
-          <a:ln>
-            <a:noFill/>
-          </a:ln>
-        </p:spPr>
-        <p:style>
-          <a:lnRef idx="1">
-            <a:schemeClr val="accent1"/>
-          </a:lnRef>
-          <a:fillRef idx="3">
-            <a:schemeClr val="accent1"/>
-          </a:fillRef>
-          <a:effectRef idx="2">
-            <a:schemeClr val="accent1"/>
-          </a:effectRef>
-          <a:fontRef idx="minor">
-            <a:schemeClr val="lt1"/>
-          </a:fontRef>
-        </p:style>
-        <p:txBody>
-          <a:bodyPr rtlCol="0" anchor="ctr"/>
-          <a:lstStyle/>
-          <a:p>
-            <a:pPr algn="ctr"/>
-          </a:p>
-        </p:txBody>
-      </p:sp>
-      <p:sp>
-        <p:nvSpPr>
-          <p:cNvPr id="4" name="TextBox 3"/>
-          <p:cNvSpPr txBox="1"/>
-          <p:nvPr/>
-        </p:nvSpPr>
-        <p:spPr>
-          <a:xfrm>
-            <a:off x="457200" y="164592"/>
-            <a:ext cx="11277295" cy="502920"/>
-          </a:xfrm>
-          <a:prstGeom prst="rect">
-            <a:avLst/>
-          </a:prstGeom>
-          <a:noFill/>
-        </p:spPr>
-        <p:txBody>
-          <a:bodyPr wrap="square">
-            <a:spAutoFit/>
-          </a:bodyPr>
-          <a:lstStyle/>
-          <a:p>
-            <a:r>
-              <a:rPr sz="2600" b="1" i="0">
-                <a:solidFill>
-                  <a:srgbClr val="FFFFFF"/>
-                </a:solidFill>
-                <a:latin typeface="Calibri"/>
-              </a:rPr>
-              <a:t>Sustentacion del PI — objetivo y criterios</a:t>
-            </a:r>
-          </a:p>
-        </p:txBody>
-      </p:sp>
-      <p:sp>
-        <p:nvSpPr>
-          <p:cNvPr id="5" name="TextBox 4"/>
-          <p:cNvSpPr txBox="1"/>
-          <p:nvPr/>
-        </p:nvSpPr>
-        <p:spPr>
-          <a:xfrm>
-            <a:off x="457200" y="1170432"/>
-            <a:ext cx="11277295" cy="5230368"/>
-          </a:xfrm>
-          <a:prstGeom prst="rect">
-            <a:avLst/>
-          </a:prstGeom>
-          <a:noFill/>
-        </p:spPr>
-        <p:txBody>
-          <a:bodyPr wrap="square">
-            <a:spAutoFit/>
-          </a:bodyPr>
-          <a:lstStyle/>
-          <a:p>
-            <a:pPr>
-              <a:spcAft>
-                <a:spcPts val="800"/>
-              </a:spcAft>
-            </a:pPr>
-            <a:r>
-              <a:rPr sz="2000" b="0" i="0">
-                <a:solidFill>
-                  <a:srgbClr val="333333"/>
-                </a:solidFill>
-                <a:latin typeface="Calibri"/>
-              </a:rPr>
-              <a:t>–   </a:t>
-            </a:r>
-            <a:r>
-              <a:rPr sz="2000" b="1" i="0">
-                <a:solidFill>
-                  <a:srgbClr val="333333"/>
-                </a:solidFill>
-                <a:latin typeface="Calibri"/>
-              </a:rPr>
-              <a:t>Objetivo:</a:t>
-            </a:r>
-            <a:r>
-              <a:rPr sz="2000" b="0" i="0">
-                <a:solidFill>
-                  <a:srgbClr val="333333"/>
-                </a:solidFill>
-                <a:latin typeface="Calibri"/>
-              </a:rPr>
-              <a:t> Paquete final entregado + sustentacion en vivo de 5-8 min con Q&amp;A.</a:t>
-            </a:r>
-          </a:p>
-          <a:p>
-            <a:pPr>
-              <a:spcAft>
-                <a:spcPts val="800"/>
-              </a:spcAft>
-            </a:pPr>
-            <a:r>
-              <a:rPr sz="2000" b="0" i="0">
-                <a:solidFill>
-                  <a:srgbClr val="333333"/>
-                </a:solidFill>
-                <a:latin typeface="Calibri"/>
-              </a:rPr>
-              <a:t>–   </a:t>
-            </a:r>
-            <a:r>
-              <a:rPr sz="2000" b="1" i="0">
-                <a:solidFill>
-                  <a:srgbClr val="333333"/>
-                </a:solidFill>
-                <a:latin typeface="Calibri"/>
-              </a:rPr>
-              <a:t>Exito:</a:t>
-            </a:r>
-            <a:r>
-              <a:rPr sz="2000" b="0" i="0">
-                <a:solidFill>
-                  <a:srgbClr val="333333"/>
-                </a:solidFill>
-                <a:latin typeface="Calibri"/>
-              </a:rPr>
-              <a:t> ZIP/PDF en la plataforma del curso ANTES del turno.</a:t>
-            </a:r>
-          </a:p>
-          <a:p>
-            <a:pPr>
-              <a:spcAft>
-                <a:spcPts val="800"/>
-              </a:spcAft>
-            </a:pPr>
-            <a:r>
-              <a:rPr sz="2000" b="0" i="0">
-                <a:solidFill>
-                  <a:srgbClr val="333333"/>
-                </a:solidFill>
-                <a:latin typeface="Calibri"/>
-              </a:rPr>
-              <a:t>–   </a:t>
-            </a:r>
-            <a:r>
-              <a:rPr sz="2000" b="1" i="0">
-                <a:solidFill>
-                  <a:srgbClr val="333333"/>
-                </a:solidFill>
-                <a:latin typeface="Calibri"/>
-              </a:rPr>
-              <a:t>Exito:</a:t>
-            </a:r>
-            <a:r>
-              <a:rPr sz="2000" b="0" i="0">
-                <a:solidFill>
-                  <a:srgbClr val="333333"/>
-                </a:solidFill>
-                <a:latin typeface="Calibri"/>
-              </a:rPr>
-              <a:t> Sustentacion en vivo de 5-8 min.</a:t>
-            </a:r>
-          </a:p>
-          <a:p>
-            <a:pPr>
-              <a:spcAft>
-                <a:spcPts val="800"/>
-              </a:spcAft>
-            </a:pPr>
-            <a:r>
-              <a:rPr sz="2000" b="0" i="0">
-                <a:solidFill>
-                  <a:srgbClr val="333333"/>
-                </a:solidFill>
-                <a:latin typeface="Calibri"/>
-              </a:rPr>
-              <a:t>–   </a:t>
-            </a:r>
-            <a:r>
-              <a:rPr sz="2000" b="1" i="0">
-                <a:solidFill>
-                  <a:srgbClr val="333333"/>
-                </a:solidFill>
-                <a:latin typeface="Calibri"/>
-              </a:rPr>
-              <a:t>Exito:</a:t>
-            </a:r>
-            <a:r>
-              <a:rPr sz="2000" b="0" i="0">
-                <a:solidFill>
-                  <a:srgbClr val="333333"/>
-                </a:solidFill>
-                <a:latin typeface="Calibri"/>
-              </a:rPr>
-              <a:t> Q&amp;A respondido en vivo (preguntas al azar).</a:t>
-            </a:r>
-          </a:p>
-          <a:p>
-            <a:pPr>
-              <a:spcAft>
-                <a:spcPts val="800"/>
-              </a:spcAft>
-            </a:pPr>
-            <a:r>
-              <a:rPr sz="2000" b="0" i="0">
-                <a:solidFill>
-                  <a:srgbClr val="333333"/>
-                </a:solidFill>
-                <a:latin typeface="Calibri"/>
-              </a:rPr>
-              <a:t>–   </a:t>
-            </a:r>
-            <a:r>
-              <a:rPr sz="2000" b="1" i="0">
-                <a:solidFill>
-                  <a:srgbClr val="333333"/>
-                </a:solidFill>
-                <a:latin typeface="Calibri"/>
-              </a:rPr>
-              <a:t>Exito:</a:t>
-            </a:r>
-            <a:r>
-              <a:rPr sz="2000" b="0" i="0">
-                <a:solidFill>
-                  <a:srgbClr val="333333"/>
-                </a:solidFill>
-                <a:latin typeface="Calibri"/>
-              </a:rPr>
-              <a:t> Autoevaluacion.</a:t>
-            </a:r>
-          </a:p>
-          <a:p>
-            <a:pPr>
-              <a:spcAft>
-                <a:spcPts val="800"/>
-              </a:spcAft>
-            </a:pPr>
-            <a:r>
-              <a:rPr sz="2000" b="0" i="0">
-                <a:solidFill>
-                  <a:srgbClr val="333333"/>
-                </a:solidFill>
-                <a:latin typeface="Calibri"/>
-              </a:rPr>
-              <a:t>–   </a:t>
-            </a:r>
-            <a:r>
-              <a:rPr sz="2000" b="1" i="0">
-                <a:solidFill>
-                  <a:srgbClr val="333333"/>
-                </a:solidFill>
-                <a:latin typeface="Calibri"/>
-              </a:rPr>
-              <a:t>Exito:</a:t>
-            </a:r>
-            <a:r>
-              <a:rPr sz="2000" b="0" i="0">
-                <a:solidFill>
-                  <a:srgbClr val="333333"/>
-                </a:solidFill>
-                <a:latin typeface="Calibri"/>
-              </a:rPr>
-              <a:t> Cierre.</a:t>
-            </a:r>
-          </a:p>
-        </p:txBody>
-      </p:sp>
-      <p:sp>
-        <p:nvSpPr>
-          <p:cNvPr id="6" name="TextBox 5"/>
-          <p:cNvSpPr txBox="1"/>
-          <p:nvPr/>
-        </p:nvSpPr>
-        <p:spPr>
-          <a:xfrm>
-            <a:off x="11185855" y="6473952"/>
-            <a:ext cx="640080" cy="274320"/>
-          </a:xfrm>
-          <a:prstGeom prst="rect">
-            <a:avLst/>
-          </a:prstGeom>
-          <a:noFill/>
-        </p:spPr>
-        <p:txBody>
-          <a:bodyPr wrap="square">
-            <a:spAutoFit/>
-          </a:bodyPr>
-          <a:lstStyle/>
-          <a:p>
-            <a:pPr algn="r"/>
-            <a:r>
-              <a:rPr sz="1100" b="0" i="0">
-                <a:solidFill>
-                  <a:srgbClr val="666666"/>
-                </a:solidFill>
-                <a:latin typeface="Calibri"/>
-              </a:rPr>
-              <a:t>24</a:t>
-            </a:r>
-          </a:p>
-        </p:txBody>
-      </p:sp>
-    </p:spTree>
-  </p:cSld>
-  <p:clrMapOvr>
-    <a:masterClrMapping/>
-  </p:clrMapOvr>
-</p:sld>
-</file>
-
-<file path=ppt/slides/slide25.xml><?xml version="1.0" encoding="utf-8"?>
-<p:sld xmlns:a="http://schemas.openxmlformats.org/drawingml/2006/main" xmlns:p="http://schemas.openxmlformats.org/presentationml/2006/main" xmlns:r="http://schemas.openxmlformats.org/officeDocument/2006/relationships">
-  <p:cSld>
-    <p:bg>
-      <p:bgPr>
-        <a:solidFill>
-          <a:srgbClr val="FFFFFF"/>
-        </a:solidFill>
-        <a:effectLst/>
-      </p:bgPr>
-    </p:bg>
-    <p:spTree>
-      <p:nvGrpSpPr>
-        <p:cNvPr id="1" name=""/>
-        <p:cNvGrpSpPr/>
-        <p:nvPr/>
-      </p:nvGrpSpPr>
-      <p:grpSpPr/>
-      <p:sp>
-        <p:nvSpPr>
-          <p:cNvPr id="2" name="Rectangle 1"/>
-          <p:cNvSpPr/>
-          <p:nvPr/>
-        </p:nvSpPr>
-        <p:spPr>
-          <a:xfrm>
-            <a:off x="0" y="0"/>
-            <a:ext cx="12191695" cy="960120"/>
-          </a:xfrm>
-          <a:prstGeom prst="rect">
-            <a:avLst/>
-          </a:prstGeom>
-          <a:solidFill>
-            <a:srgbClr val="095292"/>
-          </a:solidFill>
-          <a:ln>
-            <a:noFill/>
-          </a:ln>
-        </p:spPr>
-        <p:style>
-          <a:lnRef idx="1">
-            <a:schemeClr val="accent1"/>
-          </a:lnRef>
-          <a:fillRef idx="3">
-            <a:schemeClr val="accent1"/>
-          </a:fillRef>
-          <a:effectRef idx="2">
-            <a:schemeClr val="accent1"/>
-          </a:effectRef>
-          <a:fontRef idx="minor">
-            <a:schemeClr val="lt1"/>
-          </a:fontRef>
-        </p:style>
-        <p:txBody>
-          <a:bodyPr rtlCol="0" anchor="ctr"/>
-          <a:lstStyle/>
-          <a:p>
-            <a:pPr algn="ctr"/>
-          </a:p>
-        </p:txBody>
-      </p:sp>
-      <p:sp>
-        <p:nvSpPr>
-          <p:cNvPr id="3" name="Rectangle 2"/>
-          <p:cNvSpPr/>
-          <p:nvPr/>
-        </p:nvSpPr>
-        <p:spPr>
-          <a:xfrm>
-            <a:off x="0" y="960120"/>
-            <a:ext cx="12191695" cy="41148"/>
-          </a:xfrm>
-          <a:prstGeom prst="rect">
-            <a:avLst/>
-          </a:prstGeom>
-          <a:solidFill>
-            <a:srgbClr val="FFD000"/>
-          </a:solidFill>
-          <a:ln>
-            <a:noFill/>
-          </a:ln>
-        </p:spPr>
-        <p:style>
-          <a:lnRef idx="1">
-            <a:schemeClr val="accent1"/>
-          </a:lnRef>
-          <a:fillRef idx="3">
-            <a:schemeClr val="accent1"/>
-          </a:fillRef>
-          <a:effectRef idx="2">
-            <a:schemeClr val="accent1"/>
-          </a:effectRef>
-          <a:fontRef idx="minor">
-            <a:schemeClr val="lt1"/>
-          </a:fontRef>
-        </p:style>
-        <p:txBody>
-          <a:bodyPr rtlCol="0" anchor="ctr"/>
-          <a:lstStyle/>
-          <a:p>
-            <a:pPr algn="ctr"/>
-          </a:p>
-        </p:txBody>
-      </p:sp>
-      <p:sp>
-        <p:nvSpPr>
-          <p:cNvPr id="4" name="TextBox 3"/>
-          <p:cNvSpPr txBox="1"/>
-          <p:nvPr/>
-        </p:nvSpPr>
-        <p:spPr>
-          <a:xfrm>
-            <a:off x="457200" y="164592"/>
-            <a:ext cx="11277295" cy="502920"/>
-          </a:xfrm>
-          <a:prstGeom prst="rect">
-            <a:avLst/>
-          </a:prstGeom>
-          <a:noFill/>
-        </p:spPr>
-        <p:txBody>
-          <a:bodyPr wrap="square">
-            <a:spAutoFit/>
-          </a:bodyPr>
-          <a:lstStyle/>
-          <a:p>
-            <a:r>
-              <a:rPr sz="2600" b="1" i="0">
-                <a:solidFill>
-                  <a:srgbClr val="FFFFFF"/>
-                </a:solidFill>
-                <a:latin typeface="Calibri"/>
-              </a:rPr>
-              <a:t>Sustentacion del PI — escenario / datos de partida</a:t>
-            </a:r>
-          </a:p>
-        </p:txBody>
-      </p:sp>
-      <p:sp>
-        <p:nvSpPr>
-          <p:cNvPr id="5" name="TextBox 4"/>
-          <p:cNvSpPr txBox="1"/>
-          <p:nvPr/>
-        </p:nvSpPr>
-        <p:spPr>
-          <a:xfrm>
-            <a:off x="457200" y="1170432"/>
-            <a:ext cx="11277295" cy="5230368"/>
-          </a:xfrm>
-          <a:prstGeom prst="rect">
-            <a:avLst/>
-          </a:prstGeom>
-          <a:noFill/>
-        </p:spPr>
-        <p:txBody>
-          <a:bodyPr wrap="square">
-            <a:spAutoFit/>
-          </a:bodyPr>
-          <a:lstStyle/>
-          <a:p>
-            <a:pPr>
-              <a:spcAft>
-                <a:spcPts val="800"/>
-              </a:spcAft>
-            </a:pPr>
-            <a:r>
-              <a:rPr sz="2000" b="0" i="0">
-                <a:solidFill>
-                  <a:srgbClr val="333333"/>
-                </a:solidFill>
-                <a:latin typeface="Calibri"/>
-              </a:rPr>
-              <a:t>–   Checklist empaquetado del enunciado PI.</a:t>
-            </a:r>
-          </a:p>
-          <a:p>
-            <a:pPr>
-              <a:spcAft>
-                <a:spcPts val="800"/>
-              </a:spcAft>
-            </a:pPr>
-            <a:r>
-              <a:rPr sz="2000" b="0" i="0">
-                <a:solidFill>
-                  <a:srgbClr val="333333"/>
-                </a:solidFill>
-                <a:latin typeface="Calibri"/>
-              </a:rPr>
-              <a:t>–   Turnos consecutivos en el bloque; el orden se sortea al abrir la sesion.</a:t>
-            </a:r>
-          </a:p>
-        </p:txBody>
-      </p:sp>
-      <p:sp>
-        <p:nvSpPr>
-          <p:cNvPr id="6" name="TextBox 5"/>
-          <p:cNvSpPr txBox="1"/>
-          <p:nvPr/>
-        </p:nvSpPr>
-        <p:spPr>
-          <a:xfrm>
-            <a:off x="11185855" y="6473952"/>
-            <a:ext cx="640080" cy="274320"/>
-          </a:xfrm>
-          <a:prstGeom prst="rect">
-            <a:avLst/>
-          </a:prstGeom>
-          <a:noFill/>
-        </p:spPr>
-        <p:txBody>
-          <a:bodyPr wrap="square">
-            <a:spAutoFit/>
-          </a:bodyPr>
-          <a:lstStyle/>
-          <a:p>
-            <a:pPr algn="r"/>
-            <a:r>
-              <a:rPr sz="1100" b="0" i="0">
-                <a:solidFill>
-                  <a:srgbClr val="666666"/>
-                </a:solidFill>
-                <a:latin typeface="Calibri"/>
-              </a:rPr>
-              <a:t>25</a:t>
-            </a:r>
-          </a:p>
-        </p:txBody>
-      </p:sp>
-    </p:spTree>
-  </p:cSld>
-  <p:clrMapOvr>
-    <a:masterClrMapping/>
-  </p:clrMapOvr>
-</p:sld>
-</file>
-
-<file path=ppt/slides/slide26.xml><?xml version="1.0" encoding="utf-8"?>
-<p:sld xmlns:a="http://schemas.openxmlformats.org/drawingml/2006/main" xmlns:p="http://schemas.openxmlformats.org/presentationml/2006/main" xmlns:r="http://schemas.openxmlformats.org/officeDocument/2006/relationships">
-  <p:cSld>
-    <p:bg>
-      <p:bgPr>
-        <a:solidFill>
-          <a:srgbClr val="FFFFFF"/>
-        </a:solidFill>
-        <a:effectLst/>
-      </p:bgPr>
-    </p:bg>
-    <p:spTree>
-      <p:nvGrpSpPr>
-        <p:cNvPr id="1" name=""/>
-        <p:cNvGrpSpPr/>
-        <p:nvPr/>
-      </p:nvGrpSpPr>
-      <p:grpSpPr/>
-      <p:sp>
-        <p:nvSpPr>
-          <p:cNvPr id="2" name="Rectangle 1"/>
-          <p:cNvSpPr/>
-          <p:nvPr/>
-        </p:nvSpPr>
-        <p:spPr>
-          <a:xfrm>
-            <a:off x="0" y="0"/>
-            <a:ext cx="12191695" cy="960120"/>
-          </a:xfrm>
-          <a:prstGeom prst="rect">
-            <a:avLst/>
-          </a:prstGeom>
-          <a:solidFill>
-            <a:srgbClr val="095292"/>
-          </a:solidFill>
-          <a:ln>
-            <a:noFill/>
-          </a:ln>
-        </p:spPr>
-        <p:style>
-          <a:lnRef idx="1">
-            <a:schemeClr val="accent1"/>
-          </a:lnRef>
-          <a:fillRef idx="3">
-            <a:schemeClr val="accent1"/>
-          </a:fillRef>
-          <a:effectRef idx="2">
-            <a:schemeClr val="accent1"/>
-          </a:effectRef>
-          <a:fontRef idx="minor">
-            <a:schemeClr val="lt1"/>
-          </a:fontRef>
-        </p:style>
-        <p:txBody>
-          <a:bodyPr rtlCol="0" anchor="ctr"/>
-          <a:lstStyle/>
-          <a:p>
-            <a:pPr algn="ctr"/>
-          </a:p>
-        </p:txBody>
-      </p:sp>
-      <p:sp>
-        <p:nvSpPr>
-          <p:cNvPr id="3" name="Rectangle 2"/>
-          <p:cNvSpPr/>
-          <p:nvPr/>
-        </p:nvSpPr>
-        <p:spPr>
-          <a:xfrm>
-            <a:off x="0" y="960120"/>
-            <a:ext cx="12191695" cy="41148"/>
-          </a:xfrm>
-          <a:prstGeom prst="rect">
-            <a:avLst/>
-          </a:prstGeom>
-          <a:solidFill>
-            <a:srgbClr val="FFD000"/>
-          </a:solidFill>
-          <a:ln>
-            <a:noFill/>
-          </a:ln>
-        </p:spPr>
-        <p:style>
-          <a:lnRef idx="1">
-            <a:schemeClr val="accent1"/>
-          </a:lnRef>
-          <a:fillRef idx="3">
-            <a:schemeClr val="accent1"/>
-          </a:fillRef>
-          <a:effectRef idx="2">
-            <a:schemeClr val="accent1"/>
-          </a:effectRef>
-          <a:fontRef idx="minor">
-            <a:schemeClr val="lt1"/>
-          </a:fontRef>
-        </p:style>
-        <p:txBody>
-          <a:bodyPr rtlCol="0" anchor="ctr"/>
-          <a:lstStyle/>
-          <a:p>
-            <a:pPr algn="ctr"/>
-          </a:p>
-        </p:txBody>
-      </p:sp>
-      <p:sp>
-        <p:nvSpPr>
-          <p:cNvPr id="4" name="TextBox 3"/>
-          <p:cNvSpPr txBox="1"/>
-          <p:nvPr/>
-        </p:nvSpPr>
-        <p:spPr>
-          <a:xfrm>
-            <a:off x="457200" y="164592"/>
-            <a:ext cx="11277295" cy="502920"/>
-          </a:xfrm>
-          <a:prstGeom prst="rect">
-            <a:avLst/>
-          </a:prstGeom>
-          <a:noFill/>
-        </p:spPr>
-        <p:txBody>
-          <a:bodyPr wrap="square">
-            <a:spAutoFit/>
-          </a:bodyPr>
-          <a:lstStyle/>
-          <a:p>
-            <a:r>
-              <a:rPr sz="2600" b="1" i="0">
-                <a:solidFill>
-                  <a:srgbClr val="FFFFFF"/>
-                </a:solidFill>
-                <a:latin typeface="Calibri"/>
-              </a:rPr>
-              <a:t>Sustentacion del PI — pasos guiados</a:t>
-            </a:r>
-          </a:p>
-        </p:txBody>
-      </p:sp>
-      <p:sp>
-        <p:nvSpPr>
-          <p:cNvPr id="5" name="Rounded Rectangle 4"/>
-          <p:cNvSpPr/>
-          <p:nvPr/>
-        </p:nvSpPr>
-        <p:spPr>
-          <a:xfrm>
-            <a:off x="457200" y="1234440"/>
-            <a:ext cx="11277295" cy="950976"/>
-          </a:xfrm>
-          <a:prstGeom prst="roundRect">
-            <a:avLst>
-              <a:gd name="adj" fmla="val 12000"/>
-            </a:avLst>
-          </a:prstGeom>
-          <a:solidFill>
-            <a:srgbClr val="F2F2F2"/>
-          </a:solidFill>
-          <a:ln>
-            <a:noFill/>
-          </a:ln>
-        </p:spPr>
-        <p:style>
-          <a:lnRef idx="1">
-            <a:schemeClr val="accent1"/>
-          </a:lnRef>
-          <a:fillRef idx="3">
-            <a:schemeClr val="accent1"/>
-          </a:fillRef>
-          <a:effectRef idx="2">
-            <a:schemeClr val="accent1"/>
-          </a:effectRef>
-          <a:fontRef idx="minor">
-            <a:schemeClr val="lt1"/>
-          </a:fontRef>
-        </p:style>
-        <p:txBody>
-          <a:bodyPr rtlCol="0" anchor="ctr"/>
-          <a:lstStyle/>
-          <a:p>
-            <a:pPr algn="ctr"/>
-          </a:p>
-        </p:txBody>
-      </p:sp>
-      <p:sp>
-        <p:nvSpPr>
-          <p:cNvPr id="6" name="Rounded Rectangle 5"/>
-          <p:cNvSpPr/>
-          <p:nvPr/>
-        </p:nvSpPr>
-        <p:spPr>
-          <a:xfrm>
-            <a:off x="594360" y="1490472"/>
-            <a:ext cx="438912" cy="438912"/>
-          </a:xfrm>
-          <a:prstGeom prst="roundRect">
-            <a:avLst>
-              <a:gd name="adj" fmla="val 12000"/>
-            </a:avLst>
-          </a:prstGeom>
-          <a:solidFill>
-            <a:srgbClr val="095292"/>
-          </a:solidFill>
-          <a:ln>
-            <a:noFill/>
-          </a:ln>
-        </p:spPr>
-        <p:style>
-          <a:lnRef idx="1">
-            <a:schemeClr val="accent1"/>
-          </a:lnRef>
-          <a:fillRef idx="3">
-            <a:schemeClr val="accent1"/>
-          </a:fillRef>
-          <a:effectRef idx="2">
-            <a:schemeClr val="accent1"/>
-          </a:effectRef>
-          <a:fontRef idx="minor">
-            <a:schemeClr val="lt1"/>
-          </a:fontRef>
-        </p:style>
-        <p:txBody>
-          <a:bodyPr rtlCol="0" anchor="ctr"/>
-          <a:lstStyle/>
-          <a:p>
-            <a:pPr algn="ctr"/>
-          </a:p>
-        </p:txBody>
-      </p:sp>
-      <p:sp>
-        <p:nvSpPr>
-          <p:cNvPr id="7" name="TextBox 6"/>
-          <p:cNvSpPr txBox="1"/>
-          <p:nvPr/>
-        </p:nvSpPr>
-        <p:spPr>
-          <a:xfrm>
-            <a:off x="594360" y="1490472"/>
-            <a:ext cx="438912" cy="438912"/>
-          </a:xfrm>
-          <a:prstGeom prst="rect">
-            <a:avLst/>
-          </a:prstGeom>
-          <a:noFill/>
-        </p:spPr>
-        <p:txBody>
-          <a:bodyPr wrap="square" anchor="ctr"/>
-          <a:lstStyle/>
-          <a:p>
-            <a:pPr algn="ctr"/>
-            <a:r>
-              <a:rPr sz="1600" b="1" i="0">
-                <a:solidFill>
-                  <a:srgbClr val="FFFFFF"/>
-                </a:solidFill>
-                <a:latin typeface="Calibri"/>
-              </a:rPr>
-              <a:t>1</a:t>
-            </a:r>
-          </a:p>
-        </p:txBody>
-      </p:sp>
-      <p:sp>
-        <p:nvSpPr>
-          <p:cNvPr id="8" name="TextBox 7"/>
-          <p:cNvSpPr txBox="1"/>
-          <p:nvPr/>
-        </p:nvSpPr>
-        <p:spPr>
-          <a:xfrm>
-            <a:off x="1188720" y="1325880"/>
-            <a:ext cx="10271455" cy="786384"/>
-          </a:xfrm>
-          <a:prstGeom prst="rect">
-            <a:avLst/>
-          </a:prstGeom>
-          <a:noFill/>
-        </p:spPr>
-        <p:txBody>
-          <a:bodyPr wrap="square" anchor="ctr"/>
-          <a:lstStyle/>
-          <a:p>
-            <a:r>
-              <a:rPr sz="1500" b="1" i="0">
-                <a:solidFill>
-                  <a:srgbClr val="095292"/>
-                </a:solidFill>
-                <a:latin typeface="Calibri"/>
-              </a:rPr>
-              <a:t>Subir el paquete final a la plataforma del curso (modulo Proyectos) ANTES de su turno.</a:t>
-            </a:r>
-          </a:p>
-        </p:txBody>
-      </p:sp>
-      <p:sp>
-        <p:nvSpPr>
-          <p:cNvPr id="9" name="Rounded Rectangle 8"/>
-          <p:cNvSpPr/>
-          <p:nvPr/>
-        </p:nvSpPr>
-        <p:spPr>
-          <a:xfrm>
-            <a:off x="457200" y="2276856"/>
-            <a:ext cx="11277295" cy="950976"/>
-          </a:xfrm>
-          <a:prstGeom prst="roundRect">
-            <a:avLst>
-              <a:gd name="adj" fmla="val 12000"/>
-            </a:avLst>
-          </a:prstGeom>
-          <a:solidFill>
-            <a:srgbClr val="E8F4FA"/>
-          </a:solidFill>
-          <a:ln>
-            <a:noFill/>
-          </a:ln>
-        </p:spPr>
-        <p:style>
-          <a:lnRef idx="1">
-            <a:schemeClr val="accent1"/>
-          </a:lnRef>
-          <a:fillRef idx="3">
-            <a:schemeClr val="accent1"/>
-          </a:fillRef>
-          <a:effectRef idx="2">
-            <a:schemeClr val="accent1"/>
-          </a:effectRef>
-          <a:fontRef idx="minor">
-            <a:schemeClr val="lt1"/>
-          </a:fontRef>
-        </p:style>
-        <p:txBody>
-          <a:bodyPr rtlCol="0" anchor="ctr"/>
-          <a:lstStyle/>
-          <a:p>
-            <a:pPr algn="ctr"/>
-          </a:p>
-        </p:txBody>
-      </p:sp>
-      <p:sp>
-        <p:nvSpPr>
-          <p:cNvPr id="10" name="Rounded Rectangle 9"/>
-          <p:cNvSpPr/>
-          <p:nvPr/>
-        </p:nvSpPr>
-        <p:spPr>
-          <a:xfrm>
-            <a:off x="594360" y="2532888"/>
-            <a:ext cx="438912" cy="438912"/>
-          </a:xfrm>
-          <a:prstGeom prst="roundRect">
-            <a:avLst>
-              <a:gd name="adj" fmla="val 12000"/>
-            </a:avLst>
-          </a:prstGeom>
-          <a:solidFill>
-            <a:srgbClr val="095292"/>
-          </a:solidFill>
-          <a:ln>
-            <a:noFill/>
-          </a:ln>
-        </p:spPr>
-        <p:style>
-          <a:lnRef idx="1">
-            <a:schemeClr val="accent1"/>
-          </a:lnRef>
-          <a:fillRef idx="3">
-            <a:schemeClr val="accent1"/>
-          </a:fillRef>
-          <a:effectRef idx="2">
-            <a:schemeClr val="accent1"/>
-          </a:effectRef>
-          <a:fontRef idx="minor">
-            <a:schemeClr val="lt1"/>
-          </a:fontRef>
-        </p:style>
-        <p:txBody>
-          <a:bodyPr rtlCol="0" anchor="ctr"/>
-          <a:lstStyle/>
-          <a:p>
-            <a:pPr algn="ctr"/>
-          </a:p>
-        </p:txBody>
-      </p:sp>
-      <p:sp>
-        <p:nvSpPr>
-          <p:cNvPr id="11" name="TextBox 10"/>
-          <p:cNvSpPr txBox="1"/>
-          <p:nvPr/>
-        </p:nvSpPr>
-        <p:spPr>
-          <a:xfrm>
-            <a:off x="594360" y="2532888"/>
-            <a:ext cx="438912" cy="438912"/>
-          </a:xfrm>
-          <a:prstGeom prst="rect">
-            <a:avLst/>
-          </a:prstGeom>
-          <a:noFill/>
-        </p:spPr>
-        <p:txBody>
-          <a:bodyPr wrap="square" anchor="ctr"/>
-          <a:lstStyle/>
-          <a:p>
-            <a:pPr algn="ctr"/>
-            <a:r>
-              <a:rPr sz="1600" b="1" i="0">
-                <a:solidFill>
-                  <a:srgbClr val="FFFFFF"/>
-                </a:solidFill>
-                <a:latin typeface="Calibri"/>
-              </a:rPr>
-              <a:t>2</a:t>
-            </a:r>
-          </a:p>
-        </p:txBody>
-      </p:sp>
-      <p:sp>
-        <p:nvSpPr>
-          <p:cNvPr id="12" name="TextBox 11"/>
-          <p:cNvSpPr txBox="1"/>
-          <p:nvPr/>
-        </p:nvSpPr>
-        <p:spPr>
-          <a:xfrm>
-            <a:off x="1188720" y="2368296"/>
-            <a:ext cx="10271455" cy="786384"/>
-          </a:xfrm>
-          <a:prstGeom prst="rect">
-            <a:avLst/>
-          </a:prstGeom>
-          <a:noFill/>
-        </p:spPr>
-        <p:txBody>
-          <a:bodyPr wrap="square" anchor="ctr"/>
-          <a:lstStyle/>
-          <a:p>
-            <a:r>
-              <a:rPr sz="1500" b="1" i="0">
-                <a:solidFill>
-                  <a:srgbClr val="095292"/>
-                </a:solidFill>
-                <a:latin typeface="Calibri"/>
-              </a:rPr>
-              <a:t>Sustentar en vivo 5-8 min con el ER y una ejecucion real en pantalla.</a:t>
-            </a:r>
-          </a:p>
-        </p:txBody>
-      </p:sp>
-      <p:sp>
-        <p:nvSpPr>
-          <p:cNvPr id="13" name="Rounded Rectangle 12"/>
-          <p:cNvSpPr/>
-          <p:nvPr/>
-        </p:nvSpPr>
-        <p:spPr>
-          <a:xfrm>
-            <a:off x="457200" y="3319272"/>
-            <a:ext cx="11277295" cy="950976"/>
-          </a:xfrm>
-          <a:prstGeom prst="roundRect">
-            <a:avLst>
-              <a:gd name="adj" fmla="val 12000"/>
-            </a:avLst>
-          </a:prstGeom>
-          <a:solidFill>
-            <a:srgbClr val="F2F2F2"/>
-          </a:solidFill>
-          <a:ln>
-            <a:noFill/>
-          </a:ln>
-        </p:spPr>
-        <p:style>
-          <a:lnRef idx="1">
-            <a:schemeClr val="accent1"/>
-          </a:lnRef>
-          <a:fillRef idx="3">
-            <a:schemeClr val="accent1"/>
-          </a:fillRef>
-          <a:effectRef idx="2">
-            <a:schemeClr val="accent1"/>
-          </a:effectRef>
-          <a:fontRef idx="minor">
-            <a:schemeClr val="lt1"/>
-          </a:fontRef>
-        </p:style>
-        <p:txBody>
-          <a:bodyPr rtlCol="0" anchor="ctr"/>
-          <a:lstStyle/>
-          <a:p>
-            <a:pPr algn="ctr"/>
-          </a:p>
-        </p:txBody>
-      </p:sp>
-      <p:sp>
-        <p:nvSpPr>
-          <p:cNvPr id="14" name="Rounded Rectangle 13"/>
-          <p:cNvSpPr/>
-          <p:nvPr/>
-        </p:nvSpPr>
-        <p:spPr>
-          <a:xfrm>
-            <a:off x="594360" y="3575304"/>
-            <a:ext cx="438912" cy="438912"/>
-          </a:xfrm>
-          <a:prstGeom prst="roundRect">
-            <a:avLst>
-              <a:gd name="adj" fmla="val 12000"/>
-            </a:avLst>
-          </a:prstGeom>
-          <a:solidFill>
-            <a:srgbClr val="095292"/>
-          </a:solidFill>
-          <a:ln>
-            <a:noFill/>
-          </a:ln>
-        </p:spPr>
-        <p:style>
-          <a:lnRef idx="1">
-            <a:schemeClr val="accent1"/>
-          </a:lnRef>
-          <a:fillRef idx="3">
-            <a:schemeClr val="accent1"/>
-          </a:fillRef>
-          <a:effectRef idx="2">
-            <a:schemeClr val="accent1"/>
-          </a:effectRef>
-          <a:fontRef idx="minor">
-            <a:schemeClr val="lt1"/>
-          </a:fontRef>
-        </p:style>
-        <p:txBody>
-          <a:bodyPr rtlCol="0" anchor="ctr"/>
-          <a:lstStyle/>
-          <a:p>
-            <a:pPr algn="ctr"/>
-          </a:p>
-        </p:txBody>
-      </p:sp>
-      <p:sp>
-        <p:nvSpPr>
-          <p:cNvPr id="15" name="TextBox 14"/>
-          <p:cNvSpPr txBox="1"/>
-          <p:nvPr/>
-        </p:nvSpPr>
-        <p:spPr>
-          <a:xfrm>
-            <a:off x="594360" y="3575304"/>
-            <a:ext cx="438912" cy="438912"/>
-          </a:xfrm>
-          <a:prstGeom prst="rect">
-            <a:avLst/>
-          </a:prstGeom>
-          <a:noFill/>
-        </p:spPr>
-        <p:txBody>
-          <a:bodyPr wrap="square" anchor="ctr"/>
-          <a:lstStyle/>
-          <a:p>
-            <a:pPr algn="ctr"/>
-            <a:r>
-              <a:rPr sz="1600" b="1" i="0">
-                <a:solidFill>
-                  <a:srgbClr val="FFFFFF"/>
-                </a:solidFill>
-                <a:latin typeface="Calibri"/>
-              </a:rPr>
-              <a:t>3</a:t>
-            </a:r>
-          </a:p>
-        </p:txBody>
-      </p:sp>
-      <p:sp>
-        <p:nvSpPr>
-          <p:cNvPr id="16" name="TextBox 15"/>
-          <p:cNvSpPr txBox="1"/>
-          <p:nvPr/>
-        </p:nvSpPr>
-        <p:spPr>
-          <a:xfrm>
-            <a:off x="1188720" y="3410712"/>
-            <a:ext cx="10271455" cy="786384"/>
-          </a:xfrm>
-          <a:prstGeom prst="rect">
-            <a:avLst/>
-          </a:prstGeom>
-          <a:noFill/>
-        </p:spPr>
-        <p:txBody>
-          <a:bodyPr wrap="square" anchor="ctr"/>
-          <a:lstStyle/>
-          <a:p>
-            <a:r>
-              <a:rPr sz="1500" b="1" i="0">
-                <a:solidFill>
-                  <a:srgbClr val="095292"/>
-                </a:solidFill>
-                <a:latin typeface="Calibri"/>
-              </a:rPr>
-              <a:t>Responder el Q&amp;A en vivo del docente (preguntas al azar sobre su modelo).</a:t>
-            </a:r>
-          </a:p>
-        </p:txBody>
-      </p:sp>
-      <p:sp>
-        <p:nvSpPr>
-          <p:cNvPr id="17" name="Rounded Rectangle 16"/>
-          <p:cNvSpPr/>
-          <p:nvPr/>
-        </p:nvSpPr>
-        <p:spPr>
-          <a:xfrm>
-            <a:off x="457200" y="4361688"/>
-            <a:ext cx="11277295" cy="950976"/>
-          </a:xfrm>
-          <a:prstGeom prst="roundRect">
-            <a:avLst>
-              <a:gd name="adj" fmla="val 12000"/>
-            </a:avLst>
-          </a:prstGeom>
-          <a:solidFill>
-            <a:srgbClr val="E8F4FA"/>
-          </a:solidFill>
-          <a:ln>
-            <a:noFill/>
-          </a:ln>
-        </p:spPr>
-        <p:style>
-          <a:lnRef idx="1">
-            <a:schemeClr val="accent1"/>
-          </a:lnRef>
-          <a:fillRef idx="3">
-            <a:schemeClr val="accent1"/>
-          </a:fillRef>
-          <a:effectRef idx="2">
-            <a:schemeClr val="accent1"/>
-          </a:effectRef>
-          <a:fontRef idx="minor">
-            <a:schemeClr val="lt1"/>
-          </a:fontRef>
-        </p:style>
-        <p:txBody>
-          <a:bodyPr rtlCol="0" anchor="ctr"/>
-          <a:lstStyle/>
-          <a:p>
-            <a:pPr algn="ctr"/>
-          </a:p>
-        </p:txBody>
-      </p:sp>
-      <p:sp>
-        <p:nvSpPr>
-          <p:cNvPr id="18" name="Rounded Rectangle 17"/>
-          <p:cNvSpPr/>
-          <p:nvPr/>
-        </p:nvSpPr>
-        <p:spPr>
-          <a:xfrm>
-            <a:off x="594360" y="4617720"/>
-            <a:ext cx="438912" cy="438912"/>
-          </a:xfrm>
-          <a:prstGeom prst="roundRect">
-            <a:avLst>
-              <a:gd name="adj" fmla="val 12000"/>
-            </a:avLst>
-          </a:prstGeom>
-          <a:solidFill>
-            <a:srgbClr val="095292"/>
-          </a:solidFill>
-          <a:ln>
-            <a:noFill/>
-          </a:ln>
-        </p:spPr>
-        <p:style>
-          <a:lnRef idx="1">
-            <a:schemeClr val="accent1"/>
-          </a:lnRef>
-          <a:fillRef idx="3">
-            <a:schemeClr val="accent1"/>
-          </a:fillRef>
-          <a:effectRef idx="2">
-            <a:schemeClr val="accent1"/>
-          </a:effectRef>
-          <a:fontRef idx="minor">
-            <a:schemeClr val="lt1"/>
-          </a:fontRef>
-        </p:style>
-        <p:txBody>
-          <a:bodyPr rtlCol="0" anchor="ctr"/>
-          <a:lstStyle/>
-          <a:p>
-            <a:pPr algn="ctr"/>
-          </a:p>
-        </p:txBody>
-      </p:sp>
-      <p:sp>
-        <p:nvSpPr>
-          <p:cNvPr id="19" name="TextBox 18"/>
-          <p:cNvSpPr txBox="1"/>
-          <p:nvPr/>
-        </p:nvSpPr>
-        <p:spPr>
-          <a:xfrm>
-            <a:off x="594360" y="4617720"/>
-            <a:ext cx="438912" cy="438912"/>
-          </a:xfrm>
-          <a:prstGeom prst="rect">
-            <a:avLst/>
-          </a:prstGeom>
-          <a:noFill/>
-        </p:spPr>
-        <p:txBody>
-          <a:bodyPr wrap="square" anchor="ctr"/>
-          <a:lstStyle/>
-          <a:p>
-            <a:pPr algn="ctr"/>
-            <a:r>
-              <a:rPr sz="1600" b="1" i="0">
-                <a:solidFill>
-                  <a:srgbClr val="FFFFFF"/>
-                </a:solidFill>
-                <a:latin typeface="Calibri"/>
-              </a:rPr>
-              <a:t>4</a:t>
-            </a:r>
-          </a:p>
-        </p:txBody>
-      </p:sp>
-      <p:sp>
-        <p:nvSpPr>
-          <p:cNvPr id="20" name="TextBox 19"/>
-          <p:cNvSpPr txBox="1"/>
-          <p:nvPr/>
-        </p:nvSpPr>
-        <p:spPr>
-          <a:xfrm>
-            <a:off x="1188720" y="4453128"/>
-            <a:ext cx="10271455" cy="786384"/>
-          </a:xfrm>
-          <a:prstGeom prst="rect">
-            <a:avLst/>
-          </a:prstGeom>
-          <a:noFill/>
-        </p:spPr>
-        <p:txBody>
-          <a:bodyPr wrap="square" anchor="ctr"/>
-          <a:lstStyle/>
-          <a:p>
-            <a:r>
-              <a:rPr sz="1500" b="1" i="0">
-                <a:solidFill>
-                  <a:srgbClr val="095292"/>
-                </a:solidFill>
-                <a:latin typeface="Calibri"/>
-              </a:rPr>
-              <a:t>Autoevaluacion: que harian distinto.</a:t>
-            </a:r>
-          </a:p>
-        </p:txBody>
-      </p:sp>
-      <p:sp>
-        <p:nvSpPr>
-          <p:cNvPr id="21" name="Rounded Rectangle 20"/>
-          <p:cNvSpPr/>
-          <p:nvPr/>
-        </p:nvSpPr>
-        <p:spPr>
-          <a:xfrm>
-            <a:off x="457200" y="5404104"/>
-            <a:ext cx="11277295" cy="950976"/>
-          </a:xfrm>
-          <a:prstGeom prst="roundRect">
-            <a:avLst>
-              <a:gd name="adj" fmla="val 12000"/>
-            </a:avLst>
-          </a:prstGeom>
-          <a:solidFill>
-            <a:srgbClr val="F2F2F2"/>
-          </a:solidFill>
-          <a:ln>
-            <a:noFill/>
-          </a:ln>
-        </p:spPr>
-        <p:style>
-          <a:lnRef idx="1">
-            <a:schemeClr val="accent1"/>
-          </a:lnRef>
-          <a:fillRef idx="3">
-            <a:schemeClr val="accent1"/>
-          </a:fillRef>
-          <a:effectRef idx="2">
-            <a:schemeClr val="accent1"/>
-          </a:effectRef>
-          <a:fontRef idx="minor">
-            <a:schemeClr val="lt1"/>
-          </a:fontRef>
-        </p:style>
-        <p:txBody>
-          <a:bodyPr rtlCol="0" anchor="ctr"/>
-          <a:lstStyle/>
-          <a:p>
-            <a:pPr algn="ctr"/>
-          </a:p>
-        </p:txBody>
-      </p:sp>
-      <p:sp>
-        <p:nvSpPr>
-          <p:cNvPr id="22" name="Rounded Rectangle 21"/>
-          <p:cNvSpPr/>
-          <p:nvPr/>
-        </p:nvSpPr>
-        <p:spPr>
-          <a:xfrm>
-            <a:off x="594360" y="5660136"/>
-            <a:ext cx="438912" cy="438912"/>
-          </a:xfrm>
-          <a:prstGeom prst="roundRect">
-            <a:avLst>
-              <a:gd name="adj" fmla="val 12000"/>
-            </a:avLst>
-          </a:prstGeom>
-          <a:solidFill>
-            <a:srgbClr val="095292"/>
-          </a:solidFill>
-          <a:ln>
-            <a:noFill/>
-          </a:ln>
-        </p:spPr>
-        <p:style>
-          <a:lnRef idx="1">
-            <a:schemeClr val="accent1"/>
-          </a:lnRef>
-          <a:fillRef idx="3">
-            <a:schemeClr val="accent1"/>
-          </a:fillRef>
-          <a:effectRef idx="2">
-            <a:schemeClr val="accent1"/>
-          </a:effectRef>
-          <a:fontRef idx="minor">
-            <a:schemeClr val="lt1"/>
-          </a:fontRef>
-        </p:style>
-        <p:txBody>
-          <a:bodyPr rtlCol="0" anchor="ctr"/>
-          <a:lstStyle/>
-          <a:p>
-            <a:pPr algn="ctr"/>
-          </a:p>
-        </p:txBody>
-      </p:sp>
-      <p:sp>
-        <p:nvSpPr>
-          <p:cNvPr id="23" name="TextBox 22"/>
-          <p:cNvSpPr txBox="1"/>
-          <p:nvPr/>
-        </p:nvSpPr>
-        <p:spPr>
-          <a:xfrm>
-            <a:off x="594360" y="5660136"/>
-            <a:ext cx="438912" cy="438912"/>
-          </a:xfrm>
-          <a:prstGeom prst="rect">
-            <a:avLst/>
-          </a:prstGeom>
-          <a:noFill/>
-        </p:spPr>
-        <p:txBody>
-          <a:bodyPr wrap="square" anchor="ctr"/>
-          <a:lstStyle/>
-          <a:p>
-            <a:pPr algn="ctr"/>
-            <a:r>
-              <a:rPr sz="1600" b="1" i="0">
-                <a:solidFill>
-                  <a:srgbClr val="FFFFFF"/>
-                </a:solidFill>
-                <a:latin typeface="Calibri"/>
-              </a:rPr>
-              <a:t>5</a:t>
-            </a:r>
-          </a:p>
-        </p:txBody>
-      </p:sp>
-      <p:sp>
-        <p:nvSpPr>
-          <p:cNvPr id="24" name="TextBox 23"/>
-          <p:cNvSpPr txBox="1"/>
-          <p:nvPr/>
-        </p:nvSpPr>
-        <p:spPr>
-          <a:xfrm>
-            <a:off x="1188720" y="5495544"/>
-            <a:ext cx="10271455" cy="786384"/>
-          </a:xfrm>
-          <a:prstGeom prst="rect">
-            <a:avLst/>
-          </a:prstGeom>
-          <a:noFill/>
-        </p:spPr>
-        <p:txBody>
-          <a:bodyPr wrap="square" anchor="ctr"/>
-          <a:lstStyle/>
-          <a:p>
-            <a:r>
-              <a:rPr sz="1500" b="1" i="0">
-                <a:solidFill>
-                  <a:srgbClr val="095292"/>
-                </a:solidFill>
-                <a:latin typeface="Calibri"/>
-              </a:rPr>
-              <a:t>Cierre del curso.</a:t>
-            </a:r>
-          </a:p>
-        </p:txBody>
-      </p:sp>
-      <p:sp>
-        <p:nvSpPr>
-          <p:cNvPr id="25" name="TextBox 24"/>
-          <p:cNvSpPr txBox="1"/>
-          <p:nvPr/>
-        </p:nvSpPr>
-        <p:spPr>
-          <a:xfrm>
-            <a:off x="11185855" y="6473952"/>
-            <a:ext cx="640080" cy="274320"/>
-          </a:xfrm>
-          <a:prstGeom prst="rect">
-            <a:avLst/>
-          </a:prstGeom>
-          <a:noFill/>
-        </p:spPr>
-        <p:txBody>
-          <a:bodyPr wrap="square">
-            <a:spAutoFit/>
-          </a:bodyPr>
-          <a:lstStyle/>
-          <a:p>
-            <a:pPr algn="r"/>
-            <a:r>
-              <a:rPr sz="1100" b="0" i="0">
-                <a:solidFill>
-                  <a:srgbClr val="666666"/>
-                </a:solidFill>
-                <a:latin typeface="Calibri"/>
-              </a:rPr>
-              <a:t>26</a:t>
-            </a:r>
-          </a:p>
-        </p:txBody>
-      </p:sp>
-    </p:spTree>
-  </p:cSld>
-  <p:clrMapOvr>
-    <a:masterClrMapping/>
-  </p:clrMapOvr>
-</p:sld>
-</file>
-
-<file path=ppt/slides/slide27.xml><?xml version="1.0" encoding="utf-8"?>
-<p:sld xmlns:a="http://schemas.openxmlformats.org/drawingml/2006/main" xmlns:p="http://schemas.openxmlformats.org/presentationml/2006/main" xmlns:r="http://schemas.openxmlformats.org/officeDocument/2006/relationships">
-  <p:cSld>
-    <p:bg>
-      <p:bgPr>
-        <a:solidFill>
-          <a:srgbClr val="FFFFFF"/>
-        </a:solidFill>
-        <a:effectLst/>
-      </p:bgPr>
-    </p:bg>
-    <p:spTree>
-      <p:nvGrpSpPr>
-        <p:cNvPr id="1" name=""/>
-        <p:cNvGrpSpPr/>
-        <p:nvPr/>
-      </p:nvGrpSpPr>
-      <p:grpSpPr/>
-      <p:sp>
-        <p:nvSpPr>
-          <p:cNvPr id="2" name="Rectangle 1"/>
-          <p:cNvSpPr/>
-          <p:nvPr/>
-        </p:nvSpPr>
-        <p:spPr>
-          <a:xfrm>
-            <a:off x="0" y="0"/>
-            <a:ext cx="12191695" cy="960120"/>
-          </a:xfrm>
-          <a:prstGeom prst="rect">
-            <a:avLst/>
-          </a:prstGeom>
-          <a:solidFill>
-            <a:srgbClr val="095292"/>
-          </a:solidFill>
-          <a:ln>
-            <a:noFill/>
-          </a:ln>
-        </p:spPr>
-        <p:style>
-          <a:lnRef idx="1">
-            <a:schemeClr val="accent1"/>
-          </a:lnRef>
-          <a:fillRef idx="3">
-            <a:schemeClr val="accent1"/>
-          </a:fillRef>
-          <a:effectRef idx="2">
-            <a:schemeClr val="accent1"/>
-          </a:effectRef>
-          <a:fontRef idx="minor">
-            <a:schemeClr val="lt1"/>
-          </a:fontRef>
-        </p:style>
-        <p:txBody>
-          <a:bodyPr rtlCol="0" anchor="ctr"/>
-          <a:lstStyle/>
-          <a:p>
-            <a:pPr algn="ctr"/>
-          </a:p>
-        </p:txBody>
-      </p:sp>
-      <p:sp>
-        <p:nvSpPr>
-          <p:cNvPr id="3" name="Rectangle 2"/>
-          <p:cNvSpPr/>
-          <p:nvPr/>
-        </p:nvSpPr>
-        <p:spPr>
-          <a:xfrm>
-            <a:off x="0" y="960120"/>
-            <a:ext cx="12191695" cy="41148"/>
-          </a:xfrm>
-          <a:prstGeom prst="rect">
-            <a:avLst/>
-          </a:prstGeom>
-          <a:solidFill>
-            <a:srgbClr val="FFD000"/>
-          </a:solidFill>
-          <a:ln>
-            <a:noFill/>
-          </a:ln>
-        </p:spPr>
-        <p:style>
-          <a:lnRef idx="1">
-            <a:schemeClr val="accent1"/>
-          </a:lnRef>
-          <a:fillRef idx="3">
-            <a:schemeClr val="accent1"/>
-          </a:fillRef>
-          <a:effectRef idx="2">
-            <a:schemeClr val="accent1"/>
-          </a:effectRef>
-          <a:fontRef idx="minor">
-            <a:schemeClr val="lt1"/>
-          </a:fontRef>
-        </p:style>
-        <p:txBody>
-          <a:bodyPr rtlCol="0" anchor="ctr"/>
-          <a:lstStyle/>
-          <a:p>
-            <a:pPr algn="ctr"/>
-          </a:p>
-        </p:txBody>
-      </p:sp>
-      <p:sp>
-        <p:nvSpPr>
-          <p:cNvPr id="4" name="TextBox 3"/>
-          <p:cNvSpPr txBox="1"/>
-          <p:nvPr/>
-        </p:nvSpPr>
-        <p:spPr>
-          <a:xfrm>
-            <a:off x="457200" y="164592"/>
-            <a:ext cx="11277295" cy="502920"/>
-          </a:xfrm>
-          <a:prstGeom prst="rect">
-            <a:avLst/>
-          </a:prstGeom>
-          <a:noFill/>
-        </p:spPr>
-        <p:txBody>
-          <a:bodyPr wrap="square">
-            <a:spAutoFit/>
-          </a:bodyPr>
-          <a:lstStyle/>
-          <a:p>
-            <a:r>
-              <a:rPr sz="2600" b="1" i="0">
-                <a:solidFill>
-                  <a:srgbClr val="FFFFFF"/>
-                </a:solidFill>
-                <a:latin typeface="Calibri"/>
-              </a:rPr>
-              <a:t>Sustentacion del PI — pistas (checklist vacio)</a:t>
-            </a:r>
-          </a:p>
-        </p:txBody>
-      </p:sp>
-      <p:sp>
-        <p:nvSpPr>
-          <p:cNvPr id="5" name="Rounded Rectangle 4"/>
-          <p:cNvSpPr/>
-          <p:nvPr/>
-        </p:nvSpPr>
-        <p:spPr>
-          <a:xfrm>
-            <a:off x="457200" y="1261872"/>
-            <a:ext cx="11277295" cy="566928"/>
-          </a:xfrm>
-          <a:prstGeom prst="roundRect">
-            <a:avLst>
-              <a:gd name="adj" fmla="val 12000"/>
-            </a:avLst>
-          </a:prstGeom>
-          <a:solidFill>
-            <a:srgbClr val="F2F2F2"/>
-          </a:solidFill>
-          <a:ln>
-            <a:noFill/>
-          </a:ln>
-        </p:spPr>
-        <p:style>
-          <a:lnRef idx="1">
-            <a:schemeClr val="accent1"/>
-          </a:lnRef>
-          <a:fillRef idx="3">
-            <a:schemeClr val="accent1"/>
-          </a:fillRef>
-          <a:effectRef idx="2">
-            <a:schemeClr val="accent1"/>
-          </a:effectRef>
-          <a:fontRef idx="minor">
-            <a:schemeClr val="lt1"/>
-          </a:fontRef>
-        </p:style>
-        <p:txBody>
-          <a:bodyPr rtlCol="0" anchor="ctr"/>
-          <a:lstStyle/>
-          <a:p>
-            <a:pPr algn="ctr"/>
-          </a:p>
-        </p:txBody>
-      </p:sp>
-      <p:sp>
-        <p:nvSpPr>
-          <p:cNvPr id="6" name="Rectangle 5"/>
-          <p:cNvSpPr/>
-          <p:nvPr/>
-        </p:nvSpPr>
-        <p:spPr>
-          <a:xfrm>
-            <a:off x="640080" y="1408175"/>
-            <a:ext cx="274320" cy="274320"/>
-          </a:xfrm>
-          <a:prstGeom prst="rect">
-            <a:avLst/>
-          </a:prstGeom>
-          <a:solidFill>
-            <a:srgbClr val="FFFFFF"/>
-          </a:solidFill>
-          <a:ln>
-            <a:solidFill>
-              <a:srgbClr val="333333"/>
-            </a:solidFill>
-          </a:ln>
-        </p:spPr>
-        <p:style>
-          <a:lnRef idx="1">
-            <a:schemeClr val="accent1"/>
-          </a:lnRef>
-          <a:fillRef idx="3">
-            <a:schemeClr val="accent1"/>
-          </a:fillRef>
-          <a:effectRef idx="2">
-            <a:schemeClr val="accent1"/>
-          </a:effectRef>
-          <a:fontRef idx="minor">
-            <a:schemeClr val="lt1"/>
-          </a:fontRef>
-        </p:style>
-        <p:txBody>
-          <a:bodyPr rtlCol="0" anchor="ctr"/>
-          <a:lstStyle/>
-          <a:p>
-            <a:pPr algn="ctr"/>
-          </a:p>
-        </p:txBody>
-      </p:sp>
-      <p:sp>
-        <p:nvSpPr>
-          <p:cNvPr id="7" name="Rectangle 6"/>
-          <p:cNvSpPr/>
-          <p:nvPr/>
-        </p:nvSpPr>
-        <p:spPr>
-          <a:xfrm>
-            <a:off x="640080" y="1408175"/>
-            <a:ext cx="73152" cy="274320"/>
-          </a:xfrm>
-          <a:prstGeom prst="rect">
-            <a:avLst/>
-          </a:prstGeom>
-          <a:solidFill>
-            <a:srgbClr val="269CCB"/>
-          </a:solidFill>
-          <a:ln>
-            <a:noFill/>
-          </a:ln>
-        </p:spPr>
-        <p:style>
-          <a:lnRef idx="1">
-            <a:schemeClr val="accent1"/>
-          </a:lnRef>
-          <a:fillRef idx="3">
-            <a:schemeClr val="accent1"/>
-          </a:fillRef>
-          <a:effectRef idx="2">
-            <a:schemeClr val="accent1"/>
-          </a:effectRef>
-          <a:fontRef idx="minor">
-            <a:schemeClr val="lt1"/>
-          </a:fontRef>
-        </p:style>
-        <p:txBody>
-          <a:bodyPr rtlCol="0" anchor="ctr"/>
-          <a:lstStyle/>
-          <a:p>
-            <a:pPr algn="ctr"/>
-          </a:p>
-        </p:txBody>
-      </p:sp>
-      <p:sp>
-        <p:nvSpPr>
-          <p:cNvPr id="8" name="TextBox 7"/>
-          <p:cNvSpPr txBox="1"/>
-          <p:nvPr/>
-        </p:nvSpPr>
-        <p:spPr>
-          <a:xfrm>
-            <a:off x="1097280" y="1353312"/>
-            <a:ext cx="10362895" cy="402336"/>
-          </a:xfrm>
-          <a:prstGeom prst="rect">
-            <a:avLst/>
-          </a:prstGeom>
-          <a:noFill/>
-        </p:spPr>
-        <p:txBody>
-          <a:bodyPr wrap="square" anchor="ctr"/>
-          <a:lstStyle/>
-          <a:p>
-            <a:r>
-              <a:rPr sz="1500" b="0" i="0">
-                <a:solidFill>
-                  <a:srgbClr val="333333"/>
-                </a:solidFill>
-                <a:latin typeface="Calibri"/>
-              </a:rPr>
-              <a:t>□ Falta evidencia?</a:t>
-            </a:r>
-          </a:p>
-        </p:txBody>
-      </p:sp>
-      <p:sp>
-        <p:nvSpPr>
-          <p:cNvPr id="9" name="Rounded Rectangle 8"/>
-          <p:cNvSpPr/>
-          <p:nvPr/>
-        </p:nvSpPr>
-        <p:spPr>
-          <a:xfrm>
-            <a:off x="457200" y="1938528"/>
-            <a:ext cx="11277295" cy="566928"/>
-          </a:xfrm>
-          <a:prstGeom prst="roundRect">
-            <a:avLst>
-              <a:gd name="adj" fmla="val 12000"/>
-            </a:avLst>
-          </a:prstGeom>
-          <a:solidFill>
-            <a:srgbClr val="F2F2F2"/>
-          </a:solidFill>
-          <a:ln>
-            <a:noFill/>
-          </a:ln>
-        </p:spPr>
-        <p:style>
-          <a:lnRef idx="1">
-            <a:schemeClr val="accent1"/>
-          </a:lnRef>
-          <a:fillRef idx="3">
-            <a:schemeClr val="accent1"/>
-          </a:fillRef>
-          <a:effectRef idx="2">
-            <a:schemeClr val="accent1"/>
-          </a:effectRef>
-          <a:fontRef idx="minor">
-            <a:schemeClr val="lt1"/>
-          </a:fontRef>
-        </p:style>
-        <p:txBody>
-          <a:bodyPr rtlCol="0" anchor="ctr"/>
-          <a:lstStyle/>
-          <a:p>
-            <a:pPr algn="ctr"/>
-          </a:p>
-        </p:txBody>
-      </p:sp>
-      <p:sp>
-        <p:nvSpPr>
-          <p:cNvPr id="10" name="Rectangle 9"/>
-          <p:cNvSpPr/>
-          <p:nvPr/>
-        </p:nvSpPr>
-        <p:spPr>
-          <a:xfrm>
-            <a:off x="640080" y="2084832"/>
-            <a:ext cx="274320" cy="274320"/>
-          </a:xfrm>
-          <a:prstGeom prst="rect">
-            <a:avLst/>
-          </a:prstGeom>
-          <a:solidFill>
-            <a:srgbClr val="FFFFFF"/>
-          </a:solidFill>
-          <a:ln>
-            <a:solidFill>
-              <a:srgbClr val="333333"/>
-            </a:solidFill>
-          </a:ln>
-        </p:spPr>
-        <p:style>
-          <a:lnRef idx="1">
-            <a:schemeClr val="accent1"/>
-          </a:lnRef>
-          <a:fillRef idx="3">
-            <a:schemeClr val="accent1"/>
-          </a:fillRef>
-          <a:effectRef idx="2">
-            <a:schemeClr val="accent1"/>
-          </a:effectRef>
-          <a:fontRef idx="minor">
-            <a:schemeClr val="lt1"/>
-          </a:fontRef>
-        </p:style>
-        <p:txBody>
-          <a:bodyPr rtlCol="0" anchor="ctr"/>
-          <a:lstStyle/>
-          <a:p>
-            <a:pPr algn="ctr"/>
-          </a:p>
-        </p:txBody>
-      </p:sp>
-      <p:sp>
-        <p:nvSpPr>
-          <p:cNvPr id="11" name="Rectangle 10"/>
-          <p:cNvSpPr/>
-          <p:nvPr/>
-        </p:nvSpPr>
-        <p:spPr>
-          <a:xfrm>
-            <a:off x="640080" y="2084832"/>
-            <a:ext cx="73152" cy="274320"/>
-          </a:xfrm>
-          <a:prstGeom prst="rect">
-            <a:avLst/>
-          </a:prstGeom>
-          <a:solidFill>
-            <a:srgbClr val="269CCB"/>
-          </a:solidFill>
-          <a:ln>
-            <a:noFill/>
-          </a:ln>
-        </p:spPr>
-        <p:style>
-          <a:lnRef idx="1">
-            <a:schemeClr val="accent1"/>
-          </a:lnRef>
-          <a:fillRef idx="3">
-            <a:schemeClr val="accent1"/>
-          </a:fillRef>
-          <a:effectRef idx="2">
-            <a:schemeClr val="accent1"/>
-          </a:effectRef>
-          <a:fontRef idx="minor">
-            <a:schemeClr val="lt1"/>
-          </a:fontRef>
-        </p:style>
-        <p:txBody>
-          <a:bodyPr rtlCol="0" anchor="ctr"/>
-          <a:lstStyle/>
-          <a:p>
-            <a:pPr algn="ctr"/>
-          </a:p>
-        </p:txBody>
-      </p:sp>
-      <p:sp>
-        <p:nvSpPr>
-          <p:cNvPr id="12" name="TextBox 11"/>
-          <p:cNvSpPr txBox="1"/>
-          <p:nvPr/>
-        </p:nvSpPr>
-        <p:spPr>
-          <a:xfrm>
-            <a:off x="1097280" y="2029968"/>
-            <a:ext cx="10362895" cy="402336"/>
-          </a:xfrm>
-          <a:prstGeom prst="rect">
-            <a:avLst/>
-          </a:prstGeom>
-          <a:noFill/>
-        </p:spPr>
-        <p:txBody>
-          <a:bodyPr wrap="square" anchor="ctr"/>
-          <a:lstStyle/>
-          <a:p>
-            <a:r>
-              <a:rPr sz="1500" b="0" i="0">
-                <a:solidFill>
-                  <a:srgbClr val="333333"/>
-                </a:solidFill>
-                <a:latin typeface="Calibri"/>
-              </a:rPr>
-              <a:t>□ Cubre todos los bloques (y todos hablan, si hay equipo)?</a:t>
-            </a:r>
-          </a:p>
-        </p:txBody>
-      </p:sp>
-      <p:sp>
-        <p:nvSpPr>
-          <p:cNvPr id="13" name="Rounded Rectangle 12"/>
-          <p:cNvSpPr/>
-          <p:nvPr/>
-        </p:nvSpPr>
-        <p:spPr>
-          <a:xfrm>
-            <a:off x="457200" y="2615184"/>
-            <a:ext cx="11277295" cy="566928"/>
-          </a:xfrm>
-          <a:prstGeom prst="roundRect">
-            <a:avLst>
-              <a:gd name="adj" fmla="val 12000"/>
-            </a:avLst>
-          </a:prstGeom>
-          <a:solidFill>
-            <a:srgbClr val="F2F2F2"/>
-          </a:solidFill>
-          <a:ln>
-            <a:noFill/>
-          </a:ln>
-        </p:spPr>
-        <p:style>
-          <a:lnRef idx="1">
-            <a:schemeClr val="accent1"/>
-          </a:lnRef>
-          <a:fillRef idx="3">
-            <a:schemeClr val="accent1"/>
-          </a:fillRef>
-          <a:effectRef idx="2">
-            <a:schemeClr val="accent1"/>
-          </a:effectRef>
-          <a:fontRef idx="minor">
-            <a:schemeClr val="lt1"/>
-          </a:fontRef>
-        </p:style>
-        <p:txBody>
-          <a:bodyPr rtlCol="0" anchor="ctr"/>
-          <a:lstStyle/>
-          <a:p>
-            <a:pPr algn="ctr"/>
-          </a:p>
-        </p:txBody>
-      </p:sp>
-      <p:sp>
-        <p:nvSpPr>
-          <p:cNvPr id="14" name="Rectangle 13"/>
-          <p:cNvSpPr/>
-          <p:nvPr/>
-        </p:nvSpPr>
-        <p:spPr>
-          <a:xfrm>
-            <a:off x="640080" y="2761488"/>
-            <a:ext cx="274320" cy="274320"/>
-          </a:xfrm>
-          <a:prstGeom prst="rect">
-            <a:avLst/>
-          </a:prstGeom>
-          <a:solidFill>
-            <a:srgbClr val="FFFFFF"/>
-          </a:solidFill>
-          <a:ln>
-            <a:solidFill>
-              <a:srgbClr val="333333"/>
-            </a:solidFill>
-          </a:ln>
-        </p:spPr>
-        <p:style>
-          <a:lnRef idx="1">
-            <a:schemeClr val="accent1"/>
-          </a:lnRef>
-          <a:fillRef idx="3">
-            <a:schemeClr val="accent1"/>
-          </a:fillRef>
-          <a:effectRef idx="2">
-            <a:schemeClr val="accent1"/>
-          </a:effectRef>
-          <a:fontRef idx="minor">
-            <a:schemeClr val="lt1"/>
-          </a:fontRef>
-        </p:style>
-        <p:txBody>
-          <a:bodyPr rtlCol="0" anchor="ctr"/>
-          <a:lstStyle/>
-          <a:p>
-            <a:pPr algn="ctr"/>
-          </a:p>
-        </p:txBody>
-      </p:sp>
-      <p:sp>
-        <p:nvSpPr>
-          <p:cNvPr id="15" name="Rectangle 14"/>
-          <p:cNvSpPr/>
-          <p:nvPr/>
-        </p:nvSpPr>
-        <p:spPr>
-          <a:xfrm>
-            <a:off x="640080" y="2761488"/>
-            <a:ext cx="73152" cy="274320"/>
-          </a:xfrm>
-          <a:prstGeom prst="rect">
-            <a:avLst/>
-          </a:prstGeom>
-          <a:solidFill>
-            <a:srgbClr val="269CCB"/>
-          </a:solidFill>
-          <a:ln>
-            <a:noFill/>
-          </a:ln>
-        </p:spPr>
-        <p:style>
-          <a:lnRef idx="1">
-            <a:schemeClr val="accent1"/>
-          </a:lnRef>
-          <a:fillRef idx="3">
-            <a:schemeClr val="accent1"/>
-          </a:fillRef>
-          <a:effectRef idx="2">
-            <a:schemeClr val="accent1"/>
-          </a:effectRef>
-          <a:fontRef idx="minor">
-            <a:schemeClr val="lt1"/>
-          </a:fontRef>
-        </p:style>
-        <p:txBody>
-          <a:bodyPr rtlCol="0" anchor="ctr"/>
-          <a:lstStyle/>
-          <a:p>
-            <a:pPr algn="ctr"/>
-          </a:p>
-        </p:txBody>
-      </p:sp>
-      <p:sp>
-        <p:nvSpPr>
-          <p:cNvPr id="16" name="TextBox 15"/>
-          <p:cNvSpPr txBox="1"/>
-          <p:nvPr/>
-        </p:nvSpPr>
-        <p:spPr>
-          <a:xfrm>
-            <a:off x="1097280" y="2706624"/>
-            <a:ext cx="10362895" cy="402336"/>
-          </a:xfrm>
-          <a:prstGeom prst="rect">
-            <a:avLst/>
-          </a:prstGeom>
-          <a:noFill/>
-        </p:spPr>
-        <p:txBody>
-          <a:bodyPr wrap="square" anchor="ctr"/>
-          <a:lstStyle/>
-          <a:p>
-            <a:r>
-              <a:rPr sz="1500" b="0" i="0">
-                <a:solidFill>
-                  <a:srgbClr val="333333"/>
-                </a:solidFill>
-                <a:latin typeface="Calibri"/>
-              </a:rPr>
-              <a:t>□ PI != P3?</a:t>
-            </a:r>
-          </a:p>
-        </p:txBody>
-      </p:sp>
-      <p:sp>
-        <p:nvSpPr>
-          <p:cNvPr id="17" name="TextBox 16"/>
-          <p:cNvSpPr txBox="1"/>
-          <p:nvPr/>
-        </p:nvSpPr>
-        <p:spPr>
-          <a:xfrm>
-            <a:off x="11185855" y="6473952"/>
-            <a:ext cx="640080" cy="274320"/>
-          </a:xfrm>
-          <a:prstGeom prst="rect">
-            <a:avLst/>
-          </a:prstGeom>
-          <a:noFill/>
-        </p:spPr>
-        <p:txBody>
-          <a:bodyPr wrap="square">
-            <a:spAutoFit/>
-          </a:bodyPr>
-          <a:lstStyle/>
-          <a:p>
-            <a:pPr algn="r"/>
-            <a:r>
-              <a:rPr sz="1100" b="0" i="0">
-                <a:solidFill>
-                  <a:srgbClr val="666666"/>
-                </a:solidFill>
-                <a:latin typeface="Calibri"/>
-              </a:rPr>
-              <a:t>27</a:t>
-            </a:r>
-          </a:p>
-        </p:txBody>
-      </p:sp>
-    </p:spTree>
-  </p:cSld>
-  <p:clrMapOvr>
-    <a:masterClrMapping/>
-  </p:clrMapOvr>
-</p:sld>
-</file>
-
-<file path=ppt/slides/slide28.xml><?xml version="1.0" encoding="utf-8"?>
-<p:sld xmlns:a="http://schemas.openxmlformats.org/drawingml/2006/main" xmlns:p="http://schemas.openxmlformats.org/presentationml/2006/main" xmlns:r="http://schemas.openxmlformats.org/officeDocument/2006/relationships">
-  <p:cSld>
-    <p:bg>
-      <p:bgPr>
-        <a:solidFill>
-          <a:srgbClr val="FFFFFF"/>
-        </a:solidFill>
-        <a:effectLst/>
-      </p:bgPr>
-    </p:bg>
-    <p:spTree>
-      <p:nvGrpSpPr>
-        <p:cNvPr id="1" name=""/>
-        <p:cNvGrpSpPr/>
-        <p:nvPr/>
-      </p:nvGrpSpPr>
-      <p:grpSpPr/>
-      <p:sp>
-        <p:nvSpPr>
-          <p:cNvPr id="2" name="Rectangle 1"/>
-          <p:cNvSpPr/>
-          <p:nvPr/>
-        </p:nvSpPr>
-        <p:spPr>
-          <a:xfrm>
-            <a:off x="0" y="0"/>
-            <a:ext cx="12191695" cy="960120"/>
-          </a:xfrm>
-          <a:prstGeom prst="rect">
-            <a:avLst/>
-          </a:prstGeom>
-          <a:solidFill>
-            <a:srgbClr val="095292"/>
-          </a:solidFill>
-          <a:ln>
-            <a:noFill/>
-          </a:ln>
-        </p:spPr>
-        <p:style>
-          <a:lnRef idx="1">
-            <a:schemeClr val="accent1"/>
-          </a:lnRef>
-          <a:fillRef idx="3">
-            <a:schemeClr val="accent1"/>
-          </a:fillRef>
-          <a:effectRef idx="2">
-            <a:schemeClr val="accent1"/>
-          </a:effectRef>
-          <a:fontRef idx="minor">
-            <a:schemeClr val="lt1"/>
-          </a:fontRef>
-        </p:style>
-        <p:txBody>
-          <a:bodyPr rtlCol="0" anchor="ctr"/>
-          <a:lstStyle/>
-          <a:p>
-            <a:pPr algn="ctr"/>
-          </a:p>
-        </p:txBody>
-      </p:sp>
-      <p:sp>
-        <p:nvSpPr>
-          <p:cNvPr id="3" name="Rectangle 2"/>
-          <p:cNvSpPr/>
-          <p:nvPr/>
-        </p:nvSpPr>
-        <p:spPr>
-          <a:xfrm>
-            <a:off x="0" y="960120"/>
-            <a:ext cx="12191695" cy="41148"/>
-          </a:xfrm>
-          <a:prstGeom prst="rect">
-            <a:avLst/>
-          </a:prstGeom>
-          <a:solidFill>
-            <a:srgbClr val="FFD000"/>
-          </a:solidFill>
-          <a:ln>
-            <a:noFill/>
-          </a:ln>
-        </p:spPr>
-        <p:style>
-          <a:lnRef idx="1">
-            <a:schemeClr val="accent1"/>
-          </a:lnRef>
-          <a:fillRef idx="3">
-            <a:schemeClr val="accent1"/>
-          </a:fillRef>
-          <a:effectRef idx="2">
-            <a:schemeClr val="accent1"/>
-          </a:effectRef>
-          <a:fontRef idx="minor">
-            <a:schemeClr val="lt1"/>
-          </a:fontRef>
-        </p:style>
-        <p:txBody>
-          <a:bodyPr rtlCol="0" anchor="ctr"/>
-          <a:lstStyle/>
-          <a:p>
-            <a:pPr algn="ctr"/>
-          </a:p>
-        </p:txBody>
-      </p:sp>
-      <p:sp>
-        <p:nvSpPr>
-          <p:cNvPr id="4" name="TextBox 3"/>
-          <p:cNvSpPr txBox="1"/>
-          <p:nvPr/>
-        </p:nvSpPr>
-        <p:spPr>
-          <a:xfrm>
-            <a:off x="457200" y="164592"/>
-            <a:ext cx="11277295" cy="502920"/>
-          </a:xfrm>
-          <a:prstGeom prst="rect">
-            <a:avLst/>
-          </a:prstGeom>
-          <a:noFill/>
-        </p:spPr>
-        <p:txBody>
-          <a:bodyPr wrap="square">
-            <a:spAutoFit/>
-          </a:bodyPr>
-          <a:lstStyle/>
-          <a:p>
-            <a:r>
-              <a:rPr sz="2600" b="1" i="0">
-                <a:solidFill>
-                  <a:srgbClr val="FFFFFF"/>
-                </a:solidFill>
-                <a:latin typeface="Calibri"/>
-              </a:rPr>
-              <a:t>Criterios de exito / entregable</a:t>
-            </a:r>
-          </a:p>
-        </p:txBody>
-      </p:sp>
-      <p:sp>
-        <p:nvSpPr>
-          <p:cNvPr id="5" name="TextBox 4"/>
-          <p:cNvSpPr txBox="1"/>
-          <p:nvPr/>
-        </p:nvSpPr>
-        <p:spPr>
-          <a:xfrm>
-            <a:off x="457200" y="1170432"/>
-            <a:ext cx="11277295" cy="5230368"/>
-          </a:xfrm>
-          <a:prstGeom prst="rect">
-            <a:avLst/>
-          </a:prstGeom>
-          <a:noFill/>
-        </p:spPr>
-        <p:txBody>
-          <a:bodyPr wrap="square">
-            <a:spAutoFit/>
-          </a:bodyPr>
-          <a:lstStyle/>
-          <a:p>
-            <a:pPr>
-              <a:spcAft>
-                <a:spcPts val="800"/>
-              </a:spcAft>
-            </a:pPr>
-            <a:r>
-              <a:rPr sz="2000" b="0" i="0">
-                <a:solidFill>
-                  <a:srgbClr val="333333"/>
-                </a:solidFill>
-                <a:latin typeface="Calibri"/>
-              </a:rPr>
-              <a:t>–   </a:t>
-            </a:r>
-            <a:r>
-              <a:rPr sz="2000" b="1" i="0">
-                <a:solidFill>
-                  <a:srgbClr val="333333"/>
-                </a:solidFill>
-                <a:latin typeface="Calibri"/>
-              </a:rPr>
-              <a:t>Entregable:</a:t>
-            </a:r>
-            <a:r>
-              <a:rPr sz="2000" b="0" i="0">
-                <a:solidFill>
-                  <a:srgbClr val="333333"/>
-                </a:solidFill>
-                <a:latin typeface="Calibri"/>
-              </a:rPr>
-              <a:t> ZIP/PDF final subido antes del turno + sustentacion en vivo 5-8 min + Q&amp;A</a:t>
-            </a:r>
-          </a:p>
-          <a:p>
-            <a:pPr>
-              <a:spcAft>
-                <a:spcPts val="800"/>
-              </a:spcAft>
-            </a:pPr>
-            <a:r>
-              <a:rPr sz="2000" b="0" i="0">
-                <a:solidFill>
-                  <a:srgbClr val="333333"/>
-                </a:solidFill>
-                <a:latin typeface="Calibri"/>
-              </a:rPr>
-              <a:t>–   Evidencia ejecutable en pantalla durante tu turno (no solo capturas).</a:t>
-            </a:r>
-          </a:p>
-          <a:p>
-            <a:pPr>
-              <a:spcAft>
-                <a:spcPts val="800"/>
-              </a:spcAft>
-            </a:pPr>
-            <a:r>
-              <a:rPr sz="2000" b="0" i="0">
-                <a:solidFill>
-                  <a:srgbClr val="333333"/>
-                </a:solidFill>
-                <a:latin typeface="Calibri"/>
-              </a:rPr>
-              <a:t>–   Puedes explicar </a:t>
-            </a:r>
-            <a:r>
-              <a:rPr sz="2000" b="1" i="0">
-                <a:solidFill>
-                  <a:srgbClr val="333333"/>
-                </a:solidFill>
-                <a:latin typeface="Calibri"/>
-              </a:rPr>
-              <a:t>cualquier</a:t>
-            </a:r>
-            <a:r>
-              <a:rPr sz="2000" b="0" i="0">
-                <a:solidFill>
-                  <a:srgbClr val="333333"/>
-                </a:solidFill>
-                <a:latin typeface="Calibri"/>
-              </a:rPr>
-              <a:t> parte de tu modelo en 60 segundos.</a:t>
-            </a:r>
-          </a:p>
-          <a:p>
-            <a:pPr>
-              <a:spcAft>
-                <a:spcPts val="800"/>
-              </a:spcAft>
-            </a:pPr>
-            <a:r>
-              <a:rPr sz="2000" b="0" i="0">
-                <a:solidFill>
-                  <a:srgbClr val="333333"/>
-                </a:solidFill>
-                <a:latin typeface="Calibri"/>
-              </a:rPr>
-              <a:t>–   </a:t>
-            </a:r>
-            <a:r>
-              <a:rPr sz="2000" b="1" i="0">
-                <a:solidFill>
-                  <a:srgbClr val="333333"/>
-                </a:solidFill>
-                <a:latin typeface="Calibri"/>
-              </a:rPr>
-              <a:t>Entrega en la plataforma del curso</a:t>
-            </a:r>
-            <a:r>
-              <a:rPr sz="2000" b="0" i="0">
-                <a:solidFill>
-                  <a:srgbClr val="333333"/>
-                </a:solidFill>
-                <a:latin typeface="Calibri"/>
-              </a:rPr>
-              <a:t> — </a:t>
-            </a:r>
-            <a:r>
-              <a:rPr sz="2000" b="1" i="0">
-                <a:solidFill>
-                  <a:srgbClr val="333333"/>
-                </a:solidFill>
-                <a:latin typeface="Calibri"/>
-              </a:rPr>
-              <a:t>antes</a:t>
-            </a:r>
-            <a:r>
-              <a:rPr sz="2000" b="0" i="0">
-                <a:solidFill>
-                  <a:srgbClr val="333333"/>
-                </a:solidFill>
-                <a:latin typeface="Calibri"/>
-              </a:rPr>
-              <a:t> de tu turno.</a:t>
-            </a:r>
-          </a:p>
-        </p:txBody>
-      </p:sp>
-      <p:sp>
-        <p:nvSpPr>
-          <p:cNvPr id="6" name="TextBox 5"/>
-          <p:cNvSpPr txBox="1"/>
-          <p:nvPr/>
-        </p:nvSpPr>
-        <p:spPr>
-          <a:xfrm>
-            <a:off x="11185855" y="6473952"/>
-            <a:ext cx="640080" cy="274320"/>
-          </a:xfrm>
-          <a:prstGeom prst="rect">
-            <a:avLst/>
-          </a:prstGeom>
-          <a:noFill/>
-        </p:spPr>
-        <p:txBody>
-          <a:bodyPr wrap="square">
-            <a:spAutoFit/>
-          </a:bodyPr>
-          <a:lstStyle/>
-          <a:p>
-            <a:pPr algn="r"/>
-            <a:r>
-              <a:rPr sz="1100" b="0" i="0">
-                <a:solidFill>
-                  <a:srgbClr val="666666"/>
-                </a:solidFill>
-                <a:latin typeface="Calibri"/>
-              </a:rPr>
-              <a:t>28</a:t>
-            </a:r>
-          </a:p>
-        </p:txBody>
-      </p:sp>
-    </p:spTree>
-  </p:cSld>
-  <p:clrMapOvr>
-    <a:masterClrMapping/>
-  </p:clrMapOvr>
-</p:sld>
-</file>
-
-<file path=ppt/slides/slide29.xml><?xml version="1.0" encoding="utf-8"?>
-<p:sld xmlns:a="http://schemas.openxmlformats.org/drawingml/2006/main" xmlns:p="http://schemas.openxmlformats.org/presentationml/2006/main" xmlns:r="http://schemas.openxmlformats.org/officeDocument/2006/relationships">
-  <p:cSld>
-    <p:bg>
-      <p:bgPr>
-        <a:solidFill>
-          <a:srgbClr val="FFFFFF"/>
-        </a:solidFill>
-        <a:effectLst/>
-      </p:bgPr>
-    </p:bg>
-    <p:spTree>
-      <p:nvGrpSpPr>
-        <p:cNvPr id="1" name=""/>
-        <p:cNvGrpSpPr/>
-        <p:nvPr/>
-      </p:nvGrpSpPr>
-      <p:grpSpPr/>
-      <p:sp>
-        <p:nvSpPr>
-          <p:cNvPr id="2" name="Rectangle 1"/>
-          <p:cNvSpPr/>
-          <p:nvPr/>
-        </p:nvSpPr>
-        <p:spPr>
-          <a:xfrm>
-            <a:off x="0" y="0"/>
-            <a:ext cx="12191695" cy="960120"/>
-          </a:xfrm>
-          <a:prstGeom prst="rect">
-            <a:avLst/>
-          </a:prstGeom>
-          <a:solidFill>
-            <a:srgbClr val="095292"/>
-          </a:solidFill>
-          <a:ln>
-            <a:noFill/>
-          </a:ln>
-        </p:spPr>
-        <p:style>
-          <a:lnRef idx="1">
-            <a:schemeClr val="accent1"/>
-          </a:lnRef>
-          <a:fillRef idx="3">
-            <a:schemeClr val="accent1"/>
-          </a:fillRef>
-          <a:effectRef idx="2">
-            <a:schemeClr val="accent1"/>
-          </a:effectRef>
-          <a:fontRef idx="minor">
-            <a:schemeClr val="lt1"/>
-          </a:fontRef>
-        </p:style>
-        <p:txBody>
-          <a:bodyPr rtlCol="0" anchor="ctr"/>
-          <a:lstStyle/>
-          <a:p>
-            <a:pPr algn="ctr"/>
-          </a:p>
-        </p:txBody>
-      </p:sp>
-      <p:sp>
-        <p:nvSpPr>
-          <p:cNvPr id="3" name="Rectangle 2"/>
-          <p:cNvSpPr/>
-          <p:nvPr/>
-        </p:nvSpPr>
-        <p:spPr>
-          <a:xfrm>
-            <a:off x="0" y="960120"/>
-            <a:ext cx="12191695" cy="41148"/>
-          </a:xfrm>
-          <a:prstGeom prst="rect">
-            <a:avLst/>
-          </a:prstGeom>
-          <a:solidFill>
-            <a:srgbClr val="FFD000"/>
-          </a:solidFill>
-          <a:ln>
-            <a:noFill/>
-          </a:ln>
-        </p:spPr>
-        <p:style>
-          <a:lnRef idx="1">
-            <a:schemeClr val="accent1"/>
-          </a:lnRef>
-          <a:fillRef idx="3">
-            <a:schemeClr val="accent1"/>
-          </a:fillRef>
-          <a:effectRef idx="2">
-            <a:schemeClr val="accent1"/>
-          </a:effectRef>
-          <a:fontRef idx="minor">
-            <a:schemeClr val="lt1"/>
-          </a:fontRef>
-        </p:style>
-        <p:txBody>
-          <a:bodyPr rtlCol="0" anchor="ctr"/>
-          <a:lstStyle/>
-          <a:p>
-            <a:pPr algn="ctr"/>
-          </a:p>
-        </p:txBody>
-      </p:sp>
-      <p:sp>
-        <p:nvSpPr>
-          <p:cNvPr id="4" name="TextBox 3"/>
-          <p:cNvSpPr txBox="1"/>
-          <p:nvPr/>
-        </p:nvSpPr>
-        <p:spPr>
-          <a:xfrm>
-            <a:off x="457200" y="164592"/>
-            <a:ext cx="11277295" cy="502920"/>
-          </a:xfrm>
-          <a:prstGeom prst="rect">
-            <a:avLst/>
-          </a:prstGeom>
-          <a:noFill/>
-        </p:spPr>
-        <p:txBody>
-          <a:bodyPr wrap="square">
-            <a:spAutoFit/>
-          </a:bodyPr>
-          <a:lstStyle/>
-          <a:p>
-            <a:r>
-              <a:rPr sz="2600" b="1" i="0">
-                <a:solidFill>
-                  <a:srgbClr val="FFFFFF"/>
-                </a:solidFill>
-                <a:latin typeface="Calibri"/>
-              </a:rPr>
-              <a:t>Cierre del PI</a:t>
-            </a:r>
-          </a:p>
-        </p:txBody>
-      </p:sp>
-      <p:sp>
-        <p:nvSpPr>
-          <p:cNvPr id="5" name="Rounded Rectangle 4"/>
-          <p:cNvSpPr/>
-          <p:nvPr/>
-        </p:nvSpPr>
-        <p:spPr>
-          <a:xfrm>
-            <a:off x="457200" y="1261872"/>
-            <a:ext cx="11277295" cy="1051560"/>
-          </a:xfrm>
-          <a:prstGeom prst="roundRect">
-            <a:avLst>
-              <a:gd name="adj" fmla="val 12000"/>
-            </a:avLst>
-          </a:prstGeom>
-          <a:solidFill>
-            <a:srgbClr val="E8F4FA"/>
-          </a:solidFill>
-          <a:ln>
-            <a:noFill/>
-          </a:ln>
-        </p:spPr>
-        <p:style>
-          <a:lnRef idx="1">
-            <a:schemeClr val="accent1"/>
-          </a:lnRef>
-          <a:fillRef idx="3">
-            <a:schemeClr val="accent1"/>
-          </a:fillRef>
-          <a:effectRef idx="2">
-            <a:schemeClr val="accent1"/>
-          </a:effectRef>
-          <a:fontRef idx="minor">
-            <a:schemeClr val="lt1"/>
-          </a:fontRef>
-        </p:style>
-        <p:txBody>
-          <a:bodyPr rtlCol="0" anchor="ctr"/>
-          <a:lstStyle/>
-          <a:p>
-            <a:pPr algn="ctr"/>
-          </a:p>
-        </p:txBody>
-      </p:sp>
-      <p:sp>
-        <p:nvSpPr>
-          <p:cNvPr id="6" name="Rectangle 5"/>
-          <p:cNvSpPr/>
-          <p:nvPr/>
-        </p:nvSpPr>
-        <p:spPr>
-          <a:xfrm>
-            <a:off x="457200" y="1261872"/>
-            <a:ext cx="128016" cy="1051560"/>
-          </a:xfrm>
-          <a:prstGeom prst="rect">
-            <a:avLst/>
-          </a:prstGeom>
-          <a:solidFill>
-            <a:srgbClr val="269CCB"/>
-          </a:solidFill>
-          <a:ln>
-            <a:noFill/>
-          </a:ln>
-        </p:spPr>
-        <p:style>
-          <a:lnRef idx="1">
-            <a:schemeClr val="accent1"/>
-          </a:lnRef>
-          <a:fillRef idx="3">
-            <a:schemeClr val="accent1"/>
-          </a:fillRef>
-          <a:effectRef idx="2">
-            <a:schemeClr val="accent1"/>
-          </a:effectRef>
-          <a:fontRef idx="minor">
-            <a:schemeClr val="lt1"/>
-          </a:fontRef>
-        </p:style>
-        <p:txBody>
-          <a:bodyPr rtlCol="0" anchor="ctr"/>
-          <a:lstStyle/>
-          <a:p>
-            <a:pPr algn="ctr"/>
-          </a:p>
-        </p:txBody>
-      </p:sp>
-      <p:sp>
-        <p:nvSpPr>
-          <p:cNvPr id="7" name="TextBox 6"/>
-          <p:cNvSpPr txBox="1"/>
-          <p:nvPr/>
-        </p:nvSpPr>
-        <p:spPr>
-          <a:xfrm>
-            <a:off x="777240" y="1399031"/>
-            <a:ext cx="10774375" cy="822959"/>
-          </a:xfrm>
-          <a:prstGeom prst="rect">
-            <a:avLst/>
-          </a:prstGeom>
-          <a:noFill/>
-        </p:spPr>
-        <p:txBody>
-          <a:bodyPr wrap="square">
-            <a:spAutoFit/>
-          </a:bodyPr>
-          <a:lstStyle/>
-          <a:p>
-            <a:r>
-              <a:rPr sz="1200" b="1" i="0">
-                <a:solidFill>
                   <a:srgbClr val="269CCB"/>
                 </a:solidFill>
                 <a:latin typeface="Calibri"/>
               </a:rPr>
-              <a:t>Info</a:t>
-            </a:r>
-          </a:p>
-          <a:p>
-            <a:pPr>
-              <a:spcBef>
-                <a:spcPts val="400"/>
-              </a:spcBef>
-            </a:pPr>
-            <a:r>
-              <a:rPr sz="1400" b="0" i="0">
-                <a:solidFill>
-                  <a:srgbClr val="333333"/>
-                </a:solidFill>
-                <a:latin typeface="Calibri"/>
-              </a:rPr>
-              <a:t>Hito: Sustentacion en vivo y entrega final del PI (20% Corte 3)</a:t>
-            </a:r>
-          </a:p>
-        </p:txBody>
-      </p:sp>
-      <p:sp>
-        <p:nvSpPr>
-          <p:cNvPr id="8" name="Rounded Rectangle 7"/>
-          <p:cNvSpPr/>
-          <p:nvPr/>
-        </p:nvSpPr>
-        <p:spPr>
-          <a:xfrm>
-            <a:off x="457200" y="2478024"/>
-            <a:ext cx="11277295" cy="1051560"/>
-          </a:xfrm>
-          <a:prstGeom prst="roundRect">
-            <a:avLst>
-              <a:gd name="adj" fmla="val 12000"/>
-            </a:avLst>
-          </a:prstGeom>
-          <a:solidFill>
-            <a:srgbClr val="FFF8E1"/>
-          </a:solidFill>
-          <a:ln>
-            <a:noFill/>
-          </a:ln>
-        </p:spPr>
-        <p:style>
-          <a:lnRef idx="1">
-            <a:schemeClr val="accent1"/>
-          </a:lnRef>
-          <a:fillRef idx="3">
-            <a:schemeClr val="accent1"/>
-          </a:fillRef>
-          <a:effectRef idx="2">
-            <a:schemeClr val="accent1"/>
-          </a:effectRef>
-          <a:fontRef idx="minor">
-            <a:schemeClr val="lt1"/>
-          </a:fontRef>
-        </p:style>
-        <p:txBody>
-          <a:bodyPr rtlCol="0" anchor="ctr"/>
-          <a:lstStyle/>
-          <a:p>
-            <a:pPr algn="ctr"/>
-          </a:p>
-        </p:txBody>
-      </p:sp>
-      <p:sp>
-        <p:nvSpPr>
-          <p:cNvPr id="9" name="Rectangle 8"/>
-          <p:cNvSpPr/>
-          <p:nvPr/>
-        </p:nvSpPr>
-        <p:spPr>
-          <a:xfrm>
-            <a:off x="457200" y="2478024"/>
-            <a:ext cx="128016" cy="1051560"/>
-          </a:xfrm>
-          <a:prstGeom prst="rect">
-            <a:avLst/>
-          </a:prstGeom>
-          <a:solidFill>
-            <a:srgbClr val="FFD000"/>
-          </a:solidFill>
-          <a:ln>
-            <a:noFill/>
-          </a:ln>
-        </p:spPr>
-        <p:style>
-          <a:lnRef idx="1">
-            <a:schemeClr val="accent1"/>
-          </a:lnRef>
-          <a:fillRef idx="3">
-            <a:schemeClr val="accent1"/>
-          </a:fillRef>
-          <a:effectRef idx="2">
-            <a:schemeClr val="accent1"/>
-          </a:effectRef>
-          <a:fontRef idx="minor">
-            <a:schemeClr val="lt1"/>
-          </a:fontRef>
-        </p:style>
-        <p:txBody>
-          <a:bodyPr rtlCol="0" anchor="ctr"/>
-          <a:lstStyle/>
-          <a:p>
-            <a:pPr algn="ctr"/>
-          </a:p>
-        </p:txBody>
-      </p:sp>
-      <p:sp>
-        <p:nvSpPr>
-          <p:cNvPr id="10" name="TextBox 9"/>
-          <p:cNvSpPr txBox="1"/>
-          <p:nvPr/>
-        </p:nvSpPr>
-        <p:spPr>
-          <a:xfrm>
-            <a:off x="777240" y="2615184"/>
-            <a:ext cx="10774375" cy="822959"/>
-          </a:xfrm>
-          <a:prstGeom prst="rect">
-            <a:avLst/>
-          </a:prstGeom>
-          <a:noFill/>
-        </p:spPr>
-        <p:txBody>
-          <a:bodyPr wrap="square">
-            <a:spAutoFit/>
-          </a:bodyPr>
-          <a:lstStyle/>
-          <a:p>
-            <a:r>
-              <a:rPr sz="1200" b="1" i="0">
-                <a:solidFill>
-                  <a:srgbClr val="FFD000"/>
-                </a:solidFill>
-                <a:latin typeface="Calibri"/>
-              </a:rPr>
-              <a:t>Aclaración</a:t>
-            </a:r>
-          </a:p>
-          <a:p>
-            <a:pPr>
-              <a:spcBef>
-                <a:spcPts val="400"/>
-              </a:spcBef>
-            </a:pPr>
-            <a:r>
-              <a:rPr sz="1400" b="0" i="0">
-                <a:solidFill>
-                  <a:srgbClr val="333333"/>
-                </a:solidFill>
-                <a:latin typeface="Calibri"/>
-              </a:rPr>
-              <a:t>Enunciado completo y rubrica: Clases/Proyecto Integrador/ (VetCare DB).</a:t>
-            </a:r>
-          </a:p>
-        </p:txBody>
-      </p:sp>
-      <p:sp>
-        <p:nvSpPr>
-          <p:cNvPr id="11" name="Rounded Rectangle 10"/>
-          <p:cNvSpPr/>
-          <p:nvPr/>
-        </p:nvSpPr>
-        <p:spPr>
-          <a:xfrm>
-            <a:off x="457200" y="3694176"/>
-            <a:ext cx="11277295" cy="1051560"/>
-          </a:xfrm>
-          <a:prstGeom prst="roundRect">
-            <a:avLst>
-              <a:gd name="adj" fmla="val 12000"/>
-            </a:avLst>
-          </a:prstGeom>
-          <a:solidFill>
-            <a:srgbClr val="FBE4E4"/>
-          </a:solidFill>
-          <a:ln>
-            <a:noFill/>
-          </a:ln>
-        </p:spPr>
-        <p:style>
-          <a:lnRef idx="1">
-            <a:schemeClr val="accent1"/>
-          </a:lnRef>
-          <a:fillRef idx="3">
-            <a:schemeClr val="accent1"/>
-          </a:fillRef>
-          <a:effectRef idx="2">
-            <a:schemeClr val="accent1"/>
-          </a:effectRef>
-          <a:fontRef idx="minor">
-            <a:schemeClr val="lt1"/>
-          </a:fontRef>
-        </p:style>
-        <p:txBody>
-          <a:bodyPr rtlCol="0" anchor="ctr"/>
-          <a:lstStyle/>
-          <a:p>
-            <a:pPr algn="ctr"/>
-          </a:p>
-        </p:txBody>
-      </p:sp>
-      <p:sp>
-        <p:nvSpPr>
-          <p:cNvPr id="12" name="Rectangle 11"/>
-          <p:cNvSpPr/>
-          <p:nvPr/>
-        </p:nvSpPr>
-        <p:spPr>
-          <a:xfrm>
-            <a:off x="457200" y="3694176"/>
-            <a:ext cx="128016" cy="1051560"/>
-          </a:xfrm>
-          <a:prstGeom prst="rect">
-            <a:avLst/>
-          </a:prstGeom>
-          <a:solidFill>
-            <a:srgbClr val="A02030"/>
-          </a:solidFill>
-          <a:ln>
-            <a:noFill/>
-          </a:ln>
-        </p:spPr>
-        <p:style>
-          <a:lnRef idx="1">
-            <a:schemeClr val="accent1"/>
-          </a:lnRef>
-          <a:fillRef idx="3">
-            <a:schemeClr val="accent1"/>
-          </a:fillRef>
-          <a:effectRef idx="2">
-            <a:schemeClr val="accent1"/>
-          </a:effectRef>
-          <a:fontRef idx="minor">
-            <a:schemeClr val="lt1"/>
-          </a:fontRef>
-        </p:style>
-        <p:txBody>
-          <a:bodyPr rtlCol="0" anchor="ctr"/>
-          <a:lstStyle/>
-          <a:p>
-            <a:pPr algn="ctr"/>
-          </a:p>
-        </p:txBody>
-      </p:sp>
-      <p:sp>
-        <p:nvSpPr>
-          <p:cNvPr id="13" name="TextBox 12"/>
-          <p:cNvSpPr txBox="1"/>
-          <p:nvPr/>
-        </p:nvSpPr>
-        <p:spPr>
-          <a:xfrm>
-            <a:off x="777240" y="3831336"/>
-            <a:ext cx="10774375" cy="822959"/>
-          </a:xfrm>
-          <a:prstGeom prst="rect">
-            <a:avLst/>
-          </a:prstGeom>
-          <a:noFill/>
-        </p:spPr>
-        <p:txBody>
-          <a:bodyPr wrap="square">
-            <a:spAutoFit/>
-          </a:bodyPr>
-          <a:lstStyle/>
-          <a:p>
-            <a:r>
-              <a:rPr sz="1200" b="1" i="0">
-                <a:solidFill>
-                  <a:srgbClr val="A02030"/>
-                </a:solidFill>
-                <a:latin typeface="Calibri"/>
-              </a:rPr>
-              <a:t>Atención</a:t>
-            </a:r>
-          </a:p>
-          <a:p>
-            <a:pPr>
-              <a:spcBef>
-                <a:spcPts val="400"/>
-              </a:spcBef>
-            </a:pPr>
-            <a:r>
-              <a:rPr sz="1400" b="0" i="0">
-                <a:solidFill>
-                  <a:srgbClr val="333333"/>
-                </a:solidFill>
-                <a:latin typeface="Calibri"/>
-              </a:rPr>
-              <a:t>El PI vale 20% del Corte 3 y NO reemplaza el Parcial 3, que ya se aplico en su propia sesion.</a:t>
-            </a:r>
-          </a:p>
-        </p:txBody>
-      </p:sp>
-      <p:sp>
-        <p:nvSpPr>
-          <p:cNvPr id="14" name="TextBox 13"/>
-          <p:cNvSpPr txBox="1"/>
-          <p:nvPr/>
-        </p:nvSpPr>
-        <p:spPr>
-          <a:xfrm>
-            <a:off x="11185855" y="6473952"/>
-            <a:ext cx="640080" cy="274320"/>
-          </a:xfrm>
-          <a:prstGeom prst="rect">
-            <a:avLst/>
-          </a:prstGeom>
-          <a:noFill/>
-        </p:spPr>
-        <p:txBody>
-          <a:bodyPr wrap="square">
-            <a:spAutoFit/>
-          </a:bodyPr>
-          <a:lstStyle/>
-          <a:p>
-            <a:pPr algn="r"/>
-            <a:r>
-              <a:rPr sz="1100" b="0" i="0">
-                <a:solidFill>
-                  <a:srgbClr val="666666"/>
-                </a:solidFill>
-                <a:latin typeface="Calibri"/>
-              </a:rPr>
-              <a:t>29</a:t>
+              <a:t>Sustentar es justificar decisiones, no describir tablas</a:t>
             </a:r>
           </a:p>
         </p:txBody>
@@ -12059,238 +8791,6 @@
                 <a:latin typeface="Calibri"/>
               </a:rPr>
               <a:t>3</a:t>
-            </a:r>
-          </a:p>
-        </p:txBody>
-      </p:sp>
-    </p:spTree>
-  </p:cSld>
-  <p:clrMapOvr>
-    <a:masterClrMapping/>
-  </p:clrMapOvr>
-</p:sld>
-</file>
-
-<file path=ppt/slides/slide30.xml><?xml version="1.0" encoding="utf-8"?>
-<p:sld xmlns:a="http://schemas.openxmlformats.org/drawingml/2006/main" xmlns:p="http://schemas.openxmlformats.org/presentationml/2006/main" xmlns:r="http://schemas.openxmlformats.org/officeDocument/2006/relationships">
-  <p:cSld>
-    <p:bg>
-      <p:bgPr>
-        <a:solidFill>
-          <a:srgbClr val="FFFFFF"/>
-        </a:solidFill>
-        <a:effectLst/>
-      </p:bgPr>
-    </p:bg>
-    <p:spTree>
-      <p:nvGrpSpPr>
-        <p:cNvPr id="1" name=""/>
-        <p:cNvGrpSpPr/>
-        <p:nvPr/>
-      </p:nvGrpSpPr>
-      <p:grpSpPr/>
-      <p:sp>
-        <p:nvSpPr>
-          <p:cNvPr id="2" name="Rectangle 1"/>
-          <p:cNvSpPr/>
-          <p:nvPr/>
-        </p:nvSpPr>
-        <p:spPr>
-          <a:xfrm>
-            <a:off x="0" y="0"/>
-            <a:ext cx="12191695" cy="164592"/>
-          </a:xfrm>
-          <a:prstGeom prst="rect">
-            <a:avLst/>
-          </a:prstGeom>
-          <a:solidFill>
-            <a:srgbClr val="269CCB"/>
-          </a:solidFill>
-          <a:ln>
-            <a:noFill/>
-          </a:ln>
-        </p:spPr>
-        <p:style>
-          <a:lnRef idx="1">
-            <a:schemeClr val="accent1"/>
-          </a:lnRef>
-          <a:fillRef idx="3">
-            <a:schemeClr val="accent1"/>
-          </a:fillRef>
-          <a:effectRef idx="2">
-            <a:schemeClr val="accent1"/>
-          </a:effectRef>
-          <a:fontRef idx="minor">
-            <a:schemeClr val="lt1"/>
-          </a:fontRef>
-        </p:style>
-        <p:txBody>
-          <a:bodyPr rtlCol="0" anchor="ctr"/>
-          <a:lstStyle/>
-          <a:p>
-            <a:pPr algn="ctr"/>
-          </a:p>
-        </p:txBody>
-      </p:sp>
-      <p:pic>
-        <p:nvPicPr>
-          <p:cNvPr id="3" name="Picture 2" descr="logo_uniajc_color.png"/>
-          <p:cNvPicPr>
-            <a:picLocks noChangeAspect="1"/>
-          </p:cNvPicPr>
-          <p:nvPr/>
-        </p:nvPicPr>
-        <p:blipFill>
-          <a:blip r:embed="rId2"/>
-          <a:stretch>
-            <a:fillRect/>
-          </a:stretch>
-        </p:blipFill>
-        <p:spPr>
-          <a:xfrm>
-            <a:off x="10271455" y="5998464"/>
-            <a:ext cx="1463040" cy="643233"/>
-          </a:xfrm>
-          <a:prstGeom prst="rect">
-            <a:avLst/>
-          </a:prstGeom>
-        </p:spPr>
-      </p:pic>
-      <p:sp>
-        <p:nvSpPr>
-          <p:cNvPr id="4" name="TextBox 3"/>
-          <p:cNvSpPr txBox="1"/>
-          <p:nvPr/>
-        </p:nvSpPr>
-        <p:spPr>
-          <a:xfrm>
-            <a:off x="457200" y="1737360"/>
-            <a:ext cx="11277295" cy="1097280"/>
-          </a:xfrm>
-          <a:prstGeom prst="rect">
-            <a:avLst/>
-          </a:prstGeom>
-          <a:noFill/>
-        </p:spPr>
-        <p:txBody>
-          <a:bodyPr wrap="square" anchor="ctr"/>
-          <a:lstStyle/>
-          <a:p>
-            <a:pPr algn="ctr"/>
-            <a:r>
-              <a:rPr sz="3400" b="1" i="0">
-                <a:solidFill>
-                  <a:srgbClr val="095292"/>
-                </a:solidFill>
-                <a:latin typeface="Calibri"/>
-              </a:rPr>
-              <a:t>Clase 15 · cierre de VetCare DB</a:t>
-            </a:r>
-          </a:p>
-        </p:txBody>
-      </p:sp>
-      <p:sp>
-        <p:nvSpPr>
-          <p:cNvPr id="5" name="TextBox 4"/>
-          <p:cNvSpPr txBox="1"/>
-          <p:nvPr/>
-        </p:nvSpPr>
-        <p:spPr>
-          <a:xfrm>
-            <a:off x="457200" y="3017520"/>
-            <a:ext cx="11277295" cy="1645920"/>
-          </a:xfrm>
-          <a:prstGeom prst="rect">
-            <a:avLst/>
-          </a:prstGeom>
-          <a:noFill/>
-        </p:spPr>
-        <p:txBody>
-          <a:bodyPr wrap="square">
-            <a:spAutoFit/>
-          </a:bodyPr>
-          <a:lstStyle/>
-          <a:p>
-            <a:pPr algn="ctr">
-              <a:spcAft>
-                <a:spcPts val="600"/>
-              </a:spcAft>
-            </a:pPr>
-            <a:r>
-              <a:rPr sz="1600" b="0" i="0">
-                <a:solidFill>
-                  <a:srgbClr val="333333"/>
-                </a:solidFill>
-                <a:latin typeface="Calibri"/>
-              </a:rPr>
-              <a:t>Sustentacion en vivo y entrega final del PI (20% Corte 3)</a:t>
-            </a:r>
-          </a:p>
-          <a:p>
-            <a:pPr algn="ctr">
-              <a:spcAft>
-                <a:spcPts val="600"/>
-              </a:spcAft>
-            </a:pPr>
-            <a:r>
-              <a:rPr sz="1600" b="0" i="0">
-                <a:solidFill>
-                  <a:srgbClr val="333333"/>
-                </a:solidFill>
-                <a:latin typeface="Calibri"/>
-              </a:rPr>
-              <a:t>Entregable: ZIP/PDF final subido antes del turno + sustentacion en vivo 5-8 min + Q&amp;A</a:t>
-            </a:r>
-          </a:p>
-          <a:p>
-            <a:pPr algn="ctr">
-              <a:spcAft>
-                <a:spcPts val="600"/>
-              </a:spcAft>
-            </a:pPr>
-            <a:r>
-              <a:rPr sz="1600" b="0" i="0">
-                <a:solidFill>
-                  <a:srgbClr val="333333"/>
-                </a:solidFill>
-                <a:latin typeface="Calibri"/>
-              </a:rPr>
-              <a:t>Conserva el paquete (ER, DDL, roles, procs, triggers, optimizacion) como portafolio</a:t>
-            </a:r>
-          </a:p>
-        </p:txBody>
-      </p:sp>
-      <p:sp>
-        <p:nvSpPr>
-          <p:cNvPr id="6" name="TextBox 5"/>
-          <p:cNvSpPr txBox="1"/>
-          <p:nvPr/>
-        </p:nvSpPr>
-        <p:spPr>
-          <a:xfrm>
-            <a:off x="457200" y="4754880"/>
-            <a:ext cx="11277295" cy="640080"/>
-          </a:xfrm>
-          <a:prstGeom prst="rect">
-            <a:avLst/>
-          </a:prstGeom>
-          <a:noFill/>
-        </p:spPr>
-        <p:txBody>
-          <a:bodyPr wrap="square">
-            <a:spAutoFit/>
-          </a:bodyPr>
-          <a:lstStyle/>
-          <a:p>
-            <a:pPr algn="ctr"/>
-            <a:r>
-              <a:rPr sz="2000" b="1" i="0">
-                <a:solidFill>
-                  <a:srgbClr val="269CCB"/>
-                </a:solidFill>
-                <a:latin typeface="Calibri"/>
-              </a:rPr>
-              <a:t>Sustentar es justificar decisiones, no describir tablas</a:t>
             </a:r>
           </a:p>
         </p:txBody>
@@ -14149,4 +10649,324 @@
   </a:objectDefaults>
   <a:extraClrSchemeLst/>
 </a:theme>
+</file>
+
+<file path=ppt/theme/theme2.xml><?xml version="1.0" encoding="utf-8"?>
+<a:theme xmlns:a="http://schemas.openxmlformats.org/drawingml/2006/main" name="Office Theme">
+  <a:themeElements>
+    <a:clrScheme name="Office">
+      <a:dk1>
+        <a:sysClr val="windowText" lastClr="000000"/>
+      </a:dk1>
+      <a:lt1>
+        <a:sysClr val="window" lastClr="FFFFFF"/>
+      </a:lt1>
+      <a:dk2>
+        <a:srgbClr val="1F497D"/>
+      </a:dk2>
+      <a:lt2>
+        <a:srgbClr val="EEECE1"/>
+      </a:lt2>
+      <a:accent1>
+        <a:srgbClr val="4F81BD"/>
+      </a:accent1>
+      <a:accent2>
+        <a:srgbClr val="C0504D"/>
+      </a:accent2>
+      <a:accent3>
+        <a:srgbClr val="9BBB59"/>
+      </a:accent3>
+      <a:accent4>
+        <a:srgbClr val="8064A2"/>
+      </a:accent4>
+      <a:accent5>
+        <a:srgbClr val="4BACC6"/>
+      </a:accent5>
+      <a:accent6>
+        <a:srgbClr val="F79646"/>
+      </a:accent6>
+      <a:hlink>
+        <a:srgbClr val="0000FF"/>
+      </a:hlink>
+      <a:folHlink>
+        <a:srgbClr val="800080"/>
+      </a:folHlink>
+    </a:clrScheme>
+    <a:fontScheme name="Office">
+      <a:majorFont>
+        <a:latin typeface="Calibri"/>
+        <a:ea typeface=""/>
+        <a:cs typeface=""/>
+        <a:font script="Jpan" typeface="ＭＳ Ｐゴシック"/>
+        <a:font script="Hang" typeface="맑은 고딕"/>
+        <a:font script="Hans" typeface="宋体"/>
+        <a:font script="Hant" typeface="新細明體"/>
+        <a:font script="Arab" typeface="Times New Roman"/>
+        <a:font script="Hebr" typeface="Times New Roman"/>
+        <a:font script="Thai" typeface="Angsana New"/>
+        <a:font script="Ethi" typeface="Nyala"/>
+        <a:font script="Beng" typeface="Vrinda"/>
+        <a:font script="Gujr" typeface="Shruti"/>
+        <a:font script="Khmr" typeface="MoolBoran"/>
+        <a:font script="Knda" typeface="Tunga"/>
+        <a:font script="Guru" typeface="Raavi"/>
+        <a:font script="Cans" typeface="Euphemia"/>
+        <a:font script="Cher" typeface="Plantagenet Cherokee"/>
+        <a:font script="Yiii" typeface="Microsoft Yi Baiti"/>
+        <a:font script="Tibt" typeface="Microsoft Himalaya"/>
+        <a:font script="Thaa" typeface="MV Boli"/>
+        <a:font script="Deva" typeface="Mangal"/>
+        <a:font script="Telu" typeface="Gautami"/>
+        <a:font script="Taml" typeface="Latha"/>
+        <a:font script="Syrc" typeface="Estrangelo Edessa"/>
+        <a:font script="Orya" typeface="Kalinga"/>
+        <a:font script="Mlym" typeface="Kartika"/>
+        <a:font script="Laoo" typeface="DokChampa"/>
+        <a:font script="Sinh" typeface="Iskoola Pota"/>
+        <a:font script="Mong" typeface="Mongolian Baiti"/>
+        <a:font script="Viet" typeface="Times New Roman"/>
+        <a:font script="Uigh" typeface="Microsoft Uighur"/>
+        <a:font script="Geor" typeface="Sylfaen"/>
+      </a:majorFont>
+      <a:minorFont>
+        <a:latin typeface="Calibri"/>
+        <a:ea typeface=""/>
+        <a:cs typeface=""/>
+        <a:font script="Jpan" typeface="ＭＳ Ｐゴシック"/>
+        <a:font script="Hang" typeface="맑은 고딕"/>
+        <a:font script="Hans" typeface="宋体"/>
+        <a:font script="Hant" typeface="新細明體"/>
+        <a:font script="Arab" typeface="Arial"/>
+        <a:font script="Hebr" typeface="Arial"/>
+        <a:font script="Thai" typeface="Cordia New"/>
+        <a:font script="Ethi" typeface="Nyala"/>
+        <a:font script="Beng" typeface="Vrinda"/>
+        <a:font script="Gujr" typeface="Shruti"/>
+        <a:font script="Khmr" typeface="DaunPenh"/>
+        <a:font script="Knda" typeface="Tunga"/>
+        <a:font script="Guru" typeface="Raavi"/>
+        <a:font script="Cans" typeface="Euphemia"/>
+        <a:font script="Cher" typeface="Plantagenet Cherokee"/>
+        <a:font script="Yiii" typeface="Microsoft Yi Baiti"/>
+        <a:font script="Tibt" typeface="Microsoft Himalaya"/>
+        <a:font script="Thaa" typeface="MV Boli"/>
+        <a:font script="Deva" typeface="Mangal"/>
+        <a:font script="Telu" typeface="Gautami"/>
+        <a:font script="Taml" typeface="Latha"/>
+        <a:font script="Syrc" typeface="Estrangelo Edessa"/>
+        <a:font script="Orya" typeface="Kalinga"/>
+        <a:font script="Mlym" typeface="Kartika"/>
+        <a:font script="Laoo" typeface="DokChampa"/>
+        <a:font script="Sinh" typeface="Iskoola Pota"/>
+        <a:font script="Mong" typeface="Mongolian Baiti"/>
+        <a:font script="Viet" typeface="Arial"/>
+        <a:font script="Uigh" typeface="Microsoft Uighur"/>
+        <a:font script="Geor" typeface="Sylfaen"/>
+      </a:minorFont>
+    </a:fontScheme>
+    <a:fmtScheme name="Office">
+      <a:fillStyleLst>
+        <a:solidFill>
+          <a:schemeClr val="phClr"/>
+        </a:solidFill>
+        <a:gradFill rotWithShape="1">
+          <a:gsLst>
+            <a:gs pos="0">
+              <a:schemeClr val="phClr">
+                <a:tint val="50000"/>
+                <a:satMod val="300000"/>
+              </a:schemeClr>
+            </a:gs>
+            <a:gs pos="35000">
+              <a:schemeClr val="phClr">
+                <a:tint val="37000"/>
+                <a:satMod val="300000"/>
+              </a:schemeClr>
+            </a:gs>
+            <a:gs pos="100000">
+              <a:schemeClr val="phClr">
+                <a:tint val="15000"/>
+                <a:satMod val="350000"/>
+              </a:schemeClr>
+            </a:gs>
+          </a:gsLst>
+          <a:lin ang="16200000" scaled="1"/>
+        </a:gradFill>
+        <a:gradFill rotWithShape="1">
+          <a:gsLst>
+            <a:gs pos="0">
+              <a:schemeClr val="phClr">
+                <a:tint val="100000"/>
+                <a:shade val="100000"/>
+                <a:satMod val="130000"/>
+              </a:schemeClr>
+            </a:gs>
+            <a:gs pos="100000">
+              <a:schemeClr val="phClr">
+                <a:tint val="50000"/>
+                <a:shade val="100000"/>
+                <a:satMod val="350000"/>
+              </a:schemeClr>
+            </a:gs>
+          </a:gsLst>
+          <a:lin ang="16200000" scaled="0"/>
+        </a:gradFill>
+      </a:fillStyleLst>
+      <a:lnStyleLst>
+        <a:ln w="9525" cap="flat" cmpd="sng" algn="ctr">
+          <a:solidFill>
+            <a:schemeClr val="phClr">
+              <a:shade val="95000"/>
+              <a:satMod val="105000"/>
+            </a:schemeClr>
+          </a:solidFill>
+          <a:prstDash val="solid"/>
+        </a:ln>
+        <a:ln w="25400" cap="flat" cmpd="sng" algn="ctr">
+          <a:solidFill>
+            <a:schemeClr val="phClr"/>
+          </a:solidFill>
+          <a:prstDash val="solid"/>
+        </a:ln>
+        <a:ln w="38100" cap="flat" cmpd="sng" algn="ctr">
+          <a:solidFill>
+            <a:schemeClr val="phClr"/>
+          </a:solidFill>
+          <a:prstDash val="solid"/>
+        </a:ln>
+      </a:lnStyleLst>
+      <a:effectStyleLst>
+        <a:effectStyle>
+          <a:effectLst>
+            <a:outerShdw blurRad="40000" dist="20000" dir="5400000" rotWithShape="0">
+              <a:srgbClr val="000000">
+                <a:alpha val="38000"/>
+              </a:srgbClr>
+            </a:outerShdw>
+          </a:effectLst>
+        </a:effectStyle>
+        <a:effectStyle>
+          <a:effectLst>
+            <a:outerShdw blurRad="40000" dist="23000" dir="5400000" rotWithShape="0">
+              <a:srgbClr val="000000">
+                <a:alpha val="35000"/>
+              </a:srgbClr>
+            </a:outerShdw>
+          </a:effectLst>
+        </a:effectStyle>
+        <a:effectStyle>
+          <a:effectLst>
+            <a:outerShdw blurRad="40000" dist="23000" dir="5400000" rotWithShape="0">
+              <a:srgbClr val="000000">
+                <a:alpha val="35000"/>
+              </a:srgbClr>
+            </a:outerShdw>
+          </a:effectLst>
+          <a:scene3d>
+            <a:camera prst="orthographicFront">
+              <a:rot lat="0" lon="0" rev="0"/>
+            </a:camera>
+            <a:lightRig rig="threePt" dir="t">
+              <a:rot lat="0" lon="0" rev="1200000"/>
+            </a:lightRig>
+          </a:scene3d>
+          <a:sp3d>
+            <a:bevelT w="63500" h="25400"/>
+          </a:sp3d>
+        </a:effectStyle>
+      </a:effectStyleLst>
+      <a:bgFillStyleLst>
+        <a:solidFill>
+          <a:schemeClr val="phClr"/>
+        </a:solidFill>
+        <a:gradFill rotWithShape="1">
+          <a:gsLst>
+            <a:gs pos="0">
+              <a:schemeClr val="phClr">
+                <a:tint val="40000"/>
+                <a:satMod val="350000"/>
+              </a:schemeClr>
+            </a:gs>
+            <a:gs pos="40000">
+              <a:schemeClr val="phClr">
+                <a:tint val="45000"/>
+                <a:shade val="99000"/>
+                <a:satMod val="350000"/>
+              </a:schemeClr>
+            </a:gs>
+            <a:gs pos="100000">
+              <a:schemeClr val="phClr">
+                <a:shade val="20000"/>
+                <a:satMod val="255000"/>
+              </a:schemeClr>
+            </a:gs>
+          </a:gsLst>
+          <a:path path="circle">
+            <a:fillToRect l="50000" t="-80000" r="50000" b="180000"/>
+          </a:path>
+        </a:gradFill>
+        <a:gradFill rotWithShape="1">
+          <a:gsLst>
+            <a:gs pos="0">
+              <a:schemeClr val="phClr">
+                <a:tint val="80000"/>
+                <a:satMod val="300000"/>
+              </a:schemeClr>
+            </a:gs>
+            <a:gs pos="100000">
+              <a:schemeClr val="phClr">
+                <a:shade val="30000"/>
+                <a:satMod val="200000"/>
+              </a:schemeClr>
+            </a:gs>
+          </a:gsLst>
+          <a:path path="circle">
+            <a:fillToRect l="50000" t="50000" r="50000" b="50000"/>
+          </a:path>
+        </a:gradFill>
+      </a:bgFillStyleLst>
+    </a:fmtScheme>
+  </a:themeElements>
+  <a:objectDefaults>
+    <a:spDef>
+      <a:spPr/>
+      <a:bodyPr/>
+      <a:lstStyle/>
+      <a:style>
+        <a:lnRef idx="1">
+          <a:schemeClr val="accent1"/>
+        </a:lnRef>
+        <a:fillRef idx="3">
+          <a:schemeClr val="accent1"/>
+        </a:fillRef>
+        <a:effectRef idx="2">
+          <a:schemeClr val="accent1"/>
+        </a:effectRef>
+        <a:fontRef idx="minor">
+          <a:schemeClr val="lt1"/>
+        </a:fontRef>
+      </a:style>
+    </a:spDef>
+    <a:lnDef>
+      <a:spPr/>
+      <a:bodyPr/>
+      <a:lstStyle/>
+      <a:style>
+        <a:lnRef idx="2">
+          <a:schemeClr val="accent1"/>
+        </a:lnRef>
+        <a:fillRef idx="0">
+          <a:schemeClr val="accent1"/>
+        </a:fillRef>
+        <a:effectRef idx="1">
+          <a:schemeClr val="accent1"/>
+        </a:effectRef>
+        <a:fontRef idx="minor">
+          <a:schemeClr val="tx1"/>
+        </a:fontRef>
+      </a:style>
+    </a:lnDef>
+  </a:objectDefaults>
+  <a:extraClrSchemeLst/>
+</a:theme>
 </file>
--- a/Bases de Datos II/Clases/Clase 15 - Presentacion del proyecto y cierre/Presentacion.pptx
+++ b/Bases de Datos II/Clases/Clase 15 - Presentacion del proyecto y cierre/Presentacion.pptx
@@ -25,8 +25,6 @@
     <p:sldId id="273" r:id="rId25"/>
     <p:sldId id="274" r:id="rId26"/>
     <p:sldId id="275" r:id="rId27"/>
-    <p:sldId id="276" r:id="rId28"/>
-    <p:sldId id="277" r:id="rId29"/>
   </p:sldIdLst>
   <p:sldSz cx="12191695" cy="6858000" type="screen4x3"/>
   <p:notesSz cx="6858000" cy="9144000"/>
@@ -888,17 +886,12 @@
           <a:lstStyle/>
           <a:p>
             <a:r>
-              <a:t>El Q&amp;A sobre modelado tiene preguntas que se repiten, y conviene que el docente tenga las respuestas listas para poder calificarlas y para poder formularlas.</a:t>
-            </a:r>
-          </a:p>
-          <a:p>
-            <a:r>
-              <a:t>Aqui vale la regla general del Q&amp;A tecnico, que el docente debe anunciar antes de empezar: decir «no lo medimos» no penaliza si viene acompanado de como se mediria, por ejemplo «no medimos con volumen real porque el playground se reinicia, pero el plan de ejecucion pasa de recorrido completo a busqueda por indice, y la prueba seria cargar cincuenta mil citas y comparar los tiempos».</a:t>
-            </a:r>
-          </a:p>
-          <a:p>
-            <a:r>
-              <a:t>Inventar un numero, en cambio, se cae con la siguiente pregunta y cuesta mucho mas que admitir el limite.</a:t>
+              <a:t>Fuera de la lamina (habla de la practica, no del tema):</a:t>
+            </a:r>
+          </a:p>
+          <a:p>
+            <a:r>
+              <a:t>- El paquete, en cambio, se sube al modulo de Proyectos de PostgreSQL en el navegador ANTES del turno: quien llega a subir archivos consume su propio tiempo de sustentacion.</a:t>
             </a:r>
           </a:p>
         </p:txBody>
@@ -924,6 +917,86 @@
 </file>
 
 <file path=ppt/notesSlides/notesSlide7.xml><?xml version="1.0" encoding="utf-8"?>
+<p:notes xmlns:a="http://schemas.openxmlformats.org/drawingml/2006/main" xmlns:p="http://schemas.openxmlformats.org/presentationml/2006/main" xmlns:r="http://schemas.openxmlformats.org/officeDocument/2006/relationships">
+  <p:cSld>
+    <p:spTree>
+      <p:nvGrpSpPr>
+        <p:cNvPr id="1" name=""/>
+        <p:cNvGrpSpPr/>
+        <p:nvPr/>
+      </p:nvGrpSpPr>
+      <p:grpSpPr>
+        <a:xfrm>
+          <a:off x="0" y="0"/>
+          <a:ext cx="0" cy="0"/>
+          <a:chOff x="0" y="0"/>
+          <a:chExt cx="0" cy="0"/>
+        </a:xfrm>
+      </p:grpSpPr>
+      <p:sp>
+        <p:nvSpPr>
+          <p:cNvPr id="2" name="Slide Image Placeholder 1"/>
+          <p:cNvSpPr>
+            <a:spLocks noGrp="1"/>
+          </p:cNvSpPr>
+          <p:nvPr>
+            <p:ph type="sldImg" idx="2"/>
+          </p:nvPr>
+        </p:nvSpPr>
+        <p:spPr/>
+      </p:sp>
+      <p:sp>
+        <p:nvSpPr>
+          <p:cNvPr id="3" name="Notes Placeholder 2"/>
+          <p:cNvSpPr>
+            <a:spLocks noGrp="1"/>
+          </p:cNvSpPr>
+          <p:nvPr>
+            <p:ph type="body" idx="3" sz="quarter"/>
+          </p:nvPr>
+        </p:nvSpPr>
+        <p:spPr/>
+        <p:txBody>
+          <a:bodyPr/>
+          <a:lstStyle/>
+          <a:p>
+            <a:r>
+              <a:t>El Q&amp;A sobre modelado tiene preguntas que se repiten, y conviene que el docente tenga las respuestas listas para poder calificarlas y para poder formularlas.</a:t>
+            </a:r>
+          </a:p>
+          <a:p>
+            <a:r>
+              <a:t>Aqui vale la regla general del Q&amp;A tecnico, que el docente debe anunciar antes de empezar: decir «no lo medimos» no penaliza si viene acompanado de como se mediria, por ejemplo «no medimos con volumen real porque el playground se reinicia, pero el plan de ejecucion pasa de recorrido completo a busqueda por indice, y la prueba seria cargar cincuenta mil citas y comparar los tiempos».</a:t>
+            </a:r>
+          </a:p>
+          <a:p>
+            <a:r>
+              <a:t>Inventar un numero, en cambio, se cae con la siguiente pregunta y cuesta mucho mas que admitir el limite.</a:t>
+            </a:r>
+          </a:p>
+        </p:txBody>
+      </p:sp>
+      <p:sp>
+        <p:nvSpPr>
+          <p:cNvPr id="4" name="Slide Number Placeholder 3"/>
+          <p:cNvSpPr>
+            <a:spLocks noGrp="1"/>
+          </p:cNvSpPr>
+          <p:nvPr>
+            <p:ph type="sldNum" idx="5" sz="quarter"/>
+          </p:nvPr>
+        </p:nvSpPr>
+        <p:spPr/>
+      </p:sp>
+    </p:spTree>
+  </p:cSld>
+  <p:clrMapOvr>
+    <a:masterClrMapping/>
+  </p:clrMapOvr>
+</p:notes>
+</file>
+
+<file path=ppt/notesSlides/notesSlide8.xml><?xml version="1.0" encoding="utf-8"?>
 <p:notes xmlns:a="http://schemas.openxmlformats.org/drawingml/2006/main" xmlns:p="http://schemas.openxmlformats.org/presentationml/2006/main" xmlns:r="http://schemas.openxmlformats.org/officeDocument/2006/relationships">
   <p:cSld>
     <p:spTree>
@@ -4541,7 +4614,7 @@
                 </a:solidFill>
                 <a:latin typeface="Calibri"/>
               </a:rPr>
-              <a:t>–   Un entregable de base de datos es reproducible si un tercero, con solo el archivo comprimido y sin hablar con el autor, obtiene la misma base funcionando.</a:t>
+              <a:t>–   Un proyecto de base de datos es reproducible si un tercero, con solo el archivo comprimido y sin hablar con el autor, obtiene la misma base funcionando.</a:t>
             </a:r>
           </a:p>
           <a:p>
@@ -5693,7 +5766,7 @@
                 </a:solidFill>
                 <a:latin typeface="Calibri"/>
               </a:rPr>
-              <a:t>–   El paquete, en cambio, se sube al modulo de Proyectos de la plataforma del curso ANTES del turno: quien llega a subir archivos consume su propio tiempo de sustentacion.</a:t>
+              <a:t>–   El paquete, en cambio.</a:t>
             </a:r>
           </a:p>
         </p:txBody>
@@ -6614,7 +6687,7 @@
                 </a:solidFill>
                 <a:latin typeface="Calibri"/>
               </a:rPr>
-              <a:t>Evaluar con rubrica: puntos a evidencia observable (1/2)</a:t>
+              <a:t>El cierre del curso: conectar lo hecho con el trabajo real</a:t>
             </a:r>
           </a:p>
         </p:txBody>
@@ -6653,7 +6726,7 @@
                 </a:solidFill>
                 <a:latin typeface="Calibri"/>
               </a:rPr>
-              <a:t>–   Evaluar con rubrica es asignar puntos a evidencia observable y no a impresion general.</a:t>
+              <a:t>–   El cierre del curso debe conectar lo hecho con el trabajo real, porque de eso depende que el estudiante conserve los scripts en vez de borrarlos al terminar el semestre.</a:t>
             </a:r>
           </a:p>
           <a:p>
@@ -6669,7 +6742,7 @@
                 </a:solidFill>
                 <a:latin typeface="Calibri"/>
               </a:rPr>
-              <a:t>–   Los 100 puntos del PI VetCare DB se reparten en 20 por modelo y DDL coherente, 15 por seguridad y respaldo, 25 por procedimientos, funciones y disparadores con casos de prueba</a:t>
+              <a:t>–   Leer un plan de ejecucion y decidir si un indice sobra es una habilidad que se paga.</a:t>
             </a:r>
           </a:p>
           <a:p>
@@ -6685,7 +6758,7 @@
                 </a:solidFill>
                 <a:latin typeface="Calibri"/>
               </a:rPr>
-              <a:t>–   15 por optimizacion con antes y despues, 10 por la integracion aplicacion-base de datos documentada como contrato, y 15 por informe y sustentacion.</a:t>
+              <a:t>–   El SQL que se escribio ahi es el mismo que corre en un servidor de produccion; lo que cambia en un entorno profesional es el volumen de datos y las consecuencias de un error, no la sintaxis.</a:t>
             </a:r>
           </a:p>
           <a:p>
@@ -6701,23 +6774,7 @@
                 </a:solidFill>
                 <a:latin typeface="Calibri"/>
               </a:rPr>
-              <a:t>–   Leer ese reparto en voz alta al abrir la sesion, antes del primer turno, evita el reclamo mas comun: los 15 puntos de sustentacion son solo la sexta parte del total</a:t>
-            </a:r>
-          </a:p>
-          <a:p>
-            <a:pPr>
-              <a:spcAft>
-                <a:spcPts val="800"/>
-              </a:spcAft>
-            </a:pPr>
-            <a:r>
-              <a:rPr sz="2000" b="0" i="0">
-                <a:solidFill>
-                  <a:srgbClr val="333333"/>
-                </a:solidFill>
-                <a:latin typeface="Calibri"/>
-              </a:rPr>
-              <a:t>–   Pero la sustentacion es el instrumento con el que el evaluador verifica que los otros 85 son de su autor</a:t>
+              <a:t>–   Y la autoevaluacion de la clase conviene pedirla con una consigna concreta en vez de una reflexion vaga: nombren la decision de modelado que mas les costo revertir y en que clase se dieron cuenta de que estaba mal.</a:t>
             </a:r>
           </a:p>
         </p:txBody>
@@ -6898,7 +6955,7 @@
                 </a:solidFill>
                 <a:latin typeface="Calibri"/>
               </a:rPr>
-              <a:t>Evaluar con rubrica: puntos a evidencia observable (2/2)</a:t>
+              <a:t>Como se ordena la sesion de hoy</a:t>
             </a:r>
           </a:p>
         </p:txBody>
@@ -6937,7 +6994,25 @@
                 </a:solidFill>
                 <a:latin typeface="Calibri"/>
               </a:rPr>
-              <a:t>–   Y un modelo excelente que nadie sabe defender abre una duda de autoria que ningun documento cierra.</a:t>
+              <a:t>–   Sustentación </a:t>
+            </a:r>
+            <a:r>
+              <a:rPr sz="2000" b="1" i="0">
+                <a:solidFill>
+                  <a:srgbClr val="333333"/>
+                </a:solidFill>
+                <a:latin typeface="Calibri"/>
+              </a:rPr>
+              <a:t>en vivo</a:t>
+            </a:r>
+            <a:r>
+              <a:rPr sz="2000" b="0" i="0">
+                <a:solidFill>
+                  <a:srgbClr val="333333"/>
+                </a:solidFill>
+                <a:latin typeface="Calibri"/>
+              </a:rPr>
+              <a:t>, en este bloque: no se reemplaza por video grabado.</a:t>
             </a:r>
           </a:p>
           <a:p>
@@ -6953,7 +7028,25 @@
                 </a:solidFill>
                 <a:latin typeface="Calibri"/>
               </a:rPr>
-              <a:t>–   Y va el recordatorio de pesos: estos 100 puntos valen 20% del Corte 3, el Parcial 3 de la Clase 14 (virtual sincrono por Meet y escrito, el 9 de noviembre) vale 15%, y la asistencia 5%.</a:t>
+              <a:t>–   Turnos de </a:t>
+            </a:r>
+            <a:r>
+              <a:rPr sz="2000" b="1" i="0">
+                <a:solidFill>
+                  <a:srgbClr val="333333"/>
+                </a:solidFill>
+                <a:latin typeface="Calibri"/>
+              </a:rPr>
+              <a:t>5–8 min de pitch + Q&amp;A</a:t>
+            </a:r>
+            <a:r>
+              <a:rPr sz="2000" b="0" i="0">
+                <a:solidFill>
+                  <a:srgbClr val="333333"/>
+                </a:solidFill>
+                <a:latin typeface="Calibri"/>
+              </a:rPr>
+              <a:t>; el orden se sortea al empezar.</a:t>
             </a:r>
           </a:p>
           <a:p>
@@ -6969,7 +7062,41 @@
                 </a:solidFill>
                 <a:latin typeface="Calibri"/>
               </a:rPr>
-              <a:t>–   El proyecto no reemplaza ni compensa el parcial: son dos evaluaciones distintas del mismo corte, y confundirlas produce reclamos que se evitan diciendolo una sola vez, hoy, con los numeros a la vista.</a:t>
+              <a:t>–   En tu turno muestra una </a:t>
+            </a:r>
+            <a:r>
+              <a:rPr sz="2000" b="1" i="0">
+                <a:solidFill>
+                  <a:srgbClr val="333333"/>
+                </a:solidFill>
+                <a:latin typeface="Calibri"/>
+              </a:rPr>
+              <a:t>ejecución real</a:t>
+            </a:r>
+            <a:r>
+              <a:rPr sz="2000" b="0" i="0">
+                <a:solidFill>
+                  <a:srgbClr val="333333"/>
+                </a:solidFill>
+                <a:latin typeface="Calibri"/>
+              </a:rPr>
+              <a:t> (procedimiento OK + caso rechazado), no solo capturas.</a:t>
+            </a:r>
+          </a:p>
+          <a:p>
+            <a:pPr>
+              <a:spcAft>
+                <a:spcPts val="800"/>
+              </a:spcAft>
+            </a:pPr>
+            <a:r>
+              <a:rPr sz="2000" b="0" i="0">
+                <a:solidFill>
+                  <a:srgbClr val="333333"/>
+                </a:solidFill>
+                <a:latin typeface="Calibri"/>
+              </a:rPr>
+              <a:t>–   Mientras otros presentan, escuchas: el cierre del curso se hace con todo el grupo.</a:t>
             </a:r>
           </a:p>
         </p:txBody>
@@ -7275,40 +7402,6 @@
                 </a:solidFill>
                 <a:latin typeface="Calibri"/>
               </a:rPr>
-              <a:t>–   Sube el paquete a la plataforma del curso </a:t>
-            </a:r>
-            <a:r>
-              <a:rPr sz="2000" b="1" i="0">
-                <a:solidFill>
-                  <a:srgbClr val="333333"/>
-                </a:solidFill>
-                <a:latin typeface="Calibri"/>
-              </a:rPr>
-              <a:t>antes</a:t>
-            </a:r>
-            <a:r>
-              <a:rPr sz="2000" b="0" i="0">
-                <a:solidFill>
-                  <a:srgbClr val="333333"/>
-                </a:solidFill>
-                <a:latin typeface="Calibri"/>
-              </a:rPr>
-              <a:t> de tu turno: presentando no se sube nada.</a:t>
-            </a:r>
-          </a:p>
-          <a:p>
-            <a:pPr>
-              <a:spcAft>
-                <a:spcPts val="800"/>
-              </a:spcAft>
-            </a:pPr>
-            <a:r>
-              <a:rPr sz="2000" b="0" i="0">
-                <a:solidFill>
-                  <a:srgbClr val="333333"/>
-                </a:solidFill>
-                <a:latin typeface="Calibri"/>
-              </a:rPr>
               <a:t>–   La sustentación es </a:t>
             </a:r>
             <a:r>
@@ -7376,596 +7469,6 @@
 </file>
 
 <file path=ppt/slides/slide20.xml><?xml version="1.0" encoding="utf-8"?>
-<p:sld xmlns:a="http://schemas.openxmlformats.org/drawingml/2006/main" xmlns:p="http://schemas.openxmlformats.org/presentationml/2006/main" xmlns:r="http://schemas.openxmlformats.org/officeDocument/2006/relationships">
-  <p:cSld>
-    <p:bg>
-      <p:bgPr>
-        <a:solidFill>
-          <a:srgbClr val="FFFFFF"/>
-        </a:solidFill>
-        <a:effectLst/>
-      </p:bgPr>
-    </p:bg>
-    <p:spTree>
-      <p:nvGrpSpPr>
-        <p:cNvPr id="1" name=""/>
-        <p:cNvGrpSpPr/>
-        <p:nvPr/>
-      </p:nvGrpSpPr>
-      <p:grpSpPr/>
-      <p:sp>
-        <p:nvSpPr>
-          <p:cNvPr id="2" name="Rectangle 1"/>
-          <p:cNvSpPr/>
-          <p:nvPr/>
-        </p:nvSpPr>
-        <p:spPr>
-          <a:xfrm>
-            <a:off x="0" y="0"/>
-            <a:ext cx="12191695" cy="960120"/>
-          </a:xfrm>
-          <a:prstGeom prst="rect">
-            <a:avLst/>
-          </a:prstGeom>
-          <a:solidFill>
-            <a:srgbClr val="095292"/>
-          </a:solidFill>
-          <a:ln>
-            <a:noFill/>
-          </a:ln>
-        </p:spPr>
-        <p:style>
-          <a:lnRef idx="1">
-            <a:schemeClr val="accent1"/>
-          </a:lnRef>
-          <a:fillRef idx="3">
-            <a:schemeClr val="accent1"/>
-          </a:fillRef>
-          <a:effectRef idx="2">
-            <a:schemeClr val="accent1"/>
-          </a:effectRef>
-          <a:fontRef idx="minor">
-            <a:schemeClr val="lt1"/>
-          </a:fontRef>
-        </p:style>
-        <p:txBody>
-          <a:bodyPr rtlCol="0" anchor="ctr"/>
-          <a:lstStyle/>
-          <a:p>
-            <a:pPr algn="ctr"/>
-          </a:p>
-        </p:txBody>
-      </p:sp>
-      <p:sp>
-        <p:nvSpPr>
-          <p:cNvPr id="3" name="Rectangle 2"/>
-          <p:cNvSpPr/>
-          <p:nvPr/>
-        </p:nvSpPr>
-        <p:spPr>
-          <a:xfrm>
-            <a:off x="0" y="960120"/>
-            <a:ext cx="12191695" cy="41148"/>
-          </a:xfrm>
-          <a:prstGeom prst="rect">
-            <a:avLst/>
-          </a:prstGeom>
-          <a:solidFill>
-            <a:srgbClr val="FFD000"/>
-          </a:solidFill>
-          <a:ln>
-            <a:noFill/>
-          </a:ln>
-        </p:spPr>
-        <p:style>
-          <a:lnRef idx="1">
-            <a:schemeClr val="accent1"/>
-          </a:lnRef>
-          <a:fillRef idx="3">
-            <a:schemeClr val="accent1"/>
-          </a:fillRef>
-          <a:effectRef idx="2">
-            <a:schemeClr val="accent1"/>
-          </a:effectRef>
-          <a:fontRef idx="minor">
-            <a:schemeClr val="lt1"/>
-          </a:fontRef>
-        </p:style>
-        <p:txBody>
-          <a:bodyPr rtlCol="0" anchor="ctr"/>
-          <a:lstStyle/>
-          <a:p>
-            <a:pPr algn="ctr"/>
-          </a:p>
-        </p:txBody>
-      </p:sp>
-      <p:sp>
-        <p:nvSpPr>
-          <p:cNvPr id="4" name="TextBox 3"/>
-          <p:cNvSpPr txBox="1"/>
-          <p:nvPr/>
-        </p:nvSpPr>
-        <p:spPr>
-          <a:xfrm>
-            <a:off x="457200" y="164592"/>
-            <a:ext cx="11277295" cy="502920"/>
-          </a:xfrm>
-          <a:prstGeom prst="rect">
-            <a:avLst/>
-          </a:prstGeom>
-          <a:noFill/>
-        </p:spPr>
-        <p:txBody>
-          <a:bodyPr wrap="square">
-            <a:spAutoFit/>
-          </a:bodyPr>
-          <a:lstStyle/>
-          <a:p>
-            <a:r>
-              <a:rPr sz="2600" b="1" i="0">
-                <a:solidFill>
-                  <a:srgbClr val="FFFFFF"/>
-                </a:solidFill>
-                <a:latin typeface="Calibri"/>
-              </a:rPr>
-              <a:t>El cierre del curso: conectar lo hecho con el trabajo real</a:t>
-            </a:r>
-          </a:p>
-        </p:txBody>
-      </p:sp>
-      <p:sp>
-        <p:nvSpPr>
-          <p:cNvPr id="5" name="TextBox 4"/>
-          <p:cNvSpPr txBox="1"/>
-          <p:nvPr/>
-        </p:nvSpPr>
-        <p:spPr>
-          <a:xfrm>
-            <a:off x="457200" y="1170432"/>
-            <a:ext cx="11277295" cy="5230368"/>
-          </a:xfrm>
-          <a:prstGeom prst="rect">
-            <a:avLst/>
-          </a:prstGeom>
-          <a:noFill/>
-        </p:spPr>
-        <p:txBody>
-          <a:bodyPr wrap="square">
-            <a:spAutoFit/>
-          </a:bodyPr>
-          <a:lstStyle/>
-          <a:p>
-            <a:pPr>
-              <a:spcAft>
-                <a:spcPts val="800"/>
-              </a:spcAft>
-            </a:pPr>
-            <a:r>
-              <a:rPr sz="2000" b="0" i="0">
-                <a:solidFill>
-                  <a:srgbClr val="333333"/>
-                </a:solidFill>
-                <a:latin typeface="Calibri"/>
-              </a:rPr>
-              <a:t>–   El cierre del curso debe conectar lo hecho con el trabajo real, porque de eso depende que el estudiante conserve los scripts en vez de borrarlos al terminar el semestre.</a:t>
-            </a:r>
-          </a:p>
-          <a:p>
-            <a:pPr>
-              <a:spcAft>
-                <a:spcPts val="800"/>
-              </a:spcAft>
-            </a:pPr>
-            <a:r>
-              <a:rPr sz="2000" b="0" i="0">
-                <a:solidFill>
-                  <a:srgbClr val="333333"/>
-                </a:solidFill>
-                <a:latin typeface="Calibri"/>
-              </a:rPr>
-              <a:t>–   Leer un plan de ejecucion y decidir si un indice sobra es una habilidad que se paga.</a:t>
-            </a:r>
-          </a:p>
-          <a:p>
-            <a:pPr>
-              <a:spcAft>
-                <a:spcPts val="800"/>
-              </a:spcAft>
-            </a:pPr>
-            <a:r>
-              <a:rPr sz="2000" b="0" i="0">
-                <a:solidFill>
-                  <a:srgbClr val="333333"/>
-                </a:solidFill>
-                <a:latin typeface="Calibri"/>
-              </a:rPr>
-              <a:t>–   El SQL que se escribio ahi es el mismo que corre en un servidor de produccion; lo que cambia en un entorno profesional es el volumen de datos y las consecuencias de un error, no la sintaxis.</a:t>
-            </a:r>
-          </a:p>
-          <a:p>
-            <a:pPr>
-              <a:spcAft>
-                <a:spcPts val="800"/>
-              </a:spcAft>
-            </a:pPr>
-            <a:r>
-              <a:rPr sz="2000" b="0" i="0">
-                <a:solidFill>
-                  <a:srgbClr val="333333"/>
-                </a:solidFill>
-                <a:latin typeface="Calibri"/>
-              </a:rPr>
-              <a:t>–   Y la autoevaluacion del taller conviene pedirla con una consigna concreta en vez de una reflexion vaga: nombren la decision de modelado que mas les costo revertir y en que clase se dieron cuenta de que estaba mal.</a:t>
-            </a:r>
-          </a:p>
-        </p:txBody>
-      </p:sp>
-      <p:sp>
-        <p:nvSpPr>
-          <p:cNvPr id="6" name="TextBox 5"/>
-          <p:cNvSpPr txBox="1"/>
-          <p:nvPr/>
-        </p:nvSpPr>
-        <p:spPr>
-          <a:xfrm>
-            <a:off x="11185855" y="6473952"/>
-            <a:ext cx="640080" cy="274320"/>
-          </a:xfrm>
-          <a:prstGeom prst="rect">
-            <a:avLst/>
-          </a:prstGeom>
-          <a:noFill/>
-        </p:spPr>
-        <p:txBody>
-          <a:bodyPr wrap="square">
-            <a:spAutoFit/>
-          </a:bodyPr>
-          <a:lstStyle/>
-          <a:p>
-            <a:pPr algn="r"/>
-            <a:r>
-              <a:rPr sz="1100" b="0" i="0">
-                <a:solidFill>
-                  <a:srgbClr val="666666"/>
-                </a:solidFill>
-                <a:latin typeface="Calibri"/>
-              </a:rPr>
-              <a:t>20</a:t>
-            </a:r>
-          </a:p>
-        </p:txBody>
-      </p:sp>
-    </p:spTree>
-  </p:cSld>
-  <p:clrMapOvr>
-    <a:masterClrMapping/>
-  </p:clrMapOvr>
-</p:sld>
-</file>
-
-<file path=ppt/slides/slide21.xml><?xml version="1.0" encoding="utf-8"?>
-<p:sld xmlns:a="http://schemas.openxmlformats.org/drawingml/2006/main" xmlns:p="http://schemas.openxmlformats.org/presentationml/2006/main" xmlns:r="http://schemas.openxmlformats.org/officeDocument/2006/relationships">
-  <p:cSld>
-    <p:bg>
-      <p:bgPr>
-        <a:solidFill>
-          <a:srgbClr val="FFFFFF"/>
-        </a:solidFill>
-        <a:effectLst/>
-      </p:bgPr>
-    </p:bg>
-    <p:spTree>
-      <p:nvGrpSpPr>
-        <p:cNvPr id="1" name=""/>
-        <p:cNvGrpSpPr/>
-        <p:nvPr/>
-      </p:nvGrpSpPr>
-      <p:grpSpPr/>
-      <p:sp>
-        <p:nvSpPr>
-          <p:cNvPr id="2" name="Rectangle 1"/>
-          <p:cNvSpPr/>
-          <p:nvPr/>
-        </p:nvSpPr>
-        <p:spPr>
-          <a:xfrm>
-            <a:off x="0" y="0"/>
-            <a:ext cx="12191695" cy="960120"/>
-          </a:xfrm>
-          <a:prstGeom prst="rect">
-            <a:avLst/>
-          </a:prstGeom>
-          <a:solidFill>
-            <a:srgbClr val="095292"/>
-          </a:solidFill>
-          <a:ln>
-            <a:noFill/>
-          </a:ln>
-        </p:spPr>
-        <p:style>
-          <a:lnRef idx="1">
-            <a:schemeClr val="accent1"/>
-          </a:lnRef>
-          <a:fillRef idx="3">
-            <a:schemeClr val="accent1"/>
-          </a:fillRef>
-          <a:effectRef idx="2">
-            <a:schemeClr val="accent1"/>
-          </a:effectRef>
-          <a:fontRef idx="minor">
-            <a:schemeClr val="lt1"/>
-          </a:fontRef>
-        </p:style>
-        <p:txBody>
-          <a:bodyPr rtlCol="0" anchor="ctr"/>
-          <a:lstStyle/>
-          <a:p>
-            <a:pPr algn="ctr"/>
-          </a:p>
-        </p:txBody>
-      </p:sp>
-      <p:sp>
-        <p:nvSpPr>
-          <p:cNvPr id="3" name="Rectangle 2"/>
-          <p:cNvSpPr/>
-          <p:nvPr/>
-        </p:nvSpPr>
-        <p:spPr>
-          <a:xfrm>
-            <a:off x="0" y="960120"/>
-            <a:ext cx="12191695" cy="41148"/>
-          </a:xfrm>
-          <a:prstGeom prst="rect">
-            <a:avLst/>
-          </a:prstGeom>
-          <a:solidFill>
-            <a:srgbClr val="FFD000"/>
-          </a:solidFill>
-          <a:ln>
-            <a:noFill/>
-          </a:ln>
-        </p:spPr>
-        <p:style>
-          <a:lnRef idx="1">
-            <a:schemeClr val="accent1"/>
-          </a:lnRef>
-          <a:fillRef idx="3">
-            <a:schemeClr val="accent1"/>
-          </a:fillRef>
-          <a:effectRef idx="2">
-            <a:schemeClr val="accent1"/>
-          </a:effectRef>
-          <a:fontRef idx="minor">
-            <a:schemeClr val="lt1"/>
-          </a:fontRef>
-        </p:style>
-        <p:txBody>
-          <a:bodyPr rtlCol="0" anchor="ctr"/>
-          <a:lstStyle/>
-          <a:p>
-            <a:pPr algn="ctr"/>
-          </a:p>
-        </p:txBody>
-      </p:sp>
-      <p:sp>
-        <p:nvSpPr>
-          <p:cNvPr id="4" name="TextBox 3"/>
-          <p:cNvSpPr txBox="1"/>
-          <p:nvPr/>
-        </p:nvSpPr>
-        <p:spPr>
-          <a:xfrm>
-            <a:off x="457200" y="164592"/>
-            <a:ext cx="11277295" cy="502920"/>
-          </a:xfrm>
-          <a:prstGeom prst="rect">
-            <a:avLst/>
-          </a:prstGeom>
-          <a:noFill/>
-        </p:spPr>
-        <p:txBody>
-          <a:bodyPr wrap="square">
-            <a:spAutoFit/>
-          </a:bodyPr>
-          <a:lstStyle/>
-          <a:p>
-            <a:r>
-              <a:rPr sz="2600" b="1" i="0">
-                <a:solidFill>
-                  <a:srgbClr val="FFFFFF"/>
-                </a:solidFill>
-                <a:latin typeface="Calibri"/>
-              </a:rPr>
-              <a:t>Como se ordena la sesion de hoy</a:t>
-            </a:r>
-          </a:p>
-        </p:txBody>
-      </p:sp>
-      <p:sp>
-        <p:nvSpPr>
-          <p:cNvPr id="5" name="TextBox 4"/>
-          <p:cNvSpPr txBox="1"/>
-          <p:nvPr/>
-        </p:nvSpPr>
-        <p:spPr>
-          <a:xfrm>
-            <a:off x="457200" y="1170432"/>
-            <a:ext cx="11277295" cy="5230368"/>
-          </a:xfrm>
-          <a:prstGeom prst="rect">
-            <a:avLst/>
-          </a:prstGeom>
-          <a:noFill/>
-        </p:spPr>
-        <p:txBody>
-          <a:bodyPr wrap="square">
-            <a:spAutoFit/>
-          </a:bodyPr>
-          <a:lstStyle/>
-          <a:p>
-            <a:pPr>
-              <a:spcAft>
-                <a:spcPts val="800"/>
-              </a:spcAft>
-            </a:pPr>
-            <a:r>
-              <a:rPr sz="2000" b="0" i="0">
-                <a:solidFill>
-                  <a:srgbClr val="333333"/>
-                </a:solidFill>
-                <a:latin typeface="Calibri"/>
-              </a:rPr>
-              <a:t>–   Sustentación </a:t>
-            </a:r>
-            <a:r>
-              <a:rPr sz="2000" b="1" i="0">
-                <a:solidFill>
-                  <a:srgbClr val="333333"/>
-                </a:solidFill>
-                <a:latin typeface="Calibri"/>
-              </a:rPr>
-              <a:t>en vivo</a:t>
-            </a:r>
-            <a:r>
-              <a:rPr sz="2000" b="0" i="0">
-                <a:solidFill>
-                  <a:srgbClr val="333333"/>
-                </a:solidFill>
-                <a:latin typeface="Calibri"/>
-              </a:rPr>
-              <a:t>, en este bloque: no se reemplaza por video grabado.</a:t>
-            </a:r>
-          </a:p>
-          <a:p>
-            <a:pPr>
-              <a:spcAft>
-                <a:spcPts val="800"/>
-              </a:spcAft>
-            </a:pPr>
-            <a:r>
-              <a:rPr sz="2000" b="0" i="0">
-                <a:solidFill>
-                  <a:srgbClr val="333333"/>
-                </a:solidFill>
-                <a:latin typeface="Calibri"/>
-              </a:rPr>
-              <a:t>–   Turnos de </a:t>
-            </a:r>
-            <a:r>
-              <a:rPr sz="2000" b="1" i="0">
-                <a:solidFill>
-                  <a:srgbClr val="333333"/>
-                </a:solidFill>
-                <a:latin typeface="Calibri"/>
-              </a:rPr>
-              <a:t>5–8 min de pitch + Q&amp;A</a:t>
-            </a:r>
-            <a:r>
-              <a:rPr sz="2000" b="0" i="0">
-                <a:solidFill>
-                  <a:srgbClr val="333333"/>
-                </a:solidFill>
-                <a:latin typeface="Calibri"/>
-              </a:rPr>
-              <a:t>; el orden se sortea al empezar.</a:t>
-            </a:r>
-          </a:p>
-          <a:p>
-            <a:pPr>
-              <a:spcAft>
-                <a:spcPts val="800"/>
-              </a:spcAft>
-            </a:pPr>
-            <a:r>
-              <a:rPr sz="2000" b="0" i="0">
-                <a:solidFill>
-                  <a:srgbClr val="333333"/>
-                </a:solidFill>
-                <a:latin typeface="Calibri"/>
-              </a:rPr>
-              <a:t>–   En tu turno muestra una </a:t>
-            </a:r>
-            <a:r>
-              <a:rPr sz="2000" b="1" i="0">
-                <a:solidFill>
-                  <a:srgbClr val="333333"/>
-                </a:solidFill>
-                <a:latin typeface="Calibri"/>
-              </a:rPr>
-              <a:t>ejecución real</a:t>
-            </a:r>
-            <a:r>
-              <a:rPr sz="2000" b="0" i="0">
-                <a:solidFill>
-                  <a:srgbClr val="333333"/>
-                </a:solidFill>
-                <a:latin typeface="Calibri"/>
-              </a:rPr>
-              <a:t> (procedimiento OK + caso rechazado), no solo capturas.</a:t>
-            </a:r>
-          </a:p>
-          <a:p>
-            <a:pPr>
-              <a:spcAft>
-                <a:spcPts val="800"/>
-              </a:spcAft>
-            </a:pPr>
-            <a:r>
-              <a:rPr sz="2000" b="0" i="0">
-                <a:solidFill>
-                  <a:srgbClr val="333333"/>
-                </a:solidFill>
-                <a:latin typeface="Calibri"/>
-              </a:rPr>
-              <a:t>–   Mientras otros presentan, escuchas: el cierre del curso se hace con todo el grupo.</a:t>
-            </a:r>
-          </a:p>
-        </p:txBody>
-      </p:sp>
-      <p:sp>
-        <p:nvSpPr>
-          <p:cNvPr id="6" name="TextBox 5"/>
-          <p:cNvSpPr txBox="1"/>
-          <p:nvPr/>
-        </p:nvSpPr>
-        <p:spPr>
-          <a:xfrm>
-            <a:off x="11185855" y="6473952"/>
-            <a:ext cx="640080" cy="274320"/>
-          </a:xfrm>
-          <a:prstGeom prst="rect">
-            <a:avLst/>
-          </a:prstGeom>
-          <a:noFill/>
-        </p:spPr>
-        <p:txBody>
-          <a:bodyPr wrap="square">
-            <a:spAutoFit/>
-          </a:bodyPr>
-          <a:lstStyle/>
-          <a:p>
-            <a:pPr algn="r"/>
-            <a:r>
-              <a:rPr sz="1100" b="0" i="0">
-                <a:solidFill>
-                  <a:srgbClr val="666666"/>
-                </a:solidFill>
-                <a:latin typeface="Calibri"/>
-              </a:rPr>
-              <a:t>21</a:t>
-            </a:r>
-          </a:p>
-        </p:txBody>
-      </p:sp>
-    </p:spTree>
-  </p:cSld>
-  <p:clrMapOvr>
-    <a:masterClrMapping/>
-  </p:clrMapOvr>
-</p:sld>
-</file>
-
-<file path=ppt/slides/slide22.xml><?xml version="1.0" encoding="utf-8"?>
 <p:sld xmlns:a="http://schemas.openxmlformats.org/drawingml/2006/main" xmlns:p="http://schemas.openxmlformats.org/presentationml/2006/main" xmlns:r="http://schemas.openxmlformats.org/officeDocument/2006/relationships">
   <p:cSld>
     <p:bg>

--- a/Bases de Datos II/Clases/Clase 15 - Presentacion del proyecto y cierre/Presentacion.pptx
+++ b/Bases de Datos II/Clases/Clase 15 - Presentacion del proyecto y cierre/Presentacion.pptx
@@ -24,7 +24,6 @@
     <p:sldId id="272" r:id="rId24"/>
     <p:sldId id="273" r:id="rId25"/>
     <p:sldId id="274" r:id="rId26"/>
-    <p:sldId id="275" r:id="rId27"/>
   </p:sldIdLst>
   <p:sldSz cx="12191695" cy="6858000" type="screen4x3"/>
   <p:notesSz cx="6858000" cy="9144000"/>
@@ -816,7 +815,22 @@
           <a:lstStyle/>
           <a:p>
             <a:r>
-              <a:t>Lo que si hay que exigir dentro del turno es la ejecucion real: que el estudiante corra el procedimiento en el playground, con su caso valido y su caso invalido, en vez de proyectar capturas fijas, porque una consulta ejecutandose delante del evaluador es la evidencia mas dificil de fingir y la mas rapida de calificar.</a:t>
+              <a:t>Lo que si hay que exigir dentro del turno es la ejecucion real: que el estudiante corra el procedimiento en el playground, con su caso valido y su caso invalido, en vez de proyectar capturas fijas.</a:t>
+            </a:r>
+          </a:p>
+          <a:p>
+            <a:r>
+              <a:t>El paquete, en cambio.</a:t>
+            </a:r>
+          </a:p>
+          <a:p>
+            <a:r>
+              <a:t>Fuera de la lamina (habla de la practica): Lo que si hay que exigir dentro del turno es la ejecucion real: que el estudiante corra el procedimiento en el playground, con su caso valido y su caso invalido, en vez de proyectar capturas fijas, porque una consulta ejecutandose delante del evaluador es la evidencia mas dificil de fingir y la mas rapida de calificar.</a:t>
+            </a:r>
+          </a:p>
+          <a:p>
+            <a:r>
+              <a:t>Fuera de la lamina (habla de la practica): El paquete, en cambio, se sube al modulo de Proyectos de PostgreSQL en el navegador ANTES del turno: quien llega a subir archivos consume su propio tiempo de sustentacion.</a:t>
             </a:r>
           </a:p>
         </p:txBody>
@@ -886,12 +900,17 @@
           <a:lstStyle/>
           <a:p>
             <a:r>
-              <a:t>Fuera de la lamina (habla de la practica, no del tema):</a:t>
-            </a:r>
-          </a:p>
-          <a:p>
-            <a:r>
-              <a:t>- El paquete, en cambio, se sube al modulo de Proyectos de PostgreSQL en el navegador ANTES del turno: quien llega a subir archivos consume su propio tiempo de sustentacion.</a:t>
+              <a:t>El Q&amp;A sobre modelado tiene preguntas que se repiten, y conviene que el docente tenga las respuestas listas para poder calificarlas y para poder formularlas.</a:t>
+            </a:r>
+          </a:p>
+          <a:p>
+            <a:r>
+              <a:t>Aqui vale la regla general del Q&amp;A tecnico, que el docente debe anunciar antes de empezar: decir «no lo medimos» no penaliza si viene acompanado de como se mediria, por ejemplo «no medimos con volumen real porque el playground se reinicia, pero el plan de ejecucion pasa de recorrido completo a busqueda por indice, y la prueba seria cargar cincuenta mil citas y comparar los tiempos».</a:t>
+            </a:r>
+          </a:p>
+          <a:p>
+            <a:r>
+              <a:t>Inventar un numero, en cambio, se cae con la siguiente pregunta y cuesta mucho mas que admitir el limite.</a:t>
             </a:r>
           </a:p>
         </p:txBody>
@@ -917,86 +936,6 @@
 </file>
 
 <file path=ppt/notesSlides/notesSlide7.xml><?xml version="1.0" encoding="utf-8"?>
-<p:notes xmlns:a="http://schemas.openxmlformats.org/drawingml/2006/main" xmlns:p="http://schemas.openxmlformats.org/presentationml/2006/main" xmlns:r="http://schemas.openxmlformats.org/officeDocument/2006/relationships">
-  <p:cSld>
-    <p:spTree>
-      <p:nvGrpSpPr>
-        <p:cNvPr id="1" name=""/>
-        <p:cNvGrpSpPr/>
-        <p:nvPr/>
-      </p:nvGrpSpPr>
-      <p:grpSpPr>
-        <a:xfrm>
-          <a:off x="0" y="0"/>
-          <a:ext cx="0" cy="0"/>
-          <a:chOff x="0" y="0"/>
-          <a:chExt cx="0" cy="0"/>
-        </a:xfrm>
-      </p:grpSpPr>
-      <p:sp>
-        <p:nvSpPr>
-          <p:cNvPr id="2" name="Slide Image Placeholder 1"/>
-          <p:cNvSpPr>
-            <a:spLocks noGrp="1"/>
-          </p:cNvSpPr>
-          <p:nvPr>
-            <p:ph type="sldImg" idx="2"/>
-          </p:nvPr>
-        </p:nvSpPr>
-        <p:spPr/>
-      </p:sp>
-      <p:sp>
-        <p:nvSpPr>
-          <p:cNvPr id="3" name="Notes Placeholder 2"/>
-          <p:cNvSpPr>
-            <a:spLocks noGrp="1"/>
-          </p:cNvSpPr>
-          <p:nvPr>
-            <p:ph type="body" idx="3" sz="quarter"/>
-          </p:nvPr>
-        </p:nvSpPr>
-        <p:spPr/>
-        <p:txBody>
-          <a:bodyPr/>
-          <a:lstStyle/>
-          <a:p>
-            <a:r>
-              <a:t>El Q&amp;A sobre modelado tiene preguntas que se repiten, y conviene que el docente tenga las respuestas listas para poder calificarlas y para poder formularlas.</a:t>
-            </a:r>
-          </a:p>
-          <a:p>
-            <a:r>
-              <a:t>Aqui vale la regla general del Q&amp;A tecnico, que el docente debe anunciar antes de empezar: decir «no lo medimos» no penaliza si viene acompanado de como se mediria, por ejemplo «no medimos con volumen real porque el playground se reinicia, pero el plan de ejecucion pasa de recorrido completo a busqueda por indice, y la prueba seria cargar cincuenta mil citas y comparar los tiempos».</a:t>
-            </a:r>
-          </a:p>
-          <a:p>
-            <a:r>
-              <a:t>Inventar un numero, en cambio, se cae con la siguiente pregunta y cuesta mucho mas que admitir el limite.</a:t>
-            </a:r>
-          </a:p>
-        </p:txBody>
-      </p:sp>
-      <p:sp>
-        <p:nvSpPr>
-          <p:cNvPr id="4" name="Slide Number Placeholder 3"/>
-          <p:cNvSpPr>
-            <a:spLocks noGrp="1"/>
-          </p:cNvSpPr>
-          <p:nvPr>
-            <p:ph type="sldNum" idx="5" sz="quarter"/>
-          </p:nvPr>
-        </p:nvSpPr>
-        <p:spPr/>
-      </p:sp>
-    </p:spTree>
-  </p:cSld>
-  <p:clrMapOvr>
-    <a:masterClrMapping/>
-  </p:clrMapOvr>
-</p:notes>
-</file>
-
-<file path=ppt/notesSlides/notesSlide8.xml><?xml version="1.0" encoding="utf-8"?>
 <p:notes xmlns:a="http://schemas.openxmlformats.org/drawingml/2006/main" xmlns:p="http://schemas.openxmlformats.org/presentationml/2006/main" xmlns:r="http://schemas.openxmlformats.org/officeDocument/2006/relationships">
   <p:cSld>
     <p:spTree>
@@ -5395,7 +5334,7 @@
                 </a:solidFill>
                 <a:latin typeface="Calibri"/>
               </a:rPr>
-              <a:t>El reparto de los 5 a 8 minutos (1/3)</a:t>
+              <a:t>El reparto de los 5 a 8 minutos (1/2)</a:t>
             </a:r>
           </a:p>
         </p:txBody>
@@ -5499,6 +5438,22 @@
                 <a:latin typeface="Calibri"/>
               </a:rPr>
               <a:t>–   60 segundos para la optimizacion, con el plan de ejecucion antes y despues; 45 segundos para la integracion y el punto debil declarado; y 30 de cierre.</a:t>
+            </a:r>
+          </a:p>
+          <a:p>
+            <a:pPr>
+              <a:spcAft>
+                <a:spcPts val="800"/>
+              </a:spcAft>
+            </a:pPr>
+            <a:r>
+              <a:rPr sz="2000" b="0" i="0">
+                <a:solidFill>
+                  <a:srgbClr val="333333"/>
+                </a:solidFill>
+                <a:latin typeface="Calibri"/>
+              </a:rPr>
+              <a:t>–   Y conviene ser explicito sobre el formato, porque de eso depende como se prepara el estudiante: la Clase 15 se dicta el 16 de noviembre en la ultima sesion del semestre</a:t>
             </a:r>
           </a:p>
         </p:txBody>
@@ -5679,7 +5634,7 @@
                 </a:solidFill>
                 <a:latin typeface="Calibri"/>
               </a:rPr>
-              <a:t>El reparto de los 5 a 8 minutos (2/3)</a:t>
+              <a:t>El reparto de los 5 a 8 minutos (2/2)</a:t>
             </a:r>
           </a:p>
         </p:txBody>
@@ -5718,7 +5673,7 @@
                 </a:solidFill>
                 <a:latin typeface="Calibri"/>
               </a:rPr>
-              <a:t>–   Y conviene ser explicito sobre el formato, porque de eso depende como se prepara el estudiante: la Clase 15 se dicta el 16 de noviembre en la ultima sesion del semestre</a:t>
+              <a:t>–   Dedicada por completo a sustentaciones EN VIVO, con turnos consecutivos y preguntas del docente al cierre de cada uno.</a:t>
             </a:r>
           </a:p>
           <a:p>
@@ -5734,7 +5689,7 @@
                 </a:solidFill>
                 <a:latin typeface="Calibri"/>
               </a:rPr>
-              <a:t>–   Dedicada por completo a sustentaciones EN VIVO, con turnos consecutivos y preguntas del docente al cierre de cada uno.</a:t>
+              <a:t>–   No es clase autonoma y la defensa no se reemplaza por un video grabado, porque el Q&amp;A dirigido al azar es lo unico que permite verificar que el modelo y los procedimientos son de quien los presenta.</a:t>
             </a:r>
           </a:p>
           <a:p>
@@ -5750,7 +5705,7 @@
                 </a:solidFill>
                 <a:latin typeface="Calibri"/>
               </a:rPr>
-              <a:t>–   No es clase autonoma y la defensa no se reemplaza por un video grabado, porque el Q&amp;A dirigido al azar es lo unico que permite verificar que el modelo y los procedimientos son de quien los presenta.</a:t>
+              <a:t>–   Y el criterio de dominio es el mismo trabajando solo o en equipo autorizado: quien sustenta debe poder explicar cualquier parte en 60 segundos</a:t>
             </a:r>
           </a:p>
           <a:p>
@@ -5766,7 +5721,7 @@
                 </a:solidFill>
                 <a:latin typeface="Calibri"/>
               </a:rPr>
-              <a:t>–   El paquete, en cambio.</a:t>
+              <a:t>–   Y si hubo equipo, cualquier integrante debe poder hacerlo con cualquier parte, no solo con la suya, porque el Q&amp;A se dirige al azar y porque si solo una persona entiende el modelo el evaluador no tiene forma de atribuir el trabajo a los demas.</a:t>
             </a:r>
           </a:p>
         </p:txBody>
@@ -5947,7 +5902,7 @@
                 </a:solidFill>
                 <a:latin typeface="Calibri"/>
               </a:rPr>
-              <a:t>El reparto de los 5 a 8 minutos (3/3)</a:t>
+              <a:t>El Q&amp;A de modelado, con las respuestas listas (1/2)</a:t>
             </a:r>
           </a:p>
         </p:txBody>
@@ -5986,7 +5941,7 @@
                 </a:solidFill>
                 <a:latin typeface="Calibri"/>
               </a:rPr>
-              <a:t>–   Y el criterio de dominio es el mismo trabajando solo o en equipo autorizado: quien sustenta debe poder explicar cualquier parte en 60 segundos</a:t>
+              <a:t>–   «Por que nombre y apellido separados y no un solo campo nombre_completo?»: porque se necesita ordenar y buscar por apellido, y separar despues un campo unido es un trabajo sucio y lleno de errores con nombres compuestos.</a:t>
             </a:r>
           </a:p>
           <a:p>
@@ -6002,7 +5957,39 @@
                 </a:solidFill>
                 <a:latin typeface="Calibri"/>
               </a:rPr>
-              <a:t>–   Y si hubo equipo, cualquier integrante debe poder hacerlo con cualquier parte, no solo con la suya, porque el Q&amp;A se dirige al azar y porque si solo una persona entiende el modelo el evaluador no tiene forma de atribuir el trabajo a los demas.</a:t>
+              <a:t>–   «Que pasa si un dueno tiene dos mascotas llamadas Pelusa?»: nada, porque la identidad la da id_mascota y no el nombre</a:t>
+            </a:r>
+          </a:p>
+          <a:p>
+            <a:pPr>
+              <a:spcAft>
+                <a:spcPts val="800"/>
+              </a:spcAft>
+            </a:pPr>
+            <a:r>
+              <a:rPr sz="2000" b="0" i="0">
+                <a:solidFill>
+                  <a:srgbClr val="333333"/>
+                </a:solidFill>
+                <a:latin typeface="Calibri"/>
+              </a:rPr>
+              <a:t>–   Y si se quisiera prohibirlo habria que declarar UNIQUE (id_dueno, nombre), decision que el estudiante debe poder defender en cualquiera de los dos sentidos.</a:t>
+            </a:r>
+          </a:p>
+          <a:p>
+            <a:pPr>
+              <a:spcAft>
+                <a:spcPts val="800"/>
+              </a:spcAft>
+            </a:pPr>
+            <a:r>
+              <a:rPr sz="2000" b="0" i="0">
+                <a:solidFill>
+                  <a:srgbClr val="333333"/>
+                </a:solidFill>
+                <a:latin typeface="Calibri"/>
+              </a:rPr>
+              <a:t>–   «Por que no borran las citas canceladas?»: porque el historial de cancelaciones es informacion de negocio, ya que permite ver que dueno cancela siempre</a:t>
             </a:r>
           </a:p>
         </p:txBody>
@@ -6183,7 +6170,7 @@
                 </a:solidFill>
                 <a:latin typeface="Calibri"/>
               </a:rPr>
-              <a:t>El Q&amp;A de modelado, con las respuestas listas (1/2)</a:t>
+              <a:t>El Q&amp;A de modelado, con las respuestas listas (2/2)</a:t>
             </a:r>
           </a:p>
         </p:txBody>
@@ -6222,7 +6209,7 @@
                 </a:solidFill>
                 <a:latin typeface="Calibri"/>
               </a:rPr>
-              <a:t>–   «Por que nombre y apellido separados y no un solo campo nombre_completo?»: porque se necesita ordenar y buscar por apellido, y separar despues un campo unido es un trabajo sucio y lleno de errores con nombres compuestos.</a:t>
+              <a:t>–   Y porque borrar filas referenciadas por facturas rompe la integridad referencial; se usa borrado logico con un campo de estado.</a:t>
             </a:r>
           </a:p>
           <a:p>
@@ -6238,7 +6225,7 @@
                 </a:solidFill>
                 <a:latin typeface="Calibri"/>
               </a:rPr>
-              <a:t>–   «Que pasa si un dueno tiene dos mascotas llamadas Pelusa?»: nada, porque la identidad la da id_mascota y no el nombre</a:t>
+              <a:t>–   Y la pregunta que desarma a quien no midio: «cuanto mejoro esa consulta?».</a:t>
             </a:r>
           </a:p>
           <a:p>
@@ -6254,7 +6241,23 @@
                 </a:solidFill>
                 <a:latin typeface="Calibri"/>
               </a:rPr>
-              <a:t>–   Y si se quisiera prohibirlo habria que declarar UNIQUE (id_dueno, nombre), decision que el estudiante debe poder defender en cualquiera de los dos sentidos.</a:t>
+              <a:t>–   Una respuesta solida tiene 3 partes: la decision, la alternativa descartada y la razon concreta en VetCare, por ejemplo el volumen de citas o una regla del negocio.</a:t>
+            </a:r>
+          </a:p>
+          <a:p>
+            <a:pPr>
+              <a:spcAft>
+                <a:spcPts val="800"/>
+              </a:spcAft>
+            </a:pPr>
+            <a:r>
+              <a:rPr sz="2000" b="0" i="0">
+                <a:solidFill>
+                  <a:srgbClr val="333333"/>
+                </a:solidFill>
+                <a:latin typeface="Calibri"/>
+              </a:rPr>
+              <a:t>–   Error comun: responder con lo que hace la tabla en vez de por que existe; la pregunta de modelado siempre es un por que, no un que.</a:t>
             </a:r>
           </a:p>
         </p:txBody>
@@ -6435,7 +6438,7 @@
                 </a:solidFill>
                 <a:latin typeface="Calibri"/>
               </a:rPr>
-              <a:t>El Q&amp;A de modelado, con las respuestas listas (2/2)</a:t>
+              <a:t>El cierre del curso: conectar lo hecho con el trabajo real</a:t>
             </a:r>
           </a:p>
         </p:txBody>
@@ -6474,7 +6477,7 @@
                 </a:solidFill>
                 <a:latin typeface="Calibri"/>
               </a:rPr>
-              <a:t>–   «Por que no borran las citas canceladas?»: porque el historial de cancelaciones es informacion de negocio, ya que permite ver que dueno cancela siempre</a:t>
+              <a:t>–   El cierre del curso debe conectar lo hecho con el trabajo real, porque de eso depende que el estudiante conserve los scripts en vez de borrarlos al terminar el semestre.</a:t>
             </a:r>
           </a:p>
           <a:p>
@@ -6490,7 +6493,7 @@
                 </a:solidFill>
                 <a:latin typeface="Calibri"/>
               </a:rPr>
-              <a:t>–   Y porque borrar filas referenciadas por facturas rompe la integridad referencial; se usa borrado logico con un campo de estado.</a:t>
+              <a:t>–   Leer un plan de ejecucion y decidir si un indice sobra es una habilidad que se paga.</a:t>
             </a:r>
           </a:p>
           <a:p>
@@ -6506,7 +6509,23 @@
                 </a:solidFill>
                 <a:latin typeface="Calibri"/>
               </a:rPr>
-              <a:t>–   Y la pregunta que desarma a quien no midio: «cuanto mejoro esa consulta?».</a:t>
+              <a:t>–   El SQL que se escribio ahi es el mismo que corre en un servidor de produccion; lo que cambia en un entorno profesional es el volumen de datos y las consecuencias de un error, no la sintaxis.</a:t>
+            </a:r>
+          </a:p>
+          <a:p>
+            <a:pPr>
+              <a:spcAft>
+                <a:spcPts val="800"/>
+              </a:spcAft>
+            </a:pPr>
+            <a:r>
+              <a:rPr sz="2000" b="0" i="0">
+                <a:solidFill>
+                  <a:srgbClr val="333333"/>
+                </a:solidFill>
+                <a:latin typeface="Calibri"/>
+              </a:rPr>
+              <a:t>–   Y la autoevaluacion de la clase conviene pedirla con una consigna concreta en vez de una reflexion vaga: nombren la decision de modelado que mas les costo revertir y en que clase se dieron cuenta de que estaba mal.</a:t>
             </a:r>
           </a:p>
         </p:txBody>
@@ -6687,7 +6706,7 @@
                 </a:solidFill>
                 <a:latin typeface="Calibri"/>
               </a:rPr>
-              <a:t>El cierre del curso: conectar lo hecho con el trabajo real</a:t>
+              <a:t>Como se ordena la sesion de hoy</a:t>
             </a:r>
           </a:p>
         </p:txBody>
@@ -6726,7 +6745,25 @@
                 </a:solidFill>
                 <a:latin typeface="Calibri"/>
               </a:rPr>
-              <a:t>–   El cierre del curso debe conectar lo hecho con el trabajo real, porque de eso depende que el estudiante conserve los scripts en vez de borrarlos al terminar el semestre.</a:t>
+              <a:t>–   Sustentación </a:t>
+            </a:r>
+            <a:r>
+              <a:rPr sz="2000" b="1" i="0">
+                <a:solidFill>
+                  <a:srgbClr val="333333"/>
+                </a:solidFill>
+                <a:latin typeface="Calibri"/>
+              </a:rPr>
+              <a:t>en vivo</a:t>
+            </a:r>
+            <a:r>
+              <a:rPr sz="2000" b="0" i="0">
+                <a:solidFill>
+                  <a:srgbClr val="333333"/>
+                </a:solidFill>
+                <a:latin typeface="Calibri"/>
+              </a:rPr>
+              <a:t>, en este bloque: no se reemplaza por video grabado.</a:t>
             </a:r>
           </a:p>
           <a:p>
@@ -6742,7 +6779,25 @@
                 </a:solidFill>
                 <a:latin typeface="Calibri"/>
               </a:rPr>
-              <a:t>–   Leer un plan de ejecucion y decidir si un indice sobra es una habilidad que se paga.</a:t>
+              <a:t>–   Turnos de </a:t>
+            </a:r>
+            <a:r>
+              <a:rPr sz="2000" b="1" i="0">
+                <a:solidFill>
+                  <a:srgbClr val="333333"/>
+                </a:solidFill>
+                <a:latin typeface="Calibri"/>
+              </a:rPr>
+              <a:t>5–8 min de pitch + Q&amp;A</a:t>
+            </a:r>
+            <a:r>
+              <a:rPr sz="2000" b="0" i="0">
+                <a:solidFill>
+                  <a:srgbClr val="333333"/>
+                </a:solidFill>
+                <a:latin typeface="Calibri"/>
+              </a:rPr>
+              <a:t>; el orden se sortea al empezar.</a:t>
             </a:r>
           </a:p>
           <a:p>
@@ -6758,7 +6813,25 @@
                 </a:solidFill>
                 <a:latin typeface="Calibri"/>
               </a:rPr>
-              <a:t>–   El SQL que se escribio ahi es el mismo que corre en un servidor de produccion; lo que cambia en un entorno profesional es el volumen de datos y las consecuencias de un error, no la sintaxis.</a:t>
+              <a:t>–   En tu turno muestra una </a:t>
+            </a:r>
+            <a:r>
+              <a:rPr sz="2000" b="1" i="0">
+                <a:solidFill>
+                  <a:srgbClr val="333333"/>
+                </a:solidFill>
+                <a:latin typeface="Calibri"/>
+              </a:rPr>
+              <a:t>ejecución real</a:t>
+            </a:r>
+            <a:r>
+              <a:rPr sz="2000" b="0" i="0">
+                <a:solidFill>
+                  <a:srgbClr val="333333"/>
+                </a:solidFill>
+                <a:latin typeface="Calibri"/>
+              </a:rPr>
+              <a:t> (procedimiento OK + caso rechazado), no solo capturas.</a:t>
             </a:r>
           </a:p>
           <a:p>
@@ -6774,7 +6847,23 @@
                 </a:solidFill>
                 <a:latin typeface="Calibri"/>
               </a:rPr>
-              <a:t>–   Y la autoevaluacion de la clase conviene pedirla con una consigna concreta en vez de una reflexion vaga: nombren la decision de modelado que mas les costo revertir y en que clase se dieron cuenta de que estaba mal.</a:t>
+              <a:t>–   Mientras otros presentan, escuchas: el cierre del curso se hace con todo el grupo.</a:t>
+            </a:r>
+          </a:p>
+          <a:p>
+            <a:pPr>
+              <a:spcAft>
+                <a:spcPts val="800"/>
+              </a:spcAft>
+            </a:pPr>
+            <a:r>
+              <a:rPr sz="2000" b="0" i="0">
+                <a:solidFill>
+                  <a:srgbClr val="333333"/>
+                </a:solidFill>
+                <a:latin typeface="Calibri"/>
+              </a:rPr>
+              <a:t>–   Cada decisión se defiende con su porqué: la restricción, el rol, el índice o el procedimiento que la sostiene.</a:t>
             </a:r>
           </a:p>
         </p:txBody>
@@ -6849,13 +6938,13 @@
         <p:spPr>
           <a:xfrm>
             <a:off x="0" y="0"/>
-            <a:ext cx="12191695" cy="960120"/>
+            <a:ext cx="12191695" cy="164592"/>
           </a:xfrm>
           <a:prstGeom prst="rect">
             <a:avLst/>
           </a:prstGeom>
           <a:solidFill>
-            <a:srgbClr val="095292"/>
+            <a:srgbClr val="269CCB"/>
           </a:solidFill>
           <a:ln>
             <a:noFill/>
@@ -6883,49 +6972,30 @@
           </a:p>
         </p:txBody>
       </p:sp>
-      <p:sp>
-        <p:nvSpPr>
-          <p:cNvPr id="3" name="Rectangle 2"/>
-          <p:cNvSpPr/>
-          <p:nvPr/>
-        </p:nvSpPr>
-        <p:spPr>
-          <a:xfrm>
-            <a:off x="0" y="960120"/>
-            <a:ext cx="12191695" cy="41148"/>
-          </a:xfrm>
-          <a:prstGeom prst="rect">
-            <a:avLst/>
-          </a:prstGeom>
-          <a:solidFill>
-            <a:srgbClr val="FFD000"/>
-          </a:solidFill>
-          <a:ln>
-            <a:noFill/>
-          </a:ln>
-        </p:spPr>
-        <p:style>
-          <a:lnRef idx="1">
-            <a:schemeClr val="accent1"/>
-          </a:lnRef>
-          <a:fillRef idx="3">
-            <a:schemeClr val="accent1"/>
-          </a:fillRef>
-          <a:effectRef idx="2">
-            <a:schemeClr val="accent1"/>
-          </a:effectRef>
-          <a:fontRef idx="minor">
-            <a:schemeClr val="lt1"/>
-          </a:fontRef>
-        </p:style>
-        <p:txBody>
-          <a:bodyPr rtlCol="0" anchor="ctr"/>
-          <a:lstStyle/>
-          <a:p>
-            <a:pPr algn="ctr"/>
-          </a:p>
-        </p:txBody>
-      </p:sp>
+      <p:pic>
+        <p:nvPicPr>
+          <p:cNvPr id="3" name="Picture 2" descr="logo_uniajc_color.png"/>
+          <p:cNvPicPr>
+            <a:picLocks noChangeAspect="1"/>
+          </p:cNvPicPr>
+          <p:nvPr/>
+        </p:nvPicPr>
+        <p:blipFill>
+          <a:blip r:embed="rId2"/>
+          <a:stretch>
+            <a:fillRect/>
+          </a:stretch>
+        </p:blipFill>
+        <p:spPr>
+          <a:xfrm>
+            <a:off x="10271455" y="5998464"/>
+            <a:ext cx="1463040" cy="643233"/>
+          </a:xfrm>
+          <a:prstGeom prst="rect">
+            <a:avLst/>
+          </a:prstGeom>
+        </p:spPr>
+      </p:pic>
       <p:sp>
         <p:nvSpPr>
           <p:cNvPr id="4" name="TextBox 3"/>
@@ -6934,8 +7004,41 @@
         </p:nvSpPr>
         <p:spPr>
           <a:xfrm>
-            <a:off x="457200" y="164592"/>
-            <a:ext cx="11277295" cy="502920"/>
+            <a:off x="457200" y="1737360"/>
+            <a:ext cx="11277295" cy="1097280"/>
+          </a:xfrm>
+          <a:prstGeom prst="rect">
+            <a:avLst/>
+          </a:prstGeom>
+          <a:noFill/>
+        </p:spPr>
+        <p:txBody>
+          <a:bodyPr wrap="square" anchor="ctr"/>
+          <a:lstStyle/>
+          <a:p>
+            <a:pPr algn="ctr"/>
+            <a:r>
+              <a:rPr sz="3400" b="1" i="0">
+                <a:solidFill>
+                  <a:srgbClr val="095292"/>
+                </a:solidFill>
+                <a:latin typeface="Calibri"/>
+              </a:rPr>
+              <a:t>Clase 15 · cierre de VetCare DB</a:t>
+            </a:r>
+          </a:p>
+        </p:txBody>
+      </p:sp>
+      <p:sp>
+        <p:nvSpPr>
+          <p:cNvPr id="5" name="TextBox 4"/>
+          <p:cNvSpPr txBox="1"/>
+          <p:nvPr/>
+        </p:nvSpPr>
+        <p:spPr>
+          <a:xfrm>
+            <a:off x="457200" y="3017520"/>
+            <a:ext cx="11277295" cy="1645920"/>
           </a:xfrm>
           <a:prstGeom prst="rect">
             <a:avLst/>
@@ -6948,28 +7051,49 @@
           </a:bodyPr>
           <a:lstStyle/>
           <a:p>
-            <a:r>
-              <a:rPr sz="2600" b="1" i="0">
-                <a:solidFill>
-                  <a:srgbClr val="FFFFFF"/>
-                </a:solidFill>
-                <a:latin typeface="Calibri"/>
-              </a:rPr>
-              <a:t>Como se ordena la sesion de hoy</a:t>
-            </a:r>
-          </a:p>
-        </p:txBody>
-      </p:sp>
-      <p:sp>
-        <p:nvSpPr>
-          <p:cNvPr id="5" name="TextBox 4"/>
+            <a:pPr algn="ctr">
+              <a:spcAft>
+                <a:spcPts val="600"/>
+              </a:spcAft>
+            </a:pPr>
+            <a:r>
+              <a:rPr sz="1600" b="0" i="0">
+                <a:solidFill>
+                  <a:srgbClr val="333333"/>
+                </a:solidFill>
+                <a:latin typeface="Calibri"/>
+              </a:rPr>
+              <a:t>Sustentacion en vivo y entrega final del PI (20% Corte 3)</a:t>
+            </a:r>
+          </a:p>
+          <a:p>
+            <a:pPr algn="ctr">
+              <a:spcAft>
+                <a:spcPts val="600"/>
+              </a:spcAft>
+            </a:pPr>
+            <a:r>
+              <a:rPr sz="1600" b="0" i="0">
+                <a:solidFill>
+                  <a:srgbClr val="333333"/>
+                </a:solidFill>
+                <a:latin typeface="Calibri"/>
+              </a:rPr>
+              <a:t>Conserva el paquete (ER, DDL, roles, procs, triggers, optimizacion) como portafolio</a:t>
+            </a:r>
+          </a:p>
+        </p:txBody>
+      </p:sp>
+      <p:sp>
+        <p:nvSpPr>
+          <p:cNvPr id="6" name="TextBox 5"/>
           <p:cNvSpPr txBox="1"/>
           <p:nvPr/>
         </p:nvSpPr>
         <p:spPr>
           <a:xfrm>
-            <a:off x="457200" y="1170432"/>
-            <a:ext cx="11277295" cy="5230368"/>
+            <a:off x="457200" y="4754880"/>
+            <a:ext cx="11277295" cy="640080"/>
           </a:xfrm>
           <a:prstGeom prst="rect">
             <a:avLst/>
@@ -6982,156 +7106,15 @@
           </a:bodyPr>
           <a:lstStyle/>
           <a:p>
-            <a:pPr>
-              <a:spcAft>
-                <a:spcPts val="800"/>
-              </a:spcAft>
-            </a:pPr>
-            <a:r>
-              <a:rPr sz="2000" b="0" i="0">
-                <a:solidFill>
-                  <a:srgbClr val="333333"/>
-                </a:solidFill>
-                <a:latin typeface="Calibri"/>
-              </a:rPr>
-              <a:t>–   Sustentación </a:t>
-            </a:r>
+            <a:pPr algn="ctr"/>
             <a:r>
               <a:rPr sz="2000" b="1" i="0">
                 <a:solidFill>
-                  <a:srgbClr val="333333"/>
-                </a:solidFill>
-                <a:latin typeface="Calibri"/>
-              </a:rPr>
-              <a:t>en vivo</a:t>
-            </a:r>
-            <a:r>
-              <a:rPr sz="2000" b="0" i="0">
-                <a:solidFill>
-                  <a:srgbClr val="333333"/>
-                </a:solidFill>
-                <a:latin typeface="Calibri"/>
-              </a:rPr>
-              <a:t>, en este bloque: no se reemplaza por video grabado.</a:t>
-            </a:r>
-          </a:p>
-          <a:p>
-            <a:pPr>
-              <a:spcAft>
-                <a:spcPts val="800"/>
-              </a:spcAft>
-            </a:pPr>
-            <a:r>
-              <a:rPr sz="2000" b="0" i="0">
-                <a:solidFill>
-                  <a:srgbClr val="333333"/>
-                </a:solidFill>
-                <a:latin typeface="Calibri"/>
-              </a:rPr>
-              <a:t>–   Turnos de </a:t>
-            </a:r>
-            <a:r>
-              <a:rPr sz="2000" b="1" i="0">
-                <a:solidFill>
-                  <a:srgbClr val="333333"/>
-                </a:solidFill>
-                <a:latin typeface="Calibri"/>
-              </a:rPr>
-              <a:t>5–8 min de pitch + Q&amp;A</a:t>
-            </a:r>
-            <a:r>
-              <a:rPr sz="2000" b="0" i="0">
-                <a:solidFill>
-                  <a:srgbClr val="333333"/>
-                </a:solidFill>
-                <a:latin typeface="Calibri"/>
-              </a:rPr>
-              <a:t>; el orden se sortea al empezar.</a:t>
-            </a:r>
-          </a:p>
-          <a:p>
-            <a:pPr>
-              <a:spcAft>
-                <a:spcPts val="800"/>
-              </a:spcAft>
-            </a:pPr>
-            <a:r>
-              <a:rPr sz="2000" b="0" i="0">
-                <a:solidFill>
-                  <a:srgbClr val="333333"/>
-                </a:solidFill>
-                <a:latin typeface="Calibri"/>
-              </a:rPr>
-              <a:t>–   En tu turno muestra una </a:t>
-            </a:r>
-            <a:r>
-              <a:rPr sz="2000" b="1" i="0">
-                <a:solidFill>
-                  <a:srgbClr val="333333"/>
-                </a:solidFill>
-                <a:latin typeface="Calibri"/>
-              </a:rPr>
-              <a:t>ejecución real</a:t>
-            </a:r>
-            <a:r>
-              <a:rPr sz="2000" b="0" i="0">
-                <a:solidFill>
-                  <a:srgbClr val="333333"/>
-                </a:solidFill>
-                <a:latin typeface="Calibri"/>
-              </a:rPr>
-              <a:t> (procedimiento OK + caso rechazado), no solo capturas.</a:t>
-            </a:r>
-          </a:p>
-          <a:p>
-            <a:pPr>
-              <a:spcAft>
-                <a:spcPts val="800"/>
-              </a:spcAft>
-            </a:pPr>
-            <a:r>
-              <a:rPr sz="2000" b="0" i="0">
-                <a:solidFill>
-                  <a:srgbClr val="333333"/>
-                </a:solidFill>
-                <a:latin typeface="Calibri"/>
-              </a:rPr>
-              <a:t>–   Mientras otros presentan, escuchas: el cierre del curso se hace con todo el grupo.</a:t>
-            </a:r>
-          </a:p>
-        </p:txBody>
-      </p:sp>
-      <p:sp>
-        <p:nvSpPr>
-          <p:cNvPr id="6" name="TextBox 5"/>
-          <p:cNvSpPr txBox="1"/>
-          <p:nvPr/>
-        </p:nvSpPr>
-        <p:spPr>
-          <a:xfrm>
-            <a:off x="11185855" y="6473952"/>
-            <a:ext cx="640080" cy="274320"/>
-          </a:xfrm>
-          <a:prstGeom prst="rect">
-            <a:avLst/>
-          </a:prstGeom>
-          <a:noFill/>
-        </p:spPr>
-        <p:txBody>
-          <a:bodyPr wrap="square">
-            <a:spAutoFit/>
-          </a:bodyPr>
-          <a:lstStyle/>
-          <a:p>
-            <a:pPr algn="r"/>
-            <a:r>
-              <a:rPr sz="1100" b="0" i="0">
-                <a:solidFill>
-                  <a:srgbClr val="666666"/>
-                </a:solidFill>
-                <a:latin typeface="Calibri"/>
-              </a:rPr>
-              <a:t>19</a:t>
+                  <a:srgbClr val="269CCB"/>
+                </a:solidFill>
+                <a:latin typeface="Calibri"/>
+              </a:rPr>
+              <a:t>Sustentar es justificar decisiones, no describir tablas</a:t>
             </a:r>
           </a:p>
         </p:txBody>
@@ -7423,6 +7406,56 @@
               <a:t> y con preguntas: no se reemplaza por video grabado.</a:t>
             </a:r>
           </a:p>
+          <a:p>
+            <a:pPr>
+              <a:spcAft>
+                <a:spcPts val="800"/>
+              </a:spcAft>
+            </a:pPr>
+            <a:r>
+              <a:rPr sz="2000" b="0" i="0">
+                <a:solidFill>
+                  <a:srgbClr val="333333"/>
+                </a:solidFill>
+                <a:latin typeface="Calibri"/>
+              </a:rPr>
+              <a:t>–   Sustentar es justificar decisiones: por qué esta tabla, esta restricción, este índice.</a:t>
+            </a:r>
+          </a:p>
+          <a:p>
+            <a:pPr>
+              <a:spcAft>
+                <a:spcPts val="800"/>
+              </a:spcAft>
+            </a:pPr>
+            <a:r>
+              <a:rPr sz="2000" b="0" i="0">
+                <a:solidFill>
+                  <a:srgbClr val="333333"/>
+                </a:solidFill>
+                <a:latin typeface="Calibri"/>
+              </a:rPr>
+              <a:t>–   </a:t>
+            </a:r>
+            <a:r>
+              <a:rPr sz="2000" b="1" i="0">
+                <a:solidFill>
+                  <a:srgbClr val="333333"/>
+                </a:solidFill>
+                <a:latin typeface="Calibri"/>
+              </a:rPr>
+              <a:t>Ejes de hoy:</a:t>
+            </a:r>
+            <a:r>
+              <a:rPr sz="2000" b="0" i="0">
+                <a:solidFill>
+                  <a:srgbClr val="333333"/>
+                </a:solidFill>
+                <a:latin typeface="Calibri"/>
+              </a:rPr>
+              <a:t> Sustentar no es describir · Las cuatro preguntas de por que que se hacen casi siempre · La cuarta pregunta, la que mas se falla.</a:t>
+            </a:r>
+          </a:p>
         </p:txBody>
       </p:sp>
       <p:sp>
@@ -7456,222 +7489,6 @@
                 <a:latin typeface="Calibri"/>
               </a:rPr>
               <a:t>2</a:t>
-            </a:r>
-          </a:p>
-        </p:txBody>
-      </p:sp>
-    </p:spTree>
-  </p:cSld>
-  <p:clrMapOvr>
-    <a:masterClrMapping/>
-  </p:clrMapOvr>
-</p:sld>
-</file>
-
-<file path=ppt/slides/slide20.xml><?xml version="1.0" encoding="utf-8"?>
-<p:sld xmlns:a="http://schemas.openxmlformats.org/drawingml/2006/main" xmlns:p="http://schemas.openxmlformats.org/presentationml/2006/main" xmlns:r="http://schemas.openxmlformats.org/officeDocument/2006/relationships">
-  <p:cSld>
-    <p:bg>
-      <p:bgPr>
-        <a:solidFill>
-          <a:srgbClr val="FFFFFF"/>
-        </a:solidFill>
-        <a:effectLst/>
-      </p:bgPr>
-    </p:bg>
-    <p:spTree>
-      <p:nvGrpSpPr>
-        <p:cNvPr id="1" name=""/>
-        <p:cNvGrpSpPr/>
-        <p:nvPr/>
-      </p:nvGrpSpPr>
-      <p:grpSpPr/>
-      <p:sp>
-        <p:nvSpPr>
-          <p:cNvPr id="2" name="Rectangle 1"/>
-          <p:cNvSpPr/>
-          <p:nvPr/>
-        </p:nvSpPr>
-        <p:spPr>
-          <a:xfrm>
-            <a:off x="0" y="0"/>
-            <a:ext cx="12191695" cy="164592"/>
-          </a:xfrm>
-          <a:prstGeom prst="rect">
-            <a:avLst/>
-          </a:prstGeom>
-          <a:solidFill>
-            <a:srgbClr val="269CCB"/>
-          </a:solidFill>
-          <a:ln>
-            <a:noFill/>
-          </a:ln>
-        </p:spPr>
-        <p:style>
-          <a:lnRef idx="1">
-            <a:schemeClr val="accent1"/>
-          </a:lnRef>
-          <a:fillRef idx="3">
-            <a:schemeClr val="accent1"/>
-          </a:fillRef>
-          <a:effectRef idx="2">
-            <a:schemeClr val="accent1"/>
-          </a:effectRef>
-          <a:fontRef idx="minor">
-            <a:schemeClr val="lt1"/>
-          </a:fontRef>
-        </p:style>
-        <p:txBody>
-          <a:bodyPr rtlCol="0" anchor="ctr"/>
-          <a:lstStyle/>
-          <a:p>
-            <a:pPr algn="ctr"/>
-          </a:p>
-        </p:txBody>
-      </p:sp>
-      <p:pic>
-        <p:nvPicPr>
-          <p:cNvPr id="3" name="Picture 2" descr="logo_uniajc_color.png"/>
-          <p:cNvPicPr>
-            <a:picLocks noChangeAspect="1"/>
-          </p:cNvPicPr>
-          <p:nvPr/>
-        </p:nvPicPr>
-        <p:blipFill>
-          <a:blip r:embed="rId2"/>
-          <a:stretch>
-            <a:fillRect/>
-          </a:stretch>
-        </p:blipFill>
-        <p:spPr>
-          <a:xfrm>
-            <a:off x="10271455" y="5998464"/>
-            <a:ext cx="1463040" cy="643233"/>
-          </a:xfrm>
-          <a:prstGeom prst="rect">
-            <a:avLst/>
-          </a:prstGeom>
-        </p:spPr>
-      </p:pic>
-      <p:sp>
-        <p:nvSpPr>
-          <p:cNvPr id="4" name="TextBox 3"/>
-          <p:cNvSpPr txBox="1"/>
-          <p:nvPr/>
-        </p:nvSpPr>
-        <p:spPr>
-          <a:xfrm>
-            <a:off x="457200" y="1737360"/>
-            <a:ext cx="11277295" cy="1097280"/>
-          </a:xfrm>
-          <a:prstGeom prst="rect">
-            <a:avLst/>
-          </a:prstGeom>
-          <a:noFill/>
-        </p:spPr>
-        <p:txBody>
-          <a:bodyPr wrap="square" anchor="ctr"/>
-          <a:lstStyle/>
-          <a:p>
-            <a:pPr algn="ctr"/>
-            <a:r>
-              <a:rPr sz="3400" b="1" i="0">
-                <a:solidFill>
-                  <a:srgbClr val="095292"/>
-                </a:solidFill>
-                <a:latin typeface="Calibri"/>
-              </a:rPr>
-              <a:t>Clase 15 · cierre de VetCare DB</a:t>
-            </a:r>
-          </a:p>
-        </p:txBody>
-      </p:sp>
-      <p:sp>
-        <p:nvSpPr>
-          <p:cNvPr id="5" name="TextBox 4"/>
-          <p:cNvSpPr txBox="1"/>
-          <p:nvPr/>
-        </p:nvSpPr>
-        <p:spPr>
-          <a:xfrm>
-            <a:off x="457200" y="3017520"/>
-            <a:ext cx="11277295" cy="1645920"/>
-          </a:xfrm>
-          <a:prstGeom prst="rect">
-            <a:avLst/>
-          </a:prstGeom>
-          <a:noFill/>
-        </p:spPr>
-        <p:txBody>
-          <a:bodyPr wrap="square">
-            <a:spAutoFit/>
-          </a:bodyPr>
-          <a:lstStyle/>
-          <a:p>
-            <a:pPr algn="ctr">
-              <a:spcAft>
-                <a:spcPts val="600"/>
-              </a:spcAft>
-            </a:pPr>
-            <a:r>
-              <a:rPr sz="1600" b="0" i="0">
-                <a:solidFill>
-                  <a:srgbClr val="333333"/>
-                </a:solidFill>
-                <a:latin typeface="Calibri"/>
-              </a:rPr>
-              <a:t>Sustentacion en vivo y entrega final del PI (20% Corte 3)</a:t>
-            </a:r>
-          </a:p>
-          <a:p>
-            <a:pPr algn="ctr">
-              <a:spcAft>
-                <a:spcPts val="600"/>
-              </a:spcAft>
-            </a:pPr>
-            <a:r>
-              <a:rPr sz="1600" b="0" i="0">
-                <a:solidFill>
-                  <a:srgbClr val="333333"/>
-                </a:solidFill>
-                <a:latin typeface="Calibri"/>
-              </a:rPr>
-              <a:t>Conserva el paquete (ER, DDL, roles, procs, triggers, optimizacion) como portafolio</a:t>
-            </a:r>
-          </a:p>
-        </p:txBody>
-      </p:sp>
-      <p:sp>
-        <p:nvSpPr>
-          <p:cNvPr id="6" name="TextBox 5"/>
-          <p:cNvSpPr txBox="1"/>
-          <p:nvPr/>
-        </p:nvSpPr>
-        <p:spPr>
-          <a:xfrm>
-            <a:off x="457200" y="4754880"/>
-            <a:ext cx="11277295" cy="640080"/>
-          </a:xfrm>
-          <a:prstGeom prst="rect">
-            <a:avLst/>
-          </a:prstGeom>
-          <a:noFill/>
-        </p:spPr>
-        <p:txBody>
-          <a:bodyPr wrap="square">
-            <a:spAutoFit/>
-          </a:bodyPr>
-          <a:lstStyle/>
-          <a:p>
-            <a:pPr algn="ctr"/>
-            <a:r>
-              <a:rPr sz="2000" b="1" i="0">
-                <a:solidFill>
-                  <a:srgbClr val="269CCB"/>
-                </a:solidFill>
-                <a:latin typeface="Calibri"/>
-              </a:rPr>
-              <a:t>Sustentar es justificar decisiones, no describir tablas</a:t>
             </a:r>
           </a:p>
         </p:txBody>
@@ -8779,6 +8596,22 @@
                 <a:latin typeface="Calibri"/>
               </a:rPr>
               <a:t>–   La clase de hoy no trae tema nuevo: trae la teoria de como se comunica y se empaqueta un trabajo tecnico para que un tercero pueda evaluarlo, reproducirlo y usarlo sin hablar con quien lo hizo.</a:t>
+            </a:r>
+          </a:p>
+          <a:p>
+            <a:pPr>
+              <a:spcAft>
+                <a:spcPts val="800"/>
+              </a:spcAft>
+            </a:pPr>
+            <a:r>
+              <a:rPr sz="2000" b="0" i="0">
+                <a:solidFill>
+                  <a:srgbClr val="333333"/>
+                </a:solidFill>
+                <a:latin typeface="Calibri"/>
+              </a:rPr>
+              <a:t>–   Describir es decir que hay una tabla cita con una FK; sustentar es explicar por que la FK va en cita y no en mascota, y que pasaria si no estuviera.</a:t>
             </a:r>
           </a:p>
         </p:txBody>

--- a/Bases de Datos II/Clases/Clase 15 - Presentacion del proyecto y cierre/Presentacion.pptx
+++ b/Bases de Datos II/Clases/Clase 15 - Presentacion del proyecto y cierre/Presentacion.pptx
@@ -4249,13 +4249,13 @@
           <a:p>
             <a:pPr algn="ctr"/>
             <a:r>
-              <a:rPr sz="4000" b="1" i="0">
+              <a:rPr sz="3400" b="1" i="0">
                 <a:solidFill>
                   <a:srgbClr val="FFFFFF"/>
                 </a:solidFill>
                 <a:latin typeface="Calibri"/>
               </a:rPr>
-              <a:t>Presentacion PI · Cierre VetCare</a:t>
+              <a:t>Presentacion proyecto · Cierre la clínica</a:t>
             </a:r>
           </a:p>
         </p:txBody>
@@ -4333,7 +4333,7 @@
                 </a:solidFill>
                 <a:latin typeface="Calibri"/>
               </a:rPr>
-              <a:t>Sustentacion en vivo del PI · cierre del curso</a:t>
+              <a:t>Sustentacion en vivo del proyecto · cierre del curso</a:t>
             </a:r>
           </a:p>
         </p:txBody>
@@ -4601,7 +4601,7 @@
                 </a:solidFill>
                 <a:latin typeface="Calibri"/>
               </a:rPr>
-              <a:t>–   Los datos de prueba tampoco son triviales, porque con dos filas por tabla no se demuestra nada: el minimo razonable para VetCare es tres duenos</a:t>
+              <a:t>–   Los datos de prueba tampoco son triviales, porque con dos filas por tabla no se demuestra nada: el minimo razonable para la clínica es tres duenos</a:t>
             </a:r>
           </a:p>
           <a:p>
@@ -5389,7 +5389,7 @@
                 </a:solidFill>
                 <a:latin typeface="Calibri"/>
               </a:rPr>
-              <a:t>–   El reparto que funciona, y que es convencion y no regla dura, es: 45 segundos para el problema de la clinica Huellitas en lenguaje de negocio, sin una sola tabla en pantalla</a:t>
+              <a:t>–   El reparto que funciona, y que es convencion y no regla dura, es: 45 segundos para el problema de la clínica en lenguaje de negocio, sin una sola tabla en pantalla</a:t>
             </a:r>
           </a:p>
           <a:p>
@@ -5405,7 +5405,7 @@
                 </a:solidFill>
                 <a:latin typeface="Calibri"/>
               </a:rPr>
-              <a:t>–   90 segundos para el modelo, mostrando el ER y justificando dos decisiones y no las quince</a:t>
+              <a:t>–   90 segundos para el modelo, mostrando el ER y justificando dos decisiones y no las quince; 60 segundos para seguridad, con la matriz de roles y una frase sobre por que recepcion no ve el historial clinico</a:t>
             </a:r>
           </a:p>
           <a:p>
@@ -5421,23 +5421,7 @@
                 </a:solidFill>
                 <a:latin typeface="Calibri"/>
               </a:rPr>
-              <a:t>–   60 segundos para seguridad, con la matriz de roles y una frase sobre por que recepcion no ve el historial clinico; 90 segundos para la automatizacion, ejecutando un procedimiento con su caso valido y su caso invalido</a:t>
-            </a:r>
-          </a:p>
-          <a:p>
-            <a:pPr>
-              <a:spcAft>
-                <a:spcPts val="800"/>
-              </a:spcAft>
-            </a:pPr>
-            <a:r>
-              <a:rPr sz="2000" b="0" i="0">
-                <a:solidFill>
-                  <a:srgbClr val="333333"/>
-                </a:solidFill>
-                <a:latin typeface="Calibri"/>
-              </a:rPr>
-              <a:t>–   60 segundos para la optimizacion, con el plan de ejecucion antes y despues; 45 segundos para la integracion y el punto debil declarado; y 30 de cierre.</a:t>
+              <a:t>–   90 segundos para la automatizacion, ejecutando un procedimiento con su caso valido y su caso invalido; 60 segundos para la optimizacion, con el plan de ejecucion antes y despues; 45 segundos para la integracion y el punto debil declarado; y 30 de cierre.</a:t>
             </a:r>
           </a:p>
           <a:p>
@@ -6241,7 +6225,7 @@
                 </a:solidFill>
                 <a:latin typeface="Calibri"/>
               </a:rPr>
-              <a:t>–   Una respuesta solida tiene 3 partes: la decision, la alternativa descartada y la razon concreta en VetCare, por ejemplo el volumen de citas o una regla del negocio.</a:t>
+              <a:t>–   Una respuesta solida tiene 3 partes: la decision, la alternativa descartada y la razon concreta en la clínica, por ejemplo el volumen de citas o una regla del negocio.</a:t>
             </a:r>
           </a:p>
           <a:p>
@@ -7024,7 +7008,7 @@
                 </a:solidFill>
                 <a:latin typeface="Calibri"/>
               </a:rPr>
-              <a:t>Clase 15 · cierre de VetCare DB</a:t>
+              <a:t>Clase 15 · cierre de la base de la clínica</a:t>
             </a:r>
           </a:p>
         </p:txBody>
@@ -7063,7 +7047,7 @@
                 </a:solidFill>
                 <a:latin typeface="Calibri"/>
               </a:rPr>
-              <a:t>Sustentacion en vivo y entrega final del PI (20% Corte 3)</a:t>
+              <a:t>Sustentacion en vivo y entrega final del proyecto (20% Corte 3)</a:t>
             </a:r>
           </a:p>
           <a:p>
@@ -7260,7 +7244,7 @@
                 </a:solidFill>
                 <a:latin typeface="Calibri"/>
               </a:rPr>
-              <a:t>Encuadre de hoy · Objetivo PI</a:t>
+              <a:t>Encuadre de hoy · Objetivo proyecto</a:t>
             </a:r>
           </a:p>
         </p:txBody>
@@ -7308,7 +7292,7 @@
                 </a:solidFill>
                 <a:latin typeface="Calibri"/>
               </a:rPr>
-              <a:t>Hoy cerramos el PI:</a:t>
+              <a:t>Hoy cerramos el proyecto:</a:t>
             </a:r>
             <a:r>
               <a:rPr sz="2000" b="0" i="0">
@@ -7317,7 +7301,7 @@
                 </a:solidFill>
                 <a:latin typeface="Calibri"/>
               </a:rPr>
-              <a:t> Sustentacion en vivo y entrega final del PI (20% Corte 3)</a:t>
+              <a:t> Sustentacion en vivo y entrega final del proyecto (20% Corte 3)</a:t>
             </a:r>
           </a:p>
           <a:p>

--- a/Bases de Datos II/Clases/Clase 15 - Presentacion del proyecto y cierre/Presentacion.pptx
+++ b/Bases de Datos II/Clases/Clase 15 - Presentacion del proyecto y cierre/Presentacion.pptx
@@ -7,8 +7,8 @@
   <p:sldIdLst>
     <p:sldId id="256" r:id="rId7"/>
     <p:sldId id="257" r:id="rId8"/>
-    <p:sldId id="258" r:id="rId9"/>
-    <p:sldId id="259" r:id="rId10"/>
+    <p:sldId id="258" r:id="rId10"/>
+    <p:sldId id="259" r:id="rId11"/>
     <p:sldId id="260" r:id="rId12"/>
     <p:sldId id="261" r:id="rId13"/>
     <p:sldId id="262" r:id="rId14"/>
@@ -17,13 +17,6 @@
     <p:sldId id="265" r:id="rId17"/>
     <p:sldId id="266" r:id="rId18"/>
     <p:sldId id="267" r:id="rId19"/>
-    <p:sldId id="268" r:id="rId20"/>
-    <p:sldId id="269" r:id="rId21"/>
-    <p:sldId id="270" r:id="rId22"/>
-    <p:sldId id="271" r:id="rId23"/>
-    <p:sldId id="272" r:id="rId24"/>
-    <p:sldId id="273" r:id="rId25"/>
-    <p:sldId id="274" r:id="rId26"/>
   </p:sldIdLst>
   <p:sldSz cx="12191695" cy="6858000" type="screen4x3"/>
   <p:notesSz cx="6858000" cy="9144000"/>
@@ -520,7 +513,37 @@
           <a:lstStyle/>
           <a:p>
             <a:r>
-              <a:t>Eso convierte cada eleccion del ER en algo que se debe poder defender, y es exactamente lo que un evaluador (o un lider tecnico en una entrevista) va a probar con dos o tres preguntas bien elegidas.</a:t>
+              <a:t>TEXTO COMPLETO DE LA LÁMINA (se proyecta resumido):</a:t>
+            </a:r>
+          </a:p>
+          <a:p/>
+          <a:p>
+            <a:r>
+              <a:t>Hoy cerramos el proyecto: Sustentacion en vivo y entrega final del proyecto (20% Corte 3)</a:t>
+            </a:r>
+          </a:p>
+          <a:p/>
+          <a:p>
+            <a:r>
+              <a:t>Sesión síncrona de sustentaciones · Bloque 120 min · turnos consecutivos.</a:t>
+            </a:r>
+          </a:p>
+          <a:p/>
+          <a:p>
+            <a:r>
+              <a:t>La sustentación es en vivo y con preguntas: no se reemplaza por video grabado.</a:t>
+            </a:r>
+          </a:p>
+          <a:p/>
+          <a:p>
+            <a:r>
+              <a:t>Sustentar es justificar decisiones: por qué esta tabla, esta restricción, este índice.</a:t>
+            </a:r>
+          </a:p>
+          <a:p/>
+          <a:p>
+            <a:r>
+              <a:t>Ejes de hoy: Sustentar no es describir · Las cuatro preguntas de por que que se hacen casi siempre · La cuarta pregunta, la que mas se falla.</a:t>
             </a:r>
           </a:p>
         </p:txBody>
@@ -590,7 +613,57 @@
           <a:lstStyle/>
           <a:p>
             <a:r>
-              <a:t>Esa segunda mitad es la que distingue al estudiante que entendio, porque normalizar no es un dogma sino un punto de partida del que se sale con razones escritas.</a:t>
+              <a:t>DESARROLLO (para explicarlo, no se proyecta):</a:t>
+            </a:r>
+          </a:p>
+          <a:p>
+            <a:r>
+              <a:t>Sustentar una base de datos no es recorrer el diagrama entidad-relacion nombrando tablas.</a:t>
+            </a:r>
+          </a:p>
+          <a:p>
+            <a:r>
+              <a:t>Describir es decir que hay: «tenemos Dueno, Mascota, Cita, Veterinario, Insumo y Factura».</a:t>
+            </a:r>
+          </a:p>
+          <a:p>
+            <a:r>
+              <a:t>Sustentar es responder por que quedo asi y que alternativa se descarto.</a:t>
+            </a:r>
+          </a:p>
+          <a:p>
+            <a:r>
+              <a:t>La razon por la que esto importa mas en bases de datos que en casi cualquier otra parte del software es el costo de revertir: cambiar el texto de un boton cuesta minutos</a:t>
+            </a:r>
+          </a:p>
+          <a:p>
+            <a:r>
+              <a:t>Mientras que partir en dos una tabla que ya tiene cien mil filas y seis procedimientos apuntando a ella cuesta una migracion, una ventana de mantenimiento y el riesgo real de perder datos.</a:t>
+            </a:r>
+          </a:p>
+          <a:p>
+            <a:r>
+              <a:t>Una decision de modelado es, por definicion, una decision costosa de deshacer.</a:t>
+            </a:r>
+          </a:p>
+          <a:p>
+            <a:r>
+              <a:t>La clase de hoy no trae tema nuevo: trae la teoria de como se comunica y se empaqueta un trabajo tecnico para que un tercero pueda evaluarlo, reproducirlo y usarlo sin hablar con quien lo hizo.</a:t>
+            </a:r>
+          </a:p>
+          <a:p>
+            <a:r>
+              <a:t>Describir es decir que hay una tabla cita con una FK; sustentar es explicar por que la FK va en cita y no en mascota, y que pasaria si no estuviera.</a:t>
+            </a:r>
+          </a:p>
+          <a:p>
+            <a:r>
+              <a:t>NOTAS:</a:t>
+            </a:r>
+          </a:p>
+          <a:p>
+            <a:r>
+              <a:t>Eso convierte cada eleccion del ER en algo que se debe poder defender, y es exactamente lo que un evaluador (o un lider tecnico en una entrevista) va a probar con dos o tres preguntas bien elegidas.</a:t>
             </a:r>
           </a:p>
         </p:txBody>
@@ -660,17 +733,47 @@
           <a:lstStyle/>
           <a:p>
             <a:r>
-              <a:t>La cuarta pregunta merece parrafo propio porque es la que mas se falla: por que esa regla esta en un disparador y no en la aplicacion.</a:t>
-            </a:r>
-          </a:p>
-          <a:p>
-            <a:r>
-              <a:t>Si vive en la aplicacion, los dos ultimos caminos la evaden sin esfuerzo.</a:t>
-            </a:r>
-          </a:p>
-          <a:p>
-            <a:r>
-              <a:t>Por eso la convencion sana, que el estudiante puede citar como criterio propio, es reservarlos para invariantes de integridad y auditoria, y dejar el flujo de negocio en procedimientos que se invocan explicitamente.</a:t>
+              <a:t>DESARROLLO (para explicarlo, no se proyecta):</a:t>
+            </a:r>
+          </a:p>
+          <a:p>
+            <a:r>
+              <a:t>Hay cuatro preguntas de por que que se hacen casi siempre, y el estudiante debe llegar con las cuatro respondidas.</a:t>
+            </a:r>
+          </a:p>
+          <a:p>
+            <a:r>
+              <a:t>Por que esa normalizacion: la respuesta esperada es que el modelo esta en tercera forma normal, es decir que cada atributo depende de la clave completa y de nada mas, y por eso el telefono del dueno vive en la tabla Dueno y no repetido en cada fila de Mascota.</a:t>
+            </a:r>
+          </a:p>
+          <a:p>
+            <a:r>
+              <a:t>Y a continuacion se declara la desnormalizacion deliberada si existe: «guardamos el total en Factura aunque se pueda calcular sumando el detalle, porque el total es un valor historico que no debe cambiar si manana sube el precio del insumo».</a:t>
+            </a:r>
+          </a:p>
+          <a:p>
+            <a:r>
+              <a:t>Por que ese indice: la respuesta debe nombrar la consulta concreta que lo aprovecha, por ejemplo un indice sobre (id_veterinario</a:t>
+            </a:r>
+          </a:p>
+          <a:p>
+            <a:r>
+              <a:t>Fecha_hora) porque la busqueda de agenda filtra por veterinario y ordena por hora, y debe venir con la medicion de antes y despues.</a:t>
+            </a:r>
+          </a:p>
+          <a:p>
+            <a:r>
+              <a:t>Por que ese tipo de dato: por que la fecha de la cita es DATE o TIMESTAMP y no VARCHAR, y por que el telefono es VARCHAR y no numerico, porque con telefonos no se hace aritmetica y porque un tipo numerico pierde los ceros iniciales.</a:t>
+            </a:r>
+          </a:p>
+          <a:p>
+            <a:r>
+              <a:t>NOTAS:</a:t>
+            </a:r>
+          </a:p>
+          <a:p>
+            <a:r>
+              <a:t>Esa segunda mitad es la que distingue al estudiante que entendio, porque normalizar no es un dogma sino un punto de partida del que se sale con razones escritas.</a:t>
             </a:r>
           </a:p>
         </p:txBody>
@@ -740,12 +843,52 @@
           <a:lstStyle/>
           <a:p>
             <a:r>
-              <a:t>Esa es la definicion operativa y es la unica prueba que importa; el docente puede aplicarla literalmente abriendo el ZIP en un playground limpio y ejecutando.</a:t>
-            </a:r>
-          </a:p>
-          <a:p>
-            <a:r>
-              <a:t>Sobre esa base, cuatro detalles rompen la reproducibilidad y son los que el docente debe buscar primero al abrir el paquete.</a:t>
+              <a:t>DESARROLLO (para explicarlo, no se proyecta):</a:t>
+            </a:r>
+          </a:p>
+          <a:p>
+            <a:r>
+              <a:t>Un disparador, o trigger, es un bloque de codigo que el motor ejecuta automaticamente cuando ocurre un evento sobre una tabla, sin que nadie lo invoque.</a:t>
+            </a:r>
+          </a:p>
+          <a:p>
+            <a:r>
+              <a:t>El argumento a favor, y el unico que vale en una sustentacion, es la cobertura: el disparador se ejecuta no importa quien escriba.</a:t>
+            </a:r>
+          </a:p>
+          <a:p>
+            <a:r>
+              <a:t>Si la regla «el stock de un insumo nunca queda negativo» vive en el disparador, se cumple cuando escribe la aplicacion, cuando escribe un script de carga masiva y cuando alguien se conecta con un cliente SQL a corregir un dato a mano.</a:t>
+            </a:r>
+          </a:p>
+          <a:p>
+            <a:r>
+              <a:t>Lo mismo aplica al disparador de auditoria de precios: si se quiere saber quien cambio el precio de una vacuna, ese registro tiene que escribirse dentro de la base, porque quien edita a mano no lo va a escribir por cortesia.</a:t>
+            </a:r>
+          </a:p>
+          <a:p>
+            <a:r>
+              <a:t>NOTAS:</a:t>
+            </a:r>
+          </a:p>
+          <a:p>
+            <a:r>
+              <a:t>La cuarta pregunta merece parrafo propio porque es la que mas se falla: por que esa regla esta en un disparador y no en la aplicacion.</a:t>
+            </a:r>
+          </a:p>
+          <a:p>
+            <a:r>
+              <a:t>Si vive en la aplicacion, los dos ultimos caminos la evaden sin esfuerzo.</a:t>
+            </a:r>
+          </a:p>
+          <a:p>
+            <a:r>
+              <a:t>Y hay que dar tambien el contra-argumento, porque un evaluador atento lo va a pedir: los disparadores son logica invisible, no aparecen en el codigo de la aplicacion, sorprenden a quien depura, y se disparan en cascada si uno modifica una tabla que a su vez tiene otro disparador.</a:t>
+            </a:r>
+          </a:p>
+          <a:p>
+            <a:r>
+              <a:t>Por eso la convencion sana, que el estudiante puede citar como criterio propio, es reservarlos para invariantes de integridad y auditoria, y dejar el flujo de negocio en procedimientos que se invocan explicitamente.</a:t>
             </a:r>
           </a:p>
         </p:txBody>
@@ -815,22 +958,87 @@
           <a:lstStyle/>
           <a:p>
             <a:r>
-              <a:t>Lo que si hay que exigir dentro del turno es la ejecucion real: que el estudiante corra el procedimiento en el playground, con su caso valido y su caso invalido, en vez de proyectar capturas fijas.</a:t>
-            </a:r>
-          </a:p>
-          <a:p>
-            <a:r>
-              <a:t>El paquete, en cambio.</a:t>
-            </a:r>
-          </a:p>
-          <a:p>
-            <a:r>
-              <a:t>Fuera de la lamina (habla de la practica): Lo que si hay que exigir dentro del turno es la ejecucion real: que el estudiante corra el procedimiento en el playground, con su caso valido y su caso invalido, en vez de proyectar capturas fijas, porque una consulta ejecutandose delante del evaluador es la evidencia mas dificil de fingir y la mas rapida de calificar.</a:t>
-            </a:r>
-          </a:p>
-          <a:p>
-            <a:r>
-              <a:t>Fuera de la lamina (habla de la practica): El paquete, en cambio, se sube al modulo de Proyectos de PostgreSQL en el navegador ANTES del turno: quien llega a subir archivos consume su propio tiempo de sustentacion.</a:t>
+              <a:t>DESARROLLO (para explicarlo, no se proyecta):</a:t>
+            </a:r>
+          </a:p>
+          <a:p>
+            <a:r>
+              <a:t>Un proyecto de base de datos es reproducible si un tercero, con solo el archivo comprimido y sin hablar con el autor, obtiene la misma base funcionando.</a:t>
+            </a:r>
+          </a:p>
+          <a:p>
+            <a:r>
+              <a:t>La estructura que la garantiza es una carpeta con archivos numerados en el orden exacto de ejecucion: 00_LEEME.txt, 01_ddl.sql, 02_datos_prueba.sql, 03_roles.sql, 04_procedimientos.sql, 05_funciones.sql, 06_triggers.sql, 07_optimizacion.sql y 08_pruebas.sql.</a:t>
+            </a:r>
+          </a:p>
+          <a:p>
+            <a:r>
+              <a:t>El orden no es estetico, es una dependencia real: una tabla con clave foranea no se puede crear antes que la tabla a la que apunta, y un disparador no compila si su tabla todavia no existe.</a:t>
+            </a:r>
+          </a:p>
+          <a:p>
+            <a:r>
+              <a:t>Los datos de prueba tampoco son triviales, porque con dos filas por tabla no se demuestra nada: el minimo razonable para la clínica es tres duenos</a:t>
+            </a:r>
+          </a:p>
+          <a:p>
+            <a:r>
+              <a:t>Cinco mascotas, dos veterinarios, diez citas repartidas en varios dias, cinco insumos con stock y tres facturas con su detalle</a:t>
+            </a:r>
+          </a:p>
+          <a:p>
+            <a:r>
+              <a:t>Incluyendo deliberadamente los casos borde que los procedimientos deben rechazar, es decir una mascota marcada como inactiva y un insumo con stock en uno, porque sin esas dos filas el estudiante no puede demostrar su manejo de errores.</a:t>
+            </a:r>
+          </a:p>
+          <a:p>
+            <a:r>
+              <a:t>Uno, no declarar motor y version: el SQL no es un solo idioma, porque una columna autoincremental se escribe SERIAL en PostgreSQL</a:t>
+            </a:r>
+          </a:p>
+          <a:p>
+            <a:r>
+              <a:t>AUTO_INCREMENT en MySQL e IDENTITY o una secuencia en Oracle y SQL Server, el texto variable es VARCHAR en unos y VARCHAR2 en Oracle</a:t>
+            </a:r>
+          </a:p>
+          <a:p>
+            <a:r>
+              <a:t>Y la fecha actual es NOW() en unos y SYSDATE en Oracle; un script sin la linea «probado en PostgreSQL 15 en DB Fiddle» o «probado en Oracle 19c en Oracle Live SQL» obliga al evaluador a adivinar, y si adivina mal falla en la primera sentencia.</a:t>
+            </a:r>
+          </a:p>
+          <a:p>
+            <a:r>
+              <a:t>Dos, scripts que asumen un estado previo: quien ejecuta debe poder empezar desde una base vacia.</a:t>
+            </a:r>
+          </a:p>
+          <a:p>
+            <a:r>
+              <a:t>Tres, falta de idempotencia: si el script no se puede correr dos veces porque falla al encontrar que la tabla ya existe, se pierde tiempo en cada intento, y anteponer DROP TABLE IF EXISTS en orden inverso al de creacion lo resuelve.</a:t>
+            </a:r>
+          </a:p>
+          <a:p>
+            <a:r>
+              <a:t>Cuatro, el LEEME ausente o inutil; uno que sirve tiene cuatro cosas y cabe en media pagina: motor y version exactos, el orden de ejecucion de los archivos</a:t>
+            </a:r>
+          </a:p>
+          <a:p>
+            <a:r>
+              <a:t>Como verificar que quedo bien (una consulta cuyo resultado se conoce, por ejemplo SELECT COUNT(*) FROM cita devolviendo 10) y las limitaciones conocidas.</a:t>
+            </a:r>
+          </a:p>
+          <a:p>
+            <a:r>
+              <a:t>NOTAS:</a:t>
+            </a:r>
+          </a:p>
+          <a:p>
+            <a:r>
+              <a:t>Esa es la definicion operativa y es la unica prueba que importa; el docente puede aplicarla literalmente abriendo el ZIP en un playground limpio y ejecutando.</a:t>
+            </a:r>
+          </a:p>
+          <a:p>
+            <a:r>
+              <a:t>Sobre esa base, cuatro detalles rompen la reproducibilidad y son los que el docente debe buscar primero al abrir el paquete.</a:t>
             </a:r>
           </a:p>
         </p:txBody>
@@ -900,17 +1108,72 @@
           <a:lstStyle/>
           <a:p>
             <a:r>
-              <a:t>El Q&amp;A sobre modelado tiene preguntas que se repiten, y conviene que el docente tenga las respuestas listas para poder calificarlas y para poder formularlas.</a:t>
-            </a:r>
-          </a:p>
-          <a:p>
-            <a:r>
-              <a:t>Aqui vale la regla general del Q&amp;A tecnico, que el docente debe anunciar antes de empezar: decir «no lo medimos» no penaliza si viene acompanado de como se mediria, por ejemplo «no medimos con volumen real porque el playground se reinicia, pero el plan de ejecucion pasa de recorrido completo a busqueda por indice, y la prueba seria cargar cincuenta mil citas y comparar los tiempos».</a:t>
-            </a:r>
-          </a:p>
-          <a:p>
-            <a:r>
-              <a:t>Inventar un numero, en cambio, se cae con la siguiente pregunta y cuesta mucho mas que admitir el limite.</a:t>
+              <a:t>DESARROLLO (para explicarlo, no se proyecta):</a:t>
+            </a:r>
+          </a:p>
+          <a:p>
+            <a:r>
+              <a:t>La sustentacion dura de 5 a 8 minutos y ese limite obliga a decidir que se deja fuera.</a:t>
+            </a:r>
+          </a:p>
+          <a:p>
+            <a:r>
+              <a:t>El reparto que funciona, y que es convencion y no regla dura, es: 45 segundos para el problema de la clínica en lenguaje de negocio, sin una sola tabla en pantalla</a:t>
+            </a:r>
+          </a:p>
+          <a:p>
+            <a:r>
+              <a:t>90 segundos para el modelo, mostrando el ER y justificando dos decisiones y no las quince; 60 segundos para seguridad, con la matriz de roles y una frase sobre por que recepcion no ve el historial clinico</a:t>
+            </a:r>
+          </a:p>
+          <a:p>
+            <a:r>
+              <a:t>90 segundos para la automatizacion, ejecutando un procedimiento con su caso valido y su caso invalido; 60 segundos para la optimizacion, con el plan de ejecucion antes y despues; 45 segundos para la integracion y el punto debil declarado; y 30 de cierre.</a:t>
+            </a:r>
+          </a:p>
+          <a:p>
+            <a:r>
+              <a:t>No es clase autonoma y la defensa no se reemplaza por un video grabado, porque el Q&amp;A dirigido al azar es lo unico que permite verificar que el modelo y los procedimientos son de quien los presenta.</a:t>
+            </a:r>
+          </a:p>
+          <a:p>
+            <a:r>
+              <a:t>Y el criterio de dominio es el mismo trabajando solo o en equipo autorizado: quien sustenta debe poder explicar cualquier parte en 60 segundos</a:t>
+            </a:r>
+          </a:p>
+          <a:p>
+            <a:r>
+              <a:t>Y si hubo equipo, cualquier integrante debe poder hacerlo con cualquier parte, no solo con la suya, porque el Q&amp;A se dirige al azar y porque si solo una persona entiende el modelo el evaluador no tiene forma de atribuir el trabajo a los demas.</a:t>
+            </a:r>
+          </a:p>
+          <a:p>
+            <a:r>
+              <a:t>NOTAS:</a:t>
+            </a:r>
+          </a:p>
+          <a:p>
+            <a:r>
+              <a:t>Y conviene ser explicito sobre el formato, porque de eso depende como se prepara el estudiante: la Clase 15 se dicta el 16 de noviembre en la ultima sesion del semestre, dedicada por completo a sustentaciones EN VIVO, con turnos consecutivos y preguntas del docente al cierre de cada uno.</a:t>
+            </a:r>
+          </a:p>
+          <a:p>
+            <a:r>
+              <a:t>Lo que si hay que exigir dentro del turno es la ejecucion real: que el estudiante corra el procedimiento en el playground, con su caso valido y su caso invalido, en vez de proyectar capturas fijas.</a:t>
+            </a:r>
+          </a:p>
+          <a:p>
+            <a:r>
+              <a:t>El paquete, en cambio.</a:t>
+            </a:r>
+          </a:p>
+          <a:p>
+            <a:r>
+              <a:t>Fuera de la lamina (habla de la practica): Lo que si hay que exigir dentro del turno es la ejecucion real: que el estudiante corra el procedimiento en el playground, con su caso valido y su caso invalido, en vez de proyectar capturas fijas, porque una consulta ejecutandose delante del evaluador es la evidencia mas dificil de fingir y la mas rapida de calificar.</a:t>
+            </a:r>
+          </a:p>
+          <a:p>
+            <a:r>
+              <a:t>Fuera de la lamina (habla de la practica): El paquete, en cambio, se sube al modulo de Proyectos de PostgreSQL en el navegador ANTES del turno: quien llega a subir archivos consume su propio tiempo de sustentacion.</a:t>
             </a:r>
           </a:p>
         </p:txBody>
@@ -980,6 +1243,166 @@
           <a:lstStyle/>
           <a:p>
             <a:r>
+              <a:t>DESARROLLO (para explicarlo, no se proyecta):</a:t>
+            </a:r>
+          </a:p>
+          <a:p>
+            <a:r>
+              <a:t>«Por que nombre y apellido separados y no un solo campo nombre_completo?»: porque se necesita ordenar y buscar por apellido, y separar despues un campo unido es un trabajo sucio y lleno de errores con nombres compuestos.</a:t>
+            </a:r>
+          </a:p>
+          <a:p>
+            <a:r>
+              <a:t>«Que pasa si un dueno tiene dos mascotas llamadas Pelusa?»: nada, porque la identidad la da id_mascota y no el nombre</a:t>
+            </a:r>
+          </a:p>
+          <a:p>
+            <a:r>
+              <a:t>Y si se quisiera prohibirlo habria que declarar UNIQUE (id_dueno, nombre), decision que el estudiante debe poder defender en cualquiera de los dos sentidos.</a:t>
+            </a:r>
+          </a:p>
+          <a:p>
+            <a:r>
+              <a:t>«Por que no borran las citas canceladas?»: porque el historial de cancelaciones es informacion de negocio, ya que permite ver que dueno cancela siempre</a:t>
+            </a:r>
+          </a:p>
+          <a:p>
+            <a:r>
+              <a:t>Y porque borrar filas referenciadas por facturas rompe la integridad referencial; se usa borrado logico con un campo de estado.</a:t>
+            </a:r>
+          </a:p>
+          <a:p>
+            <a:r>
+              <a:t>Y la pregunta que desarma a quien no midio: «cuanto mejoro esa consulta?».</a:t>
+            </a:r>
+          </a:p>
+          <a:p>
+            <a:r>
+              <a:t>Una respuesta solida tiene 3 partes: la decision, la alternativa descartada y la razon concreta en la clínica, por ejemplo el volumen de citas o una regla del negocio.</a:t>
+            </a:r>
+          </a:p>
+          <a:p>
+            <a:r>
+              <a:t>Error comun: responder con lo que hace la tabla en vez de por que existe; la pregunta de modelado siempre es un por que, no un que.</a:t>
+            </a:r>
+          </a:p>
+          <a:p>
+            <a:r>
+              <a:t>NOTAS:</a:t>
+            </a:r>
+          </a:p>
+          <a:p>
+            <a:r>
+              <a:t>El Q&amp;A sobre modelado tiene preguntas que se repiten, y conviene que el docente tenga las respuestas listas para poder calificarlas y para poder formularlas.</a:t>
+            </a:r>
+          </a:p>
+          <a:p>
+            <a:r>
+              <a:t>Aqui vale la regla general del Q&amp;A tecnico, que el docente debe anunciar antes de empezar: decir «no lo medimos» no penaliza si viene acompanado de como se mediria, por ejemplo «no medimos con volumen real porque el playground se reinicia, pero el plan de ejecucion pasa de recorrido completo a busqueda por indice, y la prueba seria cargar cincuenta mil citas y comparar los tiempos».</a:t>
+            </a:r>
+          </a:p>
+          <a:p>
+            <a:r>
+              <a:t>Inventar un numero, en cambio, se cae con la siguiente pregunta y cuesta mucho mas que admitir el limite.</a:t>
+            </a:r>
+          </a:p>
+        </p:txBody>
+      </p:sp>
+      <p:sp>
+        <p:nvSpPr>
+          <p:cNvPr id="4" name="Slide Number Placeholder 3"/>
+          <p:cNvSpPr>
+            <a:spLocks noGrp="1"/>
+          </p:cNvSpPr>
+          <p:nvPr>
+            <p:ph type="sldNum" idx="5" sz="quarter"/>
+          </p:nvPr>
+        </p:nvSpPr>
+        <p:spPr/>
+      </p:sp>
+    </p:spTree>
+  </p:cSld>
+  <p:clrMapOvr>
+    <a:masterClrMapping/>
+  </p:clrMapOvr>
+</p:notes>
+</file>
+
+<file path=ppt/notesSlides/notesSlide8.xml><?xml version="1.0" encoding="utf-8"?>
+<p:notes xmlns:a="http://schemas.openxmlformats.org/drawingml/2006/main" xmlns:p="http://schemas.openxmlformats.org/presentationml/2006/main" xmlns:r="http://schemas.openxmlformats.org/officeDocument/2006/relationships">
+  <p:cSld>
+    <p:spTree>
+      <p:nvGrpSpPr>
+        <p:cNvPr id="1" name=""/>
+        <p:cNvGrpSpPr/>
+        <p:nvPr/>
+      </p:nvGrpSpPr>
+      <p:grpSpPr>
+        <a:xfrm>
+          <a:off x="0" y="0"/>
+          <a:ext cx="0" cy="0"/>
+          <a:chOff x="0" y="0"/>
+          <a:chExt cx="0" cy="0"/>
+        </a:xfrm>
+      </p:grpSpPr>
+      <p:sp>
+        <p:nvSpPr>
+          <p:cNvPr id="2" name="Slide Image Placeholder 1"/>
+          <p:cNvSpPr>
+            <a:spLocks noGrp="1"/>
+          </p:cNvSpPr>
+          <p:nvPr>
+            <p:ph type="sldImg" idx="2"/>
+          </p:nvPr>
+        </p:nvSpPr>
+        <p:spPr/>
+      </p:sp>
+      <p:sp>
+        <p:nvSpPr>
+          <p:cNvPr id="3" name="Notes Placeholder 2"/>
+          <p:cNvSpPr>
+            <a:spLocks noGrp="1"/>
+          </p:cNvSpPr>
+          <p:nvPr>
+            <p:ph type="body" idx="3" sz="quarter"/>
+          </p:nvPr>
+        </p:nvSpPr>
+        <p:spPr/>
+        <p:txBody>
+          <a:bodyPr/>
+          <a:lstStyle/>
+          <a:p>
+            <a:r>
+              <a:t>DESARROLLO (para explicarlo, no se proyecta):</a:t>
+            </a:r>
+          </a:p>
+          <a:p>
+            <a:r>
+              <a:t>El cierre del curso debe conectar lo hecho con el trabajo real, porque de eso depende que el estudiante conserve los scripts en vez de borrarlos al terminar el semestre.</a:t>
+            </a:r>
+          </a:p>
+          <a:p>
+            <a:r>
+              <a:t>Leer un plan de ejecucion y decidir si un indice sobra es una habilidad que se paga.</a:t>
+            </a:r>
+          </a:p>
+          <a:p>
+            <a:r>
+              <a:t>El SQL que se escribio ahi es el mismo que corre en un servidor de produccion; lo que cambia en un entorno profesional es el volumen de datos y las consecuencias de un error, no la sintaxis.</a:t>
+            </a:r>
+          </a:p>
+          <a:p>
+            <a:r>
+              <a:t>Y la autoevaluacion de la clase conviene pedirla con una consigna concreta en vez de una reflexion vaga: nombren la decision de modelado que mas les costo revertir y en que clase se dieron cuenta de que estaba mal.</a:t>
+            </a:r>
+          </a:p>
+          <a:p>
+            <a:r>
+              <a:t>NOTAS:</a:t>
+            </a:r>
+          </a:p>
+          <a:p>
+            <a:r>
               <a:t>Lo que el estudiante produjo (un ER justificado, un DDL con restricciones declarativas, una matriz de privilegios, procedimientos con manejo de errores, disparadores de auditoria, un analisis de plan de ejecucion y un contrato de operaciones) es literalmente el contenido de las tareas de un desarrollador de base de datos o de un administrador junior en su primer ano de trabajo.</a:t>
             </a:r>
           </a:p>
@@ -991,6 +1414,106 @@
           <a:p>
             <a:r>
               <a:t>Esa respuesta es la que mejor predice si aprendieron, y ademas le da al docente material real para ajustar el curso el proximo semestre.</a:t>
+            </a:r>
+          </a:p>
+        </p:txBody>
+      </p:sp>
+      <p:sp>
+        <p:nvSpPr>
+          <p:cNvPr id="4" name="Slide Number Placeholder 3"/>
+          <p:cNvSpPr>
+            <a:spLocks noGrp="1"/>
+          </p:cNvSpPr>
+          <p:nvPr>
+            <p:ph type="sldNum" idx="5" sz="quarter"/>
+          </p:nvPr>
+        </p:nvSpPr>
+        <p:spPr/>
+      </p:sp>
+    </p:spTree>
+  </p:cSld>
+  <p:clrMapOvr>
+    <a:masterClrMapping/>
+  </p:clrMapOvr>
+</p:notes>
+</file>
+
+<file path=ppt/notesSlides/notesSlide9.xml><?xml version="1.0" encoding="utf-8"?>
+<p:notes xmlns:a="http://schemas.openxmlformats.org/drawingml/2006/main" xmlns:p="http://schemas.openxmlformats.org/presentationml/2006/main" xmlns:r="http://schemas.openxmlformats.org/officeDocument/2006/relationships">
+  <p:cSld>
+    <p:spTree>
+      <p:nvGrpSpPr>
+        <p:cNvPr id="1" name=""/>
+        <p:cNvGrpSpPr/>
+        <p:nvPr/>
+      </p:nvGrpSpPr>
+      <p:grpSpPr>
+        <a:xfrm>
+          <a:off x="0" y="0"/>
+          <a:ext cx="0" cy="0"/>
+          <a:chOff x="0" y="0"/>
+          <a:chExt cx="0" cy="0"/>
+        </a:xfrm>
+      </p:grpSpPr>
+      <p:sp>
+        <p:nvSpPr>
+          <p:cNvPr id="2" name="Slide Image Placeholder 1"/>
+          <p:cNvSpPr>
+            <a:spLocks noGrp="1"/>
+          </p:cNvSpPr>
+          <p:nvPr>
+            <p:ph type="sldImg" idx="2"/>
+          </p:nvPr>
+        </p:nvSpPr>
+        <p:spPr/>
+      </p:sp>
+      <p:sp>
+        <p:nvSpPr>
+          <p:cNvPr id="3" name="Notes Placeholder 2"/>
+          <p:cNvSpPr>
+            <a:spLocks noGrp="1"/>
+          </p:cNvSpPr>
+          <p:nvPr>
+            <p:ph type="body" idx="3" sz="quarter"/>
+          </p:nvPr>
+        </p:nvSpPr>
+        <p:spPr/>
+        <p:txBody>
+          <a:bodyPr/>
+          <a:lstStyle/>
+          <a:p>
+            <a:r>
+              <a:t>TEXTO COMPLETO DE LA LÁMINA (se proyecta resumido):</a:t>
+            </a:r>
+          </a:p>
+          <a:p/>
+          <a:p>
+            <a:r>
+              <a:t>Sustentación en vivo, en este bloque: no se reemplaza por video grabado.</a:t>
+            </a:r>
+          </a:p>
+          <a:p/>
+          <a:p>
+            <a:r>
+              <a:t>Turnos de 5–8 min de pitch + Q&amp;A; el orden se sortea al empezar.</a:t>
+            </a:r>
+          </a:p>
+          <a:p/>
+          <a:p>
+            <a:r>
+              <a:t>En tu turno muestra una ejecución real (procedimiento OK + caso rechazado), no solo capturas.</a:t>
+            </a:r>
+          </a:p>
+          <a:p/>
+          <a:p>
+            <a:r>
+              <a:t>Mientras otros presentan, escuchas: el cierre del curso se hace con todo el grupo.</a:t>
+            </a:r>
+          </a:p>
+          <a:p/>
+          <a:p>
+            <a:r>
+              <a:t>Cada decisión se defiende con su porqué: la restricción, el rol, el índice o el procedimiento que la sostiene.</a:t>
             </a:r>
           </a:p>
         </p:txBody>
@@ -4514,21 +5037,125 @@
                 </a:solidFill>
                 <a:latin typeface="Calibri"/>
               </a:rPr>
-              <a:t>Reproducible: un tercero llega a la misma base sin hablar con el autor (1/3)</a:t>
-            </a:r>
-          </a:p>
-        </p:txBody>
-      </p:sp>
-      <p:sp>
-        <p:nvSpPr>
-          <p:cNvPr id="5" name="TextBox 4"/>
+              <a:t>El cierre del curso: conectar lo hecho con el trabajo real</a:t>
+            </a:r>
+          </a:p>
+        </p:txBody>
+      </p:sp>
+      <p:sp>
+        <p:nvSpPr>
+          <p:cNvPr id="5" name="Rounded Rectangle 4"/>
+          <p:cNvSpPr/>
+          <p:nvPr/>
+        </p:nvSpPr>
+        <p:spPr>
+          <a:xfrm>
+            <a:off x="5797149" y="1573813"/>
+            <a:ext cx="6010497" cy="4057845"/>
+          </a:xfrm>
+          <a:prstGeom prst="roundRect">
+            <a:avLst>
+              <a:gd name="adj" fmla="val 4000"/>
+            </a:avLst>
+          </a:prstGeom>
+          <a:solidFill>
+            <a:srgbClr val="E8EEF4"/>
+          </a:solidFill>
+          <a:ln>
+            <a:noFill/>
+          </a:ln>
+        </p:spPr>
+        <p:style>
+          <a:lnRef idx="1">
+            <a:schemeClr val="accent1"/>
+          </a:lnRef>
+          <a:fillRef idx="3">
+            <a:schemeClr val="accent1"/>
+          </a:fillRef>
+          <a:effectRef idx="2">
+            <a:schemeClr val="accent1"/>
+          </a:effectRef>
+          <a:fontRef idx="minor">
+            <a:schemeClr val="lt1"/>
+          </a:fontRef>
+        </p:style>
+        <p:txBody>
+          <a:bodyPr rtlCol="0" anchor="ctr"/>
+          <a:lstStyle/>
+          <a:p>
+            <a:pPr algn="ctr"/>
+          </a:p>
+        </p:txBody>
+      </p:sp>
+      <p:pic>
+        <p:nvPicPr>
+          <p:cNvPr id="6" name="Picture 5" descr="database-engineer-working-on-server-code.jpg"/>
+          <p:cNvPicPr>
+            <a:picLocks noChangeAspect="1"/>
+          </p:cNvPicPr>
+          <p:nvPr/>
+        </p:nvPicPr>
+        <p:blipFill>
+          <a:blip r:embed="rId2"/>
+          <a:stretch>
+            <a:fillRect/>
+          </a:stretch>
+        </p:blipFill>
+        <p:spPr>
+          <a:xfrm>
+            <a:off x="5870301" y="1646965"/>
+            <a:ext cx="5864193" cy="3911541"/>
+          </a:xfrm>
+          <a:prstGeom prst="rect">
+            <a:avLst/>
+          </a:prstGeom>
+        </p:spPr>
+      </p:pic>
+      <p:sp>
+        <p:nvSpPr>
+          <p:cNvPr id="7" name="TextBox 6"/>
           <p:cNvSpPr txBox="1"/>
           <p:nvPr/>
         </p:nvSpPr>
         <p:spPr>
           <a:xfrm>
-            <a:off x="457200" y="1170432"/>
-            <a:ext cx="11277295" cy="5230368"/>
+            <a:off x="5870301" y="5961888"/>
+            <a:ext cx="5864193" cy="320040"/>
+          </a:xfrm>
+          <a:prstGeom prst="rect">
+            <a:avLst/>
+          </a:prstGeom>
+          <a:noFill/>
+        </p:spPr>
+        <p:txBody>
+          <a:bodyPr wrap="square">
+            <a:spAutoFit/>
+          </a:bodyPr>
+          <a:lstStyle/>
+          <a:p>
+            <a:pPr algn="ctr"/>
+            <a:r>
+              <a:rPr sz="1100" b="0" i="1">
+                <a:solidFill>
+                  <a:srgbClr val="666666"/>
+                </a:solidFill>
+                <a:latin typeface="Calibri"/>
+              </a:rPr>
+              <a:t>Foto: Muhammed Ensar · Pexels</a:t>
+            </a:r>
+          </a:p>
+        </p:txBody>
+      </p:sp>
+      <p:sp>
+        <p:nvSpPr>
+          <p:cNvPr id="8" name="TextBox 7"/>
+          <p:cNvSpPr txBox="1"/>
+          <p:nvPr/>
+        </p:nvSpPr>
+        <p:spPr>
+          <a:xfrm>
+            <a:off x="457200" y="1353312"/>
+            <a:ext cx="5093061" cy="5047488"/>
           </a:xfrm>
           <a:prstGeom prst="rect">
             <a:avLst/>
@@ -4553,7 +5180,7 @@
                 </a:solidFill>
                 <a:latin typeface="Calibri"/>
               </a:rPr>
-              <a:t>–   Un proyecto de base de datos es reproducible si un tercero, con solo el archivo comprimido y sin hablar con el autor, obtiene la misma base funcionando.</a:t>
+              <a:t>–   El cierre del curso debe conectar lo hecho con el trabajo real.</a:t>
             </a:r>
           </a:p>
           <a:p>
@@ -4569,7 +5196,7 @@
                 </a:solidFill>
                 <a:latin typeface="Calibri"/>
               </a:rPr>
-              <a:t>–   La estructura que la garantiza es una carpeta con archivos numerados en el orden exacto de ejecucion: 00_LEEME.txt, 01_ddl.sql, 02_datos_prueba.sql, 03_roles.sql, 04_procedimientos.sql, 05_funciones.sql, 06_triggers.sql, 07_optimizacion.sql y 08_pruebas.sql.</a:t>
+              <a:t>–   Leer un plan de ejecucion y decidir si un indice sobra es una habilidad que se paga.</a:t>
             </a:r>
           </a:p>
           <a:p>
@@ -4585,7 +5212,7 @@
                 </a:solidFill>
                 <a:latin typeface="Calibri"/>
               </a:rPr>
-              <a:t>–   El orden no es estetico, es una dependencia real: una tabla con clave foranea no se puede crear antes que la tabla a la que apunta, y un disparador no compila si su tabla todavia no existe.</a:t>
+              <a:t>–   El SQL que se escribio ahi es el mismo que corre en un servidor de produccion.</a:t>
             </a:r>
           </a:p>
           <a:p>
@@ -4601,30 +5228,14 @@
                 </a:solidFill>
                 <a:latin typeface="Calibri"/>
               </a:rPr>
-              <a:t>–   Los datos de prueba tampoco son triviales, porque con dos filas por tabla no se demuestra nada: el minimo razonable para la clínica es tres duenos</a:t>
-            </a:r>
-          </a:p>
-          <a:p>
-            <a:pPr>
-              <a:spcAft>
-                <a:spcPts val="800"/>
-              </a:spcAft>
-            </a:pPr>
-            <a:r>
-              <a:rPr sz="2000" b="0" i="0">
-                <a:solidFill>
-                  <a:srgbClr val="333333"/>
-                </a:solidFill>
-                <a:latin typeface="Calibri"/>
-              </a:rPr>
-              <a:t>–   Cinco mascotas, dos veterinarios, diez citas repartidas en varios dias, cinco insumos con stock y tres facturas con su detalle</a:t>
-            </a:r>
-          </a:p>
-        </p:txBody>
-      </p:sp>
-      <p:sp>
-        <p:nvSpPr>
-          <p:cNvPr id="6" name="TextBox 5"/>
+              <a:t>–   Y la autoevaluacion de la clase conviene pedirla con una consigna concreta en vez de una reflexion vaga.</a:t>
+            </a:r>
+          </a:p>
+        </p:txBody>
+      </p:sp>
+      <p:sp>
+        <p:nvSpPr>
+          <p:cNvPr id="9" name="TextBox 8"/>
           <p:cNvSpPr txBox="1"/>
           <p:nvPr/>
         </p:nvSpPr>
@@ -4798,21 +5409,125 @@
                 </a:solidFill>
                 <a:latin typeface="Calibri"/>
               </a:rPr>
-              <a:t>Reproducible: un tercero llega a la misma base sin hablar con el autor (2/3)</a:t>
-            </a:r>
-          </a:p>
-        </p:txBody>
-      </p:sp>
-      <p:sp>
-        <p:nvSpPr>
-          <p:cNvPr id="5" name="TextBox 4"/>
+              <a:t>Como se ordena la sesion de hoy</a:t>
+            </a:r>
+          </a:p>
+        </p:txBody>
+      </p:sp>
+      <p:sp>
+        <p:nvSpPr>
+          <p:cNvPr id="5" name="Rounded Rectangle 4"/>
+          <p:cNvSpPr/>
+          <p:nvPr/>
+        </p:nvSpPr>
+        <p:spPr>
+          <a:xfrm>
+            <a:off x="5797149" y="1570693"/>
+            <a:ext cx="6010497" cy="4064084"/>
+          </a:xfrm>
+          <a:prstGeom prst="roundRect">
+            <a:avLst>
+              <a:gd name="adj" fmla="val 4000"/>
+            </a:avLst>
+          </a:prstGeom>
+          <a:solidFill>
+            <a:srgbClr val="E8EEF4"/>
+          </a:solidFill>
+          <a:ln>
+            <a:noFill/>
+          </a:ln>
+        </p:spPr>
+        <p:style>
+          <a:lnRef idx="1">
+            <a:schemeClr val="accent1"/>
+          </a:lnRef>
+          <a:fillRef idx="3">
+            <a:schemeClr val="accent1"/>
+          </a:fillRef>
+          <a:effectRef idx="2">
+            <a:schemeClr val="accent1"/>
+          </a:effectRef>
+          <a:fontRef idx="minor">
+            <a:schemeClr val="lt1"/>
+          </a:fontRef>
+        </p:style>
+        <p:txBody>
+          <a:bodyPr rtlCol="0" anchor="ctr"/>
+          <a:lstStyle/>
+          <a:p>
+            <a:pPr algn="ctr"/>
+          </a:p>
+        </p:txBody>
+      </p:sp>
+      <p:pic>
+        <p:nvPicPr>
+          <p:cNvPr id="6" name="Picture 5" descr="presentation-schedule-agenda.jpg"/>
+          <p:cNvPicPr>
+            <a:picLocks noChangeAspect="1"/>
+          </p:cNvPicPr>
+          <p:nvPr/>
+        </p:nvPicPr>
+        <p:blipFill>
+          <a:blip r:embed="rId2"/>
+          <a:stretch>
+            <a:fillRect/>
+          </a:stretch>
+        </p:blipFill>
+        <p:spPr>
+          <a:xfrm>
+            <a:off x="5870301" y="1643845"/>
+            <a:ext cx="5864193" cy="3917780"/>
+          </a:xfrm>
+          <a:prstGeom prst="rect">
+            <a:avLst/>
+          </a:prstGeom>
+        </p:spPr>
+      </p:pic>
+      <p:sp>
+        <p:nvSpPr>
+          <p:cNvPr id="7" name="TextBox 6"/>
           <p:cNvSpPr txBox="1"/>
           <p:nvPr/>
         </p:nvSpPr>
         <p:spPr>
           <a:xfrm>
-            <a:off x="457200" y="1170432"/>
-            <a:ext cx="11277295" cy="5230368"/>
+            <a:off x="5870301" y="5961888"/>
+            <a:ext cx="5864193" cy="320040"/>
+          </a:xfrm>
+          <a:prstGeom prst="rect">
+            <a:avLst/>
+          </a:prstGeom>
+          <a:noFill/>
+        </p:spPr>
+        <p:txBody>
+          <a:bodyPr wrap="square">
+            <a:spAutoFit/>
+          </a:bodyPr>
+          <a:lstStyle/>
+          <a:p>
+            <a:pPr algn="ctr"/>
+            <a:r>
+              <a:rPr sz="1100" b="0" i="1">
+                <a:solidFill>
+                  <a:srgbClr val="666666"/>
+                </a:solidFill>
+                <a:latin typeface="Calibri"/>
+              </a:rPr>
+              <a:t>Foto: Pavel Danilyuk · Pexels</a:t>
+            </a:r>
+          </a:p>
+        </p:txBody>
+      </p:sp>
+      <p:sp>
+        <p:nvSpPr>
+          <p:cNvPr id="8" name="TextBox 7"/>
+          <p:cNvSpPr txBox="1"/>
+          <p:nvPr/>
+        </p:nvSpPr>
+        <p:spPr>
+          <a:xfrm>
+            <a:off x="457200" y="1353312"/>
+            <a:ext cx="5093061" cy="5047488"/>
           </a:xfrm>
           <a:prstGeom prst="rect">
             <a:avLst/>
@@ -4837,7 +5552,25 @@
                 </a:solidFill>
                 <a:latin typeface="Calibri"/>
               </a:rPr>
-              <a:t>–   Incluyendo deliberadamente los casos borde que los procedimientos deben rechazar, es decir una mascota marcada como inactiva y un insumo con stock en uno, porque sin esas dos filas el estudiante no puede demostrar su manejo de errores.</a:t>
+              <a:t>–   Sustentación </a:t>
+            </a:r>
+            <a:r>
+              <a:rPr sz="2000" b="1" i="0">
+                <a:solidFill>
+                  <a:srgbClr val="333333"/>
+                </a:solidFill>
+                <a:latin typeface="Calibri"/>
+              </a:rPr>
+              <a:t>en vivo</a:t>
+            </a:r>
+            <a:r>
+              <a:rPr sz="2000" b="0" i="0">
+                <a:solidFill>
+                  <a:srgbClr val="333333"/>
+                </a:solidFill>
+                <a:latin typeface="Calibri"/>
+              </a:rPr>
+              <a:t>, en este bloque: no se reemplaza por video grabado.</a:t>
             </a:r>
           </a:p>
           <a:p>
@@ -4853,7 +5586,25 @@
                 </a:solidFill>
                 <a:latin typeface="Calibri"/>
               </a:rPr>
-              <a:t>–   Uno, no declarar motor y version: el SQL no es un solo idioma, porque una columna autoincremental se escribe SERIAL en PostgreSQL</a:t>
+              <a:t>–   Turnos de </a:t>
+            </a:r>
+            <a:r>
+              <a:rPr sz="2000" b="1" i="0">
+                <a:solidFill>
+                  <a:srgbClr val="333333"/>
+                </a:solidFill>
+                <a:latin typeface="Calibri"/>
+              </a:rPr>
+              <a:t>5–8 min de pitch + Q&amp;A</a:t>
+            </a:r>
+            <a:r>
+              <a:rPr sz="2000" b="0" i="0">
+                <a:solidFill>
+                  <a:srgbClr val="333333"/>
+                </a:solidFill>
+                <a:latin typeface="Calibri"/>
+              </a:rPr>
+              <a:t>; el orden se sortea al empezar.</a:t>
             </a:r>
           </a:p>
           <a:p>
@@ -4869,7 +5620,25 @@
                 </a:solidFill>
                 <a:latin typeface="Calibri"/>
               </a:rPr>
-              <a:t>–   AUTO_INCREMENT en MySQL e IDENTITY o una secuencia en Oracle y SQL Server, el texto variable es VARCHAR en unos y VARCHAR2 en Oracle</a:t>
+              <a:t>–   En tu turno muestra una </a:t>
+            </a:r>
+            <a:r>
+              <a:rPr sz="2000" b="1" i="0">
+                <a:solidFill>
+                  <a:srgbClr val="333333"/>
+                </a:solidFill>
+                <a:latin typeface="Calibri"/>
+              </a:rPr>
+              <a:t>ejecución real</a:t>
+            </a:r>
+            <a:r>
+              <a:rPr sz="2000" b="0" i="0">
+                <a:solidFill>
+                  <a:srgbClr val="333333"/>
+                </a:solidFill>
+                <a:latin typeface="Calibri"/>
+              </a:rPr>
+              <a:t> (procedimiento OK + caso rechazado), no solo capturas.</a:t>
             </a:r>
           </a:p>
           <a:p>
@@ -4885,30 +5654,14 @@
                 </a:solidFill>
                 <a:latin typeface="Calibri"/>
               </a:rPr>
-              <a:t>–   Y la fecha actual es NOW() en unos y SYSDATE en Oracle; un script sin la linea «probado en PostgreSQL 15 en DB Fiddle» o «probado en Oracle 19c en Oracle Live SQL» obliga al evaluador a adivinar, y si adivina mal falla en la primera sentencia.</a:t>
-            </a:r>
-          </a:p>
-          <a:p>
-            <a:pPr>
-              <a:spcAft>
-                <a:spcPts val="800"/>
-              </a:spcAft>
-            </a:pPr>
-            <a:r>
-              <a:rPr sz="2000" b="0" i="0">
-                <a:solidFill>
-                  <a:srgbClr val="333333"/>
-                </a:solidFill>
-                <a:latin typeface="Calibri"/>
-              </a:rPr>
-              <a:t>–   Dos, scripts que asumen un estado previo: quien ejecuta debe poder empezar desde una base vacia.</a:t>
-            </a:r>
-          </a:p>
-        </p:txBody>
-      </p:sp>
-      <p:sp>
-        <p:nvSpPr>
-          <p:cNvPr id="6" name="TextBox 5"/>
+              <a:t>–   Mientras otros presentan, escuchas: el cierre del curso se hace con todo el grupo.</a:t>
+            </a:r>
+          </a:p>
+        </p:txBody>
+      </p:sp>
+      <p:sp>
+        <p:nvSpPr>
+          <p:cNvPr id="9" name="TextBox 8"/>
           <p:cNvSpPr txBox="1"/>
           <p:nvPr/>
         </p:nvSpPr>
@@ -4976,1952 +5729,6 @@
         <p:spPr>
           <a:xfrm>
             <a:off x="0" y="0"/>
-            <a:ext cx="12191695" cy="960120"/>
-          </a:xfrm>
-          <a:prstGeom prst="rect">
-            <a:avLst/>
-          </a:prstGeom>
-          <a:solidFill>
-            <a:srgbClr val="095292"/>
-          </a:solidFill>
-          <a:ln>
-            <a:noFill/>
-          </a:ln>
-        </p:spPr>
-        <p:style>
-          <a:lnRef idx="1">
-            <a:schemeClr val="accent1"/>
-          </a:lnRef>
-          <a:fillRef idx="3">
-            <a:schemeClr val="accent1"/>
-          </a:fillRef>
-          <a:effectRef idx="2">
-            <a:schemeClr val="accent1"/>
-          </a:effectRef>
-          <a:fontRef idx="minor">
-            <a:schemeClr val="lt1"/>
-          </a:fontRef>
-        </p:style>
-        <p:txBody>
-          <a:bodyPr rtlCol="0" anchor="ctr"/>
-          <a:lstStyle/>
-          <a:p>
-            <a:pPr algn="ctr"/>
-          </a:p>
-        </p:txBody>
-      </p:sp>
-      <p:sp>
-        <p:nvSpPr>
-          <p:cNvPr id="3" name="Rectangle 2"/>
-          <p:cNvSpPr/>
-          <p:nvPr/>
-        </p:nvSpPr>
-        <p:spPr>
-          <a:xfrm>
-            <a:off x="0" y="960120"/>
-            <a:ext cx="12191695" cy="41148"/>
-          </a:xfrm>
-          <a:prstGeom prst="rect">
-            <a:avLst/>
-          </a:prstGeom>
-          <a:solidFill>
-            <a:srgbClr val="FFD000"/>
-          </a:solidFill>
-          <a:ln>
-            <a:noFill/>
-          </a:ln>
-        </p:spPr>
-        <p:style>
-          <a:lnRef idx="1">
-            <a:schemeClr val="accent1"/>
-          </a:lnRef>
-          <a:fillRef idx="3">
-            <a:schemeClr val="accent1"/>
-          </a:fillRef>
-          <a:effectRef idx="2">
-            <a:schemeClr val="accent1"/>
-          </a:effectRef>
-          <a:fontRef idx="minor">
-            <a:schemeClr val="lt1"/>
-          </a:fontRef>
-        </p:style>
-        <p:txBody>
-          <a:bodyPr rtlCol="0" anchor="ctr"/>
-          <a:lstStyle/>
-          <a:p>
-            <a:pPr algn="ctr"/>
-          </a:p>
-        </p:txBody>
-      </p:sp>
-      <p:sp>
-        <p:nvSpPr>
-          <p:cNvPr id="4" name="TextBox 3"/>
-          <p:cNvSpPr txBox="1"/>
-          <p:nvPr/>
-        </p:nvSpPr>
-        <p:spPr>
-          <a:xfrm>
-            <a:off x="457200" y="164592"/>
-            <a:ext cx="11277295" cy="502920"/>
-          </a:xfrm>
-          <a:prstGeom prst="rect">
-            <a:avLst/>
-          </a:prstGeom>
-          <a:noFill/>
-        </p:spPr>
-        <p:txBody>
-          <a:bodyPr wrap="square">
-            <a:spAutoFit/>
-          </a:bodyPr>
-          <a:lstStyle/>
-          <a:p>
-            <a:r>
-              <a:rPr sz="2600" b="1" i="0">
-                <a:solidFill>
-                  <a:srgbClr val="FFFFFF"/>
-                </a:solidFill>
-                <a:latin typeface="Calibri"/>
-              </a:rPr>
-              <a:t>Reproducible: un tercero llega a la misma base sin hablar con el autor (3/3)</a:t>
-            </a:r>
-          </a:p>
-        </p:txBody>
-      </p:sp>
-      <p:sp>
-        <p:nvSpPr>
-          <p:cNvPr id="5" name="TextBox 4"/>
-          <p:cNvSpPr txBox="1"/>
-          <p:nvPr/>
-        </p:nvSpPr>
-        <p:spPr>
-          <a:xfrm>
-            <a:off x="457200" y="1170432"/>
-            <a:ext cx="11277295" cy="5230368"/>
-          </a:xfrm>
-          <a:prstGeom prst="rect">
-            <a:avLst/>
-          </a:prstGeom>
-          <a:noFill/>
-        </p:spPr>
-        <p:txBody>
-          <a:bodyPr wrap="square">
-            <a:spAutoFit/>
-          </a:bodyPr>
-          <a:lstStyle/>
-          <a:p>
-            <a:pPr>
-              <a:spcAft>
-                <a:spcPts val="800"/>
-              </a:spcAft>
-            </a:pPr>
-            <a:r>
-              <a:rPr sz="2000" b="0" i="0">
-                <a:solidFill>
-                  <a:srgbClr val="333333"/>
-                </a:solidFill>
-                <a:latin typeface="Calibri"/>
-              </a:rPr>
-              <a:t>–   Tres, falta de idempotencia: si el script no se puede correr dos veces porque falla al encontrar que la tabla ya existe, se pierde tiempo en cada intento, y anteponer DROP TABLE IF EXISTS en orden inverso al de creacion lo resuelve.</a:t>
-            </a:r>
-          </a:p>
-          <a:p>
-            <a:pPr>
-              <a:spcAft>
-                <a:spcPts val="800"/>
-              </a:spcAft>
-            </a:pPr>
-            <a:r>
-              <a:rPr sz="2000" b="0" i="0">
-                <a:solidFill>
-                  <a:srgbClr val="333333"/>
-                </a:solidFill>
-                <a:latin typeface="Calibri"/>
-              </a:rPr>
-              <a:t>–   Cuatro, el LEEME ausente o inutil; uno que sirve tiene cuatro cosas y cabe en media pagina: motor y version exactos, el orden de ejecucion de los archivos</a:t>
-            </a:r>
-          </a:p>
-          <a:p>
-            <a:pPr>
-              <a:spcAft>
-                <a:spcPts val="800"/>
-              </a:spcAft>
-            </a:pPr>
-            <a:r>
-              <a:rPr sz="2000" b="0" i="0">
-                <a:solidFill>
-                  <a:srgbClr val="333333"/>
-                </a:solidFill>
-                <a:latin typeface="Calibri"/>
-              </a:rPr>
-              <a:t>–   Como verificar que quedo bien (una consulta cuyo resultado se conoce, por ejemplo SELECT COUNT(*) FROM cita devolviendo 10) y las limitaciones conocidas.</a:t>
-            </a:r>
-          </a:p>
-        </p:txBody>
-      </p:sp>
-      <p:sp>
-        <p:nvSpPr>
-          <p:cNvPr id="6" name="TextBox 5"/>
-          <p:cNvSpPr txBox="1"/>
-          <p:nvPr/>
-        </p:nvSpPr>
-        <p:spPr>
-          <a:xfrm>
-            <a:off x="11185855" y="6473952"/>
-            <a:ext cx="640080" cy="274320"/>
-          </a:xfrm>
-          <a:prstGeom prst="rect">
-            <a:avLst/>
-          </a:prstGeom>
-          <a:noFill/>
-        </p:spPr>
-        <p:txBody>
-          <a:bodyPr wrap="square">
-            <a:spAutoFit/>
-          </a:bodyPr>
-          <a:lstStyle/>
-          <a:p>
-            <a:pPr algn="r"/>
-            <a:r>
-              <a:rPr sz="1100" b="0" i="0">
-                <a:solidFill>
-                  <a:srgbClr val="666666"/>
-                </a:solidFill>
-                <a:latin typeface="Calibri"/>
-              </a:rPr>
-              <a:t>12</a:t>
-            </a:r>
-          </a:p>
-        </p:txBody>
-      </p:sp>
-    </p:spTree>
-  </p:cSld>
-  <p:clrMapOvr>
-    <a:masterClrMapping/>
-  </p:clrMapOvr>
-</p:sld>
-</file>
-
-<file path=ppt/slides/slide13.xml><?xml version="1.0" encoding="utf-8"?>
-<p:sld xmlns:a="http://schemas.openxmlformats.org/drawingml/2006/main" xmlns:p="http://schemas.openxmlformats.org/presentationml/2006/main" xmlns:r="http://schemas.openxmlformats.org/officeDocument/2006/relationships">
-  <p:cSld>
-    <p:bg>
-      <p:bgPr>
-        <a:solidFill>
-          <a:srgbClr val="FFFFFF"/>
-        </a:solidFill>
-        <a:effectLst/>
-      </p:bgPr>
-    </p:bg>
-    <p:spTree>
-      <p:nvGrpSpPr>
-        <p:cNvPr id="1" name=""/>
-        <p:cNvGrpSpPr/>
-        <p:nvPr/>
-      </p:nvGrpSpPr>
-      <p:grpSpPr/>
-      <p:sp>
-        <p:nvSpPr>
-          <p:cNvPr id="2" name="Rectangle 1"/>
-          <p:cNvSpPr/>
-          <p:nvPr/>
-        </p:nvSpPr>
-        <p:spPr>
-          <a:xfrm>
-            <a:off x="0" y="0"/>
-            <a:ext cx="12191695" cy="960120"/>
-          </a:xfrm>
-          <a:prstGeom prst="rect">
-            <a:avLst/>
-          </a:prstGeom>
-          <a:solidFill>
-            <a:srgbClr val="095292"/>
-          </a:solidFill>
-          <a:ln>
-            <a:noFill/>
-          </a:ln>
-        </p:spPr>
-        <p:style>
-          <a:lnRef idx="1">
-            <a:schemeClr val="accent1"/>
-          </a:lnRef>
-          <a:fillRef idx="3">
-            <a:schemeClr val="accent1"/>
-          </a:fillRef>
-          <a:effectRef idx="2">
-            <a:schemeClr val="accent1"/>
-          </a:effectRef>
-          <a:fontRef idx="minor">
-            <a:schemeClr val="lt1"/>
-          </a:fontRef>
-        </p:style>
-        <p:txBody>
-          <a:bodyPr rtlCol="0" anchor="ctr"/>
-          <a:lstStyle/>
-          <a:p>
-            <a:pPr algn="ctr"/>
-          </a:p>
-        </p:txBody>
-      </p:sp>
-      <p:sp>
-        <p:nvSpPr>
-          <p:cNvPr id="3" name="Rectangle 2"/>
-          <p:cNvSpPr/>
-          <p:nvPr/>
-        </p:nvSpPr>
-        <p:spPr>
-          <a:xfrm>
-            <a:off x="0" y="960120"/>
-            <a:ext cx="12191695" cy="41148"/>
-          </a:xfrm>
-          <a:prstGeom prst="rect">
-            <a:avLst/>
-          </a:prstGeom>
-          <a:solidFill>
-            <a:srgbClr val="FFD000"/>
-          </a:solidFill>
-          <a:ln>
-            <a:noFill/>
-          </a:ln>
-        </p:spPr>
-        <p:style>
-          <a:lnRef idx="1">
-            <a:schemeClr val="accent1"/>
-          </a:lnRef>
-          <a:fillRef idx="3">
-            <a:schemeClr val="accent1"/>
-          </a:fillRef>
-          <a:effectRef idx="2">
-            <a:schemeClr val="accent1"/>
-          </a:effectRef>
-          <a:fontRef idx="minor">
-            <a:schemeClr val="lt1"/>
-          </a:fontRef>
-        </p:style>
-        <p:txBody>
-          <a:bodyPr rtlCol="0" anchor="ctr"/>
-          <a:lstStyle/>
-          <a:p>
-            <a:pPr algn="ctr"/>
-          </a:p>
-        </p:txBody>
-      </p:sp>
-      <p:sp>
-        <p:nvSpPr>
-          <p:cNvPr id="4" name="TextBox 3"/>
-          <p:cNvSpPr txBox="1"/>
-          <p:nvPr/>
-        </p:nvSpPr>
-        <p:spPr>
-          <a:xfrm>
-            <a:off x="457200" y="164592"/>
-            <a:ext cx="11277295" cy="502920"/>
-          </a:xfrm>
-          <a:prstGeom prst="rect">
-            <a:avLst/>
-          </a:prstGeom>
-          <a:noFill/>
-        </p:spPr>
-        <p:txBody>
-          <a:bodyPr wrap="square">
-            <a:spAutoFit/>
-          </a:bodyPr>
-          <a:lstStyle/>
-          <a:p>
-            <a:r>
-              <a:rPr sz="2600" b="1" i="0">
-                <a:solidFill>
-                  <a:srgbClr val="FFFFFF"/>
-                </a:solidFill>
-                <a:latin typeface="Calibri"/>
-              </a:rPr>
-              <a:t>El reparto de los 5 a 8 minutos (1/2)</a:t>
-            </a:r>
-          </a:p>
-        </p:txBody>
-      </p:sp>
-      <p:sp>
-        <p:nvSpPr>
-          <p:cNvPr id="5" name="TextBox 4"/>
-          <p:cNvSpPr txBox="1"/>
-          <p:nvPr/>
-        </p:nvSpPr>
-        <p:spPr>
-          <a:xfrm>
-            <a:off x="457200" y="1170432"/>
-            <a:ext cx="11277295" cy="5230368"/>
-          </a:xfrm>
-          <a:prstGeom prst="rect">
-            <a:avLst/>
-          </a:prstGeom>
-          <a:noFill/>
-        </p:spPr>
-        <p:txBody>
-          <a:bodyPr wrap="square">
-            <a:spAutoFit/>
-          </a:bodyPr>
-          <a:lstStyle/>
-          <a:p>
-            <a:pPr>
-              <a:spcAft>
-                <a:spcPts val="800"/>
-              </a:spcAft>
-            </a:pPr>
-            <a:r>
-              <a:rPr sz="2000" b="0" i="0">
-                <a:solidFill>
-                  <a:srgbClr val="333333"/>
-                </a:solidFill>
-                <a:latin typeface="Calibri"/>
-              </a:rPr>
-              <a:t>–   La sustentacion dura de 5 a 8 minutos y ese limite obliga a decidir que se deja fuera.</a:t>
-            </a:r>
-          </a:p>
-          <a:p>
-            <a:pPr>
-              <a:spcAft>
-                <a:spcPts val="800"/>
-              </a:spcAft>
-            </a:pPr>
-            <a:r>
-              <a:rPr sz="2000" b="0" i="0">
-                <a:solidFill>
-                  <a:srgbClr val="333333"/>
-                </a:solidFill>
-                <a:latin typeface="Calibri"/>
-              </a:rPr>
-              <a:t>–   El reparto que funciona, y que es convencion y no regla dura, es: 45 segundos para el problema de la clínica en lenguaje de negocio, sin una sola tabla en pantalla</a:t>
-            </a:r>
-          </a:p>
-          <a:p>
-            <a:pPr>
-              <a:spcAft>
-                <a:spcPts val="800"/>
-              </a:spcAft>
-            </a:pPr>
-            <a:r>
-              <a:rPr sz="2000" b="0" i="0">
-                <a:solidFill>
-                  <a:srgbClr val="333333"/>
-                </a:solidFill>
-                <a:latin typeface="Calibri"/>
-              </a:rPr>
-              <a:t>–   90 segundos para el modelo, mostrando el ER y justificando dos decisiones y no las quince; 60 segundos para seguridad, con la matriz de roles y una frase sobre por que recepcion no ve el historial clinico</a:t>
-            </a:r>
-          </a:p>
-          <a:p>
-            <a:pPr>
-              <a:spcAft>
-                <a:spcPts val="800"/>
-              </a:spcAft>
-            </a:pPr>
-            <a:r>
-              <a:rPr sz="2000" b="0" i="0">
-                <a:solidFill>
-                  <a:srgbClr val="333333"/>
-                </a:solidFill>
-                <a:latin typeface="Calibri"/>
-              </a:rPr>
-              <a:t>–   90 segundos para la automatizacion, ejecutando un procedimiento con su caso valido y su caso invalido; 60 segundos para la optimizacion, con el plan de ejecucion antes y despues; 45 segundos para la integracion y el punto debil declarado; y 30 de cierre.</a:t>
-            </a:r>
-          </a:p>
-          <a:p>
-            <a:pPr>
-              <a:spcAft>
-                <a:spcPts val="800"/>
-              </a:spcAft>
-            </a:pPr>
-            <a:r>
-              <a:rPr sz="2000" b="0" i="0">
-                <a:solidFill>
-                  <a:srgbClr val="333333"/>
-                </a:solidFill>
-                <a:latin typeface="Calibri"/>
-              </a:rPr>
-              <a:t>–   Y conviene ser explicito sobre el formato, porque de eso depende como se prepara el estudiante: la Clase 15 se dicta el 16 de noviembre en la ultima sesion del semestre</a:t>
-            </a:r>
-          </a:p>
-        </p:txBody>
-      </p:sp>
-      <p:sp>
-        <p:nvSpPr>
-          <p:cNvPr id="6" name="TextBox 5"/>
-          <p:cNvSpPr txBox="1"/>
-          <p:nvPr/>
-        </p:nvSpPr>
-        <p:spPr>
-          <a:xfrm>
-            <a:off x="11185855" y="6473952"/>
-            <a:ext cx="640080" cy="274320"/>
-          </a:xfrm>
-          <a:prstGeom prst="rect">
-            <a:avLst/>
-          </a:prstGeom>
-          <a:noFill/>
-        </p:spPr>
-        <p:txBody>
-          <a:bodyPr wrap="square">
-            <a:spAutoFit/>
-          </a:bodyPr>
-          <a:lstStyle/>
-          <a:p>
-            <a:pPr algn="r"/>
-            <a:r>
-              <a:rPr sz="1100" b="0" i="0">
-                <a:solidFill>
-                  <a:srgbClr val="666666"/>
-                </a:solidFill>
-                <a:latin typeface="Calibri"/>
-              </a:rPr>
-              <a:t>13</a:t>
-            </a:r>
-          </a:p>
-        </p:txBody>
-      </p:sp>
-    </p:spTree>
-  </p:cSld>
-  <p:clrMapOvr>
-    <a:masterClrMapping/>
-  </p:clrMapOvr>
-</p:sld>
-</file>
-
-<file path=ppt/slides/slide14.xml><?xml version="1.0" encoding="utf-8"?>
-<p:sld xmlns:a="http://schemas.openxmlformats.org/drawingml/2006/main" xmlns:p="http://schemas.openxmlformats.org/presentationml/2006/main" xmlns:r="http://schemas.openxmlformats.org/officeDocument/2006/relationships">
-  <p:cSld>
-    <p:bg>
-      <p:bgPr>
-        <a:solidFill>
-          <a:srgbClr val="FFFFFF"/>
-        </a:solidFill>
-        <a:effectLst/>
-      </p:bgPr>
-    </p:bg>
-    <p:spTree>
-      <p:nvGrpSpPr>
-        <p:cNvPr id="1" name=""/>
-        <p:cNvGrpSpPr/>
-        <p:nvPr/>
-      </p:nvGrpSpPr>
-      <p:grpSpPr/>
-      <p:sp>
-        <p:nvSpPr>
-          <p:cNvPr id="2" name="Rectangle 1"/>
-          <p:cNvSpPr/>
-          <p:nvPr/>
-        </p:nvSpPr>
-        <p:spPr>
-          <a:xfrm>
-            <a:off x="0" y="0"/>
-            <a:ext cx="12191695" cy="960120"/>
-          </a:xfrm>
-          <a:prstGeom prst="rect">
-            <a:avLst/>
-          </a:prstGeom>
-          <a:solidFill>
-            <a:srgbClr val="095292"/>
-          </a:solidFill>
-          <a:ln>
-            <a:noFill/>
-          </a:ln>
-        </p:spPr>
-        <p:style>
-          <a:lnRef idx="1">
-            <a:schemeClr val="accent1"/>
-          </a:lnRef>
-          <a:fillRef idx="3">
-            <a:schemeClr val="accent1"/>
-          </a:fillRef>
-          <a:effectRef idx="2">
-            <a:schemeClr val="accent1"/>
-          </a:effectRef>
-          <a:fontRef idx="minor">
-            <a:schemeClr val="lt1"/>
-          </a:fontRef>
-        </p:style>
-        <p:txBody>
-          <a:bodyPr rtlCol="0" anchor="ctr"/>
-          <a:lstStyle/>
-          <a:p>
-            <a:pPr algn="ctr"/>
-          </a:p>
-        </p:txBody>
-      </p:sp>
-      <p:sp>
-        <p:nvSpPr>
-          <p:cNvPr id="3" name="Rectangle 2"/>
-          <p:cNvSpPr/>
-          <p:nvPr/>
-        </p:nvSpPr>
-        <p:spPr>
-          <a:xfrm>
-            <a:off x="0" y="960120"/>
-            <a:ext cx="12191695" cy="41148"/>
-          </a:xfrm>
-          <a:prstGeom prst="rect">
-            <a:avLst/>
-          </a:prstGeom>
-          <a:solidFill>
-            <a:srgbClr val="FFD000"/>
-          </a:solidFill>
-          <a:ln>
-            <a:noFill/>
-          </a:ln>
-        </p:spPr>
-        <p:style>
-          <a:lnRef idx="1">
-            <a:schemeClr val="accent1"/>
-          </a:lnRef>
-          <a:fillRef idx="3">
-            <a:schemeClr val="accent1"/>
-          </a:fillRef>
-          <a:effectRef idx="2">
-            <a:schemeClr val="accent1"/>
-          </a:effectRef>
-          <a:fontRef idx="minor">
-            <a:schemeClr val="lt1"/>
-          </a:fontRef>
-        </p:style>
-        <p:txBody>
-          <a:bodyPr rtlCol="0" anchor="ctr"/>
-          <a:lstStyle/>
-          <a:p>
-            <a:pPr algn="ctr"/>
-          </a:p>
-        </p:txBody>
-      </p:sp>
-      <p:sp>
-        <p:nvSpPr>
-          <p:cNvPr id="4" name="TextBox 3"/>
-          <p:cNvSpPr txBox="1"/>
-          <p:nvPr/>
-        </p:nvSpPr>
-        <p:spPr>
-          <a:xfrm>
-            <a:off x="457200" y="164592"/>
-            <a:ext cx="11277295" cy="502920"/>
-          </a:xfrm>
-          <a:prstGeom prst="rect">
-            <a:avLst/>
-          </a:prstGeom>
-          <a:noFill/>
-        </p:spPr>
-        <p:txBody>
-          <a:bodyPr wrap="square">
-            <a:spAutoFit/>
-          </a:bodyPr>
-          <a:lstStyle/>
-          <a:p>
-            <a:r>
-              <a:rPr sz="2600" b="1" i="0">
-                <a:solidFill>
-                  <a:srgbClr val="FFFFFF"/>
-                </a:solidFill>
-                <a:latin typeface="Calibri"/>
-              </a:rPr>
-              <a:t>El reparto de los 5 a 8 minutos (2/2)</a:t>
-            </a:r>
-          </a:p>
-        </p:txBody>
-      </p:sp>
-      <p:sp>
-        <p:nvSpPr>
-          <p:cNvPr id="5" name="TextBox 4"/>
-          <p:cNvSpPr txBox="1"/>
-          <p:nvPr/>
-        </p:nvSpPr>
-        <p:spPr>
-          <a:xfrm>
-            <a:off x="457200" y="1170432"/>
-            <a:ext cx="11277295" cy="5230368"/>
-          </a:xfrm>
-          <a:prstGeom prst="rect">
-            <a:avLst/>
-          </a:prstGeom>
-          <a:noFill/>
-        </p:spPr>
-        <p:txBody>
-          <a:bodyPr wrap="square">
-            <a:spAutoFit/>
-          </a:bodyPr>
-          <a:lstStyle/>
-          <a:p>
-            <a:pPr>
-              <a:spcAft>
-                <a:spcPts val="800"/>
-              </a:spcAft>
-            </a:pPr>
-            <a:r>
-              <a:rPr sz="2000" b="0" i="0">
-                <a:solidFill>
-                  <a:srgbClr val="333333"/>
-                </a:solidFill>
-                <a:latin typeface="Calibri"/>
-              </a:rPr>
-              <a:t>–   Dedicada por completo a sustentaciones EN VIVO, con turnos consecutivos y preguntas del docente al cierre de cada uno.</a:t>
-            </a:r>
-          </a:p>
-          <a:p>
-            <a:pPr>
-              <a:spcAft>
-                <a:spcPts val="800"/>
-              </a:spcAft>
-            </a:pPr>
-            <a:r>
-              <a:rPr sz="2000" b="0" i="0">
-                <a:solidFill>
-                  <a:srgbClr val="333333"/>
-                </a:solidFill>
-                <a:latin typeface="Calibri"/>
-              </a:rPr>
-              <a:t>–   No es clase autonoma y la defensa no se reemplaza por un video grabado, porque el Q&amp;A dirigido al azar es lo unico que permite verificar que el modelo y los procedimientos son de quien los presenta.</a:t>
-            </a:r>
-          </a:p>
-          <a:p>
-            <a:pPr>
-              <a:spcAft>
-                <a:spcPts val="800"/>
-              </a:spcAft>
-            </a:pPr>
-            <a:r>
-              <a:rPr sz="2000" b="0" i="0">
-                <a:solidFill>
-                  <a:srgbClr val="333333"/>
-                </a:solidFill>
-                <a:latin typeface="Calibri"/>
-              </a:rPr>
-              <a:t>–   Y el criterio de dominio es el mismo trabajando solo o en equipo autorizado: quien sustenta debe poder explicar cualquier parte en 60 segundos</a:t>
-            </a:r>
-          </a:p>
-          <a:p>
-            <a:pPr>
-              <a:spcAft>
-                <a:spcPts val="800"/>
-              </a:spcAft>
-            </a:pPr>
-            <a:r>
-              <a:rPr sz="2000" b="0" i="0">
-                <a:solidFill>
-                  <a:srgbClr val="333333"/>
-                </a:solidFill>
-                <a:latin typeface="Calibri"/>
-              </a:rPr>
-              <a:t>–   Y si hubo equipo, cualquier integrante debe poder hacerlo con cualquier parte, no solo con la suya, porque el Q&amp;A se dirige al azar y porque si solo una persona entiende el modelo el evaluador no tiene forma de atribuir el trabajo a los demas.</a:t>
-            </a:r>
-          </a:p>
-        </p:txBody>
-      </p:sp>
-      <p:sp>
-        <p:nvSpPr>
-          <p:cNvPr id="6" name="TextBox 5"/>
-          <p:cNvSpPr txBox="1"/>
-          <p:nvPr/>
-        </p:nvSpPr>
-        <p:spPr>
-          <a:xfrm>
-            <a:off x="11185855" y="6473952"/>
-            <a:ext cx="640080" cy="274320"/>
-          </a:xfrm>
-          <a:prstGeom prst="rect">
-            <a:avLst/>
-          </a:prstGeom>
-          <a:noFill/>
-        </p:spPr>
-        <p:txBody>
-          <a:bodyPr wrap="square">
-            <a:spAutoFit/>
-          </a:bodyPr>
-          <a:lstStyle/>
-          <a:p>
-            <a:pPr algn="r"/>
-            <a:r>
-              <a:rPr sz="1100" b="0" i="0">
-                <a:solidFill>
-                  <a:srgbClr val="666666"/>
-                </a:solidFill>
-                <a:latin typeface="Calibri"/>
-              </a:rPr>
-              <a:t>14</a:t>
-            </a:r>
-          </a:p>
-        </p:txBody>
-      </p:sp>
-    </p:spTree>
-  </p:cSld>
-  <p:clrMapOvr>
-    <a:masterClrMapping/>
-  </p:clrMapOvr>
-</p:sld>
-</file>
-
-<file path=ppt/slides/slide15.xml><?xml version="1.0" encoding="utf-8"?>
-<p:sld xmlns:a="http://schemas.openxmlformats.org/drawingml/2006/main" xmlns:p="http://schemas.openxmlformats.org/presentationml/2006/main" xmlns:r="http://schemas.openxmlformats.org/officeDocument/2006/relationships">
-  <p:cSld>
-    <p:bg>
-      <p:bgPr>
-        <a:solidFill>
-          <a:srgbClr val="FFFFFF"/>
-        </a:solidFill>
-        <a:effectLst/>
-      </p:bgPr>
-    </p:bg>
-    <p:spTree>
-      <p:nvGrpSpPr>
-        <p:cNvPr id="1" name=""/>
-        <p:cNvGrpSpPr/>
-        <p:nvPr/>
-      </p:nvGrpSpPr>
-      <p:grpSpPr/>
-      <p:sp>
-        <p:nvSpPr>
-          <p:cNvPr id="2" name="Rectangle 1"/>
-          <p:cNvSpPr/>
-          <p:nvPr/>
-        </p:nvSpPr>
-        <p:spPr>
-          <a:xfrm>
-            <a:off x="0" y="0"/>
-            <a:ext cx="12191695" cy="960120"/>
-          </a:xfrm>
-          <a:prstGeom prst="rect">
-            <a:avLst/>
-          </a:prstGeom>
-          <a:solidFill>
-            <a:srgbClr val="095292"/>
-          </a:solidFill>
-          <a:ln>
-            <a:noFill/>
-          </a:ln>
-        </p:spPr>
-        <p:style>
-          <a:lnRef idx="1">
-            <a:schemeClr val="accent1"/>
-          </a:lnRef>
-          <a:fillRef idx="3">
-            <a:schemeClr val="accent1"/>
-          </a:fillRef>
-          <a:effectRef idx="2">
-            <a:schemeClr val="accent1"/>
-          </a:effectRef>
-          <a:fontRef idx="minor">
-            <a:schemeClr val="lt1"/>
-          </a:fontRef>
-        </p:style>
-        <p:txBody>
-          <a:bodyPr rtlCol="0" anchor="ctr"/>
-          <a:lstStyle/>
-          <a:p>
-            <a:pPr algn="ctr"/>
-          </a:p>
-        </p:txBody>
-      </p:sp>
-      <p:sp>
-        <p:nvSpPr>
-          <p:cNvPr id="3" name="Rectangle 2"/>
-          <p:cNvSpPr/>
-          <p:nvPr/>
-        </p:nvSpPr>
-        <p:spPr>
-          <a:xfrm>
-            <a:off x="0" y="960120"/>
-            <a:ext cx="12191695" cy="41148"/>
-          </a:xfrm>
-          <a:prstGeom prst="rect">
-            <a:avLst/>
-          </a:prstGeom>
-          <a:solidFill>
-            <a:srgbClr val="FFD000"/>
-          </a:solidFill>
-          <a:ln>
-            <a:noFill/>
-          </a:ln>
-        </p:spPr>
-        <p:style>
-          <a:lnRef idx="1">
-            <a:schemeClr val="accent1"/>
-          </a:lnRef>
-          <a:fillRef idx="3">
-            <a:schemeClr val="accent1"/>
-          </a:fillRef>
-          <a:effectRef idx="2">
-            <a:schemeClr val="accent1"/>
-          </a:effectRef>
-          <a:fontRef idx="minor">
-            <a:schemeClr val="lt1"/>
-          </a:fontRef>
-        </p:style>
-        <p:txBody>
-          <a:bodyPr rtlCol="0" anchor="ctr"/>
-          <a:lstStyle/>
-          <a:p>
-            <a:pPr algn="ctr"/>
-          </a:p>
-        </p:txBody>
-      </p:sp>
-      <p:sp>
-        <p:nvSpPr>
-          <p:cNvPr id="4" name="TextBox 3"/>
-          <p:cNvSpPr txBox="1"/>
-          <p:nvPr/>
-        </p:nvSpPr>
-        <p:spPr>
-          <a:xfrm>
-            <a:off x="457200" y="164592"/>
-            <a:ext cx="11277295" cy="502920"/>
-          </a:xfrm>
-          <a:prstGeom prst="rect">
-            <a:avLst/>
-          </a:prstGeom>
-          <a:noFill/>
-        </p:spPr>
-        <p:txBody>
-          <a:bodyPr wrap="square">
-            <a:spAutoFit/>
-          </a:bodyPr>
-          <a:lstStyle/>
-          <a:p>
-            <a:r>
-              <a:rPr sz="2600" b="1" i="0">
-                <a:solidFill>
-                  <a:srgbClr val="FFFFFF"/>
-                </a:solidFill>
-                <a:latin typeface="Calibri"/>
-              </a:rPr>
-              <a:t>El Q&amp;A de modelado, con las respuestas listas (1/2)</a:t>
-            </a:r>
-          </a:p>
-        </p:txBody>
-      </p:sp>
-      <p:sp>
-        <p:nvSpPr>
-          <p:cNvPr id="5" name="TextBox 4"/>
-          <p:cNvSpPr txBox="1"/>
-          <p:nvPr/>
-        </p:nvSpPr>
-        <p:spPr>
-          <a:xfrm>
-            <a:off x="457200" y="1170432"/>
-            <a:ext cx="11277295" cy="5230368"/>
-          </a:xfrm>
-          <a:prstGeom prst="rect">
-            <a:avLst/>
-          </a:prstGeom>
-          <a:noFill/>
-        </p:spPr>
-        <p:txBody>
-          <a:bodyPr wrap="square">
-            <a:spAutoFit/>
-          </a:bodyPr>
-          <a:lstStyle/>
-          <a:p>
-            <a:pPr>
-              <a:spcAft>
-                <a:spcPts val="800"/>
-              </a:spcAft>
-            </a:pPr>
-            <a:r>
-              <a:rPr sz="2000" b="0" i="0">
-                <a:solidFill>
-                  <a:srgbClr val="333333"/>
-                </a:solidFill>
-                <a:latin typeface="Calibri"/>
-              </a:rPr>
-              <a:t>–   «Por que nombre y apellido separados y no un solo campo nombre_completo?»: porque se necesita ordenar y buscar por apellido, y separar despues un campo unido es un trabajo sucio y lleno de errores con nombres compuestos.</a:t>
-            </a:r>
-          </a:p>
-          <a:p>
-            <a:pPr>
-              <a:spcAft>
-                <a:spcPts val="800"/>
-              </a:spcAft>
-            </a:pPr>
-            <a:r>
-              <a:rPr sz="2000" b="0" i="0">
-                <a:solidFill>
-                  <a:srgbClr val="333333"/>
-                </a:solidFill>
-                <a:latin typeface="Calibri"/>
-              </a:rPr>
-              <a:t>–   «Que pasa si un dueno tiene dos mascotas llamadas Pelusa?»: nada, porque la identidad la da id_mascota y no el nombre</a:t>
-            </a:r>
-          </a:p>
-          <a:p>
-            <a:pPr>
-              <a:spcAft>
-                <a:spcPts val="800"/>
-              </a:spcAft>
-            </a:pPr>
-            <a:r>
-              <a:rPr sz="2000" b="0" i="0">
-                <a:solidFill>
-                  <a:srgbClr val="333333"/>
-                </a:solidFill>
-                <a:latin typeface="Calibri"/>
-              </a:rPr>
-              <a:t>–   Y si se quisiera prohibirlo habria que declarar UNIQUE (id_dueno, nombre), decision que el estudiante debe poder defender en cualquiera de los dos sentidos.</a:t>
-            </a:r>
-          </a:p>
-          <a:p>
-            <a:pPr>
-              <a:spcAft>
-                <a:spcPts val="800"/>
-              </a:spcAft>
-            </a:pPr>
-            <a:r>
-              <a:rPr sz="2000" b="0" i="0">
-                <a:solidFill>
-                  <a:srgbClr val="333333"/>
-                </a:solidFill>
-                <a:latin typeface="Calibri"/>
-              </a:rPr>
-              <a:t>–   «Por que no borran las citas canceladas?»: porque el historial de cancelaciones es informacion de negocio, ya que permite ver que dueno cancela siempre</a:t>
-            </a:r>
-          </a:p>
-        </p:txBody>
-      </p:sp>
-      <p:sp>
-        <p:nvSpPr>
-          <p:cNvPr id="6" name="TextBox 5"/>
-          <p:cNvSpPr txBox="1"/>
-          <p:nvPr/>
-        </p:nvSpPr>
-        <p:spPr>
-          <a:xfrm>
-            <a:off x="11185855" y="6473952"/>
-            <a:ext cx="640080" cy="274320"/>
-          </a:xfrm>
-          <a:prstGeom prst="rect">
-            <a:avLst/>
-          </a:prstGeom>
-          <a:noFill/>
-        </p:spPr>
-        <p:txBody>
-          <a:bodyPr wrap="square">
-            <a:spAutoFit/>
-          </a:bodyPr>
-          <a:lstStyle/>
-          <a:p>
-            <a:pPr algn="r"/>
-            <a:r>
-              <a:rPr sz="1100" b="0" i="0">
-                <a:solidFill>
-                  <a:srgbClr val="666666"/>
-                </a:solidFill>
-                <a:latin typeface="Calibri"/>
-              </a:rPr>
-              <a:t>15</a:t>
-            </a:r>
-          </a:p>
-        </p:txBody>
-      </p:sp>
-    </p:spTree>
-  </p:cSld>
-  <p:clrMapOvr>
-    <a:masterClrMapping/>
-  </p:clrMapOvr>
-</p:sld>
-</file>
-
-<file path=ppt/slides/slide16.xml><?xml version="1.0" encoding="utf-8"?>
-<p:sld xmlns:a="http://schemas.openxmlformats.org/drawingml/2006/main" xmlns:p="http://schemas.openxmlformats.org/presentationml/2006/main" xmlns:r="http://schemas.openxmlformats.org/officeDocument/2006/relationships">
-  <p:cSld>
-    <p:bg>
-      <p:bgPr>
-        <a:solidFill>
-          <a:srgbClr val="FFFFFF"/>
-        </a:solidFill>
-        <a:effectLst/>
-      </p:bgPr>
-    </p:bg>
-    <p:spTree>
-      <p:nvGrpSpPr>
-        <p:cNvPr id="1" name=""/>
-        <p:cNvGrpSpPr/>
-        <p:nvPr/>
-      </p:nvGrpSpPr>
-      <p:grpSpPr/>
-      <p:sp>
-        <p:nvSpPr>
-          <p:cNvPr id="2" name="Rectangle 1"/>
-          <p:cNvSpPr/>
-          <p:nvPr/>
-        </p:nvSpPr>
-        <p:spPr>
-          <a:xfrm>
-            <a:off x="0" y="0"/>
-            <a:ext cx="12191695" cy="960120"/>
-          </a:xfrm>
-          <a:prstGeom prst="rect">
-            <a:avLst/>
-          </a:prstGeom>
-          <a:solidFill>
-            <a:srgbClr val="095292"/>
-          </a:solidFill>
-          <a:ln>
-            <a:noFill/>
-          </a:ln>
-        </p:spPr>
-        <p:style>
-          <a:lnRef idx="1">
-            <a:schemeClr val="accent1"/>
-          </a:lnRef>
-          <a:fillRef idx="3">
-            <a:schemeClr val="accent1"/>
-          </a:fillRef>
-          <a:effectRef idx="2">
-            <a:schemeClr val="accent1"/>
-          </a:effectRef>
-          <a:fontRef idx="minor">
-            <a:schemeClr val="lt1"/>
-          </a:fontRef>
-        </p:style>
-        <p:txBody>
-          <a:bodyPr rtlCol="0" anchor="ctr"/>
-          <a:lstStyle/>
-          <a:p>
-            <a:pPr algn="ctr"/>
-          </a:p>
-        </p:txBody>
-      </p:sp>
-      <p:sp>
-        <p:nvSpPr>
-          <p:cNvPr id="3" name="Rectangle 2"/>
-          <p:cNvSpPr/>
-          <p:nvPr/>
-        </p:nvSpPr>
-        <p:spPr>
-          <a:xfrm>
-            <a:off x="0" y="960120"/>
-            <a:ext cx="12191695" cy="41148"/>
-          </a:xfrm>
-          <a:prstGeom prst="rect">
-            <a:avLst/>
-          </a:prstGeom>
-          <a:solidFill>
-            <a:srgbClr val="FFD000"/>
-          </a:solidFill>
-          <a:ln>
-            <a:noFill/>
-          </a:ln>
-        </p:spPr>
-        <p:style>
-          <a:lnRef idx="1">
-            <a:schemeClr val="accent1"/>
-          </a:lnRef>
-          <a:fillRef idx="3">
-            <a:schemeClr val="accent1"/>
-          </a:fillRef>
-          <a:effectRef idx="2">
-            <a:schemeClr val="accent1"/>
-          </a:effectRef>
-          <a:fontRef idx="minor">
-            <a:schemeClr val="lt1"/>
-          </a:fontRef>
-        </p:style>
-        <p:txBody>
-          <a:bodyPr rtlCol="0" anchor="ctr"/>
-          <a:lstStyle/>
-          <a:p>
-            <a:pPr algn="ctr"/>
-          </a:p>
-        </p:txBody>
-      </p:sp>
-      <p:sp>
-        <p:nvSpPr>
-          <p:cNvPr id="4" name="TextBox 3"/>
-          <p:cNvSpPr txBox="1"/>
-          <p:nvPr/>
-        </p:nvSpPr>
-        <p:spPr>
-          <a:xfrm>
-            <a:off x="457200" y="164592"/>
-            <a:ext cx="11277295" cy="502920"/>
-          </a:xfrm>
-          <a:prstGeom prst="rect">
-            <a:avLst/>
-          </a:prstGeom>
-          <a:noFill/>
-        </p:spPr>
-        <p:txBody>
-          <a:bodyPr wrap="square">
-            <a:spAutoFit/>
-          </a:bodyPr>
-          <a:lstStyle/>
-          <a:p>
-            <a:r>
-              <a:rPr sz="2600" b="1" i="0">
-                <a:solidFill>
-                  <a:srgbClr val="FFFFFF"/>
-                </a:solidFill>
-                <a:latin typeface="Calibri"/>
-              </a:rPr>
-              <a:t>El Q&amp;A de modelado, con las respuestas listas (2/2)</a:t>
-            </a:r>
-          </a:p>
-        </p:txBody>
-      </p:sp>
-      <p:sp>
-        <p:nvSpPr>
-          <p:cNvPr id="5" name="TextBox 4"/>
-          <p:cNvSpPr txBox="1"/>
-          <p:nvPr/>
-        </p:nvSpPr>
-        <p:spPr>
-          <a:xfrm>
-            <a:off x="457200" y="1170432"/>
-            <a:ext cx="11277295" cy="5230368"/>
-          </a:xfrm>
-          <a:prstGeom prst="rect">
-            <a:avLst/>
-          </a:prstGeom>
-          <a:noFill/>
-        </p:spPr>
-        <p:txBody>
-          <a:bodyPr wrap="square">
-            <a:spAutoFit/>
-          </a:bodyPr>
-          <a:lstStyle/>
-          <a:p>
-            <a:pPr>
-              <a:spcAft>
-                <a:spcPts val="800"/>
-              </a:spcAft>
-            </a:pPr>
-            <a:r>
-              <a:rPr sz="2000" b="0" i="0">
-                <a:solidFill>
-                  <a:srgbClr val="333333"/>
-                </a:solidFill>
-                <a:latin typeface="Calibri"/>
-              </a:rPr>
-              <a:t>–   Y porque borrar filas referenciadas por facturas rompe la integridad referencial; se usa borrado logico con un campo de estado.</a:t>
-            </a:r>
-          </a:p>
-          <a:p>
-            <a:pPr>
-              <a:spcAft>
-                <a:spcPts val="800"/>
-              </a:spcAft>
-            </a:pPr>
-            <a:r>
-              <a:rPr sz="2000" b="0" i="0">
-                <a:solidFill>
-                  <a:srgbClr val="333333"/>
-                </a:solidFill>
-                <a:latin typeface="Calibri"/>
-              </a:rPr>
-              <a:t>–   Y la pregunta que desarma a quien no midio: «cuanto mejoro esa consulta?».</a:t>
-            </a:r>
-          </a:p>
-          <a:p>
-            <a:pPr>
-              <a:spcAft>
-                <a:spcPts val="800"/>
-              </a:spcAft>
-            </a:pPr>
-            <a:r>
-              <a:rPr sz="2000" b="0" i="0">
-                <a:solidFill>
-                  <a:srgbClr val="333333"/>
-                </a:solidFill>
-                <a:latin typeface="Calibri"/>
-              </a:rPr>
-              <a:t>–   Una respuesta solida tiene 3 partes: la decision, la alternativa descartada y la razon concreta en la clínica, por ejemplo el volumen de citas o una regla del negocio.</a:t>
-            </a:r>
-          </a:p>
-          <a:p>
-            <a:pPr>
-              <a:spcAft>
-                <a:spcPts val="800"/>
-              </a:spcAft>
-            </a:pPr>
-            <a:r>
-              <a:rPr sz="2000" b="0" i="0">
-                <a:solidFill>
-                  <a:srgbClr val="333333"/>
-                </a:solidFill>
-                <a:latin typeface="Calibri"/>
-              </a:rPr>
-              <a:t>–   Error comun: responder con lo que hace la tabla en vez de por que existe; la pregunta de modelado siempre es un por que, no un que.</a:t>
-            </a:r>
-          </a:p>
-        </p:txBody>
-      </p:sp>
-      <p:sp>
-        <p:nvSpPr>
-          <p:cNvPr id="6" name="TextBox 5"/>
-          <p:cNvSpPr txBox="1"/>
-          <p:nvPr/>
-        </p:nvSpPr>
-        <p:spPr>
-          <a:xfrm>
-            <a:off x="11185855" y="6473952"/>
-            <a:ext cx="640080" cy="274320"/>
-          </a:xfrm>
-          <a:prstGeom prst="rect">
-            <a:avLst/>
-          </a:prstGeom>
-          <a:noFill/>
-        </p:spPr>
-        <p:txBody>
-          <a:bodyPr wrap="square">
-            <a:spAutoFit/>
-          </a:bodyPr>
-          <a:lstStyle/>
-          <a:p>
-            <a:pPr algn="r"/>
-            <a:r>
-              <a:rPr sz="1100" b="0" i="0">
-                <a:solidFill>
-                  <a:srgbClr val="666666"/>
-                </a:solidFill>
-                <a:latin typeface="Calibri"/>
-              </a:rPr>
-              <a:t>16</a:t>
-            </a:r>
-          </a:p>
-        </p:txBody>
-      </p:sp>
-    </p:spTree>
-  </p:cSld>
-  <p:clrMapOvr>
-    <a:masterClrMapping/>
-  </p:clrMapOvr>
-</p:sld>
-</file>
-
-<file path=ppt/slides/slide17.xml><?xml version="1.0" encoding="utf-8"?>
-<p:sld xmlns:a="http://schemas.openxmlformats.org/drawingml/2006/main" xmlns:p="http://schemas.openxmlformats.org/presentationml/2006/main" xmlns:r="http://schemas.openxmlformats.org/officeDocument/2006/relationships">
-  <p:cSld>
-    <p:bg>
-      <p:bgPr>
-        <a:solidFill>
-          <a:srgbClr val="FFFFFF"/>
-        </a:solidFill>
-        <a:effectLst/>
-      </p:bgPr>
-    </p:bg>
-    <p:spTree>
-      <p:nvGrpSpPr>
-        <p:cNvPr id="1" name=""/>
-        <p:cNvGrpSpPr/>
-        <p:nvPr/>
-      </p:nvGrpSpPr>
-      <p:grpSpPr/>
-      <p:sp>
-        <p:nvSpPr>
-          <p:cNvPr id="2" name="Rectangle 1"/>
-          <p:cNvSpPr/>
-          <p:nvPr/>
-        </p:nvSpPr>
-        <p:spPr>
-          <a:xfrm>
-            <a:off x="0" y="0"/>
-            <a:ext cx="12191695" cy="960120"/>
-          </a:xfrm>
-          <a:prstGeom prst="rect">
-            <a:avLst/>
-          </a:prstGeom>
-          <a:solidFill>
-            <a:srgbClr val="095292"/>
-          </a:solidFill>
-          <a:ln>
-            <a:noFill/>
-          </a:ln>
-        </p:spPr>
-        <p:style>
-          <a:lnRef idx="1">
-            <a:schemeClr val="accent1"/>
-          </a:lnRef>
-          <a:fillRef idx="3">
-            <a:schemeClr val="accent1"/>
-          </a:fillRef>
-          <a:effectRef idx="2">
-            <a:schemeClr val="accent1"/>
-          </a:effectRef>
-          <a:fontRef idx="minor">
-            <a:schemeClr val="lt1"/>
-          </a:fontRef>
-        </p:style>
-        <p:txBody>
-          <a:bodyPr rtlCol="0" anchor="ctr"/>
-          <a:lstStyle/>
-          <a:p>
-            <a:pPr algn="ctr"/>
-          </a:p>
-        </p:txBody>
-      </p:sp>
-      <p:sp>
-        <p:nvSpPr>
-          <p:cNvPr id="3" name="Rectangle 2"/>
-          <p:cNvSpPr/>
-          <p:nvPr/>
-        </p:nvSpPr>
-        <p:spPr>
-          <a:xfrm>
-            <a:off x="0" y="960120"/>
-            <a:ext cx="12191695" cy="41148"/>
-          </a:xfrm>
-          <a:prstGeom prst="rect">
-            <a:avLst/>
-          </a:prstGeom>
-          <a:solidFill>
-            <a:srgbClr val="FFD000"/>
-          </a:solidFill>
-          <a:ln>
-            <a:noFill/>
-          </a:ln>
-        </p:spPr>
-        <p:style>
-          <a:lnRef idx="1">
-            <a:schemeClr val="accent1"/>
-          </a:lnRef>
-          <a:fillRef idx="3">
-            <a:schemeClr val="accent1"/>
-          </a:fillRef>
-          <a:effectRef idx="2">
-            <a:schemeClr val="accent1"/>
-          </a:effectRef>
-          <a:fontRef idx="minor">
-            <a:schemeClr val="lt1"/>
-          </a:fontRef>
-        </p:style>
-        <p:txBody>
-          <a:bodyPr rtlCol="0" anchor="ctr"/>
-          <a:lstStyle/>
-          <a:p>
-            <a:pPr algn="ctr"/>
-          </a:p>
-        </p:txBody>
-      </p:sp>
-      <p:sp>
-        <p:nvSpPr>
-          <p:cNvPr id="4" name="TextBox 3"/>
-          <p:cNvSpPr txBox="1"/>
-          <p:nvPr/>
-        </p:nvSpPr>
-        <p:spPr>
-          <a:xfrm>
-            <a:off x="457200" y="164592"/>
-            <a:ext cx="11277295" cy="502920"/>
-          </a:xfrm>
-          <a:prstGeom prst="rect">
-            <a:avLst/>
-          </a:prstGeom>
-          <a:noFill/>
-        </p:spPr>
-        <p:txBody>
-          <a:bodyPr wrap="square">
-            <a:spAutoFit/>
-          </a:bodyPr>
-          <a:lstStyle/>
-          <a:p>
-            <a:r>
-              <a:rPr sz="2600" b="1" i="0">
-                <a:solidFill>
-                  <a:srgbClr val="FFFFFF"/>
-                </a:solidFill>
-                <a:latin typeface="Calibri"/>
-              </a:rPr>
-              <a:t>El cierre del curso: conectar lo hecho con el trabajo real</a:t>
-            </a:r>
-          </a:p>
-        </p:txBody>
-      </p:sp>
-      <p:sp>
-        <p:nvSpPr>
-          <p:cNvPr id="5" name="TextBox 4"/>
-          <p:cNvSpPr txBox="1"/>
-          <p:nvPr/>
-        </p:nvSpPr>
-        <p:spPr>
-          <a:xfrm>
-            <a:off x="457200" y="1170432"/>
-            <a:ext cx="11277295" cy="5230368"/>
-          </a:xfrm>
-          <a:prstGeom prst="rect">
-            <a:avLst/>
-          </a:prstGeom>
-          <a:noFill/>
-        </p:spPr>
-        <p:txBody>
-          <a:bodyPr wrap="square">
-            <a:spAutoFit/>
-          </a:bodyPr>
-          <a:lstStyle/>
-          <a:p>
-            <a:pPr>
-              <a:spcAft>
-                <a:spcPts val="800"/>
-              </a:spcAft>
-            </a:pPr>
-            <a:r>
-              <a:rPr sz="2000" b="0" i="0">
-                <a:solidFill>
-                  <a:srgbClr val="333333"/>
-                </a:solidFill>
-                <a:latin typeface="Calibri"/>
-              </a:rPr>
-              <a:t>–   El cierre del curso debe conectar lo hecho con el trabajo real, porque de eso depende que el estudiante conserve los scripts en vez de borrarlos al terminar el semestre.</a:t>
-            </a:r>
-          </a:p>
-          <a:p>
-            <a:pPr>
-              <a:spcAft>
-                <a:spcPts val="800"/>
-              </a:spcAft>
-            </a:pPr>
-            <a:r>
-              <a:rPr sz="2000" b="0" i="0">
-                <a:solidFill>
-                  <a:srgbClr val="333333"/>
-                </a:solidFill>
-                <a:latin typeface="Calibri"/>
-              </a:rPr>
-              <a:t>–   Leer un plan de ejecucion y decidir si un indice sobra es una habilidad que se paga.</a:t>
-            </a:r>
-          </a:p>
-          <a:p>
-            <a:pPr>
-              <a:spcAft>
-                <a:spcPts val="800"/>
-              </a:spcAft>
-            </a:pPr>
-            <a:r>
-              <a:rPr sz="2000" b="0" i="0">
-                <a:solidFill>
-                  <a:srgbClr val="333333"/>
-                </a:solidFill>
-                <a:latin typeface="Calibri"/>
-              </a:rPr>
-              <a:t>–   El SQL que se escribio ahi es el mismo que corre en un servidor de produccion; lo que cambia en un entorno profesional es el volumen de datos y las consecuencias de un error, no la sintaxis.</a:t>
-            </a:r>
-          </a:p>
-          <a:p>
-            <a:pPr>
-              <a:spcAft>
-                <a:spcPts val="800"/>
-              </a:spcAft>
-            </a:pPr>
-            <a:r>
-              <a:rPr sz="2000" b="0" i="0">
-                <a:solidFill>
-                  <a:srgbClr val="333333"/>
-                </a:solidFill>
-                <a:latin typeface="Calibri"/>
-              </a:rPr>
-              <a:t>–   Y la autoevaluacion de la clase conviene pedirla con una consigna concreta en vez de una reflexion vaga: nombren la decision de modelado que mas les costo revertir y en que clase se dieron cuenta de que estaba mal.</a:t>
-            </a:r>
-          </a:p>
-        </p:txBody>
-      </p:sp>
-      <p:sp>
-        <p:nvSpPr>
-          <p:cNvPr id="6" name="TextBox 5"/>
-          <p:cNvSpPr txBox="1"/>
-          <p:nvPr/>
-        </p:nvSpPr>
-        <p:spPr>
-          <a:xfrm>
-            <a:off x="11185855" y="6473952"/>
-            <a:ext cx="640080" cy="274320"/>
-          </a:xfrm>
-          <a:prstGeom prst="rect">
-            <a:avLst/>
-          </a:prstGeom>
-          <a:noFill/>
-        </p:spPr>
-        <p:txBody>
-          <a:bodyPr wrap="square">
-            <a:spAutoFit/>
-          </a:bodyPr>
-          <a:lstStyle/>
-          <a:p>
-            <a:pPr algn="r"/>
-            <a:r>
-              <a:rPr sz="1100" b="0" i="0">
-                <a:solidFill>
-                  <a:srgbClr val="666666"/>
-                </a:solidFill>
-                <a:latin typeface="Calibri"/>
-              </a:rPr>
-              <a:t>17</a:t>
-            </a:r>
-          </a:p>
-        </p:txBody>
-      </p:sp>
-    </p:spTree>
-  </p:cSld>
-  <p:clrMapOvr>
-    <a:masterClrMapping/>
-  </p:clrMapOvr>
-</p:sld>
-</file>
-
-<file path=ppt/slides/slide18.xml><?xml version="1.0" encoding="utf-8"?>
-<p:sld xmlns:a="http://schemas.openxmlformats.org/drawingml/2006/main" xmlns:p="http://schemas.openxmlformats.org/presentationml/2006/main" xmlns:r="http://schemas.openxmlformats.org/officeDocument/2006/relationships">
-  <p:cSld>
-    <p:bg>
-      <p:bgPr>
-        <a:solidFill>
-          <a:srgbClr val="FFFFFF"/>
-        </a:solidFill>
-        <a:effectLst/>
-      </p:bgPr>
-    </p:bg>
-    <p:spTree>
-      <p:nvGrpSpPr>
-        <p:cNvPr id="1" name=""/>
-        <p:cNvGrpSpPr/>
-        <p:nvPr/>
-      </p:nvGrpSpPr>
-      <p:grpSpPr/>
-      <p:sp>
-        <p:nvSpPr>
-          <p:cNvPr id="2" name="Rectangle 1"/>
-          <p:cNvSpPr/>
-          <p:nvPr/>
-        </p:nvSpPr>
-        <p:spPr>
-          <a:xfrm>
-            <a:off x="0" y="0"/>
-            <a:ext cx="12191695" cy="960120"/>
-          </a:xfrm>
-          <a:prstGeom prst="rect">
-            <a:avLst/>
-          </a:prstGeom>
-          <a:solidFill>
-            <a:srgbClr val="095292"/>
-          </a:solidFill>
-          <a:ln>
-            <a:noFill/>
-          </a:ln>
-        </p:spPr>
-        <p:style>
-          <a:lnRef idx="1">
-            <a:schemeClr val="accent1"/>
-          </a:lnRef>
-          <a:fillRef idx="3">
-            <a:schemeClr val="accent1"/>
-          </a:fillRef>
-          <a:effectRef idx="2">
-            <a:schemeClr val="accent1"/>
-          </a:effectRef>
-          <a:fontRef idx="minor">
-            <a:schemeClr val="lt1"/>
-          </a:fontRef>
-        </p:style>
-        <p:txBody>
-          <a:bodyPr rtlCol="0" anchor="ctr"/>
-          <a:lstStyle/>
-          <a:p>
-            <a:pPr algn="ctr"/>
-          </a:p>
-        </p:txBody>
-      </p:sp>
-      <p:sp>
-        <p:nvSpPr>
-          <p:cNvPr id="3" name="Rectangle 2"/>
-          <p:cNvSpPr/>
-          <p:nvPr/>
-        </p:nvSpPr>
-        <p:spPr>
-          <a:xfrm>
-            <a:off x="0" y="960120"/>
-            <a:ext cx="12191695" cy="41148"/>
-          </a:xfrm>
-          <a:prstGeom prst="rect">
-            <a:avLst/>
-          </a:prstGeom>
-          <a:solidFill>
-            <a:srgbClr val="FFD000"/>
-          </a:solidFill>
-          <a:ln>
-            <a:noFill/>
-          </a:ln>
-        </p:spPr>
-        <p:style>
-          <a:lnRef idx="1">
-            <a:schemeClr val="accent1"/>
-          </a:lnRef>
-          <a:fillRef idx="3">
-            <a:schemeClr val="accent1"/>
-          </a:fillRef>
-          <a:effectRef idx="2">
-            <a:schemeClr val="accent1"/>
-          </a:effectRef>
-          <a:fontRef idx="minor">
-            <a:schemeClr val="lt1"/>
-          </a:fontRef>
-        </p:style>
-        <p:txBody>
-          <a:bodyPr rtlCol="0" anchor="ctr"/>
-          <a:lstStyle/>
-          <a:p>
-            <a:pPr algn="ctr"/>
-          </a:p>
-        </p:txBody>
-      </p:sp>
-      <p:sp>
-        <p:nvSpPr>
-          <p:cNvPr id="4" name="TextBox 3"/>
-          <p:cNvSpPr txBox="1"/>
-          <p:nvPr/>
-        </p:nvSpPr>
-        <p:spPr>
-          <a:xfrm>
-            <a:off x="457200" y="164592"/>
-            <a:ext cx="11277295" cy="502920"/>
-          </a:xfrm>
-          <a:prstGeom prst="rect">
-            <a:avLst/>
-          </a:prstGeom>
-          <a:noFill/>
-        </p:spPr>
-        <p:txBody>
-          <a:bodyPr wrap="square">
-            <a:spAutoFit/>
-          </a:bodyPr>
-          <a:lstStyle/>
-          <a:p>
-            <a:r>
-              <a:rPr sz="2600" b="1" i="0">
-                <a:solidFill>
-                  <a:srgbClr val="FFFFFF"/>
-                </a:solidFill>
-                <a:latin typeface="Calibri"/>
-              </a:rPr>
-              <a:t>Como se ordena la sesion de hoy</a:t>
-            </a:r>
-          </a:p>
-        </p:txBody>
-      </p:sp>
-      <p:sp>
-        <p:nvSpPr>
-          <p:cNvPr id="5" name="TextBox 4"/>
-          <p:cNvSpPr txBox="1"/>
-          <p:nvPr/>
-        </p:nvSpPr>
-        <p:spPr>
-          <a:xfrm>
-            <a:off x="457200" y="1170432"/>
-            <a:ext cx="11277295" cy="5230368"/>
-          </a:xfrm>
-          <a:prstGeom prst="rect">
-            <a:avLst/>
-          </a:prstGeom>
-          <a:noFill/>
-        </p:spPr>
-        <p:txBody>
-          <a:bodyPr wrap="square">
-            <a:spAutoFit/>
-          </a:bodyPr>
-          <a:lstStyle/>
-          <a:p>
-            <a:pPr>
-              <a:spcAft>
-                <a:spcPts val="800"/>
-              </a:spcAft>
-            </a:pPr>
-            <a:r>
-              <a:rPr sz="2000" b="0" i="0">
-                <a:solidFill>
-                  <a:srgbClr val="333333"/>
-                </a:solidFill>
-                <a:latin typeface="Calibri"/>
-              </a:rPr>
-              <a:t>–   Sustentación </a:t>
-            </a:r>
-            <a:r>
-              <a:rPr sz="2000" b="1" i="0">
-                <a:solidFill>
-                  <a:srgbClr val="333333"/>
-                </a:solidFill>
-                <a:latin typeface="Calibri"/>
-              </a:rPr>
-              <a:t>en vivo</a:t>
-            </a:r>
-            <a:r>
-              <a:rPr sz="2000" b="0" i="0">
-                <a:solidFill>
-                  <a:srgbClr val="333333"/>
-                </a:solidFill>
-                <a:latin typeface="Calibri"/>
-              </a:rPr>
-              <a:t>, en este bloque: no se reemplaza por video grabado.</a:t>
-            </a:r>
-          </a:p>
-          <a:p>
-            <a:pPr>
-              <a:spcAft>
-                <a:spcPts val="800"/>
-              </a:spcAft>
-            </a:pPr>
-            <a:r>
-              <a:rPr sz="2000" b="0" i="0">
-                <a:solidFill>
-                  <a:srgbClr val="333333"/>
-                </a:solidFill>
-                <a:latin typeface="Calibri"/>
-              </a:rPr>
-              <a:t>–   Turnos de </a:t>
-            </a:r>
-            <a:r>
-              <a:rPr sz="2000" b="1" i="0">
-                <a:solidFill>
-                  <a:srgbClr val="333333"/>
-                </a:solidFill>
-                <a:latin typeface="Calibri"/>
-              </a:rPr>
-              <a:t>5–8 min de pitch + Q&amp;A</a:t>
-            </a:r>
-            <a:r>
-              <a:rPr sz="2000" b="0" i="0">
-                <a:solidFill>
-                  <a:srgbClr val="333333"/>
-                </a:solidFill>
-                <a:latin typeface="Calibri"/>
-              </a:rPr>
-              <a:t>; el orden se sortea al empezar.</a:t>
-            </a:r>
-          </a:p>
-          <a:p>
-            <a:pPr>
-              <a:spcAft>
-                <a:spcPts val="800"/>
-              </a:spcAft>
-            </a:pPr>
-            <a:r>
-              <a:rPr sz="2000" b="0" i="0">
-                <a:solidFill>
-                  <a:srgbClr val="333333"/>
-                </a:solidFill>
-                <a:latin typeface="Calibri"/>
-              </a:rPr>
-              <a:t>–   En tu turno muestra una </a:t>
-            </a:r>
-            <a:r>
-              <a:rPr sz="2000" b="1" i="0">
-                <a:solidFill>
-                  <a:srgbClr val="333333"/>
-                </a:solidFill>
-                <a:latin typeface="Calibri"/>
-              </a:rPr>
-              <a:t>ejecución real</a:t>
-            </a:r>
-            <a:r>
-              <a:rPr sz="2000" b="0" i="0">
-                <a:solidFill>
-                  <a:srgbClr val="333333"/>
-                </a:solidFill>
-                <a:latin typeface="Calibri"/>
-              </a:rPr>
-              <a:t> (procedimiento OK + caso rechazado), no solo capturas.</a:t>
-            </a:r>
-          </a:p>
-          <a:p>
-            <a:pPr>
-              <a:spcAft>
-                <a:spcPts val="800"/>
-              </a:spcAft>
-            </a:pPr>
-            <a:r>
-              <a:rPr sz="2000" b="0" i="0">
-                <a:solidFill>
-                  <a:srgbClr val="333333"/>
-                </a:solidFill>
-                <a:latin typeface="Calibri"/>
-              </a:rPr>
-              <a:t>–   Mientras otros presentan, escuchas: el cierre del curso se hace con todo el grupo.</a:t>
-            </a:r>
-          </a:p>
-          <a:p>
-            <a:pPr>
-              <a:spcAft>
-                <a:spcPts val="800"/>
-              </a:spcAft>
-            </a:pPr>
-            <a:r>
-              <a:rPr sz="2000" b="0" i="0">
-                <a:solidFill>
-                  <a:srgbClr val="333333"/>
-                </a:solidFill>
-                <a:latin typeface="Calibri"/>
-              </a:rPr>
-              <a:t>–   Cada decisión se defiende con su porqué: la restricción, el rol, el índice o el procedimiento que la sostiene.</a:t>
-            </a:r>
-          </a:p>
-        </p:txBody>
-      </p:sp>
-      <p:sp>
-        <p:nvSpPr>
-          <p:cNvPr id="6" name="TextBox 5"/>
-          <p:cNvSpPr txBox="1"/>
-          <p:nvPr/>
-        </p:nvSpPr>
-        <p:spPr>
-          <a:xfrm>
-            <a:off x="11185855" y="6473952"/>
-            <a:ext cx="640080" cy="274320"/>
-          </a:xfrm>
-          <a:prstGeom prst="rect">
-            <a:avLst/>
-          </a:prstGeom>
-          <a:noFill/>
-        </p:spPr>
-        <p:txBody>
-          <a:bodyPr wrap="square">
-            <a:spAutoFit/>
-          </a:bodyPr>
-          <a:lstStyle/>
-          <a:p>
-            <a:pPr algn="r"/>
-            <a:r>
-              <a:rPr sz="1100" b="0" i="0">
-                <a:solidFill>
-                  <a:srgbClr val="666666"/>
-                </a:solidFill>
-                <a:latin typeface="Calibri"/>
-              </a:rPr>
-              <a:t>18</a:t>
-            </a:r>
-          </a:p>
-        </p:txBody>
-      </p:sp>
-    </p:spTree>
-  </p:cSld>
-  <p:clrMapOvr>
-    <a:masterClrMapping/>
-  </p:clrMapOvr>
-</p:sld>
-</file>
-
-<file path=ppt/slides/slide19.xml><?xml version="1.0" encoding="utf-8"?>
-<p:sld xmlns:a="http://schemas.openxmlformats.org/drawingml/2006/main" xmlns:p="http://schemas.openxmlformats.org/presentationml/2006/main" xmlns:r="http://schemas.openxmlformats.org/officeDocument/2006/relationships">
-  <p:cSld>
-    <p:bg>
-      <p:bgPr>
-        <a:solidFill>
-          <a:srgbClr val="FFFFFF"/>
-        </a:solidFill>
-        <a:effectLst/>
-      </p:bgPr>
-    </p:bg>
-    <p:spTree>
-      <p:nvGrpSpPr>
-        <p:cNvPr id="1" name=""/>
-        <p:cNvGrpSpPr/>
-        <p:nvPr/>
-      </p:nvGrpSpPr>
-      <p:grpSpPr/>
-      <p:sp>
-        <p:nvSpPr>
-          <p:cNvPr id="2" name="Rectangle 1"/>
-          <p:cNvSpPr/>
-          <p:nvPr/>
-        </p:nvSpPr>
-        <p:spPr>
-          <a:xfrm>
-            <a:off x="0" y="0"/>
             <a:ext cx="12191695" cy="164592"/>
           </a:xfrm>
           <a:prstGeom prst="rect">
@@ -7251,14 +6058,118 @@
       </p:sp>
       <p:sp>
         <p:nvSpPr>
-          <p:cNvPr id="5" name="TextBox 4"/>
+          <p:cNvPr id="5" name="Rounded Rectangle 4"/>
+          <p:cNvSpPr/>
+          <p:nvPr/>
+        </p:nvSpPr>
+        <p:spPr>
+          <a:xfrm>
+            <a:off x="5797149" y="1573813"/>
+            <a:ext cx="6010497" cy="4057845"/>
+          </a:xfrm>
+          <a:prstGeom prst="roundRect">
+            <a:avLst>
+              <a:gd name="adj" fmla="val 4000"/>
+            </a:avLst>
+          </a:prstGeom>
+          <a:solidFill>
+            <a:srgbClr val="E8EEF4"/>
+          </a:solidFill>
+          <a:ln>
+            <a:noFill/>
+          </a:ln>
+        </p:spPr>
+        <p:style>
+          <a:lnRef idx="1">
+            <a:schemeClr val="accent1"/>
+          </a:lnRef>
+          <a:fillRef idx="3">
+            <a:schemeClr val="accent1"/>
+          </a:fillRef>
+          <a:effectRef idx="2">
+            <a:schemeClr val="accent1"/>
+          </a:effectRef>
+          <a:fontRef idx="minor">
+            <a:schemeClr val="lt1"/>
+          </a:fontRef>
+        </p:style>
+        <p:txBody>
+          <a:bodyPr rtlCol="0" anchor="ctr"/>
+          <a:lstStyle/>
+          <a:p>
+            <a:pPr algn="ctr"/>
+          </a:p>
+        </p:txBody>
+      </p:sp>
+      <p:pic>
+        <p:nvPicPr>
+          <p:cNvPr id="6" name="Picture 5" descr="notebook-planning-desk-coffee.jpg"/>
+          <p:cNvPicPr>
+            <a:picLocks noChangeAspect="1"/>
+          </p:cNvPicPr>
+          <p:nvPr/>
+        </p:nvPicPr>
+        <p:blipFill>
+          <a:blip r:embed="rId2"/>
+          <a:stretch>
+            <a:fillRect/>
+          </a:stretch>
+        </p:blipFill>
+        <p:spPr>
+          <a:xfrm>
+            <a:off x="5870301" y="1646965"/>
+            <a:ext cx="5864193" cy="3911541"/>
+          </a:xfrm>
+          <a:prstGeom prst="rect">
+            <a:avLst/>
+          </a:prstGeom>
+        </p:spPr>
+      </p:pic>
+      <p:sp>
+        <p:nvSpPr>
+          <p:cNvPr id="7" name="TextBox 6"/>
           <p:cNvSpPr txBox="1"/>
           <p:nvPr/>
         </p:nvSpPr>
         <p:spPr>
           <a:xfrm>
-            <a:off x="457200" y="1170432"/>
-            <a:ext cx="11277295" cy="5230368"/>
+            <a:off x="5870301" y="5961888"/>
+            <a:ext cx="5864193" cy="320040"/>
+          </a:xfrm>
+          <a:prstGeom prst="rect">
+            <a:avLst/>
+          </a:prstGeom>
+          <a:noFill/>
+        </p:spPr>
+        <p:txBody>
+          <a:bodyPr wrap="square">
+            <a:spAutoFit/>
+          </a:bodyPr>
+          <a:lstStyle/>
+          <a:p>
+            <a:pPr algn="ctr"/>
+            <a:r>
+              <a:rPr sz="1100" b="0" i="1">
+                <a:solidFill>
+                  <a:srgbClr val="666666"/>
+                </a:solidFill>
+                <a:latin typeface="Calibri"/>
+              </a:rPr>
+              <a:t>Foto: Cup of  Couple · Pexels</a:t>
+            </a:r>
+          </a:p>
+        </p:txBody>
+      </p:sp>
+      <p:sp>
+        <p:nvSpPr>
+          <p:cNvPr id="8" name="TextBox 7"/>
+          <p:cNvSpPr txBox="1"/>
+          <p:nvPr/>
+        </p:nvSpPr>
+        <p:spPr>
+          <a:xfrm>
+            <a:off x="457200" y="1353312"/>
+            <a:ext cx="5093061" cy="5047488"/>
           </a:xfrm>
           <a:prstGeom prst="rect">
             <a:avLst/>
@@ -7406,45 +6317,11 @@
               <a:t>–   Sustentar es justificar decisiones: por qué esta tabla, esta restricción, este índice.</a:t>
             </a:r>
           </a:p>
-          <a:p>
-            <a:pPr>
-              <a:spcAft>
-                <a:spcPts val="800"/>
-              </a:spcAft>
-            </a:pPr>
-            <a:r>
-              <a:rPr sz="2000" b="0" i="0">
-                <a:solidFill>
-                  <a:srgbClr val="333333"/>
-                </a:solidFill>
-                <a:latin typeface="Calibri"/>
-              </a:rPr>
-              <a:t>–   </a:t>
-            </a:r>
-            <a:r>
-              <a:rPr sz="2000" b="1" i="0">
-                <a:solidFill>
-                  <a:srgbClr val="333333"/>
-                </a:solidFill>
-                <a:latin typeface="Calibri"/>
-              </a:rPr>
-              <a:t>Ejes de hoy:</a:t>
-            </a:r>
-            <a:r>
-              <a:rPr sz="2000" b="0" i="0">
-                <a:solidFill>
-                  <a:srgbClr val="333333"/>
-                </a:solidFill>
-                <a:latin typeface="Calibri"/>
-              </a:rPr>
-              <a:t> Sustentar no es describir · Las cuatro preguntas de por que que se hacen casi siempre · La cuarta pregunta, la que mas se falla.</a:t>
-            </a:r>
-          </a:p>
-        </p:txBody>
-      </p:sp>
-      <p:sp>
-        <p:nvSpPr>
-          <p:cNvPr id="6" name="TextBox 5"/>
+        </p:txBody>
+      </p:sp>
+      <p:sp>
+        <p:nvSpPr>
+          <p:cNvPr id="9" name="TextBox 8"/>
           <p:cNvSpPr txBox="1"/>
           <p:nvPr/>
         </p:nvSpPr>
@@ -8240,21 +7117,173 @@
                 </a:solidFill>
                 <a:latin typeface="Calibri"/>
               </a:rPr>
-              <a:t>Sustentar no es describir: el eje de toda la clase (1/2)</a:t>
-            </a:r>
-          </a:p>
-        </p:txBody>
-      </p:sp>
-      <p:sp>
-        <p:nvSpPr>
-          <p:cNvPr id="5" name="TextBox 4"/>
+              <a:t>Sustentar no es describir: el eje de toda la clase</a:t>
+            </a:r>
+          </a:p>
+        </p:txBody>
+      </p:sp>
+      <p:sp>
+        <p:nvSpPr>
+          <p:cNvPr id="5" name="Rounded Rectangle 4"/>
+          <p:cNvSpPr/>
+          <p:nvPr/>
+        </p:nvSpPr>
+        <p:spPr>
+          <a:xfrm>
+            <a:off x="5803166" y="1188719"/>
+            <a:ext cx="5998464" cy="4828032"/>
+          </a:xfrm>
+          <a:prstGeom prst="roundRect">
+            <a:avLst>
+              <a:gd name="adj" fmla="val 4000"/>
+            </a:avLst>
+          </a:prstGeom>
+          <a:solidFill>
+            <a:srgbClr val="E8EEF4"/>
+          </a:solidFill>
+          <a:ln>
+            <a:noFill/>
+          </a:ln>
+        </p:spPr>
+        <p:style>
+          <a:lnRef idx="1">
+            <a:schemeClr val="accent1"/>
+          </a:lnRef>
+          <a:fillRef idx="3">
+            <a:schemeClr val="accent1"/>
+          </a:fillRef>
+          <a:effectRef idx="2">
+            <a:schemeClr val="accent1"/>
+          </a:effectRef>
+          <a:fontRef idx="minor">
+            <a:schemeClr val="lt1"/>
+          </a:fontRef>
+        </p:style>
+        <p:txBody>
+          <a:bodyPr rtlCol="0" anchor="ctr"/>
+          <a:lstStyle/>
+          <a:p>
+            <a:pPr algn="ctr"/>
+          </a:p>
+        </p:txBody>
+      </p:sp>
+      <p:pic>
+        <p:nvPicPr>
+          <p:cNvPr id="6" name="Picture 5" descr="describir-sustentar-paso1.png"/>
+          <p:cNvPicPr>
+            <a:picLocks noChangeAspect="1"/>
+          </p:cNvPicPr>
+          <p:nvPr/>
+        </p:nvPicPr>
+        <p:blipFill>
+          <a:blip r:embed="rId2"/>
+          <a:stretch>
+            <a:fillRect/>
+          </a:stretch>
+        </p:blipFill>
+        <p:spPr>
+          <a:xfrm>
+            <a:off x="5876318" y="1261872"/>
+            <a:ext cx="5852160" cy="4681728"/>
+          </a:xfrm>
+          <a:prstGeom prst="rect">
+            <a:avLst/>
+          </a:prstGeom>
+        </p:spPr>
+      </p:pic>
+      <p:pic>
+        <p:nvPicPr>
+          <p:cNvPr id="7" name="Picture 6" descr="describir-sustentar-paso2.png"/>
+          <p:cNvPicPr>
+            <a:picLocks noChangeAspect="1"/>
+          </p:cNvPicPr>
+          <p:nvPr/>
+        </p:nvPicPr>
+        <p:blipFill>
+          <a:blip r:embed="rId3"/>
+          <a:stretch>
+            <a:fillRect/>
+          </a:stretch>
+        </p:blipFill>
+        <p:spPr>
+          <a:xfrm>
+            <a:off x="5876318" y="1261872"/>
+            <a:ext cx="5852160" cy="4681728"/>
+          </a:xfrm>
+          <a:prstGeom prst="rect">
+            <a:avLst/>
+          </a:prstGeom>
+        </p:spPr>
+      </p:pic>
+      <p:pic>
+        <p:nvPicPr>
+          <p:cNvPr id="8" name="Picture 7" descr="describir-sustentar-paso3.png"/>
+          <p:cNvPicPr>
+            <a:picLocks noChangeAspect="1"/>
+          </p:cNvPicPr>
+          <p:nvPr/>
+        </p:nvPicPr>
+        <p:blipFill>
+          <a:blip r:embed="rId4"/>
+          <a:stretch>
+            <a:fillRect/>
+          </a:stretch>
+        </p:blipFill>
+        <p:spPr>
+          <a:xfrm>
+            <a:off x="5876318" y="1261872"/>
+            <a:ext cx="5852160" cy="4681728"/>
+          </a:xfrm>
+          <a:prstGeom prst="rect">
+            <a:avLst/>
+          </a:prstGeom>
+        </p:spPr>
+      </p:pic>
+      <p:sp>
+        <p:nvSpPr>
+          <p:cNvPr id="13" name="TextBox 12"/>
           <p:cNvSpPr txBox="1"/>
           <p:nvPr/>
         </p:nvSpPr>
         <p:spPr>
           <a:xfrm>
-            <a:off x="457200" y="1170432"/>
-            <a:ext cx="11277295" cy="5230368"/>
+            <a:off x="5870301" y="5961888"/>
+            <a:ext cx="5864193" cy="320040"/>
+          </a:xfrm>
+          <a:prstGeom prst="rect">
+            <a:avLst/>
+          </a:prstGeom>
+          <a:noFill/>
+        </p:spPr>
+        <p:txBody>
+          <a:bodyPr wrap="square">
+            <a:spAutoFit/>
+          </a:bodyPr>
+          <a:lstStyle/>
+          <a:p>
+            <a:pPr algn="ctr"/>
+            <a:r>
+              <a:rPr sz="1100" b="0" i="1">
+                <a:solidFill>
+                  <a:srgbClr val="666666"/>
+                </a:solidFill>
+                <a:latin typeface="Calibri"/>
+              </a:rPr>
+              <a:t>Clic para avanzar la animación</a:t>
+            </a:r>
+          </a:p>
+        </p:txBody>
+      </p:sp>
+      <p:sp>
+        <p:nvSpPr>
+          <p:cNvPr id="14" name="TextBox 13"/>
+          <p:cNvSpPr txBox="1"/>
+          <p:nvPr/>
+        </p:nvSpPr>
+        <p:spPr>
+          <a:xfrm>
+            <a:off x="457200" y="1353312"/>
+            <a:ext cx="5093061" cy="5047488"/>
           </a:xfrm>
           <a:prstGeom prst="rect">
             <a:avLst/>
@@ -8327,30 +7356,14 @@
                 </a:solidFill>
                 <a:latin typeface="Calibri"/>
               </a:rPr>
-              <a:t>–   La razon por la que esto importa mas en bases de datos que en casi cualquier otra parte del software es el costo de revertir: cambiar el texto de un boton cuesta minutos</a:t>
-            </a:r>
-          </a:p>
-          <a:p>
-            <a:pPr>
-              <a:spcAft>
-                <a:spcPts val="800"/>
-              </a:spcAft>
-            </a:pPr>
-            <a:r>
-              <a:rPr sz="2000" b="0" i="0">
-                <a:solidFill>
-                  <a:srgbClr val="333333"/>
-                </a:solidFill>
-                <a:latin typeface="Calibri"/>
-              </a:rPr>
-              <a:t>–   Mientras que partir en dos una tabla que ya tiene cien mil filas y seis procedimientos apuntando a ella cuesta una migracion, una ventana de mantenimiento y el riesgo real de perder datos.</a:t>
-            </a:r>
-          </a:p>
-        </p:txBody>
-      </p:sp>
-      <p:sp>
-        <p:nvSpPr>
-          <p:cNvPr id="6" name="TextBox 5"/>
+              <a:t>–   La razon por la que esto importa mas en bases de datos que en casi cualquier otra parte del software es el costo de revertir.</a:t>
+            </a:r>
+          </a:p>
+        </p:txBody>
+      </p:sp>
+      <p:sp>
+        <p:nvSpPr>
+          <p:cNvPr id="15" name="TextBox 14"/>
           <p:cNvSpPr txBox="1"/>
           <p:nvPr/>
         </p:nvSpPr>
@@ -8388,6 +7401,142 @@
   <p:clrMapOvr>
     <a:masterClrMapping/>
   </p:clrMapOvr>
+  <p:timing>
+    <p:tnLst>
+      <p:par>
+        <p:cTn id="1" dur="indefinite" restart="never" nodeType="tmRoot">
+          <p:childTnLst>
+            <p:seq concurrent="1" nextAc="seek">
+              <p:cTn id="2" dur="indefinite" nodeType="mainSeq">
+                <p:childTnLst>
+                  <p:par>
+                    <p:cTn id="3" fill="hold">
+                      <p:stCondLst>
+                        <p:cond delay="indefinite"/>
+                      </p:stCondLst>
+                      <p:childTnLst>
+                        <p:par>
+                          <p:cTn id="4" fill="hold">
+                            <p:stCondLst>
+                              <p:cond delay="0"/>
+                            </p:stCondLst>
+                            <p:childTnLst>
+                              <p:par>
+                                <p:cTn id="5" presetID="10" presetClass="entr" presetSubtype="0" fill="hold" nodeType="clickEffect">
+                                  <p:stCondLst>
+                                    <p:cond delay="0"/>
+                                  </p:stCondLst>
+                                  <p:childTnLst>
+                                    <p:set>
+                                      <p:cBhvr>
+                                        <p:cTn id="6" dur="1" fill="hold">
+                                          <p:stCondLst>
+                                            <p:cond delay="0"/>
+                                          </p:stCondLst>
+                                        </p:cTn>
+                                        <p:tgtEl>
+                                          <p:spTgt spid="7"/>
+                                        </p:tgtEl>
+                                        <p:attrNameLst>
+                                          <p:attrName>style.visibility</p:attrName>
+                                        </p:attrNameLst>
+                                      </p:cBhvr>
+                                      <p:to>
+                                        <p:strVal val="visible"/>
+                                      </p:to>
+                                    </p:set>
+                                    <p:animEffect transition="in" filter="fade">
+                                      <p:cBhvr>
+                                        <p:cTn id="7" dur="450"/>
+                                        <p:tgtEl>
+                                          <p:spTgt spid="7"/>
+                                        </p:tgtEl>
+                                      </p:cBhvr>
+                                    </p:animEffect>
+                                  </p:childTnLst>
+                                </p:cTn>
+                              </p:par>
+                            </p:childTnLst>
+                          </p:cTn>
+                        </p:par>
+                      </p:childTnLst>
+                    </p:cTn>
+                  </p:par>
+                  <p:par>
+                    <p:cTn id="8" fill="hold">
+                      <p:stCondLst>
+                        <p:cond delay="indefinite"/>
+                      </p:stCondLst>
+                      <p:childTnLst>
+                        <p:par>
+                          <p:cTn id="9" fill="hold">
+                            <p:stCondLst>
+                              <p:cond delay="0"/>
+                            </p:stCondLst>
+                            <p:childTnLst>
+                              <p:par>
+                                <p:cTn id="10" presetID="10" presetClass="entr" presetSubtype="0" fill="hold" nodeType="clickEffect">
+                                  <p:stCondLst>
+                                    <p:cond delay="0"/>
+                                  </p:stCondLst>
+                                  <p:childTnLst>
+                                    <p:set>
+                                      <p:cBhvr>
+                                        <p:cTn id="11" dur="1" fill="hold">
+                                          <p:stCondLst>
+                                            <p:cond delay="0"/>
+                                          </p:stCondLst>
+                                        </p:cTn>
+                                        <p:tgtEl>
+                                          <p:spTgt spid="8"/>
+                                        </p:tgtEl>
+                                        <p:attrNameLst>
+                                          <p:attrName>style.visibility</p:attrName>
+                                        </p:attrNameLst>
+                                      </p:cBhvr>
+                                      <p:to>
+                                        <p:strVal val="visible"/>
+                                      </p:to>
+                                    </p:set>
+                                    <p:animEffect transition="in" filter="fade">
+                                      <p:cBhvr>
+                                        <p:cTn id="12" dur="450"/>
+                                        <p:tgtEl>
+                                          <p:spTgt spid="8"/>
+                                        </p:tgtEl>
+                                      </p:cBhvr>
+                                    </p:animEffect>
+                                  </p:childTnLst>
+                                </p:cTn>
+                              </p:par>
+                            </p:childTnLst>
+                          </p:cTn>
+                        </p:par>
+                      </p:childTnLst>
+                    </p:cTn>
+                  </p:par>
+                </p:childTnLst>
+              </p:cTn>
+              <p:prevCondLst>
+                <p:cond evt="onPrev" delay="0">
+                  <p:tgtEl>
+                    <p:sldTgt/>
+                  </p:tgtEl>
+                </p:cond>
+              </p:prevCondLst>
+              <p:nextCondLst>
+                <p:cond evt="onNext" delay="0">
+                  <p:tgtEl>
+                    <p:sldTgt/>
+                  </p:tgtEl>
+                </p:cond>
+              </p:nextCondLst>
+            </p:seq>
+          </p:childTnLst>
+        </p:cTn>
+      </p:par>
+    </p:tnLst>
+  </p:timing>
 </p:sld>
 </file>
 
@@ -8524,21 +7673,197 @@
                 </a:solidFill>
                 <a:latin typeface="Calibri"/>
               </a:rPr>
-              <a:t>Sustentar no es describir: el eje de toda la clase (2/2)</a:t>
-            </a:r>
-          </a:p>
-        </p:txBody>
-      </p:sp>
-      <p:sp>
-        <p:nvSpPr>
-          <p:cNvPr id="5" name="TextBox 4"/>
+              <a:t>Las cuatro preguntas de por que que se hacen casi siempre</a:t>
+            </a:r>
+          </a:p>
+        </p:txBody>
+      </p:sp>
+      <p:sp>
+        <p:nvSpPr>
+          <p:cNvPr id="5" name="Rounded Rectangle 4"/>
+          <p:cNvSpPr/>
+          <p:nvPr/>
+        </p:nvSpPr>
+        <p:spPr>
+          <a:xfrm>
+            <a:off x="5803166" y="1188719"/>
+            <a:ext cx="5998464" cy="4828032"/>
+          </a:xfrm>
+          <a:prstGeom prst="roundRect">
+            <a:avLst>
+              <a:gd name="adj" fmla="val 4000"/>
+            </a:avLst>
+          </a:prstGeom>
+          <a:solidFill>
+            <a:srgbClr val="E8EEF4"/>
+          </a:solidFill>
+          <a:ln>
+            <a:noFill/>
+          </a:ln>
+        </p:spPr>
+        <p:style>
+          <a:lnRef idx="1">
+            <a:schemeClr val="accent1"/>
+          </a:lnRef>
+          <a:fillRef idx="3">
+            <a:schemeClr val="accent1"/>
+          </a:fillRef>
+          <a:effectRef idx="2">
+            <a:schemeClr val="accent1"/>
+          </a:effectRef>
+          <a:fontRef idx="minor">
+            <a:schemeClr val="lt1"/>
+          </a:fontRef>
+        </p:style>
+        <p:txBody>
+          <a:bodyPr rtlCol="0" anchor="ctr"/>
+          <a:lstStyle/>
+          <a:p>
+            <a:pPr algn="ctr"/>
+          </a:p>
+        </p:txBody>
+      </p:sp>
+      <p:pic>
+        <p:nvPicPr>
+          <p:cNvPr id="6" name="Picture 5" descr="cuatro-porques-paso1.png"/>
+          <p:cNvPicPr>
+            <a:picLocks noChangeAspect="1"/>
+          </p:cNvPicPr>
+          <p:nvPr/>
+        </p:nvPicPr>
+        <p:blipFill>
+          <a:blip r:embed="rId2"/>
+          <a:stretch>
+            <a:fillRect/>
+          </a:stretch>
+        </p:blipFill>
+        <p:spPr>
+          <a:xfrm>
+            <a:off x="5876318" y="1261872"/>
+            <a:ext cx="5852160" cy="4681728"/>
+          </a:xfrm>
+          <a:prstGeom prst="rect">
+            <a:avLst/>
+          </a:prstGeom>
+        </p:spPr>
+      </p:pic>
+      <p:pic>
+        <p:nvPicPr>
+          <p:cNvPr id="7" name="Picture 6" descr="cuatro-porques-paso2.png"/>
+          <p:cNvPicPr>
+            <a:picLocks noChangeAspect="1"/>
+          </p:cNvPicPr>
+          <p:nvPr/>
+        </p:nvPicPr>
+        <p:blipFill>
+          <a:blip r:embed="rId3"/>
+          <a:stretch>
+            <a:fillRect/>
+          </a:stretch>
+        </p:blipFill>
+        <p:spPr>
+          <a:xfrm>
+            <a:off x="5876318" y="1261872"/>
+            <a:ext cx="5852160" cy="4681728"/>
+          </a:xfrm>
+          <a:prstGeom prst="rect">
+            <a:avLst/>
+          </a:prstGeom>
+        </p:spPr>
+      </p:pic>
+      <p:pic>
+        <p:nvPicPr>
+          <p:cNvPr id="8" name="Picture 7" descr="cuatro-porques-paso3.png"/>
+          <p:cNvPicPr>
+            <a:picLocks noChangeAspect="1"/>
+          </p:cNvPicPr>
+          <p:nvPr/>
+        </p:nvPicPr>
+        <p:blipFill>
+          <a:blip r:embed="rId4"/>
+          <a:stretch>
+            <a:fillRect/>
+          </a:stretch>
+        </p:blipFill>
+        <p:spPr>
+          <a:xfrm>
+            <a:off x="5876318" y="1261872"/>
+            <a:ext cx="5852160" cy="4681728"/>
+          </a:xfrm>
+          <a:prstGeom prst="rect">
+            <a:avLst/>
+          </a:prstGeom>
+        </p:spPr>
+      </p:pic>
+      <p:pic>
+        <p:nvPicPr>
+          <p:cNvPr id="9" name="Picture 8" descr="cuatro-porques-paso4.png"/>
+          <p:cNvPicPr>
+            <a:picLocks noChangeAspect="1"/>
+          </p:cNvPicPr>
+          <p:nvPr/>
+        </p:nvPicPr>
+        <p:blipFill>
+          <a:blip r:embed="rId5"/>
+          <a:stretch>
+            <a:fillRect/>
+          </a:stretch>
+        </p:blipFill>
+        <p:spPr>
+          <a:xfrm>
+            <a:off x="5876318" y="1261872"/>
+            <a:ext cx="5852160" cy="4681728"/>
+          </a:xfrm>
+          <a:prstGeom prst="rect">
+            <a:avLst/>
+          </a:prstGeom>
+        </p:spPr>
+      </p:pic>
+      <p:sp>
+        <p:nvSpPr>
+          <p:cNvPr id="18" name="TextBox 17"/>
           <p:cNvSpPr txBox="1"/>
           <p:nvPr/>
         </p:nvSpPr>
         <p:spPr>
           <a:xfrm>
-            <a:off x="457200" y="1170432"/>
-            <a:ext cx="11277295" cy="5230368"/>
+            <a:off x="5870301" y="5961888"/>
+            <a:ext cx="5864193" cy="320040"/>
+          </a:xfrm>
+          <a:prstGeom prst="rect">
+            <a:avLst/>
+          </a:prstGeom>
+          <a:noFill/>
+        </p:spPr>
+        <p:txBody>
+          <a:bodyPr wrap="square">
+            <a:spAutoFit/>
+          </a:bodyPr>
+          <a:lstStyle/>
+          <a:p>
+            <a:pPr algn="ctr"/>
+            <a:r>
+              <a:rPr sz="1100" b="0" i="1">
+                <a:solidFill>
+                  <a:srgbClr val="666666"/>
+                </a:solidFill>
+                <a:latin typeface="Calibri"/>
+              </a:rPr>
+              <a:t>Clic para avanzar la animación</a:t>
+            </a:r>
+          </a:p>
+        </p:txBody>
+      </p:sp>
+      <p:sp>
+        <p:nvSpPr>
+          <p:cNvPr id="19" name="TextBox 18"/>
+          <p:cNvSpPr txBox="1"/>
+          <p:nvPr/>
+        </p:nvSpPr>
+        <p:spPr>
+          <a:xfrm>
+            <a:off x="457200" y="1353312"/>
+            <a:ext cx="5093061" cy="5047488"/>
           </a:xfrm>
           <a:prstGeom prst="rect">
             <a:avLst/>
@@ -8563,7 +7888,7 @@
                 </a:solidFill>
                 <a:latin typeface="Calibri"/>
               </a:rPr>
-              <a:t>–   Una decision de modelado es, por definicion, una decision costosa de deshacer.</a:t>
+              <a:t>–   Hay cuatro preguntas de por que que se hacen casi siempre, y el estudiante debe llegar con las cuatro respondidas.</a:t>
             </a:r>
           </a:p>
           <a:p>
@@ -8579,7 +7904,7 @@
                 </a:solidFill>
                 <a:latin typeface="Calibri"/>
               </a:rPr>
-              <a:t>–   La clase de hoy no trae tema nuevo: trae la teoria de como se comunica y se empaqueta un trabajo tecnico para que un tercero pueda evaluarlo, reproducirlo y usarlo sin hablar con quien lo hizo.</a:t>
+              <a:t>–   Por que esa normalizacion: la respuesta esperada es que el modelo esta en tercera forma normal.</a:t>
             </a:r>
           </a:p>
           <a:p>
@@ -8595,14 +7920,30 @@
                 </a:solidFill>
                 <a:latin typeface="Calibri"/>
               </a:rPr>
-              <a:t>–   Describir es decir que hay una tabla cita con una FK; sustentar es explicar por que la FK va en cita y no en mascota, y que pasaria si no estuviera.</a:t>
-            </a:r>
-          </a:p>
-        </p:txBody>
-      </p:sp>
-      <p:sp>
-        <p:nvSpPr>
-          <p:cNvPr id="6" name="TextBox 5"/>
+              <a:t>–   Y a continuacion se declara la desnormalizacion deliberada si existe.</a:t>
+            </a:r>
+          </a:p>
+          <a:p>
+            <a:pPr>
+              <a:spcAft>
+                <a:spcPts val="800"/>
+              </a:spcAft>
+            </a:pPr>
+            <a:r>
+              <a:rPr sz="2000" b="0" i="0">
+                <a:solidFill>
+                  <a:srgbClr val="333333"/>
+                </a:solidFill>
+                <a:latin typeface="Calibri"/>
+              </a:rPr>
+              <a:t>–   Por que ese indice: la respuesta debe nombrar la consulta concreta que lo aprovecha, por ejemplo un indice sobre (id_veterinario</a:t>
+            </a:r>
+          </a:p>
+        </p:txBody>
+      </p:sp>
+      <p:sp>
+        <p:nvSpPr>
+          <p:cNvPr id="20" name="TextBox 19"/>
           <p:cNvSpPr txBox="1"/>
           <p:nvPr/>
         </p:nvSpPr>
@@ -8640,6 +7981,195 @@
   <p:clrMapOvr>
     <a:masterClrMapping/>
   </p:clrMapOvr>
+  <p:timing>
+    <p:tnLst>
+      <p:par>
+        <p:cTn id="1" dur="indefinite" restart="never" nodeType="tmRoot">
+          <p:childTnLst>
+            <p:seq concurrent="1" nextAc="seek">
+              <p:cTn id="2" dur="indefinite" nodeType="mainSeq">
+                <p:childTnLst>
+                  <p:par>
+                    <p:cTn id="3" fill="hold">
+                      <p:stCondLst>
+                        <p:cond delay="indefinite"/>
+                      </p:stCondLst>
+                      <p:childTnLst>
+                        <p:par>
+                          <p:cTn id="4" fill="hold">
+                            <p:stCondLst>
+                              <p:cond delay="0"/>
+                            </p:stCondLst>
+                            <p:childTnLst>
+                              <p:par>
+                                <p:cTn id="5" presetID="10" presetClass="entr" presetSubtype="0" fill="hold" nodeType="clickEffect">
+                                  <p:stCondLst>
+                                    <p:cond delay="0"/>
+                                  </p:stCondLst>
+                                  <p:childTnLst>
+                                    <p:set>
+                                      <p:cBhvr>
+                                        <p:cTn id="6" dur="1" fill="hold">
+                                          <p:stCondLst>
+                                            <p:cond delay="0"/>
+                                          </p:stCondLst>
+                                        </p:cTn>
+                                        <p:tgtEl>
+                                          <p:spTgt spid="7"/>
+                                        </p:tgtEl>
+                                        <p:attrNameLst>
+                                          <p:attrName>style.visibility</p:attrName>
+                                        </p:attrNameLst>
+                                      </p:cBhvr>
+                                      <p:to>
+                                        <p:strVal val="visible"/>
+                                      </p:to>
+                                    </p:set>
+                                    <p:animEffect transition="in" filter="fade">
+                                      <p:cBhvr>
+                                        <p:cTn id="7" dur="450"/>
+                                        <p:tgtEl>
+                                          <p:spTgt spid="7"/>
+                                        </p:tgtEl>
+                                      </p:cBhvr>
+                                    </p:animEffect>
+                                  </p:childTnLst>
+                                </p:cTn>
+                              </p:par>
+                            </p:childTnLst>
+                          </p:cTn>
+                        </p:par>
+                      </p:childTnLst>
+                    </p:cTn>
+                  </p:par>
+                  <p:par>
+                    <p:cTn id="8" fill="hold">
+                      <p:stCondLst>
+                        <p:cond delay="indefinite"/>
+                      </p:stCondLst>
+                      <p:childTnLst>
+                        <p:par>
+                          <p:cTn id="9" fill="hold">
+                            <p:stCondLst>
+                              <p:cond delay="0"/>
+                            </p:stCondLst>
+                            <p:childTnLst>
+                              <p:par>
+                                <p:cTn id="10" presetID="10" presetClass="entr" presetSubtype="0" fill="hold" nodeType="clickEffect">
+                                  <p:stCondLst>
+                                    <p:cond delay="0"/>
+                                  </p:stCondLst>
+                                  <p:childTnLst>
+                                    <p:set>
+                                      <p:cBhvr>
+                                        <p:cTn id="11" dur="1" fill="hold">
+                                          <p:stCondLst>
+                                            <p:cond delay="0"/>
+                                          </p:stCondLst>
+                                        </p:cTn>
+                                        <p:tgtEl>
+                                          <p:spTgt spid="8"/>
+                                        </p:tgtEl>
+                                        <p:attrNameLst>
+                                          <p:attrName>style.visibility</p:attrName>
+                                        </p:attrNameLst>
+                                      </p:cBhvr>
+                                      <p:to>
+                                        <p:strVal val="visible"/>
+                                      </p:to>
+                                    </p:set>
+                                    <p:animEffect transition="in" filter="fade">
+                                      <p:cBhvr>
+                                        <p:cTn id="12" dur="450"/>
+                                        <p:tgtEl>
+                                          <p:spTgt spid="8"/>
+                                        </p:tgtEl>
+                                      </p:cBhvr>
+                                    </p:animEffect>
+                                  </p:childTnLst>
+                                </p:cTn>
+                              </p:par>
+                            </p:childTnLst>
+                          </p:cTn>
+                        </p:par>
+                      </p:childTnLst>
+                    </p:cTn>
+                  </p:par>
+                  <p:par>
+                    <p:cTn id="13" fill="hold">
+                      <p:stCondLst>
+                        <p:cond delay="indefinite"/>
+                      </p:stCondLst>
+                      <p:childTnLst>
+                        <p:par>
+                          <p:cTn id="14" fill="hold">
+                            <p:stCondLst>
+                              <p:cond delay="0"/>
+                            </p:stCondLst>
+                            <p:childTnLst>
+                              <p:par>
+                                <p:cTn id="15" presetID="10" presetClass="entr" presetSubtype="0" fill="hold" nodeType="clickEffect">
+                                  <p:stCondLst>
+                                    <p:cond delay="0"/>
+                                  </p:stCondLst>
+                                  <p:childTnLst>
+                                    <p:set>
+                                      <p:cBhvr>
+                                        <p:cTn id="16" dur="1" fill="hold">
+                                          <p:stCondLst>
+                                            <p:cond delay="0"/>
+                                          </p:stCondLst>
+                                        </p:cTn>
+                                        <p:tgtEl>
+                                          <p:spTgt spid="9"/>
+                                        </p:tgtEl>
+                                        <p:attrNameLst>
+                                          <p:attrName>style.visibility</p:attrName>
+                                        </p:attrNameLst>
+                                      </p:cBhvr>
+                                      <p:to>
+                                        <p:strVal val="visible"/>
+                                      </p:to>
+                                    </p:set>
+                                    <p:animEffect transition="in" filter="fade">
+                                      <p:cBhvr>
+                                        <p:cTn id="17" dur="450"/>
+                                        <p:tgtEl>
+                                          <p:spTgt spid="9"/>
+                                        </p:tgtEl>
+                                      </p:cBhvr>
+                                    </p:animEffect>
+                                  </p:childTnLst>
+                                </p:cTn>
+                              </p:par>
+                            </p:childTnLst>
+                          </p:cTn>
+                        </p:par>
+                      </p:childTnLst>
+                    </p:cTn>
+                  </p:par>
+                </p:childTnLst>
+              </p:cTn>
+              <p:prevCondLst>
+                <p:cond evt="onPrev" delay="0">
+                  <p:tgtEl>
+                    <p:sldTgt/>
+                  </p:tgtEl>
+                </p:cond>
+              </p:prevCondLst>
+              <p:nextCondLst>
+                <p:cond evt="onNext" delay="0">
+                  <p:tgtEl>
+                    <p:sldTgt/>
+                  </p:tgtEl>
+                </p:cond>
+              </p:nextCondLst>
+            </p:seq>
+          </p:childTnLst>
+        </p:cTn>
+      </p:par>
+    </p:tnLst>
+  </p:timing>
 </p:sld>
 </file>
 
@@ -8776,21 +8306,173 @@
                 </a:solidFill>
                 <a:latin typeface="Calibri"/>
               </a:rPr>
-              <a:t>Las cuatro preguntas de por que que se hacen casi siempre (1/2)</a:t>
-            </a:r>
-          </a:p>
-        </p:txBody>
-      </p:sp>
-      <p:sp>
-        <p:nvSpPr>
-          <p:cNvPr id="5" name="TextBox 4"/>
+              <a:t>La cuarta pregunta, la que mas se falla</a:t>
+            </a:r>
+          </a:p>
+        </p:txBody>
+      </p:sp>
+      <p:sp>
+        <p:nvSpPr>
+          <p:cNvPr id="5" name="Rounded Rectangle 4"/>
+          <p:cNvSpPr/>
+          <p:nvPr/>
+        </p:nvSpPr>
+        <p:spPr>
+          <a:xfrm>
+            <a:off x="5803166" y="1188719"/>
+            <a:ext cx="5998464" cy="4828032"/>
+          </a:xfrm>
+          <a:prstGeom prst="roundRect">
+            <a:avLst>
+              <a:gd name="adj" fmla="val 4000"/>
+            </a:avLst>
+          </a:prstGeom>
+          <a:solidFill>
+            <a:srgbClr val="E8EEF4"/>
+          </a:solidFill>
+          <a:ln>
+            <a:noFill/>
+          </a:ln>
+        </p:spPr>
+        <p:style>
+          <a:lnRef idx="1">
+            <a:schemeClr val="accent1"/>
+          </a:lnRef>
+          <a:fillRef idx="3">
+            <a:schemeClr val="accent1"/>
+          </a:fillRef>
+          <a:effectRef idx="2">
+            <a:schemeClr val="accent1"/>
+          </a:effectRef>
+          <a:fontRef idx="minor">
+            <a:schemeClr val="lt1"/>
+          </a:fontRef>
+        </p:style>
+        <p:txBody>
+          <a:bodyPr rtlCol="0" anchor="ctr"/>
+          <a:lstStyle/>
+          <a:p>
+            <a:pPr algn="ctr"/>
+          </a:p>
+        </p:txBody>
+      </p:sp>
+      <p:pic>
+        <p:nvPicPr>
+          <p:cNvPr id="6" name="Picture 5" descr="trigger-cobertura-paso1.png"/>
+          <p:cNvPicPr>
+            <a:picLocks noChangeAspect="1"/>
+          </p:cNvPicPr>
+          <p:nvPr/>
+        </p:nvPicPr>
+        <p:blipFill>
+          <a:blip r:embed="rId2"/>
+          <a:stretch>
+            <a:fillRect/>
+          </a:stretch>
+        </p:blipFill>
+        <p:spPr>
+          <a:xfrm>
+            <a:off x="5876318" y="1261872"/>
+            <a:ext cx="5852160" cy="4681728"/>
+          </a:xfrm>
+          <a:prstGeom prst="rect">
+            <a:avLst/>
+          </a:prstGeom>
+        </p:spPr>
+      </p:pic>
+      <p:pic>
+        <p:nvPicPr>
+          <p:cNvPr id="7" name="Picture 6" descr="trigger-cobertura-paso2.png"/>
+          <p:cNvPicPr>
+            <a:picLocks noChangeAspect="1"/>
+          </p:cNvPicPr>
+          <p:nvPr/>
+        </p:nvPicPr>
+        <p:blipFill>
+          <a:blip r:embed="rId3"/>
+          <a:stretch>
+            <a:fillRect/>
+          </a:stretch>
+        </p:blipFill>
+        <p:spPr>
+          <a:xfrm>
+            <a:off x="5876318" y="1261872"/>
+            <a:ext cx="5852160" cy="4681728"/>
+          </a:xfrm>
+          <a:prstGeom prst="rect">
+            <a:avLst/>
+          </a:prstGeom>
+        </p:spPr>
+      </p:pic>
+      <p:pic>
+        <p:nvPicPr>
+          <p:cNvPr id="8" name="Picture 7" descr="trigger-cobertura-paso3.png"/>
+          <p:cNvPicPr>
+            <a:picLocks noChangeAspect="1"/>
+          </p:cNvPicPr>
+          <p:nvPr/>
+        </p:nvPicPr>
+        <p:blipFill>
+          <a:blip r:embed="rId4"/>
+          <a:stretch>
+            <a:fillRect/>
+          </a:stretch>
+        </p:blipFill>
+        <p:spPr>
+          <a:xfrm>
+            <a:off x="5876318" y="1261872"/>
+            <a:ext cx="5852160" cy="4681728"/>
+          </a:xfrm>
+          <a:prstGeom prst="rect">
+            <a:avLst/>
+          </a:prstGeom>
+        </p:spPr>
+      </p:pic>
+      <p:sp>
+        <p:nvSpPr>
+          <p:cNvPr id="13" name="TextBox 12"/>
           <p:cNvSpPr txBox="1"/>
           <p:nvPr/>
         </p:nvSpPr>
         <p:spPr>
           <a:xfrm>
-            <a:off x="457200" y="1170432"/>
-            <a:ext cx="11277295" cy="5230368"/>
+            <a:off x="5870301" y="5961888"/>
+            <a:ext cx="5864193" cy="320040"/>
+          </a:xfrm>
+          <a:prstGeom prst="rect">
+            <a:avLst/>
+          </a:prstGeom>
+          <a:noFill/>
+        </p:spPr>
+        <p:txBody>
+          <a:bodyPr wrap="square">
+            <a:spAutoFit/>
+          </a:bodyPr>
+          <a:lstStyle/>
+          <a:p>
+            <a:pPr algn="ctr"/>
+            <a:r>
+              <a:rPr sz="1100" b="0" i="1">
+                <a:solidFill>
+                  <a:srgbClr val="666666"/>
+                </a:solidFill>
+                <a:latin typeface="Calibri"/>
+              </a:rPr>
+              <a:t>Clic para avanzar la animación</a:t>
+            </a:r>
+          </a:p>
+        </p:txBody>
+      </p:sp>
+      <p:sp>
+        <p:nvSpPr>
+          <p:cNvPr id="14" name="TextBox 13"/>
+          <p:cNvSpPr txBox="1"/>
+          <p:nvPr/>
+        </p:nvSpPr>
+        <p:spPr>
+          <a:xfrm>
+            <a:off x="457200" y="1353312"/>
+            <a:ext cx="5093061" cy="5047488"/>
           </a:xfrm>
           <a:prstGeom prst="rect">
             <a:avLst/>
@@ -8815,7 +8497,7 @@
                 </a:solidFill>
                 <a:latin typeface="Calibri"/>
               </a:rPr>
-              <a:t>–   Hay cuatro preguntas de por que que se hacen casi siempre, y el estudiante debe llegar con las cuatro respondidas.</a:t>
+              <a:t>–   Un disparador, o trigger, es un bloque de codigo que el motor ejecuta automaticamente cuando ocurre un evento sobre una tabla, sin que nadie lo…</a:t>
             </a:r>
           </a:p>
           <a:p>
@@ -8831,7 +8513,7 @@
                 </a:solidFill>
                 <a:latin typeface="Calibri"/>
               </a:rPr>
-              <a:t>–   Por que esa normalizacion: la respuesta esperada es que el modelo esta en tercera forma normal, es decir que cada atributo depende de la clave completa y de nada mas, y por eso el telefono del dueno vive en la tabla Dueno y no repetido en cada fila de Mascota.</a:t>
+              <a:t>–   El argumento a favor, y el unico que vale en una sustentacion, es la cobertura: el disparador se ejecuta no importa quien escriba.</a:t>
             </a:r>
           </a:p>
           <a:p>
@@ -8847,14 +8529,30 @@
                 </a:solidFill>
                 <a:latin typeface="Calibri"/>
               </a:rPr>
-              <a:t>–   Y a continuacion se declara la desnormalizacion deliberada si existe: «guardamos el total en Factura aunque se pueda calcular sumando el detalle, porque el total es un valor historico que no debe cambiar si manana sube el precio del insumo».</a:t>
-            </a:r>
-          </a:p>
-        </p:txBody>
-      </p:sp>
-      <p:sp>
-        <p:nvSpPr>
-          <p:cNvPr id="6" name="TextBox 5"/>
+              <a:t>–   Si la regla «el stock de un insumo nunca queda negativo» vive en el disparador.</a:t>
+            </a:r>
+          </a:p>
+          <a:p>
+            <a:pPr>
+              <a:spcAft>
+                <a:spcPts val="800"/>
+              </a:spcAft>
+            </a:pPr>
+            <a:r>
+              <a:rPr sz="2000" b="0" i="0">
+                <a:solidFill>
+                  <a:srgbClr val="333333"/>
+                </a:solidFill>
+                <a:latin typeface="Calibri"/>
+              </a:rPr>
+              <a:t>–   Lo mismo aplica al disparador de auditoria de precios.</a:t>
+            </a:r>
+          </a:p>
+        </p:txBody>
+      </p:sp>
+      <p:sp>
+        <p:nvSpPr>
+          <p:cNvPr id="15" name="TextBox 14"/>
           <p:cNvSpPr txBox="1"/>
           <p:nvPr/>
         </p:nvSpPr>
@@ -8892,6 +8590,142 @@
   <p:clrMapOvr>
     <a:masterClrMapping/>
   </p:clrMapOvr>
+  <p:timing>
+    <p:tnLst>
+      <p:par>
+        <p:cTn id="1" dur="indefinite" restart="never" nodeType="tmRoot">
+          <p:childTnLst>
+            <p:seq concurrent="1" nextAc="seek">
+              <p:cTn id="2" dur="indefinite" nodeType="mainSeq">
+                <p:childTnLst>
+                  <p:par>
+                    <p:cTn id="3" fill="hold">
+                      <p:stCondLst>
+                        <p:cond delay="indefinite"/>
+                      </p:stCondLst>
+                      <p:childTnLst>
+                        <p:par>
+                          <p:cTn id="4" fill="hold">
+                            <p:stCondLst>
+                              <p:cond delay="0"/>
+                            </p:stCondLst>
+                            <p:childTnLst>
+                              <p:par>
+                                <p:cTn id="5" presetID="10" presetClass="entr" presetSubtype="0" fill="hold" nodeType="clickEffect">
+                                  <p:stCondLst>
+                                    <p:cond delay="0"/>
+                                  </p:stCondLst>
+                                  <p:childTnLst>
+                                    <p:set>
+                                      <p:cBhvr>
+                                        <p:cTn id="6" dur="1" fill="hold">
+                                          <p:stCondLst>
+                                            <p:cond delay="0"/>
+                                          </p:stCondLst>
+                                        </p:cTn>
+                                        <p:tgtEl>
+                                          <p:spTgt spid="7"/>
+                                        </p:tgtEl>
+                                        <p:attrNameLst>
+                                          <p:attrName>style.visibility</p:attrName>
+                                        </p:attrNameLst>
+                                      </p:cBhvr>
+                                      <p:to>
+                                        <p:strVal val="visible"/>
+                                      </p:to>
+                                    </p:set>
+                                    <p:animEffect transition="in" filter="fade">
+                                      <p:cBhvr>
+                                        <p:cTn id="7" dur="450"/>
+                                        <p:tgtEl>
+                                          <p:spTgt spid="7"/>
+                                        </p:tgtEl>
+                                      </p:cBhvr>
+                                    </p:animEffect>
+                                  </p:childTnLst>
+                                </p:cTn>
+                              </p:par>
+                            </p:childTnLst>
+                          </p:cTn>
+                        </p:par>
+                      </p:childTnLst>
+                    </p:cTn>
+                  </p:par>
+                  <p:par>
+                    <p:cTn id="8" fill="hold">
+                      <p:stCondLst>
+                        <p:cond delay="indefinite"/>
+                      </p:stCondLst>
+                      <p:childTnLst>
+                        <p:par>
+                          <p:cTn id="9" fill="hold">
+                            <p:stCondLst>
+                              <p:cond delay="0"/>
+                            </p:stCondLst>
+                            <p:childTnLst>
+                              <p:par>
+                                <p:cTn id="10" presetID="10" presetClass="entr" presetSubtype="0" fill="hold" nodeType="clickEffect">
+                                  <p:stCondLst>
+                                    <p:cond delay="0"/>
+                                  </p:stCondLst>
+                                  <p:childTnLst>
+                                    <p:set>
+                                      <p:cBhvr>
+                                        <p:cTn id="11" dur="1" fill="hold">
+                                          <p:stCondLst>
+                                            <p:cond delay="0"/>
+                                          </p:stCondLst>
+                                        </p:cTn>
+                                        <p:tgtEl>
+                                          <p:spTgt spid="8"/>
+                                        </p:tgtEl>
+                                        <p:attrNameLst>
+                                          <p:attrName>style.visibility</p:attrName>
+                                        </p:attrNameLst>
+                                      </p:cBhvr>
+                                      <p:to>
+                                        <p:strVal val="visible"/>
+                                      </p:to>
+                                    </p:set>
+                                    <p:animEffect transition="in" filter="fade">
+                                      <p:cBhvr>
+                                        <p:cTn id="12" dur="450"/>
+                                        <p:tgtEl>
+                                          <p:spTgt spid="8"/>
+                                        </p:tgtEl>
+                                      </p:cBhvr>
+                                    </p:animEffect>
+                                  </p:childTnLst>
+                                </p:cTn>
+                              </p:par>
+                            </p:childTnLst>
+                          </p:cTn>
+                        </p:par>
+                      </p:childTnLst>
+                    </p:cTn>
+                  </p:par>
+                </p:childTnLst>
+              </p:cTn>
+              <p:prevCondLst>
+                <p:cond evt="onPrev" delay="0">
+                  <p:tgtEl>
+                    <p:sldTgt/>
+                  </p:tgtEl>
+                </p:cond>
+              </p:prevCondLst>
+              <p:nextCondLst>
+                <p:cond evt="onNext" delay="0">
+                  <p:tgtEl>
+                    <p:sldTgt/>
+                  </p:tgtEl>
+                </p:cond>
+              </p:nextCondLst>
+            </p:seq>
+          </p:childTnLst>
+        </p:cTn>
+      </p:par>
+    </p:tnLst>
+  </p:timing>
 </p:sld>
 </file>
 
@@ -9028,21 +8862,173 @@
                 </a:solidFill>
                 <a:latin typeface="Calibri"/>
               </a:rPr>
-              <a:t>Las cuatro preguntas de por que que se hacen casi siempre (2/2)</a:t>
-            </a:r>
-          </a:p>
-        </p:txBody>
-      </p:sp>
-      <p:sp>
-        <p:nvSpPr>
-          <p:cNvPr id="5" name="TextBox 4"/>
+              <a:t>Reproducible: un tercero llega a la misma base sin hablar con el autor</a:t>
+            </a:r>
+          </a:p>
+        </p:txBody>
+      </p:sp>
+      <p:sp>
+        <p:nvSpPr>
+          <p:cNvPr id="5" name="Rounded Rectangle 4"/>
+          <p:cNvSpPr/>
+          <p:nvPr/>
+        </p:nvSpPr>
+        <p:spPr>
+          <a:xfrm>
+            <a:off x="5803166" y="1188719"/>
+            <a:ext cx="5998464" cy="4828032"/>
+          </a:xfrm>
+          <a:prstGeom prst="roundRect">
+            <a:avLst>
+              <a:gd name="adj" fmla="val 4000"/>
+            </a:avLst>
+          </a:prstGeom>
+          <a:solidFill>
+            <a:srgbClr val="E8EEF4"/>
+          </a:solidFill>
+          <a:ln>
+            <a:noFill/>
+          </a:ln>
+        </p:spPr>
+        <p:style>
+          <a:lnRef idx="1">
+            <a:schemeClr val="accent1"/>
+          </a:lnRef>
+          <a:fillRef idx="3">
+            <a:schemeClr val="accent1"/>
+          </a:fillRef>
+          <a:effectRef idx="2">
+            <a:schemeClr val="accent1"/>
+          </a:effectRef>
+          <a:fontRef idx="minor">
+            <a:schemeClr val="lt1"/>
+          </a:fontRef>
+        </p:style>
+        <p:txBody>
+          <a:bodyPr rtlCol="0" anchor="ctr"/>
+          <a:lstStyle/>
+          <a:p>
+            <a:pPr algn="ctr"/>
+          </a:p>
+        </p:txBody>
+      </p:sp>
+      <p:pic>
+        <p:nvPicPr>
+          <p:cNvPr id="6" name="Picture 5" descr="carpeta-reproducible-paso1.png"/>
+          <p:cNvPicPr>
+            <a:picLocks noChangeAspect="1"/>
+          </p:cNvPicPr>
+          <p:nvPr/>
+        </p:nvPicPr>
+        <p:blipFill>
+          <a:blip r:embed="rId2"/>
+          <a:stretch>
+            <a:fillRect/>
+          </a:stretch>
+        </p:blipFill>
+        <p:spPr>
+          <a:xfrm>
+            <a:off x="5876318" y="1261872"/>
+            <a:ext cx="5852160" cy="4681728"/>
+          </a:xfrm>
+          <a:prstGeom prst="rect">
+            <a:avLst/>
+          </a:prstGeom>
+        </p:spPr>
+      </p:pic>
+      <p:pic>
+        <p:nvPicPr>
+          <p:cNvPr id="7" name="Picture 6" descr="carpeta-reproducible-paso2.png"/>
+          <p:cNvPicPr>
+            <a:picLocks noChangeAspect="1"/>
+          </p:cNvPicPr>
+          <p:nvPr/>
+        </p:nvPicPr>
+        <p:blipFill>
+          <a:blip r:embed="rId3"/>
+          <a:stretch>
+            <a:fillRect/>
+          </a:stretch>
+        </p:blipFill>
+        <p:spPr>
+          <a:xfrm>
+            <a:off x="5876318" y="1261872"/>
+            <a:ext cx="5852160" cy="4681728"/>
+          </a:xfrm>
+          <a:prstGeom prst="rect">
+            <a:avLst/>
+          </a:prstGeom>
+        </p:spPr>
+      </p:pic>
+      <p:pic>
+        <p:nvPicPr>
+          <p:cNvPr id="8" name="Picture 7" descr="carpeta-reproducible-paso3.png"/>
+          <p:cNvPicPr>
+            <a:picLocks noChangeAspect="1"/>
+          </p:cNvPicPr>
+          <p:nvPr/>
+        </p:nvPicPr>
+        <p:blipFill>
+          <a:blip r:embed="rId4"/>
+          <a:stretch>
+            <a:fillRect/>
+          </a:stretch>
+        </p:blipFill>
+        <p:spPr>
+          <a:xfrm>
+            <a:off x="5876318" y="1261872"/>
+            <a:ext cx="5852160" cy="4681728"/>
+          </a:xfrm>
+          <a:prstGeom prst="rect">
+            <a:avLst/>
+          </a:prstGeom>
+        </p:spPr>
+      </p:pic>
+      <p:sp>
+        <p:nvSpPr>
+          <p:cNvPr id="13" name="TextBox 12"/>
           <p:cNvSpPr txBox="1"/>
           <p:nvPr/>
         </p:nvSpPr>
         <p:spPr>
           <a:xfrm>
-            <a:off x="457200" y="1170432"/>
-            <a:ext cx="11277295" cy="5230368"/>
+            <a:off x="5870301" y="5961888"/>
+            <a:ext cx="5864193" cy="320040"/>
+          </a:xfrm>
+          <a:prstGeom prst="rect">
+            <a:avLst/>
+          </a:prstGeom>
+          <a:noFill/>
+        </p:spPr>
+        <p:txBody>
+          <a:bodyPr wrap="square">
+            <a:spAutoFit/>
+          </a:bodyPr>
+          <a:lstStyle/>
+          <a:p>
+            <a:pPr algn="ctr"/>
+            <a:r>
+              <a:rPr sz="1100" b="0" i="1">
+                <a:solidFill>
+                  <a:srgbClr val="666666"/>
+                </a:solidFill>
+                <a:latin typeface="Calibri"/>
+              </a:rPr>
+              <a:t>Clic para avanzar la animación</a:t>
+            </a:r>
+          </a:p>
+        </p:txBody>
+      </p:sp>
+      <p:sp>
+        <p:nvSpPr>
+          <p:cNvPr id="14" name="TextBox 13"/>
+          <p:cNvSpPr txBox="1"/>
+          <p:nvPr/>
+        </p:nvSpPr>
+        <p:spPr>
+          <a:xfrm>
+            <a:off x="457200" y="1353312"/>
+            <a:ext cx="5093061" cy="5047488"/>
           </a:xfrm>
           <a:prstGeom prst="rect">
             <a:avLst/>
@@ -9067,7 +9053,7 @@
                 </a:solidFill>
                 <a:latin typeface="Calibri"/>
               </a:rPr>
-              <a:t>–   Por que ese indice: la respuesta debe nombrar la consulta concreta que lo aprovecha, por ejemplo un indice sobre (id_veterinario</a:t>
+              <a:t>–   Un proyecto de base de datos es reproducible si un tercero, con solo el archivo comprimido y sin hablar con el autor, obtiene la misma base…</a:t>
             </a:r>
           </a:p>
           <a:p>
@@ -9083,7 +9069,7 @@
                 </a:solidFill>
                 <a:latin typeface="Calibri"/>
               </a:rPr>
-              <a:t>–   Fecha_hora) porque la busqueda de agenda filtra por veterinario y ordena por hora, y debe venir con la medicion de antes y despues.</a:t>
+              <a:t>–   La estructura que la garantiza es una carpeta con archivos numerados en el orden exacto de ejecucion.</a:t>
             </a:r>
           </a:p>
           <a:p>
@@ -9099,14 +9085,14 @@
                 </a:solidFill>
                 <a:latin typeface="Calibri"/>
               </a:rPr>
-              <a:t>–   Por que ese tipo de dato: por que la fecha de la cita es DATE o TIMESTAMP y no VARCHAR, y por que el telefono es VARCHAR y no numerico, porque con telefonos no se hace aritmetica y porque un tipo numerico pierde los ceros iniciales.</a:t>
-            </a:r>
-          </a:p>
-        </p:txBody>
-      </p:sp>
-      <p:sp>
-        <p:nvSpPr>
-          <p:cNvPr id="6" name="TextBox 5"/>
+              <a:t>–   El orden no es estetico, es una dependencia real: una tabla con clave foranea no se puede crear antes que la tabla a la que apunta.</a:t>
+            </a:r>
+          </a:p>
+        </p:txBody>
+      </p:sp>
+      <p:sp>
+        <p:nvSpPr>
+          <p:cNvPr id="15" name="TextBox 14"/>
           <p:cNvSpPr txBox="1"/>
           <p:nvPr/>
         </p:nvSpPr>
@@ -9144,6 +9130,142 @@
   <p:clrMapOvr>
     <a:masterClrMapping/>
   </p:clrMapOvr>
+  <p:timing>
+    <p:tnLst>
+      <p:par>
+        <p:cTn id="1" dur="indefinite" restart="never" nodeType="tmRoot">
+          <p:childTnLst>
+            <p:seq concurrent="1" nextAc="seek">
+              <p:cTn id="2" dur="indefinite" nodeType="mainSeq">
+                <p:childTnLst>
+                  <p:par>
+                    <p:cTn id="3" fill="hold">
+                      <p:stCondLst>
+                        <p:cond delay="indefinite"/>
+                      </p:stCondLst>
+                      <p:childTnLst>
+                        <p:par>
+                          <p:cTn id="4" fill="hold">
+                            <p:stCondLst>
+                              <p:cond delay="0"/>
+                            </p:stCondLst>
+                            <p:childTnLst>
+                              <p:par>
+                                <p:cTn id="5" presetID="10" presetClass="entr" presetSubtype="0" fill="hold" nodeType="clickEffect">
+                                  <p:stCondLst>
+                                    <p:cond delay="0"/>
+                                  </p:stCondLst>
+                                  <p:childTnLst>
+                                    <p:set>
+                                      <p:cBhvr>
+                                        <p:cTn id="6" dur="1" fill="hold">
+                                          <p:stCondLst>
+                                            <p:cond delay="0"/>
+                                          </p:stCondLst>
+                                        </p:cTn>
+                                        <p:tgtEl>
+                                          <p:spTgt spid="7"/>
+                                        </p:tgtEl>
+                                        <p:attrNameLst>
+                                          <p:attrName>style.visibility</p:attrName>
+                                        </p:attrNameLst>
+                                      </p:cBhvr>
+                                      <p:to>
+                                        <p:strVal val="visible"/>
+                                      </p:to>
+                                    </p:set>
+                                    <p:animEffect transition="in" filter="fade">
+                                      <p:cBhvr>
+                                        <p:cTn id="7" dur="450"/>
+                                        <p:tgtEl>
+                                          <p:spTgt spid="7"/>
+                                        </p:tgtEl>
+                                      </p:cBhvr>
+                                    </p:animEffect>
+                                  </p:childTnLst>
+                                </p:cTn>
+                              </p:par>
+                            </p:childTnLst>
+                          </p:cTn>
+                        </p:par>
+                      </p:childTnLst>
+                    </p:cTn>
+                  </p:par>
+                  <p:par>
+                    <p:cTn id="8" fill="hold">
+                      <p:stCondLst>
+                        <p:cond delay="indefinite"/>
+                      </p:stCondLst>
+                      <p:childTnLst>
+                        <p:par>
+                          <p:cTn id="9" fill="hold">
+                            <p:stCondLst>
+                              <p:cond delay="0"/>
+                            </p:stCondLst>
+                            <p:childTnLst>
+                              <p:par>
+                                <p:cTn id="10" presetID="10" presetClass="entr" presetSubtype="0" fill="hold" nodeType="clickEffect">
+                                  <p:stCondLst>
+                                    <p:cond delay="0"/>
+                                  </p:stCondLst>
+                                  <p:childTnLst>
+                                    <p:set>
+                                      <p:cBhvr>
+                                        <p:cTn id="11" dur="1" fill="hold">
+                                          <p:stCondLst>
+                                            <p:cond delay="0"/>
+                                          </p:stCondLst>
+                                        </p:cTn>
+                                        <p:tgtEl>
+                                          <p:spTgt spid="8"/>
+                                        </p:tgtEl>
+                                        <p:attrNameLst>
+                                          <p:attrName>style.visibility</p:attrName>
+                                        </p:attrNameLst>
+                                      </p:cBhvr>
+                                      <p:to>
+                                        <p:strVal val="visible"/>
+                                      </p:to>
+                                    </p:set>
+                                    <p:animEffect transition="in" filter="fade">
+                                      <p:cBhvr>
+                                        <p:cTn id="12" dur="450"/>
+                                        <p:tgtEl>
+                                          <p:spTgt spid="8"/>
+                                        </p:tgtEl>
+                                      </p:cBhvr>
+                                    </p:animEffect>
+                                  </p:childTnLst>
+                                </p:cTn>
+                              </p:par>
+                            </p:childTnLst>
+                          </p:cTn>
+                        </p:par>
+                      </p:childTnLst>
+                    </p:cTn>
+                  </p:par>
+                </p:childTnLst>
+              </p:cTn>
+              <p:prevCondLst>
+                <p:cond evt="onPrev" delay="0">
+                  <p:tgtEl>
+                    <p:sldTgt/>
+                  </p:tgtEl>
+                </p:cond>
+              </p:prevCondLst>
+              <p:nextCondLst>
+                <p:cond evt="onNext" delay="0">
+                  <p:tgtEl>
+                    <p:sldTgt/>
+                  </p:tgtEl>
+                </p:cond>
+              </p:nextCondLst>
+            </p:seq>
+          </p:childTnLst>
+        </p:cTn>
+      </p:par>
+    </p:tnLst>
+  </p:timing>
 </p:sld>
 </file>
 
@@ -9280,21 +9402,173 @@
                 </a:solidFill>
                 <a:latin typeface="Calibri"/>
               </a:rPr>
-              <a:t>La cuarta pregunta, la que mas se falla (1/2)</a:t>
-            </a:r>
-          </a:p>
-        </p:txBody>
-      </p:sp>
-      <p:sp>
-        <p:nvSpPr>
-          <p:cNvPr id="5" name="TextBox 4"/>
+              <a:t>El reparto de los 5 a 8 minutos</a:t>
+            </a:r>
+          </a:p>
+        </p:txBody>
+      </p:sp>
+      <p:sp>
+        <p:nvSpPr>
+          <p:cNvPr id="5" name="Rounded Rectangle 4"/>
+          <p:cNvSpPr/>
+          <p:nvPr/>
+        </p:nvSpPr>
+        <p:spPr>
+          <a:xfrm>
+            <a:off x="5803166" y="1188719"/>
+            <a:ext cx="5998464" cy="4828032"/>
+          </a:xfrm>
+          <a:prstGeom prst="roundRect">
+            <a:avLst>
+              <a:gd name="adj" fmla="val 4000"/>
+            </a:avLst>
+          </a:prstGeom>
+          <a:solidFill>
+            <a:srgbClr val="E8EEF4"/>
+          </a:solidFill>
+          <a:ln>
+            <a:noFill/>
+          </a:ln>
+        </p:spPr>
+        <p:style>
+          <a:lnRef idx="1">
+            <a:schemeClr val="accent1"/>
+          </a:lnRef>
+          <a:fillRef idx="3">
+            <a:schemeClr val="accent1"/>
+          </a:fillRef>
+          <a:effectRef idx="2">
+            <a:schemeClr val="accent1"/>
+          </a:effectRef>
+          <a:fontRef idx="minor">
+            <a:schemeClr val="lt1"/>
+          </a:fontRef>
+        </p:style>
+        <p:txBody>
+          <a:bodyPr rtlCol="0" anchor="ctr"/>
+          <a:lstStyle/>
+          <a:p>
+            <a:pPr algn="ctr"/>
+          </a:p>
+        </p:txBody>
+      </p:sp>
+      <p:pic>
+        <p:nvPicPr>
+          <p:cNvPr id="6" name="Picture 5" descr="reparto-minutos-paso1.png"/>
+          <p:cNvPicPr>
+            <a:picLocks noChangeAspect="1"/>
+          </p:cNvPicPr>
+          <p:nvPr/>
+        </p:nvPicPr>
+        <p:blipFill>
+          <a:blip r:embed="rId2"/>
+          <a:stretch>
+            <a:fillRect/>
+          </a:stretch>
+        </p:blipFill>
+        <p:spPr>
+          <a:xfrm>
+            <a:off x="5876318" y="1261872"/>
+            <a:ext cx="5852160" cy="4681728"/>
+          </a:xfrm>
+          <a:prstGeom prst="rect">
+            <a:avLst/>
+          </a:prstGeom>
+        </p:spPr>
+      </p:pic>
+      <p:pic>
+        <p:nvPicPr>
+          <p:cNvPr id="7" name="Picture 6" descr="reparto-minutos-paso2.png"/>
+          <p:cNvPicPr>
+            <a:picLocks noChangeAspect="1"/>
+          </p:cNvPicPr>
+          <p:nvPr/>
+        </p:nvPicPr>
+        <p:blipFill>
+          <a:blip r:embed="rId3"/>
+          <a:stretch>
+            <a:fillRect/>
+          </a:stretch>
+        </p:blipFill>
+        <p:spPr>
+          <a:xfrm>
+            <a:off x="5876318" y="1261872"/>
+            <a:ext cx="5852160" cy="4681728"/>
+          </a:xfrm>
+          <a:prstGeom prst="rect">
+            <a:avLst/>
+          </a:prstGeom>
+        </p:spPr>
+      </p:pic>
+      <p:pic>
+        <p:nvPicPr>
+          <p:cNvPr id="8" name="Picture 7" descr="reparto-minutos-paso3.png"/>
+          <p:cNvPicPr>
+            <a:picLocks noChangeAspect="1"/>
+          </p:cNvPicPr>
+          <p:nvPr/>
+        </p:nvPicPr>
+        <p:blipFill>
+          <a:blip r:embed="rId4"/>
+          <a:stretch>
+            <a:fillRect/>
+          </a:stretch>
+        </p:blipFill>
+        <p:spPr>
+          <a:xfrm>
+            <a:off x="5876318" y="1261872"/>
+            <a:ext cx="5852160" cy="4681728"/>
+          </a:xfrm>
+          <a:prstGeom prst="rect">
+            <a:avLst/>
+          </a:prstGeom>
+        </p:spPr>
+      </p:pic>
+      <p:sp>
+        <p:nvSpPr>
+          <p:cNvPr id="13" name="TextBox 12"/>
           <p:cNvSpPr txBox="1"/>
           <p:nvPr/>
         </p:nvSpPr>
         <p:spPr>
           <a:xfrm>
-            <a:off x="457200" y="1170432"/>
-            <a:ext cx="11277295" cy="5230368"/>
+            <a:off x="5870301" y="5961888"/>
+            <a:ext cx="5864193" cy="320040"/>
+          </a:xfrm>
+          <a:prstGeom prst="rect">
+            <a:avLst/>
+          </a:prstGeom>
+          <a:noFill/>
+        </p:spPr>
+        <p:txBody>
+          <a:bodyPr wrap="square">
+            <a:spAutoFit/>
+          </a:bodyPr>
+          <a:lstStyle/>
+          <a:p>
+            <a:pPr algn="ctr"/>
+            <a:r>
+              <a:rPr sz="1100" b="0" i="1">
+                <a:solidFill>
+                  <a:srgbClr val="666666"/>
+                </a:solidFill>
+                <a:latin typeface="Calibri"/>
+              </a:rPr>
+              <a:t>Clic para avanzar la animación</a:t>
+            </a:r>
+          </a:p>
+        </p:txBody>
+      </p:sp>
+      <p:sp>
+        <p:nvSpPr>
+          <p:cNvPr id="14" name="TextBox 13"/>
+          <p:cNvSpPr txBox="1"/>
+          <p:nvPr/>
+        </p:nvSpPr>
+        <p:spPr>
+          <a:xfrm>
+            <a:off x="457200" y="1353312"/>
+            <a:ext cx="5093061" cy="5047488"/>
           </a:xfrm>
           <a:prstGeom prst="rect">
             <a:avLst/>
@@ -9319,7 +9593,7 @@
                 </a:solidFill>
                 <a:latin typeface="Calibri"/>
               </a:rPr>
-              <a:t>–   Un disparador, o trigger, es un bloque de codigo que el motor ejecuta automaticamente cuando ocurre un evento sobre una tabla, sin que nadie lo invoque.</a:t>
+              <a:t>–   La sustentacion dura de 5 a 8 minutos y ese limite obliga a decidir que se deja fuera.</a:t>
             </a:r>
           </a:p>
           <a:p>
@@ -9335,7 +9609,7 @@
                 </a:solidFill>
                 <a:latin typeface="Calibri"/>
               </a:rPr>
-              <a:t>–   El argumento a favor, y el unico que vale en una sustentacion, es la cobertura: el disparador se ejecuta no importa quien escriba.</a:t>
+              <a:t>–   El reparto que funciona, y que es convencion y no regla dura, es: 45 segundos para el problema de la clínica en lenguaje de negocio, sin una sola…</a:t>
             </a:r>
           </a:p>
           <a:p>
@@ -9351,14 +9625,14 @@
                 </a:solidFill>
                 <a:latin typeface="Calibri"/>
               </a:rPr>
-              <a:t>–   Si la regla «el stock de un insumo nunca queda negativo» vive en el disparador, se cumple cuando escribe la aplicacion, cuando escribe un script de carga masiva y cuando alguien se conecta con un cliente SQL a corregir un dato a mano.</a:t>
-            </a:r>
-          </a:p>
-        </p:txBody>
-      </p:sp>
-      <p:sp>
-        <p:nvSpPr>
-          <p:cNvPr id="6" name="TextBox 5"/>
+              <a:t>–   90 segundos para el modelo, mostrando el ER y justificando dos decisiones y no las quince.</a:t>
+            </a:r>
+          </a:p>
+        </p:txBody>
+      </p:sp>
+      <p:sp>
+        <p:nvSpPr>
+          <p:cNvPr id="15" name="TextBox 14"/>
           <p:cNvSpPr txBox="1"/>
           <p:nvPr/>
         </p:nvSpPr>
@@ -9396,6 +9670,142 @@
   <p:clrMapOvr>
     <a:masterClrMapping/>
   </p:clrMapOvr>
+  <p:timing>
+    <p:tnLst>
+      <p:par>
+        <p:cTn id="1" dur="indefinite" restart="never" nodeType="tmRoot">
+          <p:childTnLst>
+            <p:seq concurrent="1" nextAc="seek">
+              <p:cTn id="2" dur="indefinite" nodeType="mainSeq">
+                <p:childTnLst>
+                  <p:par>
+                    <p:cTn id="3" fill="hold">
+                      <p:stCondLst>
+                        <p:cond delay="indefinite"/>
+                      </p:stCondLst>
+                      <p:childTnLst>
+                        <p:par>
+                          <p:cTn id="4" fill="hold">
+                            <p:stCondLst>
+                              <p:cond delay="0"/>
+                            </p:stCondLst>
+                            <p:childTnLst>
+                              <p:par>
+                                <p:cTn id="5" presetID="10" presetClass="entr" presetSubtype="0" fill="hold" nodeType="clickEffect">
+                                  <p:stCondLst>
+                                    <p:cond delay="0"/>
+                                  </p:stCondLst>
+                                  <p:childTnLst>
+                                    <p:set>
+                                      <p:cBhvr>
+                                        <p:cTn id="6" dur="1" fill="hold">
+                                          <p:stCondLst>
+                                            <p:cond delay="0"/>
+                                          </p:stCondLst>
+                                        </p:cTn>
+                                        <p:tgtEl>
+                                          <p:spTgt spid="7"/>
+                                        </p:tgtEl>
+                                        <p:attrNameLst>
+                                          <p:attrName>style.visibility</p:attrName>
+                                        </p:attrNameLst>
+                                      </p:cBhvr>
+                                      <p:to>
+                                        <p:strVal val="visible"/>
+                                      </p:to>
+                                    </p:set>
+                                    <p:animEffect transition="in" filter="fade">
+                                      <p:cBhvr>
+                                        <p:cTn id="7" dur="450"/>
+                                        <p:tgtEl>
+                                          <p:spTgt spid="7"/>
+                                        </p:tgtEl>
+                                      </p:cBhvr>
+                                    </p:animEffect>
+                                  </p:childTnLst>
+                                </p:cTn>
+                              </p:par>
+                            </p:childTnLst>
+                          </p:cTn>
+                        </p:par>
+                      </p:childTnLst>
+                    </p:cTn>
+                  </p:par>
+                  <p:par>
+                    <p:cTn id="8" fill="hold">
+                      <p:stCondLst>
+                        <p:cond delay="indefinite"/>
+                      </p:stCondLst>
+                      <p:childTnLst>
+                        <p:par>
+                          <p:cTn id="9" fill="hold">
+                            <p:stCondLst>
+                              <p:cond delay="0"/>
+                            </p:stCondLst>
+                            <p:childTnLst>
+                              <p:par>
+                                <p:cTn id="10" presetID="10" presetClass="entr" presetSubtype="0" fill="hold" nodeType="clickEffect">
+                                  <p:stCondLst>
+                                    <p:cond delay="0"/>
+                                  </p:stCondLst>
+                                  <p:childTnLst>
+                                    <p:set>
+                                      <p:cBhvr>
+                                        <p:cTn id="11" dur="1" fill="hold">
+                                          <p:stCondLst>
+                                            <p:cond delay="0"/>
+                                          </p:stCondLst>
+                                        </p:cTn>
+                                        <p:tgtEl>
+                                          <p:spTgt spid="8"/>
+                                        </p:tgtEl>
+                                        <p:attrNameLst>
+                                          <p:attrName>style.visibility</p:attrName>
+                                        </p:attrNameLst>
+                                      </p:cBhvr>
+                                      <p:to>
+                                        <p:strVal val="visible"/>
+                                      </p:to>
+                                    </p:set>
+                                    <p:animEffect transition="in" filter="fade">
+                                      <p:cBhvr>
+                                        <p:cTn id="12" dur="450"/>
+                                        <p:tgtEl>
+                                          <p:spTgt spid="8"/>
+                                        </p:tgtEl>
+                                      </p:cBhvr>
+                                    </p:animEffect>
+                                  </p:childTnLst>
+                                </p:cTn>
+                              </p:par>
+                            </p:childTnLst>
+                          </p:cTn>
+                        </p:par>
+                      </p:childTnLst>
+                    </p:cTn>
+                  </p:par>
+                </p:childTnLst>
+              </p:cTn>
+              <p:prevCondLst>
+                <p:cond evt="onPrev" delay="0">
+                  <p:tgtEl>
+                    <p:sldTgt/>
+                  </p:tgtEl>
+                </p:cond>
+              </p:prevCondLst>
+              <p:nextCondLst>
+                <p:cond evt="onNext" delay="0">
+                  <p:tgtEl>
+                    <p:sldTgt/>
+                  </p:tgtEl>
+                </p:cond>
+              </p:nextCondLst>
+            </p:seq>
+          </p:childTnLst>
+        </p:cTn>
+      </p:par>
+    </p:tnLst>
+  </p:timing>
 </p:sld>
 </file>
 
@@ -9532,21 +9942,173 @@
                 </a:solidFill>
                 <a:latin typeface="Calibri"/>
               </a:rPr>
-              <a:t>La cuarta pregunta, la que mas se falla (2/2)</a:t>
-            </a:r>
-          </a:p>
-        </p:txBody>
-      </p:sp>
-      <p:sp>
-        <p:nvSpPr>
-          <p:cNvPr id="5" name="TextBox 4"/>
+              <a:t>El Q&amp;A de modelado, con las respuestas listas</a:t>
+            </a:r>
+          </a:p>
+        </p:txBody>
+      </p:sp>
+      <p:sp>
+        <p:nvSpPr>
+          <p:cNvPr id="5" name="Rounded Rectangle 4"/>
+          <p:cNvSpPr/>
+          <p:nvPr/>
+        </p:nvSpPr>
+        <p:spPr>
+          <a:xfrm>
+            <a:off x="5803166" y="1188719"/>
+            <a:ext cx="5998464" cy="4828032"/>
+          </a:xfrm>
+          <a:prstGeom prst="roundRect">
+            <a:avLst>
+              <a:gd name="adj" fmla="val 4000"/>
+            </a:avLst>
+          </a:prstGeom>
+          <a:solidFill>
+            <a:srgbClr val="E8EEF4"/>
+          </a:solidFill>
+          <a:ln>
+            <a:noFill/>
+          </a:ln>
+        </p:spPr>
+        <p:style>
+          <a:lnRef idx="1">
+            <a:schemeClr val="accent1"/>
+          </a:lnRef>
+          <a:fillRef idx="3">
+            <a:schemeClr val="accent1"/>
+          </a:fillRef>
+          <a:effectRef idx="2">
+            <a:schemeClr val="accent1"/>
+          </a:effectRef>
+          <a:fontRef idx="minor">
+            <a:schemeClr val="lt1"/>
+          </a:fontRef>
+        </p:style>
+        <p:txBody>
+          <a:bodyPr rtlCol="0" anchor="ctr"/>
+          <a:lstStyle/>
+          <a:p>
+            <a:pPr algn="ctr"/>
+          </a:p>
+        </p:txBody>
+      </p:sp>
+      <p:pic>
+        <p:nvPicPr>
+          <p:cNvPr id="6" name="Picture 5" descr="dos-pelusa-paso1.png"/>
+          <p:cNvPicPr>
+            <a:picLocks noChangeAspect="1"/>
+          </p:cNvPicPr>
+          <p:nvPr/>
+        </p:nvPicPr>
+        <p:blipFill>
+          <a:blip r:embed="rId2"/>
+          <a:stretch>
+            <a:fillRect/>
+          </a:stretch>
+        </p:blipFill>
+        <p:spPr>
+          <a:xfrm>
+            <a:off x="5876318" y="1261872"/>
+            <a:ext cx="5852160" cy="4681728"/>
+          </a:xfrm>
+          <a:prstGeom prst="rect">
+            <a:avLst/>
+          </a:prstGeom>
+        </p:spPr>
+      </p:pic>
+      <p:pic>
+        <p:nvPicPr>
+          <p:cNvPr id="7" name="Picture 6" descr="dos-pelusa-paso2.png"/>
+          <p:cNvPicPr>
+            <a:picLocks noChangeAspect="1"/>
+          </p:cNvPicPr>
+          <p:nvPr/>
+        </p:nvPicPr>
+        <p:blipFill>
+          <a:blip r:embed="rId3"/>
+          <a:stretch>
+            <a:fillRect/>
+          </a:stretch>
+        </p:blipFill>
+        <p:spPr>
+          <a:xfrm>
+            <a:off x="5876318" y="1261872"/>
+            <a:ext cx="5852160" cy="4681728"/>
+          </a:xfrm>
+          <a:prstGeom prst="rect">
+            <a:avLst/>
+          </a:prstGeom>
+        </p:spPr>
+      </p:pic>
+      <p:pic>
+        <p:nvPicPr>
+          <p:cNvPr id="8" name="Picture 7" descr="dos-pelusa-paso3.png"/>
+          <p:cNvPicPr>
+            <a:picLocks noChangeAspect="1"/>
+          </p:cNvPicPr>
+          <p:nvPr/>
+        </p:nvPicPr>
+        <p:blipFill>
+          <a:blip r:embed="rId4"/>
+          <a:stretch>
+            <a:fillRect/>
+          </a:stretch>
+        </p:blipFill>
+        <p:spPr>
+          <a:xfrm>
+            <a:off x="5876318" y="1261872"/>
+            <a:ext cx="5852160" cy="4681728"/>
+          </a:xfrm>
+          <a:prstGeom prst="rect">
+            <a:avLst/>
+          </a:prstGeom>
+        </p:spPr>
+      </p:pic>
+      <p:sp>
+        <p:nvSpPr>
+          <p:cNvPr id="13" name="TextBox 12"/>
           <p:cNvSpPr txBox="1"/>
           <p:nvPr/>
         </p:nvSpPr>
         <p:spPr>
           <a:xfrm>
-            <a:off x="457200" y="1170432"/>
-            <a:ext cx="11277295" cy="5230368"/>
+            <a:off x="5870301" y="5961888"/>
+            <a:ext cx="5864193" cy="320040"/>
+          </a:xfrm>
+          <a:prstGeom prst="rect">
+            <a:avLst/>
+          </a:prstGeom>
+          <a:noFill/>
+        </p:spPr>
+        <p:txBody>
+          <a:bodyPr wrap="square">
+            <a:spAutoFit/>
+          </a:bodyPr>
+          <a:lstStyle/>
+          <a:p>
+            <a:pPr algn="ctr"/>
+            <a:r>
+              <a:rPr sz="1100" b="0" i="1">
+                <a:solidFill>
+                  <a:srgbClr val="666666"/>
+                </a:solidFill>
+                <a:latin typeface="Calibri"/>
+              </a:rPr>
+              <a:t>Clic para avanzar la animación</a:t>
+            </a:r>
+          </a:p>
+        </p:txBody>
+      </p:sp>
+      <p:sp>
+        <p:nvSpPr>
+          <p:cNvPr id="14" name="TextBox 13"/>
+          <p:cNvSpPr txBox="1"/>
+          <p:nvPr/>
+        </p:nvSpPr>
+        <p:spPr>
+          <a:xfrm>
+            <a:off x="457200" y="1353312"/>
+            <a:ext cx="5093061" cy="5047488"/>
           </a:xfrm>
           <a:prstGeom prst="rect">
             <a:avLst/>
@@ -9571,7 +10133,7 @@
                 </a:solidFill>
                 <a:latin typeface="Calibri"/>
               </a:rPr>
-              <a:t>–   Lo mismo aplica al disparador de auditoria de precios: si se quiere saber quien cambio el precio de una vacuna, ese registro tiene que escribirse dentro de la base, porque quien edita a mano no lo va a escribir por cortesia.</a:t>
+              <a:t>–   «Por que nombre y apellido separados y no un solo campo nombre_completo?».</a:t>
             </a:r>
           </a:p>
           <a:p>
@@ -9587,7 +10149,7 @@
                 </a:solidFill>
                 <a:latin typeface="Calibri"/>
               </a:rPr>
-              <a:t>–   Y hay que dar tambien el contra-argumento, porque un evaluador atento lo va a pedir: los disparadores son logica invisible, no aparecen en el codigo de la aplicacion, sorprenden a quien depura</a:t>
+              <a:t>–   «Que pasa si un dueno tiene dos mascotas llamadas Pelusa?»: nada, porque la identidad la da id_mascota y no el nombre</a:t>
             </a:r>
           </a:p>
           <a:p>
@@ -9603,14 +10165,14 @@
                 </a:solidFill>
                 <a:latin typeface="Calibri"/>
               </a:rPr>
-              <a:t>–   Y se disparan en cascada si uno modifica una tabla que a su vez tiene otro disparador.</a:t>
-            </a:r>
-          </a:p>
-        </p:txBody>
-      </p:sp>
-      <p:sp>
-        <p:nvSpPr>
-          <p:cNvPr id="6" name="TextBox 5"/>
+              <a:t>–   Y si se quisiera prohibirlo habria que declarar UNIQUE (id_dueno, nombre), decision que el estudiante debe poder defender en cualquiera de los dos…</a:t>
+            </a:r>
+          </a:p>
+        </p:txBody>
+      </p:sp>
+      <p:sp>
+        <p:nvSpPr>
+          <p:cNvPr id="15" name="TextBox 14"/>
           <p:cNvSpPr txBox="1"/>
           <p:nvPr/>
         </p:nvSpPr>
@@ -9648,6 +10210,142 @@
   <p:clrMapOvr>
     <a:masterClrMapping/>
   </p:clrMapOvr>
+  <p:timing>
+    <p:tnLst>
+      <p:par>
+        <p:cTn id="1" dur="indefinite" restart="never" nodeType="tmRoot">
+          <p:childTnLst>
+            <p:seq concurrent="1" nextAc="seek">
+              <p:cTn id="2" dur="indefinite" nodeType="mainSeq">
+                <p:childTnLst>
+                  <p:par>
+                    <p:cTn id="3" fill="hold">
+                      <p:stCondLst>
+                        <p:cond delay="indefinite"/>
+                      </p:stCondLst>
+                      <p:childTnLst>
+                        <p:par>
+                          <p:cTn id="4" fill="hold">
+                            <p:stCondLst>
+                              <p:cond delay="0"/>
+                            </p:stCondLst>
+                            <p:childTnLst>
+                              <p:par>
+                                <p:cTn id="5" presetID="10" presetClass="entr" presetSubtype="0" fill="hold" nodeType="clickEffect">
+                                  <p:stCondLst>
+                                    <p:cond delay="0"/>
+                                  </p:stCondLst>
+                                  <p:childTnLst>
+                                    <p:set>
+                                      <p:cBhvr>
+                                        <p:cTn id="6" dur="1" fill="hold">
+                                          <p:stCondLst>
+                                            <p:cond delay="0"/>
+                                          </p:stCondLst>
+                                        </p:cTn>
+                                        <p:tgtEl>
+                                          <p:spTgt spid="7"/>
+                                        </p:tgtEl>
+                                        <p:attrNameLst>
+                                          <p:attrName>style.visibility</p:attrName>
+                                        </p:attrNameLst>
+                                      </p:cBhvr>
+                                      <p:to>
+                                        <p:strVal val="visible"/>
+                                      </p:to>
+                                    </p:set>
+                                    <p:animEffect transition="in" filter="fade">
+                                      <p:cBhvr>
+                                        <p:cTn id="7" dur="450"/>
+                                        <p:tgtEl>
+                                          <p:spTgt spid="7"/>
+                                        </p:tgtEl>
+                                      </p:cBhvr>
+                                    </p:animEffect>
+                                  </p:childTnLst>
+                                </p:cTn>
+                              </p:par>
+                            </p:childTnLst>
+                          </p:cTn>
+                        </p:par>
+                      </p:childTnLst>
+                    </p:cTn>
+                  </p:par>
+                  <p:par>
+                    <p:cTn id="8" fill="hold">
+                      <p:stCondLst>
+                        <p:cond delay="indefinite"/>
+                      </p:stCondLst>
+                      <p:childTnLst>
+                        <p:par>
+                          <p:cTn id="9" fill="hold">
+                            <p:stCondLst>
+                              <p:cond delay="0"/>
+                            </p:stCondLst>
+                            <p:childTnLst>
+                              <p:par>
+                                <p:cTn id="10" presetID="10" presetClass="entr" presetSubtype="0" fill="hold" nodeType="clickEffect">
+                                  <p:stCondLst>
+                                    <p:cond delay="0"/>
+                                  </p:stCondLst>
+                                  <p:childTnLst>
+                                    <p:set>
+                                      <p:cBhvr>
+                                        <p:cTn id="11" dur="1" fill="hold">
+                                          <p:stCondLst>
+                                            <p:cond delay="0"/>
+                                          </p:stCondLst>
+                                        </p:cTn>
+                                        <p:tgtEl>
+                                          <p:spTgt spid="8"/>
+                                        </p:tgtEl>
+                                        <p:attrNameLst>
+                                          <p:attrName>style.visibility</p:attrName>
+                                        </p:attrNameLst>
+                                      </p:cBhvr>
+                                      <p:to>
+                                        <p:strVal val="visible"/>
+                                      </p:to>
+                                    </p:set>
+                                    <p:animEffect transition="in" filter="fade">
+                                      <p:cBhvr>
+                                        <p:cTn id="12" dur="450"/>
+                                        <p:tgtEl>
+                                          <p:spTgt spid="8"/>
+                                        </p:tgtEl>
+                                      </p:cBhvr>
+                                    </p:animEffect>
+                                  </p:childTnLst>
+                                </p:cTn>
+                              </p:par>
+                            </p:childTnLst>
+                          </p:cTn>
+                        </p:par>
+                      </p:childTnLst>
+                    </p:cTn>
+                  </p:par>
+                </p:childTnLst>
+              </p:cTn>
+              <p:prevCondLst>
+                <p:cond evt="onPrev" delay="0">
+                  <p:tgtEl>
+                    <p:sldTgt/>
+                  </p:tgtEl>
+                </p:cond>
+              </p:prevCondLst>
+              <p:nextCondLst>
+                <p:cond evt="onNext" delay="0">
+                  <p:tgtEl>
+                    <p:sldTgt/>
+                  </p:tgtEl>
+                </p:cond>
+              </p:nextCondLst>
+            </p:seq>
+          </p:childTnLst>
+        </p:cTn>
+      </p:par>
+    </p:tnLst>
+  </p:timing>
 </p:sld>
 </file>
 

--- a/Bases de Datos II/Clases/Clase 15 - Presentacion del proyecto y cierre/Presentacion.pptx
+++ b/Bases de Datos II/Clases/Clase 15 - Presentacion del proyecto y cierre/Presentacion.pptx
@@ -7,8 +7,8 @@
   <p:sldIdLst>
     <p:sldId id="256" r:id="rId7"/>
     <p:sldId id="257" r:id="rId8"/>
-    <p:sldId id="258" r:id="rId10"/>
-    <p:sldId id="259" r:id="rId11"/>
+    <p:sldId id="258" r:id="rId9"/>
+    <p:sldId id="259" r:id="rId10"/>
     <p:sldId id="260" r:id="rId12"/>
     <p:sldId id="261" r:id="rId13"/>
     <p:sldId id="262" r:id="rId14"/>
@@ -513,37 +513,57 @@
           <a:lstStyle/>
           <a:p>
             <a:r>
-              <a:t>TEXTO COMPLETO DE LA LÁMINA (se proyecta resumido):</a:t>
-            </a:r>
-          </a:p>
-          <a:p/>
-          <a:p>
-            <a:r>
-              <a:t>Hoy cerramos el proyecto: Sustentacion en vivo y entrega final del proyecto (20% Corte 3)</a:t>
-            </a:r>
-          </a:p>
-          <a:p/>
-          <a:p>
-            <a:r>
-              <a:t>Sesión síncrona de sustentaciones · Bloque 120 min · turnos consecutivos.</a:t>
-            </a:r>
-          </a:p>
-          <a:p/>
-          <a:p>
-            <a:r>
-              <a:t>La sustentación es en vivo y con preguntas: no se reemplaza por video grabado.</a:t>
-            </a:r>
-          </a:p>
-          <a:p/>
-          <a:p>
-            <a:r>
-              <a:t>Sustentar es justificar decisiones: por qué esta tabla, esta restricción, este índice.</a:t>
-            </a:r>
-          </a:p>
-          <a:p/>
-          <a:p>
-            <a:r>
-              <a:t>Ejes de hoy: Sustentar no es describir · Las cuatro preguntas de por que que se hacen casi siempre · La cuarta pregunta, la que mas se falla.</a:t>
+              <a:t>DESARROLLO (para explicarlo, no se proyecta):</a:t>
+            </a:r>
+          </a:p>
+          <a:p>
+            <a:r>
+              <a:t>Sustentar una base de datos no es recorrer el diagrama entidad-relacion nombrando tablas.</a:t>
+            </a:r>
+          </a:p>
+          <a:p>
+            <a:r>
+              <a:t>Describir es decir que hay: «tenemos Dueno, Mascota, Cita, Veterinario, Insumo y Factura».</a:t>
+            </a:r>
+          </a:p>
+          <a:p>
+            <a:r>
+              <a:t>Sustentar es responder por que quedo asi y que alternativa se descarto.</a:t>
+            </a:r>
+          </a:p>
+          <a:p>
+            <a:r>
+              <a:t>La razon por la que esto importa mas en bases de datos que en casi cualquier otra parte del software es el costo de revertir: cambiar el texto de un boton cuesta minutos</a:t>
+            </a:r>
+          </a:p>
+          <a:p>
+            <a:r>
+              <a:t>Mientras que partir en dos una tabla que ya tiene cien mil filas y seis procedimientos apuntando a ella cuesta una migracion, una ventana de mantenimiento y el riesgo real de perder datos.</a:t>
+            </a:r>
+          </a:p>
+          <a:p>
+            <a:r>
+              <a:t>Una decision de modelado es, por definicion, una decision costosa de deshacer.</a:t>
+            </a:r>
+          </a:p>
+          <a:p>
+            <a:r>
+              <a:t>La clase de hoy no trae tema nuevo: trae la teoria de como se comunica y se empaqueta un trabajo tecnico para que un tercero pueda evaluarlo, reproducirlo y usarlo sin hablar con quien lo hizo.</a:t>
+            </a:r>
+          </a:p>
+          <a:p>
+            <a:r>
+              <a:t>Describir es decir que hay una tabla cita con una FK; sustentar es explicar por que la FK va en cita y no en mascota, y que pasaria si no estuviera.</a:t>
+            </a:r>
+          </a:p>
+          <a:p>
+            <a:r>
+              <a:t>NOTAS:</a:t>
+            </a:r>
+          </a:p>
+          <a:p>
+            <a:r>
+              <a:t>Eso convierte cada eleccion del ER en algo que se debe poder defender, y es exactamente lo que un evaluador (o un lider tecnico en una entrevista) va a probar con dos o tres preguntas bien elegidas.</a:t>
             </a:r>
           </a:p>
         </p:txBody>
@@ -618,42 +638,32 @@
           </a:p>
           <a:p>
             <a:r>
-              <a:t>Sustentar una base de datos no es recorrer el diagrama entidad-relacion nombrando tablas.</a:t>
-            </a:r>
-          </a:p>
-          <a:p>
-            <a:r>
-              <a:t>Describir es decir que hay: «tenemos Dueno, Mascota, Cita, Veterinario, Insumo y Factura».</a:t>
-            </a:r>
-          </a:p>
-          <a:p>
-            <a:r>
-              <a:t>Sustentar es responder por que quedo asi y que alternativa se descarto.</a:t>
-            </a:r>
-          </a:p>
-          <a:p>
-            <a:r>
-              <a:t>La razon por la que esto importa mas en bases de datos que en casi cualquier otra parte del software es el costo de revertir: cambiar el texto de un boton cuesta minutos</a:t>
-            </a:r>
-          </a:p>
-          <a:p>
-            <a:r>
-              <a:t>Mientras que partir en dos una tabla que ya tiene cien mil filas y seis procedimientos apuntando a ella cuesta una migracion, una ventana de mantenimiento y el riesgo real de perder datos.</a:t>
-            </a:r>
-          </a:p>
-          <a:p>
-            <a:r>
-              <a:t>Una decision de modelado es, por definicion, una decision costosa de deshacer.</a:t>
-            </a:r>
-          </a:p>
-          <a:p>
-            <a:r>
-              <a:t>La clase de hoy no trae tema nuevo: trae la teoria de como se comunica y se empaqueta un trabajo tecnico para que un tercero pueda evaluarlo, reproducirlo y usarlo sin hablar con quien lo hizo.</a:t>
-            </a:r>
-          </a:p>
-          <a:p>
-            <a:r>
-              <a:t>Describir es decir que hay una tabla cita con una FK; sustentar es explicar por que la FK va en cita y no en mascota, y que pasaria si no estuviera.</a:t>
+              <a:t>Hay cuatro preguntas de por que que se hacen casi siempre, y el estudiante debe llegar con las cuatro respondidas.</a:t>
+            </a:r>
+          </a:p>
+          <a:p>
+            <a:r>
+              <a:t>Por que esa normalizacion: la respuesta esperada es que el modelo esta en tercera forma normal, es decir que cada atributo depende de la clave completa y de nada mas, y por eso el telefono del dueno vive en la tabla Dueno y no repetido en cada fila de Mascota.</a:t>
+            </a:r>
+          </a:p>
+          <a:p>
+            <a:r>
+              <a:t>Y a continuacion se declara la desnormalizacion deliberada si existe: «guardamos el total en Factura aunque se pueda calcular sumando el detalle, porque el total es un valor historico que no debe cambiar si manana sube el precio del insumo».</a:t>
+            </a:r>
+          </a:p>
+          <a:p>
+            <a:r>
+              <a:t>Por que ese indice: la respuesta debe nombrar la consulta concreta que lo aprovecha, por ejemplo un indice sobre (id_veterinario</a:t>
+            </a:r>
+          </a:p>
+          <a:p>
+            <a:r>
+              <a:t>Fecha_hora) porque la busqueda de agenda filtra por veterinario y ordena por hora, y debe venir con la medicion de antes y despues.</a:t>
+            </a:r>
+          </a:p>
+          <a:p>
+            <a:r>
+              <a:t>Por que ese tipo de dato: por que la fecha de la cita es DATE o TIMESTAMP y no VARCHAR, y por que el telefono es VARCHAR y no numerico, porque con telefonos no se hace aritmetica y porque un tipo numerico pierde los ceros iniciales.</a:t>
             </a:r>
           </a:p>
           <a:p>
@@ -663,7 +673,7 @@
           </a:p>
           <a:p>
             <a:r>
-              <a:t>Eso convierte cada eleccion del ER en algo que se debe poder defender, y es exactamente lo que un evaluador (o un lider tecnico en una entrevista) va a probar con dos o tres preguntas bien elegidas.</a:t>
+              <a:t>Esa segunda mitad es la que distingue al estudiante que entendio, porque normalizar no es un dogma sino un punto de partida del que se sale con razones escritas.</a:t>
             </a:r>
           </a:p>
         </p:txBody>
@@ -738,32 +748,22 @@
           </a:p>
           <a:p>
             <a:r>
-              <a:t>Hay cuatro preguntas de por que que se hacen casi siempre, y el estudiante debe llegar con las cuatro respondidas.</a:t>
-            </a:r>
-          </a:p>
-          <a:p>
-            <a:r>
-              <a:t>Por que esa normalizacion: la respuesta esperada es que el modelo esta en tercera forma normal, es decir que cada atributo depende de la clave completa y de nada mas, y por eso el telefono del dueno vive en la tabla Dueno y no repetido en cada fila de Mascota.</a:t>
-            </a:r>
-          </a:p>
-          <a:p>
-            <a:r>
-              <a:t>Y a continuacion se declara la desnormalizacion deliberada si existe: «guardamos el total en Factura aunque se pueda calcular sumando el detalle, porque el total es un valor historico que no debe cambiar si manana sube el precio del insumo».</a:t>
-            </a:r>
-          </a:p>
-          <a:p>
-            <a:r>
-              <a:t>Por que ese indice: la respuesta debe nombrar la consulta concreta que lo aprovecha, por ejemplo un indice sobre (id_veterinario</a:t>
-            </a:r>
-          </a:p>
-          <a:p>
-            <a:r>
-              <a:t>Fecha_hora) porque la busqueda de agenda filtra por veterinario y ordena por hora, y debe venir con la medicion de antes y despues.</a:t>
-            </a:r>
-          </a:p>
-          <a:p>
-            <a:r>
-              <a:t>Por que ese tipo de dato: por que la fecha de la cita es DATE o TIMESTAMP y no VARCHAR, y por que el telefono es VARCHAR y no numerico, porque con telefonos no se hace aritmetica y porque un tipo numerico pierde los ceros iniciales.</a:t>
+              <a:t>Un disparador, o trigger, es un bloque de codigo que el motor ejecuta automaticamente cuando ocurre un evento sobre una tabla, sin que nadie lo invoque.</a:t>
+            </a:r>
+          </a:p>
+          <a:p>
+            <a:r>
+              <a:t>El argumento a favor, y el unico que vale en una sustentacion, es la cobertura: el disparador se ejecuta no importa quien escriba.</a:t>
+            </a:r>
+          </a:p>
+          <a:p>
+            <a:r>
+              <a:t>Si la regla «el stock de un insumo nunca queda negativo» vive en el disparador, se cumple cuando escribe la aplicacion, cuando escribe un script de carga masiva y cuando alguien se conecta con un cliente SQL a corregir un dato a mano.</a:t>
+            </a:r>
+          </a:p>
+          <a:p>
+            <a:r>
+              <a:t>Lo mismo aplica al disparador de auditoria de precios: si se quiere saber quien cambio el precio de una vacuna, ese registro tiene que escribirse dentro de la base, porque quien edita a mano no lo va a escribir por cortesia.</a:t>
             </a:r>
           </a:p>
           <a:p>
@@ -773,7 +773,22 @@
           </a:p>
           <a:p>
             <a:r>
-              <a:t>Esa segunda mitad es la que distingue al estudiante que entendio, porque normalizar no es un dogma sino un punto de partida del que se sale con razones escritas.</a:t>
+              <a:t>La cuarta pregunta merece parrafo propio porque es la que mas se falla: por que esa regla esta en un disparador y no en la aplicacion.</a:t>
+            </a:r>
+          </a:p>
+          <a:p>
+            <a:r>
+              <a:t>Si vive en la aplicacion, los dos ultimos caminos la evaden sin esfuerzo.</a:t>
+            </a:r>
+          </a:p>
+          <a:p>
+            <a:r>
+              <a:t>Y hay que dar tambien el contra-argumento, porque un evaluador atento lo va a pedir: los disparadores son logica invisible, no aparecen en el codigo de la aplicacion, sorprenden a quien depura, y se disparan en cascada si uno modifica una tabla que a su vez tiene otro disparador.</a:t>
+            </a:r>
+          </a:p>
+          <a:p>
+            <a:r>
+              <a:t>Por eso la convencion sana, que el estudiante puede citar como criterio propio, es reservarlos para invariantes de integridad y auditoria, y dejar el flujo de negocio en procedimientos que se invocan explicitamente.</a:t>
             </a:r>
           </a:p>
         </p:txBody>
@@ -848,22 +863,67 @@
           </a:p>
           <a:p>
             <a:r>
-              <a:t>Un disparador, o trigger, es un bloque de codigo que el motor ejecuta automaticamente cuando ocurre un evento sobre una tabla, sin que nadie lo invoque.</a:t>
-            </a:r>
-          </a:p>
-          <a:p>
-            <a:r>
-              <a:t>El argumento a favor, y el unico que vale en una sustentacion, es la cobertura: el disparador se ejecuta no importa quien escriba.</a:t>
-            </a:r>
-          </a:p>
-          <a:p>
-            <a:r>
-              <a:t>Si la regla «el stock de un insumo nunca queda negativo» vive en el disparador, se cumple cuando escribe la aplicacion, cuando escribe un script de carga masiva y cuando alguien se conecta con un cliente SQL a corregir un dato a mano.</a:t>
-            </a:r>
-          </a:p>
-          <a:p>
-            <a:r>
-              <a:t>Lo mismo aplica al disparador de auditoria de precios: si se quiere saber quien cambio el precio de una vacuna, ese registro tiene que escribirse dentro de la base, porque quien edita a mano no lo va a escribir por cortesia.</a:t>
+              <a:t>Un proyecto de base de datos es reproducible si un tercero, con solo el archivo comprimido y sin hablar con el autor, obtiene la misma base funcionando.</a:t>
+            </a:r>
+          </a:p>
+          <a:p>
+            <a:r>
+              <a:t>La estructura que la garantiza es una carpeta con archivos numerados en el orden exacto de ejecucion: 00_LEEME.txt, 01_ddl.sql, 02_datos_prueba.sql, 03_roles.sql, 04_procedimientos.sql, 05_funciones.sql, 06_triggers.sql, 07_optimizacion.sql y 08_pruebas.sql.</a:t>
+            </a:r>
+          </a:p>
+          <a:p>
+            <a:r>
+              <a:t>El orden no es estetico, es una dependencia real: una tabla con clave foranea no se puede crear antes que la tabla a la que apunta, y un disparador no compila si su tabla todavia no existe.</a:t>
+            </a:r>
+          </a:p>
+          <a:p>
+            <a:r>
+              <a:t>Los datos de prueba tampoco son triviales, porque con dos filas por tabla no se demuestra nada: el minimo razonable para la clínica es tres duenos</a:t>
+            </a:r>
+          </a:p>
+          <a:p>
+            <a:r>
+              <a:t>Cinco mascotas, dos veterinarios, diez citas repartidas en varios dias, cinco insumos con stock y tres facturas con su detalle</a:t>
+            </a:r>
+          </a:p>
+          <a:p>
+            <a:r>
+              <a:t>Incluyendo deliberadamente los casos borde que los procedimientos deben rechazar, es decir una mascota marcada como inactiva y un insumo con stock en uno, porque sin esas dos filas el estudiante no puede demostrar su manejo de errores.</a:t>
+            </a:r>
+          </a:p>
+          <a:p>
+            <a:r>
+              <a:t>Uno, no declarar motor y version: el SQL no es un solo idioma, porque una columna autoincremental se escribe SERIAL en PostgreSQL</a:t>
+            </a:r>
+          </a:p>
+          <a:p>
+            <a:r>
+              <a:t>AUTO_INCREMENT en MySQL e IDENTITY o una secuencia en Oracle y SQL Server, el texto variable es VARCHAR en unos y VARCHAR2 en Oracle</a:t>
+            </a:r>
+          </a:p>
+          <a:p>
+            <a:r>
+              <a:t>Y la fecha actual es NOW() en unos y SYSDATE en Oracle; un script sin la linea «probado en PostgreSQL 15 en DB Fiddle» o «probado en Oracle 19c en Oracle Live SQL» obliga al evaluador a adivinar, y si adivina mal falla en la primera sentencia.</a:t>
+            </a:r>
+          </a:p>
+          <a:p>
+            <a:r>
+              <a:t>Dos, scripts que asumen un estado previo: quien ejecuta debe poder empezar desde una base vacia.</a:t>
+            </a:r>
+          </a:p>
+          <a:p>
+            <a:r>
+              <a:t>Tres, falta de idempotencia: si el script no se puede correr dos veces porque falla al encontrar que la tabla ya existe, se pierde tiempo en cada intento, y anteponer DROP TABLE IF EXISTS en orden inverso al de creacion lo resuelve.</a:t>
+            </a:r>
+          </a:p>
+          <a:p>
+            <a:r>
+              <a:t>Cuatro, el LEEME ausente o inutil; uno que sirve tiene cuatro cosas y cabe en media pagina: motor y version exactos, el orden de ejecucion de los archivos</a:t>
+            </a:r>
+          </a:p>
+          <a:p>
+            <a:r>
+              <a:t>Como verificar que quedo bien (una consulta cuyo resultado se conoce, por ejemplo SELECT COUNT(*) FROM cita devolviendo 10) y las limitaciones conocidas.</a:t>
             </a:r>
           </a:p>
           <a:p>
@@ -873,22 +933,12 @@
           </a:p>
           <a:p>
             <a:r>
-              <a:t>La cuarta pregunta merece parrafo propio porque es la que mas se falla: por que esa regla esta en un disparador y no en la aplicacion.</a:t>
-            </a:r>
-          </a:p>
-          <a:p>
-            <a:r>
-              <a:t>Si vive en la aplicacion, los dos ultimos caminos la evaden sin esfuerzo.</a:t>
-            </a:r>
-          </a:p>
-          <a:p>
-            <a:r>
-              <a:t>Y hay que dar tambien el contra-argumento, porque un evaluador atento lo va a pedir: los disparadores son logica invisible, no aparecen en el codigo de la aplicacion, sorprenden a quien depura, y se disparan en cascada si uno modifica una tabla que a su vez tiene otro disparador.</a:t>
-            </a:r>
-          </a:p>
-          <a:p>
-            <a:r>
-              <a:t>Por eso la convencion sana, que el estudiante puede citar como criterio propio, es reservarlos para invariantes de integridad y auditoria, y dejar el flujo de negocio en procedimientos que se invocan explicitamente.</a:t>
+              <a:t>Esa es la definicion operativa y es la unica prueba que importa; el docente puede aplicarla literalmente abriendo el ZIP en un playground limpio y ejecutando.</a:t>
+            </a:r>
+          </a:p>
+          <a:p>
+            <a:r>
+              <a:t>Sobre esa base, cuatro detalles rompen la reproducibilidad y son los que el docente debe buscar primero al abrir el paquete.</a:t>
             </a:r>
           </a:p>
         </p:txBody>
@@ -963,67 +1013,37 @@
           </a:p>
           <a:p>
             <a:r>
-              <a:t>Un proyecto de base de datos es reproducible si un tercero, con solo el archivo comprimido y sin hablar con el autor, obtiene la misma base funcionando.</a:t>
-            </a:r>
-          </a:p>
-          <a:p>
-            <a:r>
-              <a:t>La estructura que la garantiza es una carpeta con archivos numerados en el orden exacto de ejecucion: 00_LEEME.txt, 01_ddl.sql, 02_datos_prueba.sql, 03_roles.sql, 04_procedimientos.sql, 05_funciones.sql, 06_triggers.sql, 07_optimizacion.sql y 08_pruebas.sql.</a:t>
-            </a:r>
-          </a:p>
-          <a:p>
-            <a:r>
-              <a:t>El orden no es estetico, es una dependencia real: una tabla con clave foranea no se puede crear antes que la tabla a la que apunta, y un disparador no compila si su tabla todavia no existe.</a:t>
-            </a:r>
-          </a:p>
-          <a:p>
-            <a:r>
-              <a:t>Los datos de prueba tampoco son triviales, porque con dos filas por tabla no se demuestra nada: el minimo razonable para la clínica es tres duenos</a:t>
-            </a:r>
-          </a:p>
-          <a:p>
-            <a:r>
-              <a:t>Cinco mascotas, dos veterinarios, diez citas repartidas en varios dias, cinco insumos con stock y tres facturas con su detalle</a:t>
-            </a:r>
-          </a:p>
-          <a:p>
-            <a:r>
-              <a:t>Incluyendo deliberadamente los casos borde que los procedimientos deben rechazar, es decir una mascota marcada como inactiva y un insumo con stock en uno, porque sin esas dos filas el estudiante no puede demostrar su manejo de errores.</a:t>
-            </a:r>
-          </a:p>
-          <a:p>
-            <a:r>
-              <a:t>Uno, no declarar motor y version: el SQL no es un solo idioma, porque una columna autoincremental se escribe SERIAL en PostgreSQL</a:t>
-            </a:r>
-          </a:p>
-          <a:p>
-            <a:r>
-              <a:t>AUTO_INCREMENT en MySQL e IDENTITY o una secuencia en Oracle y SQL Server, el texto variable es VARCHAR en unos y VARCHAR2 en Oracle</a:t>
-            </a:r>
-          </a:p>
-          <a:p>
-            <a:r>
-              <a:t>Y la fecha actual es NOW() en unos y SYSDATE en Oracle; un script sin la linea «probado en PostgreSQL 15 en DB Fiddle» o «probado en Oracle 19c en Oracle Live SQL» obliga al evaluador a adivinar, y si adivina mal falla en la primera sentencia.</a:t>
-            </a:r>
-          </a:p>
-          <a:p>
-            <a:r>
-              <a:t>Dos, scripts que asumen un estado previo: quien ejecuta debe poder empezar desde una base vacia.</a:t>
-            </a:r>
-          </a:p>
-          <a:p>
-            <a:r>
-              <a:t>Tres, falta de idempotencia: si el script no se puede correr dos veces porque falla al encontrar que la tabla ya existe, se pierde tiempo en cada intento, y anteponer DROP TABLE IF EXISTS en orden inverso al de creacion lo resuelve.</a:t>
-            </a:r>
-          </a:p>
-          <a:p>
-            <a:r>
-              <a:t>Cuatro, el LEEME ausente o inutil; uno que sirve tiene cuatro cosas y cabe en media pagina: motor y version exactos, el orden de ejecucion de los archivos</a:t>
-            </a:r>
-          </a:p>
-          <a:p>
-            <a:r>
-              <a:t>Como verificar que quedo bien (una consulta cuyo resultado se conoce, por ejemplo SELECT COUNT(*) FROM cita devolviendo 10) y las limitaciones conocidas.</a:t>
+              <a:t>La sustentacion dura de 5 a 8 minutos y ese limite obliga a decidir que se deja fuera.</a:t>
+            </a:r>
+          </a:p>
+          <a:p>
+            <a:r>
+              <a:t>El reparto que funciona, y que es convencion y no regla dura, es: 45 segundos para el problema de la clínica en lenguaje de negocio, sin una sola tabla en pantalla</a:t>
+            </a:r>
+          </a:p>
+          <a:p>
+            <a:r>
+              <a:t>90 segundos para el modelo, mostrando el ER y justificando dos decisiones y no las quince; 60 segundos para seguridad, con la matriz de roles y una frase sobre por que recepcion no ve el historial clinico</a:t>
+            </a:r>
+          </a:p>
+          <a:p>
+            <a:r>
+              <a:t>90 segundos para la automatizacion, ejecutando un procedimiento con su caso valido y su caso invalido; 60 segundos para la optimizacion, con el plan de ejecucion antes y despues; 45 segundos para la integracion y el punto debil declarado; y 30 de cierre.</a:t>
+            </a:r>
+          </a:p>
+          <a:p>
+            <a:r>
+              <a:t>No es clase autonoma y la defensa no se reemplaza por un video grabado, porque el Q&amp;A dirigido al azar es lo unico que permite verificar que el modelo y los procedimientos son de quien los presenta.</a:t>
+            </a:r>
+          </a:p>
+          <a:p>
+            <a:r>
+              <a:t>Y el criterio de dominio es el mismo trabajando solo o en equipo autorizado: quien sustenta debe poder explicar cualquier parte en 60 segundos</a:t>
+            </a:r>
+          </a:p>
+          <a:p>
+            <a:r>
+              <a:t>Y si hubo equipo, cualquier integrante debe poder hacerlo con cualquier parte, no solo con la suya, porque el Q&amp;A se dirige al azar y porque si solo una persona entiende el modelo el evaluador no tiene forma de atribuir el trabajo a los demas.</a:t>
             </a:r>
           </a:p>
           <a:p>
@@ -1033,12 +1053,27 @@
           </a:p>
           <a:p>
             <a:r>
-              <a:t>Esa es la definicion operativa y es la unica prueba que importa; el docente puede aplicarla literalmente abriendo el ZIP en un playground limpio y ejecutando.</a:t>
-            </a:r>
-          </a:p>
-          <a:p>
-            <a:r>
-              <a:t>Sobre esa base, cuatro detalles rompen la reproducibilidad y son los que el docente debe buscar primero al abrir el paquete.</a:t>
+              <a:t>Y conviene ser explicito sobre el formato, porque de eso depende como se prepara el estudiante: la Clase 15 se dicta el 16 de noviembre en la ultima sesion del semestre, dedicada por completo a sustentaciones EN VIVO, con turnos consecutivos y preguntas del docente al cierre de cada uno.</a:t>
+            </a:r>
+          </a:p>
+          <a:p>
+            <a:r>
+              <a:t>Lo que si hay que exigir dentro del turno es la ejecucion real: que el estudiante corra el procedimiento en el playground, con su caso valido y su caso invalido, en vez de proyectar capturas fijas.</a:t>
+            </a:r>
+          </a:p>
+          <a:p>
+            <a:r>
+              <a:t>El paquete, en cambio.</a:t>
+            </a:r>
+          </a:p>
+          <a:p>
+            <a:r>
+              <a:t>Fuera de la lamina (habla de la practica): Lo que si hay que exigir dentro del turno es la ejecucion real: que el estudiante corra el procedimiento en el playground, con su caso valido y su caso invalido, en vez de proyectar capturas fijas, porque una consulta ejecutandose delante del evaluador es la evidencia mas dificil de fingir y la mas rapida de calificar.</a:t>
+            </a:r>
+          </a:p>
+          <a:p>
+            <a:r>
+              <a:t>Fuera de la lamina (habla de la practica): El paquete, en cambio, se sube al modulo de Proyectos de PostgreSQL en el navegador ANTES del turno: quien llega a subir archivos consume su propio tiempo de sustentacion.</a:t>
             </a:r>
           </a:p>
         </p:txBody>
@@ -1113,37 +1148,42 @@
           </a:p>
           <a:p>
             <a:r>
-              <a:t>La sustentacion dura de 5 a 8 minutos y ese limite obliga a decidir que se deja fuera.</a:t>
-            </a:r>
-          </a:p>
-          <a:p>
-            <a:r>
-              <a:t>El reparto que funciona, y que es convencion y no regla dura, es: 45 segundos para el problema de la clínica en lenguaje de negocio, sin una sola tabla en pantalla</a:t>
-            </a:r>
-          </a:p>
-          <a:p>
-            <a:r>
-              <a:t>90 segundos para el modelo, mostrando el ER y justificando dos decisiones y no las quince; 60 segundos para seguridad, con la matriz de roles y una frase sobre por que recepcion no ve el historial clinico</a:t>
-            </a:r>
-          </a:p>
-          <a:p>
-            <a:r>
-              <a:t>90 segundos para la automatizacion, ejecutando un procedimiento con su caso valido y su caso invalido; 60 segundos para la optimizacion, con el plan de ejecucion antes y despues; 45 segundos para la integracion y el punto debil declarado; y 30 de cierre.</a:t>
-            </a:r>
-          </a:p>
-          <a:p>
-            <a:r>
-              <a:t>No es clase autonoma y la defensa no se reemplaza por un video grabado, porque el Q&amp;A dirigido al azar es lo unico que permite verificar que el modelo y los procedimientos son de quien los presenta.</a:t>
-            </a:r>
-          </a:p>
-          <a:p>
-            <a:r>
-              <a:t>Y el criterio de dominio es el mismo trabajando solo o en equipo autorizado: quien sustenta debe poder explicar cualquier parte en 60 segundos</a:t>
-            </a:r>
-          </a:p>
-          <a:p>
-            <a:r>
-              <a:t>Y si hubo equipo, cualquier integrante debe poder hacerlo con cualquier parte, no solo con la suya, porque el Q&amp;A se dirige al azar y porque si solo una persona entiende el modelo el evaluador no tiene forma de atribuir el trabajo a los demas.</a:t>
+              <a:t>«Por que nombre y apellido separados y no un solo campo nombre_completo?»: porque se necesita ordenar y buscar por apellido, y separar despues un campo unido es un trabajo sucio y lleno de errores con nombres compuestos.</a:t>
+            </a:r>
+          </a:p>
+          <a:p>
+            <a:r>
+              <a:t>«Que pasa si un dueno tiene dos mascotas llamadas Pelusa?»: nada, porque la identidad la da id_mascota y no el nombre</a:t>
+            </a:r>
+          </a:p>
+          <a:p>
+            <a:r>
+              <a:t>Y si se quisiera prohibirlo habria que declarar UNIQUE (id_dueno, nombre), decision que el estudiante debe poder defender en cualquiera de los dos sentidos.</a:t>
+            </a:r>
+          </a:p>
+          <a:p>
+            <a:r>
+              <a:t>«Por que no borran las citas canceladas?»: porque el historial de cancelaciones es informacion de negocio, ya que permite ver que dueno cancela siempre</a:t>
+            </a:r>
+          </a:p>
+          <a:p>
+            <a:r>
+              <a:t>Y porque borrar filas referenciadas por facturas rompe la integridad referencial; se usa borrado logico con un campo de estado.</a:t>
+            </a:r>
+          </a:p>
+          <a:p>
+            <a:r>
+              <a:t>Y la pregunta que desarma a quien no midio: «cuanto mejoro esa consulta?».</a:t>
+            </a:r>
+          </a:p>
+          <a:p>
+            <a:r>
+              <a:t>Una respuesta solida tiene 3 partes: la decision, la alternativa descartada y la razon concreta en la clínica, por ejemplo el volumen de citas o una regla del negocio.</a:t>
+            </a:r>
+          </a:p>
+          <a:p>
+            <a:r>
+              <a:t>Error comun: responder con lo que hace la tabla en vez de por que existe; la pregunta de modelado siempre es un por que, no un que.</a:t>
             </a:r>
           </a:p>
           <a:p>
@@ -1153,27 +1193,17 @@
           </a:p>
           <a:p>
             <a:r>
-              <a:t>Y conviene ser explicito sobre el formato, porque de eso depende como se prepara el estudiante: la Clase 15 se dicta el 16 de noviembre en la ultima sesion del semestre, dedicada por completo a sustentaciones EN VIVO, con turnos consecutivos y preguntas del docente al cierre de cada uno.</a:t>
-            </a:r>
-          </a:p>
-          <a:p>
-            <a:r>
-              <a:t>Lo que si hay que exigir dentro del turno es la ejecucion real: que el estudiante corra el procedimiento en el playground, con su caso valido y su caso invalido, en vez de proyectar capturas fijas.</a:t>
-            </a:r>
-          </a:p>
-          <a:p>
-            <a:r>
-              <a:t>El paquete, en cambio.</a:t>
-            </a:r>
-          </a:p>
-          <a:p>
-            <a:r>
-              <a:t>Fuera de la lamina (habla de la practica): Lo que si hay que exigir dentro del turno es la ejecucion real: que el estudiante corra el procedimiento en el playground, con su caso valido y su caso invalido, en vez de proyectar capturas fijas, porque una consulta ejecutandose delante del evaluador es la evidencia mas dificil de fingir y la mas rapida de calificar.</a:t>
-            </a:r>
-          </a:p>
-          <a:p>
-            <a:r>
-              <a:t>Fuera de la lamina (habla de la practica): El paquete, en cambio, se sube al modulo de Proyectos de PostgreSQL en el navegador ANTES del turno: quien llega a subir archivos consume su propio tiempo de sustentacion.</a:t>
+              <a:t>El Q&amp;A sobre modelado tiene preguntas que se repiten, y conviene que el docente tenga las respuestas listas para poder calificarlas y para poder formularlas.</a:t>
+            </a:r>
+          </a:p>
+          <a:p>
+            <a:r>
+              <a:t>Aqui vale la regla general del Q&amp;A tecnico, que el docente debe anunciar antes de empezar: decir «no lo medimos» no penaliza si viene acompanado de como se mediria, por ejemplo «no medimos con volumen real porque el playground se reinicia, pero el plan de ejecucion pasa de recorrido completo a busqueda por indice, y la prueba seria cargar cincuenta mil citas y comparar los tiempos».</a:t>
+            </a:r>
+          </a:p>
+          <a:p>
+            <a:r>
+              <a:t>Inventar un numero, en cambio, se cae con la siguiente pregunta y cuesta mucho mas que admitir el limite.</a:t>
             </a:r>
           </a:p>
         </p:txBody>
@@ -1248,42 +1278,22 @@
           </a:p>
           <a:p>
             <a:r>
-              <a:t>«Por que nombre y apellido separados y no un solo campo nombre_completo?»: porque se necesita ordenar y buscar por apellido, y separar despues un campo unido es un trabajo sucio y lleno de errores con nombres compuestos.</a:t>
-            </a:r>
-          </a:p>
-          <a:p>
-            <a:r>
-              <a:t>«Que pasa si un dueno tiene dos mascotas llamadas Pelusa?»: nada, porque la identidad la da id_mascota y no el nombre</a:t>
-            </a:r>
-          </a:p>
-          <a:p>
-            <a:r>
-              <a:t>Y si se quisiera prohibirlo habria que declarar UNIQUE (id_dueno, nombre), decision que el estudiante debe poder defender en cualquiera de los dos sentidos.</a:t>
-            </a:r>
-          </a:p>
-          <a:p>
-            <a:r>
-              <a:t>«Por que no borran las citas canceladas?»: porque el historial de cancelaciones es informacion de negocio, ya que permite ver que dueno cancela siempre</a:t>
-            </a:r>
-          </a:p>
-          <a:p>
-            <a:r>
-              <a:t>Y porque borrar filas referenciadas por facturas rompe la integridad referencial; se usa borrado logico con un campo de estado.</a:t>
-            </a:r>
-          </a:p>
-          <a:p>
-            <a:r>
-              <a:t>Y la pregunta que desarma a quien no midio: «cuanto mejoro esa consulta?».</a:t>
-            </a:r>
-          </a:p>
-          <a:p>
-            <a:r>
-              <a:t>Una respuesta solida tiene 3 partes: la decision, la alternativa descartada y la razon concreta en la clínica, por ejemplo el volumen de citas o una regla del negocio.</a:t>
-            </a:r>
-          </a:p>
-          <a:p>
-            <a:r>
-              <a:t>Error comun: responder con lo que hace la tabla en vez de por que existe; la pregunta de modelado siempre es un por que, no un que.</a:t>
+              <a:t>El cierre del curso debe conectar lo hecho con el trabajo real, porque de eso depende que el estudiante conserve los scripts en vez de borrarlos al terminar el semestre.</a:t>
+            </a:r>
+          </a:p>
+          <a:p>
+            <a:r>
+              <a:t>Leer un plan de ejecucion y decidir si un indice sobra es una habilidad que se paga.</a:t>
+            </a:r>
+          </a:p>
+          <a:p>
+            <a:r>
+              <a:t>El SQL que se escribio ahi es el mismo que corre en un servidor de produccion; lo que cambia en un entorno profesional es el volumen de datos y las consecuencias de un error, no la sintaxis.</a:t>
+            </a:r>
+          </a:p>
+          <a:p>
+            <a:r>
+              <a:t>Y la autoevaluacion de la clase conviene pedirla con una consigna concreta en vez de una reflexion vaga: nombren la decision de modelado que mas les costo revertir y en que clase se dieron cuenta de que estaba mal.</a:t>
             </a:r>
           </a:p>
           <a:p>
@@ -1293,116 +1303,6 @@
           </a:p>
           <a:p>
             <a:r>
-              <a:t>El Q&amp;A sobre modelado tiene preguntas que se repiten, y conviene que el docente tenga las respuestas listas para poder calificarlas y para poder formularlas.</a:t>
-            </a:r>
-          </a:p>
-          <a:p>
-            <a:r>
-              <a:t>Aqui vale la regla general del Q&amp;A tecnico, que el docente debe anunciar antes de empezar: decir «no lo medimos» no penaliza si viene acompanado de como se mediria, por ejemplo «no medimos con volumen real porque el playground se reinicia, pero el plan de ejecucion pasa de recorrido completo a busqueda por indice, y la prueba seria cargar cincuenta mil citas y comparar los tiempos».</a:t>
-            </a:r>
-          </a:p>
-          <a:p>
-            <a:r>
-              <a:t>Inventar un numero, en cambio, se cae con la siguiente pregunta y cuesta mucho mas que admitir el limite.</a:t>
-            </a:r>
-          </a:p>
-        </p:txBody>
-      </p:sp>
-      <p:sp>
-        <p:nvSpPr>
-          <p:cNvPr id="4" name="Slide Number Placeholder 3"/>
-          <p:cNvSpPr>
-            <a:spLocks noGrp="1"/>
-          </p:cNvSpPr>
-          <p:nvPr>
-            <p:ph type="sldNum" idx="5" sz="quarter"/>
-          </p:nvPr>
-        </p:nvSpPr>
-        <p:spPr/>
-      </p:sp>
-    </p:spTree>
-  </p:cSld>
-  <p:clrMapOvr>
-    <a:masterClrMapping/>
-  </p:clrMapOvr>
-</p:notes>
-</file>
-
-<file path=ppt/notesSlides/notesSlide8.xml><?xml version="1.0" encoding="utf-8"?>
-<p:notes xmlns:a="http://schemas.openxmlformats.org/drawingml/2006/main" xmlns:p="http://schemas.openxmlformats.org/presentationml/2006/main" xmlns:r="http://schemas.openxmlformats.org/officeDocument/2006/relationships">
-  <p:cSld>
-    <p:spTree>
-      <p:nvGrpSpPr>
-        <p:cNvPr id="1" name=""/>
-        <p:cNvGrpSpPr/>
-        <p:nvPr/>
-      </p:nvGrpSpPr>
-      <p:grpSpPr>
-        <a:xfrm>
-          <a:off x="0" y="0"/>
-          <a:ext cx="0" cy="0"/>
-          <a:chOff x="0" y="0"/>
-          <a:chExt cx="0" cy="0"/>
-        </a:xfrm>
-      </p:grpSpPr>
-      <p:sp>
-        <p:nvSpPr>
-          <p:cNvPr id="2" name="Slide Image Placeholder 1"/>
-          <p:cNvSpPr>
-            <a:spLocks noGrp="1"/>
-          </p:cNvSpPr>
-          <p:nvPr>
-            <p:ph type="sldImg" idx="2"/>
-          </p:nvPr>
-        </p:nvSpPr>
-        <p:spPr/>
-      </p:sp>
-      <p:sp>
-        <p:nvSpPr>
-          <p:cNvPr id="3" name="Notes Placeholder 2"/>
-          <p:cNvSpPr>
-            <a:spLocks noGrp="1"/>
-          </p:cNvSpPr>
-          <p:nvPr>
-            <p:ph type="body" idx="3" sz="quarter"/>
-          </p:nvPr>
-        </p:nvSpPr>
-        <p:spPr/>
-        <p:txBody>
-          <a:bodyPr/>
-          <a:lstStyle/>
-          <a:p>
-            <a:r>
-              <a:t>DESARROLLO (para explicarlo, no se proyecta):</a:t>
-            </a:r>
-          </a:p>
-          <a:p>
-            <a:r>
-              <a:t>El cierre del curso debe conectar lo hecho con el trabajo real, porque de eso depende que el estudiante conserve los scripts en vez de borrarlos al terminar el semestre.</a:t>
-            </a:r>
-          </a:p>
-          <a:p>
-            <a:r>
-              <a:t>Leer un plan de ejecucion y decidir si un indice sobra es una habilidad que se paga.</a:t>
-            </a:r>
-          </a:p>
-          <a:p>
-            <a:r>
-              <a:t>El SQL que se escribio ahi es el mismo que corre en un servidor de produccion; lo que cambia en un entorno profesional es el volumen de datos y las consecuencias de un error, no la sintaxis.</a:t>
-            </a:r>
-          </a:p>
-          <a:p>
-            <a:r>
-              <a:t>Y la autoevaluacion de la clase conviene pedirla con una consigna concreta en vez de una reflexion vaga: nombren la decision de modelado que mas les costo revertir y en que clase se dieron cuenta de que estaba mal.</a:t>
-            </a:r>
-          </a:p>
-          <a:p>
-            <a:r>
-              <a:t>NOTAS:</a:t>
-            </a:r>
-          </a:p>
-          <a:p>
-            <a:r>
               <a:t>Lo que el estudiante produjo (un ER justificado, un DDL con restricciones declarativas, una matriz de privilegios, procedimientos con manejo de errores, disparadores de auditoria, un analisis de plan de ejecucion y un contrato de operaciones) es literalmente el contenido de las tareas de un desarrollador de base de datos o de un administrador junior en su primer ano de trabajo.</a:t>
             </a:r>
           </a:p>
@@ -1414,106 +1314,6 @@
           <a:p>
             <a:r>
               <a:t>Esa respuesta es la que mejor predice si aprendieron, y ademas le da al docente material real para ajustar el curso el proximo semestre.</a:t>
-            </a:r>
-          </a:p>
-        </p:txBody>
-      </p:sp>
-      <p:sp>
-        <p:nvSpPr>
-          <p:cNvPr id="4" name="Slide Number Placeholder 3"/>
-          <p:cNvSpPr>
-            <a:spLocks noGrp="1"/>
-          </p:cNvSpPr>
-          <p:nvPr>
-            <p:ph type="sldNum" idx="5" sz="quarter"/>
-          </p:nvPr>
-        </p:nvSpPr>
-        <p:spPr/>
-      </p:sp>
-    </p:spTree>
-  </p:cSld>
-  <p:clrMapOvr>
-    <a:masterClrMapping/>
-  </p:clrMapOvr>
-</p:notes>
-</file>
-
-<file path=ppt/notesSlides/notesSlide9.xml><?xml version="1.0" encoding="utf-8"?>
-<p:notes xmlns:a="http://schemas.openxmlformats.org/drawingml/2006/main" xmlns:p="http://schemas.openxmlformats.org/presentationml/2006/main" xmlns:r="http://schemas.openxmlformats.org/officeDocument/2006/relationships">
-  <p:cSld>
-    <p:spTree>
-      <p:nvGrpSpPr>
-        <p:cNvPr id="1" name=""/>
-        <p:cNvGrpSpPr/>
-        <p:nvPr/>
-      </p:nvGrpSpPr>
-      <p:grpSpPr>
-        <a:xfrm>
-          <a:off x="0" y="0"/>
-          <a:ext cx="0" cy="0"/>
-          <a:chOff x="0" y="0"/>
-          <a:chExt cx="0" cy="0"/>
-        </a:xfrm>
-      </p:grpSpPr>
-      <p:sp>
-        <p:nvSpPr>
-          <p:cNvPr id="2" name="Slide Image Placeholder 1"/>
-          <p:cNvSpPr>
-            <a:spLocks noGrp="1"/>
-          </p:cNvSpPr>
-          <p:nvPr>
-            <p:ph type="sldImg" idx="2"/>
-          </p:nvPr>
-        </p:nvSpPr>
-        <p:spPr/>
-      </p:sp>
-      <p:sp>
-        <p:nvSpPr>
-          <p:cNvPr id="3" name="Notes Placeholder 2"/>
-          <p:cNvSpPr>
-            <a:spLocks noGrp="1"/>
-          </p:cNvSpPr>
-          <p:nvPr>
-            <p:ph type="body" idx="3" sz="quarter"/>
-          </p:nvPr>
-        </p:nvSpPr>
-        <p:spPr/>
-        <p:txBody>
-          <a:bodyPr/>
-          <a:lstStyle/>
-          <a:p>
-            <a:r>
-              <a:t>TEXTO COMPLETO DE LA LÁMINA (se proyecta resumido):</a:t>
-            </a:r>
-          </a:p>
-          <a:p/>
-          <a:p>
-            <a:r>
-              <a:t>Sustentación en vivo, en este bloque: no se reemplaza por video grabado.</a:t>
-            </a:r>
-          </a:p>
-          <a:p/>
-          <a:p>
-            <a:r>
-              <a:t>Turnos de 5–8 min de pitch + Q&amp;A; el orden se sortea al empezar.</a:t>
-            </a:r>
-          </a:p>
-          <a:p/>
-          <a:p>
-            <a:r>
-              <a:t>En tu turno muestra una ejecución real (procedimiento OK + caso rechazado), no solo capturas.</a:t>
-            </a:r>
-          </a:p>
-          <a:p/>
-          <a:p>
-            <a:r>
-              <a:t>Mientras otros presentan, escuchas: el cierre del curso se hace con todo el grupo.</a:t>
-            </a:r>
-          </a:p>
-          <a:p/>
-          <a:p>
-            <a:r>
-              <a:t>Cada decisión se defiende con su porqué: la restricción, el rol, el índice o el procedimiento que la sostiene.</a:t>
             </a:r>
           </a:p>
         </p:txBody>
@@ -5044,118 +4844,14 @@
       </p:sp>
       <p:sp>
         <p:nvSpPr>
-          <p:cNvPr id="5" name="Rounded Rectangle 4"/>
-          <p:cNvSpPr/>
-          <p:nvPr/>
-        </p:nvSpPr>
-        <p:spPr>
-          <a:xfrm>
-            <a:off x="5797149" y="1573813"/>
-            <a:ext cx="6010497" cy="4057845"/>
-          </a:xfrm>
-          <a:prstGeom prst="roundRect">
-            <a:avLst>
-              <a:gd name="adj" fmla="val 4000"/>
-            </a:avLst>
-          </a:prstGeom>
-          <a:solidFill>
-            <a:srgbClr val="E8EEF4"/>
-          </a:solidFill>
-          <a:ln>
-            <a:noFill/>
-          </a:ln>
-        </p:spPr>
-        <p:style>
-          <a:lnRef idx="1">
-            <a:schemeClr val="accent1"/>
-          </a:lnRef>
-          <a:fillRef idx="3">
-            <a:schemeClr val="accent1"/>
-          </a:fillRef>
-          <a:effectRef idx="2">
-            <a:schemeClr val="accent1"/>
-          </a:effectRef>
-          <a:fontRef idx="minor">
-            <a:schemeClr val="lt1"/>
-          </a:fontRef>
-        </p:style>
-        <p:txBody>
-          <a:bodyPr rtlCol="0" anchor="ctr"/>
-          <a:lstStyle/>
-          <a:p>
-            <a:pPr algn="ctr"/>
-          </a:p>
-        </p:txBody>
-      </p:sp>
-      <p:pic>
-        <p:nvPicPr>
-          <p:cNvPr id="6" name="Picture 5" descr="database-engineer-working-on-server-code.jpg"/>
-          <p:cNvPicPr>
-            <a:picLocks noChangeAspect="1"/>
-          </p:cNvPicPr>
-          <p:nvPr/>
-        </p:nvPicPr>
-        <p:blipFill>
-          <a:blip r:embed="rId2"/>
-          <a:stretch>
-            <a:fillRect/>
-          </a:stretch>
-        </p:blipFill>
-        <p:spPr>
-          <a:xfrm>
-            <a:off x="5870301" y="1646965"/>
-            <a:ext cx="5864193" cy="3911541"/>
-          </a:xfrm>
-          <a:prstGeom prst="rect">
-            <a:avLst/>
-          </a:prstGeom>
-        </p:spPr>
-      </p:pic>
-      <p:sp>
-        <p:nvSpPr>
-          <p:cNvPr id="7" name="TextBox 6"/>
+          <p:cNvPr id="5" name="TextBox 4"/>
           <p:cNvSpPr txBox="1"/>
           <p:nvPr/>
         </p:nvSpPr>
         <p:spPr>
           <a:xfrm>
-            <a:off x="5870301" y="5961888"/>
-            <a:ext cx="5864193" cy="320040"/>
-          </a:xfrm>
-          <a:prstGeom prst="rect">
-            <a:avLst/>
-          </a:prstGeom>
-          <a:noFill/>
-        </p:spPr>
-        <p:txBody>
-          <a:bodyPr wrap="square">
-            <a:spAutoFit/>
-          </a:bodyPr>
-          <a:lstStyle/>
-          <a:p>
-            <a:pPr algn="ctr"/>
-            <a:r>
-              <a:rPr sz="1100" b="0" i="1">
-                <a:solidFill>
-                  <a:srgbClr val="666666"/>
-                </a:solidFill>
-                <a:latin typeface="Calibri"/>
-              </a:rPr>
-              <a:t>Foto: Muhammed Ensar · Pexels</a:t>
-            </a:r>
-          </a:p>
-        </p:txBody>
-      </p:sp>
-      <p:sp>
-        <p:nvSpPr>
-          <p:cNvPr id="8" name="TextBox 7"/>
-          <p:cNvSpPr txBox="1"/>
-          <p:nvPr/>
-        </p:nvSpPr>
-        <p:spPr>
-          <a:xfrm>
-            <a:off x="457200" y="1353312"/>
-            <a:ext cx="5093061" cy="5047488"/>
+            <a:off x="457200" y="1170432"/>
+            <a:ext cx="11277295" cy="5230368"/>
           </a:xfrm>
           <a:prstGeom prst="rect">
             <a:avLst/>
@@ -5235,7 +4931,7 @@
       </p:sp>
       <p:sp>
         <p:nvSpPr>
-          <p:cNvPr id="9" name="TextBox 8"/>
+          <p:cNvPr id="6" name="TextBox 5"/>
           <p:cNvSpPr txBox="1"/>
           <p:nvPr/>
         </p:nvSpPr>
@@ -5416,118 +5112,14 @@
       </p:sp>
       <p:sp>
         <p:nvSpPr>
-          <p:cNvPr id="5" name="Rounded Rectangle 4"/>
-          <p:cNvSpPr/>
-          <p:nvPr/>
-        </p:nvSpPr>
-        <p:spPr>
-          <a:xfrm>
-            <a:off x="5797149" y="1570693"/>
-            <a:ext cx="6010497" cy="4064084"/>
-          </a:xfrm>
-          <a:prstGeom prst="roundRect">
-            <a:avLst>
-              <a:gd name="adj" fmla="val 4000"/>
-            </a:avLst>
-          </a:prstGeom>
-          <a:solidFill>
-            <a:srgbClr val="E8EEF4"/>
-          </a:solidFill>
-          <a:ln>
-            <a:noFill/>
-          </a:ln>
-        </p:spPr>
-        <p:style>
-          <a:lnRef idx="1">
-            <a:schemeClr val="accent1"/>
-          </a:lnRef>
-          <a:fillRef idx="3">
-            <a:schemeClr val="accent1"/>
-          </a:fillRef>
-          <a:effectRef idx="2">
-            <a:schemeClr val="accent1"/>
-          </a:effectRef>
-          <a:fontRef idx="minor">
-            <a:schemeClr val="lt1"/>
-          </a:fontRef>
-        </p:style>
-        <p:txBody>
-          <a:bodyPr rtlCol="0" anchor="ctr"/>
-          <a:lstStyle/>
-          <a:p>
-            <a:pPr algn="ctr"/>
-          </a:p>
-        </p:txBody>
-      </p:sp>
-      <p:pic>
-        <p:nvPicPr>
-          <p:cNvPr id="6" name="Picture 5" descr="presentation-schedule-agenda.jpg"/>
-          <p:cNvPicPr>
-            <a:picLocks noChangeAspect="1"/>
-          </p:cNvPicPr>
-          <p:nvPr/>
-        </p:nvPicPr>
-        <p:blipFill>
-          <a:blip r:embed="rId2"/>
-          <a:stretch>
-            <a:fillRect/>
-          </a:stretch>
-        </p:blipFill>
-        <p:spPr>
-          <a:xfrm>
-            <a:off x="5870301" y="1643845"/>
-            <a:ext cx="5864193" cy="3917780"/>
-          </a:xfrm>
-          <a:prstGeom prst="rect">
-            <a:avLst/>
-          </a:prstGeom>
-        </p:spPr>
-      </p:pic>
-      <p:sp>
-        <p:nvSpPr>
-          <p:cNvPr id="7" name="TextBox 6"/>
+          <p:cNvPr id="5" name="TextBox 4"/>
           <p:cNvSpPr txBox="1"/>
           <p:nvPr/>
         </p:nvSpPr>
         <p:spPr>
           <a:xfrm>
-            <a:off x="5870301" y="5961888"/>
-            <a:ext cx="5864193" cy="320040"/>
-          </a:xfrm>
-          <a:prstGeom prst="rect">
-            <a:avLst/>
-          </a:prstGeom>
-          <a:noFill/>
-        </p:spPr>
-        <p:txBody>
-          <a:bodyPr wrap="square">
-            <a:spAutoFit/>
-          </a:bodyPr>
-          <a:lstStyle/>
-          <a:p>
-            <a:pPr algn="ctr"/>
-            <a:r>
-              <a:rPr sz="1100" b="0" i="1">
-                <a:solidFill>
-                  <a:srgbClr val="666666"/>
-                </a:solidFill>
-                <a:latin typeface="Calibri"/>
-              </a:rPr>
-              <a:t>Foto: Pavel Danilyuk · Pexels</a:t>
-            </a:r>
-          </a:p>
-        </p:txBody>
-      </p:sp>
-      <p:sp>
-        <p:nvSpPr>
-          <p:cNvPr id="8" name="TextBox 7"/>
-          <p:cNvSpPr txBox="1"/>
-          <p:nvPr/>
-        </p:nvSpPr>
-        <p:spPr>
-          <a:xfrm>
-            <a:off x="457200" y="1353312"/>
-            <a:ext cx="5093061" cy="5047488"/>
+            <a:off x="457200" y="1170432"/>
+            <a:ext cx="11277295" cy="5230368"/>
           </a:xfrm>
           <a:prstGeom prst="rect">
             <a:avLst/>
@@ -5657,11 +5249,27 @@
               <a:t>–   Mientras otros presentan, escuchas: el cierre del curso se hace con todo el grupo.</a:t>
             </a:r>
           </a:p>
-        </p:txBody>
-      </p:sp>
-      <p:sp>
-        <p:nvSpPr>
-          <p:cNvPr id="9" name="TextBox 8"/>
+          <a:p>
+            <a:pPr>
+              <a:spcAft>
+                <a:spcPts val="800"/>
+              </a:spcAft>
+            </a:pPr>
+            <a:r>
+              <a:rPr sz="2000" b="0" i="0">
+                <a:solidFill>
+                  <a:srgbClr val="333333"/>
+                </a:solidFill>
+                <a:latin typeface="Calibri"/>
+              </a:rPr>
+              <a:t>–   Cada decisión se defiende con su porqué: la restricción, el rol, el índice o el procedimiento que la sostiene.</a:t>
+            </a:r>
+          </a:p>
+        </p:txBody>
+      </p:sp>
+      <p:sp>
+        <p:nvSpPr>
+          <p:cNvPr id="6" name="TextBox 5"/>
           <p:cNvSpPr txBox="1"/>
           <p:nvPr/>
         </p:nvSpPr>
@@ -6058,118 +5666,14 @@
       </p:sp>
       <p:sp>
         <p:nvSpPr>
-          <p:cNvPr id="5" name="Rounded Rectangle 4"/>
-          <p:cNvSpPr/>
-          <p:nvPr/>
-        </p:nvSpPr>
-        <p:spPr>
-          <a:xfrm>
-            <a:off x="5797149" y="1573813"/>
-            <a:ext cx="6010497" cy="4057845"/>
-          </a:xfrm>
-          <a:prstGeom prst="roundRect">
-            <a:avLst>
-              <a:gd name="adj" fmla="val 4000"/>
-            </a:avLst>
-          </a:prstGeom>
-          <a:solidFill>
-            <a:srgbClr val="E8EEF4"/>
-          </a:solidFill>
-          <a:ln>
-            <a:noFill/>
-          </a:ln>
-        </p:spPr>
-        <p:style>
-          <a:lnRef idx="1">
-            <a:schemeClr val="accent1"/>
-          </a:lnRef>
-          <a:fillRef idx="3">
-            <a:schemeClr val="accent1"/>
-          </a:fillRef>
-          <a:effectRef idx="2">
-            <a:schemeClr val="accent1"/>
-          </a:effectRef>
-          <a:fontRef idx="minor">
-            <a:schemeClr val="lt1"/>
-          </a:fontRef>
-        </p:style>
-        <p:txBody>
-          <a:bodyPr rtlCol="0" anchor="ctr"/>
-          <a:lstStyle/>
-          <a:p>
-            <a:pPr algn="ctr"/>
-          </a:p>
-        </p:txBody>
-      </p:sp>
-      <p:pic>
-        <p:nvPicPr>
-          <p:cNvPr id="6" name="Picture 5" descr="notebook-planning-desk-coffee.jpg"/>
-          <p:cNvPicPr>
-            <a:picLocks noChangeAspect="1"/>
-          </p:cNvPicPr>
-          <p:nvPr/>
-        </p:nvPicPr>
-        <p:blipFill>
-          <a:blip r:embed="rId2"/>
-          <a:stretch>
-            <a:fillRect/>
-          </a:stretch>
-        </p:blipFill>
-        <p:spPr>
-          <a:xfrm>
-            <a:off x="5870301" y="1646965"/>
-            <a:ext cx="5864193" cy="3911541"/>
-          </a:xfrm>
-          <a:prstGeom prst="rect">
-            <a:avLst/>
-          </a:prstGeom>
-        </p:spPr>
-      </p:pic>
-      <p:sp>
-        <p:nvSpPr>
-          <p:cNvPr id="7" name="TextBox 6"/>
+          <p:cNvPr id="5" name="TextBox 4"/>
           <p:cNvSpPr txBox="1"/>
           <p:nvPr/>
         </p:nvSpPr>
         <p:spPr>
           <a:xfrm>
-            <a:off x="5870301" y="5961888"/>
-            <a:ext cx="5864193" cy="320040"/>
-          </a:xfrm>
-          <a:prstGeom prst="rect">
-            <a:avLst/>
-          </a:prstGeom>
-          <a:noFill/>
-        </p:spPr>
-        <p:txBody>
-          <a:bodyPr wrap="square">
-            <a:spAutoFit/>
-          </a:bodyPr>
-          <a:lstStyle/>
-          <a:p>
-            <a:pPr algn="ctr"/>
-            <a:r>
-              <a:rPr sz="1100" b="0" i="1">
-                <a:solidFill>
-                  <a:srgbClr val="666666"/>
-                </a:solidFill>
-                <a:latin typeface="Calibri"/>
-              </a:rPr>
-              <a:t>Foto: Cup of  Couple · Pexels</a:t>
-            </a:r>
-          </a:p>
-        </p:txBody>
-      </p:sp>
-      <p:sp>
-        <p:nvSpPr>
-          <p:cNvPr id="8" name="TextBox 7"/>
-          <p:cNvSpPr txBox="1"/>
-          <p:nvPr/>
-        </p:nvSpPr>
-        <p:spPr>
-          <a:xfrm>
-            <a:off x="457200" y="1353312"/>
-            <a:ext cx="5093061" cy="5047488"/>
+            <a:off x="457200" y="1170432"/>
+            <a:ext cx="11277295" cy="5230368"/>
           </a:xfrm>
           <a:prstGeom prst="rect">
             <a:avLst/>
@@ -6317,11 +5821,45 @@
               <a:t>–   Sustentar es justificar decisiones: por qué esta tabla, esta restricción, este índice.</a:t>
             </a:r>
           </a:p>
-        </p:txBody>
-      </p:sp>
-      <p:sp>
-        <p:nvSpPr>
-          <p:cNvPr id="9" name="TextBox 8"/>
+          <a:p>
+            <a:pPr>
+              <a:spcAft>
+                <a:spcPts val="800"/>
+              </a:spcAft>
+            </a:pPr>
+            <a:r>
+              <a:rPr sz="2000" b="0" i="0">
+                <a:solidFill>
+                  <a:srgbClr val="333333"/>
+                </a:solidFill>
+                <a:latin typeface="Calibri"/>
+              </a:rPr>
+              <a:t>–   </a:t>
+            </a:r>
+            <a:r>
+              <a:rPr sz="2000" b="1" i="0">
+                <a:solidFill>
+                  <a:srgbClr val="333333"/>
+                </a:solidFill>
+                <a:latin typeface="Calibri"/>
+              </a:rPr>
+              <a:t>Ejes de hoy:</a:t>
+            </a:r>
+            <a:r>
+              <a:rPr sz="2000" b="0" i="0">
+                <a:solidFill>
+                  <a:srgbClr val="333333"/>
+                </a:solidFill>
+                <a:latin typeface="Calibri"/>
+              </a:rPr>
+              <a:t> Sustentar no es describir · Las cuatro preguntas de por que que se hacen casi siempre · La cuarta pregunta, la que mas se falla.</a:t>
+            </a:r>
+          </a:p>
+        </p:txBody>
+      </p:sp>
+      <p:sp>
+        <p:nvSpPr>
+          <p:cNvPr id="6" name="TextBox 5"/>
           <p:cNvSpPr txBox="1"/>
           <p:nvPr/>
         </p:nvSpPr>

--- a/Bases de Datos II/Clases/Clase 15 - Presentacion del proyecto y cierre/Presentacion.pptx
+++ b/Bases de Datos II/Clases/Clase 15 - Presentacion del proyecto y cierre/Presentacion.pptx
@@ -513,57 +513,252 @@
           <a:lstStyle/>
           <a:p>
             <a:r>
-              <a:t>DESARROLLO (para explicarlo, no se proyecta):</a:t>
-            </a:r>
-          </a:p>
-          <a:p>
-            <a:r>
-              <a:t>Sustentar una base de datos no es recorrer el diagrama entidad-relacion nombrando tablas.</a:t>
-            </a:r>
-          </a:p>
-          <a:p>
-            <a:r>
-              <a:t>Describir es decir que hay: «tenemos Dueno, Mascota, Cita, Veterinario, Insumo y Factura».</a:t>
-            </a:r>
-          </a:p>
-          <a:p>
-            <a:r>
-              <a:t>Sustentar es responder por que quedo asi y que alternativa se descarto.</a:t>
-            </a:r>
-          </a:p>
-          <a:p>
-            <a:r>
-              <a:t>La razon por la que esto importa mas en bases de datos que en casi cualquier otra parte del software es el costo de revertir: cambiar el texto de un boton cuesta minutos</a:t>
-            </a:r>
-          </a:p>
-          <a:p>
-            <a:r>
-              <a:t>Mientras que partir en dos una tabla que ya tiene cien mil filas y seis procedimientos apuntando a ella cuesta una migracion, una ventana de mantenimiento y el riesgo real de perder datos.</a:t>
-            </a:r>
-          </a:p>
-          <a:p>
-            <a:r>
-              <a:t>Una decision de modelado es, por definicion, una decision costosa de deshacer.</a:t>
-            </a:r>
-          </a:p>
-          <a:p>
-            <a:r>
-              <a:t>La clase de hoy no trae tema nuevo: trae la teoria de como se comunica y se empaqueta un trabajo tecnico para que un tercero pueda evaluarlo, reproducirlo y usarlo sin hablar con quien lo hizo.</a:t>
-            </a:r>
-          </a:p>
-          <a:p>
-            <a:r>
-              <a:t>Describir es decir que hay una tabla cita con una FK; sustentar es explicar por que la FK va en cita y no en mascota, y que pasaria si no estuviera.</a:t>
-            </a:r>
-          </a:p>
-          <a:p>
-            <a:r>
-              <a:t>NOTAS:</a:t>
-            </a:r>
-          </a:p>
-          <a:p>
-            <a:r>
-              <a:t>Eso convierte cada eleccion del ER en algo que se debe poder defender, y es exactamente lo que un evaluador (o un lider tecnico en una entrevista) va a probar con dos o tres preguntas bien elegidas.</a:t>
+              <a:t>QUÉ ES (dilo así): La sustentación no es una visita guiada por el diagrama. Es explicar por qué cada decisión quedó como quedó y qué se descartó, porque en una base de datos deshacer una decisión cuesta caro.</a:t>
+            </a:r>
+          </a:p>
+          <a:p/>
+          <a:p>
+            <a:r>
+              <a:t>CÓMO DARLA (≈2 min):</a:t>
+            </a:r>
+          </a:p>
+          <a:p>
+            <a:r>
+              <a:t>  • Al entrar: A la izquierda, describir: una lista de «tenemos…». Pregunta: ¿qué aprende el evaluador de esa lista que no vea ya en el diagrama? Nada.</a:t>
+            </a:r>
+          </a:p>
+          <a:p>
+            <a:r>
+              <a:t>  • Clic 1: A la derecha, sustentar: por qué quedó así y qué se descartó. Son las dos preguntas que se van a hacer en cada turno.</a:t>
+            </a:r>
+          </a:p>
+          <a:p>
+            <a:r>
+              <a:t>  • Clic 2: El costo de revertir: cambiar código es la barra corta; cambiar un esquema con datos (partir una tabla con cien mil filas y seis procedimientos apuntándole) es la barra larga: migración, ventana de mantenimiento y riesgo de perder datos.</a:t>
+            </a:r>
+          </a:p>
+          <a:p/>
+          <a:p>
+            <a:r>
+              <a:t>EJEMPLO: Describir: «hay una tabla cita con una FK». Sustentar: «la FK va en cita y no en mascota porque una mascota tiene muchas citas; sin ella podría existir una cita de una mascota que no existe».</a:t>
+            </a:r>
+          </a:p>
+          <a:p/>
+          <a:p>
+            <a:r>
+              <a:t>SI PREGUNTAN:</a:t>
+            </a:r>
+          </a:p>
+          <a:p>
+            <a:r>
+              <a:t>  • «¿Entonces no muestro el diagrama?» → Sí, pero como apoyo de dos decisiones justificadas, no para nombrar las tablas una por una.</a:t>
+            </a:r>
+          </a:p>
+          <a:p/>
+          <a:p>
+            <a:r>
+              <a:t>CUIDADO: No califiques bien un recorrido de seis minutos por el ER porque «explicaron todo»: si nadie dio un porqué, no hubo sustentación.</a:t>
+            </a:r>
+          </a:p>
+          <a:p/>
+          <a:p>
+            <a:r>
+              <a:t>PASA A LA SIGUIENTE: Las preguntas de porqué que casi siempre llegan son cuatro.</a:t>
+            </a:r>
+          </a:p>
+        </p:txBody>
+      </p:sp>
+      <p:sp>
+        <p:nvSpPr>
+          <p:cNvPr id="4" name="Slide Number Placeholder 3"/>
+          <p:cNvSpPr>
+            <a:spLocks noGrp="1"/>
+          </p:cNvSpPr>
+          <p:nvPr>
+            <p:ph type="sldNum" idx="5" sz="quarter"/>
+          </p:nvPr>
+        </p:nvSpPr>
+        <p:spPr/>
+      </p:sp>
+    </p:spTree>
+  </p:cSld>
+  <p:clrMapOvr>
+    <a:masterClrMapping/>
+  </p:clrMapOvr>
+</p:notes>
+</file>
+
+<file path=ppt/notesSlides/notesSlide10.xml><?xml version="1.0" encoding="utf-8"?>
+<p:notes xmlns:a="http://schemas.openxmlformats.org/drawingml/2006/main" xmlns:p="http://schemas.openxmlformats.org/presentationml/2006/main" xmlns:r="http://schemas.openxmlformats.org/officeDocument/2006/relationships">
+  <p:cSld>
+    <p:spTree>
+      <p:nvGrpSpPr>
+        <p:cNvPr id="1" name=""/>
+        <p:cNvGrpSpPr/>
+        <p:nvPr/>
+      </p:nvGrpSpPr>
+      <p:grpSpPr>
+        <a:xfrm>
+          <a:off x="0" y="0"/>
+          <a:ext cx="0" cy="0"/>
+          <a:chOff x="0" y="0"/>
+          <a:chExt cx="0" cy="0"/>
+        </a:xfrm>
+      </p:grpSpPr>
+      <p:sp>
+        <p:nvSpPr>
+          <p:cNvPr id="2" name="Slide Image Placeholder 1"/>
+          <p:cNvSpPr>
+            <a:spLocks noGrp="1"/>
+          </p:cNvSpPr>
+          <p:nvPr>
+            <p:ph type="sldImg" idx="2"/>
+          </p:nvPr>
+        </p:nvSpPr>
+        <p:spPr/>
+      </p:sp>
+      <p:sp>
+        <p:nvSpPr>
+          <p:cNvPr id="3" name="Notes Placeholder 2"/>
+          <p:cNvSpPr>
+            <a:spLocks noGrp="1"/>
+          </p:cNvSpPr>
+          <p:nvPr>
+            <p:ph type="body" idx="3" sz="quarter"/>
+          </p:nvPr>
+        </p:nvSpPr>
+        <p:spPr/>
+        <p:txBody>
+          <a:bodyPr/>
+          <a:lstStyle/>
+          <a:p>
+            <a:r>
+              <a:t>QUÉ ES (dilo así): Las reglas de los turnos, dichas una vez para todos. Después de esta lámina empiezan las sustentaciones, que ocupan el resto del bloque hasta el minuto 110.</a:t>
+            </a:r>
+          </a:p>
+          <a:p/>
+          <a:p>
+            <a:r>
+              <a:t>CÓMO DARLA (≈3 min):</a:t>
+            </a:r>
+          </a:p>
+          <a:p>
+            <a:r>
+              <a:t>  • Al entrar: Lee las cinco reglas y sortea el orden en voz alta; pega la lista en el chat de Meet para que cada quien sepa cuándo le toca.</a:t>
+            </a:r>
+          </a:p>
+          <a:p>
+            <a:r>
+              <a:t>  • En cada turno: El estudiante comparte su pantalla. Cronometra 5 a 8 minutos de pitch con la ejecución real de un procedimiento (caso válido y caso rechazado) y haz dos o tres preguntas de porqué, al azar, a cualquier integrante.</a:t>
+            </a:r>
+          </a:p>
+          <a:p>
+            <a:r>
+              <a:t>  • Entre turnos: Anota la calificación en 30 segundos, antes de llamar al siguiente: al final del bloque ya no se recuerda quién dijo qué.</a:t>
+            </a:r>
+          </a:p>
+          <a:p>
+            <a:r>
+              <a:t>  • Si alguien se desconecta: Pasa al siguiente turno y vuelve a llamarlo al final de la lista. Si no logra reconectarse, deja constancia de la hora y acuerda por correo cómo se completa la sustentación.</a:t>
+            </a:r>
+          </a:p>
+          <a:p/>
+          <a:p>
+            <a:r>
+              <a:t>EJEMPLO: Con turnos de unos 11 minutos (7 de pitch y 3-4 de Q&amp;A) caben unos 8 en el bloque; si el grupo es más grande, reduce el Q&amp;A a dos preguntas y anúncialo al sortear.</a:t>
+            </a:r>
+          </a:p>
+          <a:p/>
+          <a:p>
+            <a:r>
+              <a:t>CUIDADO: Haz las preguntas a quien no está hablando: si siempre responde el mismo integrante, no se verifica que el trabajo sea de todos.</a:t>
+            </a:r>
+          </a:p>
+          <a:p/>
+          <a:p>
+            <a:r>
+              <a:t>PASA A LA SIGUIENTE: Al terminar el último turno, vuelve a «El cierre del curso».</a:t>
+            </a:r>
+          </a:p>
+        </p:txBody>
+      </p:sp>
+      <p:sp>
+        <p:nvSpPr>
+          <p:cNvPr id="4" name="Slide Number Placeholder 3"/>
+          <p:cNvSpPr>
+            <a:spLocks noGrp="1"/>
+          </p:cNvSpPr>
+          <p:nvPr>
+            <p:ph type="sldNum" idx="5" sz="quarter"/>
+          </p:nvPr>
+        </p:nvSpPr>
+        <p:spPr/>
+      </p:sp>
+    </p:spTree>
+  </p:cSld>
+  <p:clrMapOvr>
+    <a:masterClrMapping/>
+  </p:clrMapOvr>
+</p:notes>
+</file>
+
+<file path=ppt/notesSlides/notesSlide11.xml><?xml version="1.0" encoding="utf-8"?>
+<p:notes xmlns:a="http://schemas.openxmlformats.org/drawingml/2006/main" xmlns:p="http://schemas.openxmlformats.org/presentationml/2006/main" xmlns:r="http://schemas.openxmlformats.org/officeDocument/2006/relationships">
+  <p:cSld>
+    <p:spTree>
+      <p:nvGrpSpPr>
+        <p:cNvPr id="1" name=""/>
+        <p:cNvGrpSpPr/>
+        <p:nvPr/>
+      </p:nvGrpSpPr>
+      <p:grpSpPr>
+        <a:xfrm>
+          <a:off x="0" y="0"/>
+          <a:ext cx="0" cy="0"/>
+          <a:chOff x="0" y="0"/>
+          <a:chExt cx="0" cy="0"/>
+        </a:xfrm>
+      </p:grpSpPr>
+      <p:sp>
+        <p:nvSpPr>
+          <p:cNvPr id="2" name="Slide Image Placeholder 1"/>
+          <p:cNvSpPr>
+            <a:spLocks noGrp="1"/>
+          </p:cNvSpPr>
+          <p:nvPr>
+            <p:ph type="sldImg" idx="2"/>
+          </p:nvPr>
+        </p:nvSpPr>
+        <p:spPr/>
+      </p:sp>
+      <p:sp>
+        <p:nvSpPr>
+          <p:cNvPr id="3" name="Notes Placeholder 2"/>
+          <p:cNvSpPr>
+            <a:spLocks noGrp="1"/>
+          </p:cNvSpPr>
+          <p:nvPr>
+            <p:ph type="body" idx="3" sz="quarter"/>
+          </p:nvPr>
+        </p:nvSpPr>
+        <p:spPr/>
+        <p:txBody>
+          <a:bodyPr/>
+          <a:lstStyle/>
+          <a:p>
+            <a:r>
+              <a:t>QUÉ ES (dilo así): Cierre del proyecto y del curso: sustentar es justificar decisiones, y el paquete que cada uno entregó es su portafolio.</a:t>
+            </a:r>
+          </a:p>
+          <a:p/>
+          <a:p>
+            <a:r>
+              <a:t>CÓMO DARLA (≈3 min):</a:t>
+            </a:r>
+          </a:p>
+          <a:p>
+            <a:r>
+              <a:t>  • Al entrar: Agradece al grupo, explica por qué canal y cuándo se publicarán las notas del proyecto, y pide que conserven el paquete (ER, DDL, roles, procedimientos, triggers y optimización).</a:t>
             </a:r>
           </a:p>
         </p:txBody>
@@ -633,47 +828,62 @@
           <a:lstStyle/>
           <a:p>
             <a:r>
-              <a:t>DESARROLLO (para explicarlo, no se proyecta):</a:t>
-            </a:r>
-          </a:p>
-          <a:p>
-            <a:r>
-              <a:t>Hay cuatro preguntas de por que que se hacen casi siempre, y el estudiante debe llegar con las cuatro respondidas.</a:t>
-            </a:r>
-          </a:p>
-          <a:p>
-            <a:r>
-              <a:t>Por que esa normalizacion: la respuesta esperada es que el modelo esta en tercera forma normal, es decir que cada atributo depende de la clave completa y de nada mas, y por eso el telefono del dueno vive en la tabla Dueno y no repetido en cada fila de Mascota.</a:t>
-            </a:r>
-          </a:p>
-          <a:p>
-            <a:r>
-              <a:t>Y a continuacion se declara la desnormalizacion deliberada si existe: «guardamos el total en Factura aunque se pueda calcular sumando el detalle, porque el total es un valor historico que no debe cambiar si manana sube el precio del insumo».</a:t>
-            </a:r>
-          </a:p>
-          <a:p>
-            <a:r>
-              <a:t>Por que ese indice: la respuesta debe nombrar la consulta concreta que lo aprovecha, por ejemplo un indice sobre (id_veterinario</a:t>
-            </a:r>
-          </a:p>
-          <a:p>
-            <a:r>
-              <a:t>Fecha_hora) porque la busqueda de agenda filtra por veterinario y ordena por hora, y debe venir con la medicion de antes y despues.</a:t>
-            </a:r>
-          </a:p>
-          <a:p>
-            <a:r>
-              <a:t>Por que ese tipo de dato: por que la fecha de la cita es DATE o TIMESTAMP y no VARCHAR, y por que el telefono es VARCHAR y no numerico, porque con telefonos no se hace aritmetica y porque un tipo numerico pierde los ceros iniciales.</a:t>
-            </a:r>
-          </a:p>
-          <a:p>
-            <a:r>
-              <a:t>NOTAS:</a:t>
-            </a:r>
-          </a:p>
-          <a:p>
-            <a:r>
-              <a:t>Esa segunda mitad es la que distingue al estudiante que entendio, porque normalizar no es un dogma sino un punto de partida del que se sale con razones escritas.</a:t>
+              <a:t>QUÉ ES (dilo así): Casi toda sustentación de bases de datos termina en las mismas cuatro preguntas. Quien las trae respondidas sustenta; quien no, improvisa.</a:t>
+            </a:r>
+          </a:p>
+          <a:p/>
+          <a:p>
+            <a:r>
+              <a:t>CÓMO DARLA (≈3 min):</a:t>
+            </a:r>
+          </a:p>
+          <a:p>
+            <a:r>
+              <a:t>  • Al entrar: Normalización: «está en tercera forma normal», es decir, cada atributo depende de la clave completa y de nada más (el teléfono del dueño vive en dueno, no repetido en cada mascota). Y si existe, la desnormalización deliberada: guardar el total en factura porque es un valor histórico.</a:t>
+            </a:r>
+          </a:p>
+          <a:p>
+            <a:r>
+              <a:t>  • Clic 1: Índice: nombrar la consulta que lo usa (la agenda filtra por veterinario y ordena por hora, de ahí un índice sobre (id_veterinario, fecha_hora)) y mostrar EXPLAIN ANALYZE antes y después.</a:t>
+            </a:r>
+          </a:p>
+          <a:p>
+            <a:r>
+              <a:t>  • Clic 2: Tipo de dato: la fecha es TIMESTAMP porque se compara y se ordena; el teléfono es VARCHAR porque no se hace aritmética con él y un tipo numérico pierde el cero inicial.</a:t>
+            </a:r>
+          </a:p>
+          <a:p>
+            <a:r>
+              <a:t>  • Clic 3: La cuarta, la del disparador, es la que más se falla: tiene lámina propia.</a:t>
+            </a:r>
+          </a:p>
+          <a:p/>
+          <a:p>
+            <a:r>
+              <a:t>EJEMPLO: «Guardamos el total en factura aunque se pueda sumar del detalle, porque es un valor histórico: si mañana sube el precio del insumo, la factura de ayer no debe cambiar.»</a:t>
+            </a:r>
+          </a:p>
+          <a:p/>
+          <a:p>
+            <a:r>
+              <a:t>SI PREGUNTAN:</a:t>
+            </a:r>
+          </a:p>
+          <a:p>
+            <a:r>
+              <a:t>  • «¿Desnormalizar es un error?» → No, si es deliberado y está escrito con su razón. El error es desnormalizar sin saberlo.</a:t>
+            </a:r>
+          </a:p>
+          <a:p/>
+          <a:p>
+            <a:r>
+              <a:t>CUIDADO: «Está normalizado», sin decir qué forma normal ni dar un ejemplo, no responde la pregunta.</a:t>
+            </a:r>
+          </a:p>
+          <a:p/>
+          <a:p>
+            <a:r>
+              <a:t>PASA A LA SIGUIENTE: La cuarta pregunta, la que más se falla.</a:t>
             </a:r>
           </a:p>
         </p:txBody>
@@ -743,52 +953,57 @@
           <a:lstStyle/>
           <a:p>
             <a:r>
-              <a:t>DESARROLLO (para explicarlo, no se proyecta):</a:t>
-            </a:r>
-          </a:p>
-          <a:p>
-            <a:r>
-              <a:t>Un disparador, o trigger, es un bloque de codigo que el motor ejecuta automaticamente cuando ocurre un evento sobre una tabla, sin que nadie lo invoque.</a:t>
-            </a:r>
-          </a:p>
-          <a:p>
-            <a:r>
-              <a:t>El argumento a favor, y el unico que vale en una sustentacion, es la cobertura: el disparador se ejecuta no importa quien escriba.</a:t>
-            </a:r>
-          </a:p>
-          <a:p>
-            <a:r>
-              <a:t>Si la regla «el stock de un insumo nunca queda negativo» vive en el disparador, se cumple cuando escribe la aplicacion, cuando escribe un script de carga masiva y cuando alguien se conecta con un cliente SQL a corregir un dato a mano.</a:t>
-            </a:r>
-          </a:p>
-          <a:p>
-            <a:r>
-              <a:t>Lo mismo aplica al disparador de auditoria de precios: si se quiere saber quien cambio el precio de una vacuna, ese registro tiene que escribirse dentro de la base, porque quien edita a mano no lo va a escribir por cortesia.</a:t>
-            </a:r>
-          </a:p>
-          <a:p>
-            <a:r>
-              <a:t>NOTAS:</a:t>
-            </a:r>
-          </a:p>
-          <a:p>
-            <a:r>
-              <a:t>La cuarta pregunta merece parrafo propio porque es la que mas se falla: por que esa regla esta en un disparador y no en la aplicacion.</a:t>
-            </a:r>
-          </a:p>
-          <a:p>
-            <a:r>
-              <a:t>Si vive en la aplicacion, los dos ultimos caminos la evaden sin esfuerzo.</a:t>
-            </a:r>
-          </a:p>
-          <a:p>
-            <a:r>
-              <a:t>Y hay que dar tambien el contra-argumento, porque un evaluador atento lo va a pedir: los disparadores son logica invisible, no aparecen en el codigo de la aplicacion, sorprenden a quien depura, y se disparan en cascada si uno modifica una tabla que a su vez tiene otro disparador.</a:t>
-            </a:r>
-          </a:p>
-          <a:p>
-            <a:r>
-              <a:t>Por eso la convencion sana, que el estudiante puede citar como criterio propio, es reservarlos para invariantes de integridad y auditoria, y dejar el flujo de negocio en procedimientos que se invocan explicitamente.</a:t>
+              <a:t>QUÉ ES (dilo así): La pregunta es por qué una regla vive en un disparador y no en la aplicación. La respuesta que vale es una sola, la cobertura, y hay que saber también el contra-argumento.</a:t>
+            </a:r>
+          </a:p>
+          <a:p/>
+          <a:p>
+            <a:r>
+              <a:t>CÓMO DARLA (≈2 min):</a:t>
+            </a:r>
+          </a:p>
+          <a:p>
+            <a:r>
+              <a:t>  • Al entrar: Regla en la aplicación: escriben en insumo la aplicación, un script de carga y alguien con un cliente SQL. Solo el primero pasa por la regla; los otros dos llegan a la tabla con la X roja.</a:t>
+            </a:r>
+          </a:p>
+          <a:p>
+            <a:r>
+              <a:t>  • Clic 1: Regla en el disparador: la barra del trigger está pegada a la tabla y los tres caminos pasan por ella.</a:t>
+            </a:r>
+          </a:p>
+          <a:p>
+            <a:r>
+              <a:t>  • Clic 2: A favor: cobertura. En contra: lógica invisible (no aparece en el código de la aplicación, sorprende al que depura y puede dispararse en cascada). Criterio: disparadores para integridad y auditoría; el flujo de negocio, en procedimientos que se llaman a propósito.</a:t>
+            </a:r>
+          </a:p>
+          <a:p/>
+          <a:p>
+            <a:r>
+              <a:t>EJEMPLO: La auditoría de precios: si alguien cambia a mano el precio de una vacuna desde un cliente SQL, solo un disparador deja constancia de quién y cuándo.</a:t>
+            </a:r>
+          </a:p>
+          <a:p/>
+          <a:p>
+            <a:r>
+              <a:t>SI PREGUNTAN:</a:t>
+            </a:r>
+          </a:p>
+          <a:p>
+            <a:r>
+              <a:t>  • «¿Un CHECK no hace lo mismo?» → Para una regla que mira una sola fila, sí, y es preferible (Clase 4). El disparador se justifica cuando mira otra fila u otra tabla, o escribe en otra tabla, como la auditoría.</a:t>
+            </a:r>
+          </a:p>
+          <a:p/>
+          <a:p>
+            <a:r>
+              <a:t>CUIDADO: Si el estudiante solo da el argumento a favor, pide el contra-argumento: es la mitad de la respuesta.</a:t>
+            </a:r>
+          </a:p>
+          <a:p/>
+          <a:p>
+            <a:r>
+              <a:t>PASA A LA SIGUIENTE: Además de defenderse, el proyecto tiene que poder correrlo otra persona.</a:t>
             </a:r>
           </a:p>
         </p:txBody>
@@ -858,87 +1073,62 @@
           <a:lstStyle/>
           <a:p>
             <a:r>
-              <a:t>DESARROLLO (para explicarlo, no se proyecta):</a:t>
-            </a:r>
-          </a:p>
-          <a:p>
-            <a:r>
-              <a:t>Un proyecto de base de datos es reproducible si un tercero, con solo el archivo comprimido y sin hablar con el autor, obtiene la misma base funcionando.</a:t>
-            </a:r>
-          </a:p>
-          <a:p>
-            <a:r>
-              <a:t>La estructura que la garantiza es una carpeta con archivos numerados en el orden exacto de ejecucion: 00_LEEME.txt, 01_ddl.sql, 02_datos_prueba.sql, 03_roles.sql, 04_procedimientos.sql, 05_funciones.sql, 06_triggers.sql, 07_optimizacion.sql y 08_pruebas.sql.</a:t>
-            </a:r>
-          </a:p>
-          <a:p>
-            <a:r>
-              <a:t>El orden no es estetico, es una dependencia real: una tabla con clave foranea no se puede crear antes que la tabla a la que apunta, y un disparador no compila si su tabla todavia no existe.</a:t>
-            </a:r>
-          </a:p>
-          <a:p>
-            <a:r>
-              <a:t>Los datos de prueba tampoco son triviales, porque con dos filas por tabla no se demuestra nada: el minimo razonable para la clínica es tres duenos</a:t>
-            </a:r>
-          </a:p>
-          <a:p>
-            <a:r>
-              <a:t>Cinco mascotas, dos veterinarios, diez citas repartidas en varios dias, cinco insumos con stock y tres facturas con su detalle</a:t>
-            </a:r>
-          </a:p>
-          <a:p>
-            <a:r>
-              <a:t>Incluyendo deliberadamente los casos borde que los procedimientos deben rechazar, es decir una mascota marcada como inactiva y un insumo con stock en uno, porque sin esas dos filas el estudiante no puede demostrar su manejo de errores.</a:t>
-            </a:r>
-          </a:p>
-          <a:p>
-            <a:r>
-              <a:t>Uno, no declarar motor y version: el SQL no es un solo idioma, porque una columna autoincremental se escribe SERIAL en PostgreSQL</a:t>
-            </a:r>
-          </a:p>
-          <a:p>
-            <a:r>
-              <a:t>AUTO_INCREMENT en MySQL e IDENTITY o una secuencia en Oracle y SQL Server, el texto variable es VARCHAR en unos y VARCHAR2 en Oracle</a:t>
-            </a:r>
-          </a:p>
-          <a:p>
-            <a:r>
-              <a:t>Y la fecha actual es NOW() en unos y SYSDATE en Oracle; un script sin la linea «probado en PostgreSQL 15 en DB Fiddle» o «probado en Oracle 19c en Oracle Live SQL» obliga al evaluador a adivinar, y si adivina mal falla en la primera sentencia.</a:t>
-            </a:r>
-          </a:p>
-          <a:p>
-            <a:r>
-              <a:t>Dos, scripts que asumen un estado previo: quien ejecuta debe poder empezar desde una base vacia.</a:t>
-            </a:r>
-          </a:p>
-          <a:p>
-            <a:r>
-              <a:t>Tres, falta de idempotencia: si el script no se puede correr dos veces porque falla al encontrar que la tabla ya existe, se pierde tiempo en cada intento, y anteponer DROP TABLE IF EXISTS en orden inverso al de creacion lo resuelve.</a:t>
-            </a:r>
-          </a:p>
-          <a:p>
-            <a:r>
-              <a:t>Cuatro, el LEEME ausente o inutil; uno que sirve tiene cuatro cosas y cabe en media pagina: motor y version exactos, el orden de ejecucion de los archivos</a:t>
-            </a:r>
-          </a:p>
-          <a:p>
-            <a:r>
-              <a:t>Como verificar que quedo bien (una consulta cuyo resultado se conoce, por ejemplo SELECT COUNT(*) FROM cita devolviendo 10) y las limitaciones conocidas.</a:t>
-            </a:r>
-          </a:p>
-          <a:p>
-            <a:r>
-              <a:t>NOTAS:</a:t>
-            </a:r>
-          </a:p>
-          <a:p>
-            <a:r>
-              <a:t>Esa es la definicion operativa y es la unica prueba que importa; el docente puede aplicarla literalmente abriendo el ZIP en un playground limpio y ejecutando.</a:t>
-            </a:r>
-          </a:p>
-          <a:p>
-            <a:r>
-              <a:t>Sobre esa base, cuatro detalles rompen la reproducibilidad y son los que el docente debe buscar primero al abrir el paquete.</a:t>
+              <a:t>QUÉ ES (dilo así): Reproducible quiere decir que otra persona ejecuta tus archivos en una base vacía y obtiene lo mismo que tú, sin preguntarte nada. Es la prueba que el evaluador aplica literalmente.</a:t>
+            </a:r>
+          </a:p>
+          <a:p/>
+          <a:p>
+            <a:r>
+              <a:t>CÓMO DARLA (≈2 min):</a:t>
+            </a:r>
+          </a:p>
+          <a:p>
+            <a:r>
+              <a:t>  • Al entrar: La carpeta con nueve archivos numerados: 00_LEEME, 01_ddl, 02_datos_prueba, 03_roles, 04_procedimientos, 05_funciones, 06_triggers, 07_optimizacion y 08_pruebas.</a:t>
+            </a:r>
+          </a:p>
+          <a:p>
+            <a:r>
+              <a:t>  • Clic 1: Por qué el orden importa: una FOREIGN KEY no se crea antes que la tabla a la que apunta, y un trigger no se puede crear si su tabla todavía no existe.</a:t>
+            </a:r>
+          </a:p>
+          <a:p>
+            <a:r>
+              <a:t>  • Clic 2: La definición, en la caja final. Repasa los cuatro detalles que la rompen: no declarar motor y versión, suponer un estado previo, no ser idempotente (los DROP … IF EXISTS van primero, en orden inverso) y un LEEME que no sirve.</a:t>
+            </a:r>
+          </a:p>
+          <a:p/>
+          <a:p>
+            <a:r>
+              <a:t>EJEMPLO: Un LEEME que sirve: «Motor: PostgreSQL 16.4 (lo dice SELECT version()). Ejecutar 01 a 08 en orden. Verificación: SELECT COUNT(*) FROM cita; devuelve 10. Límite: los datos de prueba no traen facturas anuladas.»</a:t>
+            </a:r>
+          </a:p>
+          <a:p/>
+          <a:p>
+            <a:r>
+              <a:t>SI PREGUNTAN:</a:t>
+            </a:r>
+          </a:p>
+          <a:p>
+            <a:r>
+              <a:t>  • «¿Cuántos datos de prueba hacen falta?» → Con dos filas por tabla no se demuestra nada. Un mínimo razonable: 3 dueños, 5 mascotas, 2 veterinarios, 10 citas, 5 insumos y 3 facturas, incluidos los casos borde: una mascota inactiva y un insumo con stock 1.</a:t>
+            </a:r>
+          </a:p>
+          <a:p>
+            <a:r>
+              <a:t>  • «¿Qué es idempotente?» → Que se puede correr dos veces seguidas sin fallar: por eso los DROP TABLE IF EXISTS van primero, en orden inverso al de creación.</a:t>
+            </a:r>
+          </a:p>
+          <a:p/>
+          <a:p>
+            <a:r>
+              <a:t>CUIDADO: Evalúalo ejecutando en una base limpia: un script que se ve bien puede fallar en la tercera sentencia por una FK que apunta a una tabla creada más abajo.</a:t>
+            </a:r>
+          </a:p>
+          <a:p/>
+          <a:p>
+            <a:r>
+              <a:t>PASA A LA SIGUIENTE: Con el paquete listo: ¿cómo caben las decisiones en 5 a 8 minutos?</a:t>
             </a:r>
           </a:p>
         </p:txBody>
@@ -1008,72 +1198,62 @@
           <a:lstStyle/>
           <a:p>
             <a:r>
-              <a:t>DESARROLLO (para explicarlo, no se proyecta):</a:t>
-            </a:r>
-          </a:p>
-          <a:p>
-            <a:r>
-              <a:t>La sustentacion dura de 5 a 8 minutos y ese limite obliga a decidir que se deja fuera.</a:t>
-            </a:r>
-          </a:p>
-          <a:p>
-            <a:r>
-              <a:t>El reparto que funciona, y que es convencion y no regla dura, es: 45 segundos para el problema de la clínica en lenguaje de negocio, sin una sola tabla en pantalla</a:t>
-            </a:r>
-          </a:p>
-          <a:p>
-            <a:r>
-              <a:t>90 segundos para el modelo, mostrando el ER y justificando dos decisiones y no las quince; 60 segundos para seguridad, con la matriz de roles y una frase sobre por que recepcion no ve el historial clinico</a:t>
-            </a:r>
-          </a:p>
-          <a:p>
-            <a:r>
-              <a:t>90 segundos para la automatizacion, ejecutando un procedimiento con su caso valido y su caso invalido; 60 segundos para la optimizacion, con el plan de ejecucion antes y despues; 45 segundos para la integracion y el punto debil declarado; y 30 de cierre.</a:t>
-            </a:r>
-          </a:p>
-          <a:p>
-            <a:r>
-              <a:t>No es clase autonoma y la defensa no se reemplaza por un video grabado, porque el Q&amp;A dirigido al azar es lo unico que permite verificar que el modelo y los procedimientos son de quien los presenta.</a:t>
-            </a:r>
-          </a:p>
-          <a:p>
-            <a:r>
-              <a:t>Y el criterio de dominio es el mismo trabajando solo o en equipo autorizado: quien sustenta debe poder explicar cualquier parte en 60 segundos</a:t>
-            </a:r>
-          </a:p>
-          <a:p>
-            <a:r>
-              <a:t>Y si hubo equipo, cualquier integrante debe poder hacerlo con cualquier parte, no solo con la suya, porque el Q&amp;A se dirige al azar y porque si solo una persona entiende el modelo el evaluador no tiene forma de atribuir el trabajo a los demas.</a:t>
-            </a:r>
-          </a:p>
-          <a:p>
-            <a:r>
-              <a:t>NOTAS:</a:t>
-            </a:r>
-          </a:p>
-          <a:p>
-            <a:r>
-              <a:t>Y conviene ser explicito sobre el formato, porque de eso depende como se prepara el estudiante: la Clase 15 se dicta el 16 de noviembre en la ultima sesion del semestre, dedicada por completo a sustentaciones EN VIVO, con turnos consecutivos y preguntas del docente al cierre de cada uno.</a:t>
-            </a:r>
-          </a:p>
-          <a:p>
-            <a:r>
-              <a:t>Lo que si hay que exigir dentro del turno es la ejecucion real: que el estudiante corra el procedimiento en el playground, con su caso valido y su caso invalido, en vez de proyectar capturas fijas.</a:t>
-            </a:r>
-          </a:p>
-          <a:p>
-            <a:r>
-              <a:t>El paquete, en cambio.</a:t>
-            </a:r>
-          </a:p>
-          <a:p>
-            <a:r>
-              <a:t>Fuera de la lamina (habla de la practica): Lo que si hay que exigir dentro del turno es la ejecucion real: que el estudiante corra el procedimiento en el playground, con su caso valido y su caso invalido, en vez de proyectar capturas fijas, porque una consulta ejecutandose delante del evaluador es la evidencia mas dificil de fingir y la mas rapida de calificar.</a:t>
-            </a:r>
-          </a:p>
-          <a:p>
-            <a:r>
-              <a:t>Fuera de la lamina (habla de la practica): El paquete, en cambio, se sube al modulo de Proyectos de PostgreSQL en el navegador ANTES del turno: quien llega a subir archivos consume su propio tiempo de sustentacion.</a:t>
+              <a:t>QUÉ ES (dilo así): Siete minutos no alcanzan para todo, así que el reparto es una decisión. Este es el que funciona; es una convención, no una regla dura.</a:t>
+            </a:r>
+          </a:p>
+          <a:p/>
+          <a:p>
+            <a:r>
+              <a:t>CÓMO DARLA (≈1 min):</a:t>
+            </a:r>
+          </a:p>
+          <a:p>
+            <a:r>
+              <a:t>  • Al entrar: Lo que se cuenta: 45 s para el problema de la clínica en lenguaje de negocio, sin tablas en pantalla, y 90 s para el modelo: el ER y dos decisiones justificadas, no quince.</a:t>
+            </a:r>
+          </a:p>
+          <a:p>
+            <a:r>
+              <a:t>  • Clic 1: Lo que se demuestra ejecutando: 60 s de seguridad (la matriz de roles y por qué recepción no ve el historial clínico), 90 s de automatización (un procedimiento con su caso válido y su caso inválido, en vivo) y 60 s de optimización (el plan antes y después).</a:t>
+            </a:r>
+          </a:p>
+          <a:p>
+            <a:r>
+              <a:t>  • Clic 2: El cierre: 45 s de integración con su punto débil declarado y 30 s finales. En total, unos 7 minutos de un máximo de 8.</a:t>
+            </a:r>
+          </a:p>
+          <a:p/>
+          <a:p>
+            <a:r>
+              <a:t>EJEMPLO: Los 45 segundos del problema: «la clínica atiende unas 150 citas al día con agenda de papel; perder una cita o dar dos en la misma franja le cuesta clientes».</a:t>
+            </a:r>
+          </a:p>
+          <a:p/>
+          <a:p>
+            <a:r>
+              <a:t>SI PREGUNTAN:</a:t>
+            </a:r>
+          </a:p>
+          <a:p>
+            <a:r>
+              <a:t>  • «¿Puedo mostrar capturas en vez de ejecutar?» → No para la automatización: el caso válido y el inválido se ejecutan en vivo. Una consulta corriendo delante del evaluador es la evidencia más difícil de fingir.</a:t>
+            </a:r>
+          </a:p>
+          <a:p>
+            <a:r>
+              <a:t>  • «Si trabajamos en equipo, ¿cada uno presenta su parte?» → Cada integrante debe poder explicar cualquier parte en 60 segundos, porque el Q&amp;A se dirige al azar.</a:t>
+            </a:r>
+          </a:p>
+          <a:p/>
+          <a:p>
+            <a:r>
+              <a:t>CUIDADO: Cronometra cada turno: el que pasa de 8 minutos le quita tiempo al Q&amp;A, que es donde se verifica la autoría.</a:t>
+            </a:r>
+          </a:p>
+          <a:p/>
+          <a:p>
+            <a:r>
+              <a:t>PASA A LA SIGUIENTE: Después del pitch, las preguntas: las de modelado se repiten.</a:t>
             </a:r>
           </a:p>
         </p:txBody>
@@ -1143,67 +1323,62 @@
           <a:lstStyle/>
           <a:p>
             <a:r>
-              <a:t>DESARROLLO (para explicarlo, no se proyecta):</a:t>
-            </a:r>
-          </a:p>
-          <a:p>
-            <a:r>
-              <a:t>«Por que nombre y apellido separados y no un solo campo nombre_completo?»: porque se necesita ordenar y buscar por apellido, y separar despues un campo unido es un trabajo sucio y lleno de errores con nombres compuestos.</a:t>
-            </a:r>
-          </a:p>
-          <a:p>
-            <a:r>
-              <a:t>«Que pasa si un dueno tiene dos mascotas llamadas Pelusa?»: nada, porque la identidad la da id_mascota y no el nombre</a:t>
-            </a:r>
-          </a:p>
-          <a:p>
-            <a:r>
-              <a:t>Y si se quisiera prohibirlo habria que declarar UNIQUE (id_dueno, nombre), decision que el estudiante debe poder defender en cualquiera de los dos sentidos.</a:t>
-            </a:r>
-          </a:p>
-          <a:p>
-            <a:r>
-              <a:t>«Por que no borran las citas canceladas?»: porque el historial de cancelaciones es informacion de negocio, ya que permite ver que dueno cancela siempre</a:t>
-            </a:r>
-          </a:p>
-          <a:p>
-            <a:r>
-              <a:t>Y porque borrar filas referenciadas por facturas rompe la integridad referencial; se usa borrado logico con un campo de estado.</a:t>
-            </a:r>
-          </a:p>
-          <a:p>
-            <a:r>
-              <a:t>Y la pregunta que desarma a quien no midio: «cuanto mejoro esa consulta?».</a:t>
-            </a:r>
-          </a:p>
-          <a:p>
-            <a:r>
-              <a:t>Una respuesta solida tiene 3 partes: la decision, la alternativa descartada y la razon concreta en la clínica, por ejemplo el volumen de citas o una regla del negocio.</a:t>
-            </a:r>
-          </a:p>
-          <a:p>
-            <a:r>
-              <a:t>Error comun: responder con lo que hace la tabla en vez de por que existe; la pregunta de modelado siempre es un por que, no un que.</a:t>
-            </a:r>
-          </a:p>
-          <a:p>
-            <a:r>
-              <a:t>NOTAS:</a:t>
-            </a:r>
-          </a:p>
-          <a:p>
-            <a:r>
-              <a:t>El Q&amp;A sobre modelado tiene preguntas que se repiten, y conviene que el docente tenga las respuestas listas para poder calificarlas y para poder formularlas.</a:t>
-            </a:r>
-          </a:p>
-          <a:p>
-            <a:r>
-              <a:t>Aqui vale la regla general del Q&amp;A tecnico, que el docente debe anunciar antes de empezar: decir «no lo medimos» no penaliza si viene acompanado de como se mediria, por ejemplo «no medimos con volumen real porque el playground se reinicia, pero el plan de ejecucion pasa de recorrido completo a busqueda por indice, y la prueba seria cargar cincuenta mil citas y comparar los tiempos».</a:t>
-            </a:r>
-          </a:p>
-          <a:p>
-            <a:r>
-              <a:t>Inventar un numero, en cambio, se cae con la siguiente pregunta y cuesta mucho mas que admitir el limite.</a:t>
+              <a:t>QUÉ ES (dilo así): El Q&amp;A de modelado tiene preguntas que se repiten, y todas son de porqué, no de qué. Tener las respuestas listas sirve para formularlas bien y para calificar igual a todos.</a:t>
+            </a:r>
+          </a:p>
+          <a:p/>
+          <a:p>
+            <a:r>
+              <a:t>CÓMO DARLA (≈2 min):</a:t>
+            </a:r>
+          </a:p>
+          <a:p>
+            <a:r>
+              <a:t>  • Al entrar: Dos mascotas del mismo dueño con el mismo nombre: la tabla las acepta porque cada una tiene su id_mascota. No pasa nada.</a:t>
+            </a:r>
+          </a:p>
+          <a:p>
+            <a:r>
+              <a:t>  • Clic 1: Si se quisiera prohibirlo: UNIQUE (id_dueno, nombre), y la segunda Pelusa se rechaza.</a:t>
+            </a:r>
+          </a:p>
+          <a:p>
+            <a:r>
+              <a:t>  • Clic 2: Es una decisión que se defiende en cualquiera de los dos sentidos; lo que no vale es no haberla pensado. Repasa las otras: nombre y apellido separados (para ordenar y buscar por apellido) y citas canceladas (borrado lógico con un campo de estado).</a:t>
+            </a:r>
+          </a:p>
+          <a:p/>
+          <a:p>
+            <a:r>
+              <a:t>EJEMPLO: «¿Cuánto mejoró esa consulta?» Respuesta válida: «No lo medimos con volumen real porque la base de práctica se reinicia, pero el plan pasa de Seq Scan a Index Scan; la prueba sería cargar cincuenta mil citas y comparar los tiempos».</a:t>
+            </a:r>
+          </a:p>
+          <a:p/>
+          <a:p>
+            <a:r>
+              <a:t>SI PREGUNTAN:</a:t>
+            </a:r>
+          </a:p>
+          <a:p>
+            <a:r>
+              <a:t>  • «¿Por qué nombre y apellido separados?» → Para ordenar y buscar por apellido; separar después un campo unido falla con los nombres compuestos.</a:t>
+            </a:r>
+          </a:p>
+          <a:p>
+            <a:r>
+              <a:t>  • «¿Por qué no borrar las citas canceladas?» → Son información de negocio (quién cancela siempre) y una cita con consulta y factura no se puede borrar sin dejar filas huérfanas: la FK lo impide.</a:t>
+            </a:r>
+          </a:p>
+          <a:p/>
+          <a:p>
+            <a:r>
+              <a:t>CUIDADO: Anuncia la regla antes del primer turno: «no lo medimos» no penaliza si viene con cómo se mediría. Inventar un número se cae en la siguiente pregunta.</a:t>
+            </a:r>
+          </a:p>
+          <a:p/>
+          <a:p>
+            <a:r>
+              <a:t>PASA A LA SIGUIENTE: Ahora, cómo se ordena la sesión; el cierre del curso viene al final de los turnos.</a:t>
             </a:r>
           </a:p>
         </p:txBody>
@@ -1273,47 +1448,242 @@
           <a:lstStyle/>
           <a:p>
             <a:r>
-              <a:t>DESARROLLO (para explicarlo, no se proyecta):</a:t>
-            </a:r>
-          </a:p>
-          <a:p>
-            <a:r>
-              <a:t>El cierre del curso debe conectar lo hecho con el trabajo real, porque de eso depende que el estudiante conserve los scripts en vez de borrarlos al terminar el semestre.</a:t>
-            </a:r>
-          </a:p>
-          <a:p>
-            <a:r>
-              <a:t>Leer un plan de ejecucion y decidir si un indice sobra es una habilidad que se paga.</a:t>
-            </a:r>
-          </a:p>
-          <a:p>
-            <a:r>
-              <a:t>El SQL que se escribio ahi es el mismo que corre en un servidor de produccion; lo que cambia en un entorno profesional es el volumen de datos y las consecuencias de un error, no la sintaxis.</a:t>
-            </a:r>
-          </a:p>
-          <a:p>
-            <a:r>
-              <a:t>Y la autoevaluacion de la clase conviene pedirla con una consigna concreta en vez de una reflexion vaga: nombren la decision de modelado que mas les costo revertir y en que clase se dieron cuenta de que estaba mal.</a:t>
-            </a:r>
-          </a:p>
-          <a:p>
-            <a:r>
-              <a:t>NOTAS:</a:t>
-            </a:r>
-          </a:p>
-          <a:p>
-            <a:r>
-              <a:t>Lo que el estudiante produjo (un ER justificado, un DDL con restricciones declarativas, una matriz de privilegios, procedimientos con manejo de errores, disparadores de auditoria, un analisis de plan de ejecucion y un contrato de operaciones) es literalmente el contenido de las tareas de un desarrollador de base de datos o de un administrador junior en su primer ano de trabajo.</a:t>
-            </a:r>
-          </a:p>
-          <a:p>
-            <a:r>
-              <a:t>Conviene tambien cerrar la duda sobre las herramientas, porque alguien la trae: Oracle Live SQL, DB Fiddle y draw.io se usaron por equidad y porque funcionan en cualquier navegador, no porque sean juguetes.</a:t>
-            </a:r>
-          </a:p>
-          <a:p>
-            <a:r>
-              <a:t>Esa respuesta es la que mejor predice si aprendieron, y ademas le da al docente material real para ajustar el curso el proximo semestre.</a:t>
+              <a:t>QUÉ ES (dilo así): El cierre conecta el semestre con el trabajo: lo que se produjo es lo que hace un desarrollador de bases de datos o un administrador junior en su primer año. Se termina con una autoevaluación concreta, no con una reflexión vaga.</a:t>
+            </a:r>
+          </a:p>
+          <a:p/>
+          <a:p>
+            <a:r>
+              <a:t>CÓMO DARLA (≈5 min):</a:t>
+            </a:r>
+          </a:p>
+          <a:p>
+            <a:r>
+              <a:t>  • Al entrar: Dala al final, después del último turno (minuto 110). Recorre la columna de la izquierda, los siete productos del semestre, y la flecha a «tareas del primer año». Subraya la caja azul: leer un plan y decidir si un índice sobra.</a:t>
+            </a:r>
+          </a:p>
+          <a:p>
+            <a:r>
+              <a:t>  • Banda del medio: Las herramientas: PostgreSQL en el navegador, Excalidraw o draw.io y Mermaid se usaron por equidad, porque funcionan en cualquier navegador. El SQL es el mismo de un servidor PostgreSQL de producción.</a:t>
+            </a:r>
+          </a:p>
+          <a:p>
+            <a:r>
+              <a:t>  • Banda amarilla: Lanza la autoevaluación y pide la respuesta escrita en el chat. Lee dos o tres en voz alta.</a:t>
+            </a:r>
+          </a:p>
+          <a:p/>
+          <a:p>
+            <a:r>
+              <a:t>EJEMPLO: Una respuesta útil: «separar nombre y apellido; lo noté en la Clase 6, cuando la búsqueda por apellido sobre un nombre completo no podía usar un índice».</a:t>
+            </a:r>
+          </a:p>
+          <a:p/>
+          <a:p>
+            <a:r>
+              <a:t>SI PREGUNTAN:</a:t>
+            </a:r>
+          </a:p>
+          <a:p>
+            <a:r>
+              <a:t>  • «¿Vale la pena guardar los scripts?» → Sí: son portafolio. El paquete (ER, DDL, roles, procedimientos, triggers y optimización) se muestra en una entrevista técnica mejor que un certificado.</a:t>
+            </a:r>
+          </a:p>
+          <a:p/>
+          <a:p>
+            <a:r>
+              <a:t>CUIDADO: No cierres con «¿qué aprendieron?»: da respuestas genéricas. La consigna concreta da material real para ajustar el curso el próximo semestre.</a:t>
+            </a:r>
+          </a:p>
+          <a:p/>
+          <a:p>
+            <a:r>
+              <a:t>PASA A LA SIGUIENTE: La lámina de cierre.</a:t>
+            </a:r>
+          </a:p>
+        </p:txBody>
+      </p:sp>
+      <p:sp>
+        <p:nvSpPr>
+          <p:cNvPr id="4" name="Slide Number Placeholder 3"/>
+          <p:cNvSpPr>
+            <a:spLocks noGrp="1"/>
+          </p:cNvSpPr>
+          <p:nvPr>
+            <p:ph type="sldNum" idx="5" sz="quarter"/>
+          </p:nvPr>
+        </p:nvSpPr>
+        <p:spPr/>
+      </p:sp>
+    </p:spTree>
+  </p:cSld>
+  <p:clrMapOvr>
+    <a:masterClrMapping/>
+  </p:clrMapOvr>
+</p:notes>
+</file>
+
+<file path=ppt/notesSlides/notesSlide8.xml><?xml version="1.0" encoding="utf-8"?>
+<p:notes xmlns:a="http://schemas.openxmlformats.org/drawingml/2006/main" xmlns:p="http://schemas.openxmlformats.org/presentationml/2006/main" xmlns:r="http://schemas.openxmlformats.org/officeDocument/2006/relationships">
+  <p:cSld>
+    <p:spTree>
+      <p:nvGrpSpPr>
+        <p:cNvPr id="1" name=""/>
+        <p:cNvGrpSpPr/>
+        <p:nvPr/>
+      </p:nvGrpSpPr>
+      <p:grpSpPr>
+        <a:xfrm>
+          <a:off x="0" y="0"/>
+          <a:ext cx="0" cy="0"/>
+          <a:chOff x="0" y="0"/>
+          <a:chExt cx="0" cy="0"/>
+        </a:xfrm>
+      </p:grpSpPr>
+      <p:sp>
+        <p:nvSpPr>
+          <p:cNvPr id="2" name="Slide Image Placeholder 1"/>
+          <p:cNvSpPr>
+            <a:spLocks noGrp="1"/>
+          </p:cNvSpPr>
+          <p:nvPr>
+            <p:ph type="sldImg" idx="2"/>
+          </p:nvPr>
+        </p:nvSpPr>
+        <p:spPr/>
+      </p:sp>
+      <p:sp>
+        <p:nvSpPr>
+          <p:cNvPr id="3" name="Notes Placeholder 2"/>
+          <p:cNvSpPr>
+            <a:spLocks noGrp="1"/>
+          </p:cNvSpPr>
+          <p:nvPr>
+            <p:ph type="body" idx="3" sz="quarter"/>
+          </p:nvPr>
+        </p:nvSpPr>
+        <p:spPr/>
+        <p:txBody>
+          <a:bodyPr/>
+          <a:lstStyle/>
+          <a:p>
+            <a:r>
+              <a:t>QUÉ ES (dilo así): Hoy no hay tema nuevo: es la sustentación en vivo del proyecto y el cierre del curso. Cada estudiante, o equipo, defiende sus decisiones en 5 a 8 minutos y responde preguntas al azar.</a:t>
+            </a:r>
+          </a:p>
+          <a:p/>
+          <a:p>
+            <a:r>
+              <a:t>CÓMO DARLA (≈2 min):</a:t>
+            </a:r>
+          </a:p>
+          <a:p>
+            <a:r>
+              <a:t>  • Al entrar: Lee la lámina y anuncia lo práctico: el orden de los turnos se sortea en un momento, el paquete tenía que estar subido antes del turno y la sustentación no se reemplaza por un video.</a:t>
+            </a:r>
+          </a:p>
+          <a:p>
+            <a:r>
+              <a:t>  • Antes del primer turno: Lee en voz alta el reparto de los 100 puntos del proyecto: 20 modelo y DDL, 15 seguridad y respaldo, 25 procedimientos, funciones y disparadores con pruebas, 15 optimización, 10 integración y 15 informe y sustentación. Vale el 20 % del Corte 3; el Parcial 3 vale 15 % y la asistencia 5 %. El proyecto no reemplaza al parcial.</a:t>
+            </a:r>
+          </a:p>
+          <a:p/>
+          <a:p>
+            <a:r>
+              <a:t>CUIDADO: Los 15 puntos de sustentación son la sexta parte, pero la sustentación es como se verifica que los otros 85 son de quien presenta. Dilo para evitar el reclamo de «solo vale 15».</a:t>
+            </a:r>
+          </a:p>
+          <a:p/>
+          <a:p>
+            <a:r>
+              <a:t>PASA A LA SIGUIENTE: Cómo se reparte el bloque de hoy.</a:t>
+            </a:r>
+          </a:p>
+        </p:txBody>
+      </p:sp>
+      <p:sp>
+        <p:nvSpPr>
+          <p:cNvPr id="4" name="Slide Number Placeholder 3"/>
+          <p:cNvSpPr>
+            <a:spLocks noGrp="1"/>
+          </p:cNvSpPr>
+          <p:nvPr>
+            <p:ph type="sldNum" idx="5" sz="quarter"/>
+          </p:nvPr>
+        </p:nvSpPr>
+        <p:spPr/>
+      </p:sp>
+    </p:spTree>
+  </p:cSld>
+  <p:clrMapOvr>
+    <a:masterClrMapping/>
+  </p:clrMapOvr>
+</p:notes>
+</file>
+
+<file path=ppt/notesSlides/notesSlide9.xml><?xml version="1.0" encoding="utf-8"?>
+<p:notes xmlns:a="http://schemas.openxmlformats.org/drawingml/2006/main" xmlns:p="http://schemas.openxmlformats.org/presentationml/2006/main" xmlns:r="http://schemas.openxmlformats.org/officeDocument/2006/relationships">
+  <p:cSld>
+    <p:spTree>
+      <p:nvGrpSpPr>
+        <p:cNvPr id="1" name=""/>
+        <p:cNvGrpSpPr/>
+        <p:nvPr/>
+      </p:nvGrpSpPr>
+      <p:grpSpPr>
+        <a:xfrm>
+          <a:off x="0" y="0"/>
+          <a:ext cx="0" cy="0"/>
+          <a:chOff x="0" y="0"/>
+          <a:chExt cx="0" cy="0"/>
+        </a:xfrm>
+      </p:grpSpPr>
+      <p:sp>
+        <p:nvSpPr>
+          <p:cNvPr id="2" name="Slide Image Placeholder 1"/>
+          <p:cNvSpPr>
+            <a:spLocks noGrp="1"/>
+          </p:cNvSpPr>
+          <p:nvPr>
+            <p:ph type="sldImg" idx="2"/>
+          </p:nvPr>
+        </p:nvSpPr>
+        <p:spPr/>
+      </p:sp>
+      <p:sp>
+        <p:nvSpPr>
+          <p:cNvPr id="3" name="Notes Placeholder 2"/>
+          <p:cNvSpPr>
+            <a:spLocks noGrp="1"/>
+          </p:cNvSpPr>
+          <p:nvPr>
+            <p:ph type="body" idx="3" sz="quarter"/>
+          </p:nvPr>
+        </p:nvSpPr>
+        <p:spPr/>
+        <p:txBody>
+          <a:bodyPr/>
+          <a:lstStyle/>
+          <a:p>
+            <a:r>
+              <a:t>QUÉ ES (dilo así): El bloque es casi todo turnos: encuadre y sorteo, sustentaciones con su Q&amp;A, y el cierre del curso al final.</a:t>
+            </a:r>
+          </a:p>
+          <a:p/>
+          <a:p>
+            <a:r>
+              <a:t>CÓMO DARLA (≈1 min):</a:t>
+            </a:r>
+          </a:p>
+          <a:p>
+            <a:r>
+              <a:t>  • Al entrar: Señala los tres tramos. Las láminas de concepto que siguen son lo que se va a preguntar: recórrelas en unos 12 minutos, así que los turnos empiezan hacia el minuto 15 y no en el 10.</a:t>
+            </a:r>
+          </a:p>
+          <a:p/>
+          <a:p>
+            <a:r>
+              <a:t>PASA A LA SIGUIENTE: Lo primero que hay que tener claro: sustentar no es describir.</a:t>
             </a:r>
           </a:p>
         </p:txBody>
@@ -4656,7 +5026,7 @@
                 </a:solidFill>
                 <a:latin typeface="Calibri"/>
               </a:rPr>
-              <a:t>Sustentacion en vivo del proyecto · cierre del curso</a:t>
+              <a:t>Sustentacion en vivo · cierre del curso</a:t>
             </a:r>
           </a:p>
         </p:txBody>
@@ -4844,14 +5214,83 @@
       </p:sp>
       <p:sp>
         <p:nvSpPr>
-          <p:cNvPr id="5" name="TextBox 4"/>
+          <p:cNvPr id="5" name="Rounded Rectangle 4"/>
+          <p:cNvSpPr/>
+          <p:nvPr/>
+        </p:nvSpPr>
+        <p:spPr>
+          <a:xfrm>
+            <a:off x="5797149" y="1343926"/>
+            <a:ext cx="6010497" cy="4837658"/>
+          </a:xfrm>
+          <a:prstGeom prst="roundRect">
+            <a:avLst>
+              <a:gd name="adj" fmla="val 4000"/>
+            </a:avLst>
+          </a:prstGeom>
+          <a:solidFill>
+            <a:srgbClr val="E8EEF4"/>
+          </a:solidFill>
+          <a:ln>
+            <a:noFill/>
+          </a:ln>
+        </p:spPr>
+        <p:style>
+          <a:lnRef idx="1">
+            <a:schemeClr val="accent1"/>
+          </a:lnRef>
+          <a:fillRef idx="3">
+            <a:schemeClr val="accent1"/>
+          </a:fillRef>
+          <a:effectRef idx="2">
+            <a:schemeClr val="accent1"/>
+          </a:effectRef>
+          <a:fontRef idx="minor">
+            <a:schemeClr val="lt1"/>
+          </a:fontRef>
+        </p:style>
+        <p:txBody>
+          <a:bodyPr rtlCol="0" anchor="ctr"/>
+          <a:lstStyle/>
+          <a:p>
+            <a:pPr algn="ctr"/>
+          </a:p>
+        </p:txBody>
+      </p:sp>
+      <p:pic>
+        <p:nvPicPr>
+          <p:cNvPr id="6" name="Picture 5" descr="ilus-cierre-curso-paso1.png"/>
+          <p:cNvPicPr>
+            <a:picLocks noChangeAspect="1"/>
+          </p:cNvPicPr>
+          <p:nvPr/>
+        </p:nvPicPr>
+        <p:blipFill>
+          <a:blip r:embed="rId2"/>
+          <a:stretch>
+            <a:fillRect/>
+          </a:stretch>
+        </p:blipFill>
+        <p:spPr>
+          <a:xfrm>
+            <a:off x="5870301" y="1417078"/>
+            <a:ext cx="5864193" cy="4691354"/>
+          </a:xfrm>
+          <a:prstGeom prst="rect">
+            <a:avLst/>
+          </a:prstGeom>
+        </p:spPr>
+      </p:pic>
+      <p:sp>
+        <p:nvSpPr>
+          <p:cNvPr id="7" name="TextBox 6"/>
           <p:cNvSpPr txBox="1"/>
           <p:nvPr/>
         </p:nvSpPr>
         <p:spPr>
           <a:xfrm>
-            <a:off x="457200" y="1170432"/>
-            <a:ext cx="11277295" cy="5230368"/>
+            <a:off x="457200" y="1353312"/>
+            <a:ext cx="5093061" cy="5047488"/>
           </a:xfrm>
           <a:prstGeom prst="rect">
             <a:avLst/>
@@ -4876,7 +5315,25 @@
                 </a:solidFill>
                 <a:latin typeface="Calibri"/>
               </a:rPr>
-              <a:t>–   El cierre del curso debe conectar lo hecho con el trabajo real.</a:t>
+              <a:t>–   Lo que hiciste (ER, DDL, roles, procedimientos, triggers, planes) es el </a:t>
+            </a:r>
+            <a:r>
+              <a:rPr sz="2000" b="1" i="0">
+                <a:solidFill>
+                  <a:srgbClr val="333333"/>
+                </a:solidFill>
+                <a:latin typeface="Calibri"/>
+              </a:rPr>
+              <a:t>trabajo de un primer empleo</a:t>
+            </a:r>
+            <a:r>
+              <a:rPr sz="2000" b="0" i="0">
+                <a:solidFill>
+                  <a:srgbClr val="333333"/>
+                </a:solidFill>
+                <a:latin typeface="Calibri"/>
+              </a:rPr>
+              <a:t>.</a:t>
             </a:r>
           </a:p>
           <a:p>
@@ -4892,7 +5349,25 @@
                 </a:solidFill>
                 <a:latin typeface="Calibri"/>
               </a:rPr>
-              <a:t>–   Leer un plan de ejecucion y decidir si un indice sobra es una habilidad que se paga.</a:t>
+              <a:t>–   Leer un plan de ejecución y decidir si un índice sobra es una </a:t>
+            </a:r>
+            <a:r>
+              <a:rPr sz="2000" b="1" i="0">
+                <a:solidFill>
+                  <a:srgbClr val="333333"/>
+                </a:solidFill>
+                <a:latin typeface="Calibri"/>
+              </a:rPr>
+              <a:t>habilidad que se paga</a:t>
+            </a:r>
+            <a:r>
+              <a:rPr sz="2000" b="0" i="0">
+                <a:solidFill>
+                  <a:srgbClr val="333333"/>
+                </a:solidFill>
+                <a:latin typeface="Calibri"/>
+              </a:rPr>
+              <a:t>.</a:t>
             </a:r>
           </a:p>
           <a:p>
@@ -4908,7 +5383,25 @@
                 </a:solidFill>
                 <a:latin typeface="Calibri"/>
               </a:rPr>
-              <a:t>–   El SQL que se escribio ahi es el mismo que corre en un servidor de produccion.</a:t>
+              <a:t>–   En producción cambian el </a:t>
+            </a:r>
+            <a:r>
+              <a:rPr sz="2000" b="1" i="0">
+                <a:solidFill>
+                  <a:srgbClr val="333333"/>
+                </a:solidFill>
+                <a:latin typeface="Calibri"/>
+              </a:rPr>
+              <a:t>volumen</a:t>
+            </a:r>
+            <a:r>
+              <a:rPr sz="2000" b="0" i="0">
+                <a:solidFill>
+                  <a:srgbClr val="333333"/>
+                </a:solidFill>
+                <a:latin typeface="Calibri"/>
+              </a:rPr>
+              <a:t> y el costo de un error; la sintaxis es la misma.</a:t>
             </a:r>
           </a:p>
           <a:p>
@@ -4924,14 +5417,32 @@
                 </a:solidFill>
                 <a:latin typeface="Calibri"/>
               </a:rPr>
-              <a:t>–   Y la autoevaluacion de la clase conviene pedirla con una consigna concreta en vez de una reflexion vaga.</a:t>
-            </a:r>
-          </a:p>
-        </p:txBody>
-      </p:sp>
-      <p:sp>
-        <p:nvSpPr>
-          <p:cNvPr id="6" name="TextBox 5"/>
+              <a:t>–   Autoevaluación: ¿qué decisión de modelado te costó más revertir, y </a:t>
+            </a:r>
+            <a:r>
+              <a:rPr sz="2000" b="1" i="0">
+                <a:solidFill>
+                  <a:srgbClr val="333333"/>
+                </a:solidFill>
+                <a:latin typeface="Calibri"/>
+              </a:rPr>
+              <a:t>en qué clase</a:t>
+            </a:r>
+            <a:r>
+              <a:rPr sz="2000" b="0" i="0">
+                <a:solidFill>
+                  <a:srgbClr val="333333"/>
+                </a:solidFill>
+                <a:latin typeface="Calibri"/>
+              </a:rPr>
+              <a:t> lo notaste?</a:t>
+            </a:r>
+          </a:p>
+        </p:txBody>
+      </p:sp>
+      <p:sp>
+        <p:nvSpPr>
+          <p:cNvPr id="8" name="TextBox 7"/>
           <p:cNvSpPr txBox="1"/>
           <p:nvPr/>
         </p:nvSpPr>
@@ -6846,7 +7357,25 @@
                 </a:solidFill>
                 <a:latin typeface="Calibri"/>
               </a:rPr>
-              <a:t>–   Sustentar una base de datos no es recorrer el diagrama entidad-relacion nombrando tablas.</a:t>
+              <a:t>–   Describir es decir </a:t>
+            </a:r>
+            <a:r>
+              <a:rPr sz="2000" b="1" i="0">
+                <a:solidFill>
+                  <a:srgbClr val="333333"/>
+                </a:solidFill>
+                <a:latin typeface="Calibri"/>
+              </a:rPr>
+              <a:t>qué hay</a:t>
+            </a:r>
+            <a:r>
+              <a:rPr sz="2000" b="0" i="0">
+                <a:solidFill>
+                  <a:srgbClr val="333333"/>
+                </a:solidFill>
+                <a:latin typeface="Calibri"/>
+              </a:rPr>
+              <a:t>: «tenemos dueño, mascota, cita, veterinario, insumo y factura».</a:t>
             </a:r>
           </a:p>
           <a:p>
@@ -6862,7 +7391,25 @@
                 </a:solidFill>
                 <a:latin typeface="Calibri"/>
               </a:rPr>
-              <a:t>–   Describir es decir que hay: «tenemos Dueno, Mascota, Cita, Veterinario, Insumo y Factura».</a:t>
+              <a:t>–   Sustentar es responder </a:t>
+            </a:r>
+            <a:r>
+              <a:rPr sz="2000" b="1" i="0">
+                <a:solidFill>
+                  <a:srgbClr val="333333"/>
+                </a:solidFill>
+                <a:latin typeface="Calibri"/>
+              </a:rPr>
+              <a:t>por qué quedó así</a:t>
+            </a:r>
+            <a:r>
+              <a:rPr sz="2000" b="0" i="0">
+                <a:solidFill>
+                  <a:srgbClr val="333333"/>
+                </a:solidFill>
+                <a:latin typeface="Calibri"/>
+              </a:rPr>
+              <a:t> y qué alternativa se descartó.</a:t>
             </a:r>
           </a:p>
           <a:p>
@@ -6878,7 +7425,25 @@
                 </a:solidFill>
                 <a:latin typeface="Calibri"/>
               </a:rPr>
-              <a:t>–   Sustentar es responder por que quedo asi y que alternativa se descarto.</a:t>
+              <a:t>–   En bases de datos importa más por el </a:t>
+            </a:r>
+            <a:r>
+              <a:rPr sz="2000" b="1" i="0">
+                <a:solidFill>
+                  <a:srgbClr val="333333"/>
+                </a:solidFill>
+                <a:latin typeface="Calibri"/>
+              </a:rPr>
+              <a:t>costo de revertir</a:t>
+            </a:r>
+            <a:r>
+              <a:rPr sz="2000" b="0" i="0">
+                <a:solidFill>
+                  <a:srgbClr val="333333"/>
+                </a:solidFill>
+                <a:latin typeface="Calibri"/>
+              </a:rPr>
+              <a:t>: cambiar un esquema con datos exige una migración.</a:t>
             </a:r>
           </a:p>
           <a:p>
@@ -6894,7 +7459,25 @@
                 </a:solidFill>
                 <a:latin typeface="Calibri"/>
               </a:rPr>
-              <a:t>–   La razon por la que esto importa mas en bases de datos que en casi cualquier otra parte del software es el costo de revertir.</a:t>
+              <a:t>–   Por eso cada decisión del modelo tiene que poder </a:t>
+            </a:r>
+            <a:r>
+              <a:rPr sz="2000" b="1" i="0">
+                <a:solidFill>
+                  <a:srgbClr val="333333"/>
+                </a:solidFill>
+                <a:latin typeface="Calibri"/>
+              </a:rPr>
+              <a:t>defenderse</a:t>
+            </a:r>
+            <a:r>
+              <a:rPr sz="2000" b="0" i="0">
+                <a:solidFill>
+                  <a:srgbClr val="333333"/>
+                </a:solidFill>
+                <a:latin typeface="Calibri"/>
+              </a:rPr>
+              <a:t> con dos o tres preguntas.</a:t>
             </a:r>
           </a:p>
         </p:txBody>
@@ -7426,7 +8009,25 @@
                 </a:solidFill>
                 <a:latin typeface="Calibri"/>
               </a:rPr>
-              <a:t>–   Hay cuatro preguntas de por que que se hacen casi siempre, y el estudiante debe llegar con las cuatro respondidas.</a:t>
+              <a:t>–   </a:t>
+            </a:r>
+            <a:r>
+              <a:rPr sz="2000" b="1" i="0">
+                <a:solidFill>
+                  <a:srgbClr val="333333"/>
+                </a:solidFill>
+                <a:latin typeface="Calibri"/>
+              </a:rPr>
+              <a:t>Normalización:</a:t>
+            </a:r>
+            <a:r>
+              <a:rPr sz="2000" b="0" i="0">
+                <a:solidFill>
+                  <a:srgbClr val="333333"/>
+                </a:solidFill>
+                <a:latin typeface="Calibri"/>
+              </a:rPr>
+              <a:t> tercera forma normal, y la desnormalización deliberada declarada con su razón.</a:t>
             </a:r>
           </a:p>
           <a:p>
@@ -7442,7 +8043,25 @@
                 </a:solidFill>
                 <a:latin typeface="Calibri"/>
               </a:rPr>
-              <a:t>–   Por que esa normalizacion: la respuesta esperada es que el modelo esta en tercera forma normal.</a:t>
+              <a:t>–   </a:t>
+            </a:r>
+            <a:r>
+              <a:rPr sz="2000" b="1" i="0">
+                <a:solidFill>
+                  <a:srgbClr val="333333"/>
+                </a:solidFill>
+                <a:latin typeface="Calibri"/>
+              </a:rPr>
+              <a:t>Índice:</a:t>
+            </a:r>
+            <a:r>
+              <a:rPr sz="2000" b="0" i="0">
+                <a:solidFill>
+                  <a:srgbClr val="333333"/>
+                </a:solidFill>
+                <a:latin typeface="Calibri"/>
+              </a:rPr>
+              <a:t> la consulta que lo aprovecha y la medición de antes y después.</a:t>
             </a:r>
           </a:p>
           <a:p>
@@ -7458,7 +8077,25 @@
                 </a:solidFill>
                 <a:latin typeface="Calibri"/>
               </a:rPr>
-              <a:t>–   Y a continuacion se declara la desnormalizacion deliberada si existe.</a:t>
+              <a:t>–   </a:t>
+            </a:r>
+            <a:r>
+              <a:rPr sz="2000" b="1" i="0">
+                <a:solidFill>
+                  <a:srgbClr val="333333"/>
+                </a:solidFill>
+                <a:latin typeface="Calibri"/>
+              </a:rPr>
+              <a:t>Tipo de dato:</a:t>
+            </a:r>
+            <a:r>
+              <a:rPr sz="2000" b="0" i="0">
+                <a:solidFill>
+                  <a:srgbClr val="333333"/>
+                </a:solidFill>
+                <a:latin typeface="Calibri"/>
+              </a:rPr>
+              <a:t> fecha en TIMESTAMP, teléfono en VARCHAR (no se suma y conserva el cero inicial).</a:t>
             </a:r>
           </a:p>
           <a:p>
@@ -7474,7 +8111,25 @@
                 </a:solidFill>
                 <a:latin typeface="Calibri"/>
               </a:rPr>
-              <a:t>–   Por que ese indice: la respuesta debe nombrar la consulta concreta que lo aprovecha, por ejemplo un indice sobre (id_veterinario</a:t>
+              <a:t>–   </a:t>
+            </a:r>
+            <a:r>
+              <a:rPr sz="2000" b="1" i="0">
+                <a:solidFill>
+                  <a:srgbClr val="333333"/>
+                </a:solidFill>
+                <a:latin typeface="Calibri"/>
+              </a:rPr>
+              <a:t>Disparador:</a:t>
+            </a:r>
+            <a:r>
+              <a:rPr sz="2000" b="0" i="0">
+                <a:solidFill>
+                  <a:srgbClr val="333333"/>
+                </a:solidFill>
+                <a:latin typeface="Calibri"/>
+              </a:rPr>
+              <a:t> por qué la regla vive ahí y no en la aplicación.</a:t>
             </a:r>
           </a:p>
         </p:txBody>
@@ -8035,7 +8690,25 @@
                 </a:solidFill>
                 <a:latin typeface="Calibri"/>
               </a:rPr>
-              <a:t>–   Un disparador, o trigger, es un bloque de codigo que el motor ejecuta automaticamente cuando ocurre un evento sobre una tabla, sin que nadie lo…</a:t>
+              <a:t>–   Un </a:t>
+            </a:r>
+            <a:r>
+              <a:rPr sz="2000" b="1" i="0">
+                <a:solidFill>
+                  <a:srgbClr val="333333"/>
+                </a:solidFill>
+                <a:latin typeface="Calibri"/>
+              </a:rPr>
+              <a:t>disparador</a:t>
+            </a:r>
+            <a:r>
+              <a:rPr sz="2000" b="0" i="0">
+                <a:solidFill>
+                  <a:srgbClr val="333333"/>
+                </a:solidFill>
+                <a:latin typeface="Calibri"/>
+              </a:rPr>
+              <a:t> (trigger) lo ejecuta el motor solo, cuando ocurre un evento sobre una tabla.</a:t>
             </a:r>
           </a:p>
           <a:p>
@@ -8051,7 +8724,25 @@
                 </a:solidFill>
                 <a:latin typeface="Calibri"/>
               </a:rPr>
-              <a:t>–   El argumento a favor, y el unico que vale en una sustentacion, es la cobertura: el disparador se ejecuta no importa quien escriba.</a:t>
+              <a:t>–   Su argumento es la </a:t>
+            </a:r>
+            <a:r>
+              <a:rPr sz="2000" b="1" i="0">
+                <a:solidFill>
+                  <a:srgbClr val="333333"/>
+                </a:solidFill>
+                <a:latin typeface="Calibri"/>
+              </a:rPr>
+              <a:t>cobertura</a:t>
+            </a:r>
+            <a:r>
+              <a:rPr sz="2000" b="0" i="0">
+                <a:solidFill>
+                  <a:srgbClr val="333333"/>
+                </a:solidFill>
+                <a:latin typeface="Calibri"/>
+              </a:rPr>
+              <a:t>: se cumple escriba la aplicación, un script de carga o alguien a mano.</a:t>
             </a:r>
           </a:p>
           <a:p>
@@ -8067,7 +8758,7 @@
                 </a:solidFill>
                 <a:latin typeface="Calibri"/>
               </a:rPr>
-              <a:t>–   Si la regla «el stock de un insumo nunca queda negativo» vive en el disparador.</a:t>
+              <a:t>–   Si la regla vive en la aplicación, el script y el cliente SQL la evaden sin esfuerzo.</a:t>
             </a:r>
           </a:p>
           <a:p>
@@ -8083,7 +8774,25 @@
                 </a:solidFill>
                 <a:latin typeface="Calibri"/>
               </a:rPr>
-              <a:t>–   Lo mismo aplica al disparador de auditoria de precios.</a:t>
+              <a:t>–   El contra-argumento: es </a:t>
+            </a:r>
+            <a:r>
+              <a:rPr sz="2000" b="1" i="0">
+                <a:solidFill>
+                  <a:srgbClr val="333333"/>
+                </a:solidFill>
+                <a:latin typeface="Calibri"/>
+              </a:rPr>
+              <a:t>lógica invisible</a:t>
+            </a:r>
+            <a:r>
+              <a:rPr sz="2000" b="0" i="0">
+                <a:solidFill>
+                  <a:srgbClr val="333333"/>
+                </a:solidFill>
+                <a:latin typeface="Calibri"/>
+              </a:rPr>
+              <a:t>, así que se reserva para integridad y auditoría.</a:t>
             </a:r>
           </a:p>
         </p:txBody>
@@ -8591,7 +9300,25 @@
                 </a:solidFill>
                 <a:latin typeface="Calibri"/>
               </a:rPr>
-              <a:t>–   Un proyecto de base de datos es reproducible si un tercero, con solo el archivo comprimido y sin hablar con el autor, obtiene la misma base…</a:t>
+              <a:t>–   Es </a:t>
+            </a:r>
+            <a:r>
+              <a:rPr sz="2000" b="1" i="0">
+                <a:solidFill>
+                  <a:srgbClr val="333333"/>
+                </a:solidFill>
+                <a:latin typeface="Calibri"/>
+              </a:rPr>
+              <a:t>reproducible</a:t>
+            </a:r>
+            <a:r>
+              <a:rPr sz="2000" b="0" i="0">
+                <a:solidFill>
+                  <a:srgbClr val="333333"/>
+                </a:solidFill>
+                <a:latin typeface="Calibri"/>
+              </a:rPr>
+              <a:t> si un tercero, solo con el archivo y sin hablar con el autor, llega a la misma base.</a:t>
             </a:r>
           </a:p>
           <a:p>
@@ -8607,7 +9334,25 @@
                 </a:solidFill>
                 <a:latin typeface="Calibri"/>
               </a:rPr>
-              <a:t>–   La estructura que la garantiza es una carpeta con archivos numerados en el orden exacto de ejecucion.</a:t>
+              <a:t>–   Los archivos van </a:t>
+            </a:r>
+            <a:r>
+              <a:rPr sz="2000" b="1" i="0">
+                <a:solidFill>
+                  <a:srgbClr val="333333"/>
+                </a:solidFill>
+                <a:latin typeface="Calibri"/>
+              </a:rPr>
+              <a:t>numerados</a:t>
+            </a:r>
+            <a:r>
+              <a:rPr sz="2000" b="0" i="0">
+                <a:solidFill>
+                  <a:srgbClr val="333333"/>
+                </a:solidFill>
+                <a:latin typeface="Calibri"/>
+              </a:rPr>
+              <a:t> en el orden de ejecución, del 00_LEEME.txt al 08_pruebas.sql.</a:t>
             </a:r>
           </a:p>
           <a:p>
@@ -8623,7 +9368,59 @@
                 </a:solidFill>
                 <a:latin typeface="Calibri"/>
               </a:rPr>
-              <a:t>–   El orden no es estetico, es una dependencia real: una tabla con clave foranea no se puede crear antes que la tabla a la que apunta.</a:t>
+              <a:t>–   El orden es </a:t>
+            </a:r>
+            <a:r>
+              <a:rPr sz="2000" b="1" i="0">
+                <a:solidFill>
+                  <a:srgbClr val="333333"/>
+                </a:solidFill>
+                <a:latin typeface="Calibri"/>
+              </a:rPr>
+              <a:t>dependencia</a:t>
+            </a:r>
+            <a:r>
+              <a:rPr sz="2000" b="0" i="0">
+                <a:solidFill>
+                  <a:srgbClr val="333333"/>
+                </a:solidFill>
+                <a:latin typeface="Calibri"/>
+              </a:rPr>
+              <a:t>: la FK necesita su tabla y el trigger no se crea sin ella.</a:t>
+            </a:r>
+          </a:p>
+          <a:p>
+            <a:pPr>
+              <a:spcAft>
+                <a:spcPts val="800"/>
+              </a:spcAft>
+            </a:pPr>
+            <a:r>
+              <a:rPr sz="2000" b="0" i="0">
+                <a:solidFill>
+                  <a:srgbClr val="333333"/>
+                </a:solidFill>
+                <a:latin typeface="Calibri"/>
+              </a:rPr>
+              <a:t>–   El LEEME declara </a:t>
+            </a:r>
+            <a:r>
+              <a:rPr sz="2000" b="1" i="0">
+                <a:solidFill>
+                  <a:srgbClr val="333333"/>
+                </a:solidFill>
+                <a:latin typeface="Calibri"/>
+              </a:rPr>
+              <a:t>motor y versión</a:t>
+            </a:r>
+            <a:r>
+              <a:rPr sz="2000" b="0" i="0">
+                <a:solidFill>
+                  <a:srgbClr val="333333"/>
+                </a:solidFill>
+                <a:latin typeface="Calibri"/>
+              </a:rPr>
+              <a:t>, el orden, una consulta de verificación y los límites.</a:t>
             </a:r>
           </a:p>
         </p:txBody>
@@ -9131,7 +9928,25 @@
                 </a:solidFill>
                 <a:latin typeface="Calibri"/>
               </a:rPr>
-              <a:t>–   La sustentacion dura de 5 a 8 minutos y ese limite obliga a decidir que se deja fuera.</a:t>
+              <a:t>–   El límite de </a:t>
+            </a:r>
+            <a:r>
+              <a:rPr sz="2000" b="1" i="0">
+                <a:solidFill>
+                  <a:srgbClr val="333333"/>
+                </a:solidFill>
+                <a:latin typeface="Calibri"/>
+              </a:rPr>
+              <a:t>5 a 8 minutos</a:t>
+            </a:r>
+            <a:r>
+              <a:rPr sz="2000" b="0" i="0">
+                <a:solidFill>
+                  <a:srgbClr val="333333"/>
+                </a:solidFill>
+                <a:latin typeface="Calibri"/>
+              </a:rPr>
+              <a:t> obliga a decidir qué se deja fuera.</a:t>
             </a:r>
           </a:p>
           <a:p>
@@ -9147,7 +9962,43 @@
                 </a:solidFill>
                 <a:latin typeface="Calibri"/>
               </a:rPr>
-              <a:t>–   El reparto que funciona, y que es convencion y no regla dura, es: 45 segundos para el problema de la clínica en lenguaje de negocio, sin una sola…</a:t>
+              <a:t>–   Primero se cuenta: el </a:t>
+            </a:r>
+            <a:r>
+              <a:rPr sz="2000" b="1" i="0">
+                <a:solidFill>
+                  <a:srgbClr val="333333"/>
+                </a:solidFill>
+                <a:latin typeface="Calibri"/>
+              </a:rPr>
+              <a:t>problema</a:t>
+            </a:r>
+            <a:r>
+              <a:rPr sz="2000" b="0" i="0">
+                <a:solidFill>
+                  <a:srgbClr val="333333"/>
+                </a:solidFill>
+                <a:latin typeface="Calibri"/>
+              </a:rPr>
+              <a:t> en lenguaje de negocio (45 s) y el </a:t>
+            </a:r>
+            <a:r>
+              <a:rPr sz="2000" b="1" i="0">
+                <a:solidFill>
+                  <a:srgbClr val="333333"/>
+                </a:solidFill>
+                <a:latin typeface="Calibri"/>
+              </a:rPr>
+              <a:t>modelo</a:t>
+            </a:r>
+            <a:r>
+              <a:rPr sz="2000" b="0" i="0">
+                <a:solidFill>
+                  <a:srgbClr val="333333"/>
+                </a:solidFill>
+                <a:latin typeface="Calibri"/>
+              </a:rPr>
+              <a:t> con dos decisiones (90 s).</a:t>
             </a:r>
           </a:p>
           <a:p>
@@ -9163,7 +10014,59 @@
                 </a:solidFill>
                 <a:latin typeface="Calibri"/>
               </a:rPr>
-              <a:t>–   90 segundos para el modelo, mostrando el ER y justificando dos decisiones y no las quince.</a:t>
+              <a:t>–   Luego se demuestra </a:t>
+            </a:r>
+            <a:r>
+              <a:rPr sz="2000" b="1" i="0">
+                <a:solidFill>
+                  <a:srgbClr val="333333"/>
+                </a:solidFill>
+                <a:latin typeface="Calibri"/>
+              </a:rPr>
+              <a:t>ejecutando</a:t>
+            </a:r>
+            <a:r>
+              <a:rPr sz="2000" b="0" i="0">
+                <a:solidFill>
+                  <a:srgbClr val="333333"/>
+                </a:solidFill>
+                <a:latin typeface="Calibri"/>
+              </a:rPr>
+              <a:t>: seguridad, automatización con caso válido e inválido, y optimización.</a:t>
+            </a:r>
+          </a:p>
+          <a:p>
+            <a:pPr>
+              <a:spcAft>
+                <a:spcPts val="800"/>
+              </a:spcAft>
+            </a:pPr>
+            <a:r>
+              <a:rPr sz="2000" b="0" i="0">
+                <a:solidFill>
+                  <a:srgbClr val="333333"/>
+                </a:solidFill>
+                <a:latin typeface="Calibri"/>
+              </a:rPr>
+              <a:t>–   Cierra la integración con su </a:t>
+            </a:r>
+            <a:r>
+              <a:rPr sz="2000" b="1" i="0">
+                <a:solidFill>
+                  <a:srgbClr val="333333"/>
+                </a:solidFill>
+                <a:latin typeface="Calibri"/>
+              </a:rPr>
+              <a:t>punto débil</a:t>
+            </a:r>
+            <a:r>
+              <a:rPr sz="2000" b="0" i="0">
+                <a:solidFill>
+                  <a:srgbClr val="333333"/>
+                </a:solidFill>
+                <a:latin typeface="Calibri"/>
+              </a:rPr>
+              <a:t> declarado y 30 s finales: unos 7 minutos.</a:t>
             </a:r>
           </a:p>
         </p:txBody>
@@ -9671,7 +10574,25 @@
                 </a:solidFill>
                 <a:latin typeface="Calibri"/>
               </a:rPr>
-              <a:t>–   «Por que nombre y apellido separados y no un solo campo nombre_completo?».</a:t>
+              <a:t>–   Una buena respuesta tiene tres partes: la </a:t>
+            </a:r>
+            <a:r>
+              <a:rPr sz="2000" b="1" i="0">
+                <a:solidFill>
+                  <a:srgbClr val="333333"/>
+                </a:solidFill>
+                <a:latin typeface="Calibri"/>
+              </a:rPr>
+              <a:t>decisión</a:t>
+            </a:r>
+            <a:r>
+              <a:rPr sz="2000" b="0" i="0">
+                <a:solidFill>
+                  <a:srgbClr val="333333"/>
+                </a:solidFill>
+                <a:latin typeface="Calibri"/>
+              </a:rPr>
+              <a:t>, la alternativa descartada y la razón.</a:t>
             </a:r>
           </a:p>
           <a:p>
@@ -9687,7 +10608,25 @@
                 </a:solidFill>
                 <a:latin typeface="Calibri"/>
               </a:rPr>
-              <a:t>–   «Que pasa si un dueno tiene dos mascotas llamadas Pelusa?»: nada, porque la identidad la da id_mascota y no el nombre</a:t>
+              <a:t>–   ¿Dos mascotas llamadas Pelusa? Nada: la identidad la da </a:t>
+            </a:r>
+            <a:r>
+              <a:rPr sz="2000" b="1" i="0">
+                <a:solidFill>
+                  <a:srgbClr val="333333"/>
+                </a:solidFill>
+                <a:latin typeface="Calibri"/>
+              </a:rPr>
+              <a:t>id_mascota</a:t>
+            </a:r>
+            <a:r>
+              <a:rPr sz="2000" b="0" i="0">
+                <a:solidFill>
+                  <a:srgbClr val="333333"/>
+                </a:solidFill>
+                <a:latin typeface="Calibri"/>
+              </a:rPr>
+              <a:t>, no el nombre.</a:t>
             </a:r>
           </a:p>
           <a:p>
@@ -9703,7 +10642,59 @@
                 </a:solidFill>
                 <a:latin typeface="Calibri"/>
               </a:rPr>
-              <a:t>–   Y si se quisiera prohibirlo habria que declarar UNIQUE (id_dueno, nombre), decision que el estudiante debe poder defender en cualquiera de los dos…</a:t>
+              <a:t>–   ¿Por qué no borrar las citas canceladas? Son historia del negocio: se usa </a:t>
+            </a:r>
+            <a:r>
+              <a:rPr sz="2000" b="1" i="0">
+                <a:solidFill>
+                  <a:srgbClr val="333333"/>
+                </a:solidFill>
+                <a:latin typeface="Calibri"/>
+              </a:rPr>
+              <a:t>borrado lógico</a:t>
+            </a:r>
+            <a:r>
+              <a:rPr sz="2000" b="0" i="0">
+                <a:solidFill>
+                  <a:srgbClr val="333333"/>
+                </a:solidFill>
+                <a:latin typeface="Calibri"/>
+              </a:rPr>
+              <a:t>.</a:t>
+            </a:r>
+          </a:p>
+          <a:p>
+            <a:pPr>
+              <a:spcAft>
+                <a:spcPts val="800"/>
+              </a:spcAft>
+            </a:pPr>
+            <a:r>
+              <a:rPr sz="2000" b="0" i="0">
+                <a:solidFill>
+                  <a:srgbClr val="333333"/>
+                </a:solidFill>
+                <a:latin typeface="Calibri"/>
+              </a:rPr>
+              <a:t>–   «No lo medimos» vale si se dice </a:t>
+            </a:r>
+            <a:r>
+              <a:rPr sz="2000" b="1" i="0">
+                <a:solidFill>
+                  <a:srgbClr val="333333"/>
+                </a:solidFill>
+                <a:latin typeface="Calibri"/>
+              </a:rPr>
+              <a:t>cómo se mediría</a:t>
+            </a:r>
+            <a:r>
+              <a:rPr sz="2000" b="0" i="0">
+                <a:solidFill>
+                  <a:srgbClr val="333333"/>
+                </a:solidFill>
+                <a:latin typeface="Calibri"/>
+              </a:rPr>
+              <a:t>; inventar un número, no.</a:t>
             </a:r>
           </a:p>
         </p:txBody>
